--- a/Sororin_mechanism_flowchart.pptx
+++ b/Sororin_mechanism_flowchart.pptx
@@ -5,14 +5,17 @@
     <p:sldMasterId id="2147483648" r:id="rId1"/>
   </p:sldMasterIdLst>
   <p:notesMasterIdLst>
-    <p:notesMasterId r:id="rId7"/>
+    <p:notesMasterId r:id="rId10"/>
   </p:notesMasterIdLst>
   <p:sldIdLst>
     <p:sldId id="256" r:id="rId2"/>
     <p:sldId id="257" r:id="rId3"/>
     <p:sldId id="258" r:id="rId4"/>
     <p:sldId id="259" r:id="rId5"/>
-    <p:sldId id="260" r:id="rId6"/>
+    <p:sldId id="261" r:id="rId6"/>
+    <p:sldId id="262" r:id="rId7"/>
+    <p:sldId id="263" r:id="rId8"/>
+    <p:sldId id="260" r:id="rId9"/>
   </p:sldIdLst>
   <p:sldSz cx="12188825" cy="6858000"/>
   <p:notesSz cx="6858000" cy="12188825"/>
@@ -111,6 +114,11 @@
       </a:defRPr>
     </a:lvl9pPr>
   </p:defaultTextStyle>
+  <p:extLst>
+    <p:ext uri="{EFAFB233-063F-42B5-8137-9DF3F51BA10A}">
+      <p15:sldGuideLst xmlns:p15="http://schemas.microsoft.com/office/powerpoint/2012/main"/>
+    </p:ext>
+  </p:extLst>
 </p:presentation>
 </file>
 
@@ -1390,7 +1398,7 @@
                 <a:latin typeface="+mn-lt"/>
                 <a:ea typeface="+mn-ea"/>
               </a:rPr>
-              <a:t>5</a:t>
+              <a:t>8</a:t>
             </a:fld>
             <a:endParaRPr lang="en-US" sz="1200" b="0" u="none" strike="noStrike">
               <a:solidFill>
@@ -2726,7 +2734,7 @@
                 </a:tabLst>
               </a:pPr>
               <a:r>
-                <a:rPr lang="en-US" sz="1200" b="1" dirty="0" err="1">
+                <a:rPr lang="en-US" sz="1200" b="1" dirty="0">
                   <a:solidFill>
                     <a:srgbClr val="2166AC"/>
                   </a:solidFill>
@@ -2734,18 +2742,6 @@
                   <a:ea typeface="Calibri"/>
                 </a:rPr>
                 <a:t>C</a:t>
-              </a:r>
-              <a:r>
-                <a:rPr lang="en-US" sz="1200" b="1" u="none" strike="noStrike" dirty="0" err="1">
-                  <a:solidFill>
-                    <a:srgbClr val="2166AC"/>
-                  </a:solidFill>
-                  <a:effectLst/>
-                  <a:uFillTx/>
-                  <a:latin typeface="Calibri"/>
-                  <a:ea typeface="Calibri"/>
-                </a:rPr>
-                <a:t>ohesin</a:t>
               </a:r>
               <a:r>
                 <a:rPr lang="en-US" sz="1200" b="1" u="none" strike="noStrike" dirty="0">
@@ -2757,7 +2753,7 @@
                   <a:latin typeface="Calibri"/>
                   <a:ea typeface="Calibri"/>
                 </a:rPr>
-                <a:t> ring</a:t>
+                <a:t>ohesin ring</a:t>
               </a:r>
               <a:endParaRPr lang="en-US" sz="1200" b="0" u="none" strike="noStrike" dirty="0">
                 <a:solidFill>
@@ -3273,7 +3269,7 @@
               <a:t>when Sororin is switched off, WAPL takes the seat → opens the ring → </a:t>
             </a:r>
             <a:r>
-              <a:rPr lang="en-US" sz="1200" dirty="0" err="1">
+              <a:rPr lang="en-US" sz="1200" dirty="0">
                 <a:solidFill>
                   <a:srgbClr val="7B1616"/>
                 </a:solidFill>
@@ -3282,7 +3278,7 @@
               <a:t>C</a:t>
             </a:r>
             <a:r>
-              <a:rPr lang="en-US" sz="1200" b="0" strike="noStrike" dirty="0" err="1">
+              <a:rPr lang="en-US" sz="1200" b="0" strike="noStrike" dirty="0">
                 <a:solidFill>
                   <a:srgbClr val="7B1616"/>
                 </a:solidFill>
@@ -3290,18 +3286,7 @@
                 <a:uFillTx/>
                 <a:latin typeface="Calibri"/>
               </a:rPr>
-              <a:t>ohesin</a:t>
-            </a:r>
-            <a:r>
-              <a:rPr lang="en-US" sz="1200" b="0" strike="noStrike" dirty="0">
-                <a:solidFill>
-                  <a:srgbClr val="7B1616"/>
-                </a:solidFill>
-                <a:effectLst/>
-                <a:uFillTx/>
-                <a:latin typeface="Calibri"/>
-              </a:rPr>
-              <a:t> falls off → sisters can separate</a:t>
+              <a:t>ohesin falls off → sisters can separate</a:t>
             </a:r>
             <a:endParaRPr lang="en-US" sz="1200" b="0" strike="noStrike" dirty="0">
               <a:solidFill>
@@ -5672,7 +5657,7 @@
               <a:t>Sororin (green) docks on Pds5 → </a:t>
             </a:r>
             <a:r>
-              <a:rPr lang="en-US" sz="1300" dirty="0" err="1">
+              <a:rPr lang="en-US" sz="1300" dirty="0">
                 <a:solidFill>
                   <a:srgbClr val="2C3E50"/>
                 </a:solidFill>
@@ -5682,7 +5667,7 @@
               <a:t>C</a:t>
             </a:r>
             <a:r>
-              <a:rPr lang="en-US" sz="1300" b="0" u="none" strike="noStrike" dirty="0" err="1">
+              <a:rPr lang="en-US" sz="1300" b="0" u="none" strike="noStrike" dirty="0">
                 <a:solidFill>
                   <a:srgbClr val="2C3E50"/>
                 </a:solidFill>
@@ -5691,19 +5676,7 @@
                 <a:latin typeface="Calibri"/>
                 <a:ea typeface="Calibri"/>
               </a:rPr>
-              <a:t>ohesin</a:t>
-            </a:r>
-            <a:r>
-              <a:rPr lang="en-US" sz="1300" b="0" u="none" strike="noStrike" dirty="0">
-                <a:solidFill>
-                  <a:srgbClr val="2C3E50"/>
-                </a:solidFill>
-                <a:effectLst/>
-                <a:uFillTx/>
-                <a:latin typeface="Calibri"/>
-                <a:ea typeface="Calibri"/>
-              </a:rPr>
-              <a:t> ring CLOSED, sisters glued.    </a:t>
+              <a:t>ohesin ring CLOSED, sisters glued.    </a:t>
             </a:r>
             <a:r>
               <a:rPr lang="en-US" sz="1300" b="1" u="none" strike="noStrike" dirty="0">
@@ -6097,7 +6070,7 @@
               </a:tabLst>
             </a:pPr>
             <a:r>
-              <a:rPr lang="en-US" sz="1400" b="1" u="none" strike="noStrike">
+              <a:rPr lang="en-US" sz="1400" b="1" u="none" strike="noStrike" dirty="0">
                 <a:solidFill>
                   <a:srgbClr val="FFFFFF"/>
                 </a:solidFill>
@@ -6107,7 +6080,7 @@
               </a:rPr>
               <a:t>Cohesin ring traps the two sister chromatids</a:t>
             </a:r>
-            <a:endParaRPr lang="en-US" sz="1400" b="0" u="none" strike="noStrike">
+            <a:endParaRPr lang="en-US" sz="1400" b="0" u="none" strike="noStrike" dirty="0">
               <a:solidFill>
                 <a:srgbClr val="FFFFFF"/>
               </a:solidFill>
@@ -6126,7 +6099,7 @@
               </a:tabLst>
             </a:pPr>
             <a:r>
-              <a:rPr lang="en-US" sz="1100" b="0" u="none" strike="noStrike">
+              <a:rPr lang="en-US" sz="1100" b="0" u="none" strike="noStrike" dirty="0">
                 <a:solidFill>
                   <a:srgbClr val="E8F0F8"/>
                 </a:solidFill>
@@ -6136,7 +6109,7 @@
               </a:rPr>
               <a:t>SMC1A · SMC3 · RAD21 · STAG1/2  +  PDS5 (docking subunit)</a:t>
             </a:r>
-            <a:endParaRPr lang="en-US" sz="1100" b="0" u="none" strike="noStrike">
+            <a:endParaRPr lang="en-US" sz="1100" b="0" u="none" strike="noStrike" dirty="0">
               <a:solidFill>
                 <a:srgbClr val="FFFFFF"/>
               </a:solidFill>
@@ -7125,7 +7098,7 @@
               <a:t>Sororin OFF  →  WAPL binds PDS5  →  </a:t>
             </a:r>
             <a:r>
-              <a:rPr lang="en-US" sz="1400" b="1" dirty="0" err="1">
+              <a:rPr lang="en-US" sz="1400" b="1" dirty="0">
                 <a:solidFill>
                   <a:srgbClr val="FFFFFF"/>
                 </a:solidFill>
@@ -7134,7 +7107,7 @@
               <a:t>C</a:t>
             </a:r>
             <a:r>
-              <a:rPr lang="en-US" sz="1400" b="1" u="none" strike="noStrike" dirty="0" err="1">
+              <a:rPr lang="en-US" sz="1400" b="1" u="none" strike="noStrike" dirty="0">
                 <a:solidFill>
                   <a:srgbClr val="FFFFFF"/>
                 </a:solidFill>
@@ -7142,18 +7115,7 @@
                 <a:uFillTx/>
                 <a:latin typeface="Calibri"/>
               </a:rPr>
-              <a:t>ohesin</a:t>
-            </a:r>
-            <a:r>
-              <a:rPr lang="en-US" sz="1400" b="1" u="none" strike="noStrike" dirty="0">
-                <a:solidFill>
-                  <a:srgbClr val="FFFFFF"/>
-                </a:solidFill>
-                <a:effectLst/>
-                <a:uFillTx/>
-                <a:latin typeface="Calibri"/>
-              </a:rPr>
-              <a:t> ring OPENS</a:t>
+              <a:t>ohesin ring OPENS</a:t>
             </a:r>
             <a:endParaRPr lang="en-US" sz="1400" b="0" u="none" strike="noStrike" dirty="0">
               <a:solidFill>
@@ -8089,6 +8051,7103 @@
       </p:grpSpPr>
       <p:sp>
         <p:nvSpPr>
+          <p:cNvPr id="10" name="Text 0"/>
+          <p:cNvSpPr/>
+          <p:nvPr/>
+        </p:nvSpPr>
+        <p:spPr>
+          <a:xfrm>
+            <a:off x="320040" y="128160"/>
+            <a:ext cx="11521080" cy="456840"/>
+          </a:xfrm>
+          <a:prstGeom prst="rect">
+            <a:avLst/>
+          </a:prstGeom>
+          <a:noFill/>
+          <a:ln w="0">
+            <a:noFill/>
+          </a:ln>
+        </p:spPr>
+        <p:style>
+          <a:lnRef idx="0">
+            <a:scrgbClr r="0" g="0" b="0"/>
+          </a:lnRef>
+          <a:fillRef idx="0">
+            <a:scrgbClr r="0" g="0" b="0"/>
+          </a:fillRef>
+          <a:effectRef idx="0">
+            <a:scrgbClr r="0" g="0" b="0"/>
+          </a:effectRef>
+          <a:fontRef idx="minor"/>
+        </p:style>
+        <p:txBody>
+          <a:bodyPr lIns="90000" tIns="45000" rIns="90000" bIns="45000" anchor="ctr">
+            <a:noAutofit/>
+          </a:bodyPr>
+          <a:lstStyle/>
+          <a:p>
+            <a:pPr algn="ctr" defTabSz="914400">
+              <a:lnSpc>
+                <a:spcPct val="100000"/>
+              </a:lnSpc>
+              <a:tabLst>
+                <a:tab pos="0" algn="l"/>
+              </a:tabLst>
+            </a:pPr>
+            <a:r>
+              <a:rPr lang="en-US" sz="2400" b="1" u="none" strike="noStrike" dirty="0">
+                <a:solidFill>
+                  <a:srgbClr val="2C3E50"/>
+                </a:solidFill>
+                <a:effectLst/>
+                <a:uFillTx/>
+                <a:latin typeface="Cambria"/>
+                <a:ea typeface="Cambria"/>
+              </a:rPr>
+              <a:t>Result 1: Sororin sits in a dense </a:t>
+            </a:r>
+            <a:r>
+              <a:rPr lang="en-US" sz="2400" b="1" u="none" strike="noStrike" dirty="0" err="1">
+                <a:solidFill>
+                  <a:srgbClr val="2C3E50"/>
+                </a:solidFill>
+                <a:effectLst/>
+                <a:uFillTx/>
+                <a:latin typeface="Cambria"/>
+                <a:ea typeface="Cambria"/>
+              </a:rPr>
+              <a:t>cohesin</a:t>
+            </a:r>
+            <a:r>
+              <a:rPr lang="en-US" sz="2400" b="1" u="none" strike="noStrike" dirty="0">
+                <a:solidFill>
+                  <a:srgbClr val="2C3E50"/>
+                </a:solidFill>
+                <a:effectLst/>
+                <a:uFillTx/>
+                <a:latin typeface="Cambria"/>
+                <a:ea typeface="Cambria"/>
+              </a:rPr>
+              <a:t> network</a:t>
+            </a:r>
+            <a:endParaRPr lang="en-US" sz="2400" b="0" u="none" strike="noStrike" dirty="0">
+              <a:solidFill>
+                <a:srgbClr val="000000"/>
+              </a:solidFill>
+              <a:effectLst/>
+              <a:uFillTx/>
+              <a:latin typeface="Arial"/>
+            </a:endParaRPr>
+          </a:p>
+        </p:txBody>
+      </p:sp>
+      <p:pic>
+        <p:nvPicPr>
+          <p:cNvPr id="11" name="Image 0" descr="/tmp/assets/fig1_net.png"/>
+          <p:cNvPicPr/>
+          <p:nvPr/>
+        </p:nvPicPr>
+        <p:blipFill>
+          <a:blip r:embed="rId2"/>
+          <a:stretch/>
+        </p:blipFill>
+        <p:spPr>
+          <a:xfrm>
+            <a:off x="320040" y="822960"/>
+            <a:ext cx="4626360" cy="3748680"/>
+          </a:xfrm>
+          <a:prstGeom prst="rect">
+            <a:avLst/>
+          </a:prstGeom>
+          <a:noFill/>
+          <a:ln w="0">
+            <a:noFill/>
+          </a:ln>
+        </p:spPr>
+      </p:pic>
+      <p:sp>
+        <p:nvSpPr>
+          <p:cNvPr id="12" name="Text 1"/>
+          <p:cNvSpPr/>
+          <p:nvPr/>
+        </p:nvSpPr>
+        <p:spPr>
+          <a:xfrm>
+            <a:off x="320040" y="4553640"/>
+            <a:ext cx="4845960" cy="319680"/>
+          </a:xfrm>
+          <a:prstGeom prst="rect">
+            <a:avLst/>
+          </a:prstGeom>
+          <a:noFill/>
+          <a:ln w="0">
+            <a:noFill/>
+          </a:ln>
+        </p:spPr>
+        <p:style>
+          <a:lnRef idx="0">
+            <a:scrgbClr r="0" g="0" b="0"/>
+          </a:lnRef>
+          <a:fillRef idx="0">
+            <a:scrgbClr r="0" g="0" b="0"/>
+          </a:fillRef>
+          <a:effectRef idx="0">
+            <a:scrgbClr r="0" g="0" b="0"/>
+          </a:effectRef>
+          <a:fontRef idx="minor"/>
+        </p:style>
+        <p:txBody>
+          <a:bodyPr lIns="90000" tIns="45000" rIns="90000" bIns="45000" anchor="ctr">
+            <a:noAutofit/>
+          </a:bodyPr>
+          <a:lstStyle/>
+          <a:p>
+            <a:pPr algn="ctr" defTabSz="914400">
+              <a:lnSpc>
+                <a:spcPct val="100000"/>
+              </a:lnSpc>
+              <a:tabLst>
+                <a:tab pos="0" algn="l"/>
+              </a:tabLst>
+            </a:pPr>
+            <a:r>
+              <a:rPr lang="en-US" sz="900" b="0" i="1" u="none" strike="noStrike" dirty="0">
+                <a:solidFill>
+                  <a:srgbClr val="5A6B7B"/>
+                </a:solidFill>
+                <a:effectLst/>
+                <a:uFillTx/>
+                <a:latin typeface="Calibri"/>
+                <a:ea typeface="Calibri"/>
+              </a:rPr>
+              <a:t>Figure 1 — STRING interaction network (dashed red = literature-curated ERK2/SPOP).</a:t>
+            </a:r>
+            <a:endParaRPr lang="en-US" sz="900" b="0" u="none" strike="noStrike" dirty="0">
+              <a:solidFill>
+                <a:srgbClr val="000000"/>
+              </a:solidFill>
+              <a:effectLst/>
+              <a:uFillTx/>
+              <a:latin typeface="Arial"/>
+            </a:endParaRPr>
+          </a:p>
+        </p:txBody>
+      </p:sp>
+      <p:sp>
+        <p:nvSpPr>
+          <p:cNvPr id="13" name="Text 2"/>
+          <p:cNvSpPr/>
+          <p:nvPr/>
+        </p:nvSpPr>
+        <p:spPr>
+          <a:xfrm>
+            <a:off x="5623560" y="822960"/>
+            <a:ext cx="6217560" cy="776880"/>
+          </a:xfrm>
+          <a:prstGeom prst="roundRect">
+            <a:avLst>
+              <a:gd name="adj" fmla="val 5882"/>
+            </a:avLst>
+          </a:prstGeom>
+          <a:solidFill>
+            <a:srgbClr val="DCE7F3"/>
+          </a:solidFill>
+          <a:ln w="12700">
+            <a:solidFill>
+              <a:srgbClr val="2166AC"/>
+            </a:solidFill>
+            <a:round/>
+          </a:ln>
+        </p:spPr>
+        <p:style>
+          <a:lnRef idx="0">
+            <a:scrgbClr r="0" g="0" b="0"/>
+          </a:lnRef>
+          <a:fillRef idx="0">
+            <a:scrgbClr r="0" g="0" b="0"/>
+          </a:fillRef>
+          <a:effectRef idx="0">
+            <a:scrgbClr r="0" g="0" b="0"/>
+          </a:effectRef>
+          <a:fontRef idx="minor"/>
+        </p:style>
+        <p:txBody>
+          <a:bodyPr lIns="63360" tIns="63360" rIns="63360" bIns="63360" anchor="ctr">
+            <a:noAutofit/>
+          </a:bodyPr>
+          <a:lstStyle/>
+          <a:p>
+            <a:pPr algn="ctr" defTabSz="914400">
+              <a:lnSpc>
+                <a:spcPct val="100000"/>
+              </a:lnSpc>
+              <a:tabLst>
+                <a:tab pos="0" algn="l"/>
+              </a:tabLst>
+            </a:pPr>
+            <a:r>
+              <a:rPr lang="en-US" sz="1400" b="1" u="none" strike="noStrike" dirty="0">
+                <a:solidFill>
+                  <a:srgbClr val="2C3E50"/>
+                </a:solidFill>
+                <a:effectLst/>
+                <a:uFillTx/>
+                <a:latin typeface="Calibri"/>
+              </a:rPr>
+              <a:t>16 nodes  ·  107 edges  ·  density 0.89</a:t>
+            </a:r>
+            <a:endParaRPr lang="en-US" sz="1400" b="0" u="none" strike="noStrike" dirty="0">
+              <a:solidFill>
+                <a:srgbClr val="000000"/>
+              </a:solidFill>
+              <a:effectLst/>
+              <a:uFillTx/>
+              <a:latin typeface="Arial"/>
+            </a:endParaRPr>
+          </a:p>
+          <a:p>
+            <a:pPr algn="ctr" defTabSz="914400">
+              <a:lnSpc>
+                <a:spcPct val="100000"/>
+              </a:lnSpc>
+              <a:tabLst>
+                <a:tab pos="0" algn="l"/>
+              </a:tabLst>
+            </a:pPr>
+            <a:r>
+              <a:rPr lang="en-US" sz="1300" b="1" u="none" strike="noStrike" dirty="0">
+                <a:solidFill>
+                  <a:srgbClr val="2166AC"/>
+                </a:solidFill>
+                <a:effectLst/>
+                <a:uFillTx/>
+                <a:latin typeface="Calibri"/>
+              </a:rPr>
+              <a:t>Sororin degree = 15 of 15  (a hub)</a:t>
+            </a:r>
+            <a:endParaRPr lang="en-US" sz="1300" b="0" u="none" strike="noStrike" dirty="0">
+              <a:solidFill>
+                <a:srgbClr val="000000"/>
+              </a:solidFill>
+              <a:effectLst/>
+              <a:uFillTx/>
+              <a:latin typeface="Arial"/>
+            </a:endParaRPr>
+          </a:p>
+        </p:txBody>
+      </p:sp>
+      <p:graphicFrame>
+        <p:nvGraphicFramePr>
+          <p:cNvPr id="14" name="Table 0"/>
+          <p:cNvGraphicFramePr/>
+          <p:nvPr/>
+        </p:nvGraphicFramePr>
+        <p:xfrm>
+          <a:off x="5623560" y="1737360"/>
+          <a:ext cx="6217920" cy="2362200"/>
+        </p:xfrm>
+        <a:graphic>
+          <a:graphicData uri="http://schemas.openxmlformats.org/drawingml/2006/table">
+            <a:tbl>
+              <a:tblPr/>
+              <a:tblGrid>
+                <a:gridCol w="1554480">
+                  <a:extLst>
+                    <a:ext uri="{9D8B030D-6E8A-4147-A177-3AD203B41FA5}">
+                      <a16:colId xmlns:a16="http://schemas.microsoft.com/office/drawing/2014/main" val="20000"/>
+                    </a:ext>
+                  </a:extLst>
+                </a:gridCol>
+                <a:gridCol w="3108960">
+                  <a:extLst>
+                    <a:ext uri="{9D8B030D-6E8A-4147-A177-3AD203B41FA5}">
+                      <a16:colId xmlns:a16="http://schemas.microsoft.com/office/drawing/2014/main" val="20001"/>
+                    </a:ext>
+                  </a:extLst>
+                </a:gridCol>
+                <a:gridCol w="1554480">
+                  <a:extLst>
+                    <a:ext uri="{9D8B030D-6E8A-4147-A177-3AD203B41FA5}">
+                      <a16:colId xmlns:a16="http://schemas.microsoft.com/office/drawing/2014/main" val="20002"/>
+                    </a:ext>
+                  </a:extLst>
+                </a:gridCol>
+              </a:tblGrid>
+              <a:tr h="219240">
+                <a:tc>
+                  <a:txBody>
+                    <a:bodyPr/>
+                    <a:lstStyle/>
+                    <a:p>
+                      <a:pPr defTabSz="914400">
+                        <a:lnSpc>
+                          <a:spcPct val="100000"/>
+                        </a:lnSpc>
+                        <a:tabLst>
+                          <a:tab pos="0" algn="l"/>
+                        </a:tabLst>
+                      </a:pPr>
+                      <a:r>
+                        <a:rPr lang="en-US" sz="950" b="1" u="none" strike="noStrike" dirty="0">
+                          <a:solidFill>
+                            <a:srgbClr val="FFFFFF"/>
+                          </a:solidFill>
+                          <a:effectLst/>
+                          <a:uFillTx/>
+                          <a:latin typeface="Calibri"/>
+                          <a:ea typeface="Calibri"/>
+                        </a:rPr>
+                        <a:t>Partner</a:t>
+                      </a:r>
+                      <a:endParaRPr lang="en-US" sz="950" b="0" u="none" strike="noStrike" dirty="0">
+                        <a:solidFill>
+                          <a:srgbClr val="FFFFFF"/>
+                        </a:solidFill>
+                        <a:effectLst/>
+                        <a:uFillTx/>
+                        <a:latin typeface="Arial"/>
+                      </a:endParaRPr>
+                    </a:p>
+                  </a:txBody>
+                  <a:tcPr anchor="ctr">
+                    <a:lnL w="6480">
+                      <a:solidFill>
+                        <a:srgbClr val="D0D0D0"/>
+                      </a:solidFill>
+                      <a:prstDash val="solid"/>
+                    </a:lnL>
+                    <a:lnR w="6480">
+                      <a:solidFill>
+                        <a:srgbClr val="D0D0D0"/>
+                      </a:solidFill>
+                      <a:prstDash val="solid"/>
+                    </a:lnR>
+                    <a:lnT w="6480">
+                      <a:solidFill>
+                        <a:srgbClr val="D0D0D0"/>
+                      </a:solidFill>
+                      <a:prstDash val="solid"/>
+                    </a:lnT>
+                    <a:lnB w="6480">
+                      <a:solidFill>
+                        <a:srgbClr val="D0D0D0"/>
+                      </a:solidFill>
+                      <a:prstDash val="solid"/>
+                    </a:lnB>
+                    <a:solidFill>
+                      <a:srgbClr val="2C3E50"/>
+                    </a:solidFill>
+                  </a:tcPr>
+                </a:tc>
+                <a:tc>
+                  <a:txBody>
+                    <a:bodyPr/>
+                    <a:lstStyle/>
+                    <a:p>
+                      <a:pPr defTabSz="914400">
+                        <a:lnSpc>
+                          <a:spcPct val="100000"/>
+                        </a:lnSpc>
+                        <a:tabLst>
+                          <a:tab pos="0" algn="l"/>
+                        </a:tabLst>
+                      </a:pPr>
+                      <a:r>
+                        <a:rPr lang="en-US" sz="950" b="1" u="none" strike="noStrike">
+                          <a:solidFill>
+                            <a:srgbClr val="FFFFFF"/>
+                          </a:solidFill>
+                          <a:effectLst/>
+                          <a:uFillTx/>
+                          <a:latin typeface="Calibri"/>
+                          <a:ea typeface="Calibri"/>
+                        </a:rPr>
+                        <a:t>Functional class</a:t>
+                      </a:r>
+                      <a:endParaRPr lang="en-US" sz="950" b="0" u="none" strike="noStrike">
+                        <a:solidFill>
+                          <a:srgbClr val="FFFFFF"/>
+                        </a:solidFill>
+                        <a:effectLst/>
+                        <a:uFillTx/>
+                        <a:latin typeface="Arial"/>
+                      </a:endParaRPr>
+                    </a:p>
+                  </a:txBody>
+                  <a:tcPr anchor="ctr">
+                    <a:lnL w="6480">
+                      <a:solidFill>
+                        <a:srgbClr val="D0D0D0"/>
+                      </a:solidFill>
+                      <a:prstDash val="solid"/>
+                    </a:lnL>
+                    <a:lnR w="6480">
+                      <a:solidFill>
+                        <a:srgbClr val="D0D0D0"/>
+                      </a:solidFill>
+                      <a:prstDash val="solid"/>
+                    </a:lnR>
+                    <a:lnT w="6480">
+                      <a:solidFill>
+                        <a:srgbClr val="D0D0D0"/>
+                      </a:solidFill>
+                      <a:prstDash val="solid"/>
+                    </a:lnT>
+                    <a:lnB w="6480">
+                      <a:solidFill>
+                        <a:srgbClr val="D0D0D0"/>
+                      </a:solidFill>
+                      <a:prstDash val="solid"/>
+                    </a:lnB>
+                    <a:solidFill>
+                      <a:srgbClr val="2C3E50"/>
+                    </a:solidFill>
+                  </a:tcPr>
+                </a:tc>
+                <a:tc>
+                  <a:txBody>
+                    <a:bodyPr/>
+                    <a:lstStyle/>
+                    <a:p>
+                      <a:pPr defTabSz="914400">
+                        <a:lnSpc>
+                          <a:spcPct val="100000"/>
+                        </a:lnSpc>
+                        <a:tabLst>
+                          <a:tab pos="0" algn="l"/>
+                        </a:tabLst>
+                      </a:pPr>
+                      <a:r>
+                        <a:rPr lang="en-US" sz="950" b="1" u="none" strike="noStrike">
+                          <a:solidFill>
+                            <a:srgbClr val="FFFFFF"/>
+                          </a:solidFill>
+                          <a:effectLst/>
+                          <a:uFillTx/>
+                          <a:latin typeface="Calibri"/>
+                          <a:ea typeface="Calibri"/>
+                        </a:rPr>
+                        <a:t>STRING</a:t>
+                      </a:r>
+                      <a:endParaRPr lang="en-US" sz="950" b="0" u="none" strike="noStrike">
+                        <a:solidFill>
+                          <a:srgbClr val="FFFFFF"/>
+                        </a:solidFill>
+                        <a:effectLst/>
+                        <a:uFillTx/>
+                        <a:latin typeface="Arial"/>
+                      </a:endParaRPr>
+                    </a:p>
+                  </a:txBody>
+                  <a:tcPr anchor="ctr">
+                    <a:lnL w="6480">
+                      <a:solidFill>
+                        <a:srgbClr val="D0D0D0"/>
+                      </a:solidFill>
+                      <a:prstDash val="solid"/>
+                    </a:lnL>
+                    <a:lnR w="6480">
+                      <a:solidFill>
+                        <a:srgbClr val="D0D0D0"/>
+                      </a:solidFill>
+                      <a:prstDash val="solid"/>
+                    </a:lnR>
+                    <a:lnT w="6480">
+                      <a:solidFill>
+                        <a:srgbClr val="D0D0D0"/>
+                      </a:solidFill>
+                      <a:prstDash val="solid"/>
+                    </a:lnT>
+                    <a:lnB w="6480">
+                      <a:solidFill>
+                        <a:srgbClr val="D0D0D0"/>
+                      </a:solidFill>
+                      <a:prstDash val="solid"/>
+                    </a:lnB>
+                    <a:solidFill>
+                      <a:srgbClr val="2C3E50"/>
+                    </a:solidFill>
+                  </a:tcPr>
+                </a:tc>
+                <a:extLst>
+                  <a:ext uri="{0D108BD9-81ED-4DB2-BD59-A6C34878D82A}">
+                    <a16:rowId xmlns:a16="http://schemas.microsoft.com/office/drawing/2014/main" val="10000"/>
+                  </a:ext>
+                </a:extLst>
+              </a:tr>
+              <a:tr h="219240">
+                <a:tc>
+                  <a:txBody>
+                    <a:bodyPr/>
+                    <a:lstStyle/>
+                    <a:p>
+                      <a:pPr defTabSz="914400">
+                        <a:lnSpc>
+                          <a:spcPct val="100000"/>
+                        </a:lnSpc>
+                        <a:tabLst>
+                          <a:tab pos="0" algn="l"/>
+                        </a:tabLst>
+                      </a:pPr>
+                      <a:r>
+                        <a:rPr lang="en-US" sz="950" b="0" u="none" strike="noStrike">
+                          <a:solidFill>
+                            <a:srgbClr val="2C3E50"/>
+                          </a:solidFill>
+                          <a:effectLst/>
+                          <a:uFillTx/>
+                          <a:latin typeface="Calibri"/>
+                          <a:ea typeface="Calibri"/>
+                        </a:rPr>
+                        <a:t>PDS5A</a:t>
+                      </a:r>
+                      <a:endParaRPr lang="en-US" sz="950" b="0" u="none" strike="noStrike">
+                        <a:solidFill>
+                          <a:srgbClr val="000000"/>
+                        </a:solidFill>
+                        <a:effectLst/>
+                        <a:uFillTx/>
+                        <a:latin typeface="Arial"/>
+                      </a:endParaRPr>
+                    </a:p>
+                  </a:txBody>
+                  <a:tcPr anchor="ctr">
+                    <a:lnL w="6480">
+                      <a:solidFill>
+                        <a:srgbClr val="D0D0D0"/>
+                      </a:solidFill>
+                      <a:prstDash val="solid"/>
+                    </a:lnL>
+                    <a:lnR w="6480">
+                      <a:solidFill>
+                        <a:srgbClr val="D0D0D0"/>
+                      </a:solidFill>
+                      <a:prstDash val="solid"/>
+                    </a:lnR>
+                    <a:lnT w="6480">
+                      <a:solidFill>
+                        <a:srgbClr val="D0D0D0"/>
+                      </a:solidFill>
+                      <a:prstDash val="solid"/>
+                    </a:lnT>
+                    <a:lnB w="6480">
+                      <a:solidFill>
+                        <a:srgbClr val="D0D0D0"/>
+                      </a:solidFill>
+                      <a:prstDash val="solid"/>
+                    </a:lnB>
+                    <a:noFill/>
+                  </a:tcPr>
+                </a:tc>
+                <a:tc>
+                  <a:txBody>
+                    <a:bodyPr/>
+                    <a:lstStyle/>
+                    <a:p>
+                      <a:pPr defTabSz="914400">
+                        <a:lnSpc>
+                          <a:spcPct val="100000"/>
+                        </a:lnSpc>
+                        <a:tabLst>
+                          <a:tab pos="0" algn="l"/>
+                        </a:tabLst>
+                      </a:pPr>
+                      <a:r>
+                        <a:rPr lang="en-US" sz="950" b="0" u="none" strike="noStrike" dirty="0">
+                          <a:solidFill>
+                            <a:srgbClr val="2C3E50"/>
+                          </a:solidFill>
+                          <a:effectLst/>
+                          <a:uFillTx/>
+                          <a:latin typeface="Calibri"/>
+                          <a:ea typeface="Calibri"/>
+                        </a:rPr>
+                        <a:t>Cohesin regulator</a:t>
+                      </a:r>
+                      <a:endParaRPr lang="en-US" sz="950" b="0" u="none" strike="noStrike" dirty="0">
+                        <a:solidFill>
+                          <a:srgbClr val="000000"/>
+                        </a:solidFill>
+                        <a:effectLst/>
+                        <a:uFillTx/>
+                        <a:latin typeface="Arial"/>
+                      </a:endParaRPr>
+                    </a:p>
+                  </a:txBody>
+                  <a:tcPr anchor="ctr">
+                    <a:lnL w="6480">
+                      <a:solidFill>
+                        <a:srgbClr val="D0D0D0"/>
+                      </a:solidFill>
+                      <a:prstDash val="solid"/>
+                    </a:lnL>
+                    <a:lnR w="6480">
+                      <a:solidFill>
+                        <a:srgbClr val="D0D0D0"/>
+                      </a:solidFill>
+                      <a:prstDash val="solid"/>
+                    </a:lnR>
+                    <a:lnT w="6480">
+                      <a:solidFill>
+                        <a:srgbClr val="D0D0D0"/>
+                      </a:solidFill>
+                      <a:prstDash val="solid"/>
+                    </a:lnT>
+                    <a:lnB w="6480">
+                      <a:solidFill>
+                        <a:srgbClr val="D0D0D0"/>
+                      </a:solidFill>
+                      <a:prstDash val="solid"/>
+                    </a:lnB>
+                    <a:noFill/>
+                  </a:tcPr>
+                </a:tc>
+                <a:tc>
+                  <a:txBody>
+                    <a:bodyPr/>
+                    <a:lstStyle/>
+                    <a:p>
+                      <a:pPr defTabSz="914400">
+                        <a:lnSpc>
+                          <a:spcPct val="100000"/>
+                        </a:lnSpc>
+                        <a:tabLst>
+                          <a:tab pos="0" algn="l"/>
+                        </a:tabLst>
+                      </a:pPr>
+                      <a:r>
+                        <a:rPr lang="en-US" sz="950" b="0" u="none" strike="noStrike">
+                          <a:solidFill>
+                            <a:srgbClr val="2C3E50"/>
+                          </a:solidFill>
+                          <a:effectLst/>
+                          <a:uFillTx/>
+                          <a:latin typeface="Calibri"/>
+                          <a:ea typeface="Calibri"/>
+                        </a:rPr>
+                        <a:t>0.999</a:t>
+                      </a:r>
+                      <a:endParaRPr lang="en-US" sz="950" b="0" u="none" strike="noStrike">
+                        <a:solidFill>
+                          <a:srgbClr val="000000"/>
+                        </a:solidFill>
+                        <a:effectLst/>
+                        <a:uFillTx/>
+                        <a:latin typeface="Arial"/>
+                      </a:endParaRPr>
+                    </a:p>
+                  </a:txBody>
+                  <a:tcPr anchor="ctr">
+                    <a:lnL w="6480">
+                      <a:solidFill>
+                        <a:srgbClr val="D0D0D0"/>
+                      </a:solidFill>
+                      <a:prstDash val="solid"/>
+                    </a:lnL>
+                    <a:lnR w="6480">
+                      <a:solidFill>
+                        <a:srgbClr val="D0D0D0"/>
+                      </a:solidFill>
+                      <a:prstDash val="solid"/>
+                    </a:lnR>
+                    <a:lnT w="6480">
+                      <a:solidFill>
+                        <a:srgbClr val="D0D0D0"/>
+                      </a:solidFill>
+                      <a:prstDash val="solid"/>
+                    </a:lnT>
+                    <a:lnB w="6480">
+                      <a:solidFill>
+                        <a:srgbClr val="D0D0D0"/>
+                      </a:solidFill>
+                      <a:prstDash val="solid"/>
+                    </a:lnB>
+                    <a:noFill/>
+                  </a:tcPr>
+                </a:tc>
+                <a:extLst>
+                  <a:ext uri="{0D108BD9-81ED-4DB2-BD59-A6C34878D82A}">
+                    <a16:rowId xmlns:a16="http://schemas.microsoft.com/office/drawing/2014/main" val="10001"/>
+                  </a:ext>
+                </a:extLst>
+              </a:tr>
+              <a:tr h="219240">
+                <a:tc>
+                  <a:txBody>
+                    <a:bodyPr/>
+                    <a:lstStyle/>
+                    <a:p>
+                      <a:pPr defTabSz="914400">
+                        <a:lnSpc>
+                          <a:spcPct val="100000"/>
+                        </a:lnSpc>
+                        <a:tabLst>
+                          <a:tab pos="0" algn="l"/>
+                        </a:tabLst>
+                      </a:pPr>
+                      <a:r>
+                        <a:rPr lang="en-US" sz="950" b="0" u="none" strike="noStrike">
+                          <a:solidFill>
+                            <a:srgbClr val="2C3E50"/>
+                          </a:solidFill>
+                          <a:effectLst/>
+                          <a:uFillTx/>
+                          <a:latin typeface="Calibri"/>
+                          <a:ea typeface="Calibri"/>
+                        </a:rPr>
+                        <a:t>WAPL</a:t>
+                      </a:r>
+                      <a:endParaRPr lang="en-US" sz="950" b="0" u="none" strike="noStrike">
+                        <a:solidFill>
+                          <a:srgbClr val="000000"/>
+                        </a:solidFill>
+                        <a:effectLst/>
+                        <a:uFillTx/>
+                        <a:latin typeface="Arial"/>
+                      </a:endParaRPr>
+                    </a:p>
+                  </a:txBody>
+                  <a:tcPr anchor="ctr">
+                    <a:lnL w="6480">
+                      <a:solidFill>
+                        <a:srgbClr val="D0D0D0"/>
+                      </a:solidFill>
+                      <a:prstDash val="solid"/>
+                    </a:lnL>
+                    <a:lnR w="6480">
+                      <a:solidFill>
+                        <a:srgbClr val="D0D0D0"/>
+                      </a:solidFill>
+                      <a:prstDash val="solid"/>
+                    </a:lnR>
+                    <a:lnT w="6480">
+                      <a:solidFill>
+                        <a:srgbClr val="D0D0D0"/>
+                      </a:solidFill>
+                      <a:prstDash val="solid"/>
+                    </a:lnT>
+                    <a:lnB w="6480">
+                      <a:solidFill>
+                        <a:srgbClr val="D0D0D0"/>
+                      </a:solidFill>
+                      <a:prstDash val="solid"/>
+                    </a:lnB>
+                    <a:noFill/>
+                  </a:tcPr>
+                </a:tc>
+                <a:tc>
+                  <a:txBody>
+                    <a:bodyPr/>
+                    <a:lstStyle/>
+                    <a:p>
+                      <a:pPr defTabSz="914400">
+                        <a:lnSpc>
+                          <a:spcPct val="100000"/>
+                        </a:lnSpc>
+                        <a:tabLst>
+                          <a:tab pos="0" algn="l"/>
+                        </a:tabLst>
+                      </a:pPr>
+                      <a:r>
+                        <a:rPr lang="en-US" sz="950" b="0" u="none" strike="noStrike" dirty="0">
+                          <a:solidFill>
+                            <a:srgbClr val="2C3E50"/>
+                          </a:solidFill>
+                          <a:effectLst/>
+                          <a:uFillTx/>
+                          <a:latin typeface="Calibri"/>
+                          <a:ea typeface="Calibri"/>
+                        </a:rPr>
+                        <a:t>Cohesin (release)</a:t>
+                      </a:r>
+                      <a:endParaRPr lang="en-US" sz="950" b="0" u="none" strike="noStrike" dirty="0">
+                        <a:solidFill>
+                          <a:srgbClr val="000000"/>
+                        </a:solidFill>
+                        <a:effectLst/>
+                        <a:uFillTx/>
+                        <a:latin typeface="Arial"/>
+                      </a:endParaRPr>
+                    </a:p>
+                  </a:txBody>
+                  <a:tcPr anchor="ctr">
+                    <a:lnL w="6480">
+                      <a:solidFill>
+                        <a:srgbClr val="D0D0D0"/>
+                      </a:solidFill>
+                      <a:prstDash val="solid"/>
+                    </a:lnL>
+                    <a:lnR w="6480">
+                      <a:solidFill>
+                        <a:srgbClr val="D0D0D0"/>
+                      </a:solidFill>
+                      <a:prstDash val="solid"/>
+                    </a:lnR>
+                    <a:lnT w="6480">
+                      <a:solidFill>
+                        <a:srgbClr val="D0D0D0"/>
+                      </a:solidFill>
+                      <a:prstDash val="solid"/>
+                    </a:lnT>
+                    <a:lnB w="6480">
+                      <a:solidFill>
+                        <a:srgbClr val="D0D0D0"/>
+                      </a:solidFill>
+                      <a:prstDash val="solid"/>
+                    </a:lnB>
+                    <a:noFill/>
+                  </a:tcPr>
+                </a:tc>
+                <a:tc>
+                  <a:txBody>
+                    <a:bodyPr/>
+                    <a:lstStyle/>
+                    <a:p>
+                      <a:pPr defTabSz="914400">
+                        <a:lnSpc>
+                          <a:spcPct val="100000"/>
+                        </a:lnSpc>
+                        <a:tabLst>
+                          <a:tab pos="0" algn="l"/>
+                        </a:tabLst>
+                      </a:pPr>
+                      <a:r>
+                        <a:rPr lang="en-US" sz="950" b="0" u="none" strike="noStrike">
+                          <a:solidFill>
+                            <a:srgbClr val="2C3E50"/>
+                          </a:solidFill>
+                          <a:effectLst/>
+                          <a:uFillTx/>
+                          <a:latin typeface="Calibri"/>
+                          <a:ea typeface="Calibri"/>
+                        </a:rPr>
+                        <a:t>0.998</a:t>
+                      </a:r>
+                      <a:endParaRPr lang="en-US" sz="950" b="0" u="none" strike="noStrike">
+                        <a:solidFill>
+                          <a:srgbClr val="000000"/>
+                        </a:solidFill>
+                        <a:effectLst/>
+                        <a:uFillTx/>
+                        <a:latin typeface="Arial"/>
+                      </a:endParaRPr>
+                    </a:p>
+                  </a:txBody>
+                  <a:tcPr anchor="ctr">
+                    <a:lnL w="6480">
+                      <a:solidFill>
+                        <a:srgbClr val="D0D0D0"/>
+                      </a:solidFill>
+                      <a:prstDash val="solid"/>
+                    </a:lnL>
+                    <a:lnR w="6480">
+                      <a:solidFill>
+                        <a:srgbClr val="D0D0D0"/>
+                      </a:solidFill>
+                      <a:prstDash val="solid"/>
+                    </a:lnR>
+                    <a:lnT w="6480">
+                      <a:solidFill>
+                        <a:srgbClr val="D0D0D0"/>
+                      </a:solidFill>
+                      <a:prstDash val="solid"/>
+                    </a:lnT>
+                    <a:lnB w="6480">
+                      <a:solidFill>
+                        <a:srgbClr val="D0D0D0"/>
+                      </a:solidFill>
+                      <a:prstDash val="solid"/>
+                    </a:lnB>
+                    <a:noFill/>
+                  </a:tcPr>
+                </a:tc>
+                <a:extLst>
+                  <a:ext uri="{0D108BD9-81ED-4DB2-BD59-A6C34878D82A}">
+                    <a16:rowId xmlns:a16="http://schemas.microsoft.com/office/drawing/2014/main" val="10002"/>
+                  </a:ext>
+                </a:extLst>
+              </a:tr>
+              <a:tr h="219240">
+                <a:tc>
+                  <a:txBody>
+                    <a:bodyPr/>
+                    <a:lstStyle/>
+                    <a:p>
+                      <a:pPr defTabSz="914400">
+                        <a:lnSpc>
+                          <a:spcPct val="100000"/>
+                        </a:lnSpc>
+                        <a:tabLst>
+                          <a:tab pos="0" algn="l"/>
+                        </a:tabLst>
+                      </a:pPr>
+                      <a:r>
+                        <a:rPr lang="en-US" sz="950" b="0" u="none" strike="noStrike">
+                          <a:solidFill>
+                            <a:srgbClr val="2C3E50"/>
+                          </a:solidFill>
+                          <a:effectLst/>
+                          <a:uFillTx/>
+                          <a:latin typeface="Calibri"/>
+                          <a:ea typeface="Calibri"/>
+                        </a:rPr>
+                        <a:t>SMC3</a:t>
+                      </a:r>
+                      <a:endParaRPr lang="en-US" sz="950" b="0" u="none" strike="noStrike">
+                        <a:solidFill>
+                          <a:srgbClr val="000000"/>
+                        </a:solidFill>
+                        <a:effectLst/>
+                        <a:uFillTx/>
+                        <a:latin typeface="Arial"/>
+                      </a:endParaRPr>
+                    </a:p>
+                  </a:txBody>
+                  <a:tcPr anchor="ctr">
+                    <a:lnL w="6480">
+                      <a:solidFill>
+                        <a:srgbClr val="D0D0D0"/>
+                      </a:solidFill>
+                      <a:prstDash val="solid"/>
+                    </a:lnL>
+                    <a:lnR w="6480">
+                      <a:solidFill>
+                        <a:srgbClr val="D0D0D0"/>
+                      </a:solidFill>
+                      <a:prstDash val="solid"/>
+                    </a:lnR>
+                    <a:lnT w="6480">
+                      <a:solidFill>
+                        <a:srgbClr val="D0D0D0"/>
+                      </a:solidFill>
+                      <a:prstDash val="solid"/>
+                    </a:lnT>
+                    <a:lnB w="6480">
+                      <a:solidFill>
+                        <a:srgbClr val="D0D0D0"/>
+                      </a:solidFill>
+                      <a:prstDash val="solid"/>
+                    </a:lnB>
+                    <a:noFill/>
+                  </a:tcPr>
+                </a:tc>
+                <a:tc>
+                  <a:txBody>
+                    <a:bodyPr/>
+                    <a:lstStyle/>
+                    <a:p>
+                      <a:pPr defTabSz="914400">
+                        <a:lnSpc>
+                          <a:spcPct val="100000"/>
+                        </a:lnSpc>
+                        <a:tabLst>
+                          <a:tab pos="0" algn="l"/>
+                        </a:tabLst>
+                      </a:pPr>
+                      <a:r>
+                        <a:rPr lang="en-US" sz="950" b="0" u="none" strike="noStrike" dirty="0">
+                          <a:solidFill>
+                            <a:srgbClr val="2C3E50"/>
+                          </a:solidFill>
+                          <a:effectLst/>
+                          <a:uFillTx/>
+                          <a:latin typeface="Calibri"/>
+                          <a:ea typeface="Calibri"/>
+                        </a:rPr>
+                        <a:t>Cohesin core</a:t>
+                      </a:r>
+                      <a:endParaRPr lang="en-US" sz="950" b="0" u="none" strike="noStrike" dirty="0">
+                        <a:solidFill>
+                          <a:srgbClr val="000000"/>
+                        </a:solidFill>
+                        <a:effectLst/>
+                        <a:uFillTx/>
+                        <a:latin typeface="Arial"/>
+                      </a:endParaRPr>
+                    </a:p>
+                  </a:txBody>
+                  <a:tcPr anchor="ctr">
+                    <a:lnL w="6480">
+                      <a:solidFill>
+                        <a:srgbClr val="D0D0D0"/>
+                      </a:solidFill>
+                      <a:prstDash val="solid"/>
+                    </a:lnL>
+                    <a:lnR w="6480">
+                      <a:solidFill>
+                        <a:srgbClr val="D0D0D0"/>
+                      </a:solidFill>
+                      <a:prstDash val="solid"/>
+                    </a:lnR>
+                    <a:lnT w="6480">
+                      <a:solidFill>
+                        <a:srgbClr val="D0D0D0"/>
+                      </a:solidFill>
+                      <a:prstDash val="solid"/>
+                    </a:lnT>
+                    <a:lnB w="6480">
+                      <a:solidFill>
+                        <a:srgbClr val="D0D0D0"/>
+                      </a:solidFill>
+                      <a:prstDash val="solid"/>
+                    </a:lnB>
+                    <a:noFill/>
+                  </a:tcPr>
+                </a:tc>
+                <a:tc>
+                  <a:txBody>
+                    <a:bodyPr/>
+                    <a:lstStyle/>
+                    <a:p>
+                      <a:pPr defTabSz="914400">
+                        <a:lnSpc>
+                          <a:spcPct val="100000"/>
+                        </a:lnSpc>
+                        <a:tabLst>
+                          <a:tab pos="0" algn="l"/>
+                        </a:tabLst>
+                      </a:pPr>
+                      <a:r>
+                        <a:rPr lang="en-US" sz="950" b="0" u="none" strike="noStrike">
+                          <a:solidFill>
+                            <a:srgbClr val="2C3E50"/>
+                          </a:solidFill>
+                          <a:effectLst/>
+                          <a:uFillTx/>
+                          <a:latin typeface="Calibri"/>
+                          <a:ea typeface="Calibri"/>
+                        </a:rPr>
+                        <a:t>0.994</a:t>
+                      </a:r>
+                      <a:endParaRPr lang="en-US" sz="950" b="0" u="none" strike="noStrike">
+                        <a:solidFill>
+                          <a:srgbClr val="000000"/>
+                        </a:solidFill>
+                        <a:effectLst/>
+                        <a:uFillTx/>
+                        <a:latin typeface="Arial"/>
+                      </a:endParaRPr>
+                    </a:p>
+                  </a:txBody>
+                  <a:tcPr anchor="ctr">
+                    <a:lnL w="6480">
+                      <a:solidFill>
+                        <a:srgbClr val="D0D0D0"/>
+                      </a:solidFill>
+                      <a:prstDash val="solid"/>
+                    </a:lnL>
+                    <a:lnR w="6480">
+                      <a:solidFill>
+                        <a:srgbClr val="D0D0D0"/>
+                      </a:solidFill>
+                      <a:prstDash val="solid"/>
+                    </a:lnR>
+                    <a:lnT w="6480">
+                      <a:solidFill>
+                        <a:srgbClr val="D0D0D0"/>
+                      </a:solidFill>
+                      <a:prstDash val="solid"/>
+                    </a:lnT>
+                    <a:lnB w="6480">
+                      <a:solidFill>
+                        <a:srgbClr val="D0D0D0"/>
+                      </a:solidFill>
+                      <a:prstDash val="solid"/>
+                    </a:lnB>
+                    <a:noFill/>
+                  </a:tcPr>
+                </a:tc>
+                <a:extLst>
+                  <a:ext uri="{0D108BD9-81ED-4DB2-BD59-A6C34878D82A}">
+                    <a16:rowId xmlns:a16="http://schemas.microsoft.com/office/drawing/2014/main" val="10003"/>
+                  </a:ext>
+                </a:extLst>
+              </a:tr>
+              <a:tr h="219240">
+                <a:tc>
+                  <a:txBody>
+                    <a:bodyPr/>
+                    <a:lstStyle/>
+                    <a:p>
+                      <a:pPr defTabSz="914400">
+                        <a:lnSpc>
+                          <a:spcPct val="100000"/>
+                        </a:lnSpc>
+                        <a:tabLst>
+                          <a:tab pos="0" algn="l"/>
+                        </a:tabLst>
+                      </a:pPr>
+                      <a:r>
+                        <a:rPr lang="en-US" sz="950" b="0" u="none" strike="noStrike">
+                          <a:solidFill>
+                            <a:srgbClr val="2C3E50"/>
+                          </a:solidFill>
+                          <a:effectLst/>
+                          <a:uFillTx/>
+                          <a:latin typeface="Calibri"/>
+                          <a:ea typeface="Calibri"/>
+                        </a:rPr>
+                        <a:t>RAD21</a:t>
+                      </a:r>
+                      <a:endParaRPr lang="en-US" sz="950" b="0" u="none" strike="noStrike">
+                        <a:solidFill>
+                          <a:srgbClr val="000000"/>
+                        </a:solidFill>
+                        <a:effectLst/>
+                        <a:uFillTx/>
+                        <a:latin typeface="Arial"/>
+                      </a:endParaRPr>
+                    </a:p>
+                  </a:txBody>
+                  <a:tcPr anchor="ctr">
+                    <a:lnL w="6480">
+                      <a:solidFill>
+                        <a:srgbClr val="D0D0D0"/>
+                      </a:solidFill>
+                      <a:prstDash val="solid"/>
+                    </a:lnL>
+                    <a:lnR w="6480">
+                      <a:solidFill>
+                        <a:srgbClr val="D0D0D0"/>
+                      </a:solidFill>
+                      <a:prstDash val="solid"/>
+                    </a:lnR>
+                    <a:lnT w="6480">
+                      <a:solidFill>
+                        <a:srgbClr val="D0D0D0"/>
+                      </a:solidFill>
+                      <a:prstDash val="solid"/>
+                    </a:lnT>
+                    <a:lnB w="6480">
+                      <a:solidFill>
+                        <a:srgbClr val="D0D0D0"/>
+                      </a:solidFill>
+                      <a:prstDash val="solid"/>
+                    </a:lnB>
+                    <a:noFill/>
+                  </a:tcPr>
+                </a:tc>
+                <a:tc>
+                  <a:txBody>
+                    <a:bodyPr/>
+                    <a:lstStyle/>
+                    <a:p>
+                      <a:pPr defTabSz="914400">
+                        <a:lnSpc>
+                          <a:spcPct val="100000"/>
+                        </a:lnSpc>
+                        <a:tabLst>
+                          <a:tab pos="0" algn="l"/>
+                        </a:tabLst>
+                      </a:pPr>
+                      <a:r>
+                        <a:rPr lang="en-US" sz="950" b="0" u="none" strike="noStrike" dirty="0">
+                          <a:solidFill>
+                            <a:srgbClr val="2C3E50"/>
+                          </a:solidFill>
+                          <a:effectLst/>
+                          <a:uFillTx/>
+                          <a:latin typeface="Calibri"/>
+                          <a:ea typeface="Calibri"/>
+                        </a:rPr>
+                        <a:t>Cohesin core (kleisin)</a:t>
+                      </a:r>
+                      <a:endParaRPr lang="en-US" sz="950" b="0" u="none" strike="noStrike" dirty="0">
+                        <a:solidFill>
+                          <a:srgbClr val="000000"/>
+                        </a:solidFill>
+                        <a:effectLst/>
+                        <a:uFillTx/>
+                        <a:latin typeface="Arial"/>
+                      </a:endParaRPr>
+                    </a:p>
+                  </a:txBody>
+                  <a:tcPr anchor="ctr">
+                    <a:lnL w="6480">
+                      <a:solidFill>
+                        <a:srgbClr val="D0D0D0"/>
+                      </a:solidFill>
+                      <a:prstDash val="solid"/>
+                    </a:lnL>
+                    <a:lnR w="6480">
+                      <a:solidFill>
+                        <a:srgbClr val="D0D0D0"/>
+                      </a:solidFill>
+                      <a:prstDash val="solid"/>
+                    </a:lnR>
+                    <a:lnT w="6480">
+                      <a:solidFill>
+                        <a:srgbClr val="D0D0D0"/>
+                      </a:solidFill>
+                      <a:prstDash val="solid"/>
+                    </a:lnT>
+                    <a:lnB w="6480">
+                      <a:solidFill>
+                        <a:srgbClr val="D0D0D0"/>
+                      </a:solidFill>
+                      <a:prstDash val="solid"/>
+                    </a:lnB>
+                    <a:noFill/>
+                  </a:tcPr>
+                </a:tc>
+                <a:tc>
+                  <a:txBody>
+                    <a:bodyPr/>
+                    <a:lstStyle/>
+                    <a:p>
+                      <a:pPr defTabSz="914400">
+                        <a:lnSpc>
+                          <a:spcPct val="100000"/>
+                        </a:lnSpc>
+                        <a:tabLst>
+                          <a:tab pos="0" algn="l"/>
+                        </a:tabLst>
+                      </a:pPr>
+                      <a:r>
+                        <a:rPr lang="en-US" sz="950" b="0" u="none" strike="noStrike">
+                          <a:solidFill>
+                            <a:srgbClr val="2C3E50"/>
+                          </a:solidFill>
+                          <a:effectLst/>
+                          <a:uFillTx/>
+                          <a:latin typeface="Calibri"/>
+                          <a:ea typeface="Calibri"/>
+                        </a:rPr>
+                        <a:t>0.988</a:t>
+                      </a:r>
+                      <a:endParaRPr lang="en-US" sz="950" b="0" u="none" strike="noStrike">
+                        <a:solidFill>
+                          <a:srgbClr val="000000"/>
+                        </a:solidFill>
+                        <a:effectLst/>
+                        <a:uFillTx/>
+                        <a:latin typeface="Arial"/>
+                      </a:endParaRPr>
+                    </a:p>
+                  </a:txBody>
+                  <a:tcPr anchor="ctr">
+                    <a:lnL w="6480">
+                      <a:solidFill>
+                        <a:srgbClr val="D0D0D0"/>
+                      </a:solidFill>
+                      <a:prstDash val="solid"/>
+                    </a:lnL>
+                    <a:lnR w="6480">
+                      <a:solidFill>
+                        <a:srgbClr val="D0D0D0"/>
+                      </a:solidFill>
+                      <a:prstDash val="solid"/>
+                    </a:lnR>
+                    <a:lnT w="6480">
+                      <a:solidFill>
+                        <a:srgbClr val="D0D0D0"/>
+                      </a:solidFill>
+                      <a:prstDash val="solid"/>
+                    </a:lnT>
+                    <a:lnB w="6480">
+                      <a:solidFill>
+                        <a:srgbClr val="D0D0D0"/>
+                      </a:solidFill>
+                      <a:prstDash val="solid"/>
+                    </a:lnB>
+                    <a:noFill/>
+                  </a:tcPr>
+                </a:tc>
+                <a:extLst>
+                  <a:ext uri="{0D108BD9-81ED-4DB2-BD59-A6C34878D82A}">
+                    <a16:rowId xmlns:a16="http://schemas.microsoft.com/office/drawing/2014/main" val="10004"/>
+                  </a:ext>
+                </a:extLst>
+              </a:tr>
+              <a:tr h="219240">
+                <a:tc>
+                  <a:txBody>
+                    <a:bodyPr/>
+                    <a:lstStyle/>
+                    <a:p>
+                      <a:pPr defTabSz="914400">
+                        <a:lnSpc>
+                          <a:spcPct val="100000"/>
+                        </a:lnSpc>
+                        <a:tabLst>
+                          <a:tab pos="0" algn="l"/>
+                        </a:tabLst>
+                      </a:pPr>
+                      <a:r>
+                        <a:rPr lang="en-US" sz="950" b="0" u="none" strike="noStrike">
+                          <a:solidFill>
+                            <a:srgbClr val="2C3E50"/>
+                          </a:solidFill>
+                          <a:effectLst/>
+                          <a:uFillTx/>
+                          <a:latin typeface="Calibri"/>
+                          <a:ea typeface="Calibri"/>
+                        </a:rPr>
+                        <a:t>CDK1</a:t>
+                      </a:r>
+                      <a:endParaRPr lang="en-US" sz="950" b="0" u="none" strike="noStrike">
+                        <a:solidFill>
+                          <a:srgbClr val="000000"/>
+                        </a:solidFill>
+                        <a:effectLst/>
+                        <a:uFillTx/>
+                        <a:latin typeface="Arial"/>
+                      </a:endParaRPr>
+                    </a:p>
+                  </a:txBody>
+                  <a:tcPr anchor="ctr">
+                    <a:lnL w="6480">
+                      <a:solidFill>
+                        <a:srgbClr val="D0D0D0"/>
+                      </a:solidFill>
+                      <a:prstDash val="solid"/>
+                    </a:lnL>
+                    <a:lnR w="6480">
+                      <a:solidFill>
+                        <a:srgbClr val="D0D0D0"/>
+                      </a:solidFill>
+                      <a:prstDash val="solid"/>
+                    </a:lnR>
+                    <a:lnT w="6480">
+                      <a:solidFill>
+                        <a:srgbClr val="D0D0D0"/>
+                      </a:solidFill>
+                      <a:prstDash val="solid"/>
+                    </a:lnT>
+                    <a:lnB w="6480">
+                      <a:solidFill>
+                        <a:srgbClr val="D0D0D0"/>
+                      </a:solidFill>
+                      <a:prstDash val="solid"/>
+                    </a:lnB>
+                    <a:noFill/>
+                  </a:tcPr>
+                </a:tc>
+                <a:tc>
+                  <a:txBody>
+                    <a:bodyPr/>
+                    <a:lstStyle/>
+                    <a:p>
+                      <a:pPr defTabSz="914400">
+                        <a:lnSpc>
+                          <a:spcPct val="100000"/>
+                        </a:lnSpc>
+                        <a:tabLst>
+                          <a:tab pos="0" algn="l"/>
+                        </a:tabLst>
+                      </a:pPr>
+                      <a:r>
+                        <a:rPr lang="en-US" sz="950" b="0" u="none" strike="noStrike">
+                          <a:solidFill>
+                            <a:srgbClr val="2C3E50"/>
+                          </a:solidFill>
+                          <a:effectLst/>
+                          <a:uFillTx/>
+                          <a:latin typeface="Calibri"/>
+                          <a:ea typeface="Calibri"/>
+                        </a:rPr>
+                        <a:t>Mitotic kinase</a:t>
+                      </a:r>
+                      <a:endParaRPr lang="en-US" sz="950" b="0" u="none" strike="noStrike">
+                        <a:solidFill>
+                          <a:srgbClr val="000000"/>
+                        </a:solidFill>
+                        <a:effectLst/>
+                        <a:uFillTx/>
+                        <a:latin typeface="Arial"/>
+                      </a:endParaRPr>
+                    </a:p>
+                  </a:txBody>
+                  <a:tcPr anchor="ctr">
+                    <a:lnL w="6480">
+                      <a:solidFill>
+                        <a:srgbClr val="D0D0D0"/>
+                      </a:solidFill>
+                      <a:prstDash val="solid"/>
+                    </a:lnL>
+                    <a:lnR w="6480">
+                      <a:solidFill>
+                        <a:srgbClr val="D0D0D0"/>
+                      </a:solidFill>
+                      <a:prstDash val="solid"/>
+                    </a:lnR>
+                    <a:lnT w="6480">
+                      <a:solidFill>
+                        <a:srgbClr val="D0D0D0"/>
+                      </a:solidFill>
+                      <a:prstDash val="solid"/>
+                    </a:lnT>
+                    <a:lnB w="6480">
+                      <a:solidFill>
+                        <a:srgbClr val="D0D0D0"/>
+                      </a:solidFill>
+                      <a:prstDash val="solid"/>
+                    </a:lnB>
+                    <a:noFill/>
+                  </a:tcPr>
+                </a:tc>
+                <a:tc>
+                  <a:txBody>
+                    <a:bodyPr/>
+                    <a:lstStyle/>
+                    <a:p>
+                      <a:pPr defTabSz="914400">
+                        <a:lnSpc>
+                          <a:spcPct val="100000"/>
+                        </a:lnSpc>
+                        <a:tabLst>
+                          <a:tab pos="0" algn="l"/>
+                        </a:tabLst>
+                      </a:pPr>
+                      <a:r>
+                        <a:rPr lang="en-US" sz="950" b="0" u="none" strike="noStrike">
+                          <a:solidFill>
+                            <a:srgbClr val="2C3E50"/>
+                          </a:solidFill>
+                          <a:effectLst/>
+                          <a:uFillTx/>
+                          <a:latin typeface="Calibri"/>
+                          <a:ea typeface="Calibri"/>
+                        </a:rPr>
+                        <a:t>0.979</a:t>
+                      </a:r>
+                      <a:endParaRPr lang="en-US" sz="950" b="0" u="none" strike="noStrike">
+                        <a:solidFill>
+                          <a:srgbClr val="000000"/>
+                        </a:solidFill>
+                        <a:effectLst/>
+                        <a:uFillTx/>
+                        <a:latin typeface="Arial"/>
+                      </a:endParaRPr>
+                    </a:p>
+                  </a:txBody>
+                  <a:tcPr anchor="ctr">
+                    <a:lnL w="6480">
+                      <a:solidFill>
+                        <a:srgbClr val="D0D0D0"/>
+                      </a:solidFill>
+                      <a:prstDash val="solid"/>
+                    </a:lnL>
+                    <a:lnR w="6480">
+                      <a:solidFill>
+                        <a:srgbClr val="D0D0D0"/>
+                      </a:solidFill>
+                      <a:prstDash val="solid"/>
+                    </a:lnR>
+                    <a:lnT w="6480">
+                      <a:solidFill>
+                        <a:srgbClr val="D0D0D0"/>
+                      </a:solidFill>
+                      <a:prstDash val="solid"/>
+                    </a:lnT>
+                    <a:lnB w="6480">
+                      <a:solidFill>
+                        <a:srgbClr val="D0D0D0"/>
+                      </a:solidFill>
+                      <a:prstDash val="solid"/>
+                    </a:lnB>
+                    <a:noFill/>
+                  </a:tcPr>
+                </a:tc>
+                <a:extLst>
+                  <a:ext uri="{0D108BD9-81ED-4DB2-BD59-A6C34878D82A}">
+                    <a16:rowId xmlns:a16="http://schemas.microsoft.com/office/drawing/2014/main" val="10005"/>
+                  </a:ext>
+                </a:extLst>
+              </a:tr>
+              <a:tr h="219240">
+                <a:tc>
+                  <a:txBody>
+                    <a:bodyPr/>
+                    <a:lstStyle/>
+                    <a:p>
+                      <a:pPr defTabSz="914400">
+                        <a:lnSpc>
+                          <a:spcPct val="100000"/>
+                        </a:lnSpc>
+                        <a:tabLst>
+                          <a:tab pos="0" algn="l"/>
+                        </a:tabLst>
+                      </a:pPr>
+                      <a:r>
+                        <a:rPr lang="en-US" sz="950" b="0" u="none" strike="noStrike">
+                          <a:solidFill>
+                            <a:srgbClr val="2C3E50"/>
+                          </a:solidFill>
+                          <a:effectLst/>
+                          <a:uFillTx/>
+                          <a:latin typeface="Calibri"/>
+                          <a:ea typeface="Calibri"/>
+                        </a:rPr>
+                        <a:t>CDC20</a:t>
+                      </a:r>
+                      <a:endParaRPr lang="en-US" sz="950" b="0" u="none" strike="noStrike">
+                        <a:solidFill>
+                          <a:srgbClr val="000000"/>
+                        </a:solidFill>
+                        <a:effectLst/>
+                        <a:uFillTx/>
+                        <a:latin typeface="Arial"/>
+                      </a:endParaRPr>
+                    </a:p>
+                  </a:txBody>
+                  <a:tcPr anchor="ctr">
+                    <a:lnL w="6480">
+                      <a:solidFill>
+                        <a:srgbClr val="D0D0D0"/>
+                      </a:solidFill>
+                      <a:prstDash val="solid"/>
+                    </a:lnL>
+                    <a:lnR w="6480">
+                      <a:solidFill>
+                        <a:srgbClr val="D0D0D0"/>
+                      </a:solidFill>
+                      <a:prstDash val="solid"/>
+                    </a:lnR>
+                    <a:lnT w="6480">
+                      <a:solidFill>
+                        <a:srgbClr val="D0D0D0"/>
+                      </a:solidFill>
+                      <a:prstDash val="solid"/>
+                    </a:lnT>
+                    <a:lnB w="6480">
+                      <a:solidFill>
+                        <a:srgbClr val="D0D0D0"/>
+                      </a:solidFill>
+                      <a:prstDash val="solid"/>
+                    </a:lnB>
+                    <a:noFill/>
+                  </a:tcPr>
+                </a:tc>
+                <a:tc>
+                  <a:txBody>
+                    <a:bodyPr/>
+                    <a:lstStyle/>
+                    <a:p>
+                      <a:pPr defTabSz="914400">
+                        <a:lnSpc>
+                          <a:spcPct val="100000"/>
+                        </a:lnSpc>
+                        <a:tabLst>
+                          <a:tab pos="0" algn="l"/>
+                        </a:tabLst>
+                      </a:pPr>
+                      <a:r>
+                        <a:rPr lang="en-US" sz="950" b="0" u="none" strike="noStrike">
+                          <a:solidFill>
+                            <a:srgbClr val="2C3E50"/>
+                          </a:solidFill>
+                          <a:effectLst/>
+                          <a:uFillTx/>
+                          <a:latin typeface="Calibri"/>
+                          <a:ea typeface="Calibri"/>
+                        </a:rPr>
+                        <a:t>APC/C activator</a:t>
+                      </a:r>
+                      <a:endParaRPr lang="en-US" sz="950" b="0" u="none" strike="noStrike">
+                        <a:solidFill>
+                          <a:srgbClr val="000000"/>
+                        </a:solidFill>
+                        <a:effectLst/>
+                        <a:uFillTx/>
+                        <a:latin typeface="Arial"/>
+                      </a:endParaRPr>
+                    </a:p>
+                  </a:txBody>
+                  <a:tcPr anchor="ctr">
+                    <a:lnL w="6480">
+                      <a:solidFill>
+                        <a:srgbClr val="D0D0D0"/>
+                      </a:solidFill>
+                      <a:prstDash val="solid"/>
+                    </a:lnL>
+                    <a:lnR w="6480">
+                      <a:solidFill>
+                        <a:srgbClr val="D0D0D0"/>
+                      </a:solidFill>
+                      <a:prstDash val="solid"/>
+                    </a:lnR>
+                    <a:lnT w="6480">
+                      <a:solidFill>
+                        <a:srgbClr val="D0D0D0"/>
+                      </a:solidFill>
+                      <a:prstDash val="solid"/>
+                    </a:lnT>
+                    <a:lnB w="6480">
+                      <a:solidFill>
+                        <a:srgbClr val="D0D0D0"/>
+                      </a:solidFill>
+                      <a:prstDash val="solid"/>
+                    </a:lnB>
+                    <a:noFill/>
+                  </a:tcPr>
+                </a:tc>
+                <a:tc>
+                  <a:txBody>
+                    <a:bodyPr/>
+                    <a:lstStyle/>
+                    <a:p>
+                      <a:pPr defTabSz="914400">
+                        <a:lnSpc>
+                          <a:spcPct val="100000"/>
+                        </a:lnSpc>
+                        <a:tabLst>
+                          <a:tab pos="0" algn="l"/>
+                        </a:tabLst>
+                      </a:pPr>
+                      <a:r>
+                        <a:rPr lang="en-US" sz="950" b="0" u="none" strike="noStrike">
+                          <a:solidFill>
+                            <a:srgbClr val="2C3E50"/>
+                          </a:solidFill>
+                          <a:effectLst/>
+                          <a:uFillTx/>
+                          <a:latin typeface="Calibri"/>
+                          <a:ea typeface="Calibri"/>
+                        </a:rPr>
+                        <a:t>0.938</a:t>
+                      </a:r>
+                      <a:endParaRPr lang="en-US" sz="950" b="0" u="none" strike="noStrike">
+                        <a:solidFill>
+                          <a:srgbClr val="000000"/>
+                        </a:solidFill>
+                        <a:effectLst/>
+                        <a:uFillTx/>
+                        <a:latin typeface="Arial"/>
+                      </a:endParaRPr>
+                    </a:p>
+                  </a:txBody>
+                  <a:tcPr anchor="ctr">
+                    <a:lnL w="6480">
+                      <a:solidFill>
+                        <a:srgbClr val="D0D0D0"/>
+                      </a:solidFill>
+                      <a:prstDash val="solid"/>
+                    </a:lnL>
+                    <a:lnR w="6480">
+                      <a:solidFill>
+                        <a:srgbClr val="D0D0D0"/>
+                      </a:solidFill>
+                      <a:prstDash val="solid"/>
+                    </a:lnR>
+                    <a:lnT w="6480">
+                      <a:solidFill>
+                        <a:srgbClr val="D0D0D0"/>
+                      </a:solidFill>
+                      <a:prstDash val="solid"/>
+                    </a:lnT>
+                    <a:lnB w="6480">
+                      <a:solidFill>
+                        <a:srgbClr val="D0D0D0"/>
+                      </a:solidFill>
+                      <a:prstDash val="solid"/>
+                    </a:lnB>
+                    <a:noFill/>
+                  </a:tcPr>
+                </a:tc>
+                <a:extLst>
+                  <a:ext uri="{0D108BD9-81ED-4DB2-BD59-A6C34878D82A}">
+                    <a16:rowId xmlns:a16="http://schemas.microsoft.com/office/drawing/2014/main" val="10006"/>
+                  </a:ext>
+                </a:extLst>
+              </a:tr>
+              <a:tr h="219240">
+                <a:tc>
+                  <a:txBody>
+                    <a:bodyPr/>
+                    <a:lstStyle/>
+                    <a:p>
+                      <a:pPr defTabSz="914400">
+                        <a:lnSpc>
+                          <a:spcPct val="100000"/>
+                        </a:lnSpc>
+                        <a:tabLst>
+                          <a:tab pos="0" algn="l"/>
+                        </a:tabLst>
+                      </a:pPr>
+                      <a:r>
+                        <a:rPr lang="en-US" sz="950" b="0" u="none" strike="noStrike">
+                          <a:solidFill>
+                            <a:srgbClr val="2C3E50"/>
+                          </a:solidFill>
+                          <a:effectLst/>
+                          <a:uFillTx/>
+                          <a:latin typeface="Calibri"/>
+                          <a:ea typeface="Calibri"/>
+                        </a:rPr>
+                        <a:t>ESPL1</a:t>
+                      </a:r>
+                      <a:endParaRPr lang="en-US" sz="950" b="0" u="none" strike="noStrike">
+                        <a:solidFill>
+                          <a:srgbClr val="000000"/>
+                        </a:solidFill>
+                        <a:effectLst/>
+                        <a:uFillTx/>
+                        <a:latin typeface="Arial"/>
+                      </a:endParaRPr>
+                    </a:p>
+                  </a:txBody>
+                  <a:tcPr anchor="ctr">
+                    <a:lnL w="6480">
+                      <a:solidFill>
+                        <a:srgbClr val="D0D0D0"/>
+                      </a:solidFill>
+                      <a:prstDash val="solid"/>
+                    </a:lnL>
+                    <a:lnR w="6480">
+                      <a:solidFill>
+                        <a:srgbClr val="D0D0D0"/>
+                      </a:solidFill>
+                      <a:prstDash val="solid"/>
+                    </a:lnR>
+                    <a:lnT w="6480">
+                      <a:solidFill>
+                        <a:srgbClr val="D0D0D0"/>
+                      </a:solidFill>
+                      <a:prstDash val="solid"/>
+                    </a:lnT>
+                    <a:lnB w="6480">
+                      <a:solidFill>
+                        <a:srgbClr val="D0D0D0"/>
+                      </a:solidFill>
+                      <a:prstDash val="solid"/>
+                    </a:lnB>
+                    <a:noFill/>
+                  </a:tcPr>
+                </a:tc>
+                <a:tc>
+                  <a:txBody>
+                    <a:bodyPr/>
+                    <a:lstStyle/>
+                    <a:p>
+                      <a:pPr defTabSz="914400">
+                        <a:lnSpc>
+                          <a:spcPct val="100000"/>
+                        </a:lnSpc>
+                        <a:tabLst>
+                          <a:tab pos="0" algn="l"/>
+                        </a:tabLst>
+                      </a:pPr>
+                      <a:r>
+                        <a:rPr lang="en-US" sz="950" b="0" u="none" strike="noStrike">
+                          <a:solidFill>
+                            <a:srgbClr val="2C3E50"/>
+                          </a:solidFill>
+                          <a:effectLst/>
+                          <a:uFillTx/>
+                          <a:latin typeface="Calibri"/>
+                          <a:ea typeface="Calibri"/>
+                        </a:rPr>
+                        <a:t>Separase</a:t>
+                      </a:r>
+                      <a:endParaRPr lang="en-US" sz="950" b="0" u="none" strike="noStrike">
+                        <a:solidFill>
+                          <a:srgbClr val="000000"/>
+                        </a:solidFill>
+                        <a:effectLst/>
+                        <a:uFillTx/>
+                        <a:latin typeface="Arial"/>
+                      </a:endParaRPr>
+                    </a:p>
+                  </a:txBody>
+                  <a:tcPr anchor="ctr">
+                    <a:lnL w="6480">
+                      <a:solidFill>
+                        <a:srgbClr val="D0D0D0"/>
+                      </a:solidFill>
+                      <a:prstDash val="solid"/>
+                    </a:lnL>
+                    <a:lnR w="6480">
+                      <a:solidFill>
+                        <a:srgbClr val="D0D0D0"/>
+                      </a:solidFill>
+                      <a:prstDash val="solid"/>
+                    </a:lnR>
+                    <a:lnT w="6480">
+                      <a:solidFill>
+                        <a:srgbClr val="D0D0D0"/>
+                      </a:solidFill>
+                      <a:prstDash val="solid"/>
+                    </a:lnT>
+                    <a:lnB w="6480">
+                      <a:solidFill>
+                        <a:srgbClr val="D0D0D0"/>
+                      </a:solidFill>
+                      <a:prstDash val="solid"/>
+                    </a:lnB>
+                    <a:noFill/>
+                  </a:tcPr>
+                </a:tc>
+                <a:tc>
+                  <a:txBody>
+                    <a:bodyPr/>
+                    <a:lstStyle/>
+                    <a:p>
+                      <a:pPr defTabSz="914400">
+                        <a:lnSpc>
+                          <a:spcPct val="100000"/>
+                        </a:lnSpc>
+                        <a:tabLst>
+                          <a:tab pos="0" algn="l"/>
+                        </a:tabLst>
+                      </a:pPr>
+                      <a:r>
+                        <a:rPr lang="en-US" sz="950" b="0" u="none" strike="noStrike">
+                          <a:solidFill>
+                            <a:srgbClr val="2C3E50"/>
+                          </a:solidFill>
+                          <a:effectLst/>
+                          <a:uFillTx/>
+                          <a:latin typeface="Calibri"/>
+                          <a:ea typeface="Calibri"/>
+                        </a:rPr>
+                        <a:t>0.930</a:t>
+                      </a:r>
+                      <a:endParaRPr lang="en-US" sz="950" b="0" u="none" strike="noStrike">
+                        <a:solidFill>
+                          <a:srgbClr val="000000"/>
+                        </a:solidFill>
+                        <a:effectLst/>
+                        <a:uFillTx/>
+                        <a:latin typeface="Arial"/>
+                      </a:endParaRPr>
+                    </a:p>
+                  </a:txBody>
+                  <a:tcPr anchor="ctr">
+                    <a:lnL w="6480">
+                      <a:solidFill>
+                        <a:srgbClr val="D0D0D0"/>
+                      </a:solidFill>
+                      <a:prstDash val="solid"/>
+                    </a:lnL>
+                    <a:lnR w="6480">
+                      <a:solidFill>
+                        <a:srgbClr val="D0D0D0"/>
+                      </a:solidFill>
+                      <a:prstDash val="solid"/>
+                    </a:lnR>
+                    <a:lnT w="6480">
+                      <a:solidFill>
+                        <a:srgbClr val="D0D0D0"/>
+                      </a:solidFill>
+                      <a:prstDash val="solid"/>
+                    </a:lnT>
+                    <a:lnB w="6480">
+                      <a:solidFill>
+                        <a:srgbClr val="D0D0D0"/>
+                      </a:solidFill>
+                      <a:prstDash val="solid"/>
+                    </a:lnB>
+                    <a:noFill/>
+                  </a:tcPr>
+                </a:tc>
+                <a:extLst>
+                  <a:ext uri="{0D108BD9-81ED-4DB2-BD59-A6C34878D82A}">
+                    <a16:rowId xmlns:a16="http://schemas.microsoft.com/office/drawing/2014/main" val="10007"/>
+                  </a:ext>
+                </a:extLst>
+              </a:tr>
+              <a:tr h="219240">
+                <a:tc gridSpan="3">
+                  <a:txBody>
+                    <a:bodyPr/>
+                    <a:lstStyle/>
+                    <a:p>
+                      <a:pPr defTabSz="914400">
+                        <a:lnSpc>
+                          <a:spcPct val="100000"/>
+                        </a:lnSpc>
+                        <a:tabLst>
+                          <a:tab pos="0" algn="l"/>
+                        </a:tabLst>
+                      </a:pPr>
+                      <a:r>
+                        <a:rPr lang="en-US" sz="950" b="0" i="1" u="none" strike="noStrike">
+                          <a:solidFill>
+                            <a:srgbClr val="5A6B7B"/>
+                          </a:solidFill>
+                          <a:effectLst/>
+                          <a:uFillTx/>
+                          <a:latin typeface="Calibri"/>
+                          <a:ea typeface="Calibri"/>
+                        </a:rPr>
+                        <a:t>( … 15 high-confidence partners total )</a:t>
+                      </a:r>
+                      <a:endParaRPr lang="en-US" sz="950" b="0" u="none" strike="noStrike">
+                        <a:solidFill>
+                          <a:srgbClr val="000000"/>
+                        </a:solidFill>
+                        <a:effectLst/>
+                        <a:uFillTx/>
+                        <a:latin typeface="Arial"/>
+                      </a:endParaRPr>
+                    </a:p>
+                  </a:txBody>
+                  <a:tcPr anchor="ctr">
+                    <a:lnL w="6480">
+                      <a:solidFill>
+                        <a:srgbClr val="D0D0D0"/>
+                      </a:solidFill>
+                      <a:prstDash val="solid"/>
+                    </a:lnL>
+                    <a:lnR w="6480">
+                      <a:solidFill>
+                        <a:srgbClr val="D0D0D0"/>
+                      </a:solidFill>
+                      <a:prstDash val="solid"/>
+                    </a:lnR>
+                    <a:lnT w="6480">
+                      <a:solidFill>
+                        <a:srgbClr val="D0D0D0"/>
+                      </a:solidFill>
+                      <a:prstDash val="solid"/>
+                    </a:lnT>
+                    <a:lnB w="6480">
+                      <a:solidFill>
+                        <a:srgbClr val="D0D0D0"/>
+                      </a:solidFill>
+                      <a:prstDash val="solid"/>
+                    </a:lnB>
+                    <a:noFill/>
+                  </a:tcPr>
+                </a:tc>
+                <a:tc hMerge="1">
+                  <a:txBody>
+                    <a:bodyPr/>
+                    <a:lstStyle/>
+                    <a:p>
+                      <a:endParaRPr lang="en-US" sz="1800" b="0" u="none" strike="noStrike">
+                        <a:solidFill>
+                          <a:srgbClr val="000000"/>
+                        </a:solidFill>
+                        <a:effectLst/>
+                        <a:uFillTx/>
+                        <a:latin typeface="Arial"/>
+                      </a:endParaRPr>
+                    </a:p>
+                  </a:txBody>
+                  <a:tcPr marL="90000" marR="90000" marT="45000" marB="45000">
+                    <a:lnL>
+                      <a:noFill/>
+                    </a:lnL>
+                    <a:lnR>
+                      <a:noFill/>
+                    </a:lnR>
+                    <a:lnT>
+                      <a:noFill/>
+                    </a:lnT>
+                    <a:lnB>
+                      <a:noFill/>
+                    </a:lnB>
+                    <a:solidFill>
+                      <a:srgbClr val="729FCF"/>
+                    </a:solidFill>
+                  </a:tcPr>
+                </a:tc>
+                <a:tc hMerge="1">
+                  <a:txBody>
+                    <a:bodyPr/>
+                    <a:lstStyle/>
+                    <a:p>
+                      <a:endParaRPr lang="en-US" sz="1800" b="0" u="none" strike="noStrike">
+                        <a:solidFill>
+                          <a:srgbClr val="000000"/>
+                        </a:solidFill>
+                        <a:effectLst/>
+                        <a:uFillTx/>
+                        <a:latin typeface="Arial"/>
+                      </a:endParaRPr>
+                    </a:p>
+                  </a:txBody>
+                  <a:tcPr marL="90000" marR="90000" marT="45000" marB="45000">
+                    <a:lnL>
+                      <a:noFill/>
+                    </a:lnL>
+                    <a:lnR>
+                      <a:noFill/>
+                    </a:lnR>
+                    <a:lnT>
+                      <a:noFill/>
+                    </a:lnT>
+                    <a:lnB>
+                      <a:noFill/>
+                    </a:lnB>
+                    <a:solidFill>
+                      <a:srgbClr val="729FCF"/>
+                    </a:solidFill>
+                  </a:tcPr>
+                </a:tc>
+                <a:extLst>
+                  <a:ext uri="{0D108BD9-81ED-4DB2-BD59-A6C34878D82A}">
+                    <a16:rowId xmlns:a16="http://schemas.microsoft.com/office/drawing/2014/main" val="10008"/>
+                  </a:ext>
+                </a:extLst>
+              </a:tr>
+              <a:tr h="219240">
+                <a:tc>
+                  <a:txBody>
+                    <a:bodyPr/>
+                    <a:lstStyle/>
+                    <a:p>
+                      <a:pPr defTabSz="914400">
+                        <a:lnSpc>
+                          <a:spcPct val="100000"/>
+                        </a:lnSpc>
+                        <a:tabLst>
+                          <a:tab pos="0" algn="l"/>
+                        </a:tabLst>
+                      </a:pPr>
+                      <a:r>
+                        <a:rPr lang="en-US" sz="950" b="0" u="none" strike="noStrike">
+                          <a:solidFill>
+                            <a:srgbClr val="B2182B"/>
+                          </a:solidFill>
+                          <a:effectLst/>
+                          <a:uFillTx/>
+                          <a:latin typeface="Calibri"/>
+                          <a:ea typeface="Calibri"/>
+                        </a:rPr>
+                        <a:t>ERK2 / SPOP</a:t>
+                      </a:r>
+                      <a:endParaRPr lang="en-US" sz="950" b="0" u="none" strike="noStrike">
+                        <a:solidFill>
+                          <a:srgbClr val="000000"/>
+                        </a:solidFill>
+                        <a:effectLst/>
+                        <a:uFillTx/>
+                        <a:latin typeface="Arial"/>
+                      </a:endParaRPr>
+                    </a:p>
+                  </a:txBody>
+                  <a:tcPr anchor="ctr">
+                    <a:lnL w="6480">
+                      <a:solidFill>
+                        <a:srgbClr val="D0D0D0"/>
+                      </a:solidFill>
+                      <a:prstDash val="solid"/>
+                    </a:lnL>
+                    <a:lnR w="6480">
+                      <a:solidFill>
+                        <a:srgbClr val="D0D0D0"/>
+                      </a:solidFill>
+                      <a:prstDash val="solid"/>
+                    </a:lnR>
+                    <a:lnT w="6480">
+                      <a:solidFill>
+                        <a:srgbClr val="D0D0D0"/>
+                      </a:solidFill>
+                      <a:prstDash val="solid"/>
+                    </a:lnT>
+                    <a:lnB w="6480">
+                      <a:solidFill>
+                        <a:srgbClr val="D0D0D0"/>
+                      </a:solidFill>
+                      <a:prstDash val="solid"/>
+                    </a:lnB>
+                    <a:noFill/>
+                  </a:tcPr>
+                </a:tc>
+                <a:tc>
+                  <a:txBody>
+                    <a:bodyPr/>
+                    <a:lstStyle/>
+                    <a:p>
+                      <a:pPr defTabSz="914400">
+                        <a:lnSpc>
+                          <a:spcPct val="100000"/>
+                        </a:lnSpc>
+                        <a:tabLst>
+                          <a:tab pos="0" algn="l"/>
+                        </a:tabLst>
+                      </a:pPr>
+                      <a:r>
+                        <a:rPr lang="en-US" sz="950" b="0" u="none" strike="noStrike">
+                          <a:solidFill>
+                            <a:srgbClr val="B2182B"/>
+                          </a:solidFill>
+                          <a:effectLst/>
+                          <a:uFillTx/>
+                          <a:latin typeface="Calibri"/>
+                          <a:ea typeface="Calibri"/>
+                        </a:rPr>
+                        <a:t>literature edges (dashed)</a:t>
+                      </a:r>
+                      <a:endParaRPr lang="en-US" sz="950" b="0" u="none" strike="noStrike">
+                        <a:solidFill>
+                          <a:srgbClr val="000000"/>
+                        </a:solidFill>
+                        <a:effectLst/>
+                        <a:uFillTx/>
+                        <a:latin typeface="Arial"/>
+                      </a:endParaRPr>
+                    </a:p>
+                  </a:txBody>
+                  <a:tcPr anchor="ctr">
+                    <a:lnL w="6480">
+                      <a:solidFill>
+                        <a:srgbClr val="D0D0D0"/>
+                      </a:solidFill>
+                      <a:prstDash val="solid"/>
+                    </a:lnL>
+                    <a:lnR w="6480">
+                      <a:solidFill>
+                        <a:srgbClr val="D0D0D0"/>
+                      </a:solidFill>
+                      <a:prstDash val="solid"/>
+                    </a:lnR>
+                    <a:lnT w="6480">
+                      <a:solidFill>
+                        <a:srgbClr val="D0D0D0"/>
+                      </a:solidFill>
+                      <a:prstDash val="solid"/>
+                    </a:lnT>
+                    <a:lnB w="6480">
+                      <a:solidFill>
+                        <a:srgbClr val="D0D0D0"/>
+                      </a:solidFill>
+                      <a:prstDash val="solid"/>
+                    </a:lnB>
+                    <a:noFill/>
+                  </a:tcPr>
+                </a:tc>
+                <a:tc>
+                  <a:txBody>
+                    <a:bodyPr/>
+                    <a:lstStyle/>
+                    <a:p>
+                      <a:pPr defTabSz="914400">
+                        <a:lnSpc>
+                          <a:spcPct val="100000"/>
+                        </a:lnSpc>
+                        <a:tabLst>
+                          <a:tab pos="0" algn="l"/>
+                        </a:tabLst>
+                      </a:pPr>
+                      <a:r>
+                        <a:rPr lang="en-US" sz="950" b="0" u="none" strike="noStrike" dirty="0">
+                          <a:solidFill>
+                            <a:srgbClr val="B2182B"/>
+                          </a:solidFill>
+                          <a:effectLst/>
+                          <a:uFillTx/>
+                          <a:latin typeface="Calibri"/>
+                          <a:ea typeface="Calibri"/>
+                        </a:rPr>
+                        <a:t>—</a:t>
+                      </a:r>
+                      <a:endParaRPr lang="en-US" sz="950" b="0" u="none" strike="noStrike" dirty="0">
+                        <a:solidFill>
+                          <a:srgbClr val="000000"/>
+                        </a:solidFill>
+                        <a:effectLst/>
+                        <a:uFillTx/>
+                        <a:latin typeface="Arial"/>
+                      </a:endParaRPr>
+                    </a:p>
+                  </a:txBody>
+                  <a:tcPr anchor="ctr">
+                    <a:lnL w="6480">
+                      <a:solidFill>
+                        <a:srgbClr val="D0D0D0"/>
+                      </a:solidFill>
+                      <a:prstDash val="solid"/>
+                    </a:lnL>
+                    <a:lnR w="6480">
+                      <a:solidFill>
+                        <a:srgbClr val="D0D0D0"/>
+                      </a:solidFill>
+                      <a:prstDash val="solid"/>
+                    </a:lnR>
+                    <a:lnT w="6480">
+                      <a:solidFill>
+                        <a:srgbClr val="D0D0D0"/>
+                      </a:solidFill>
+                      <a:prstDash val="solid"/>
+                    </a:lnT>
+                    <a:lnB w="6480">
+                      <a:solidFill>
+                        <a:srgbClr val="D0D0D0"/>
+                      </a:solidFill>
+                      <a:prstDash val="solid"/>
+                    </a:lnB>
+                    <a:noFill/>
+                  </a:tcPr>
+                </a:tc>
+                <a:extLst>
+                  <a:ext uri="{0D108BD9-81ED-4DB2-BD59-A6C34878D82A}">
+                    <a16:rowId xmlns:a16="http://schemas.microsoft.com/office/drawing/2014/main" val="10009"/>
+                  </a:ext>
+                </a:extLst>
+              </a:tr>
+            </a:tbl>
+          </a:graphicData>
+        </a:graphic>
+      </p:graphicFrame>
+      <p:sp>
+        <p:nvSpPr>
+          <p:cNvPr id="15" name="a_interp"/>
+          <p:cNvSpPr/>
+          <p:nvPr/>
+        </p:nvSpPr>
+        <p:spPr>
+          <a:xfrm>
+            <a:off x="320040" y="4892040"/>
+            <a:ext cx="11521080" cy="868320"/>
+          </a:xfrm>
+          <a:prstGeom prst="rect">
+            <a:avLst/>
+          </a:prstGeom>
+          <a:noFill/>
+          <a:ln w="0">
+            <a:noFill/>
+          </a:ln>
+        </p:spPr>
+        <p:style>
+          <a:lnRef idx="0">
+            <a:scrgbClr r="0" g="0" b="0"/>
+          </a:lnRef>
+          <a:fillRef idx="0">
+            <a:scrgbClr r="0" g="0" b="0"/>
+          </a:fillRef>
+          <a:effectRef idx="0">
+            <a:scrgbClr r="0" g="0" b="0"/>
+          </a:effectRef>
+          <a:fontRef idx="minor"/>
+        </p:style>
+        <p:txBody>
+          <a:bodyPr lIns="90000" tIns="45000" rIns="90000" bIns="45000" anchor="t">
+            <a:noAutofit/>
+          </a:bodyPr>
+          <a:lstStyle/>
+          <a:p>
+            <a:pPr defTabSz="914400">
+              <a:lnSpc>
+                <a:spcPct val="100000"/>
+              </a:lnSpc>
+              <a:tabLst>
+                <a:tab pos="0" algn="l"/>
+              </a:tabLst>
+            </a:pPr>
+            <a:r>
+              <a:rPr lang="en-US" sz="1150" b="0" u="none" strike="noStrike" dirty="0">
+                <a:solidFill>
+                  <a:srgbClr val="2C3E50"/>
+                </a:solidFill>
+                <a:effectLst/>
+                <a:uFillTx/>
+                <a:latin typeface="Calibri"/>
+                <a:ea typeface="Calibri"/>
+              </a:rPr>
+              <a:t>Sororin's high-confidence partners form one tight cluster — the </a:t>
+            </a:r>
+            <a:r>
+              <a:rPr lang="en-US" sz="1150" dirty="0">
+                <a:solidFill>
+                  <a:srgbClr val="2C3E50"/>
+                </a:solidFill>
+                <a:latin typeface="Calibri"/>
+                <a:ea typeface="Calibri"/>
+              </a:rPr>
+              <a:t>C</a:t>
+            </a:r>
+            <a:r>
+              <a:rPr lang="en-US" sz="1150" b="0" u="none" strike="noStrike" dirty="0">
+                <a:solidFill>
+                  <a:srgbClr val="2C3E50"/>
+                </a:solidFill>
+                <a:effectLst/>
+                <a:uFillTx/>
+                <a:latin typeface="Calibri"/>
+                <a:ea typeface="Calibri"/>
+              </a:rPr>
+              <a:t>ohesin machine. Density of 89% of all possible links are present; Sororin touches all 15 others (degree 15/15 = a hub), with its strongest edges to exactly the expected partners (PDS5A, WAPL, the </a:t>
+            </a:r>
+            <a:r>
+              <a:rPr lang="en-US" sz="1150" dirty="0">
+                <a:solidFill>
+                  <a:srgbClr val="2C3E50"/>
+                </a:solidFill>
+                <a:latin typeface="Calibri"/>
+                <a:ea typeface="Calibri"/>
+              </a:rPr>
+              <a:t>C</a:t>
+            </a:r>
+            <a:r>
+              <a:rPr lang="en-US" sz="1150" b="0" u="none" strike="noStrike" dirty="0">
+                <a:solidFill>
+                  <a:srgbClr val="2C3E50"/>
+                </a:solidFill>
+                <a:effectLst/>
+                <a:uFillTx/>
+                <a:latin typeface="Calibri"/>
+                <a:ea typeface="Calibri"/>
+              </a:rPr>
+              <a:t>ohesin core, CDK1). </a:t>
+            </a:r>
+            <a:r>
+              <a:rPr lang="en-US" sz="1150" b="1" u="none" strike="noStrike" dirty="0">
+                <a:solidFill>
+                  <a:srgbClr val="2166AC"/>
+                </a:solidFill>
+                <a:effectLst/>
+                <a:uFillTx/>
+                <a:latin typeface="Calibri"/>
+                <a:ea typeface="Calibri"/>
+              </a:rPr>
+              <a:t>→ the network indicates Sororin is the central hub of a tightly-coupled physical complex.</a:t>
+            </a:r>
+            <a:endParaRPr lang="en-US" sz="1150" b="0" u="none" strike="noStrike" dirty="0">
+              <a:solidFill>
+                <a:srgbClr val="000000"/>
+              </a:solidFill>
+              <a:effectLst/>
+              <a:uFillTx/>
+              <a:latin typeface="Arial"/>
+            </a:endParaRPr>
+          </a:p>
+        </p:txBody>
+      </p:sp>
+      <p:sp>
+        <p:nvSpPr>
+          <p:cNvPr id="16" name="a_caveat"/>
+          <p:cNvSpPr/>
+          <p:nvPr/>
+        </p:nvSpPr>
+        <p:spPr>
+          <a:xfrm>
+            <a:off x="320040" y="5760720"/>
+            <a:ext cx="11521080" cy="603000"/>
+          </a:xfrm>
+          <a:prstGeom prst="rect">
+            <a:avLst/>
+          </a:prstGeom>
+          <a:noFill/>
+          <a:ln w="0">
+            <a:noFill/>
+          </a:ln>
+        </p:spPr>
+        <p:style>
+          <a:lnRef idx="0">
+            <a:scrgbClr r="0" g="0" b="0"/>
+          </a:lnRef>
+          <a:fillRef idx="0">
+            <a:scrgbClr r="0" g="0" b="0"/>
+          </a:fillRef>
+          <a:effectRef idx="0">
+            <a:scrgbClr r="0" g="0" b="0"/>
+          </a:effectRef>
+          <a:fontRef idx="minor"/>
+        </p:style>
+        <p:txBody>
+          <a:bodyPr lIns="90000" tIns="45000" rIns="90000" bIns="45000" anchor="t">
+            <a:noAutofit/>
+          </a:bodyPr>
+          <a:lstStyle/>
+          <a:p>
+            <a:pPr defTabSz="914400">
+              <a:lnSpc>
+                <a:spcPct val="100000"/>
+              </a:lnSpc>
+              <a:tabLst>
+                <a:tab pos="0" algn="l"/>
+              </a:tabLst>
+            </a:pPr>
+            <a:r>
+              <a:rPr lang="en-US" sz="1100" b="1" u="none" strike="noStrike" dirty="0">
+                <a:solidFill>
+                  <a:srgbClr val="B9770E"/>
+                </a:solidFill>
+                <a:effectLst/>
+                <a:uFillTx/>
+                <a:latin typeface="Calibri"/>
+                <a:ea typeface="Calibri"/>
+              </a:rPr>
+              <a:t>Honest point:  </a:t>
+            </a:r>
+            <a:r>
+              <a:rPr lang="en-US" sz="1100" b="0" u="none" strike="noStrike" dirty="0">
+                <a:solidFill>
+                  <a:srgbClr val="2C3E50"/>
+                </a:solidFill>
+                <a:effectLst/>
+                <a:uFillTx/>
+                <a:latin typeface="Calibri"/>
+                <a:ea typeface="Calibri"/>
+              </a:rPr>
+              <a:t>density is high partly </a:t>
+            </a:r>
+            <a:r>
+              <a:rPr lang="en-US" sz="1100" b="0" i="1" u="none" strike="noStrike" dirty="0">
+                <a:solidFill>
+                  <a:srgbClr val="2C3E50"/>
+                </a:solidFill>
+                <a:effectLst/>
+                <a:uFillTx/>
+                <a:latin typeface="Calibri"/>
+                <a:ea typeface="Calibri"/>
+              </a:rPr>
+              <a:t>because I curated the </a:t>
+            </a:r>
+            <a:r>
+              <a:rPr lang="en-US" sz="1100" i="1" dirty="0">
+                <a:solidFill>
+                  <a:srgbClr val="2C3E50"/>
+                </a:solidFill>
+                <a:latin typeface="Calibri"/>
+                <a:ea typeface="Calibri"/>
+              </a:rPr>
+              <a:t>C</a:t>
+            </a:r>
+            <a:r>
+              <a:rPr lang="en-US" sz="1100" b="0" i="1" u="none" strike="noStrike" dirty="0">
+                <a:solidFill>
+                  <a:srgbClr val="2C3E50"/>
+                </a:solidFill>
+                <a:effectLst/>
+                <a:uFillTx/>
+                <a:latin typeface="Calibri"/>
+                <a:ea typeface="Calibri"/>
+              </a:rPr>
+              <a:t>ohesin proteins</a:t>
+            </a:r>
+            <a:r>
+              <a:rPr lang="en-US" sz="1100" i="1" dirty="0">
+                <a:solidFill>
+                  <a:srgbClr val="2C3E50"/>
+                </a:solidFill>
+                <a:latin typeface="Calibri"/>
+                <a:ea typeface="Calibri"/>
+              </a:rPr>
+              <a:t>.</a:t>
+            </a:r>
+            <a:r>
+              <a:rPr lang="en-US" sz="1100" b="0" u="none" strike="noStrike" dirty="0">
+                <a:solidFill>
+                  <a:srgbClr val="2C3E50"/>
+                </a:solidFill>
+                <a:effectLst/>
+                <a:uFillTx/>
+                <a:latin typeface="Calibri"/>
+                <a:ea typeface="Calibri"/>
+              </a:rPr>
+              <a:t> </a:t>
+            </a:r>
+            <a:r>
+              <a:rPr lang="en-US" sz="1100" dirty="0">
+                <a:solidFill>
+                  <a:srgbClr val="2C3E50"/>
+                </a:solidFill>
+                <a:latin typeface="Calibri"/>
+                <a:ea typeface="Calibri"/>
+              </a:rPr>
+              <a:t>S</a:t>
+            </a:r>
+            <a:r>
+              <a:rPr lang="en-US" sz="1100" b="0" u="none" strike="noStrike" dirty="0">
+                <a:solidFill>
+                  <a:srgbClr val="2C3E50"/>
+                </a:solidFill>
+                <a:effectLst/>
+                <a:uFillTx/>
+                <a:latin typeface="Calibri"/>
+                <a:ea typeface="Calibri"/>
+              </a:rPr>
+              <a:t>o, density describes the module, </a:t>
+            </a:r>
+            <a:r>
+              <a:rPr lang="en-US" sz="1100" b="0" u="sng" strike="noStrike" dirty="0">
+                <a:solidFill>
+                  <a:srgbClr val="2C3E50"/>
+                </a:solidFill>
+                <a:effectLst/>
+                <a:uFillTx/>
+                <a:latin typeface="Calibri"/>
+                <a:ea typeface="Calibri"/>
+              </a:rPr>
+              <a:t>it doesn't prove it</a:t>
+            </a:r>
+            <a:r>
+              <a:rPr lang="en-US" sz="1100" dirty="0">
+                <a:solidFill>
+                  <a:srgbClr val="2C3E50"/>
+                </a:solidFill>
+                <a:latin typeface="Calibri"/>
+                <a:ea typeface="Calibri"/>
+              </a:rPr>
+              <a:t>. I’m bringing more evidence </a:t>
+            </a:r>
+            <a:r>
+              <a:rPr lang="en-US" sz="1100" b="0" u="none" strike="noStrike" dirty="0">
+                <a:solidFill>
+                  <a:srgbClr val="2C3E50"/>
+                </a:solidFill>
+                <a:effectLst/>
+                <a:uFillTx/>
+                <a:latin typeface="Calibri"/>
+                <a:ea typeface="Calibri"/>
+              </a:rPr>
+              <a:t>from the enrichment (next slide) and the high-confidence scores.</a:t>
+            </a:r>
+            <a:endParaRPr lang="en-US" sz="1100" b="0" u="none" strike="noStrike" dirty="0">
+              <a:solidFill>
+                <a:srgbClr val="000000"/>
+              </a:solidFill>
+              <a:effectLst/>
+              <a:uFillTx/>
+              <a:latin typeface="Arial"/>
+            </a:endParaRPr>
+          </a:p>
+        </p:txBody>
+      </p:sp>
+      <p:sp>
+        <p:nvSpPr>
+          <p:cNvPr id="17" name="Text 5"/>
+          <p:cNvSpPr/>
+          <p:nvPr/>
+        </p:nvSpPr>
+        <p:spPr>
+          <a:xfrm>
+            <a:off x="320040" y="6419160"/>
+            <a:ext cx="11521080" cy="319680"/>
+          </a:xfrm>
+          <a:prstGeom prst="rect">
+            <a:avLst/>
+          </a:prstGeom>
+          <a:noFill/>
+          <a:ln w="0">
+            <a:noFill/>
+          </a:ln>
+        </p:spPr>
+        <p:style>
+          <a:lnRef idx="0">
+            <a:scrgbClr r="0" g="0" b="0"/>
+          </a:lnRef>
+          <a:fillRef idx="0">
+            <a:scrgbClr r="0" g="0" b="0"/>
+          </a:fillRef>
+          <a:effectRef idx="0">
+            <a:scrgbClr r="0" g="0" b="0"/>
+          </a:effectRef>
+          <a:fontRef idx="minor"/>
+        </p:style>
+        <p:txBody>
+          <a:bodyPr lIns="90000" tIns="45000" rIns="90000" bIns="45000" anchor="ctr">
+            <a:noAutofit/>
+          </a:bodyPr>
+          <a:lstStyle/>
+          <a:p>
+            <a:pPr algn="ctr" defTabSz="914400">
+              <a:lnSpc>
+                <a:spcPct val="100000"/>
+              </a:lnSpc>
+              <a:tabLst>
+                <a:tab pos="0" algn="l"/>
+              </a:tabLst>
+            </a:pPr>
+            <a:r>
+              <a:rPr lang="en-US" sz="1000" b="1" i="1" u="none" strike="noStrike" dirty="0">
+                <a:solidFill>
+                  <a:srgbClr val="1A7A34"/>
+                </a:solidFill>
+                <a:effectLst/>
+                <a:uFillTx/>
+                <a:latin typeface="Calibri"/>
+                <a:ea typeface="Calibri"/>
+              </a:rPr>
+              <a:t>How obtained:  </a:t>
+            </a:r>
+            <a:r>
+              <a:rPr lang="en-US" sz="1000" b="0" i="1" u="none" strike="noStrike" dirty="0">
+                <a:solidFill>
+                  <a:srgbClr val="5A6B7B"/>
+                </a:solidFill>
+                <a:effectLst/>
+                <a:uFillTx/>
+                <a:latin typeface="Calibri"/>
+                <a:ea typeface="Calibri"/>
+              </a:rPr>
+              <a:t>UniProt (sequence)  →  STRING API (network)  →  networkx (metrics, code)  →  Cytoscape + stringApp (independent check + enrichment, desktop)</a:t>
+            </a:r>
+            <a:endParaRPr lang="en-US" sz="1000" b="0" u="none" strike="noStrike" dirty="0">
+              <a:solidFill>
+                <a:srgbClr val="000000"/>
+              </a:solidFill>
+              <a:effectLst/>
+              <a:uFillTx/>
+              <a:latin typeface="Arial"/>
+            </a:endParaRPr>
+          </a:p>
+        </p:txBody>
+      </p:sp>
+    </p:spTree>
+  </p:cSld>
+  <p:clrMapOvr>
+    <a:masterClrMapping/>
+  </p:clrMapOvr>
+  <p:timing>
+    <p:tnLst>
+      <p:par>
+        <p:cTn id="1" dur="indefinite" restart="never" nodeType="tmRoot">
+          <p:childTnLst>
+            <p:seq>
+              <p:cTn id="2" dur="indefinite" nodeType="mainSeq">
+                <p:childTnLst>
+                  <p:par>
+                    <p:cTn id="3" fill="hold">
+                      <p:stCondLst>
+                        <p:cond delay="indefinite"/>
+                      </p:stCondLst>
+                      <p:childTnLst>
+                        <p:par>
+                          <p:cTn id="4" fill="hold">
+                            <p:stCondLst>
+                              <p:cond delay="0"/>
+                            </p:stCondLst>
+                            <p:childTnLst>
+                              <p:par>
+                                <p:cTn id="5" presetID="10" presetClass="entr" presetSubtype="0" fill="hold" nodeType="clickEffect">
+                                  <p:stCondLst>
+                                    <p:cond delay="0"/>
+                                  </p:stCondLst>
+                                  <p:childTnLst>
+                                    <p:set>
+                                      <p:cBhvr>
+                                        <p:cTn id="6" dur="1" fill="hold">
+                                          <p:stCondLst>
+                                            <p:cond delay="0"/>
+                                          </p:stCondLst>
+                                        </p:cTn>
+                                        <p:tgtEl>
+                                          <p:spTgt spid="11"/>
+                                        </p:tgtEl>
+                                        <p:attrNameLst>
+                                          <p:attrName>style.visibility</p:attrName>
+                                        </p:attrNameLst>
+                                      </p:cBhvr>
+                                      <p:to>
+                                        <p:strVal val="visible"/>
+                                      </p:to>
+                                    </p:set>
+                                    <p:animEffect transition="in" filter="fade">
+                                      <p:cBhvr>
+                                        <p:cTn id="7" dur="500"/>
+                                        <p:tgtEl>
+                                          <p:spTgt spid="11"/>
+                                        </p:tgtEl>
+                                      </p:cBhvr>
+                                    </p:animEffect>
+                                  </p:childTnLst>
+                                </p:cTn>
+                              </p:par>
+                              <p:par>
+                                <p:cTn id="8" presetID="10" presetClass="entr" presetSubtype="0" fill="hold" grpId="0" nodeType="withEffect">
+                                  <p:stCondLst>
+                                    <p:cond delay="0"/>
+                                  </p:stCondLst>
+                                  <p:childTnLst>
+                                    <p:set>
+                                      <p:cBhvr>
+                                        <p:cTn id="9" dur="1" fill="hold">
+                                          <p:stCondLst>
+                                            <p:cond delay="0"/>
+                                          </p:stCondLst>
+                                        </p:cTn>
+                                        <p:tgtEl>
+                                          <p:spTgt spid="12"/>
+                                        </p:tgtEl>
+                                        <p:attrNameLst>
+                                          <p:attrName>style.visibility</p:attrName>
+                                        </p:attrNameLst>
+                                      </p:cBhvr>
+                                      <p:to>
+                                        <p:strVal val="visible"/>
+                                      </p:to>
+                                    </p:set>
+                                    <p:animEffect transition="in" filter="fade">
+                                      <p:cBhvr>
+                                        <p:cTn id="10" dur="500"/>
+                                        <p:tgtEl>
+                                          <p:spTgt spid="12"/>
+                                        </p:tgtEl>
+                                      </p:cBhvr>
+                                    </p:animEffect>
+                                  </p:childTnLst>
+                                </p:cTn>
+                              </p:par>
+                            </p:childTnLst>
+                          </p:cTn>
+                        </p:par>
+                      </p:childTnLst>
+                    </p:cTn>
+                  </p:par>
+                  <p:par>
+                    <p:cTn id="11" fill="hold">
+                      <p:stCondLst>
+                        <p:cond delay="indefinite"/>
+                      </p:stCondLst>
+                      <p:childTnLst>
+                        <p:par>
+                          <p:cTn id="12" fill="hold">
+                            <p:stCondLst>
+                              <p:cond delay="0"/>
+                            </p:stCondLst>
+                            <p:childTnLst>
+                              <p:par>
+                                <p:cTn id="13" presetID="22" presetClass="entr" presetSubtype="1" fill="hold" nodeType="clickEffect">
+                                  <p:stCondLst>
+                                    <p:cond delay="0"/>
+                                  </p:stCondLst>
+                                  <p:childTnLst>
+                                    <p:set>
+                                      <p:cBhvr>
+                                        <p:cTn id="14" dur="1" fill="hold">
+                                          <p:stCondLst>
+                                            <p:cond delay="0"/>
+                                          </p:stCondLst>
+                                        </p:cTn>
+                                        <p:tgtEl>
+                                          <p:spTgt spid="14"/>
+                                        </p:tgtEl>
+                                        <p:attrNameLst>
+                                          <p:attrName>style.visibility</p:attrName>
+                                        </p:attrNameLst>
+                                      </p:cBhvr>
+                                      <p:to>
+                                        <p:strVal val="visible"/>
+                                      </p:to>
+                                    </p:set>
+                                    <p:animEffect transition="in" filter="wipe(up)">
+                                      <p:cBhvr>
+                                        <p:cTn id="15" dur="500"/>
+                                        <p:tgtEl>
+                                          <p:spTgt spid="14"/>
+                                        </p:tgtEl>
+                                      </p:cBhvr>
+                                    </p:animEffect>
+                                  </p:childTnLst>
+                                </p:cTn>
+                              </p:par>
+                            </p:childTnLst>
+                          </p:cTn>
+                        </p:par>
+                      </p:childTnLst>
+                    </p:cTn>
+                  </p:par>
+                  <p:par>
+                    <p:cTn id="16" fill="hold">
+                      <p:stCondLst>
+                        <p:cond delay="indefinite"/>
+                      </p:stCondLst>
+                      <p:childTnLst>
+                        <p:par>
+                          <p:cTn id="17" fill="hold">
+                            <p:stCondLst>
+                              <p:cond delay="0"/>
+                            </p:stCondLst>
+                            <p:childTnLst>
+                              <p:par>
+                                <p:cTn id="18" presetID="10" presetClass="entr" presetSubtype="0" fill="hold" grpId="0" nodeType="clickEffect">
+                                  <p:stCondLst>
+                                    <p:cond delay="0"/>
+                                  </p:stCondLst>
+                                  <p:childTnLst>
+                                    <p:set>
+                                      <p:cBhvr>
+                                        <p:cTn id="19" dur="1" fill="hold">
+                                          <p:stCondLst>
+                                            <p:cond delay="0"/>
+                                          </p:stCondLst>
+                                        </p:cTn>
+                                        <p:tgtEl>
+                                          <p:spTgt spid="13"/>
+                                        </p:tgtEl>
+                                        <p:attrNameLst>
+                                          <p:attrName>style.visibility</p:attrName>
+                                        </p:attrNameLst>
+                                      </p:cBhvr>
+                                      <p:to>
+                                        <p:strVal val="visible"/>
+                                      </p:to>
+                                    </p:set>
+                                    <p:animEffect transition="in" filter="fade">
+                                      <p:cBhvr>
+                                        <p:cTn id="20" dur="500"/>
+                                        <p:tgtEl>
+                                          <p:spTgt spid="13"/>
+                                        </p:tgtEl>
+                                      </p:cBhvr>
+                                    </p:animEffect>
+                                  </p:childTnLst>
+                                </p:cTn>
+                              </p:par>
+                            </p:childTnLst>
+                          </p:cTn>
+                        </p:par>
+                      </p:childTnLst>
+                    </p:cTn>
+                  </p:par>
+                  <p:par>
+                    <p:cTn id="21" fill="hold">
+                      <p:stCondLst>
+                        <p:cond delay="indefinite"/>
+                      </p:stCondLst>
+                      <p:childTnLst>
+                        <p:par>
+                          <p:cTn id="22" fill="hold">
+                            <p:stCondLst>
+                              <p:cond delay="0"/>
+                            </p:stCondLst>
+                            <p:childTnLst>
+                              <p:par>
+                                <p:cTn id="23" presetID="10" presetClass="entr" fill="hold" nodeType="clickEffect">
+                                  <p:stCondLst>
+                                    <p:cond delay="0"/>
+                                  </p:stCondLst>
+                                  <p:childTnLst>
+                                    <p:set>
+                                      <p:cBhvr>
+                                        <p:cTn id="24" dur="1" fill="hold">
+                                          <p:stCondLst>
+                                            <p:cond delay="0"/>
+                                          </p:stCondLst>
+                                        </p:cTn>
+                                        <p:tgtEl>
+                                          <p:spTgt spid="15"/>
+                                        </p:tgtEl>
+                                        <p:attrNameLst>
+                                          <p:attrName>style.visibility</p:attrName>
+                                        </p:attrNameLst>
+                                      </p:cBhvr>
+                                      <p:to>
+                                        <p:strVal val="visible"/>
+                                      </p:to>
+                                    </p:set>
+                                    <p:animEffect transition="in" filter="fade">
+                                      <p:cBhvr additive="repl">
+                                        <p:cTn id="25" dur="500"/>
+                                        <p:tgtEl>
+                                          <p:spTgt spid="15"/>
+                                        </p:tgtEl>
+                                      </p:cBhvr>
+                                    </p:animEffect>
+                                  </p:childTnLst>
+                                </p:cTn>
+                              </p:par>
+                            </p:childTnLst>
+                          </p:cTn>
+                        </p:par>
+                      </p:childTnLst>
+                    </p:cTn>
+                  </p:par>
+                  <p:par>
+                    <p:cTn id="26" fill="hold">
+                      <p:stCondLst>
+                        <p:cond delay="indefinite"/>
+                      </p:stCondLst>
+                      <p:childTnLst>
+                        <p:par>
+                          <p:cTn id="27" fill="hold">
+                            <p:stCondLst>
+                              <p:cond delay="0"/>
+                            </p:stCondLst>
+                            <p:childTnLst>
+                              <p:par>
+                                <p:cTn id="28" presetID="10" presetClass="entr" fill="hold" nodeType="clickEffect">
+                                  <p:stCondLst>
+                                    <p:cond delay="0"/>
+                                  </p:stCondLst>
+                                  <p:childTnLst>
+                                    <p:set>
+                                      <p:cBhvr>
+                                        <p:cTn id="29" dur="1" fill="hold">
+                                          <p:stCondLst>
+                                            <p:cond delay="0"/>
+                                          </p:stCondLst>
+                                        </p:cTn>
+                                        <p:tgtEl>
+                                          <p:spTgt spid="16"/>
+                                        </p:tgtEl>
+                                        <p:attrNameLst>
+                                          <p:attrName>style.visibility</p:attrName>
+                                        </p:attrNameLst>
+                                      </p:cBhvr>
+                                      <p:to>
+                                        <p:strVal val="visible"/>
+                                      </p:to>
+                                    </p:set>
+                                    <p:animEffect transition="in" filter="fade">
+                                      <p:cBhvr additive="repl">
+                                        <p:cTn id="30" dur="500"/>
+                                        <p:tgtEl>
+                                          <p:spTgt spid="16"/>
+                                        </p:tgtEl>
+                                      </p:cBhvr>
+                                    </p:animEffect>
+                                  </p:childTnLst>
+                                </p:cTn>
+                              </p:par>
+                            </p:childTnLst>
+                          </p:cTn>
+                        </p:par>
+                      </p:childTnLst>
+                    </p:cTn>
+                  </p:par>
+                  <p:par>
+                    <p:cTn id="31" fill="hold">
+                      <p:stCondLst>
+                        <p:cond delay="indefinite"/>
+                      </p:stCondLst>
+                      <p:childTnLst>
+                        <p:par>
+                          <p:cTn id="32" fill="hold">
+                            <p:stCondLst>
+                              <p:cond delay="0"/>
+                            </p:stCondLst>
+                            <p:childTnLst>
+                              <p:par>
+                                <p:cTn id="33" presetID="2" presetClass="entr" presetSubtype="4" fill="hold" grpId="0" nodeType="clickEffect">
+                                  <p:stCondLst>
+                                    <p:cond delay="0"/>
+                                  </p:stCondLst>
+                                  <p:childTnLst>
+                                    <p:set>
+                                      <p:cBhvr>
+                                        <p:cTn id="34" dur="1" fill="hold">
+                                          <p:stCondLst>
+                                            <p:cond delay="0"/>
+                                          </p:stCondLst>
+                                        </p:cTn>
+                                        <p:tgtEl>
+                                          <p:spTgt spid="17"/>
+                                        </p:tgtEl>
+                                        <p:attrNameLst>
+                                          <p:attrName>style.visibility</p:attrName>
+                                        </p:attrNameLst>
+                                      </p:cBhvr>
+                                      <p:to>
+                                        <p:strVal val="visible"/>
+                                      </p:to>
+                                    </p:set>
+                                    <p:anim calcmode="lin" valueType="num">
+                                      <p:cBhvr additive="base">
+                                        <p:cTn id="35" dur="500" fill="hold"/>
+                                        <p:tgtEl>
+                                          <p:spTgt spid="17"/>
+                                        </p:tgtEl>
+                                        <p:attrNameLst>
+                                          <p:attrName>ppt_x</p:attrName>
+                                        </p:attrNameLst>
+                                      </p:cBhvr>
+                                      <p:tavLst>
+                                        <p:tav tm="0">
+                                          <p:val>
+                                            <p:strVal val="#ppt_x"/>
+                                          </p:val>
+                                        </p:tav>
+                                        <p:tav tm="100000">
+                                          <p:val>
+                                            <p:strVal val="#ppt_x"/>
+                                          </p:val>
+                                        </p:tav>
+                                      </p:tavLst>
+                                    </p:anim>
+                                    <p:anim calcmode="lin" valueType="num">
+                                      <p:cBhvr additive="base">
+                                        <p:cTn id="36" dur="500" fill="hold"/>
+                                        <p:tgtEl>
+                                          <p:spTgt spid="17"/>
+                                        </p:tgtEl>
+                                        <p:attrNameLst>
+                                          <p:attrName>ppt_y</p:attrName>
+                                        </p:attrNameLst>
+                                      </p:cBhvr>
+                                      <p:tavLst>
+                                        <p:tav tm="0">
+                                          <p:val>
+                                            <p:strVal val="1+#ppt_h/2"/>
+                                          </p:val>
+                                        </p:tav>
+                                        <p:tav tm="100000">
+                                          <p:val>
+                                            <p:strVal val="#ppt_y"/>
+                                          </p:val>
+                                        </p:tav>
+                                      </p:tavLst>
+                                    </p:anim>
+                                  </p:childTnLst>
+                                </p:cTn>
+                              </p:par>
+                            </p:childTnLst>
+                          </p:cTn>
+                        </p:par>
+                      </p:childTnLst>
+                    </p:cTn>
+                  </p:par>
+                </p:childTnLst>
+              </p:cTn>
+              <p:prevCondLst>
+                <p:cond evt="onPrev" delay="0">
+                  <p:tgtEl>
+                    <p:sldTgt/>
+                  </p:tgtEl>
+                </p:cond>
+              </p:prevCondLst>
+              <p:nextCondLst>
+                <p:cond evt="onNext" delay="0">
+                  <p:tgtEl>
+                    <p:sldTgt/>
+                  </p:tgtEl>
+                </p:cond>
+              </p:nextCondLst>
+            </p:seq>
+          </p:childTnLst>
+        </p:cTn>
+      </p:par>
+    </p:tnLst>
+    <p:bldLst>
+      <p:bldP spid="12" grpId="0"/>
+      <p:bldP spid="13" grpId="0" animBg="1"/>
+      <p:bldP spid="17" grpId="0"/>
+    </p:bldLst>
+  </p:timing>
+</p:sld>
+</file>
+
+<file path=ppt/slides/slide6.xml><?xml version="1.0" encoding="utf-8"?>
+<p:sld xmlns:a="http://schemas.openxmlformats.org/drawingml/2006/main" xmlns:r="http://schemas.openxmlformats.org/officeDocument/2006/relationships" xmlns:p="http://schemas.openxmlformats.org/presentationml/2006/main">
+  <p:cSld>
+    <p:bg>
+      <p:bgPr>
+        <a:solidFill>
+          <a:srgbClr val="FFFFFF"/>
+        </a:solidFill>
+        <a:effectLst/>
+      </p:bgPr>
+    </p:bg>
+    <p:spTree>
+      <p:nvGrpSpPr>
+        <p:cNvPr id="1" name=""/>
+        <p:cNvGrpSpPr/>
+        <p:nvPr/>
+      </p:nvGrpSpPr>
+      <p:grpSpPr>
+        <a:xfrm>
+          <a:off x="0" y="0"/>
+          <a:ext cx="0" cy="0"/>
+          <a:chOff x="0" y="0"/>
+          <a:chExt cx="0" cy="0"/>
+        </a:xfrm>
+      </p:grpSpPr>
+      <p:sp>
+        <p:nvSpPr>
+          <p:cNvPr id="18" name="Text 0"/>
+          <p:cNvSpPr/>
+          <p:nvPr/>
+        </p:nvSpPr>
+        <p:spPr>
+          <a:xfrm>
+            <a:off x="320040" y="128160"/>
+            <a:ext cx="11521080" cy="456840"/>
+          </a:xfrm>
+          <a:prstGeom prst="rect">
+            <a:avLst/>
+          </a:prstGeom>
+          <a:noFill/>
+          <a:ln w="0">
+            <a:noFill/>
+          </a:ln>
+        </p:spPr>
+        <p:style>
+          <a:lnRef idx="0">
+            <a:scrgbClr r="0" g="0" b="0"/>
+          </a:lnRef>
+          <a:fillRef idx="0">
+            <a:scrgbClr r="0" g="0" b="0"/>
+          </a:fillRef>
+          <a:effectRef idx="0">
+            <a:scrgbClr r="0" g="0" b="0"/>
+          </a:effectRef>
+          <a:fontRef idx="minor"/>
+        </p:style>
+        <p:txBody>
+          <a:bodyPr lIns="90000" tIns="45000" rIns="90000" bIns="45000" anchor="ctr">
+            <a:noAutofit/>
+          </a:bodyPr>
+          <a:lstStyle/>
+          <a:p>
+            <a:pPr algn="ctr" defTabSz="914400">
+              <a:lnSpc>
+                <a:spcPct val="100000"/>
+              </a:lnSpc>
+              <a:tabLst>
+                <a:tab pos="0" algn="l"/>
+              </a:tabLst>
+            </a:pPr>
+            <a:r>
+              <a:rPr lang="en-US" sz="2400" b="1" u="none" strike="noStrike" dirty="0">
+                <a:solidFill>
+                  <a:srgbClr val="2C3E50"/>
+                </a:solidFill>
+                <a:effectLst/>
+                <a:uFillTx/>
+                <a:latin typeface="Cambria"/>
+                <a:ea typeface="Cambria"/>
+              </a:rPr>
+              <a:t>Confirmed independently: Cytoscape + functional enrichment</a:t>
+            </a:r>
+            <a:endParaRPr lang="en-US" sz="2400" b="0" u="none" strike="noStrike" dirty="0">
+              <a:solidFill>
+                <a:srgbClr val="000000"/>
+              </a:solidFill>
+              <a:effectLst/>
+              <a:uFillTx/>
+              <a:latin typeface="Arial"/>
+            </a:endParaRPr>
+          </a:p>
+        </p:txBody>
+      </p:sp>
+      <p:pic>
+        <p:nvPicPr>
+          <p:cNvPr id="19" name="Image 0" descr="/tmp/assets/fig2_cyto.png"/>
+          <p:cNvPicPr/>
+          <p:nvPr/>
+        </p:nvPicPr>
+        <p:blipFill>
+          <a:blip r:embed="rId2"/>
+          <a:stretch/>
+        </p:blipFill>
+        <p:spPr>
+          <a:xfrm>
+            <a:off x="320040" y="868680"/>
+            <a:ext cx="5028840" cy="1866240"/>
+          </a:xfrm>
+          <a:prstGeom prst="rect">
+            <a:avLst/>
+          </a:prstGeom>
+          <a:noFill/>
+          <a:ln w="0">
+            <a:noFill/>
+          </a:ln>
+        </p:spPr>
+      </p:pic>
+      <p:sp>
+        <p:nvSpPr>
+          <p:cNvPr id="20" name="Text 1"/>
+          <p:cNvSpPr/>
+          <p:nvPr/>
+        </p:nvSpPr>
+        <p:spPr>
+          <a:xfrm>
+            <a:off x="320040" y="2834640"/>
+            <a:ext cx="5028840" cy="914040"/>
+          </a:xfrm>
+          <a:prstGeom prst="rect">
+            <a:avLst/>
+          </a:prstGeom>
+          <a:noFill/>
+          <a:ln w="0">
+            <a:noFill/>
+          </a:ln>
+        </p:spPr>
+        <p:style>
+          <a:lnRef idx="0">
+            <a:scrgbClr r="0" g="0" b="0"/>
+          </a:lnRef>
+          <a:fillRef idx="0">
+            <a:scrgbClr r="0" g="0" b="0"/>
+          </a:fillRef>
+          <a:effectRef idx="0">
+            <a:scrgbClr r="0" g="0" b="0"/>
+          </a:effectRef>
+          <a:fontRef idx="minor"/>
+        </p:style>
+        <p:txBody>
+          <a:bodyPr lIns="90000" tIns="45000" rIns="90000" bIns="45000" anchor="ctr">
+            <a:noAutofit/>
+          </a:bodyPr>
+          <a:lstStyle/>
+          <a:p>
+            <a:pPr defTabSz="914400">
+              <a:lnSpc>
+                <a:spcPct val="100000"/>
+              </a:lnSpc>
+              <a:tabLst>
+                <a:tab pos="0" algn="l"/>
+              </a:tabLst>
+            </a:pPr>
+            <a:r>
+              <a:rPr lang="en-US" sz="1050" b="0" i="1" u="none" strike="noStrike" dirty="0">
+                <a:solidFill>
+                  <a:srgbClr val="2C3E50"/>
+                </a:solidFill>
+                <a:effectLst/>
+                <a:uFillTx/>
+                <a:latin typeface="Calibri"/>
+                <a:ea typeface="Calibri"/>
+              </a:rPr>
+              <a:t>Figure 2 — the same module rebuilt in Cytoscape (stringApp): 16 nodes, 107 edges, density 0.892, clustering coefficient 0.925, one connected component. Same result, second tool.</a:t>
+            </a:r>
+            <a:endParaRPr lang="en-US" sz="1050" b="0" u="none" strike="noStrike" dirty="0">
+              <a:solidFill>
+                <a:srgbClr val="000000"/>
+              </a:solidFill>
+              <a:effectLst/>
+              <a:uFillTx/>
+              <a:latin typeface="Arial"/>
+            </a:endParaRPr>
+          </a:p>
+        </p:txBody>
+      </p:sp>
+      <p:sp>
+        <p:nvSpPr>
+          <p:cNvPr id="21" name="Text 2"/>
+          <p:cNvSpPr/>
+          <p:nvPr/>
+        </p:nvSpPr>
+        <p:spPr>
+          <a:xfrm>
+            <a:off x="320040" y="3931920"/>
+            <a:ext cx="5028840" cy="548280"/>
+          </a:xfrm>
+          <a:prstGeom prst="roundRect">
+            <a:avLst>
+              <a:gd name="adj" fmla="val 8333"/>
+            </a:avLst>
+          </a:prstGeom>
+          <a:solidFill>
+            <a:srgbClr val="1A7A34"/>
+          </a:solidFill>
+          <a:ln w="0">
+            <a:solidFill>
+              <a:srgbClr val="1A7A34"/>
+            </a:solidFill>
+          </a:ln>
+        </p:spPr>
+        <p:style>
+          <a:lnRef idx="0">
+            <a:scrgbClr r="0" g="0" b="0"/>
+          </a:lnRef>
+          <a:fillRef idx="0">
+            <a:scrgbClr r="0" g="0" b="0"/>
+          </a:fillRef>
+          <a:effectRef idx="0">
+            <a:scrgbClr r="0" g="0" b="0"/>
+          </a:effectRef>
+          <a:fontRef idx="minor"/>
+        </p:style>
+        <p:txBody>
+          <a:bodyPr lIns="50760" tIns="50760" rIns="50760" bIns="50760" anchor="ctr">
+            <a:noAutofit/>
+          </a:bodyPr>
+          <a:lstStyle/>
+          <a:p>
+            <a:pPr algn="ctr" defTabSz="914400">
+              <a:lnSpc>
+                <a:spcPct val="100000"/>
+              </a:lnSpc>
+              <a:tabLst>
+                <a:tab pos="0" algn="l"/>
+              </a:tabLst>
+            </a:pPr>
+            <a:r>
+              <a:rPr lang="en-US" sz="1300" b="1" u="none" strike="noStrike">
+                <a:solidFill>
+                  <a:srgbClr val="FFFFFF"/>
+                </a:solidFill>
+                <a:effectLst/>
+                <a:uFillTx/>
+                <a:latin typeface="Calibri"/>
+              </a:rPr>
+              <a:t>STRING PPI enrichment:  p &lt; 10</a:t>
+            </a:r>
+            <a:r>
+              <a:rPr lang="en-US" sz="900" b="1" u="none" strike="noStrike" baseline="30000">
+                <a:solidFill>
+                  <a:srgbClr val="FFFFFF"/>
+                </a:solidFill>
+                <a:effectLst/>
+                <a:uFillTx/>
+                <a:latin typeface="Calibri"/>
+              </a:rPr>
+              <a:t>−16</a:t>
+            </a:r>
+            <a:r>
+              <a:rPr lang="en-US" sz="1200" b="0" u="none" strike="noStrike">
+                <a:solidFill>
+                  <a:srgbClr val="F2F2F2"/>
+                </a:solidFill>
+                <a:effectLst/>
+                <a:uFillTx/>
+                <a:latin typeface="Calibri"/>
+              </a:rPr>
+              <a:t>   — far more connected than random</a:t>
+            </a:r>
+            <a:endParaRPr lang="en-US" sz="1200" b="0" u="none" strike="noStrike">
+              <a:solidFill>
+                <a:srgbClr val="FFFFFF"/>
+              </a:solidFill>
+              <a:effectLst/>
+              <a:uFillTx/>
+              <a:latin typeface="Arial"/>
+            </a:endParaRPr>
+          </a:p>
+        </p:txBody>
+      </p:sp>
+      <p:graphicFrame>
+        <p:nvGraphicFramePr>
+          <p:cNvPr id="22" name="Table 0"/>
+          <p:cNvGraphicFramePr/>
+          <p:nvPr>
+            <p:extLst>
+              <p:ext uri="{D42A27DB-BD31-4B8C-83A1-F6EECF244321}">
+                <p14:modId xmlns:p14="http://schemas.microsoft.com/office/powerpoint/2010/main" val="716754159"/>
+              </p:ext>
+            </p:extLst>
+          </p:nvPr>
+        </p:nvGraphicFramePr>
+        <p:xfrm>
+          <a:off x="5559425" y="1152540"/>
+          <a:ext cx="6309360" cy="1900800"/>
+        </p:xfrm>
+        <a:graphic>
+          <a:graphicData uri="http://schemas.openxmlformats.org/drawingml/2006/table">
+            <a:tbl>
+              <a:tblPr/>
+              <a:tblGrid>
+                <a:gridCol w="1554480">
+                  <a:extLst>
+                    <a:ext uri="{9D8B030D-6E8A-4147-A177-3AD203B41FA5}">
+                      <a16:colId xmlns:a16="http://schemas.microsoft.com/office/drawing/2014/main" val="20000"/>
+                    </a:ext>
+                  </a:extLst>
+                </a:gridCol>
+                <a:gridCol w="3383280">
+                  <a:extLst>
+                    <a:ext uri="{9D8B030D-6E8A-4147-A177-3AD203B41FA5}">
+                      <a16:colId xmlns:a16="http://schemas.microsoft.com/office/drawing/2014/main" val="20001"/>
+                    </a:ext>
+                  </a:extLst>
+                </a:gridCol>
+                <a:gridCol w="1371600">
+                  <a:extLst>
+                    <a:ext uri="{9D8B030D-6E8A-4147-A177-3AD203B41FA5}">
+                      <a16:colId xmlns:a16="http://schemas.microsoft.com/office/drawing/2014/main" val="20002"/>
+                    </a:ext>
+                  </a:extLst>
+                </a:gridCol>
+              </a:tblGrid>
+              <a:tr h="237600">
+                <a:tc>
+                  <a:txBody>
+                    <a:bodyPr/>
+                    <a:lstStyle/>
+                    <a:p>
+                      <a:pPr defTabSz="914400">
+                        <a:lnSpc>
+                          <a:spcPct val="100000"/>
+                        </a:lnSpc>
+                        <a:tabLst>
+                          <a:tab pos="0" algn="l"/>
+                        </a:tabLst>
+                      </a:pPr>
+                      <a:r>
+                        <a:rPr lang="en-US" sz="950" b="1" u="none" strike="noStrike">
+                          <a:solidFill>
+                            <a:srgbClr val="FFFFFF"/>
+                          </a:solidFill>
+                          <a:effectLst/>
+                          <a:uFillTx/>
+                          <a:latin typeface="Calibri"/>
+                          <a:ea typeface="Calibri"/>
+                        </a:rPr>
+                        <a:t>Source</a:t>
+                      </a:r>
+                      <a:endParaRPr lang="en-US" sz="950" b="0" u="none" strike="noStrike">
+                        <a:solidFill>
+                          <a:srgbClr val="FFFFFF"/>
+                        </a:solidFill>
+                        <a:effectLst/>
+                        <a:uFillTx/>
+                        <a:latin typeface="Arial"/>
+                      </a:endParaRPr>
+                    </a:p>
+                  </a:txBody>
+                  <a:tcPr anchor="ctr">
+                    <a:lnL w="6480">
+                      <a:solidFill>
+                        <a:srgbClr val="D0D0D0"/>
+                      </a:solidFill>
+                      <a:prstDash val="solid"/>
+                    </a:lnL>
+                    <a:lnR w="6480">
+                      <a:solidFill>
+                        <a:srgbClr val="D0D0D0"/>
+                      </a:solidFill>
+                      <a:prstDash val="solid"/>
+                    </a:lnR>
+                    <a:lnT w="6480">
+                      <a:solidFill>
+                        <a:srgbClr val="D0D0D0"/>
+                      </a:solidFill>
+                      <a:prstDash val="solid"/>
+                    </a:lnT>
+                    <a:lnB w="6480">
+                      <a:solidFill>
+                        <a:srgbClr val="D0D0D0"/>
+                      </a:solidFill>
+                      <a:prstDash val="solid"/>
+                    </a:lnB>
+                    <a:solidFill>
+                      <a:srgbClr val="2C3E50"/>
+                    </a:solidFill>
+                  </a:tcPr>
+                </a:tc>
+                <a:tc>
+                  <a:txBody>
+                    <a:bodyPr/>
+                    <a:lstStyle/>
+                    <a:p>
+                      <a:pPr defTabSz="914400">
+                        <a:lnSpc>
+                          <a:spcPct val="100000"/>
+                        </a:lnSpc>
+                        <a:tabLst>
+                          <a:tab pos="0" algn="l"/>
+                        </a:tabLst>
+                      </a:pPr>
+                      <a:r>
+                        <a:rPr lang="en-US" sz="950" b="1" u="none" strike="noStrike">
+                          <a:solidFill>
+                            <a:srgbClr val="FFFFFF"/>
+                          </a:solidFill>
+                          <a:effectLst/>
+                          <a:uFillTx/>
+                          <a:latin typeface="Calibri"/>
+                          <a:ea typeface="Calibri"/>
+                        </a:rPr>
+                        <a:t>Enriched term</a:t>
+                      </a:r>
+                      <a:endParaRPr lang="en-US" sz="950" b="0" u="none" strike="noStrike">
+                        <a:solidFill>
+                          <a:srgbClr val="FFFFFF"/>
+                        </a:solidFill>
+                        <a:effectLst/>
+                        <a:uFillTx/>
+                        <a:latin typeface="Arial"/>
+                      </a:endParaRPr>
+                    </a:p>
+                  </a:txBody>
+                  <a:tcPr anchor="ctr">
+                    <a:lnL w="6480">
+                      <a:solidFill>
+                        <a:srgbClr val="D0D0D0"/>
+                      </a:solidFill>
+                      <a:prstDash val="solid"/>
+                    </a:lnL>
+                    <a:lnR w="6480">
+                      <a:solidFill>
+                        <a:srgbClr val="D0D0D0"/>
+                      </a:solidFill>
+                      <a:prstDash val="solid"/>
+                    </a:lnR>
+                    <a:lnT w="6480">
+                      <a:solidFill>
+                        <a:srgbClr val="D0D0D0"/>
+                      </a:solidFill>
+                      <a:prstDash val="solid"/>
+                    </a:lnT>
+                    <a:lnB w="6480">
+                      <a:solidFill>
+                        <a:srgbClr val="D0D0D0"/>
+                      </a:solidFill>
+                      <a:prstDash val="solid"/>
+                    </a:lnB>
+                    <a:solidFill>
+                      <a:srgbClr val="2C3E50"/>
+                    </a:solidFill>
+                  </a:tcPr>
+                </a:tc>
+                <a:tc>
+                  <a:txBody>
+                    <a:bodyPr/>
+                    <a:lstStyle/>
+                    <a:p>
+                      <a:pPr defTabSz="914400">
+                        <a:lnSpc>
+                          <a:spcPct val="100000"/>
+                        </a:lnSpc>
+                        <a:tabLst>
+                          <a:tab pos="0" algn="l"/>
+                        </a:tabLst>
+                      </a:pPr>
+                      <a:r>
+                        <a:rPr lang="en-US" sz="950" b="1" u="none" strike="noStrike">
+                          <a:solidFill>
+                            <a:srgbClr val="FFFFFF"/>
+                          </a:solidFill>
+                          <a:effectLst/>
+                          <a:uFillTx/>
+                          <a:latin typeface="Calibri"/>
+                          <a:ea typeface="Calibri"/>
+                        </a:rPr>
+                        <a:t>FDR</a:t>
+                      </a:r>
+                      <a:endParaRPr lang="en-US" sz="950" b="0" u="none" strike="noStrike">
+                        <a:solidFill>
+                          <a:srgbClr val="FFFFFF"/>
+                        </a:solidFill>
+                        <a:effectLst/>
+                        <a:uFillTx/>
+                        <a:latin typeface="Arial"/>
+                      </a:endParaRPr>
+                    </a:p>
+                  </a:txBody>
+                  <a:tcPr anchor="ctr">
+                    <a:lnL w="6480">
+                      <a:solidFill>
+                        <a:srgbClr val="D0D0D0"/>
+                      </a:solidFill>
+                      <a:prstDash val="solid"/>
+                    </a:lnL>
+                    <a:lnR w="6480">
+                      <a:solidFill>
+                        <a:srgbClr val="D0D0D0"/>
+                      </a:solidFill>
+                      <a:prstDash val="solid"/>
+                    </a:lnR>
+                    <a:lnT w="6480">
+                      <a:solidFill>
+                        <a:srgbClr val="D0D0D0"/>
+                      </a:solidFill>
+                      <a:prstDash val="solid"/>
+                    </a:lnT>
+                    <a:lnB w="6480">
+                      <a:solidFill>
+                        <a:srgbClr val="D0D0D0"/>
+                      </a:solidFill>
+                      <a:prstDash val="solid"/>
+                    </a:lnB>
+                    <a:solidFill>
+                      <a:srgbClr val="2C3E50"/>
+                    </a:solidFill>
+                  </a:tcPr>
+                </a:tc>
+                <a:extLst>
+                  <a:ext uri="{0D108BD9-81ED-4DB2-BD59-A6C34878D82A}">
+                    <a16:rowId xmlns:a16="http://schemas.microsoft.com/office/drawing/2014/main" val="10000"/>
+                  </a:ext>
+                </a:extLst>
+              </a:tr>
+              <a:tr h="237600">
+                <a:tc>
+                  <a:txBody>
+                    <a:bodyPr/>
+                    <a:lstStyle/>
+                    <a:p>
+                      <a:pPr defTabSz="914400">
+                        <a:lnSpc>
+                          <a:spcPct val="100000"/>
+                        </a:lnSpc>
+                        <a:tabLst>
+                          <a:tab pos="0" algn="l"/>
+                        </a:tabLst>
+                      </a:pPr>
+                      <a:r>
+                        <a:rPr lang="en-US" sz="950" b="0" u="none" strike="noStrike">
+                          <a:solidFill>
+                            <a:srgbClr val="2C3E50"/>
+                          </a:solidFill>
+                          <a:effectLst/>
+                          <a:uFillTx/>
+                          <a:latin typeface="Calibri"/>
+                          <a:ea typeface="Calibri"/>
+                        </a:rPr>
+                        <a:t>GO Process</a:t>
+                      </a:r>
+                      <a:endParaRPr lang="en-US" sz="950" b="0" u="none" strike="noStrike">
+                        <a:solidFill>
+                          <a:srgbClr val="000000"/>
+                        </a:solidFill>
+                        <a:effectLst/>
+                        <a:uFillTx/>
+                        <a:latin typeface="Arial"/>
+                      </a:endParaRPr>
+                    </a:p>
+                  </a:txBody>
+                  <a:tcPr anchor="ctr">
+                    <a:lnL w="6480">
+                      <a:solidFill>
+                        <a:srgbClr val="D0D0D0"/>
+                      </a:solidFill>
+                      <a:prstDash val="solid"/>
+                    </a:lnL>
+                    <a:lnR w="6480">
+                      <a:solidFill>
+                        <a:srgbClr val="D0D0D0"/>
+                      </a:solidFill>
+                      <a:prstDash val="solid"/>
+                    </a:lnR>
+                    <a:lnT w="6480">
+                      <a:solidFill>
+                        <a:srgbClr val="D0D0D0"/>
+                      </a:solidFill>
+                      <a:prstDash val="solid"/>
+                    </a:lnT>
+                    <a:lnB w="6480">
+                      <a:solidFill>
+                        <a:srgbClr val="D0D0D0"/>
+                      </a:solidFill>
+                      <a:prstDash val="solid"/>
+                    </a:lnB>
+                    <a:noFill/>
+                  </a:tcPr>
+                </a:tc>
+                <a:tc>
+                  <a:txBody>
+                    <a:bodyPr/>
+                    <a:lstStyle/>
+                    <a:p>
+                      <a:pPr defTabSz="914400">
+                        <a:lnSpc>
+                          <a:spcPct val="100000"/>
+                        </a:lnSpc>
+                        <a:tabLst>
+                          <a:tab pos="0" algn="l"/>
+                        </a:tabLst>
+                      </a:pPr>
+                      <a:r>
+                        <a:rPr lang="en-US" sz="950" b="0" u="none" strike="noStrike" dirty="0">
+                          <a:solidFill>
+                            <a:srgbClr val="2C3E50"/>
+                          </a:solidFill>
+                          <a:effectLst/>
+                          <a:uFillTx/>
+                          <a:latin typeface="Calibri"/>
+                          <a:ea typeface="Calibri"/>
+                        </a:rPr>
+                        <a:t>Sister chromatid cohesion</a:t>
+                      </a:r>
+                      <a:endParaRPr lang="en-US" sz="950" b="0" u="none" strike="noStrike" dirty="0">
+                        <a:solidFill>
+                          <a:srgbClr val="000000"/>
+                        </a:solidFill>
+                        <a:effectLst/>
+                        <a:uFillTx/>
+                        <a:latin typeface="Arial"/>
+                      </a:endParaRPr>
+                    </a:p>
+                  </a:txBody>
+                  <a:tcPr anchor="ctr">
+                    <a:lnL w="6480">
+                      <a:solidFill>
+                        <a:srgbClr val="D0D0D0"/>
+                      </a:solidFill>
+                      <a:prstDash val="solid"/>
+                    </a:lnL>
+                    <a:lnR w="6480">
+                      <a:solidFill>
+                        <a:srgbClr val="D0D0D0"/>
+                      </a:solidFill>
+                      <a:prstDash val="solid"/>
+                    </a:lnR>
+                    <a:lnT w="6480">
+                      <a:solidFill>
+                        <a:srgbClr val="D0D0D0"/>
+                      </a:solidFill>
+                      <a:prstDash val="solid"/>
+                    </a:lnT>
+                    <a:lnB w="6480">
+                      <a:solidFill>
+                        <a:srgbClr val="D0D0D0"/>
+                      </a:solidFill>
+                      <a:prstDash val="solid"/>
+                    </a:lnB>
+                    <a:noFill/>
+                  </a:tcPr>
+                </a:tc>
+                <a:tc>
+                  <a:txBody>
+                    <a:bodyPr/>
+                    <a:lstStyle/>
+                    <a:p>
+                      <a:pPr defTabSz="914400">
+                        <a:lnSpc>
+                          <a:spcPct val="100000"/>
+                        </a:lnSpc>
+                        <a:tabLst>
+                          <a:tab pos="0" algn="l"/>
+                        </a:tabLst>
+                      </a:pPr>
+                      <a:r>
+                        <a:rPr lang="en-US" sz="950" b="0" u="none" strike="noStrike">
+                          <a:solidFill>
+                            <a:srgbClr val="2C3E50"/>
+                          </a:solidFill>
+                          <a:effectLst/>
+                          <a:uFillTx/>
+                          <a:latin typeface="Calibri"/>
+                          <a:ea typeface="Calibri"/>
+                        </a:rPr>
+                        <a:t>1.4e-24</a:t>
+                      </a:r>
+                      <a:endParaRPr lang="en-US" sz="950" b="0" u="none" strike="noStrike">
+                        <a:solidFill>
+                          <a:srgbClr val="000000"/>
+                        </a:solidFill>
+                        <a:effectLst/>
+                        <a:uFillTx/>
+                        <a:latin typeface="Arial"/>
+                      </a:endParaRPr>
+                    </a:p>
+                  </a:txBody>
+                  <a:tcPr anchor="ctr">
+                    <a:lnL w="6480">
+                      <a:solidFill>
+                        <a:srgbClr val="D0D0D0"/>
+                      </a:solidFill>
+                      <a:prstDash val="solid"/>
+                    </a:lnL>
+                    <a:lnR w="6480">
+                      <a:solidFill>
+                        <a:srgbClr val="D0D0D0"/>
+                      </a:solidFill>
+                      <a:prstDash val="solid"/>
+                    </a:lnR>
+                    <a:lnT w="6480">
+                      <a:solidFill>
+                        <a:srgbClr val="D0D0D0"/>
+                      </a:solidFill>
+                      <a:prstDash val="solid"/>
+                    </a:lnT>
+                    <a:lnB w="6480">
+                      <a:solidFill>
+                        <a:srgbClr val="D0D0D0"/>
+                      </a:solidFill>
+                      <a:prstDash val="solid"/>
+                    </a:lnB>
+                    <a:noFill/>
+                  </a:tcPr>
+                </a:tc>
+                <a:extLst>
+                  <a:ext uri="{0D108BD9-81ED-4DB2-BD59-A6C34878D82A}">
+                    <a16:rowId xmlns:a16="http://schemas.microsoft.com/office/drawing/2014/main" val="10001"/>
+                  </a:ext>
+                </a:extLst>
+              </a:tr>
+              <a:tr h="237600">
+                <a:tc>
+                  <a:txBody>
+                    <a:bodyPr/>
+                    <a:lstStyle/>
+                    <a:p>
+                      <a:pPr defTabSz="914400">
+                        <a:lnSpc>
+                          <a:spcPct val="100000"/>
+                        </a:lnSpc>
+                        <a:tabLst>
+                          <a:tab pos="0" algn="l"/>
+                        </a:tabLst>
+                      </a:pPr>
+                      <a:r>
+                        <a:rPr lang="en-US" sz="950" b="0" u="none" strike="noStrike">
+                          <a:solidFill>
+                            <a:srgbClr val="2C3E50"/>
+                          </a:solidFill>
+                          <a:effectLst/>
+                          <a:uFillTx/>
+                          <a:latin typeface="Calibri"/>
+                          <a:ea typeface="Calibri"/>
+                        </a:rPr>
+                        <a:t>GO Process</a:t>
+                      </a:r>
+                      <a:endParaRPr lang="en-US" sz="950" b="0" u="none" strike="noStrike">
+                        <a:solidFill>
+                          <a:srgbClr val="000000"/>
+                        </a:solidFill>
+                        <a:effectLst/>
+                        <a:uFillTx/>
+                        <a:latin typeface="Arial"/>
+                      </a:endParaRPr>
+                    </a:p>
+                  </a:txBody>
+                  <a:tcPr anchor="ctr">
+                    <a:lnL w="6480">
+                      <a:solidFill>
+                        <a:srgbClr val="D0D0D0"/>
+                      </a:solidFill>
+                      <a:prstDash val="solid"/>
+                    </a:lnL>
+                    <a:lnR w="6480">
+                      <a:solidFill>
+                        <a:srgbClr val="D0D0D0"/>
+                      </a:solidFill>
+                      <a:prstDash val="solid"/>
+                    </a:lnR>
+                    <a:lnT w="6480">
+                      <a:solidFill>
+                        <a:srgbClr val="D0D0D0"/>
+                      </a:solidFill>
+                      <a:prstDash val="solid"/>
+                    </a:lnT>
+                    <a:lnB w="6480">
+                      <a:solidFill>
+                        <a:srgbClr val="D0D0D0"/>
+                      </a:solidFill>
+                      <a:prstDash val="solid"/>
+                    </a:lnB>
+                    <a:noFill/>
+                  </a:tcPr>
+                </a:tc>
+                <a:tc>
+                  <a:txBody>
+                    <a:bodyPr/>
+                    <a:lstStyle/>
+                    <a:p>
+                      <a:pPr defTabSz="914400">
+                        <a:lnSpc>
+                          <a:spcPct val="100000"/>
+                        </a:lnSpc>
+                        <a:tabLst>
+                          <a:tab pos="0" algn="l"/>
+                        </a:tabLst>
+                      </a:pPr>
+                      <a:r>
+                        <a:rPr lang="en-US" sz="950" b="0" u="none" strike="noStrike">
+                          <a:solidFill>
+                            <a:srgbClr val="2C3E50"/>
+                          </a:solidFill>
+                          <a:effectLst/>
+                          <a:uFillTx/>
+                          <a:latin typeface="Calibri"/>
+                          <a:ea typeface="Calibri"/>
+                        </a:rPr>
+                        <a:t>Sister chromatid segregation</a:t>
+                      </a:r>
+                      <a:endParaRPr lang="en-US" sz="950" b="0" u="none" strike="noStrike">
+                        <a:solidFill>
+                          <a:srgbClr val="000000"/>
+                        </a:solidFill>
+                        <a:effectLst/>
+                        <a:uFillTx/>
+                        <a:latin typeface="Arial"/>
+                      </a:endParaRPr>
+                    </a:p>
+                  </a:txBody>
+                  <a:tcPr anchor="ctr">
+                    <a:lnL w="6480">
+                      <a:solidFill>
+                        <a:srgbClr val="D0D0D0"/>
+                      </a:solidFill>
+                      <a:prstDash val="solid"/>
+                    </a:lnL>
+                    <a:lnR w="6480">
+                      <a:solidFill>
+                        <a:srgbClr val="D0D0D0"/>
+                      </a:solidFill>
+                      <a:prstDash val="solid"/>
+                    </a:lnR>
+                    <a:lnT w="6480">
+                      <a:solidFill>
+                        <a:srgbClr val="D0D0D0"/>
+                      </a:solidFill>
+                      <a:prstDash val="solid"/>
+                    </a:lnT>
+                    <a:lnB w="6480">
+                      <a:solidFill>
+                        <a:srgbClr val="D0D0D0"/>
+                      </a:solidFill>
+                      <a:prstDash val="solid"/>
+                    </a:lnB>
+                    <a:noFill/>
+                  </a:tcPr>
+                </a:tc>
+                <a:tc>
+                  <a:txBody>
+                    <a:bodyPr/>
+                    <a:lstStyle/>
+                    <a:p>
+                      <a:pPr defTabSz="914400">
+                        <a:lnSpc>
+                          <a:spcPct val="100000"/>
+                        </a:lnSpc>
+                        <a:tabLst>
+                          <a:tab pos="0" algn="l"/>
+                        </a:tabLst>
+                      </a:pPr>
+                      <a:r>
+                        <a:rPr lang="en-US" sz="950" b="0" u="none" strike="noStrike">
+                          <a:solidFill>
+                            <a:srgbClr val="2C3E50"/>
+                          </a:solidFill>
+                          <a:effectLst/>
+                          <a:uFillTx/>
+                          <a:latin typeface="Calibri"/>
+                          <a:ea typeface="Calibri"/>
+                        </a:rPr>
+                        <a:t>2.3e-24</a:t>
+                      </a:r>
+                      <a:endParaRPr lang="en-US" sz="950" b="0" u="none" strike="noStrike">
+                        <a:solidFill>
+                          <a:srgbClr val="000000"/>
+                        </a:solidFill>
+                        <a:effectLst/>
+                        <a:uFillTx/>
+                        <a:latin typeface="Arial"/>
+                      </a:endParaRPr>
+                    </a:p>
+                  </a:txBody>
+                  <a:tcPr anchor="ctr">
+                    <a:lnL w="6480">
+                      <a:solidFill>
+                        <a:srgbClr val="D0D0D0"/>
+                      </a:solidFill>
+                      <a:prstDash val="solid"/>
+                    </a:lnL>
+                    <a:lnR w="6480">
+                      <a:solidFill>
+                        <a:srgbClr val="D0D0D0"/>
+                      </a:solidFill>
+                      <a:prstDash val="solid"/>
+                    </a:lnR>
+                    <a:lnT w="6480">
+                      <a:solidFill>
+                        <a:srgbClr val="D0D0D0"/>
+                      </a:solidFill>
+                      <a:prstDash val="solid"/>
+                    </a:lnT>
+                    <a:lnB w="6480">
+                      <a:solidFill>
+                        <a:srgbClr val="D0D0D0"/>
+                      </a:solidFill>
+                      <a:prstDash val="solid"/>
+                    </a:lnB>
+                    <a:noFill/>
+                  </a:tcPr>
+                </a:tc>
+                <a:extLst>
+                  <a:ext uri="{0D108BD9-81ED-4DB2-BD59-A6C34878D82A}">
+                    <a16:rowId xmlns:a16="http://schemas.microsoft.com/office/drawing/2014/main" val="10002"/>
+                  </a:ext>
+                </a:extLst>
+              </a:tr>
+              <a:tr h="237600">
+                <a:tc>
+                  <a:txBody>
+                    <a:bodyPr/>
+                    <a:lstStyle/>
+                    <a:p>
+                      <a:pPr defTabSz="914400">
+                        <a:lnSpc>
+                          <a:spcPct val="100000"/>
+                        </a:lnSpc>
+                        <a:tabLst>
+                          <a:tab pos="0" algn="l"/>
+                        </a:tabLst>
+                      </a:pPr>
+                      <a:r>
+                        <a:rPr lang="en-US" sz="950" b="0" u="none" strike="noStrike">
+                          <a:solidFill>
+                            <a:srgbClr val="2C3E50"/>
+                          </a:solidFill>
+                          <a:effectLst/>
+                          <a:uFillTx/>
+                          <a:latin typeface="Calibri"/>
+                          <a:ea typeface="Calibri"/>
+                        </a:rPr>
+                        <a:t>GO Process</a:t>
+                      </a:r>
+                      <a:endParaRPr lang="en-US" sz="950" b="0" u="none" strike="noStrike">
+                        <a:solidFill>
+                          <a:srgbClr val="000000"/>
+                        </a:solidFill>
+                        <a:effectLst/>
+                        <a:uFillTx/>
+                        <a:latin typeface="Arial"/>
+                      </a:endParaRPr>
+                    </a:p>
+                  </a:txBody>
+                  <a:tcPr anchor="ctr">
+                    <a:lnL w="6480">
+                      <a:solidFill>
+                        <a:srgbClr val="D0D0D0"/>
+                      </a:solidFill>
+                      <a:prstDash val="solid"/>
+                    </a:lnL>
+                    <a:lnR w="6480">
+                      <a:solidFill>
+                        <a:srgbClr val="D0D0D0"/>
+                      </a:solidFill>
+                      <a:prstDash val="solid"/>
+                    </a:lnR>
+                    <a:lnT w="6480">
+                      <a:solidFill>
+                        <a:srgbClr val="D0D0D0"/>
+                      </a:solidFill>
+                      <a:prstDash val="solid"/>
+                    </a:lnT>
+                    <a:lnB w="6480">
+                      <a:solidFill>
+                        <a:srgbClr val="D0D0D0"/>
+                      </a:solidFill>
+                      <a:prstDash val="solid"/>
+                    </a:lnB>
+                    <a:noFill/>
+                  </a:tcPr>
+                </a:tc>
+                <a:tc>
+                  <a:txBody>
+                    <a:bodyPr/>
+                    <a:lstStyle/>
+                    <a:p>
+                      <a:pPr defTabSz="914400">
+                        <a:lnSpc>
+                          <a:spcPct val="100000"/>
+                        </a:lnSpc>
+                        <a:tabLst>
+                          <a:tab pos="0" algn="l"/>
+                        </a:tabLst>
+                      </a:pPr>
+                      <a:r>
+                        <a:rPr lang="en-US" sz="950" b="0" u="none" strike="noStrike" dirty="0">
+                          <a:solidFill>
+                            <a:srgbClr val="2C3E50"/>
+                          </a:solidFill>
+                          <a:effectLst/>
+                          <a:uFillTx/>
+                          <a:latin typeface="Calibri"/>
+                          <a:ea typeface="Calibri"/>
+                        </a:rPr>
+                        <a:t>Mitotic cell cycle</a:t>
+                      </a:r>
+                      <a:endParaRPr lang="en-US" sz="950" b="0" u="none" strike="noStrike" dirty="0">
+                        <a:solidFill>
+                          <a:srgbClr val="000000"/>
+                        </a:solidFill>
+                        <a:effectLst/>
+                        <a:uFillTx/>
+                        <a:latin typeface="Arial"/>
+                      </a:endParaRPr>
+                    </a:p>
+                  </a:txBody>
+                  <a:tcPr anchor="ctr">
+                    <a:lnL w="6480">
+                      <a:solidFill>
+                        <a:srgbClr val="D0D0D0"/>
+                      </a:solidFill>
+                      <a:prstDash val="solid"/>
+                    </a:lnL>
+                    <a:lnR w="6480">
+                      <a:solidFill>
+                        <a:srgbClr val="D0D0D0"/>
+                      </a:solidFill>
+                      <a:prstDash val="solid"/>
+                    </a:lnR>
+                    <a:lnT w="6480">
+                      <a:solidFill>
+                        <a:srgbClr val="D0D0D0"/>
+                      </a:solidFill>
+                      <a:prstDash val="solid"/>
+                    </a:lnT>
+                    <a:lnB w="6480">
+                      <a:solidFill>
+                        <a:srgbClr val="D0D0D0"/>
+                      </a:solidFill>
+                      <a:prstDash val="solid"/>
+                    </a:lnB>
+                    <a:noFill/>
+                  </a:tcPr>
+                </a:tc>
+                <a:tc>
+                  <a:txBody>
+                    <a:bodyPr/>
+                    <a:lstStyle/>
+                    <a:p>
+                      <a:pPr defTabSz="914400">
+                        <a:lnSpc>
+                          <a:spcPct val="100000"/>
+                        </a:lnSpc>
+                        <a:tabLst>
+                          <a:tab pos="0" algn="l"/>
+                        </a:tabLst>
+                      </a:pPr>
+                      <a:r>
+                        <a:rPr lang="en-US" sz="950" b="0" u="none" strike="noStrike">
+                          <a:solidFill>
+                            <a:srgbClr val="2C3E50"/>
+                          </a:solidFill>
+                          <a:effectLst/>
+                          <a:uFillTx/>
+                          <a:latin typeface="Calibri"/>
+                          <a:ea typeface="Calibri"/>
+                        </a:rPr>
+                        <a:t>1.2e-18</a:t>
+                      </a:r>
+                      <a:endParaRPr lang="en-US" sz="950" b="0" u="none" strike="noStrike">
+                        <a:solidFill>
+                          <a:srgbClr val="000000"/>
+                        </a:solidFill>
+                        <a:effectLst/>
+                        <a:uFillTx/>
+                        <a:latin typeface="Arial"/>
+                      </a:endParaRPr>
+                    </a:p>
+                  </a:txBody>
+                  <a:tcPr anchor="ctr">
+                    <a:lnL w="6480">
+                      <a:solidFill>
+                        <a:srgbClr val="D0D0D0"/>
+                      </a:solidFill>
+                      <a:prstDash val="solid"/>
+                    </a:lnL>
+                    <a:lnR w="6480">
+                      <a:solidFill>
+                        <a:srgbClr val="D0D0D0"/>
+                      </a:solidFill>
+                      <a:prstDash val="solid"/>
+                    </a:lnR>
+                    <a:lnT w="6480">
+                      <a:solidFill>
+                        <a:srgbClr val="D0D0D0"/>
+                      </a:solidFill>
+                      <a:prstDash val="solid"/>
+                    </a:lnT>
+                    <a:lnB w="6480">
+                      <a:solidFill>
+                        <a:srgbClr val="D0D0D0"/>
+                      </a:solidFill>
+                      <a:prstDash val="solid"/>
+                    </a:lnB>
+                    <a:noFill/>
+                  </a:tcPr>
+                </a:tc>
+                <a:extLst>
+                  <a:ext uri="{0D108BD9-81ED-4DB2-BD59-A6C34878D82A}">
+                    <a16:rowId xmlns:a16="http://schemas.microsoft.com/office/drawing/2014/main" val="10003"/>
+                  </a:ext>
+                </a:extLst>
+              </a:tr>
+              <a:tr h="237600">
+                <a:tc>
+                  <a:txBody>
+                    <a:bodyPr/>
+                    <a:lstStyle/>
+                    <a:p>
+                      <a:pPr defTabSz="914400">
+                        <a:lnSpc>
+                          <a:spcPct val="100000"/>
+                        </a:lnSpc>
+                        <a:tabLst>
+                          <a:tab pos="0" algn="l"/>
+                        </a:tabLst>
+                      </a:pPr>
+                      <a:r>
+                        <a:rPr lang="en-US" sz="950" b="0" u="none" strike="noStrike">
+                          <a:solidFill>
+                            <a:srgbClr val="2C3E50"/>
+                          </a:solidFill>
+                          <a:effectLst/>
+                          <a:uFillTx/>
+                          <a:latin typeface="Calibri"/>
+                          <a:ea typeface="Calibri"/>
+                        </a:rPr>
+                        <a:t>GO Component</a:t>
+                      </a:r>
+                      <a:endParaRPr lang="en-US" sz="950" b="0" u="none" strike="noStrike">
+                        <a:solidFill>
+                          <a:srgbClr val="000000"/>
+                        </a:solidFill>
+                        <a:effectLst/>
+                        <a:uFillTx/>
+                        <a:latin typeface="Arial"/>
+                      </a:endParaRPr>
+                    </a:p>
+                  </a:txBody>
+                  <a:tcPr anchor="ctr">
+                    <a:lnL w="6480">
+                      <a:solidFill>
+                        <a:srgbClr val="D0D0D0"/>
+                      </a:solidFill>
+                      <a:prstDash val="solid"/>
+                    </a:lnL>
+                    <a:lnR w="6480">
+                      <a:solidFill>
+                        <a:srgbClr val="D0D0D0"/>
+                      </a:solidFill>
+                      <a:prstDash val="solid"/>
+                    </a:lnR>
+                    <a:lnT w="6480">
+                      <a:solidFill>
+                        <a:srgbClr val="D0D0D0"/>
+                      </a:solidFill>
+                      <a:prstDash val="solid"/>
+                    </a:lnT>
+                    <a:lnB w="6480">
+                      <a:solidFill>
+                        <a:srgbClr val="D0D0D0"/>
+                      </a:solidFill>
+                      <a:prstDash val="solid"/>
+                    </a:lnB>
+                    <a:noFill/>
+                  </a:tcPr>
+                </a:tc>
+                <a:tc>
+                  <a:txBody>
+                    <a:bodyPr/>
+                    <a:lstStyle/>
+                    <a:p>
+                      <a:pPr defTabSz="914400">
+                        <a:lnSpc>
+                          <a:spcPct val="100000"/>
+                        </a:lnSpc>
+                        <a:tabLst>
+                          <a:tab pos="0" algn="l"/>
+                        </a:tabLst>
+                      </a:pPr>
+                      <a:r>
+                        <a:rPr lang="en-US" sz="950" b="0" u="none" strike="noStrike">
+                          <a:solidFill>
+                            <a:srgbClr val="2C3E50"/>
+                          </a:solidFill>
+                          <a:effectLst/>
+                          <a:uFillTx/>
+                          <a:latin typeface="Calibri"/>
+                          <a:ea typeface="Calibri"/>
+                        </a:rPr>
+                        <a:t>Chromosomal region</a:t>
+                      </a:r>
+                      <a:endParaRPr lang="en-US" sz="950" b="0" u="none" strike="noStrike">
+                        <a:solidFill>
+                          <a:srgbClr val="000000"/>
+                        </a:solidFill>
+                        <a:effectLst/>
+                        <a:uFillTx/>
+                        <a:latin typeface="Arial"/>
+                      </a:endParaRPr>
+                    </a:p>
+                  </a:txBody>
+                  <a:tcPr anchor="ctr">
+                    <a:lnL w="6480">
+                      <a:solidFill>
+                        <a:srgbClr val="D0D0D0"/>
+                      </a:solidFill>
+                      <a:prstDash val="solid"/>
+                    </a:lnL>
+                    <a:lnR w="6480">
+                      <a:solidFill>
+                        <a:srgbClr val="D0D0D0"/>
+                      </a:solidFill>
+                      <a:prstDash val="solid"/>
+                    </a:lnR>
+                    <a:lnT w="6480">
+                      <a:solidFill>
+                        <a:srgbClr val="D0D0D0"/>
+                      </a:solidFill>
+                      <a:prstDash val="solid"/>
+                    </a:lnT>
+                    <a:lnB w="6480">
+                      <a:solidFill>
+                        <a:srgbClr val="D0D0D0"/>
+                      </a:solidFill>
+                      <a:prstDash val="solid"/>
+                    </a:lnB>
+                    <a:noFill/>
+                  </a:tcPr>
+                </a:tc>
+                <a:tc>
+                  <a:txBody>
+                    <a:bodyPr/>
+                    <a:lstStyle/>
+                    <a:p>
+                      <a:pPr defTabSz="914400">
+                        <a:lnSpc>
+                          <a:spcPct val="100000"/>
+                        </a:lnSpc>
+                        <a:tabLst>
+                          <a:tab pos="0" algn="l"/>
+                        </a:tabLst>
+                      </a:pPr>
+                      <a:r>
+                        <a:rPr lang="en-US" sz="950" b="0" u="none" strike="noStrike">
+                          <a:solidFill>
+                            <a:srgbClr val="2C3E50"/>
+                          </a:solidFill>
+                          <a:effectLst/>
+                          <a:uFillTx/>
+                          <a:latin typeface="Calibri"/>
+                          <a:ea typeface="Calibri"/>
+                        </a:rPr>
+                        <a:t>7.0e-15</a:t>
+                      </a:r>
+                      <a:endParaRPr lang="en-US" sz="950" b="0" u="none" strike="noStrike">
+                        <a:solidFill>
+                          <a:srgbClr val="000000"/>
+                        </a:solidFill>
+                        <a:effectLst/>
+                        <a:uFillTx/>
+                        <a:latin typeface="Arial"/>
+                      </a:endParaRPr>
+                    </a:p>
+                  </a:txBody>
+                  <a:tcPr anchor="ctr">
+                    <a:lnL w="6480">
+                      <a:solidFill>
+                        <a:srgbClr val="D0D0D0"/>
+                      </a:solidFill>
+                      <a:prstDash val="solid"/>
+                    </a:lnL>
+                    <a:lnR w="6480">
+                      <a:solidFill>
+                        <a:srgbClr val="D0D0D0"/>
+                      </a:solidFill>
+                      <a:prstDash val="solid"/>
+                    </a:lnR>
+                    <a:lnT w="6480">
+                      <a:solidFill>
+                        <a:srgbClr val="D0D0D0"/>
+                      </a:solidFill>
+                      <a:prstDash val="solid"/>
+                    </a:lnT>
+                    <a:lnB w="6480">
+                      <a:solidFill>
+                        <a:srgbClr val="D0D0D0"/>
+                      </a:solidFill>
+                      <a:prstDash val="solid"/>
+                    </a:lnB>
+                    <a:noFill/>
+                  </a:tcPr>
+                </a:tc>
+                <a:extLst>
+                  <a:ext uri="{0D108BD9-81ED-4DB2-BD59-A6C34878D82A}">
+                    <a16:rowId xmlns:a16="http://schemas.microsoft.com/office/drawing/2014/main" val="10004"/>
+                  </a:ext>
+                </a:extLst>
+              </a:tr>
+              <a:tr h="237600">
+                <a:tc>
+                  <a:txBody>
+                    <a:bodyPr/>
+                    <a:lstStyle/>
+                    <a:p>
+                      <a:pPr defTabSz="914400">
+                        <a:lnSpc>
+                          <a:spcPct val="100000"/>
+                        </a:lnSpc>
+                        <a:tabLst>
+                          <a:tab pos="0" algn="l"/>
+                        </a:tabLst>
+                      </a:pPr>
+                      <a:r>
+                        <a:rPr lang="en-US" sz="950" b="0" u="none" strike="noStrike">
+                          <a:solidFill>
+                            <a:srgbClr val="2C3E50"/>
+                          </a:solidFill>
+                          <a:effectLst/>
+                          <a:uFillTx/>
+                          <a:latin typeface="Calibri"/>
+                          <a:ea typeface="Calibri"/>
+                        </a:rPr>
+                        <a:t>KEGG</a:t>
+                      </a:r>
+                      <a:endParaRPr lang="en-US" sz="950" b="0" u="none" strike="noStrike">
+                        <a:solidFill>
+                          <a:srgbClr val="000000"/>
+                        </a:solidFill>
+                        <a:effectLst/>
+                        <a:uFillTx/>
+                        <a:latin typeface="Arial"/>
+                      </a:endParaRPr>
+                    </a:p>
+                  </a:txBody>
+                  <a:tcPr anchor="ctr">
+                    <a:lnL w="6480">
+                      <a:solidFill>
+                        <a:srgbClr val="D0D0D0"/>
+                      </a:solidFill>
+                      <a:prstDash val="solid"/>
+                    </a:lnL>
+                    <a:lnR w="6480">
+                      <a:solidFill>
+                        <a:srgbClr val="D0D0D0"/>
+                      </a:solidFill>
+                      <a:prstDash val="solid"/>
+                    </a:lnR>
+                    <a:lnT w="6480">
+                      <a:solidFill>
+                        <a:srgbClr val="D0D0D0"/>
+                      </a:solidFill>
+                      <a:prstDash val="solid"/>
+                    </a:lnT>
+                    <a:lnB w="6480">
+                      <a:solidFill>
+                        <a:srgbClr val="D0D0D0"/>
+                      </a:solidFill>
+                      <a:prstDash val="solid"/>
+                    </a:lnB>
+                    <a:noFill/>
+                  </a:tcPr>
+                </a:tc>
+                <a:tc>
+                  <a:txBody>
+                    <a:bodyPr/>
+                    <a:lstStyle/>
+                    <a:p>
+                      <a:pPr defTabSz="914400">
+                        <a:lnSpc>
+                          <a:spcPct val="100000"/>
+                        </a:lnSpc>
+                        <a:tabLst>
+                          <a:tab pos="0" algn="l"/>
+                        </a:tabLst>
+                      </a:pPr>
+                      <a:r>
+                        <a:rPr lang="en-US" sz="950" b="0" u="none" strike="noStrike">
+                          <a:solidFill>
+                            <a:srgbClr val="2C3E50"/>
+                          </a:solidFill>
+                          <a:effectLst/>
+                          <a:uFillTx/>
+                          <a:latin typeface="Calibri"/>
+                          <a:ea typeface="Calibri"/>
+                        </a:rPr>
+                        <a:t>Cell cycle (hsa04110)</a:t>
+                      </a:r>
+                      <a:endParaRPr lang="en-US" sz="950" b="0" u="none" strike="noStrike">
+                        <a:solidFill>
+                          <a:srgbClr val="000000"/>
+                        </a:solidFill>
+                        <a:effectLst/>
+                        <a:uFillTx/>
+                        <a:latin typeface="Arial"/>
+                      </a:endParaRPr>
+                    </a:p>
+                  </a:txBody>
+                  <a:tcPr anchor="ctr">
+                    <a:lnL w="6480">
+                      <a:solidFill>
+                        <a:srgbClr val="D0D0D0"/>
+                      </a:solidFill>
+                      <a:prstDash val="solid"/>
+                    </a:lnL>
+                    <a:lnR w="6480">
+                      <a:solidFill>
+                        <a:srgbClr val="D0D0D0"/>
+                      </a:solidFill>
+                      <a:prstDash val="solid"/>
+                    </a:lnR>
+                    <a:lnT w="6480">
+                      <a:solidFill>
+                        <a:srgbClr val="D0D0D0"/>
+                      </a:solidFill>
+                      <a:prstDash val="solid"/>
+                    </a:lnT>
+                    <a:lnB w="6480">
+                      <a:solidFill>
+                        <a:srgbClr val="D0D0D0"/>
+                      </a:solidFill>
+                      <a:prstDash val="solid"/>
+                    </a:lnB>
+                    <a:noFill/>
+                  </a:tcPr>
+                </a:tc>
+                <a:tc>
+                  <a:txBody>
+                    <a:bodyPr/>
+                    <a:lstStyle/>
+                    <a:p>
+                      <a:pPr defTabSz="914400">
+                        <a:lnSpc>
+                          <a:spcPct val="100000"/>
+                        </a:lnSpc>
+                        <a:tabLst>
+                          <a:tab pos="0" algn="l"/>
+                        </a:tabLst>
+                      </a:pPr>
+                      <a:r>
+                        <a:rPr lang="en-US" sz="950" b="0" u="none" strike="noStrike">
+                          <a:solidFill>
+                            <a:srgbClr val="2C3E50"/>
+                          </a:solidFill>
+                          <a:effectLst/>
+                          <a:uFillTx/>
+                          <a:latin typeface="Calibri"/>
+                          <a:ea typeface="Calibri"/>
+                        </a:rPr>
+                        <a:t>6.1e-14</a:t>
+                      </a:r>
+                      <a:endParaRPr lang="en-US" sz="950" b="0" u="none" strike="noStrike">
+                        <a:solidFill>
+                          <a:srgbClr val="000000"/>
+                        </a:solidFill>
+                        <a:effectLst/>
+                        <a:uFillTx/>
+                        <a:latin typeface="Arial"/>
+                      </a:endParaRPr>
+                    </a:p>
+                  </a:txBody>
+                  <a:tcPr anchor="ctr">
+                    <a:lnL w="6480">
+                      <a:solidFill>
+                        <a:srgbClr val="D0D0D0"/>
+                      </a:solidFill>
+                      <a:prstDash val="solid"/>
+                    </a:lnL>
+                    <a:lnR w="6480">
+                      <a:solidFill>
+                        <a:srgbClr val="D0D0D0"/>
+                      </a:solidFill>
+                      <a:prstDash val="solid"/>
+                    </a:lnR>
+                    <a:lnT w="6480">
+                      <a:solidFill>
+                        <a:srgbClr val="D0D0D0"/>
+                      </a:solidFill>
+                      <a:prstDash val="solid"/>
+                    </a:lnT>
+                    <a:lnB w="6480">
+                      <a:solidFill>
+                        <a:srgbClr val="D0D0D0"/>
+                      </a:solidFill>
+                      <a:prstDash val="solid"/>
+                    </a:lnB>
+                    <a:noFill/>
+                  </a:tcPr>
+                </a:tc>
+                <a:extLst>
+                  <a:ext uri="{0D108BD9-81ED-4DB2-BD59-A6C34878D82A}">
+                    <a16:rowId xmlns:a16="http://schemas.microsoft.com/office/drawing/2014/main" val="10005"/>
+                  </a:ext>
+                </a:extLst>
+              </a:tr>
+              <a:tr h="237600">
+                <a:tc>
+                  <a:txBody>
+                    <a:bodyPr/>
+                    <a:lstStyle/>
+                    <a:p>
+                      <a:pPr defTabSz="914400">
+                        <a:lnSpc>
+                          <a:spcPct val="100000"/>
+                        </a:lnSpc>
+                        <a:tabLst>
+                          <a:tab pos="0" algn="l"/>
+                        </a:tabLst>
+                      </a:pPr>
+                      <a:r>
+                        <a:rPr lang="en-US" sz="950" b="0" u="none" strike="noStrike">
+                          <a:solidFill>
+                            <a:srgbClr val="2C3E50"/>
+                          </a:solidFill>
+                          <a:effectLst/>
+                          <a:uFillTx/>
+                          <a:latin typeface="Calibri"/>
+                          <a:ea typeface="Calibri"/>
+                        </a:rPr>
+                        <a:t>Reactome</a:t>
+                      </a:r>
+                      <a:endParaRPr lang="en-US" sz="950" b="0" u="none" strike="noStrike">
+                        <a:solidFill>
+                          <a:srgbClr val="000000"/>
+                        </a:solidFill>
+                        <a:effectLst/>
+                        <a:uFillTx/>
+                        <a:latin typeface="Arial"/>
+                      </a:endParaRPr>
+                    </a:p>
+                  </a:txBody>
+                  <a:tcPr anchor="ctr">
+                    <a:lnL w="6480">
+                      <a:solidFill>
+                        <a:srgbClr val="D0D0D0"/>
+                      </a:solidFill>
+                      <a:prstDash val="solid"/>
+                    </a:lnL>
+                    <a:lnR w="6480">
+                      <a:solidFill>
+                        <a:srgbClr val="D0D0D0"/>
+                      </a:solidFill>
+                      <a:prstDash val="solid"/>
+                    </a:lnR>
+                    <a:lnT w="6480">
+                      <a:solidFill>
+                        <a:srgbClr val="D0D0D0"/>
+                      </a:solidFill>
+                      <a:prstDash val="solid"/>
+                    </a:lnT>
+                    <a:lnB w="6480">
+                      <a:solidFill>
+                        <a:srgbClr val="D0D0D0"/>
+                      </a:solidFill>
+                      <a:prstDash val="solid"/>
+                    </a:lnB>
+                    <a:noFill/>
+                  </a:tcPr>
+                </a:tc>
+                <a:tc>
+                  <a:txBody>
+                    <a:bodyPr/>
+                    <a:lstStyle/>
+                    <a:p>
+                      <a:pPr defTabSz="914400">
+                        <a:lnSpc>
+                          <a:spcPct val="100000"/>
+                        </a:lnSpc>
+                        <a:tabLst>
+                          <a:tab pos="0" algn="l"/>
+                        </a:tabLst>
+                      </a:pPr>
+                      <a:r>
+                        <a:rPr lang="en-US" sz="950" b="0" u="none" strike="noStrike">
+                          <a:solidFill>
+                            <a:srgbClr val="2C3E50"/>
+                          </a:solidFill>
+                          <a:effectLst/>
+                          <a:uFillTx/>
+                          <a:latin typeface="Calibri"/>
+                          <a:ea typeface="Calibri"/>
+                        </a:rPr>
+                        <a:t>Resolution of sister-chr. cohesion</a:t>
+                      </a:r>
+                      <a:endParaRPr lang="en-US" sz="950" b="0" u="none" strike="noStrike">
+                        <a:solidFill>
+                          <a:srgbClr val="000000"/>
+                        </a:solidFill>
+                        <a:effectLst/>
+                        <a:uFillTx/>
+                        <a:latin typeface="Arial"/>
+                      </a:endParaRPr>
+                    </a:p>
+                  </a:txBody>
+                  <a:tcPr anchor="ctr">
+                    <a:lnL w="6480">
+                      <a:solidFill>
+                        <a:srgbClr val="D0D0D0"/>
+                      </a:solidFill>
+                      <a:prstDash val="solid"/>
+                    </a:lnL>
+                    <a:lnR w="6480">
+                      <a:solidFill>
+                        <a:srgbClr val="D0D0D0"/>
+                      </a:solidFill>
+                      <a:prstDash val="solid"/>
+                    </a:lnR>
+                    <a:lnT w="6480">
+                      <a:solidFill>
+                        <a:srgbClr val="D0D0D0"/>
+                      </a:solidFill>
+                      <a:prstDash val="solid"/>
+                    </a:lnT>
+                    <a:lnB w="6480">
+                      <a:solidFill>
+                        <a:srgbClr val="D0D0D0"/>
+                      </a:solidFill>
+                      <a:prstDash val="solid"/>
+                    </a:lnB>
+                    <a:noFill/>
+                  </a:tcPr>
+                </a:tc>
+                <a:tc>
+                  <a:txBody>
+                    <a:bodyPr/>
+                    <a:lstStyle/>
+                    <a:p>
+                      <a:pPr defTabSz="914400">
+                        <a:lnSpc>
+                          <a:spcPct val="100000"/>
+                        </a:lnSpc>
+                        <a:tabLst>
+                          <a:tab pos="0" algn="l"/>
+                        </a:tabLst>
+                      </a:pPr>
+                      <a:r>
+                        <a:rPr lang="en-US" sz="950" b="0" u="none" strike="noStrike">
+                          <a:solidFill>
+                            <a:srgbClr val="2C3E50"/>
+                          </a:solidFill>
+                          <a:effectLst/>
+                          <a:uFillTx/>
+                          <a:latin typeface="Calibri"/>
+                          <a:ea typeface="Calibri"/>
+                        </a:rPr>
+                        <a:t>1.7e-23</a:t>
+                      </a:r>
+                      <a:endParaRPr lang="en-US" sz="950" b="0" u="none" strike="noStrike">
+                        <a:solidFill>
+                          <a:srgbClr val="000000"/>
+                        </a:solidFill>
+                        <a:effectLst/>
+                        <a:uFillTx/>
+                        <a:latin typeface="Arial"/>
+                      </a:endParaRPr>
+                    </a:p>
+                  </a:txBody>
+                  <a:tcPr anchor="ctr">
+                    <a:lnL w="6480">
+                      <a:solidFill>
+                        <a:srgbClr val="D0D0D0"/>
+                      </a:solidFill>
+                      <a:prstDash val="solid"/>
+                    </a:lnL>
+                    <a:lnR w="6480">
+                      <a:solidFill>
+                        <a:srgbClr val="D0D0D0"/>
+                      </a:solidFill>
+                      <a:prstDash val="solid"/>
+                    </a:lnR>
+                    <a:lnT w="6480">
+                      <a:solidFill>
+                        <a:srgbClr val="D0D0D0"/>
+                      </a:solidFill>
+                      <a:prstDash val="solid"/>
+                    </a:lnT>
+                    <a:lnB w="6480">
+                      <a:solidFill>
+                        <a:srgbClr val="D0D0D0"/>
+                      </a:solidFill>
+                      <a:prstDash val="solid"/>
+                    </a:lnB>
+                    <a:noFill/>
+                  </a:tcPr>
+                </a:tc>
+                <a:extLst>
+                  <a:ext uri="{0D108BD9-81ED-4DB2-BD59-A6C34878D82A}">
+                    <a16:rowId xmlns:a16="http://schemas.microsoft.com/office/drawing/2014/main" val="10006"/>
+                  </a:ext>
+                </a:extLst>
+              </a:tr>
+              <a:tr h="237600">
+                <a:tc>
+                  <a:txBody>
+                    <a:bodyPr/>
+                    <a:lstStyle/>
+                    <a:p>
+                      <a:pPr defTabSz="914400">
+                        <a:lnSpc>
+                          <a:spcPct val="100000"/>
+                        </a:lnSpc>
+                        <a:tabLst>
+                          <a:tab pos="0" algn="l"/>
+                        </a:tabLst>
+                      </a:pPr>
+                      <a:r>
+                        <a:rPr lang="en-US" sz="950" b="0" u="none" strike="noStrike">
+                          <a:solidFill>
+                            <a:srgbClr val="2C3E50"/>
+                          </a:solidFill>
+                          <a:effectLst/>
+                          <a:uFillTx/>
+                          <a:latin typeface="Calibri"/>
+                          <a:ea typeface="Calibri"/>
+                        </a:rPr>
+                        <a:t>Reactome</a:t>
+                      </a:r>
+                      <a:endParaRPr lang="en-US" sz="950" b="0" u="none" strike="noStrike">
+                        <a:solidFill>
+                          <a:srgbClr val="000000"/>
+                        </a:solidFill>
+                        <a:effectLst/>
+                        <a:uFillTx/>
+                        <a:latin typeface="Arial"/>
+                      </a:endParaRPr>
+                    </a:p>
+                  </a:txBody>
+                  <a:tcPr anchor="ctr">
+                    <a:lnL w="6480">
+                      <a:solidFill>
+                        <a:srgbClr val="D0D0D0"/>
+                      </a:solidFill>
+                      <a:prstDash val="solid"/>
+                    </a:lnL>
+                    <a:lnR w="6480">
+                      <a:solidFill>
+                        <a:srgbClr val="D0D0D0"/>
+                      </a:solidFill>
+                      <a:prstDash val="solid"/>
+                    </a:lnR>
+                    <a:lnT w="6480">
+                      <a:solidFill>
+                        <a:srgbClr val="D0D0D0"/>
+                      </a:solidFill>
+                      <a:prstDash val="solid"/>
+                    </a:lnT>
+                    <a:lnB w="6480">
+                      <a:solidFill>
+                        <a:srgbClr val="D0D0D0"/>
+                      </a:solidFill>
+                      <a:prstDash val="solid"/>
+                    </a:lnB>
+                    <a:noFill/>
+                  </a:tcPr>
+                </a:tc>
+                <a:tc>
+                  <a:txBody>
+                    <a:bodyPr/>
+                    <a:lstStyle/>
+                    <a:p>
+                      <a:pPr defTabSz="914400">
+                        <a:lnSpc>
+                          <a:spcPct val="100000"/>
+                        </a:lnSpc>
+                        <a:tabLst>
+                          <a:tab pos="0" algn="l"/>
+                        </a:tabLst>
+                      </a:pPr>
+                      <a:r>
+                        <a:rPr lang="en-US" sz="950" b="0" u="none" strike="noStrike">
+                          <a:solidFill>
+                            <a:srgbClr val="2C3E50"/>
+                          </a:solidFill>
+                          <a:effectLst/>
+                          <a:uFillTx/>
+                          <a:latin typeface="Calibri"/>
+                          <a:ea typeface="Calibri"/>
+                        </a:rPr>
+                        <a:t>Establishment of sister-chr. cohesion</a:t>
+                      </a:r>
+                      <a:endParaRPr lang="en-US" sz="950" b="0" u="none" strike="noStrike">
+                        <a:solidFill>
+                          <a:srgbClr val="000000"/>
+                        </a:solidFill>
+                        <a:effectLst/>
+                        <a:uFillTx/>
+                        <a:latin typeface="Arial"/>
+                      </a:endParaRPr>
+                    </a:p>
+                  </a:txBody>
+                  <a:tcPr anchor="ctr">
+                    <a:lnL w="6480">
+                      <a:solidFill>
+                        <a:srgbClr val="D0D0D0"/>
+                      </a:solidFill>
+                      <a:prstDash val="solid"/>
+                    </a:lnL>
+                    <a:lnR w="6480">
+                      <a:solidFill>
+                        <a:srgbClr val="D0D0D0"/>
+                      </a:solidFill>
+                      <a:prstDash val="solid"/>
+                    </a:lnR>
+                    <a:lnT w="6480">
+                      <a:solidFill>
+                        <a:srgbClr val="D0D0D0"/>
+                      </a:solidFill>
+                      <a:prstDash val="solid"/>
+                    </a:lnT>
+                    <a:lnB w="6480">
+                      <a:solidFill>
+                        <a:srgbClr val="D0D0D0"/>
+                      </a:solidFill>
+                      <a:prstDash val="solid"/>
+                    </a:lnB>
+                    <a:noFill/>
+                  </a:tcPr>
+                </a:tc>
+                <a:tc>
+                  <a:txBody>
+                    <a:bodyPr/>
+                    <a:lstStyle/>
+                    <a:p>
+                      <a:pPr defTabSz="914400">
+                        <a:lnSpc>
+                          <a:spcPct val="100000"/>
+                        </a:lnSpc>
+                        <a:tabLst>
+                          <a:tab pos="0" algn="l"/>
+                        </a:tabLst>
+                      </a:pPr>
+                      <a:r>
+                        <a:rPr lang="en-US" sz="950" b="0" u="none" strike="noStrike" dirty="0">
+                          <a:solidFill>
+                            <a:srgbClr val="2C3E50"/>
+                          </a:solidFill>
+                          <a:effectLst/>
+                          <a:uFillTx/>
+                          <a:latin typeface="Calibri"/>
+                          <a:ea typeface="Calibri"/>
+                        </a:rPr>
+                        <a:t>4.4e-22</a:t>
+                      </a:r>
+                      <a:endParaRPr lang="en-US" sz="950" b="0" u="none" strike="noStrike" dirty="0">
+                        <a:solidFill>
+                          <a:srgbClr val="000000"/>
+                        </a:solidFill>
+                        <a:effectLst/>
+                        <a:uFillTx/>
+                        <a:latin typeface="Arial"/>
+                      </a:endParaRPr>
+                    </a:p>
+                  </a:txBody>
+                  <a:tcPr anchor="ctr">
+                    <a:lnL w="6480">
+                      <a:solidFill>
+                        <a:srgbClr val="D0D0D0"/>
+                      </a:solidFill>
+                      <a:prstDash val="solid"/>
+                    </a:lnL>
+                    <a:lnR w="6480">
+                      <a:solidFill>
+                        <a:srgbClr val="D0D0D0"/>
+                      </a:solidFill>
+                      <a:prstDash val="solid"/>
+                    </a:lnR>
+                    <a:lnT w="6480">
+                      <a:solidFill>
+                        <a:srgbClr val="D0D0D0"/>
+                      </a:solidFill>
+                      <a:prstDash val="solid"/>
+                    </a:lnT>
+                    <a:lnB w="6480">
+                      <a:solidFill>
+                        <a:srgbClr val="D0D0D0"/>
+                      </a:solidFill>
+                      <a:prstDash val="solid"/>
+                    </a:lnB>
+                    <a:noFill/>
+                  </a:tcPr>
+                </a:tc>
+                <a:extLst>
+                  <a:ext uri="{0D108BD9-81ED-4DB2-BD59-A6C34878D82A}">
+                    <a16:rowId xmlns:a16="http://schemas.microsoft.com/office/drawing/2014/main" val="10007"/>
+                  </a:ext>
+                </a:extLst>
+              </a:tr>
+            </a:tbl>
+          </a:graphicData>
+        </a:graphic>
+      </p:graphicFrame>
+      <p:sp>
+        <p:nvSpPr>
+          <p:cNvPr id="23" name="Text 3"/>
+          <p:cNvSpPr/>
+          <p:nvPr/>
+        </p:nvSpPr>
+        <p:spPr>
+          <a:xfrm>
+            <a:off x="5559425" y="3164220"/>
+            <a:ext cx="6309000" cy="273960"/>
+          </a:xfrm>
+          <a:prstGeom prst="rect">
+            <a:avLst/>
+          </a:prstGeom>
+          <a:noFill/>
+          <a:ln w="0">
+            <a:noFill/>
+          </a:ln>
+        </p:spPr>
+        <p:style>
+          <a:lnRef idx="0">
+            <a:scrgbClr r="0" g="0" b="0"/>
+          </a:lnRef>
+          <a:fillRef idx="0">
+            <a:scrgbClr r="0" g="0" b="0"/>
+          </a:fillRef>
+          <a:effectRef idx="0">
+            <a:scrgbClr r="0" g="0" b="0"/>
+          </a:effectRef>
+          <a:fontRef idx="minor"/>
+        </p:style>
+        <p:txBody>
+          <a:bodyPr lIns="90000" tIns="45000" rIns="90000" bIns="45000" anchor="ctr">
+            <a:noAutofit/>
+          </a:bodyPr>
+          <a:lstStyle/>
+          <a:p>
+            <a:pPr algn="ctr" defTabSz="914400">
+              <a:lnSpc>
+                <a:spcPct val="100000"/>
+              </a:lnSpc>
+              <a:tabLst>
+                <a:tab pos="0" algn="l"/>
+              </a:tabLst>
+            </a:pPr>
+            <a:r>
+              <a:rPr lang="en-US" sz="900" b="0" i="1" u="none" strike="noStrike" dirty="0">
+                <a:solidFill>
+                  <a:srgbClr val="5A6B7B"/>
+                </a:solidFill>
+                <a:effectLst/>
+                <a:uFillTx/>
+                <a:latin typeface="Calibri"/>
+                <a:ea typeface="Calibri"/>
+              </a:rPr>
+              <a:t>Table 2 — representative enriched terms (all point to cohesion / cell cycle).</a:t>
+            </a:r>
+            <a:endParaRPr lang="en-US" sz="900" b="0" u="none" strike="noStrike" dirty="0">
+              <a:solidFill>
+                <a:srgbClr val="000000"/>
+              </a:solidFill>
+              <a:effectLst/>
+              <a:uFillTx/>
+              <a:latin typeface="Arial"/>
+            </a:endParaRPr>
+          </a:p>
+        </p:txBody>
+      </p:sp>
+      <p:sp>
+        <p:nvSpPr>
+          <p:cNvPr id="24" name="a_enrtext"/>
+          <p:cNvSpPr/>
+          <p:nvPr/>
+        </p:nvSpPr>
+        <p:spPr>
+          <a:xfrm>
+            <a:off x="5532120" y="3703140"/>
+            <a:ext cx="6400440" cy="868680"/>
+          </a:xfrm>
+          <a:prstGeom prst="rect">
+            <a:avLst/>
+          </a:prstGeom>
+          <a:noFill/>
+          <a:ln w="0">
+            <a:noFill/>
+          </a:ln>
+        </p:spPr>
+        <p:style>
+          <a:lnRef idx="0">
+            <a:scrgbClr r="0" g="0" b="0"/>
+          </a:lnRef>
+          <a:fillRef idx="0">
+            <a:scrgbClr r="0" g="0" b="0"/>
+          </a:fillRef>
+          <a:effectRef idx="0">
+            <a:scrgbClr r="0" g="0" b="0"/>
+          </a:effectRef>
+          <a:fontRef idx="minor"/>
+        </p:style>
+        <p:txBody>
+          <a:bodyPr lIns="90000" tIns="45000" rIns="90000" bIns="45000" anchor="t">
+            <a:noAutofit/>
+          </a:bodyPr>
+          <a:lstStyle/>
+          <a:p>
+            <a:pPr defTabSz="914400">
+              <a:lnSpc>
+                <a:spcPct val="100000"/>
+              </a:lnSpc>
+              <a:tabLst>
+                <a:tab pos="0" algn="l"/>
+              </a:tabLst>
+            </a:pPr>
+            <a:r>
+              <a:rPr lang="en-US" sz="1150" b="1" u="none" strike="noStrike" dirty="0">
+                <a:solidFill>
+                  <a:srgbClr val="2C3E50"/>
+                </a:solidFill>
+                <a:effectLst/>
+                <a:uFillTx/>
+                <a:latin typeface="Calibri"/>
+                <a:ea typeface="Calibri"/>
+              </a:rPr>
+              <a:t>Enrichment </a:t>
+            </a:r>
+            <a:r>
+              <a:rPr lang="en-US" sz="1150" b="0" u="none" strike="noStrike" dirty="0">
+                <a:solidFill>
+                  <a:srgbClr val="2C3E50"/>
+                </a:solidFill>
+                <a:effectLst/>
+                <a:uFillTx/>
+                <a:latin typeface="Calibri"/>
+                <a:ea typeface="Calibri"/>
+              </a:rPr>
+              <a:t>tests whether my 16 proteins are over-represented for a function vs. a random set — they are, overwhelmingly. The top terms (sister-chromatid cohesion, cell cycle) return at FDR ≈ 10</a:t>
+            </a:r>
+            <a:r>
+              <a:rPr lang="en-US" sz="800" b="0" u="none" strike="noStrike" baseline="30000" dirty="0">
+                <a:solidFill>
+                  <a:srgbClr val="2C3E50"/>
+                </a:solidFill>
+                <a:effectLst/>
+                <a:uFillTx/>
+                <a:latin typeface="Calibri"/>
+                <a:ea typeface="Calibri"/>
+              </a:rPr>
+              <a:t>−24</a:t>
+            </a:r>
+            <a:r>
+              <a:rPr lang="en-US" sz="1150" b="0" u="none" strike="noStrike" dirty="0">
+                <a:solidFill>
+                  <a:srgbClr val="2C3E50"/>
+                </a:solidFill>
+                <a:effectLst/>
+                <a:uFillTx/>
+                <a:latin typeface="Calibri"/>
+                <a:ea typeface="Calibri"/>
+              </a:rPr>
+              <a:t>.  </a:t>
+            </a:r>
+            <a:r>
+              <a:rPr lang="en-US" sz="1150" b="1" u="none" strike="noStrike" dirty="0">
+                <a:solidFill>
+                  <a:srgbClr val="1A7A34"/>
+                </a:solidFill>
+                <a:effectLst/>
+                <a:uFillTx/>
+                <a:latin typeface="Calibri"/>
+                <a:ea typeface="Calibri"/>
+              </a:rPr>
+              <a:t>→ this demonstrates the module is genuinely the cohesion machinery, not an arbitrary selection.</a:t>
+            </a:r>
+            <a:endParaRPr lang="en-US" sz="1150" b="0" u="none" strike="noStrike" dirty="0">
+              <a:solidFill>
+                <a:srgbClr val="000000"/>
+              </a:solidFill>
+              <a:effectLst/>
+              <a:uFillTx/>
+              <a:latin typeface="Arial"/>
+            </a:endParaRPr>
+          </a:p>
+          <a:p>
+            <a:pPr defTabSz="914400">
+              <a:lnSpc>
+                <a:spcPct val="100000"/>
+              </a:lnSpc>
+              <a:tabLst>
+                <a:tab pos="0" algn="l"/>
+              </a:tabLst>
+            </a:pPr>
+            <a:r>
+              <a:rPr lang="en-US" sz="1050" b="0" i="1" u="none" strike="noStrike" dirty="0">
+                <a:solidFill>
+                  <a:srgbClr val="5A6B7B"/>
+                </a:solidFill>
+                <a:effectLst/>
+                <a:uFillTx/>
+                <a:latin typeface="Calibri"/>
+                <a:ea typeface="Calibri"/>
+              </a:rPr>
+              <a:t>FDR = significance corrected for testing many terms; the lower it is, the more reliable.</a:t>
+            </a:r>
+            <a:endParaRPr lang="en-US" sz="1050" b="0" u="none" strike="noStrike" dirty="0">
+              <a:solidFill>
+                <a:srgbClr val="000000"/>
+              </a:solidFill>
+              <a:effectLst/>
+              <a:uFillTx/>
+              <a:latin typeface="Arial"/>
+            </a:endParaRPr>
+          </a:p>
+        </p:txBody>
+      </p:sp>
+      <mc:AlternateContent xmlns:mc="http://schemas.openxmlformats.org/markup-compatibility/2006">
+        <mc:Choice xmlns:a14="http://schemas.microsoft.com/office/drawing/2010/main" Requires="a14">
+          <p:sp>
+            <p:nvSpPr>
+              <p:cNvPr id="25" name="a_formula"/>
+              <p:cNvSpPr/>
+              <p:nvPr/>
+            </p:nvSpPr>
+            <p:spPr>
+              <a:xfrm>
+                <a:off x="320040" y="4663440"/>
+                <a:ext cx="11566800" cy="721360"/>
+              </a:xfrm>
+              <a:prstGeom prst="roundRect">
+                <a:avLst>
+                  <a:gd name="adj" fmla="val 2632"/>
+                </a:avLst>
+              </a:prstGeom>
+              <a:solidFill>
+                <a:srgbClr val="F4F0F7"/>
+              </a:solidFill>
+              <a:ln w="12700">
+                <a:solidFill>
+                  <a:srgbClr val="762A83"/>
+                </a:solidFill>
+                <a:round/>
+              </a:ln>
+            </p:spPr>
+            <p:style>
+              <a:lnRef idx="0">
+                <a:scrgbClr r="0" g="0" b="0"/>
+              </a:lnRef>
+              <a:fillRef idx="0">
+                <a:scrgbClr r="0" g="0" b="0"/>
+              </a:fillRef>
+              <a:effectRef idx="0">
+                <a:scrgbClr r="0" g="0" b="0"/>
+              </a:effectRef>
+              <a:fontRef idx="minor"/>
+            </p:style>
+            <p:txBody>
+              <a:bodyPr lIns="114480" tIns="114480" rIns="114480" bIns="114480" anchor="ctr">
+                <a:noAutofit/>
+              </a:bodyPr>
+              <a:lstStyle/>
+              <a:p>
+                <a:pPr defTabSz="914400">
+                  <a:lnSpc>
+                    <a:spcPct val="100000"/>
+                  </a:lnSpc>
+                  <a:tabLst>
+                    <a:tab pos="0" algn="l"/>
+                  </a:tabLst>
+                </a:pPr>
+                <a:r>
+                  <a:rPr lang="en-US" sz="1000" b="1" u="none" strike="noStrike" dirty="0">
+                    <a:solidFill>
+                      <a:srgbClr val="762A83"/>
+                    </a:solidFill>
+                    <a:effectLst/>
+                    <a:uFillTx/>
+                    <a:latin typeface="Calibri"/>
+                  </a:rPr>
+                  <a:t>how it is computed:  </a:t>
+                </a:r>
+                <a:endParaRPr lang="en-US" sz="1000" b="0" u="none" strike="noStrike" dirty="0">
+                  <a:solidFill>
+                    <a:srgbClr val="000000"/>
+                  </a:solidFill>
+                  <a:effectLst/>
+                  <a:uFillTx/>
+                  <a:latin typeface="Arial"/>
+                </a:endParaRPr>
+              </a:p>
+              <a:p>
+                <a:pPr defTabSz="914400">
+                  <a:lnSpc>
+                    <a:spcPct val="100000"/>
+                  </a:lnSpc>
+                  <a:tabLst>
+                    <a:tab pos="0" algn="l"/>
+                  </a:tabLst>
+                </a:pPr>
+                <a:r>
+                  <a:rPr lang="en-US" sz="950" b="0" u="none" strike="noStrike" dirty="0">
+                    <a:solidFill>
+                      <a:srgbClr val="2C3E50"/>
+                    </a:solidFill>
+                    <a:effectLst/>
+                    <a:uFillTx/>
+                    <a:latin typeface="Calibri"/>
+                  </a:rPr>
+                  <a:t>Hypergeometric ('urn') test: </a:t>
+                </a:r>
+                <a14:m>
+                  <m:oMath xmlns:m="http://schemas.openxmlformats.org/officeDocument/2006/math">
+                    <m:r>
+                      <a:rPr lang="en-US" sz="950" i="1" smtClean="0">
+                        <a:solidFill>
+                          <a:srgbClr val="2C3E50"/>
+                        </a:solidFill>
+                        <a:latin typeface="Cambria Math" panose="02040503050406030204" pitchFamily="18" charset="0"/>
+                      </a:rPr>
+                      <m:t>𝑃</m:t>
+                    </m:r>
+                    <m:d>
+                      <m:dPr>
+                        <m:ctrlPr>
+                          <a:rPr lang="en-US" sz="950" i="1">
+                            <a:solidFill>
+                              <a:srgbClr val="2C3E50"/>
+                            </a:solidFill>
+                            <a:latin typeface="Cambria Math" panose="02040503050406030204" pitchFamily="18" charset="0"/>
+                          </a:rPr>
+                        </m:ctrlPr>
+                      </m:dPr>
+                      <m:e>
+                        <m:r>
+                          <a:rPr lang="en-US" sz="950" i="1">
+                            <a:solidFill>
+                              <a:srgbClr val="2C3E50"/>
+                            </a:solidFill>
+                            <a:latin typeface="Cambria Math" panose="02040503050406030204" pitchFamily="18" charset="0"/>
+                          </a:rPr>
+                          <m:t>𝑋</m:t>
+                        </m:r>
+                        <m:r>
+                          <a:rPr lang="en-US" sz="950" i="1">
+                            <a:solidFill>
+                              <a:srgbClr val="2C3E50"/>
+                            </a:solidFill>
+                            <a:latin typeface="Cambria Math" panose="02040503050406030204" pitchFamily="18" charset="0"/>
+                          </a:rPr>
+                          <m:t>≥</m:t>
+                        </m:r>
+                        <m:r>
+                          <a:rPr lang="en-US" sz="950" i="1">
+                            <a:solidFill>
+                              <a:srgbClr val="2C3E50"/>
+                            </a:solidFill>
+                            <a:latin typeface="Cambria Math" panose="02040503050406030204" pitchFamily="18" charset="0"/>
+                          </a:rPr>
+                          <m:t>𝑘</m:t>
+                        </m:r>
+                      </m:e>
+                    </m:d>
+                    <m:r>
+                      <a:rPr lang="en-US" sz="950" i="1">
+                        <a:solidFill>
+                          <a:srgbClr val="2C3E50"/>
+                        </a:solidFill>
+                        <a:latin typeface="Cambria Math" panose="02040503050406030204" pitchFamily="18" charset="0"/>
+                      </a:rPr>
+                      <m:t>=</m:t>
+                    </m:r>
+                    <m:nary>
+                      <m:naryPr>
+                        <m:chr m:val="∑"/>
+                        <m:limLoc m:val="undOvr"/>
+                        <m:ctrlPr>
+                          <a:rPr lang="en-US" sz="950" i="1">
+                            <a:solidFill>
+                              <a:srgbClr val="2C3E50"/>
+                            </a:solidFill>
+                            <a:latin typeface="Cambria Math" panose="02040503050406030204" pitchFamily="18" charset="0"/>
+                          </a:rPr>
+                        </m:ctrlPr>
+                      </m:naryPr>
+                      <m:sub>
+                        <m:r>
+                          <a:rPr lang="en-US" sz="950" i="1">
+                            <a:solidFill>
+                              <a:srgbClr val="2C3E50"/>
+                            </a:solidFill>
+                            <a:latin typeface="Cambria Math" panose="02040503050406030204" pitchFamily="18" charset="0"/>
+                          </a:rPr>
+                          <m:t>𝑖</m:t>
+                        </m:r>
+                        <m:r>
+                          <a:rPr lang="en-US" sz="950" i="1">
+                            <a:solidFill>
+                              <a:srgbClr val="2C3E50"/>
+                            </a:solidFill>
+                            <a:latin typeface="Cambria Math" panose="02040503050406030204" pitchFamily="18" charset="0"/>
+                          </a:rPr>
+                          <m:t>=</m:t>
+                        </m:r>
+                        <m:r>
+                          <a:rPr lang="en-US" sz="950" i="1">
+                            <a:solidFill>
+                              <a:srgbClr val="2C3E50"/>
+                            </a:solidFill>
+                            <a:latin typeface="Cambria Math" panose="02040503050406030204" pitchFamily="18" charset="0"/>
+                          </a:rPr>
+                          <m:t>𝑘</m:t>
+                        </m:r>
+                      </m:sub>
+                      <m:sup>
+                        <m:func>
+                          <m:funcPr>
+                            <m:ctrlPr>
+                              <a:rPr lang="en-US" sz="950" i="1">
+                                <a:solidFill>
+                                  <a:srgbClr val="2C3E50"/>
+                                </a:solidFill>
+                                <a:latin typeface="Cambria Math" panose="02040503050406030204" pitchFamily="18" charset="0"/>
+                              </a:rPr>
+                            </m:ctrlPr>
+                          </m:funcPr>
+                          <m:fName>
+                            <m:r>
+                              <m:rPr>
+                                <m:sty m:val="p"/>
+                              </m:rPr>
+                              <a:rPr lang="en-US" sz="950" i="1">
+                                <a:solidFill>
+                                  <a:srgbClr val="2C3E50"/>
+                                </a:solidFill>
+                                <a:latin typeface="Cambria Math" panose="02040503050406030204" pitchFamily="18" charset="0"/>
+                              </a:rPr>
+                              <m:t>min</m:t>
+                            </m:r>
+                          </m:fName>
+                          <m:e>
+                            <m:d>
+                              <m:dPr>
+                                <m:ctrlPr>
+                                  <a:rPr lang="en-US" sz="950" i="1">
+                                    <a:solidFill>
+                                      <a:srgbClr val="2C3E50"/>
+                                    </a:solidFill>
+                                    <a:latin typeface="Cambria Math" panose="02040503050406030204" pitchFamily="18" charset="0"/>
+                                  </a:rPr>
+                                </m:ctrlPr>
+                              </m:dPr>
+                              <m:e>
+                                <m:r>
+                                  <a:rPr lang="en-US" sz="950" i="1">
+                                    <a:solidFill>
+                                      <a:srgbClr val="2C3E50"/>
+                                    </a:solidFill>
+                                    <a:latin typeface="Cambria Math" panose="02040503050406030204" pitchFamily="18" charset="0"/>
+                                  </a:rPr>
+                                  <m:t>𝑛</m:t>
+                                </m:r>
+                                <m:r>
+                                  <a:rPr lang="en-US" sz="950" i="1">
+                                    <a:solidFill>
+                                      <a:srgbClr val="2C3E50"/>
+                                    </a:solidFill>
+                                    <a:latin typeface="Cambria Math" panose="02040503050406030204" pitchFamily="18" charset="0"/>
+                                  </a:rPr>
+                                  <m:t>,</m:t>
+                                </m:r>
+                                <m:r>
+                                  <a:rPr lang="en-US" sz="950" i="1">
+                                    <a:solidFill>
+                                      <a:srgbClr val="2C3E50"/>
+                                    </a:solidFill>
+                                    <a:latin typeface="Cambria Math" panose="02040503050406030204" pitchFamily="18" charset="0"/>
+                                  </a:rPr>
+                                  <m:t>𝐾</m:t>
+                                </m:r>
+                              </m:e>
+                            </m:d>
+                          </m:e>
+                        </m:func>
+                      </m:sup>
+                      <m:e>
+                        <m:f>
+                          <m:fPr>
+                            <m:ctrlPr>
+                              <a:rPr lang="en-US" sz="950" i="1">
+                                <a:solidFill>
+                                  <a:srgbClr val="2C3E50"/>
+                                </a:solidFill>
+                                <a:latin typeface="Cambria Math" panose="02040503050406030204" pitchFamily="18" charset="0"/>
+                              </a:rPr>
+                            </m:ctrlPr>
+                          </m:fPr>
+                          <m:num>
+                            <m:d>
+                              <m:dPr>
+                                <m:ctrlPr>
+                                  <a:rPr lang="en-US" sz="950" i="1">
+                                    <a:solidFill>
+                                      <a:srgbClr val="2C3E50"/>
+                                    </a:solidFill>
+                                    <a:latin typeface="Cambria Math" panose="02040503050406030204" pitchFamily="18" charset="0"/>
+                                  </a:rPr>
+                                </m:ctrlPr>
+                              </m:dPr>
+                              <m:e>
+                                <m:f>
+                                  <m:fPr>
+                                    <m:type m:val="noBar"/>
+                                    <m:ctrlPr>
+                                      <a:rPr lang="en-US" sz="950" i="1">
+                                        <a:solidFill>
+                                          <a:srgbClr val="2C3E50"/>
+                                        </a:solidFill>
+                                        <a:latin typeface="Cambria Math" panose="02040503050406030204" pitchFamily="18" charset="0"/>
+                                      </a:rPr>
+                                    </m:ctrlPr>
+                                  </m:fPr>
+                                  <m:num>
+                                    <m:r>
+                                      <a:rPr lang="en-US" sz="950" i="1">
+                                        <a:solidFill>
+                                          <a:srgbClr val="2C3E50"/>
+                                        </a:solidFill>
+                                        <a:latin typeface="Cambria Math" panose="02040503050406030204" pitchFamily="18" charset="0"/>
+                                      </a:rPr>
+                                      <m:t>𝐾</m:t>
+                                    </m:r>
+                                  </m:num>
+                                  <m:den>
+                                    <m:r>
+                                      <a:rPr lang="en-US" sz="950" i="1">
+                                        <a:solidFill>
+                                          <a:srgbClr val="2C3E50"/>
+                                        </a:solidFill>
+                                        <a:latin typeface="Cambria Math" panose="02040503050406030204" pitchFamily="18" charset="0"/>
+                                      </a:rPr>
+                                      <m:t>𝑖</m:t>
+                                    </m:r>
+                                  </m:den>
+                                </m:f>
+                              </m:e>
+                            </m:d>
+                            <m:d>
+                              <m:dPr>
+                                <m:ctrlPr>
+                                  <a:rPr lang="en-US" sz="950" i="1">
+                                    <a:solidFill>
+                                      <a:srgbClr val="2C3E50"/>
+                                    </a:solidFill>
+                                    <a:latin typeface="Cambria Math" panose="02040503050406030204" pitchFamily="18" charset="0"/>
+                                  </a:rPr>
+                                </m:ctrlPr>
+                              </m:dPr>
+                              <m:e>
+                                <m:f>
+                                  <m:fPr>
+                                    <m:type m:val="noBar"/>
+                                    <m:ctrlPr>
+                                      <a:rPr lang="en-US" sz="950" i="1">
+                                        <a:solidFill>
+                                          <a:srgbClr val="2C3E50"/>
+                                        </a:solidFill>
+                                        <a:latin typeface="Cambria Math" panose="02040503050406030204" pitchFamily="18" charset="0"/>
+                                      </a:rPr>
+                                    </m:ctrlPr>
+                                  </m:fPr>
+                                  <m:num>
+                                    <m:r>
+                                      <a:rPr lang="en-US" sz="950" i="1">
+                                        <a:solidFill>
+                                          <a:srgbClr val="2C3E50"/>
+                                        </a:solidFill>
+                                        <a:latin typeface="Cambria Math" panose="02040503050406030204" pitchFamily="18" charset="0"/>
+                                      </a:rPr>
+                                      <m:t>𝑁</m:t>
+                                    </m:r>
+                                    <m:r>
+                                      <a:rPr lang="en-US" sz="950" i="1">
+                                        <a:solidFill>
+                                          <a:srgbClr val="2C3E50"/>
+                                        </a:solidFill>
+                                        <a:latin typeface="Cambria Math" panose="02040503050406030204" pitchFamily="18" charset="0"/>
+                                      </a:rPr>
+                                      <m:t>−</m:t>
+                                    </m:r>
+                                    <m:r>
+                                      <a:rPr lang="en-US" sz="950" i="1">
+                                        <a:solidFill>
+                                          <a:srgbClr val="2C3E50"/>
+                                        </a:solidFill>
+                                        <a:latin typeface="Cambria Math" panose="02040503050406030204" pitchFamily="18" charset="0"/>
+                                      </a:rPr>
+                                      <m:t>𝐾</m:t>
+                                    </m:r>
+                                  </m:num>
+                                  <m:den>
+                                    <m:r>
+                                      <a:rPr lang="en-US" sz="950" i="1">
+                                        <a:solidFill>
+                                          <a:srgbClr val="2C3E50"/>
+                                        </a:solidFill>
+                                        <a:latin typeface="Cambria Math" panose="02040503050406030204" pitchFamily="18" charset="0"/>
+                                      </a:rPr>
+                                      <m:t>𝑛</m:t>
+                                    </m:r>
+                                    <m:r>
+                                      <a:rPr lang="en-US" sz="950" i="1">
+                                        <a:solidFill>
+                                          <a:srgbClr val="2C3E50"/>
+                                        </a:solidFill>
+                                        <a:latin typeface="Cambria Math" panose="02040503050406030204" pitchFamily="18" charset="0"/>
+                                      </a:rPr>
+                                      <m:t>−</m:t>
+                                    </m:r>
+                                    <m:r>
+                                      <a:rPr lang="en-US" sz="950" i="1">
+                                        <a:solidFill>
+                                          <a:srgbClr val="2C3E50"/>
+                                        </a:solidFill>
+                                        <a:latin typeface="Cambria Math" panose="02040503050406030204" pitchFamily="18" charset="0"/>
+                                      </a:rPr>
+                                      <m:t>𝑖</m:t>
+                                    </m:r>
+                                  </m:den>
+                                </m:f>
+                              </m:e>
+                            </m:d>
+                          </m:num>
+                          <m:den>
+                            <m:d>
+                              <m:dPr>
+                                <m:ctrlPr>
+                                  <a:rPr lang="en-US" sz="950" i="1">
+                                    <a:solidFill>
+                                      <a:srgbClr val="2C3E50"/>
+                                    </a:solidFill>
+                                    <a:latin typeface="Cambria Math" panose="02040503050406030204" pitchFamily="18" charset="0"/>
+                                  </a:rPr>
+                                </m:ctrlPr>
+                              </m:dPr>
+                              <m:e>
+                                <m:f>
+                                  <m:fPr>
+                                    <m:type m:val="noBar"/>
+                                    <m:ctrlPr>
+                                      <a:rPr lang="en-US" sz="950" i="1">
+                                        <a:solidFill>
+                                          <a:srgbClr val="2C3E50"/>
+                                        </a:solidFill>
+                                        <a:latin typeface="Cambria Math" panose="02040503050406030204" pitchFamily="18" charset="0"/>
+                                      </a:rPr>
+                                    </m:ctrlPr>
+                                  </m:fPr>
+                                  <m:num>
+                                    <m:r>
+                                      <a:rPr lang="en-US" sz="950" i="1">
+                                        <a:solidFill>
+                                          <a:srgbClr val="2C3E50"/>
+                                        </a:solidFill>
+                                        <a:latin typeface="Cambria Math" panose="02040503050406030204" pitchFamily="18" charset="0"/>
+                                      </a:rPr>
+                                      <m:t>𝑁</m:t>
+                                    </m:r>
+                                  </m:num>
+                                  <m:den>
+                                    <m:r>
+                                      <a:rPr lang="en-US" sz="950" i="1">
+                                        <a:solidFill>
+                                          <a:srgbClr val="2C3E50"/>
+                                        </a:solidFill>
+                                        <a:latin typeface="Cambria Math" panose="02040503050406030204" pitchFamily="18" charset="0"/>
+                                      </a:rPr>
+                                      <m:t>𝑛</m:t>
+                                    </m:r>
+                                  </m:den>
+                                </m:f>
+                              </m:e>
+                            </m:d>
+                          </m:den>
+                        </m:f>
+                      </m:e>
+                    </m:nary>
+                    <m:r>
+                      <a:rPr lang="en-US" sz="950" b="0" i="1" smtClean="0">
+                        <a:solidFill>
+                          <a:srgbClr val="2C3E50"/>
+                        </a:solidFill>
+                        <a:latin typeface="Cambria Math" panose="02040503050406030204" pitchFamily="18" charset="0"/>
+                      </a:rPr>
+                      <m:t>.</m:t>
+                    </m:r>
+                  </m:oMath>
+                </a14:m>
+                <a:r>
+                  <a:rPr lang="en-US" sz="950" b="0" u="none" strike="noStrike" dirty="0">
+                    <a:solidFill>
+                      <a:srgbClr val="2C3E50"/>
+                    </a:solidFill>
+                    <a:effectLst/>
+                    <a:uFillTx/>
+                    <a:latin typeface="Calibri"/>
+                  </a:rPr>
+                  <a:t> e.g. 12 of my 16 proteins are among the only 42 cohesion genes in the whole genome (N ≈ 19,000) → p = 8.6×10⁻²⁹.   Benjamini–Hochberg correction:  FDR = p × (M / rank),  M = number of terms tested.</a:t>
+                </a:r>
+                <a:endParaRPr lang="en-US" sz="950" b="0" u="none" strike="noStrike" dirty="0">
+                  <a:solidFill>
+                    <a:srgbClr val="000000"/>
+                  </a:solidFill>
+                  <a:effectLst/>
+                  <a:uFillTx/>
+                  <a:latin typeface="Arial"/>
+                </a:endParaRPr>
+              </a:p>
+            </p:txBody>
+          </p:sp>
+        </mc:Choice>
+        <mc:Fallback>
+          <p:sp>
+            <p:nvSpPr>
+              <p:cNvPr id="25" name="a_formula"/>
+              <p:cNvSpPr>
+                <a:spLocks noRot="1" noChangeAspect="1" noMove="1" noResize="1" noEditPoints="1" noAdjustHandles="1" noChangeArrowheads="1" noChangeShapeType="1" noTextEdit="1"/>
+              </p:cNvSpPr>
+              <p:nvPr/>
+            </p:nvSpPr>
+            <p:spPr>
+              <a:xfrm>
+                <a:off x="320040" y="4663440"/>
+                <a:ext cx="11566800" cy="721360"/>
+              </a:xfrm>
+              <a:prstGeom prst="roundRect">
+                <a:avLst>
+                  <a:gd name="adj" fmla="val 2632"/>
+                </a:avLst>
+              </a:prstGeom>
+              <a:blipFill>
+                <a:blip r:embed="rId3"/>
+                <a:stretch>
+                  <a:fillRect b="-12500"/>
+                </a:stretch>
+              </a:blipFill>
+              <a:ln w="12700">
+                <a:solidFill>
+                  <a:srgbClr val="762A83"/>
+                </a:solidFill>
+                <a:round/>
+              </a:ln>
+            </p:spPr>
+            <p:txBody>
+              <a:bodyPr/>
+              <a:lstStyle/>
+              <a:p>
+                <a:r>
+                  <a:rPr lang="en-US">
+                    <a:noFill/>
+                  </a:rPr>
+                  <a:t> </a:t>
+                </a:r>
+              </a:p>
+            </p:txBody>
+          </p:sp>
+        </mc:Fallback>
+      </mc:AlternateContent>
+      <p:graphicFrame>
+        <p:nvGraphicFramePr>
+          <p:cNvPr id="2" name="Object 1">
+            <a:extLst>
+              <a:ext uri="{FF2B5EF4-FFF2-40B4-BE49-F238E27FC236}">
+                <a16:creationId xmlns:a16="http://schemas.microsoft.com/office/drawing/2014/main" id="{C6AE693D-DB3C-C44E-E8D2-A8D3BFF68B93}"/>
+              </a:ext>
+            </a:extLst>
+          </p:cNvPr>
+          <p:cNvGraphicFramePr>
+            <a:graphicFrameLocks noChangeAspect="1"/>
+          </p:cNvGraphicFramePr>
+          <p:nvPr>
+            <p:extLst>
+              <p:ext uri="{D42A27DB-BD31-4B8C-83A1-F6EECF244321}">
+                <p14:modId xmlns:p14="http://schemas.microsoft.com/office/powerpoint/2010/main" val="1150535248"/>
+              </p:ext>
+            </p:extLst>
+          </p:nvPr>
+        </p:nvGraphicFramePr>
+        <p:xfrm>
+          <a:off x="4927600" y="2641600"/>
+          <a:ext cx="914400" cy="198438"/>
+        </p:xfrm>
+        <a:graphic>
+          <a:graphicData uri="http://schemas.openxmlformats.org/presentationml/2006/ole">
+            <mc:AlternateContent xmlns:mc="http://schemas.openxmlformats.org/markup-compatibility/2006">
+              <mc:Choice xmlns:v="urn:schemas-microsoft-com:vml" Requires="v">
+                <p:oleObj name="Equation" r:id="rId4" imgW="914400" imgH="198720" progId="Equation.DSMT4">
+                  <p:embed/>
+                </p:oleObj>
+              </mc:Choice>
+              <mc:Fallback>
+                <p:oleObj name="Equation" r:id="rId4" imgW="914400" imgH="198720" progId="Equation.DSMT4">
+                  <p:embed/>
+                  <p:pic>
+                    <p:nvPicPr>
+                      <p:cNvPr id="0" name=""/>
+                      <p:cNvPicPr/>
+                      <p:nvPr/>
+                    </p:nvPicPr>
+                    <p:blipFill>
+                      <a:blip r:embed="rId5"/>
+                      <a:stretch>
+                        <a:fillRect/>
+                      </a:stretch>
+                    </p:blipFill>
+                    <p:spPr>
+                      <a:xfrm>
+                        <a:off x="4927600" y="2641600"/>
+                        <a:ext cx="914400" cy="198438"/>
+                      </a:xfrm>
+                      <a:prstGeom prst="rect">
+                        <a:avLst/>
+                      </a:prstGeom>
+                    </p:spPr>
+                  </p:pic>
+                </p:oleObj>
+              </mc:Fallback>
+            </mc:AlternateContent>
+          </a:graphicData>
+        </a:graphic>
+      </p:graphicFrame>
+    </p:spTree>
+  </p:cSld>
+  <p:clrMapOvr>
+    <a:masterClrMapping/>
+  </p:clrMapOvr>
+  <p:timing>
+    <p:tnLst>
+      <p:par>
+        <p:cTn id="1" dur="indefinite" restart="never" nodeType="tmRoot">
+          <p:childTnLst>
+            <p:seq>
+              <p:cTn id="2" dur="indefinite" nodeType="mainSeq">
+                <p:childTnLst>
+                  <p:par>
+                    <p:cTn id="3" fill="hold">
+                      <p:stCondLst>
+                        <p:cond delay="indefinite"/>
+                      </p:stCondLst>
+                      <p:childTnLst>
+                        <p:par>
+                          <p:cTn id="4" fill="hold">
+                            <p:stCondLst>
+                              <p:cond delay="0"/>
+                            </p:stCondLst>
+                            <p:childTnLst>
+                              <p:par>
+                                <p:cTn id="5" presetID="10" presetClass="entr" presetSubtype="0" fill="hold" nodeType="clickEffect">
+                                  <p:stCondLst>
+                                    <p:cond delay="0"/>
+                                  </p:stCondLst>
+                                  <p:childTnLst>
+                                    <p:set>
+                                      <p:cBhvr>
+                                        <p:cTn id="6" dur="1" fill="hold">
+                                          <p:stCondLst>
+                                            <p:cond delay="0"/>
+                                          </p:stCondLst>
+                                        </p:cTn>
+                                        <p:tgtEl>
+                                          <p:spTgt spid="19"/>
+                                        </p:tgtEl>
+                                        <p:attrNameLst>
+                                          <p:attrName>style.visibility</p:attrName>
+                                        </p:attrNameLst>
+                                      </p:cBhvr>
+                                      <p:to>
+                                        <p:strVal val="visible"/>
+                                      </p:to>
+                                    </p:set>
+                                    <p:animEffect transition="in" filter="fade">
+                                      <p:cBhvr>
+                                        <p:cTn id="7" dur="500"/>
+                                        <p:tgtEl>
+                                          <p:spTgt spid="19"/>
+                                        </p:tgtEl>
+                                      </p:cBhvr>
+                                    </p:animEffect>
+                                  </p:childTnLst>
+                                </p:cTn>
+                              </p:par>
+                              <p:par>
+                                <p:cTn id="8" presetID="10" presetClass="entr" presetSubtype="0" fill="hold" grpId="0" nodeType="withEffect">
+                                  <p:stCondLst>
+                                    <p:cond delay="0"/>
+                                  </p:stCondLst>
+                                  <p:childTnLst>
+                                    <p:set>
+                                      <p:cBhvr>
+                                        <p:cTn id="9" dur="1" fill="hold">
+                                          <p:stCondLst>
+                                            <p:cond delay="0"/>
+                                          </p:stCondLst>
+                                        </p:cTn>
+                                        <p:tgtEl>
+                                          <p:spTgt spid="20"/>
+                                        </p:tgtEl>
+                                        <p:attrNameLst>
+                                          <p:attrName>style.visibility</p:attrName>
+                                        </p:attrNameLst>
+                                      </p:cBhvr>
+                                      <p:to>
+                                        <p:strVal val="visible"/>
+                                      </p:to>
+                                    </p:set>
+                                    <p:animEffect transition="in" filter="fade">
+                                      <p:cBhvr>
+                                        <p:cTn id="10" dur="500"/>
+                                        <p:tgtEl>
+                                          <p:spTgt spid="20"/>
+                                        </p:tgtEl>
+                                      </p:cBhvr>
+                                    </p:animEffect>
+                                  </p:childTnLst>
+                                </p:cTn>
+                              </p:par>
+                            </p:childTnLst>
+                          </p:cTn>
+                        </p:par>
+                      </p:childTnLst>
+                    </p:cTn>
+                  </p:par>
+                  <p:par>
+                    <p:cTn id="11" fill="hold">
+                      <p:stCondLst>
+                        <p:cond delay="indefinite"/>
+                      </p:stCondLst>
+                      <p:childTnLst>
+                        <p:par>
+                          <p:cTn id="12" fill="hold">
+                            <p:stCondLst>
+                              <p:cond delay="0"/>
+                            </p:stCondLst>
+                            <p:childTnLst>
+                              <p:par>
+                                <p:cTn id="13" presetID="22" presetClass="entr" presetSubtype="1" fill="hold" nodeType="clickEffect">
+                                  <p:stCondLst>
+                                    <p:cond delay="0"/>
+                                  </p:stCondLst>
+                                  <p:childTnLst>
+                                    <p:set>
+                                      <p:cBhvr>
+                                        <p:cTn id="14" dur="1" fill="hold">
+                                          <p:stCondLst>
+                                            <p:cond delay="0"/>
+                                          </p:stCondLst>
+                                        </p:cTn>
+                                        <p:tgtEl>
+                                          <p:spTgt spid="22"/>
+                                        </p:tgtEl>
+                                        <p:attrNameLst>
+                                          <p:attrName>style.visibility</p:attrName>
+                                        </p:attrNameLst>
+                                      </p:cBhvr>
+                                      <p:to>
+                                        <p:strVal val="visible"/>
+                                      </p:to>
+                                    </p:set>
+                                    <p:animEffect transition="in" filter="wipe(up)">
+                                      <p:cBhvr>
+                                        <p:cTn id="15" dur="500"/>
+                                        <p:tgtEl>
+                                          <p:spTgt spid="22"/>
+                                        </p:tgtEl>
+                                      </p:cBhvr>
+                                    </p:animEffect>
+                                  </p:childTnLst>
+                                </p:cTn>
+                              </p:par>
+                              <p:par>
+                                <p:cTn id="16" presetID="10" presetClass="entr" presetSubtype="0" fill="hold" grpId="0" nodeType="withEffect">
+                                  <p:stCondLst>
+                                    <p:cond delay="0"/>
+                                  </p:stCondLst>
+                                  <p:childTnLst>
+                                    <p:set>
+                                      <p:cBhvr>
+                                        <p:cTn id="17" dur="1" fill="hold">
+                                          <p:stCondLst>
+                                            <p:cond delay="0"/>
+                                          </p:stCondLst>
+                                        </p:cTn>
+                                        <p:tgtEl>
+                                          <p:spTgt spid="23"/>
+                                        </p:tgtEl>
+                                        <p:attrNameLst>
+                                          <p:attrName>style.visibility</p:attrName>
+                                        </p:attrNameLst>
+                                      </p:cBhvr>
+                                      <p:to>
+                                        <p:strVal val="visible"/>
+                                      </p:to>
+                                    </p:set>
+                                    <p:animEffect transition="in" filter="fade">
+                                      <p:cBhvr>
+                                        <p:cTn id="18" dur="500"/>
+                                        <p:tgtEl>
+                                          <p:spTgt spid="23"/>
+                                        </p:tgtEl>
+                                      </p:cBhvr>
+                                    </p:animEffect>
+                                  </p:childTnLst>
+                                </p:cTn>
+                              </p:par>
+                            </p:childTnLst>
+                          </p:cTn>
+                        </p:par>
+                      </p:childTnLst>
+                    </p:cTn>
+                  </p:par>
+                  <p:par>
+                    <p:cTn id="19" fill="hold">
+                      <p:stCondLst>
+                        <p:cond delay="indefinite"/>
+                      </p:stCondLst>
+                      <p:childTnLst>
+                        <p:par>
+                          <p:cTn id="20" fill="hold">
+                            <p:stCondLst>
+                              <p:cond delay="0"/>
+                            </p:stCondLst>
+                            <p:childTnLst>
+                              <p:par>
+                                <p:cTn id="21" presetID="10" presetClass="entr" fill="hold" nodeType="clickEffect">
+                                  <p:stCondLst>
+                                    <p:cond delay="0"/>
+                                  </p:stCondLst>
+                                  <p:childTnLst>
+                                    <p:set>
+                                      <p:cBhvr>
+                                        <p:cTn id="22" dur="1" fill="hold">
+                                          <p:stCondLst>
+                                            <p:cond delay="0"/>
+                                          </p:stCondLst>
+                                        </p:cTn>
+                                        <p:tgtEl>
+                                          <p:spTgt spid="24"/>
+                                        </p:tgtEl>
+                                        <p:attrNameLst>
+                                          <p:attrName>style.visibility</p:attrName>
+                                        </p:attrNameLst>
+                                      </p:cBhvr>
+                                      <p:to>
+                                        <p:strVal val="visible"/>
+                                      </p:to>
+                                    </p:set>
+                                    <p:animEffect transition="in" filter="fade">
+                                      <p:cBhvr additive="repl">
+                                        <p:cTn id="23" dur="500"/>
+                                        <p:tgtEl>
+                                          <p:spTgt spid="24"/>
+                                        </p:tgtEl>
+                                      </p:cBhvr>
+                                    </p:animEffect>
+                                  </p:childTnLst>
+                                </p:cTn>
+                              </p:par>
+                            </p:childTnLst>
+                          </p:cTn>
+                        </p:par>
+                      </p:childTnLst>
+                    </p:cTn>
+                  </p:par>
+                  <p:par>
+                    <p:cTn id="24" fill="hold">
+                      <p:stCondLst>
+                        <p:cond delay="indefinite"/>
+                      </p:stCondLst>
+                      <p:childTnLst>
+                        <p:par>
+                          <p:cTn id="25" fill="hold">
+                            <p:stCondLst>
+                              <p:cond delay="0"/>
+                            </p:stCondLst>
+                            <p:childTnLst>
+                              <p:par>
+                                <p:cTn id="26" presetID="16" presetClass="entr" presetSubtype="37" fill="hold" grpId="0" nodeType="clickEffect">
+                                  <p:stCondLst>
+                                    <p:cond delay="0"/>
+                                  </p:stCondLst>
+                                  <p:childTnLst>
+                                    <p:set>
+                                      <p:cBhvr>
+                                        <p:cTn id="27" dur="1" fill="hold">
+                                          <p:stCondLst>
+                                            <p:cond delay="0"/>
+                                          </p:stCondLst>
+                                        </p:cTn>
+                                        <p:tgtEl>
+                                          <p:spTgt spid="21"/>
+                                        </p:tgtEl>
+                                        <p:attrNameLst>
+                                          <p:attrName>style.visibility</p:attrName>
+                                        </p:attrNameLst>
+                                      </p:cBhvr>
+                                      <p:to>
+                                        <p:strVal val="visible"/>
+                                      </p:to>
+                                    </p:set>
+                                    <p:animEffect transition="in" filter="barn(outVertical)">
+                                      <p:cBhvr>
+                                        <p:cTn id="28" dur="500"/>
+                                        <p:tgtEl>
+                                          <p:spTgt spid="21"/>
+                                        </p:tgtEl>
+                                      </p:cBhvr>
+                                    </p:animEffect>
+                                  </p:childTnLst>
+                                </p:cTn>
+                              </p:par>
+                            </p:childTnLst>
+                          </p:cTn>
+                        </p:par>
+                      </p:childTnLst>
+                    </p:cTn>
+                  </p:par>
+                  <p:par>
+                    <p:cTn id="29" fill="hold">
+                      <p:stCondLst>
+                        <p:cond delay="indefinite"/>
+                      </p:stCondLst>
+                      <p:childTnLst>
+                        <p:par>
+                          <p:cTn id="30" fill="hold">
+                            <p:stCondLst>
+                              <p:cond delay="0"/>
+                            </p:stCondLst>
+                            <p:childTnLst>
+                              <p:par>
+                                <p:cTn id="31" presetID="10" presetClass="entr" fill="hold" nodeType="clickEffect">
+                                  <p:stCondLst>
+                                    <p:cond delay="0"/>
+                                  </p:stCondLst>
+                                  <p:childTnLst>
+                                    <p:set>
+                                      <p:cBhvr>
+                                        <p:cTn id="32" dur="1" fill="hold">
+                                          <p:stCondLst>
+                                            <p:cond delay="0"/>
+                                          </p:stCondLst>
+                                        </p:cTn>
+                                        <p:tgtEl>
+                                          <p:spTgt spid="25"/>
+                                        </p:tgtEl>
+                                        <p:attrNameLst>
+                                          <p:attrName>style.visibility</p:attrName>
+                                        </p:attrNameLst>
+                                      </p:cBhvr>
+                                      <p:to>
+                                        <p:strVal val="visible"/>
+                                      </p:to>
+                                    </p:set>
+                                    <p:animEffect transition="in" filter="fade">
+                                      <p:cBhvr additive="repl">
+                                        <p:cTn id="33" dur="500"/>
+                                        <p:tgtEl>
+                                          <p:spTgt spid="25"/>
+                                        </p:tgtEl>
+                                      </p:cBhvr>
+                                    </p:animEffect>
+                                  </p:childTnLst>
+                                </p:cTn>
+                              </p:par>
+                            </p:childTnLst>
+                          </p:cTn>
+                        </p:par>
+                      </p:childTnLst>
+                    </p:cTn>
+                  </p:par>
+                </p:childTnLst>
+              </p:cTn>
+              <p:prevCondLst>
+                <p:cond evt="onPrev" delay="0">
+                  <p:tgtEl>
+                    <p:sldTgt/>
+                  </p:tgtEl>
+                </p:cond>
+              </p:prevCondLst>
+              <p:nextCondLst>
+                <p:cond evt="onNext" delay="0">
+                  <p:tgtEl>
+                    <p:sldTgt/>
+                  </p:tgtEl>
+                </p:cond>
+              </p:nextCondLst>
+            </p:seq>
+          </p:childTnLst>
+        </p:cTn>
+      </p:par>
+    </p:tnLst>
+    <p:bldLst>
+      <p:bldP spid="20" grpId="0"/>
+      <p:bldP spid="21" grpId="0" animBg="1"/>
+      <p:bldP spid="23" grpId="0"/>
+    </p:bldLst>
+  </p:timing>
+</p:sld>
+</file>
+
+<file path=ppt/slides/slide7.xml><?xml version="1.0" encoding="utf-8"?>
+<p:sld xmlns:a="http://schemas.openxmlformats.org/drawingml/2006/main" xmlns:r="http://schemas.openxmlformats.org/officeDocument/2006/relationships" xmlns:p="http://schemas.openxmlformats.org/presentationml/2006/main">
+  <p:cSld>
+    <p:bg>
+      <p:bgPr>
+        <a:solidFill>
+          <a:srgbClr val="FFFFFF"/>
+        </a:solidFill>
+        <a:effectLst/>
+      </p:bgPr>
+    </p:bg>
+    <p:spTree>
+      <p:nvGrpSpPr>
+        <p:cNvPr id="1" name=""/>
+        <p:cNvGrpSpPr/>
+        <p:nvPr/>
+      </p:nvGrpSpPr>
+      <p:grpSpPr>
+        <a:xfrm>
+          <a:off x="0" y="0"/>
+          <a:ext cx="0" cy="0"/>
+          <a:chOff x="0" y="0"/>
+          <a:chExt cx="0" cy="0"/>
+        </a:xfrm>
+      </p:grpSpPr>
+      <p:sp>
+        <p:nvSpPr>
+          <p:cNvPr id="26" name="Text 0"/>
+          <p:cNvSpPr/>
+          <p:nvPr/>
+        </p:nvSpPr>
+        <p:spPr>
+          <a:xfrm>
+            <a:off x="320040" y="164520"/>
+            <a:ext cx="11521080" cy="456840"/>
+          </a:xfrm>
+          <a:prstGeom prst="rect">
+            <a:avLst/>
+          </a:prstGeom>
+          <a:noFill/>
+          <a:ln w="0">
+            <a:noFill/>
+          </a:ln>
+        </p:spPr>
+        <p:style>
+          <a:lnRef idx="0">
+            <a:scrgbClr r="0" g="0" b="0"/>
+          </a:lnRef>
+          <a:fillRef idx="0">
+            <a:scrgbClr r="0" g="0" b="0"/>
+          </a:fillRef>
+          <a:effectRef idx="0">
+            <a:scrgbClr r="0" g="0" b="0"/>
+          </a:effectRef>
+          <a:fontRef idx="minor"/>
+        </p:style>
+        <p:txBody>
+          <a:bodyPr lIns="90000" tIns="45000" rIns="90000" bIns="45000" anchor="ctr">
+            <a:noAutofit/>
+          </a:bodyPr>
+          <a:lstStyle/>
+          <a:p>
+            <a:pPr algn="ctr" defTabSz="914400">
+              <a:lnSpc>
+                <a:spcPct val="100000"/>
+              </a:lnSpc>
+              <a:tabLst>
+                <a:tab pos="0" algn="l"/>
+              </a:tabLst>
+            </a:pPr>
+            <a:r>
+              <a:rPr lang="en-US" sz="2400" b="1" u="none" strike="noStrike">
+                <a:solidFill>
+                  <a:srgbClr val="2C3E50"/>
+                </a:solidFill>
+                <a:effectLst/>
+                <a:uFillTx/>
+                <a:latin typeface="Cambria"/>
+                <a:ea typeface="Cambria"/>
+              </a:rPr>
+              <a:t>Key terms (Result 1)</a:t>
+            </a:r>
+            <a:endParaRPr lang="en-US" sz="2400" b="0" u="none" strike="noStrike">
+              <a:solidFill>
+                <a:srgbClr val="000000"/>
+              </a:solidFill>
+              <a:effectLst/>
+              <a:uFillTx/>
+              <a:latin typeface="Arial"/>
+            </a:endParaRPr>
+          </a:p>
+        </p:txBody>
+      </p:sp>
+      <p:sp>
+        <p:nvSpPr>
+          <p:cNvPr id="27" name="Text 1"/>
+          <p:cNvSpPr/>
+          <p:nvPr/>
+        </p:nvSpPr>
+        <p:spPr>
+          <a:xfrm>
+            <a:off x="457200" y="1051560"/>
+            <a:ext cx="5486040" cy="868320"/>
+          </a:xfrm>
+          <a:prstGeom prst="rect">
+            <a:avLst/>
+          </a:prstGeom>
+          <a:noFill/>
+          <a:ln w="0">
+            <a:noFill/>
+          </a:ln>
+        </p:spPr>
+        <p:style>
+          <a:lnRef idx="0">
+            <a:scrgbClr r="0" g="0" b="0"/>
+          </a:lnRef>
+          <a:fillRef idx="0">
+            <a:scrgbClr r="0" g="0" b="0"/>
+          </a:fillRef>
+          <a:effectRef idx="0">
+            <a:scrgbClr r="0" g="0" b="0"/>
+          </a:effectRef>
+          <a:fontRef idx="minor"/>
+        </p:style>
+        <p:txBody>
+          <a:bodyPr lIns="90000" tIns="45000" rIns="90000" bIns="45000" anchor="t">
+            <a:noAutofit/>
+          </a:bodyPr>
+          <a:lstStyle/>
+          <a:p>
+            <a:pPr defTabSz="914400">
+              <a:lnSpc>
+                <a:spcPct val="100000"/>
+              </a:lnSpc>
+              <a:tabLst>
+                <a:tab pos="0" algn="l"/>
+              </a:tabLst>
+            </a:pPr>
+            <a:r>
+              <a:rPr lang="en-US" sz="1250" b="1" u="none" strike="noStrike">
+                <a:solidFill>
+                  <a:srgbClr val="2166AC"/>
+                </a:solidFill>
+                <a:effectLst/>
+                <a:uFillTx/>
+                <a:latin typeface="Calibri"/>
+                <a:ea typeface="Calibri"/>
+              </a:rPr>
+              <a:t>Node / edge  </a:t>
+            </a:r>
+            <a:r>
+              <a:rPr lang="en-US" sz="1250" b="0" u="none" strike="noStrike">
+                <a:solidFill>
+                  <a:srgbClr val="2C3E50"/>
+                </a:solidFill>
+                <a:effectLst/>
+                <a:uFillTx/>
+                <a:latin typeface="Calibri"/>
+                <a:ea typeface="Calibri"/>
+              </a:rPr>
+              <a:t>— a protein / a STRING interaction between two proteins.</a:t>
+            </a:r>
+            <a:endParaRPr lang="en-US" sz="1250" b="0" u="none" strike="noStrike">
+              <a:solidFill>
+                <a:srgbClr val="000000"/>
+              </a:solidFill>
+              <a:effectLst/>
+              <a:uFillTx/>
+              <a:latin typeface="Arial"/>
+            </a:endParaRPr>
+          </a:p>
+        </p:txBody>
+      </p:sp>
+      <p:sp>
+        <p:nvSpPr>
+          <p:cNvPr id="28" name="Text 2"/>
+          <p:cNvSpPr/>
+          <p:nvPr/>
+        </p:nvSpPr>
+        <p:spPr>
+          <a:xfrm>
+            <a:off x="457200" y="1965960"/>
+            <a:ext cx="5486040" cy="868320"/>
+          </a:xfrm>
+          <a:prstGeom prst="rect">
+            <a:avLst/>
+          </a:prstGeom>
+          <a:noFill/>
+          <a:ln w="0">
+            <a:noFill/>
+          </a:ln>
+        </p:spPr>
+        <p:style>
+          <a:lnRef idx="0">
+            <a:scrgbClr r="0" g="0" b="0"/>
+          </a:lnRef>
+          <a:fillRef idx="0">
+            <a:scrgbClr r="0" g="0" b="0"/>
+          </a:fillRef>
+          <a:effectRef idx="0">
+            <a:scrgbClr r="0" g="0" b="0"/>
+          </a:effectRef>
+          <a:fontRef idx="minor"/>
+        </p:style>
+        <p:txBody>
+          <a:bodyPr lIns="90000" tIns="45000" rIns="90000" bIns="45000" anchor="t">
+            <a:noAutofit/>
+          </a:bodyPr>
+          <a:lstStyle/>
+          <a:p>
+            <a:pPr defTabSz="914400">
+              <a:lnSpc>
+                <a:spcPct val="100000"/>
+              </a:lnSpc>
+              <a:tabLst>
+                <a:tab pos="0" algn="l"/>
+              </a:tabLst>
+            </a:pPr>
+            <a:r>
+              <a:rPr lang="en-US" sz="1250" b="1" u="none" strike="noStrike">
+                <a:solidFill>
+                  <a:srgbClr val="2166AC"/>
+                </a:solidFill>
+                <a:effectLst/>
+                <a:uFillTx/>
+                <a:latin typeface="Calibri"/>
+                <a:ea typeface="Calibri"/>
+              </a:rPr>
+              <a:t>Degree  </a:t>
+            </a:r>
+            <a:r>
+              <a:rPr lang="en-US" sz="1250" b="0" u="none" strike="noStrike">
+                <a:solidFill>
+                  <a:srgbClr val="2C3E50"/>
+                </a:solidFill>
+                <a:effectLst/>
+                <a:uFillTx/>
+                <a:latin typeface="Calibri"/>
+                <a:ea typeface="Calibri"/>
+              </a:rPr>
+              <a:t>— how many interactions a protein has (Sororin: 15/15 = hub).</a:t>
+            </a:r>
+            <a:endParaRPr lang="en-US" sz="1250" b="0" u="none" strike="noStrike">
+              <a:solidFill>
+                <a:srgbClr val="000000"/>
+              </a:solidFill>
+              <a:effectLst/>
+              <a:uFillTx/>
+              <a:latin typeface="Arial"/>
+            </a:endParaRPr>
+          </a:p>
+        </p:txBody>
+      </p:sp>
+      <p:sp>
+        <p:nvSpPr>
+          <p:cNvPr id="29" name="Text 3"/>
+          <p:cNvSpPr/>
+          <p:nvPr/>
+        </p:nvSpPr>
+        <p:spPr>
+          <a:xfrm>
+            <a:off x="457200" y="2880360"/>
+            <a:ext cx="5486040" cy="868320"/>
+          </a:xfrm>
+          <a:prstGeom prst="rect">
+            <a:avLst/>
+          </a:prstGeom>
+          <a:noFill/>
+          <a:ln w="0">
+            <a:noFill/>
+          </a:ln>
+        </p:spPr>
+        <p:style>
+          <a:lnRef idx="0">
+            <a:scrgbClr r="0" g="0" b="0"/>
+          </a:lnRef>
+          <a:fillRef idx="0">
+            <a:scrgbClr r="0" g="0" b="0"/>
+          </a:fillRef>
+          <a:effectRef idx="0">
+            <a:scrgbClr r="0" g="0" b="0"/>
+          </a:effectRef>
+          <a:fontRef idx="minor"/>
+        </p:style>
+        <p:txBody>
+          <a:bodyPr lIns="90000" tIns="45000" rIns="90000" bIns="45000" anchor="t">
+            <a:noAutofit/>
+          </a:bodyPr>
+          <a:lstStyle/>
+          <a:p>
+            <a:pPr defTabSz="914400">
+              <a:lnSpc>
+                <a:spcPct val="100000"/>
+              </a:lnSpc>
+              <a:tabLst>
+                <a:tab pos="0" algn="l"/>
+              </a:tabLst>
+            </a:pPr>
+            <a:r>
+              <a:rPr lang="en-US" sz="1250" b="1" u="none" strike="noStrike">
+                <a:solidFill>
+                  <a:srgbClr val="2166AC"/>
+                </a:solidFill>
+                <a:effectLst/>
+                <a:uFillTx/>
+                <a:latin typeface="Calibri"/>
+                <a:ea typeface="Calibri"/>
+              </a:rPr>
+              <a:t>Density  </a:t>
+            </a:r>
+            <a:r>
+              <a:rPr lang="en-US" sz="1250" b="0" u="none" strike="noStrike">
+                <a:solidFill>
+                  <a:srgbClr val="2C3E50"/>
+                </a:solidFill>
+                <a:effectLst/>
+                <a:uFillTx/>
+                <a:latin typeface="Calibri"/>
+                <a:ea typeface="Calibri"/>
+              </a:rPr>
+              <a:t>— fraction of all possible links present (0.89 = very tightly connected).</a:t>
+            </a:r>
+            <a:endParaRPr lang="en-US" sz="1250" b="0" u="none" strike="noStrike">
+              <a:solidFill>
+                <a:srgbClr val="000000"/>
+              </a:solidFill>
+              <a:effectLst/>
+              <a:uFillTx/>
+              <a:latin typeface="Arial"/>
+            </a:endParaRPr>
+          </a:p>
+        </p:txBody>
+      </p:sp>
+      <p:sp>
+        <p:nvSpPr>
+          <p:cNvPr id="30" name="Text 4"/>
+          <p:cNvSpPr/>
+          <p:nvPr/>
+        </p:nvSpPr>
+        <p:spPr>
+          <a:xfrm>
+            <a:off x="457200" y="3794760"/>
+            <a:ext cx="5486040" cy="868320"/>
+          </a:xfrm>
+          <a:prstGeom prst="rect">
+            <a:avLst/>
+          </a:prstGeom>
+          <a:noFill/>
+          <a:ln w="0">
+            <a:noFill/>
+          </a:ln>
+        </p:spPr>
+        <p:style>
+          <a:lnRef idx="0">
+            <a:scrgbClr r="0" g="0" b="0"/>
+          </a:lnRef>
+          <a:fillRef idx="0">
+            <a:scrgbClr r="0" g="0" b="0"/>
+          </a:fillRef>
+          <a:effectRef idx="0">
+            <a:scrgbClr r="0" g="0" b="0"/>
+          </a:effectRef>
+          <a:fontRef idx="minor"/>
+        </p:style>
+        <p:txBody>
+          <a:bodyPr lIns="90000" tIns="45000" rIns="90000" bIns="45000" anchor="t">
+            <a:noAutofit/>
+          </a:bodyPr>
+          <a:lstStyle/>
+          <a:p>
+            <a:pPr defTabSz="914400">
+              <a:lnSpc>
+                <a:spcPct val="100000"/>
+              </a:lnSpc>
+              <a:tabLst>
+                <a:tab pos="0" algn="l"/>
+              </a:tabLst>
+            </a:pPr>
+            <a:r>
+              <a:rPr lang="en-US" sz="1250" b="1" u="none" strike="noStrike">
+                <a:solidFill>
+                  <a:srgbClr val="2166AC"/>
+                </a:solidFill>
+                <a:effectLst/>
+                <a:uFillTx/>
+                <a:latin typeface="Calibri"/>
+                <a:ea typeface="Calibri"/>
+              </a:rPr>
+              <a:t>Clustering coefficient  </a:t>
+            </a:r>
+            <a:r>
+              <a:rPr lang="en-US" sz="1250" b="0" u="none" strike="noStrike">
+                <a:solidFill>
+                  <a:srgbClr val="2C3E50"/>
+                </a:solidFill>
+                <a:effectLst/>
+                <a:uFillTx/>
+                <a:latin typeface="Calibri"/>
+                <a:ea typeface="Calibri"/>
+              </a:rPr>
+              <a:t>— how interconnected a node's neighbours are (0.925).</a:t>
+            </a:r>
+            <a:endParaRPr lang="en-US" sz="1250" b="0" u="none" strike="noStrike">
+              <a:solidFill>
+                <a:srgbClr val="000000"/>
+              </a:solidFill>
+              <a:effectLst/>
+              <a:uFillTx/>
+              <a:latin typeface="Arial"/>
+            </a:endParaRPr>
+          </a:p>
+        </p:txBody>
+      </p:sp>
+      <p:sp>
+        <p:nvSpPr>
+          <p:cNvPr id="31" name="Text 5"/>
+          <p:cNvSpPr/>
+          <p:nvPr/>
+        </p:nvSpPr>
+        <p:spPr>
+          <a:xfrm>
+            <a:off x="457200" y="4709160"/>
+            <a:ext cx="5486040" cy="868320"/>
+          </a:xfrm>
+          <a:prstGeom prst="rect">
+            <a:avLst/>
+          </a:prstGeom>
+          <a:noFill/>
+          <a:ln w="0">
+            <a:noFill/>
+          </a:ln>
+        </p:spPr>
+        <p:style>
+          <a:lnRef idx="0">
+            <a:scrgbClr r="0" g="0" b="0"/>
+          </a:lnRef>
+          <a:fillRef idx="0">
+            <a:scrgbClr r="0" g="0" b="0"/>
+          </a:fillRef>
+          <a:effectRef idx="0">
+            <a:scrgbClr r="0" g="0" b="0"/>
+          </a:effectRef>
+          <a:fontRef idx="minor"/>
+        </p:style>
+        <p:txBody>
+          <a:bodyPr lIns="90000" tIns="45000" rIns="90000" bIns="45000" anchor="t">
+            <a:noAutofit/>
+          </a:bodyPr>
+          <a:lstStyle/>
+          <a:p>
+            <a:pPr defTabSz="914400">
+              <a:lnSpc>
+                <a:spcPct val="100000"/>
+              </a:lnSpc>
+              <a:tabLst>
+                <a:tab pos="0" algn="l"/>
+              </a:tabLst>
+            </a:pPr>
+            <a:r>
+              <a:rPr lang="en-US" sz="1250" b="1" u="none" strike="noStrike">
+                <a:solidFill>
+                  <a:srgbClr val="2166AC"/>
+                </a:solidFill>
+                <a:effectLst/>
+                <a:uFillTx/>
+                <a:latin typeface="Calibri"/>
+                <a:ea typeface="Calibri"/>
+              </a:rPr>
+              <a:t>Separase (ESPL1)  </a:t>
+            </a:r>
+            <a:r>
+              <a:rPr lang="en-US" sz="1250" b="0" u="none" strike="noStrike">
+                <a:solidFill>
+                  <a:srgbClr val="2C3E50"/>
+                </a:solidFill>
+                <a:effectLst/>
+                <a:uFillTx/>
+                <a:latin typeface="Calibri"/>
+                <a:ea typeface="Calibri"/>
+              </a:rPr>
+              <a:t>— the protease ('scissors') that cuts RAD21 to open the ring at anaphase.</a:t>
+            </a:r>
+            <a:endParaRPr lang="en-US" sz="1250" b="0" u="none" strike="noStrike">
+              <a:solidFill>
+                <a:srgbClr val="000000"/>
+              </a:solidFill>
+              <a:effectLst/>
+              <a:uFillTx/>
+              <a:latin typeface="Arial"/>
+            </a:endParaRPr>
+          </a:p>
+        </p:txBody>
+      </p:sp>
+      <p:sp>
+        <p:nvSpPr>
+          <p:cNvPr id="32" name="Text 6"/>
+          <p:cNvSpPr/>
+          <p:nvPr/>
+        </p:nvSpPr>
+        <p:spPr>
+          <a:xfrm>
+            <a:off x="6263640" y="1051560"/>
+            <a:ext cx="5577480" cy="868320"/>
+          </a:xfrm>
+          <a:prstGeom prst="rect">
+            <a:avLst/>
+          </a:prstGeom>
+          <a:noFill/>
+          <a:ln w="0">
+            <a:noFill/>
+          </a:ln>
+        </p:spPr>
+        <p:style>
+          <a:lnRef idx="0">
+            <a:scrgbClr r="0" g="0" b="0"/>
+          </a:lnRef>
+          <a:fillRef idx="0">
+            <a:scrgbClr r="0" g="0" b="0"/>
+          </a:fillRef>
+          <a:effectRef idx="0">
+            <a:scrgbClr r="0" g="0" b="0"/>
+          </a:effectRef>
+          <a:fontRef idx="minor"/>
+        </p:style>
+        <p:txBody>
+          <a:bodyPr lIns="90000" tIns="45000" rIns="90000" bIns="45000" anchor="t">
+            <a:noAutofit/>
+          </a:bodyPr>
+          <a:lstStyle/>
+          <a:p>
+            <a:pPr defTabSz="914400">
+              <a:lnSpc>
+                <a:spcPct val="100000"/>
+              </a:lnSpc>
+              <a:tabLst>
+                <a:tab pos="0" algn="l"/>
+              </a:tabLst>
+            </a:pPr>
+            <a:r>
+              <a:rPr lang="en-US" sz="1250" b="1" u="none" strike="noStrike">
+                <a:solidFill>
+                  <a:srgbClr val="2166AC"/>
+                </a:solidFill>
+                <a:effectLst/>
+                <a:uFillTx/>
+                <a:latin typeface="Calibri"/>
+                <a:ea typeface="Calibri"/>
+              </a:rPr>
+              <a:t>Substrate  </a:t>
+            </a:r>
+            <a:r>
+              <a:rPr lang="en-US" sz="1250" b="0" u="none" strike="noStrike">
+                <a:solidFill>
+                  <a:srgbClr val="2C3E50"/>
+                </a:solidFill>
+                <a:effectLst/>
+                <a:uFillTx/>
+                <a:latin typeface="Calibri"/>
+                <a:ea typeface="Calibri"/>
+              </a:rPr>
+              <a:t>— the molecule an enzyme acts on (Sororin is an APC/C substrate = its target).</a:t>
+            </a:r>
+            <a:endParaRPr lang="en-US" sz="1250" b="0" u="none" strike="noStrike">
+              <a:solidFill>
+                <a:srgbClr val="000000"/>
+              </a:solidFill>
+              <a:effectLst/>
+              <a:uFillTx/>
+              <a:latin typeface="Arial"/>
+            </a:endParaRPr>
+          </a:p>
+        </p:txBody>
+      </p:sp>
+      <p:sp>
+        <p:nvSpPr>
+          <p:cNvPr id="33" name="Text 7"/>
+          <p:cNvSpPr/>
+          <p:nvPr/>
+        </p:nvSpPr>
+        <p:spPr>
+          <a:xfrm>
+            <a:off x="6263640" y="1965960"/>
+            <a:ext cx="5577480" cy="868320"/>
+          </a:xfrm>
+          <a:prstGeom prst="rect">
+            <a:avLst/>
+          </a:prstGeom>
+          <a:noFill/>
+          <a:ln w="0">
+            <a:noFill/>
+          </a:ln>
+        </p:spPr>
+        <p:style>
+          <a:lnRef idx="0">
+            <a:scrgbClr r="0" g="0" b="0"/>
+          </a:lnRef>
+          <a:fillRef idx="0">
+            <a:scrgbClr r="0" g="0" b="0"/>
+          </a:fillRef>
+          <a:effectRef idx="0">
+            <a:scrgbClr r="0" g="0" b="0"/>
+          </a:effectRef>
+          <a:fontRef idx="minor"/>
+        </p:style>
+        <p:txBody>
+          <a:bodyPr lIns="90000" tIns="45000" rIns="90000" bIns="45000" anchor="t">
+            <a:noAutofit/>
+          </a:bodyPr>
+          <a:lstStyle/>
+          <a:p>
+            <a:pPr defTabSz="914400">
+              <a:lnSpc>
+                <a:spcPct val="100000"/>
+              </a:lnSpc>
+              <a:tabLst>
+                <a:tab pos="0" algn="l"/>
+              </a:tabLst>
+            </a:pPr>
+            <a:r>
+              <a:rPr lang="en-US" sz="1250" b="1" u="none" strike="noStrike">
+                <a:solidFill>
+                  <a:srgbClr val="2166AC"/>
+                </a:solidFill>
+                <a:effectLst/>
+                <a:uFillTx/>
+                <a:latin typeface="Calibri"/>
+                <a:ea typeface="Calibri"/>
+              </a:rPr>
+              <a:t>Oncogenic  </a:t>
+            </a:r>
+            <a:r>
+              <a:rPr lang="en-US" sz="1250" b="0" u="none" strike="noStrike">
+                <a:solidFill>
+                  <a:srgbClr val="2C3E50"/>
+                </a:solidFill>
+                <a:effectLst/>
+                <a:uFillTx/>
+                <a:latin typeface="Calibri"/>
+                <a:ea typeface="Calibri"/>
+              </a:rPr>
+              <a:t>— cancer-promoting (ERK2 via overactivity; SPOP is a tumour suppressor whose loss is oncogenic → both 'cancer-relevant').</a:t>
+            </a:r>
+            <a:endParaRPr lang="en-US" sz="1250" b="0" u="none" strike="noStrike">
+              <a:solidFill>
+                <a:srgbClr val="000000"/>
+              </a:solidFill>
+              <a:effectLst/>
+              <a:uFillTx/>
+              <a:latin typeface="Arial"/>
+            </a:endParaRPr>
+          </a:p>
+        </p:txBody>
+      </p:sp>
+      <p:sp>
+        <p:nvSpPr>
+          <p:cNvPr id="34" name="Text 8"/>
+          <p:cNvSpPr/>
+          <p:nvPr/>
+        </p:nvSpPr>
+        <p:spPr>
+          <a:xfrm>
+            <a:off x="6263640" y="3108960"/>
+            <a:ext cx="5577480" cy="868320"/>
+          </a:xfrm>
+          <a:prstGeom prst="rect">
+            <a:avLst/>
+          </a:prstGeom>
+          <a:noFill/>
+          <a:ln w="0">
+            <a:noFill/>
+          </a:ln>
+        </p:spPr>
+        <p:style>
+          <a:lnRef idx="0">
+            <a:scrgbClr r="0" g="0" b="0"/>
+          </a:lnRef>
+          <a:fillRef idx="0">
+            <a:scrgbClr r="0" g="0" b="0"/>
+          </a:fillRef>
+          <a:effectRef idx="0">
+            <a:scrgbClr r="0" g="0" b="0"/>
+          </a:effectRef>
+          <a:fontRef idx="minor"/>
+        </p:style>
+        <p:txBody>
+          <a:bodyPr lIns="90000" tIns="45000" rIns="90000" bIns="45000" anchor="t">
+            <a:noAutofit/>
+          </a:bodyPr>
+          <a:lstStyle/>
+          <a:p>
+            <a:pPr defTabSz="914400">
+              <a:lnSpc>
+                <a:spcPct val="100000"/>
+              </a:lnSpc>
+              <a:tabLst>
+                <a:tab pos="0" algn="l"/>
+              </a:tabLst>
+            </a:pPr>
+            <a:r>
+              <a:rPr lang="en-US" sz="1250" b="1" u="none" strike="noStrike">
+                <a:solidFill>
+                  <a:srgbClr val="2166AC"/>
+                </a:solidFill>
+                <a:effectLst/>
+                <a:uFillTx/>
+                <a:latin typeface="Calibri"/>
+                <a:ea typeface="Calibri"/>
+              </a:rPr>
+              <a:t>PPI enrichment  </a:t>
+            </a:r>
+            <a:r>
+              <a:rPr lang="en-US" sz="1250" b="0" u="none" strike="noStrike">
+                <a:solidFill>
+                  <a:srgbClr val="2C3E50"/>
+                </a:solidFill>
+                <a:effectLst/>
+                <a:uFillTx/>
+                <a:latin typeface="Calibri"/>
+                <a:ea typeface="Calibri"/>
+              </a:rPr>
+              <a:t>— statistical test: is the set more interconnected than random? (here p &lt; 10⁻¹⁶).</a:t>
+            </a:r>
+            <a:endParaRPr lang="en-US" sz="1250" b="0" u="none" strike="noStrike">
+              <a:solidFill>
+                <a:srgbClr val="000000"/>
+              </a:solidFill>
+              <a:effectLst/>
+              <a:uFillTx/>
+              <a:latin typeface="Arial"/>
+            </a:endParaRPr>
+          </a:p>
+        </p:txBody>
+      </p:sp>
+      <p:sp>
+        <p:nvSpPr>
+          <p:cNvPr id="35" name="Text 9"/>
+          <p:cNvSpPr/>
+          <p:nvPr/>
+        </p:nvSpPr>
+        <p:spPr>
+          <a:xfrm>
+            <a:off x="6263640" y="4114800"/>
+            <a:ext cx="5577480" cy="868320"/>
+          </a:xfrm>
+          <a:prstGeom prst="rect">
+            <a:avLst/>
+          </a:prstGeom>
+          <a:noFill/>
+          <a:ln w="0">
+            <a:noFill/>
+          </a:ln>
+        </p:spPr>
+        <p:style>
+          <a:lnRef idx="0">
+            <a:scrgbClr r="0" g="0" b="0"/>
+          </a:lnRef>
+          <a:fillRef idx="0">
+            <a:scrgbClr r="0" g="0" b="0"/>
+          </a:fillRef>
+          <a:effectRef idx="0">
+            <a:scrgbClr r="0" g="0" b="0"/>
+          </a:effectRef>
+          <a:fontRef idx="minor"/>
+        </p:style>
+        <p:txBody>
+          <a:bodyPr lIns="90000" tIns="45000" rIns="90000" bIns="45000" anchor="t">
+            <a:noAutofit/>
+          </a:bodyPr>
+          <a:lstStyle/>
+          <a:p>
+            <a:pPr defTabSz="914400">
+              <a:lnSpc>
+                <a:spcPct val="100000"/>
+              </a:lnSpc>
+              <a:tabLst>
+                <a:tab pos="0" algn="l"/>
+              </a:tabLst>
+            </a:pPr>
+            <a:r>
+              <a:rPr lang="en-US" sz="1250" b="1" u="none" strike="noStrike">
+                <a:solidFill>
+                  <a:srgbClr val="2166AC"/>
+                </a:solidFill>
+                <a:effectLst/>
+                <a:uFillTx/>
+                <a:latin typeface="Calibri"/>
+                <a:ea typeface="Calibri"/>
+              </a:rPr>
+              <a:t>KEGG  </a:t>
+            </a:r>
+            <a:r>
+              <a:rPr lang="en-US" sz="1250" b="0" u="none" strike="noStrike">
+                <a:solidFill>
+                  <a:srgbClr val="2C3E50"/>
+                </a:solidFill>
+                <a:effectLst/>
+                <a:uFillTx/>
+                <a:latin typeface="Calibri"/>
+                <a:ea typeface="Calibri"/>
+              </a:rPr>
+              <a:t>— database of curated pathway maps (e.g. 'Cell cycle', hsa04110).</a:t>
+            </a:r>
+            <a:endParaRPr lang="en-US" sz="1250" b="0" u="none" strike="noStrike">
+              <a:solidFill>
+                <a:srgbClr val="000000"/>
+              </a:solidFill>
+              <a:effectLst/>
+              <a:uFillTx/>
+              <a:latin typeface="Arial"/>
+            </a:endParaRPr>
+          </a:p>
+        </p:txBody>
+      </p:sp>
+      <p:sp>
+        <p:nvSpPr>
+          <p:cNvPr id="36" name="Text 10"/>
+          <p:cNvSpPr/>
+          <p:nvPr/>
+        </p:nvSpPr>
+        <p:spPr>
+          <a:xfrm>
+            <a:off x="6263640" y="5029200"/>
+            <a:ext cx="5577480" cy="868320"/>
+          </a:xfrm>
+          <a:prstGeom prst="rect">
+            <a:avLst/>
+          </a:prstGeom>
+          <a:noFill/>
+          <a:ln w="0">
+            <a:noFill/>
+          </a:ln>
+        </p:spPr>
+        <p:style>
+          <a:lnRef idx="0">
+            <a:scrgbClr r="0" g="0" b="0"/>
+          </a:lnRef>
+          <a:fillRef idx="0">
+            <a:scrgbClr r="0" g="0" b="0"/>
+          </a:fillRef>
+          <a:effectRef idx="0">
+            <a:scrgbClr r="0" g="0" b="0"/>
+          </a:effectRef>
+          <a:fontRef idx="minor"/>
+        </p:style>
+        <p:txBody>
+          <a:bodyPr lIns="90000" tIns="45000" rIns="90000" bIns="45000" anchor="t">
+            <a:noAutofit/>
+          </a:bodyPr>
+          <a:lstStyle/>
+          <a:p>
+            <a:pPr defTabSz="914400">
+              <a:lnSpc>
+                <a:spcPct val="100000"/>
+              </a:lnSpc>
+              <a:tabLst>
+                <a:tab pos="0" algn="l"/>
+              </a:tabLst>
+            </a:pPr>
+            <a:r>
+              <a:rPr lang="en-US" sz="1250" b="1" u="none" strike="noStrike">
+                <a:solidFill>
+                  <a:srgbClr val="2166AC"/>
+                </a:solidFill>
+                <a:effectLst/>
+                <a:uFillTx/>
+                <a:latin typeface="Calibri"/>
+                <a:ea typeface="Calibri"/>
+              </a:rPr>
+              <a:t>FDR  </a:t>
+            </a:r>
+            <a:r>
+              <a:rPr lang="en-US" sz="1250" b="0" u="none" strike="noStrike">
+                <a:solidFill>
+                  <a:srgbClr val="2C3E50"/>
+                </a:solidFill>
+                <a:effectLst/>
+                <a:uFillTx/>
+                <a:latin typeface="Calibri"/>
+                <a:ea typeface="Calibri"/>
+              </a:rPr>
+              <a:t>— false-discovery rate: significance corrected for testing many terms; lower = more reliable.</a:t>
+            </a:r>
+            <a:endParaRPr lang="en-US" sz="1250" b="0" u="none" strike="noStrike">
+              <a:solidFill>
+                <a:srgbClr val="000000"/>
+              </a:solidFill>
+              <a:effectLst/>
+              <a:uFillTx/>
+              <a:latin typeface="Arial"/>
+            </a:endParaRPr>
+          </a:p>
+        </p:txBody>
+      </p:sp>
+    </p:spTree>
+  </p:cSld>
+  <p:clrMapOvr>
+    <a:masterClrMapping/>
+  </p:clrMapOvr>
+</p:sld>
+</file>
+
+<file path=ppt/slides/slide8.xml><?xml version="1.0" encoding="utf-8"?>
+<p:sld xmlns:a="http://schemas.openxmlformats.org/drawingml/2006/main" xmlns:r="http://schemas.openxmlformats.org/officeDocument/2006/relationships" xmlns:p="http://schemas.openxmlformats.org/presentationml/2006/main">
+  <p:cSld>
+    <p:bg>
+      <p:bgPr>
+        <a:solidFill>
+          <a:srgbClr val="FFFFFF"/>
+        </a:solidFill>
+        <a:effectLst/>
+      </p:bgPr>
+    </p:bg>
+    <p:spTree>
+      <p:nvGrpSpPr>
+        <p:cNvPr id="1" name=""/>
+        <p:cNvGrpSpPr/>
+        <p:nvPr/>
+      </p:nvGrpSpPr>
+      <p:grpSpPr>
+        <a:xfrm>
+          <a:off x="0" y="0"/>
+          <a:ext cx="0" cy="0"/>
+          <a:chOff x="0" y="0"/>
+          <a:chExt cx="0" cy="0"/>
+        </a:xfrm>
+      </p:grpSpPr>
+      <p:sp>
+        <p:nvSpPr>
           <p:cNvPr id="50" name="Text 0"/>
           <p:cNvSpPr/>
           <p:nvPr/>

--- a/Sororin_mechanism_flowchart.pptx
+++ b/Sororin_mechanism_flowchart.pptx
@@ -9829,7 +9829,7 @@
                         </a:tabLst>
                       </a:pPr>
                       <a:r>
-                        <a:rPr lang="en-US" sz="950" b="0" u="none" strike="noStrike">
+                        <a:rPr lang="en-US" sz="950" b="0" u="none" strike="noStrike" dirty="0">
                           <a:solidFill>
                             <a:srgbClr val="2C3E50"/>
                           </a:solidFill>
@@ -9840,7 +9840,7 @@
                         </a:rPr>
                         <a:t>Separase</a:t>
                       </a:r>
-                      <a:endParaRPr lang="en-US" sz="950" b="0" u="none" strike="noStrike">
+                      <a:endParaRPr lang="en-US" sz="950" b="0" u="none" strike="noStrike" dirty="0">
                         <a:solidFill>
                           <a:srgbClr val="000000"/>
                         </a:solidFill>
@@ -10098,7 +10098,7 @@
                         </a:tabLst>
                       </a:pPr>
                       <a:r>
-                        <a:rPr lang="en-US" sz="950" b="0" u="none" strike="noStrike">
+                        <a:rPr lang="en-US" sz="950" b="0" u="none" strike="noStrike" dirty="0">
                           <a:solidFill>
                             <a:srgbClr val="B2182B"/>
                           </a:solidFill>
@@ -10109,7 +10109,7 @@
                         </a:rPr>
                         <a:t>ERK2 / SPOP</a:t>
                       </a:r>
-                      <a:endParaRPr lang="en-US" sz="950" b="0" u="none" strike="noStrike">
+                      <a:endParaRPr lang="en-US" sz="950" b="0" u="none" strike="noStrike" dirty="0">
                         <a:solidFill>
                           <a:srgbClr val="000000"/>
                         </a:solidFill>
@@ -10161,7 +10161,7 @@
                         </a:tabLst>
                       </a:pPr>
                       <a:r>
-                        <a:rPr lang="en-US" sz="950" b="0" u="none" strike="noStrike">
+                        <a:rPr lang="en-US" sz="950" b="0" u="none" strike="noStrike" dirty="0">
                           <a:solidFill>
                             <a:srgbClr val="B2182B"/>
                           </a:solidFill>
@@ -10172,7 +10172,7 @@
                         </a:rPr>
                         <a:t>literature edges (dashed)</a:t>
                       </a:r>
-                      <a:endParaRPr lang="en-US" sz="950" b="0" u="none" strike="noStrike">
+                      <a:endParaRPr lang="en-US" sz="950" b="0" u="none" strike="noStrike" dirty="0">
                         <a:solidFill>
                           <a:srgbClr val="000000"/>
                         </a:solidFill>
@@ -10291,8 +10291,8 @@
         </p:nvSpPr>
         <p:spPr>
           <a:xfrm>
-            <a:off x="320040" y="4892040"/>
-            <a:ext cx="11521080" cy="868320"/>
+            <a:off x="320040" y="5106383"/>
+            <a:ext cx="11521080" cy="567000"/>
           </a:xfrm>
           <a:prstGeom prst="rect">
             <a:avLst/>
@@ -10676,6 +10676,108 @@
               <a:uFillTx/>
               <a:latin typeface="Arial"/>
             </a:endParaRPr>
+          </a:p>
+        </p:txBody>
+      </p:sp>
+      <p:sp>
+        <p:nvSpPr>
+          <p:cNvPr id="2" name="Rectangle: Rounded Corners 1">
+            <a:extLst>
+              <a:ext uri="{FF2B5EF4-FFF2-40B4-BE49-F238E27FC236}">
+                <a16:creationId xmlns:a16="http://schemas.microsoft.com/office/drawing/2014/main" id="{CD48BAF7-251C-4B63-101B-6EA48F3A5BA4}"/>
+              </a:ext>
+            </a:extLst>
+          </p:cNvPr>
+          <p:cNvSpPr/>
+          <p:nvPr/>
+        </p:nvSpPr>
+        <p:spPr>
+          <a:xfrm>
+            <a:off x="5623560" y="4469272"/>
+            <a:ext cx="6245225" cy="488416"/>
+          </a:xfrm>
+          <a:prstGeom prst="roundRect">
+            <a:avLst/>
+          </a:prstGeom>
+        </p:spPr>
+        <p:style>
+          <a:lnRef idx="1">
+            <a:schemeClr val="accent3"/>
+          </a:lnRef>
+          <a:fillRef idx="2">
+            <a:schemeClr val="accent3"/>
+          </a:fillRef>
+          <a:effectRef idx="1">
+            <a:schemeClr val="accent3"/>
+          </a:effectRef>
+          <a:fontRef idx="minor">
+            <a:schemeClr val="dk1"/>
+          </a:fontRef>
+        </p:style>
+        <p:txBody>
+          <a:bodyPr rtlCol="0" anchor="ctr"/>
+          <a:lstStyle/>
+          <a:p>
+            <a:pPr algn="ctr"/>
+            <a:r>
+              <a:rPr lang="en-US" sz="1100" dirty="0"/>
+              <a:t>loading (NIPBL·MAU2) → the ring (SMC1A/3 · RAD21 · STAG) → maintain/release (PDS5 · WAPL · </a:t>
+            </a:r>
+            <a:r>
+              <a:rPr lang="en-US" sz="1100" b="1" dirty="0"/>
+              <a:t>Sororin</a:t>
+            </a:r>
+            <a:r>
+              <a:rPr lang="en-US" sz="1100" dirty="0"/>
+              <a:t>) → mitotic control (CDK1 · PLK1 · AURKB) → destruction &amp; cut (APC/C·CDC20 · separase ESPL1).</a:t>
+            </a:r>
+          </a:p>
+        </p:txBody>
+      </p:sp>
+      <p:sp>
+        <p:nvSpPr>
+          <p:cNvPr id="3" name="Rectangle: Rounded Corners 2">
+            <a:extLst>
+              <a:ext uri="{FF2B5EF4-FFF2-40B4-BE49-F238E27FC236}">
+                <a16:creationId xmlns:a16="http://schemas.microsoft.com/office/drawing/2014/main" id="{2405B4F6-CB06-6714-C53B-12E126DE3AF4}"/>
+              </a:ext>
+            </a:extLst>
+          </p:cNvPr>
+          <p:cNvSpPr/>
+          <p:nvPr/>
+        </p:nvSpPr>
+        <p:spPr>
+          <a:xfrm>
+            <a:off x="7579360" y="4220168"/>
+            <a:ext cx="2372360" cy="187272"/>
+          </a:xfrm>
+          <a:prstGeom prst="roundRect">
+            <a:avLst/>
+          </a:prstGeom>
+        </p:spPr>
+        <p:style>
+          <a:lnRef idx="1">
+            <a:schemeClr val="dk1"/>
+          </a:lnRef>
+          <a:fillRef idx="3">
+            <a:schemeClr val="dk1"/>
+          </a:fillRef>
+          <a:effectRef idx="2">
+            <a:schemeClr val="dk1"/>
+          </a:effectRef>
+          <a:fontRef idx="minor">
+            <a:schemeClr val="lt1"/>
+          </a:fontRef>
+        </p:style>
+        <p:txBody>
+          <a:bodyPr rtlCol="0" anchor="ctr"/>
+          <a:lstStyle/>
+          <a:p>
+            <a:pPr algn="ctr"/>
+            <a:r>
+              <a:rPr lang="en-US" sz="1050" i="1" dirty="0"/>
+              <a:t>Complete Cohesin regulatory pathway</a:t>
+            </a:r>
           </a:p>
         </p:txBody>
       </p:sp>
@@ -10899,7 +11001,7 @@
                             </p:stCondLst>
                             <p:childTnLst>
                               <p:par>
-                                <p:cTn id="23" presetID="10" presetClass="entr" fill="hold" nodeType="clickEffect">
+                                <p:cTn id="23" presetID="16" presetClass="entr" presetSubtype="37" fill="hold" grpId="0" nodeType="clickEffect">
                                   <p:stCondLst>
                                     <p:cond delay="0"/>
                                   </p:stCondLst>
@@ -10907,6 +11009,94 @@
                                     <p:set>
                                       <p:cBhvr>
                                         <p:cTn id="24" dur="1" fill="hold">
+                                          <p:stCondLst>
+                                            <p:cond delay="0"/>
+                                          </p:stCondLst>
+                                        </p:cTn>
+                                        <p:tgtEl>
+                                          <p:spTgt spid="2"/>
+                                        </p:tgtEl>
+                                        <p:attrNameLst>
+                                          <p:attrName>style.visibility</p:attrName>
+                                        </p:attrNameLst>
+                                      </p:cBhvr>
+                                      <p:to>
+                                        <p:strVal val="visible"/>
+                                      </p:to>
+                                    </p:set>
+                                    <p:animEffect transition="in" filter="barn(outVertical)">
+                                      <p:cBhvr>
+                                        <p:cTn id="25" dur="500"/>
+                                        <p:tgtEl>
+                                          <p:spTgt spid="2"/>
+                                        </p:tgtEl>
+                                      </p:cBhvr>
+                                    </p:animEffect>
+                                  </p:childTnLst>
+                                </p:cTn>
+                              </p:par>
+                              <p:par>
+                                <p:cTn id="26" presetID="16" presetClass="entr" presetSubtype="37" fill="hold" grpId="0" nodeType="withEffect">
+                                  <p:stCondLst>
+                                    <p:cond delay="0"/>
+                                  </p:stCondLst>
+                                  <p:childTnLst>
+                                    <p:set>
+                                      <p:cBhvr>
+                                        <p:cTn id="27" dur="1" fill="hold">
+                                          <p:stCondLst>
+                                            <p:cond delay="0"/>
+                                          </p:stCondLst>
+                                        </p:cTn>
+                                        <p:tgtEl>
+                                          <p:spTgt spid="3"/>
+                                        </p:tgtEl>
+                                        <p:attrNameLst>
+                                          <p:attrName>style.visibility</p:attrName>
+                                        </p:attrNameLst>
+                                      </p:cBhvr>
+                                      <p:to>
+                                        <p:strVal val="visible"/>
+                                      </p:to>
+                                    </p:set>
+                                    <p:animEffect transition="in" filter="barn(outVertical)">
+                                      <p:cBhvr>
+                                        <p:cTn id="28" dur="500"/>
+                                        <p:tgtEl>
+                                          <p:spTgt spid="3"/>
+                                        </p:tgtEl>
+                                      </p:cBhvr>
+                                    </p:animEffect>
+                                  </p:childTnLst>
+                                </p:cTn>
+                              </p:par>
+                            </p:childTnLst>
+                          </p:cTn>
+                        </p:par>
+                      </p:childTnLst>
+                    </p:cTn>
+                  </p:par>
+                  <p:par>
+                    <p:cTn id="29" fill="hold">
+                      <p:stCondLst>
+                        <p:cond delay="indefinite"/>
+                      </p:stCondLst>
+                      <p:childTnLst>
+                        <p:par>
+                          <p:cTn id="30" fill="hold">
+                            <p:stCondLst>
+                              <p:cond delay="0"/>
+                            </p:stCondLst>
+                            <p:childTnLst>
+                              <p:par>
+                                <p:cTn id="31" presetID="10" presetClass="entr" fill="hold" nodeType="clickEffect">
+                                  <p:stCondLst>
+                                    <p:cond delay="0"/>
+                                  </p:stCondLst>
+                                  <p:childTnLst>
+                                    <p:set>
+                                      <p:cBhvr>
+                                        <p:cTn id="32" dur="1" fill="hold">
                                           <p:stCondLst>
                                             <p:cond delay="0"/>
                                           </p:stCondLst>
@@ -10924,7 +11114,7 @@
                                     </p:set>
                                     <p:animEffect transition="in" filter="fade">
                                       <p:cBhvr additive="repl">
-                                        <p:cTn id="25" dur="500"/>
+                                        <p:cTn id="33" dur="500"/>
                                         <p:tgtEl>
                                           <p:spTgt spid="15"/>
                                         </p:tgtEl>
@@ -10940,26 +11130,26 @@
                     </p:cTn>
                   </p:par>
                   <p:par>
-                    <p:cTn id="26" fill="hold">
+                    <p:cTn id="34" fill="hold">
                       <p:stCondLst>
                         <p:cond delay="indefinite"/>
                       </p:stCondLst>
                       <p:childTnLst>
                         <p:par>
-                          <p:cTn id="27" fill="hold">
+                          <p:cTn id="35" fill="hold">
                             <p:stCondLst>
                               <p:cond delay="0"/>
                             </p:stCondLst>
                             <p:childTnLst>
                               <p:par>
-                                <p:cTn id="28" presetID="10" presetClass="entr" fill="hold" nodeType="clickEffect">
+                                <p:cTn id="36" presetID="10" presetClass="entr" fill="hold" nodeType="clickEffect">
                                   <p:stCondLst>
                                     <p:cond delay="0"/>
                                   </p:stCondLst>
                                   <p:childTnLst>
                                     <p:set>
                                       <p:cBhvr>
-                                        <p:cTn id="29" dur="1" fill="hold">
+                                        <p:cTn id="37" dur="1" fill="hold">
                                           <p:stCondLst>
                                             <p:cond delay="0"/>
                                           </p:stCondLst>
@@ -10977,7 +11167,7 @@
                                     </p:set>
                                     <p:animEffect transition="in" filter="fade">
                                       <p:cBhvr additive="repl">
-                                        <p:cTn id="30" dur="500"/>
+                                        <p:cTn id="38" dur="500"/>
                                         <p:tgtEl>
                                           <p:spTgt spid="16"/>
                                         </p:tgtEl>
@@ -10993,26 +11183,26 @@
                     </p:cTn>
                   </p:par>
                   <p:par>
-                    <p:cTn id="31" fill="hold">
+                    <p:cTn id="39" fill="hold">
                       <p:stCondLst>
                         <p:cond delay="indefinite"/>
                       </p:stCondLst>
                       <p:childTnLst>
                         <p:par>
-                          <p:cTn id="32" fill="hold">
+                          <p:cTn id="40" fill="hold">
                             <p:stCondLst>
                               <p:cond delay="0"/>
                             </p:stCondLst>
                             <p:childTnLst>
                               <p:par>
-                                <p:cTn id="33" presetID="2" presetClass="entr" presetSubtype="4" fill="hold" grpId="0" nodeType="clickEffect">
+                                <p:cTn id="41" presetID="2" presetClass="entr" presetSubtype="4" fill="hold" grpId="0" nodeType="clickEffect">
                                   <p:stCondLst>
                                     <p:cond delay="0"/>
                                   </p:stCondLst>
                                   <p:childTnLst>
                                     <p:set>
                                       <p:cBhvr>
-                                        <p:cTn id="34" dur="1" fill="hold">
+                                        <p:cTn id="42" dur="1" fill="hold">
                                           <p:stCondLst>
                                             <p:cond delay="0"/>
                                           </p:stCondLst>
@@ -11030,7 +11220,7 @@
                                     </p:set>
                                     <p:anim calcmode="lin" valueType="num">
                                       <p:cBhvr additive="base">
-                                        <p:cTn id="35" dur="500" fill="hold"/>
+                                        <p:cTn id="43" dur="500" fill="hold"/>
                                         <p:tgtEl>
                                           <p:spTgt spid="17"/>
                                         </p:tgtEl>
@@ -11053,7 +11243,7 @@
                                     </p:anim>
                                     <p:anim calcmode="lin" valueType="num">
                                       <p:cBhvr additive="base">
-                                        <p:cTn id="36" dur="500" fill="hold"/>
+                                        <p:cTn id="44" dur="500" fill="hold"/>
                                         <p:tgtEl>
                                           <p:spTgt spid="17"/>
                                         </p:tgtEl>
@@ -11108,6 +11298,8 @@
       <p:bldP spid="12" grpId="0"/>
       <p:bldP spid="13" grpId="0" animBg="1"/>
       <p:bldP spid="17" grpId="0"/>
+      <p:bldP spid="2" grpId="0" animBg="1"/>
+      <p:bldP spid="3" grpId="0" animBg="1"/>
     </p:bldLst>
   </p:timing>
 </p:sld>
@@ -13228,8 +13420,8 @@
           </a:p>
         </p:txBody>
       </p:sp>
-      <mc:AlternateContent xmlns:mc="http://schemas.openxmlformats.org/markup-compatibility/2006">
-        <mc:Choice xmlns:a14="http://schemas.microsoft.com/office/drawing/2010/main" Requires="a14">
+      <mc:AlternateContent xmlns:mc="http://schemas.openxmlformats.org/markup-compatibility/2006" xmlns:a14="http://schemas.microsoft.com/office/drawing/2010/main">
+        <mc:Choice Requires="a14">
           <p:sp>
             <p:nvSpPr>
               <p:cNvPr id="25" name="a_formula"/>
@@ -13732,7 +13924,7 @@
             </p:txBody>
           </p:sp>
         </mc:Choice>
-        <mc:Fallback>
+        <mc:Fallback xmlns="">
           <p:sp>
             <p:nvSpPr>
               <p:cNvPr id="25" name="a_formula"/>
@@ -14679,7 +14871,7 @@
               </a:tabLst>
             </a:pPr>
             <a:r>
-              <a:rPr lang="en-US" sz="1250" b="1" u="none" strike="noStrike">
+              <a:rPr lang="en-US" sz="1250" b="1" u="none" strike="noStrike" dirty="0">
                 <a:solidFill>
                   <a:srgbClr val="2166AC"/>
                 </a:solidFill>
@@ -14691,7 +14883,7 @@
               <a:t>Separase (ESPL1)  </a:t>
             </a:r>
             <a:r>
-              <a:rPr lang="en-US" sz="1250" b="0" u="none" strike="noStrike">
+              <a:rPr lang="en-US" sz="1250" b="0" u="none" strike="noStrike" dirty="0">
                 <a:solidFill>
                   <a:srgbClr val="2C3E50"/>
                 </a:solidFill>
@@ -14702,7 +14894,7 @@
               </a:rPr>
               <a:t>— the protease ('scissors') that cuts RAD21 to open the ring at anaphase.</a:t>
             </a:r>
-            <a:endParaRPr lang="en-US" sz="1250" b="0" u="none" strike="noStrike">
+            <a:endParaRPr lang="en-US" sz="1250" b="0" u="none" strike="noStrike" dirty="0">
               <a:solidFill>
                 <a:srgbClr val="000000"/>
               </a:solidFill>

--- a/Sororin_mechanism_flowchart.pptx
+++ b/Sororin_mechanism_flowchart.pptx
@@ -1326,7 +1326,7 @@
             <a:pPr indent="0" algn="l">
               <a:buNone/>
             </a:pPr>
-            <a:endParaRPr lang="en-US" sz="1800" b="0" u="none" strike="noStrike">
+            <a:endParaRPr lang="en-US" sz="1800" b="0" u="none" strike="noStrike" dirty="0">
               <a:solidFill>
                 <a:srgbClr val="000000"/>
               </a:solidFill>
@@ -8107,7 +8107,17 @@
               <a:t>Result 1: Sororin sits in a dense </a:t>
             </a:r>
             <a:r>
-              <a:rPr lang="en-US" sz="2400" b="1" u="none" strike="noStrike" dirty="0" err="1">
+              <a:rPr lang="en-US" sz="2400" b="1" dirty="0">
+                <a:solidFill>
+                  <a:srgbClr val="2C3E50"/>
+                </a:solidFill>
+                <a:latin typeface="Cambria"/>
+                <a:ea typeface="Cambria"/>
+              </a:rPr>
+              <a:t>C</a:t>
+            </a:r>
+            <a:r>
+              <a:rPr lang="en-US" sz="2400" b="1" u="none" strike="noStrike" dirty="0">
                 <a:solidFill>
                   <a:srgbClr val="2C3E50"/>
                 </a:solidFill>
@@ -8116,19 +8126,7 @@
                 <a:latin typeface="Cambria"/>
                 <a:ea typeface="Cambria"/>
               </a:rPr>
-              <a:t>cohesin</a:t>
-            </a:r>
-            <a:r>
-              <a:rPr lang="en-US" sz="2400" b="1" u="none" strike="noStrike" dirty="0">
-                <a:solidFill>
-                  <a:srgbClr val="2C3E50"/>
-                </a:solidFill>
-                <a:effectLst/>
-                <a:uFillTx/>
-                <a:latin typeface="Cambria"/>
-                <a:ea typeface="Cambria"/>
-              </a:rPr>
-              <a:t> network</a:t>
+              <a:t>ohesin network</a:t>
             </a:r>
             <a:endParaRPr lang="en-US" sz="2400" b="0" u="none" strike="noStrike" dirty="0">
               <a:solidFill>
@@ -14551,7 +14549,7 @@
               </a:tabLst>
             </a:pPr>
             <a:r>
-              <a:rPr lang="en-US" sz="1250" b="1" u="none" strike="noStrike">
+              <a:rPr lang="en-US" sz="1250" b="1" u="none" strike="noStrike" dirty="0">
                 <a:solidFill>
                   <a:srgbClr val="2166AC"/>
                 </a:solidFill>
@@ -14563,7 +14561,7 @@
               <a:t>Node / edge  </a:t>
             </a:r>
             <a:r>
-              <a:rPr lang="en-US" sz="1250" b="0" u="none" strike="noStrike">
+              <a:rPr lang="en-US" sz="1250" b="0" u="none" strike="noStrike" dirty="0">
                 <a:solidFill>
                   <a:srgbClr val="2C3E50"/>
                 </a:solidFill>
@@ -14574,7 +14572,7 @@
               </a:rPr>
               <a:t>— a protein / a STRING interaction between two proteins.</a:t>
             </a:r>
-            <a:endParaRPr lang="en-US" sz="1250" b="0" u="none" strike="noStrike">
+            <a:endParaRPr lang="en-US" sz="1250" b="0" u="none" strike="noStrike" dirty="0">
               <a:solidFill>
                 <a:srgbClr val="000000"/>
               </a:solidFill>
@@ -14631,7 +14629,7 @@
               </a:tabLst>
             </a:pPr>
             <a:r>
-              <a:rPr lang="en-US" sz="1250" b="1" u="none" strike="noStrike">
+              <a:rPr lang="en-US" sz="1250" b="1" u="none" strike="noStrike" dirty="0">
                 <a:solidFill>
                   <a:srgbClr val="2166AC"/>
                 </a:solidFill>
@@ -14643,7 +14641,7 @@
               <a:t>Degree  </a:t>
             </a:r>
             <a:r>
-              <a:rPr lang="en-US" sz="1250" b="0" u="none" strike="noStrike">
+              <a:rPr lang="en-US" sz="1250" b="0" u="none" strike="noStrike" dirty="0">
                 <a:solidFill>
                   <a:srgbClr val="2C3E50"/>
                 </a:solidFill>
@@ -14654,7 +14652,7 @@
               </a:rPr>
               <a:t>— how many interactions a protein has (Sororin: 15/15 = hub).</a:t>
             </a:r>
-            <a:endParaRPr lang="en-US" sz="1250" b="0" u="none" strike="noStrike">
+            <a:endParaRPr lang="en-US" sz="1250" b="0" u="none" strike="noStrike" dirty="0">
               <a:solidFill>
                 <a:srgbClr val="000000"/>
               </a:solidFill>
@@ -14711,7 +14709,7 @@
               </a:tabLst>
             </a:pPr>
             <a:r>
-              <a:rPr lang="en-US" sz="1250" b="1" u="none" strike="noStrike">
+              <a:rPr lang="en-US" sz="1250" b="1" u="none" strike="noStrike" dirty="0">
                 <a:solidFill>
                   <a:srgbClr val="2166AC"/>
                 </a:solidFill>
@@ -14723,7 +14721,7 @@
               <a:t>Density  </a:t>
             </a:r>
             <a:r>
-              <a:rPr lang="en-US" sz="1250" b="0" u="none" strike="noStrike">
+              <a:rPr lang="en-US" sz="1250" b="0" u="none" strike="noStrike" dirty="0">
                 <a:solidFill>
                   <a:srgbClr val="2C3E50"/>
                 </a:solidFill>
@@ -14734,7 +14732,7 @@
               </a:rPr>
               <a:t>— fraction of all possible links present (0.89 = very tightly connected).</a:t>
             </a:r>
-            <a:endParaRPr lang="en-US" sz="1250" b="0" u="none" strike="noStrike">
+            <a:endParaRPr lang="en-US" sz="1250" b="0" u="none" strike="noStrike" dirty="0">
               <a:solidFill>
                 <a:srgbClr val="000000"/>
               </a:solidFill>
@@ -14791,7 +14789,7 @@
               </a:tabLst>
             </a:pPr>
             <a:r>
-              <a:rPr lang="en-US" sz="1250" b="1" u="none" strike="noStrike">
+              <a:rPr lang="en-US" sz="1250" b="1" u="none" strike="noStrike" dirty="0">
                 <a:solidFill>
                   <a:srgbClr val="2166AC"/>
                 </a:solidFill>
@@ -14803,7 +14801,7 @@
               <a:t>Clustering coefficient  </a:t>
             </a:r>
             <a:r>
-              <a:rPr lang="en-US" sz="1250" b="0" u="none" strike="noStrike">
+              <a:rPr lang="en-US" sz="1250" b="0" u="none" strike="noStrike" dirty="0">
                 <a:solidFill>
                   <a:srgbClr val="2C3E50"/>
                 </a:solidFill>
@@ -14812,9 +14810,33 @@
                 <a:latin typeface="Calibri"/>
                 <a:ea typeface="Calibri"/>
               </a:rPr>
-              <a:t>— how interconnected a node's neighbours are (0.925).</a:t>
+              <a:t>— how interconnected a node's </a:t>
             </a:r>
-            <a:endParaRPr lang="en-US" sz="1250" b="0" u="none" strike="noStrike">
+            <a:r>
+              <a:rPr lang="en-US" sz="1250" b="0" u="none" strike="noStrike" dirty="0" err="1">
+                <a:solidFill>
+                  <a:srgbClr val="2C3E50"/>
+                </a:solidFill>
+                <a:effectLst/>
+                <a:uFillTx/>
+                <a:latin typeface="Calibri"/>
+                <a:ea typeface="Calibri"/>
+              </a:rPr>
+              <a:t>neighbours</a:t>
+            </a:r>
+            <a:r>
+              <a:rPr lang="en-US" sz="1250" b="0" u="none" strike="noStrike" dirty="0">
+                <a:solidFill>
+                  <a:srgbClr val="2C3E50"/>
+                </a:solidFill>
+                <a:effectLst/>
+                <a:uFillTx/>
+                <a:latin typeface="Calibri"/>
+                <a:ea typeface="Calibri"/>
+              </a:rPr>
+              <a:t> are (0.925).</a:t>
+            </a:r>
+            <a:endParaRPr lang="en-US" sz="1250" b="0" u="none" strike="noStrike" dirty="0">
               <a:solidFill>
                 <a:srgbClr val="000000"/>
               </a:solidFill>
@@ -14951,7 +14973,7 @@
               </a:tabLst>
             </a:pPr>
             <a:r>
-              <a:rPr lang="en-US" sz="1250" b="1" u="none" strike="noStrike">
+              <a:rPr lang="en-US" sz="1250" b="1" u="none" strike="noStrike" dirty="0">
                 <a:solidFill>
                   <a:srgbClr val="2166AC"/>
                 </a:solidFill>
@@ -14963,7 +14985,7 @@
               <a:t>Substrate  </a:t>
             </a:r>
             <a:r>
-              <a:rPr lang="en-US" sz="1250" b="0" u="none" strike="noStrike">
+              <a:rPr lang="en-US" sz="1250" b="0" u="none" strike="noStrike" dirty="0">
                 <a:solidFill>
                   <a:srgbClr val="2C3E50"/>
                 </a:solidFill>
@@ -14974,7 +14996,7 @@
               </a:rPr>
               <a:t>— the molecule an enzyme acts on (Sororin is an APC/C substrate = its target).</a:t>
             </a:r>
-            <a:endParaRPr lang="en-US" sz="1250" b="0" u="none" strike="noStrike">
+            <a:endParaRPr lang="en-US" sz="1250" b="0" u="none" strike="noStrike" dirty="0">
               <a:solidFill>
                 <a:srgbClr val="000000"/>
               </a:solidFill>
@@ -15568,7 +15590,7 @@
               </a:tabLst>
             </a:pPr>
             <a:r>
-              <a:rPr lang="en-US" sz="1150" b="0" i="1" u="none" strike="noStrike">
+              <a:rPr lang="en-US" sz="1150" b="0" i="1" u="none" strike="noStrike" dirty="0" err="1">
                 <a:solidFill>
                   <a:srgbClr val="5A6B7B"/>
                 </a:solidFill>
@@ -15577,9 +15599,21 @@
                 <a:latin typeface="Calibri"/>
                 <a:ea typeface="Calibri"/>
               </a:rPr>
-              <a:t>IUPred disorder profile: 61.5% disordered (red curve above 0.5). Only the C-terminal domain (aa 230–252) folds; the KEN box, FGF motif and Ser209 all sit in disordered regions.</a:t>
+              <a:t>IUPred</a:t>
             </a:r>
-            <a:endParaRPr lang="en-US" sz="1150" b="0" u="none" strike="noStrike">
+            <a:r>
+              <a:rPr lang="en-US" sz="1150" b="0" i="1" u="none" strike="noStrike" dirty="0">
+                <a:solidFill>
+                  <a:srgbClr val="5A6B7B"/>
+                </a:solidFill>
+                <a:effectLst/>
+                <a:uFillTx/>
+                <a:latin typeface="Calibri"/>
+                <a:ea typeface="Calibri"/>
+              </a:rPr>
+              <a:t> disorder profile: 61.5% disordered (red curve above 0.5). Only the C-terminal domain (aa 230–252) folds; the KEN box, FGF motif and Ser209 all sit in disordered regions.</a:t>
+            </a:r>
+            <a:endParaRPr lang="en-US" sz="1150" b="0" u="none" strike="noStrike" dirty="0">
               <a:solidFill>
                 <a:srgbClr val="000000"/>
               </a:solidFill>

--- a/Sororin_mechanism_flowchart.pptx
+++ b/Sororin_mechanism_flowchart.pptx
@@ -5,7 +5,7 @@
     <p:sldMasterId id="2147483648" r:id="rId1"/>
   </p:sldMasterIdLst>
   <p:notesMasterIdLst>
-    <p:notesMasterId r:id="rId10"/>
+    <p:notesMasterId r:id="rId12"/>
   </p:notesMasterIdLst>
   <p:sldIdLst>
     <p:sldId id="256" r:id="rId2"/>
@@ -15,7 +15,9 @@
     <p:sldId id="261" r:id="rId6"/>
     <p:sldId id="262" r:id="rId7"/>
     <p:sldId id="263" r:id="rId8"/>
-    <p:sldId id="260" r:id="rId9"/>
+    <p:sldId id="264" r:id="rId9"/>
+    <p:sldId id="260" r:id="rId10"/>
+    <p:sldId id="265" r:id="rId11"/>
   </p:sldIdLst>
   <p:sldSz cx="12188825" cy="6858000"/>
   <p:notesSz cx="6858000" cy="12188825"/>
@@ -1277,7 +1279,7 @@
         <p:spPr>
           <a:xfrm>
             <a:off x="685800" y="1143000"/>
-            <a:ext cx="5486040" cy="3085920"/>
+            <a:ext cx="5486400" cy="3086100"/>
           </a:xfrm>
           <a:prstGeom prst="rect">
             <a:avLst/>
@@ -1398,7 +1400,7 @@
                 <a:latin typeface="+mn-lt"/>
                 <a:ea typeface="+mn-ea"/>
               </a:rPr>
-              <a:t>8</a:t>
+              <a:t>9</a:t>
             </a:fld>
             <a:endParaRPr lang="en-US" sz="1200" b="0" u="none" strike="noStrike">
               <a:solidFill>
@@ -2474,6 +2476,3239 @@
   <p:clrMapOvr>
     <a:masterClrMapping/>
   </p:clrMapOvr>
+</p:sld>
+</file>
+
+<file path=ppt/slides/slide10.xml><?xml version="1.0" encoding="utf-8"?>
+<p:sld xmlns:a="http://schemas.openxmlformats.org/drawingml/2006/main" xmlns:r="http://schemas.openxmlformats.org/officeDocument/2006/relationships" xmlns:p="http://schemas.openxmlformats.org/presentationml/2006/main">
+  <p:cSld>
+    <p:bg>
+      <p:bgPr>
+        <a:solidFill>
+          <a:srgbClr val="FFFFFF"/>
+        </a:solidFill>
+        <a:effectLst/>
+      </p:bgPr>
+    </p:bg>
+    <p:spTree>
+      <p:nvGrpSpPr>
+        <p:cNvPr id="1" name=""/>
+        <p:cNvGrpSpPr/>
+        <p:nvPr/>
+      </p:nvGrpSpPr>
+      <p:grpSpPr>
+        <a:xfrm>
+          <a:off x="0" y="0"/>
+          <a:ext cx="0" cy="0"/>
+          <a:chOff x="0" y="0"/>
+          <a:chExt cx="0" cy="0"/>
+        </a:xfrm>
+      </p:grpSpPr>
+      <p:sp>
+        <p:nvSpPr>
+          <p:cNvPr id="8" name="Text 0"/>
+          <p:cNvSpPr/>
+          <p:nvPr/>
+        </p:nvSpPr>
+        <p:spPr>
+          <a:xfrm>
+            <a:off x="320040" y="109800"/>
+            <a:ext cx="11521080" cy="411120"/>
+          </a:xfrm>
+          <a:prstGeom prst="rect">
+            <a:avLst/>
+          </a:prstGeom>
+          <a:noFill/>
+          <a:ln w="0">
+            <a:noFill/>
+          </a:ln>
+        </p:spPr>
+        <p:style>
+          <a:lnRef idx="0">
+            <a:scrgbClr r="0" g="0" b="0"/>
+          </a:lnRef>
+          <a:fillRef idx="0">
+            <a:scrgbClr r="0" g="0" b="0"/>
+          </a:fillRef>
+          <a:effectRef idx="0">
+            <a:scrgbClr r="0" g="0" b="0"/>
+          </a:effectRef>
+          <a:fontRef idx="minor"/>
+        </p:style>
+        <p:txBody>
+          <a:bodyPr lIns="90000" tIns="45000" rIns="90000" bIns="45000" anchor="ctr">
+            <a:noAutofit/>
+          </a:bodyPr>
+          <a:lstStyle/>
+          <a:p>
+            <a:pPr algn="ctr" defTabSz="914400">
+              <a:lnSpc>
+                <a:spcPct val="100000"/>
+              </a:lnSpc>
+              <a:tabLst>
+                <a:tab pos="0" algn="l"/>
+              </a:tabLst>
+            </a:pPr>
+            <a:r>
+              <a:rPr lang="en-US" sz="2200" b="1" u="none" strike="noStrike" dirty="0">
+                <a:solidFill>
+                  <a:srgbClr val="2C3E50"/>
+                </a:solidFill>
+                <a:effectLst/>
+                <a:uFillTx/>
+                <a:latin typeface="Cambria"/>
+                <a:ea typeface="Cambria"/>
+              </a:rPr>
+              <a:t>The determinants sit in disorder — the numbers behind the map (Table 3)</a:t>
+            </a:r>
+            <a:endParaRPr lang="en-US" sz="2200" b="0" u="none" strike="noStrike" dirty="0">
+              <a:solidFill>
+                <a:srgbClr val="000000"/>
+              </a:solidFill>
+              <a:effectLst/>
+              <a:uFillTx/>
+              <a:latin typeface="Arial"/>
+            </a:endParaRPr>
+          </a:p>
+        </p:txBody>
+      </p:sp>
+      <p:sp>
+        <p:nvSpPr>
+          <p:cNvPr id="9" name="Text 1"/>
+          <p:cNvSpPr/>
+          <p:nvPr/>
+        </p:nvSpPr>
+        <p:spPr>
+          <a:xfrm>
+            <a:off x="516752" y="4998899"/>
+            <a:ext cx="11155320" cy="1142640"/>
+          </a:xfrm>
+          <a:prstGeom prst="roundRect">
+            <a:avLst>
+              <a:gd name="adj" fmla="val 4800"/>
+            </a:avLst>
+          </a:prstGeom>
+          <a:solidFill>
+            <a:srgbClr val="FCEBD0"/>
+          </a:solidFill>
+          <a:ln w="19050">
+            <a:solidFill>
+              <a:srgbClr val="B9770E"/>
+            </a:solidFill>
+            <a:round/>
+          </a:ln>
+        </p:spPr>
+        <p:style>
+          <a:lnRef idx="0">
+            <a:scrgbClr r="0" g="0" b="0"/>
+          </a:lnRef>
+          <a:fillRef idx="0">
+            <a:scrgbClr r="0" g="0" b="0"/>
+          </a:fillRef>
+          <a:effectRef idx="0">
+            <a:scrgbClr r="0" g="0" b="0"/>
+          </a:effectRef>
+          <a:fontRef idx="minor"/>
+        </p:style>
+        <p:txBody>
+          <a:bodyPr lIns="152280" tIns="152280" rIns="152280" bIns="152280" anchor="ctr">
+            <a:noAutofit/>
+          </a:bodyPr>
+          <a:lstStyle/>
+          <a:p>
+            <a:pPr algn="ctr" defTabSz="914400">
+              <a:lnSpc>
+                <a:spcPct val="100000"/>
+              </a:lnSpc>
+              <a:tabLst>
+                <a:tab pos="0" algn="l"/>
+              </a:tabLst>
+            </a:pPr>
+            <a:r>
+              <a:rPr lang="en-US" sz="1900" b="1" u="none" strike="noStrike" dirty="0">
+                <a:solidFill>
+                  <a:srgbClr val="2C3E50"/>
+                </a:solidFill>
+                <a:effectLst/>
+                <a:uFillTx/>
+                <a:latin typeface="Cambria"/>
+                <a:ea typeface="Cambria"/>
+              </a:rPr>
+              <a:t>Superimposing the experimentally-defined interaction determinants onto the disorder profile revealed that they lie — almost without exception — in </a:t>
+            </a:r>
+            <a:r>
+              <a:rPr lang="en-US" sz="1900" b="1" u="none" strike="noStrike" dirty="0">
+                <a:solidFill>
+                  <a:srgbClr val="B9770E"/>
+                </a:solidFill>
+                <a:effectLst/>
+                <a:uFillTx/>
+                <a:latin typeface="Cambria"/>
+                <a:ea typeface="Cambria"/>
+              </a:rPr>
+              <a:t>disordered segments.</a:t>
+            </a:r>
+            <a:endParaRPr lang="en-US" sz="1900" b="0" u="none" strike="noStrike" dirty="0">
+              <a:solidFill>
+                <a:srgbClr val="000000"/>
+              </a:solidFill>
+              <a:effectLst/>
+              <a:uFillTx/>
+              <a:latin typeface="Arial"/>
+            </a:endParaRPr>
+          </a:p>
+        </p:txBody>
+      </p:sp>
+      <p:graphicFrame>
+        <p:nvGraphicFramePr>
+          <p:cNvPr id="10" name="Table 0"/>
+          <p:cNvGraphicFramePr/>
+          <p:nvPr>
+            <p:extLst>
+              <p:ext uri="{D42A27DB-BD31-4B8C-83A1-F6EECF244321}">
+                <p14:modId xmlns:p14="http://schemas.microsoft.com/office/powerpoint/2010/main" val="984274293"/>
+              </p:ext>
+            </p:extLst>
+          </p:nvPr>
+        </p:nvGraphicFramePr>
+        <p:xfrm>
+          <a:off x="502200" y="991632"/>
+          <a:ext cx="11155680" cy="2174760"/>
+        </p:xfrm>
+        <a:graphic>
+          <a:graphicData uri="http://schemas.openxmlformats.org/drawingml/2006/table">
+            <a:tbl>
+              <a:tblPr/>
+              <a:tblGrid>
+                <a:gridCol w="2011680">
+                  <a:extLst>
+                    <a:ext uri="{9D8B030D-6E8A-4147-A177-3AD203B41FA5}">
+                      <a16:colId xmlns:a16="http://schemas.microsoft.com/office/drawing/2014/main" val="20000"/>
+                    </a:ext>
+                  </a:extLst>
+                </a:gridCol>
+                <a:gridCol w="1188720">
+                  <a:extLst>
+                    <a:ext uri="{9D8B030D-6E8A-4147-A177-3AD203B41FA5}">
+                      <a16:colId xmlns:a16="http://schemas.microsoft.com/office/drawing/2014/main" val="20001"/>
+                    </a:ext>
+                  </a:extLst>
+                </a:gridCol>
+                <a:gridCol w="2834640">
+                  <a:extLst>
+                    <a:ext uri="{9D8B030D-6E8A-4147-A177-3AD203B41FA5}">
+                      <a16:colId xmlns:a16="http://schemas.microsoft.com/office/drawing/2014/main" val="20002"/>
+                    </a:ext>
+                  </a:extLst>
+                </a:gridCol>
+                <a:gridCol w="2286000">
+                  <a:extLst>
+                    <a:ext uri="{9D8B030D-6E8A-4147-A177-3AD203B41FA5}">
+                      <a16:colId xmlns:a16="http://schemas.microsoft.com/office/drawing/2014/main" val="20003"/>
+                    </a:ext>
+                  </a:extLst>
+                </a:gridCol>
+                <a:gridCol w="2834640">
+                  <a:extLst>
+                    <a:ext uri="{9D8B030D-6E8A-4147-A177-3AD203B41FA5}">
+                      <a16:colId xmlns:a16="http://schemas.microsoft.com/office/drawing/2014/main" val="20004"/>
+                    </a:ext>
+                  </a:extLst>
+                </a:gridCol>
+              </a:tblGrid>
+              <a:tr h="310680">
+                <a:tc>
+                  <a:txBody>
+                    <a:bodyPr/>
+                    <a:lstStyle/>
+                    <a:p>
+                      <a:pPr defTabSz="914400">
+                        <a:lnSpc>
+                          <a:spcPct val="100000"/>
+                        </a:lnSpc>
+                        <a:tabLst>
+                          <a:tab pos="0" algn="l"/>
+                        </a:tabLst>
+                      </a:pPr>
+                      <a:r>
+                        <a:rPr lang="en-US" sz="1200" b="1" u="none" strike="noStrike">
+                          <a:solidFill>
+                            <a:srgbClr val="FFFFFF"/>
+                          </a:solidFill>
+                          <a:effectLst/>
+                          <a:uFillTx/>
+                          <a:latin typeface="Calibri"/>
+                          <a:ea typeface="Calibri"/>
+                        </a:rPr>
+                        <a:t>Determinant</a:t>
+                      </a:r>
+                      <a:endParaRPr lang="en-US" sz="1200" b="0" u="none" strike="noStrike">
+                        <a:solidFill>
+                          <a:srgbClr val="FFFFFF"/>
+                        </a:solidFill>
+                        <a:effectLst/>
+                        <a:uFillTx/>
+                        <a:latin typeface="Arial"/>
+                      </a:endParaRPr>
+                    </a:p>
+                  </a:txBody>
+                  <a:tcPr anchor="ctr">
+                    <a:lnL w="6480">
+                      <a:solidFill>
+                        <a:srgbClr val="CFCFCF"/>
+                      </a:solidFill>
+                      <a:prstDash val="solid"/>
+                    </a:lnL>
+                    <a:lnR w="6480">
+                      <a:solidFill>
+                        <a:srgbClr val="CFCFCF"/>
+                      </a:solidFill>
+                      <a:prstDash val="solid"/>
+                    </a:lnR>
+                    <a:lnT w="6480">
+                      <a:solidFill>
+                        <a:srgbClr val="CFCFCF"/>
+                      </a:solidFill>
+                      <a:prstDash val="solid"/>
+                    </a:lnT>
+                    <a:lnB w="6480">
+                      <a:solidFill>
+                        <a:srgbClr val="CFCFCF"/>
+                      </a:solidFill>
+                      <a:prstDash val="solid"/>
+                    </a:lnB>
+                    <a:solidFill>
+                      <a:srgbClr val="2C3E50"/>
+                    </a:solidFill>
+                  </a:tcPr>
+                </a:tc>
+                <a:tc>
+                  <a:txBody>
+                    <a:bodyPr/>
+                    <a:lstStyle/>
+                    <a:p>
+                      <a:pPr defTabSz="914400">
+                        <a:lnSpc>
+                          <a:spcPct val="100000"/>
+                        </a:lnSpc>
+                        <a:tabLst>
+                          <a:tab pos="0" algn="l"/>
+                        </a:tabLst>
+                      </a:pPr>
+                      <a:r>
+                        <a:rPr lang="en-US" sz="1200" b="1" u="none" strike="noStrike">
+                          <a:solidFill>
+                            <a:srgbClr val="FFFFFF"/>
+                          </a:solidFill>
+                          <a:effectLst/>
+                          <a:uFillTx/>
+                          <a:latin typeface="Calibri"/>
+                          <a:ea typeface="Calibri"/>
+                        </a:rPr>
+                        <a:t>Residues</a:t>
+                      </a:r>
+                      <a:endParaRPr lang="en-US" sz="1200" b="0" u="none" strike="noStrike">
+                        <a:solidFill>
+                          <a:srgbClr val="FFFFFF"/>
+                        </a:solidFill>
+                        <a:effectLst/>
+                        <a:uFillTx/>
+                        <a:latin typeface="Arial"/>
+                      </a:endParaRPr>
+                    </a:p>
+                  </a:txBody>
+                  <a:tcPr anchor="ctr">
+                    <a:lnL w="6480">
+                      <a:solidFill>
+                        <a:srgbClr val="CFCFCF"/>
+                      </a:solidFill>
+                      <a:prstDash val="solid"/>
+                    </a:lnL>
+                    <a:lnR w="6480">
+                      <a:solidFill>
+                        <a:srgbClr val="CFCFCF"/>
+                      </a:solidFill>
+                      <a:prstDash val="solid"/>
+                    </a:lnR>
+                    <a:lnT w="6480">
+                      <a:solidFill>
+                        <a:srgbClr val="CFCFCF"/>
+                      </a:solidFill>
+                      <a:prstDash val="solid"/>
+                    </a:lnT>
+                    <a:lnB w="6480">
+                      <a:solidFill>
+                        <a:srgbClr val="CFCFCF"/>
+                      </a:solidFill>
+                      <a:prstDash val="solid"/>
+                    </a:lnB>
+                    <a:solidFill>
+                      <a:srgbClr val="2C3E50"/>
+                    </a:solidFill>
+                  </a:tcPr>
+                </a:tc>
+                <a:tc>
+                  <a:txBody>
+                    <a:bodyPr/>
+                    <a:lstStyle/>
+                    <a:p>
+                      <a:pPr defTabSz="914400">
+                        <a:lnSpc>
+                          <a:spcPct val="100000"/>
+                        </a:lnSpc>
+                        <a:tabLst>
+                          <a:tab pos="0" algn="l"/>
+                        </a:tabLst>
+                      </a:pPr>
+                      <a:r>
+                        <a:rPr lang="en-US" sz="1200" b="1" u="none" strike="noStrike" dirty="0">
+                          <a:solidFill>
+                            <a:srgbClr val="FFFFFF"/>
+                          </a:solidFill>
+                          <a:effectLst/>
+                          <a:uFillTx/>
+                          <a:latin typeface="Calibri"/>
+                          <a:ea typeface="Calibri"/>
+                        </a:rPr>
+                        <a:t>Partner / role</a:t>
+                      </a:r>
+                      <a:endParaRPr lang="en-US" sz="1200" b="0" u="none" strike="noStrike" dirty="0">
+                        <a:solidFill>
+                          <a:srgbClr val="FFFFFF"/>
+                        </a:solidFill>
+                        <a:effectLst/>
+                        <a:uFillTx/>
+                        <a:latin typeface="Arial"/>
+                      </a:endParaRPr>
+                    </a:p>
+                  </a:txBody>
+                  <a:tcPr anchor="ctr">
+                    <a:lnL w="6480">
+                      <a:solidFill>
+                        <a:srgbClr val="CFCFCF"/>
+                      </a:solidFill>
+                      <a:prstDash val="solid"/>
+                    </a:lnL>
+                    <a:lnR w="6480">
+                      <a:solidFill>
+                        <a:srgbClr val="CFCFCF"/>
+                      </a:solidFill>
+                      <a:prstDash val="solid"/>
+                    </a:lnR>
+                    <a:lnT w="6480">
+                      <a:solidFill>
+                        <a:srgbClr val="CFCFCF"/>
+                      </a:solidFill>
+                      <a:prstDash val="solid"/>
+                    </a:lnT>
+                    <a:lnB w="6480">
+                      <a:solidFill>
+                        <a:srgbClr val="CFCFCF"/>
+                      </a:solidFill>
+                      <a:prstDash val="solid"/>
+                    </a:lnB>
+                    <a:solidFill>
+                      <a:srgbClr val="2C3E50"/>
+                    </a:solidFill>
+                  </a:tcPr>
+                </a:tc>
+                <a:tc>
+                  <a:txBody>
+                    <a:bodyPr/>
+                    <a:lstStyle/>
+                    <a:p>
+                      <a:pPr defTabSz="914400">
+                        <a:lnSpc>
+                          <a:spcPct val="100000"/>
+                        </a:lnSpc>
+                        <a:tabLst>
+                          <a:tab pos="0" algn="l"/>
+                        </a:tabLst>
+                      </a:pPr>
+                      <a:r>
+                        <a:rPr lang="en-US" sz="1200" b="1" u="none" strike="noStrike">
+                          <a:solidFill>
+                            <a:srgbClr val="FFFFFF"/>
+                          </a:solidFill>
+                          <a:effectLst/>
+                          <a:uFillTx/>
+                          <a:latin typeface="Calibri"/>
+                          <a:ea typeface="Calibri"/>
+                        </a:rPr>
+                        <a:t>Mean IUPred2 (% dis.)</a:t>
+                      </a:r>
+                      <a:endParaRPr lang="en-US" sz="1200" b="0" u="none" strike="noStrike">
+                        <a:solidFill>
+                          <a:srgbClr val="FFFFFF"/>
+                        </a:solidFill>
+                        <a:effectLst/>
+                        <a:uFillTx/>
+                        <a:latin typeface="Arial"/>
+                      </a:endParaRPr>
+                    </a:p>
+                  </a:txBody>
+                  <a:tcPr anchor="ctr">
+                    <a:lnL w="6480">
+                      <a:solidFill>
+                        <a:srgbClr val="CFCFCF"/>
+                      </a:solidFill>
+                      <a:prstDash val="solid"/>
+                    </a:lnL>
+                    <a:lnR w="6480">
+                      <a:solidFill>
+                        <a:srgbClr val="CFCFCF"/>
+                      </a:solidFill>
+                      <a:prstDash val="solid"/>
+                    </a:lnR>
+                    <a:lnT w="6480">
+                      <a:solidFill>
+                        <a:srgbClr val="CFCFCF"/>
+                      </a:solidFill>
+                      <a:prstDash val="solid"/>
+                    </a:lnT>
+                    <a:lnB w="6480">
+                      <a:solidFill>
+                        <a:srgbClr val="CFCFCF"/>
+                      </a:solidFill>
+                      <a:prstDash val="solid"/>
+                    </a:lnB>
+                    <a:solidFill>
+                      <a:srgbClr val="2C3E50"/>
+                    </a:solidFill>
+                  </a:tcPr>
+                </a:tc>
+                <a:tc>
+                  <a:txBody>
+                    <a:bodyPr/>
+                    <a:lstStyle/>
+                    <a:p>
+                      <a:pPr defTabSz="914400">
+                        <a:lnSpc>
+                          <a:spcPct val="100000"/>
+                        </a:lnSpc>
+                        <a:tabLst>
+                          <a:tab pos="0" algn="l"/>
+                        </a:tabLst>
+                      </a:pPr>
+                      <a:r>
+                        <a:rPr lang="en-US" sz="1200" b="1" u="none" strike="noStrike">
+                          <a:solidFill>
+                            <a:srgbClr val="FFFFFF"/>
+                          </a:solidFill>
+                          <a:effectLst/>
+                          <a:uFillTx/>
+                          <a:latin typeface="Calibri"/>
+                          <a:ea typeface="Calibri"/>
+                        </a:rPr>
+                        <a:t>Structural context</a:t>
+                      </a:r>
+                      <a:endParaRPr lang="en-US" sz="1200" b="0" u="none" strike="noStrike">
+                        <a:solidFill>
+                          <a:srgbClr val="FFFFFF"/>
+                        </a:solidFill>
+                        <a:effectLst/>
+                        <a:uFillTx/>
+                        <a:latin typeface="Arial"/>
+                      </a:endParaRPr>
+                    </a:p>
+                  </a:txBody>
+                  <a:tcPr anchor="ctr">
+                    <a:lnL w="6480">
+                      <a:solidFill>
+                        <a:srgbClr val="CFCFCF"/>
+                      </a:solidFill>
+                      <a:prstDash val="solid"/>
+                    </a:lnL>
+                    <a:lnR w="6480">
+                      <a:solidFill>
+                        <a:srgbClr val="CFCFCF"/>
+                      </a:solidFill>
+                      <a:prstDash val="solid"/>
+                    </a:lnR>
+                    <a:lnT w="6480">
+                      <a:solidFill>
+                        <a:srgbClr val="CFCFCF"/>
+                      </a:solidFill>
+                      <a:prstDash val="solid"/>
+                    </a:lnT>
+                    <a:lnB w="6480">
+                      <a:solidFill>
+                        <a:srgbClr val="CFCFCF"/>
+                      </a:solidFill>
+                      <a:prstDash val="solid"/>
+                    </a:lnB>
+                    <a:solidFill>
+                      <a:srgbClr val="2C3E50"/>
+                    </a:solidFill>
+                  </a:tcPr>
+                </a:tc>
+                <a:extLst>
+                  <a:ext uri="{0D108BD9-81ED-4DB2-BD59-A6C34878D82A}">
+                    <a16:rowId xmlns:a16="http://schemas.microsoft.com/office/drawing/2014/main" val="10000"/>
+                  </a:ext>
+                </a:extLst>
+              </a:tr>
+              <a:tr h="310680">
+                <a:tc>
+                  <a:txBody>
+                    <a:bodyPr/>
+                    <a:lstStyle/>
+                    <a:p>
+                      <a:pPr defTabSz="914400">
+                        <a:lnSpc>
+                          <a:spcPct val="100000"/>
+                        </a:lnSpc>
+                        <a:tabLst>
+                          <a:tab pos="0" algn="l"/>
+                        </a:tabLst>
+                      </a:pPr>
+                      <a:r>
+                        <a:rPr lang="en-US" sz="1200" b="1" u="none" strike="noStrike">
+                          <a:solidFill>
+                            <a:srgbClr val="2C3E50"/>
+                          </a:solidFill>
+                          <a:effectLst/>
+                          <a:uFillTx/>
+                          <a:latin typeface="Calibri"/>
+                          <a:ea typeface="Calibri"/>
+                        </a:rPr>
+                        <a:t>N-terminal IDR</a:t>
+                      </a:r>
+                      <a:endParaRPr lang="en-US" sz="1200" b="0" u="none" strike="noStrike">
+                        <a:solidFill>
+                          <a:srgbClr val="000000"/>
+                        </a:solidFill>
+                        <a:effectLst/>
+                        <a:uFillTx/>
+                        <a:latin typeface="Arial"/>
+                      </a:endParaRPr>
+                    </a:p>
+                  </a:txBody>
+                  <a:tcPr anchor="ctr">
+                    <a:lnL w="6480">
+                      <a:solidFill>
+                        <a:srgbClr val="CFCFCF"/>
+                      </a:solidFill>
+                      <a:prstDash val="solid"/>
+                    </a:lnL>
+                    <a:lnR w="6480">
+                      <a:solidFill>
+                        <a:srgbClr val="CFCFCF"/>
+                      </a:solidFill>
+                      <a:prstDash val="solid"/>
+                    </a:lnR>
+                    <a:lnT w="6480">
+                      <a:solidFill>
+                        <a:srgbClr val="CFCFCF"/>
+                      </a:solidFill>
+                      <a:prstDash val="solid"/>
+                    </a:lnT>
+                    <a:lnB w="6480">
+                      <a:solidFill>
+                        <a:srgbClr val="CFCFCF"/>
+                      </a:solidFill>
+                      <a:prstDash val="solid"/>
+                    </a:lnB>
+                    <a:noFill/>
+                  </a:tcPr>
+                </a:tc>
+                <a:tc>
+                  <a:txBody>
+                    <a:bodyPr/>
+                    <a:lstStyle/>
+                    <a:p>
+                      <a:pPr defTabSz="914400">
+                        <a:lnSpc>
+                          <a:spcPct val="100000"/>
+                        </a:lnSpc>
+                        <a:tabLst>
+                          <a:tab pos="0" algn="l"/>
+                        </a:tabLst>
+                      </a:pPr>
+                      <a:r>
+                        <a:rPr lang="en-US" sz="1200" b="0" u="none" strike="noStrike">
+                          <a:solidFill>
+                            <a:srgbClr val="2C3E50"/>
+                          </a:solidFill>
+                          <a:effectLst/>
+                          <a:uFillTx/>
+                          <a:latin typeface="Calibri"/>
+                          <a:ea typeface="Calibri"/>
+                        </a:rPr>
+                        <a:t>1–48</a:t>
+                      </a:r>
+                      <a:endParaRPr lang="en-US" sz="1200" b="0" u="none" strike="noStrike">
+                        <a:solidFill>
+                          <a:srgbClr val="000000"/>
+                        </a:solidFill>
+                        <a:effectLst/>
+                        <a:uFillTx/>
+                        <a:latin typeface="Arial"/>
+                      </a:endParaRPr>
+                    </a:p>
+                  </a:txBody>
+                  <a:tcPr anchor="ctr">
+                    <a:lnL w="6480">
+                      <a:solidFill>
+                        <a:srgbClr val="CFCFCF"/>
+                      </a:solidFill>
+                      <a:prstDash val="solid"/>
+                    </a:lnL>
+                    <a:lnR w="6480">
+                      <a:solidFill>
+                        <a:srgbClr val="CFCFCF"/>
+                      </a:solidFill>
+                      <a:prstDash val="solid"/>
+                    </a:lnR>
+                    <a:lnT w="6480">
+                      <a:solidFill>
+                        <a:srgbClr val="CFCFCF"/>
+                      </a:solidFill>
+                      <a:prstDash val="solid"/>
+                    </a:lnT>
+                    <a:lnB w="6480">
+                      <a:solidFill>
+                        <a:srgbClr val="CFCFCF"/>
+                      </a:solidFill>
+                      <a:prstDash val="solid"/>
+                    </a:lnB>
+                    <a:noFill/>
+                  </a:tcPr>
+                </a:tc>
+                <a:tc>
+                  <a:txBody>
+                    <a:bodyPr/>
+                    <a:lstStyle/>
+                    <a:p>
+                      <a:pPr defTabSz="914400">
+                        <a:lnSpc>
+                          <a:spcPct val="100000"/>
+                        </a:lnSpc>
+                        <a:tabLst>
+                          <a:tab pos="0" algn="l"/>
+                        </a:tabLst>
+                      </a:pPr>
+                      <a:r>
+                        <a:rPr lang="en-US" sz="1200" b="0" u="none" strike="noStrike">
+                          <a:solidFill>
+                            <a:srgbClr val="2C3E50"/>
+                          </a:solidFill>
+                          <a:effectLst/>
+                          <a:uFillTx/>
+                          <a:latin typeface="Calibri"/>
+                          <a:ea typeface="Calibri"/>
+                        </a:rPr>
+                        <a:t>loading / regulation</a:t>
+                      </a:r>
+                      <a:endParaRPr lang="en-US" sz="1200" b="0" u="none" strike="noStrike">
+                        <a:solidFill>
+                          <a:srgbClr val="000000"/>
+                        </a:solidFill>
+                        <a:effectLst/>
+                        <a:uFillTx/>
+                        <a:latin typeface="Arial"/>
+                      </a:endParaRPr>
+                    </a:p>
+                  </a:txBody>
+                  <a:tcPr anchor="ctr">
+                    <a:lnL w="6480">
+                      <a:solidFill>
+                        <a:srgbClr val="CFCFCF"/>
+                      </a:solidFill>
+                      <a:prstDash val="solid"/>
+                    </a:lnL>
+                    <a:lnR w="6480">
+                      <a:solidFill>
+                        <a:srgbClr val="CFCFCF"/>
+                      </a:solidFill>
+                      <a:prstDash val="solid"/>
+                    </a:lnR>
+                    <a:lnT w="6480">
+                      <a:solidFill>
+                        <a:srgbClr val="CFCFCF"/>
+                      </a:solidFill>
+                      <a:prstDash val="solid"/>
+                    </a:lnT>
+                    <a:lnB w="6480">
+                      <a:solidFill>
+                        <a:srgbClr val="CFCFCF"/>
+                      </a:solidFill>
+                      <a:prstDash val="solid"/>
+                    </a:lnB>
+                    <a:noFill/>
+                  </a:tcPr>
+                </a:tc>
+                <a:tc>
+                  <a:txBody>
+                    <a:bodyPr/>
+                    <a:lstStyle/>
+                    <a:p>
+                      <a:pPr defTabSz="914400">
+                        <a:lnSpc>
+                          <a:spcPct val="100000"/>
+                        </a:lnSpc>
+                        <a:tabLst>
+                          <a:tab pos="0" algn="l"/>
+                        </a:tabLst>
+                      </a:pPr>
+                      <a:r>
+                        <a:rPr lang="en-US" sz="1200" b="0" u="none" strike="noStrike">
+                          <a:solidFill>
+                            <a:srgbClr val="2C3E50"/>
+                          </a:solidFill>
+                          <a:effectLst/>
+                          <a:uFillTx/>
+                          <a:latin typeface="Calibri"/>
+                          <a:ea typeface="Calibri"/>
+                        </a:rPr>
+                        <a:t>0.82  (100%)</a:t>
+                      </a:r>
+                      <a:endParaRPr lang="en-US" sz="1200" b="0" u="none" strike="noStrike">
+                        <a:solidFill>
+                          <a:srgbClr val="000000"/>
+                        </a:solidFill>
+                        <a:effectLst/>
+                        <a:uFillTx/>
+                        <a:latin typeface="Arial"/>
+                      </a:endParaRPr>
+                    </a:p>
+                  </a:txBody>
+                  <a:tcPr anchor="ctr">
+                    <a:lnL w="6480">
+                      <a:solidFill>
+                        <a:srgbClr val="CFCFCF"/>
+                      </a:solidFill>
+                      <a:prstDash val="solid"/>
+                    </a:lnL>
+                    <a:lnR w="6480">
+                      <a:solidFill>
+                        <a:srgbClr val="CFCFCF"/>
+                      </a:solidFill>
+                      <a:prstDash val="solid"/>
+                    </a:lnR>
+                    <a:lnT w="6480">
+                      <a:solidFill>
+                        <a:srgbClr val="CFCFCF"/>
+                      </a:solidFill>
+                      <a:prstDash val="solid"/>
+                    </a:lnT>
+                    <a:lnB w="6480">
+                      <a:solidFill>
+                        <a:srgbClr val="CFCFCF"/>
+                      </a:solidFill>
+                      <a:prstDash val="solid"/>
+                    </a:lnB>
+                    <a:noFill/>
+                  </a:tcPr>
+                </a:tc>
+                <a:tc>
+                  <a:txBody>
+                    <a:bodyPr/>
+                    <a:lstStyle/>
+                    <a:p>
+                      <a:pPr defTabSz="914400">
+                        <a:lnSpc>
+                          <a:spcPct val="100000"/>
+                        </a:lnSpc>
+                        <a:tabLst>
+                          <a:tab pos="0" algn="l"/>
+                        </a:tabLst>
+                      </a:pPr>
+                      <a:r>
+                        <a:rPr lang="en-US" sz="1200" b="0" i="1" u="none" strike="noStrike">
+                          <a:solidFill>
+                            <a:srgbClr val="2C3E50"/>
+                          </a:solidFill>
+                          <a:effectLst/>
+                          <a:uFillTx/>
+                          <a:latin typeface="Calibri"/>
+                          <a:ea typeface="Calibri"/>
+                        </a:rPr>
+                        <a:t>disordered</a:t>
+                      </a:r>
+                      <a:endParaRPr lang="en-US" sz="1200" b="0" u="none" strike="noStrike">
+                        <a:solidFill>
+                          <a:srgbClr val="000000"/>
+                        </a:solidFill>
+                        <a:effectLst/>
+                        <a:uFillTx/>
+                        <a:latin typeface="Arial"/>
+                      </a:endParaRPr>
+                    </a:p>
+                  </a:txBody>
+                  <a:tcPr anchor="ctr">
+                    <a:lnL w="6480">
+                      <a:solidFill>
+                        <a:srgbClr val="CFCFCF"/>
+                      </a:solidFill>
+                      <a:prstDash val="solid"/>
+                    </a:lnL>
+                    <a:lnR w="6480">
+                      <a:solidFill>
+                        <a:srgbClr val="CFCFCF"/>
+                      </a:solidFill>
+                      <a:prstDash val="solid"/>
+                    </a:lnR>
+                    <a:lnT w="6480">
+                      <a:solidFill>
+                        <a:srgbClr val="CFCFCF"/>
+                      </a:solidFill>
+                      <a:prstDash val="solid"/>
+                    </a:lnT>
+                    <a:lnB w="6480">
+                      <a:solidFill>
+                        <a:srgbClr val="CFCFCF"/>
+                      </a:solidFill>
+                      <a:prstDash val="solid"/>
+                    </a:lnB>
+                    <a:noFill/>
+                  </a:tcPr>
+                </a:tc>
+                <a:extLst>
+                  <a:ext uri="{0D108BD9-81ED-4DB2-BD59-A6C34878D82A}">
+                    <a16:rowId xmlns:a16="http://schemas.microsoft.com/office/drawing/2014/main" val="10001"/>
+                  </a:ext>
+                </a:extLst>
+              </a:tr>
+              <a:tr h="310680">
+                <a:tc>
+                  <a:txBody>
+                    <a:bodyPr/>
+                    <a:lstStyle/>
+                    <a:p>
+                      <a:pPr defTabSz="914400">
+                        <a:lnSpc>
+                          <a:spcPct val="100000"/>
+                        </a:lnSpc>
+                        <a:tabLst>
+                          <a:tab pos="0" algn="l"/>
+                        </a:tabLst>
+                      </a:pPr>
+                      <a:r>
+                        <a:rPr lang="en-US" sz="1200" b="1" u="none" strike="noStrike">
+                          <a:solidFill>
+                            <a:srgbClr val="2C3E50"/>
+                          </a:solidFill>
+                          <a:effectLst/>
+                          <a:uFillTx/>
+                          <a:latin typeface="Calibri"/>
+                          <a:ea typeface="Calibri"/>
+                        </a:rPr>
+                        <a:t>KEN box</a:t>
+                      </a:r>
+                      <a:endParaRPr lang="en-US" sz="1200" b="0" u="none" strike="noStrike">
+                        <a:solidFill>
+                          <a:srgbClr val="000000"/>
+                        </a:solidFill>
+                        <a:effectLst/>
+                        <a:uFillTx/>
+                        <a:latin typeface="Arial"/>
+                      </a:endParaRPr>
+                    </a:p>
+                  </a:txBody>
+                  <a:tcPr anchor="ctr">
+                    <a:lnL w="6480">
+                      <a:solidFill>
+                        <a:srgbClr val="CFCFCF"/>
+                      </a:solidFill>
+                      <a:prstDash val="solid"/>
+                    </a:lnL>
+                    <a:lnR w="6480">
+                      <a:solidFill>
+                        <a:srgbClr val="CFCFCF"/>
+                      </a:solidFill>
+                      <a:prstDash val="solid"/>
+                    </a:lnR>
+                    <a:lnT w="6480">
+                      <a:solidFill>
+                        <a:srgbClr val="CFCFCF"/>
+                      </a:solidFill>
+                      <a:prstDash val="solid"/>
+                    </a:lnT>
+                    <a:lnB w="6480">
+                      <a:solidFill>
+                        <a:srgbClr val="CFCFCF"/>
+                      </a:solidFill>
+                      <a:prstDash val="solid"/>
+                    </a:lnB>
+                    <a:noFill/>
+                  </a:tcPr>
+                </a:tc>
+                <a:tc>
+                  <a:txBody>
+                    <a:bodyPr/>
+                    <a:lstStyle/>
+                    <a:p>
+                      <a:pPr defTabSz="914400">
+                        <a:lnSpc>
+                          <a:spcPct val="100000"/>
+                        </a:lnSpc>
+                        <a:tabLst>
+                          <a:tab pos="0" algn="l"/>
+                        </a:tabLst>
+                      </a:pPr>
+                      <a:r>
+                        <a:rPr lang="en-US" sz="1200" b="0" u="none" strike="noStrike">
+                          <a:solidFill>
+                            <a:srgbClr val="2C3E50"/>
+                          </a:solidFill>
+                          <a:effectLst/>
+                          <a:uFillTx/>
+                          <a:latin typeface="Calibri"/>
+                          <a:ea typeface="Calibri"/>
+                        </a:rPr>
+                        <a:t>88–90</a:t>
+                      </a:r>
+                      <a:endParaRPr lang="en-US" sz="1200" b="0" u="none" strike="noStrike">
+                        <a:solidFill>
+                          <a:srgbClr val="000000"/>
+                        </a:solidFill>
+                        <a:effectLst/>
+                        <a:uFillTx/>
+                        <a:latin typeface="Arial"/>
+                      </a:endParaRPr>
+                    </a:p>
+                  </a:txBody>
+                  <a:tcPr anchor="ctr">
+                    <a:lnL w="6480">
+                      <a:solidFill>
+                        <a:srgbClr val="CFCFCF"/>
+                      </a:solidFill>
+                      <a:prstDash val="solid"/>
+                    </a:lnL>
+                    <a:lnR w="6480">
+                      <a:solidFill>
+                        <a:srgbClr val="CFCFCF"/>
+                      </a:solidFill>
+                      <a:prstDash val="solid"/>
+                    </a:lnR>
+                    <a:lnT w="6480">
+                      <a:solidFill>
+                        <a:srgbClr val="CFCFCF"/>
+                      </a:solidFill>
+                      <a:prstDash val="solid"/>
+                    </a:lnT>
+                    <a:lnB w="6480">
+                      <a:solidFill>
+                        <a:srgbClr val="CFCFCF"/>
+                      </a:solidFill>
+                      <a:prstDash val="solid"/>
+                    </a:lnB>
+                    <a:noFill/>
+                  </a:tcPr>
+                </a:tc>
+                <a:tc>
+                  <a:txBody>
+                    <a:bodyPr/>
+                    <a:lstStyle/>
+                    <a:p>
+                      <a:pPr defTabSz="914400">
+                        <a:lnSpc>
+                          <a:spcPct val="100000"/>
+                        </a:lnSpc>
+                        <a:tabLst>
+                          <a:tab pos="0" algn="l"/>
+                        </a:tabLst>
+                      </a:pPr>
+                      <a:r>
+                        <a:rPr lang="en-US" sz="1200" b="0" u="none" strike="noStrike">
+                          <a:solidFill>
+                            <a:srgbClr val="2C3E50"/>
+                          </a:solidFill>
+                          <a:effectLst/>
+                          <a:uFillTx/>
+                          <a:latin typeface="Calibri"/>
+                          <a:ea typeface="Calibri"/>
+                        </a:rPr>
+                        <a:t>APC/C (degradation)</a:t>
+                      </a:r>
+                      <a:endParaRPr lang="en-US" sz="1200" b="0" u="none" strike="noStrike">
+                        <a:solidFill>
+                          <a:srgbClr val="000000"/>
+                        </a:solidFill>
+                        <a:effectLst/>
+                        <a:uFillTx/>
+                        <a:latin typeface="Arial"/>
+                      </a:endParaRPr>
+                    </a:p>
+                  </a:txBody>
+                  <a:tcPr anchor="ctr">
+                    <a:lnL w="6480">
+                      <a:solidFill>
+                        <a:srgbClr val="CFCFCF"/>
+                      </a:solidFill>
+                      <a:prstDash val="solid"/>
+                    </a:lnL>
+                    <a:lnR w="6480">
+                      <a:solidFill>
+                        <a:srgbClr val="CFCFCF"/>
+                      </a:solidFill>
+                      <a:prstDash val="solid"/>
+                    </a:lnR>
+                    <a:lnT w="6480">
+                      <a:solidFill>
+                        <a:srgbClr val="CFCFCF"/>
+                      </a:solidFill>
+                      <a:prstDash val="solid"/>
+                    </a:lnT>
+                    <a:lnB w="6480">
+                      <a:solidFill>
+                        <a:srgbClr val="CFCFCF"/>
+                      </a:solidFill>
+                      <a:prstDash val="solid"/>
+                    </a:lnB>
+                    <a:noFill/>
+                  </a:tcPr>
+                </a:tc>
+                <a:tc>
+                  <a:txBody>
+                    <a:bodyPr/>
+                    <a:lstStyle/>
+                    <a:p>
+                      <a:pPr defTabSz="914400">
+                        <a:lnSpc>
+                          <a:spcPct val="100000"/>
+                        </a:lnSpc>
+                        <a:tabLst>
+                          <a:tab pos="0" algn="l"/>
+                        </a:tabLst>
+                      </a:pPr>
+                      <a:r>
+                        <a:rPr lang="en-US" sz="1200" b="0" u="none" strike="noStrike">
+                          <a:solidFill>
+                            <a:srgbClr val="2C3E50"/>
+                          </a:solidFill>
+                          <a:effectLst/>
+                          <a:uFillTx/>
+                          <a:latin typeface="Calibri"/>
+                          <a:ea typeface="Calibri"/>
+                        </a:rPr>
+                        <a:t>0.64  (100%)</a:t>
+                      </a:r>
+                      <a:endParaRPr lang="en-US" sz="1200" b="0" u="none" strike="noStrike">
+                        <a:solidFill>
+                          <a:srgbClr val="000000"/>
+                        </a:solidFill>
+                        <a:effectLst/>
+                        <a:uFillTx/>
+                        <a:latin typeface="Arial"/>
+                      </a:endParaRPr>
+                    </a:p>
+                  </a:txBody>
+                  <a:tcPr anchor="ctr">
+                    <a:lnL w="6480">
+                      <a:solidFill>
+                        <a:srgbClr val="CFCFCF"/>
+                      </a:solidFill>
+                      <a:prstDash val="solid"/>
+                    </a:lnL>
+                    <a:lnR w="6480">
+                      <a:solidFill>
+                        <a:srgbClr val="CFCFCF"/>
+                      </a:solidFill>
+                      <a:prstDash val="solid"/>
+                    </a:lnR>
+                    <a:lnT w="6480">
+                      <a:solidFill>
+                        <a:srgbClr val="CFCFCF"/>
+                      </a:solidFill>
+                      <a:prstDash val="solid"/>
+                    </a:lnT>
+                    <a:lnB w="6480">
+                      <a:solidFill>
+                        <a:srgbClr val="CFCFCF"/>
+                      </a:solidFill>
+                      <a:prstDash val="solid"/>
+                    </a:lnB>
+                    <a:noFill/>
+                  </a:tcPr>
+                </a:tc>
+                <a:tc>
+                  <a:txBody>
+                    <a:bodyPr/>
+                    <a:lstStyle/>
+                    <a:p>
+                      <a:pPr defTabSz="914400">
+                        <a:lnSpc>
+                          <a:spcPct val="100000"/>
+                        </a:lnSpc>
+                        <a:tabLst>
+                          <a:tab pos="0" algn="l"/>
+                        </a:tabLst>
+                      </a:pPr>
+                      <a:r>
+                        <a:rPr lang="en-US" sz="1200" b="0" i="1" u="none" strike="noStrike">
+                          <a:solidFill>
+                            <a:srgbClr val="2C3E50"/>
+                          </a:solidFill>
+                          <a:effectLst/>
+                          <a:uFillTx/>
+                          <a:latin typeface="Calibri"/>
+                          <a:ea typeface="Calibri"/>
+                        </a:rPr>
+                        <a:t>disordered</a:t>
+                      </a:r>
+                      <a:endParaRPr lang="en-US" sz="1200" b="0" u="none" strike="noStrike">
+                        <a:solidFill>
+                          <a:srgbClr val="000000"/>
+                        </a:solidFill>
+                        <a:effectLst/>
+                        <a:uFillTx/>
+                        <a:latin typeface="Arial"/>
+                      </a:endParaRPr>
+                    </a:p>
+                  </a:txBody>
+                  <a:tcPr anchor="ctr">
+                    <a:lnL w="6480">
+                      <a:solidFill>
+                        <a:srgbClr val="CFCFCF"/>
+                      </a:solidFill>
+                      <a:prstDash val="solid"/>
+                    </a:lnL>
+                    <a:lnR w="6480">
+                      <a:solidFill>
+                        <a:srgbClr val="CFCFCF"/>
+                      </a:solidFill>
+                      <a:prstDash val="solid"/>
+                    </a:lnR>
+                    <a:lnT w="6480">
+                      <a:solidFill>
+                        <a:srgbClr val="CFCFCF"/>
+                      </a:solidFill>
+                      <a:prstDash val="solid"/>
+                    </a:lnT>
+                    <a:lnB w="6480">
+                      <a:solidFill>
+                        <a:srgbClr val="CFCFCF"/>
+                      </a:solidFill>
+                      <a:prstDash val="solid"/>
+                    </a:lnB>
+                    <a:noFill/>
+                  </a:tcPr>
+                </a:tc>
+                <a:extLst>
+                  <a:ext uri="{0D108BD9-81ED-4DB2-BD59-A6C34878D82A}">
+                    <a16:rowId xmlns:a16="http://schemas.microsoft.com/office/drawing/2014/main" val="10002"/>
+                  </a:ext>
+                </a:extLst>
+              </a:tr>
+              <a:tr h="310680">
+                <a:tc>
+                  <a:txBody>
+                    <a:bodyPr/>
+                    <a:lstStyle/>
+                    <a:p>
+                      <a:pPr defTabSz="914400">
+                        <a:lnSpc>
+                          <a:spcPct val="100000"/>
+                        </a:lnSpc>
+                        <a:tabLst>
+                          <a:tab pos="0" algn="l"/>
+                        </a:tabLst>
+                      </a:pPr>
+                      <a:r>
+                        <a:rPr lang="en-US" sz="1200" b="1" u="none" strike="noStrike">
+                          <a:solidFill>
+                            <a:srgbClr val="2C3E50"/>
+                          </a:solidFill>
+                          <a:effectLst/>
+                          <a:uFillTx/>
+                          <a:latin typeface="Calibri"/>
+                          <a:ea typeface="Calibri"/>
+                        </a:rPr>
+                        <a:t>Central IDR</a:t>
+                      </a:r>
+                      <a:endParaRPr lang="en-US" sz="1200" b="0" u="none" strike="noStrike">
+                        <a:solidFill>
+                          <a:srgbClr val="000000"/>
+                        </a:solidFill>
+                        <a:effectLst/>
+                        <a:uFillTx/>
+                        <a:latin typeface="Arial"/>
+                      </a:endParaRPr>
+                    </a:p>
+                  </a:txBody>
+                  <a:tcPr anchor="ctr">
+                    <a:lnL w="6480">
+                      <a:solidFill>
+                        <a:srgbClr val="CFCFCF"/>
+                      </a:solidFill>
+                      <a:prstDash val="solid"/>
+                    </a:lnL>
+                    <a:lnR w="6480">
+                      <a:solidFill>
+                        <a:srgbClr val="CFCFCF"/>
+                      </a:solidFill>
+                      <a:prstDash val="solid"/>
+                    </a:lnR>
+                    <a:lnT w="6480">
+                      <a:solidFill>
+                        <a:srgbClr val="CFCFCF"/>
+                      </a:solidFill>
+                      <a:prstDash val="solid"/>
+                    </a:lnT>
+                    <a:lnB w="6480">
+                      <a:solidFill>
+                        <a:srgbClr val="CFCFCF"/>
+                      </a:solidFill>
+                      <a:prstDash val="solid"/>
+                    </a:lnB>
+                    <a:noFill/>
+                  </a:tcPr>
+                </a:tc>
+                <a:tc>
+                  <a:txBody>
+                    <a:bodyPr/>
+                    <a:lstStyle/>
+                    <a:p>
+                      <a:pPr defTabSz="914400">
+                        <a:lnSpc>
+                          <a:spcPct val="100000"/>
+                        </a:lnSpc>
+                        <a:tabLst>
+                          <a:tab pos="0" algn="l"/>
+                        </a:tabLst>
+                      </a:pPr>
+                      <a:r>
+                        <a:rPr lang="en-US" sz="1200" b="0" u="none" strike="noStrike">
+                          <a:solidFill>
+                            <a:srgbClr val="2C3E50"/>
+                          </a:solidFill>
+                          <a:effectLst/>
+                          <a:uFillTx/>
+                          <a:latin typeface="Calibri"/>
+                          <a:ea typeface="Calibri"/>
+                        </a:rPr>
+                        <a:t>72–142</a:t>
+                      </a:r>
+                      <a:endParaRPr lang="en-US" sz="1200" b="0" u="none" strike="noStrike">
+                        <a:solidFill>
+                          <a:srgbClr val="000000"/>
+                        </a:solidFill>
+                        <a:effectLst/>
+                        <a:uFillTx/>
+                        <a:latin typeface="Arial"/>
+                      </a:endParaRPr>
+                    </a:p>
+                  </a:txBody>
+                  <a:tcPr anchor="ctr">
+                    <a:lnL w="6480">
+                      <a:solidFill>
+                        <a:srgbClr val="CFCFCF"/>
+                      </a:solidFill>
+                      <a:prstDash val="solid"/>
+                    </a:lnL>
+                    <a:lnR w="6480">
+                      <a:solidFill>
+                        <a:srgbClr val="CFCFCF"/>
+                      </a:solidFill>
+                      <a:prstDash val="solid"/>
+                    </a:lnR>
+                    <a:lnT w="6480">
+                      <a:solidFill>
+                        <a:srgbClr val="CFCFCF"/>
+                      </a:solidFill>
+                      <a:prstDash val="solid"/>
+                    </a:lnT>
+                    <a:lnB w="6480">
+                      <a:solidFill>
+                        <a:srgbClr val="CFCFCF"/>
+                      </a:solidFill>
+                      <a:prstDash val="solid"/>
+                    </a:lnB>
+                    <a:noFill/>
+                  </a:tcPr>
+                </a:tc>
+                <a:tc>
+                  <a:txBody>
+                    <a:bodyPr/>
+                    <a:lstStyle/>
+                    <a:p>
+                      <a:pPr defTabSz="914400">
+                        <a:lnSpc>
+                          <a:spcPct val="100000"/>
+                        </a:lnSpc>
+                        <a:tabLst>
+                          <a:tab pos="0" algn="l"/>
+                        </a:tabLst>
+                      </a:pPr>
+                      <a:r>
+                        <a:rPr lang="en-US" sz="1200" b="0" u="none" strike="noStrike" dirty="0">
+                          <a:solidFill>
+                            <a:srgbClr val="2C3E50"/>
+                          </a:solidFill>
+                          <a:effectLst/>
+                          <a:uFillTx/>
+                          <a:latin typeface="Calibri"/>
+                          <a:ea typeface="Calibri"/>
+                        </a:rPr>
+                        <a:t>phospho-cluster</a:t>
+                      </a:r>
+                      <a:endParaRPr lang="en-US" sz="1200" b="0" u="none" strike="noStrike" dirty="0">
+                        <a:solidFill>
+                          <a:srgbClr val="000000"/>
+                        </a:solidFill>
+                        <a:effectLst/>
+                        <a:uFillTx/>
+                        <a:latin typeface="Arial"/>
+                      </a:endParaRPr>
+                    </a:p>
+                  </a:txBody>
+                  <a:tcPr anchor="ctr">
+                    <a:lnL w="6480">
+                      <a:solidFill>
+                        <a:srgbClr val="CFCFCF"/>
+                      </a:solidFill>
+                      <a:prstDash val="solid"/>
+                    </a:lnL>
+                    <a:lnR w="6480">
+                      <a:solidFill>
+                        <a:srgbClr val="CFCFCF"/>
+                      </a:solidFill>
+                      <a:prstDash val="solid"/>
+                    </a:lnR>
+                    <a:lnT w="6480">
+                      <a:solidFill>
+                        <a:srgbClr val="CFCFCF"/>
+                      </a:solidFill>
+                      <a:prstDash val="solid"/>
+                    </a:lnT>
+                    <a:lnB w="6480">
+                      <a:solidFill>
+                        <a:srgbClr val="CFCFCF"/>
+                      </a:solidFill>
+                      <a:prstDash val="solid"/>
+                    </a:lnB>
+                    <a:noFill/>
+                  </a:tcPr>
+                </a:tc>
+                <a:tc>
+                  <a:txBody>
+                    <a:bodyPr/>
+                    <a:lstStyle/>
+                    <a:p>
+                      <a:pPr defTabSz="914400">
+                        <a:lnSpc>
+                          <a:spcPct val="100000"/>
+                        </a:lnSpc>
+                        <a:tabLst>
+                          <a:tab pos="0" algn="l"/>
+                        </a:tabLst>
+                      </a:pPr>
+                      <a:r>
+                        <a:rPr lang="en-US" sz="1200" b="0" u="none" strike="noStrike">
+                          <a:solidFill>
+                            <a:srgbClr val="2C3E50"/>
+                          </a:solidFill>
+                          <a:effectLst/>
+                          <a:uFillTx/>
+                          <a:latin typeface="Calibri"/>
+                          <a:ea typeface="Calibri"/>
+                        </a:rPr>
+                        <a:t>0.70  (90%)</a:t>
+                      </a:r>
+                      <a:endParaRPr lang="en-US" sz="1200" b="0" u="none" strike="noStrike">
+                        <a:solidFill>
+                          <a:srgbClr val="000000"/>
+                        </a:solidFill>
+                        <a:effectLst/>
+                        <a:uFillTx/>
+                        <a:latin typeface="Arial"/>
+                      </a:endParaRPr>
+                    </a:p>
+                  </a:txBody>
+                  <a:tcPr anchor="ctr">
+                    <a:lnL w="6480">
+                      <a:solidFill>
+                        <a:srgbClr val="CFCFCF"/>
+                      </a:solidFill>
+                      <a:prstDash val="solid"/>
+                    </a:lnL>
+                    <a:lnR w="6480">
+                      <a:solidFill>
+                        <a:srgbClr val="CFCFCF"/>
+                      </a:solidFill>
+                      <a:prstDash val="solid"/>
+                    </a:lnR>
+                    <a:lnT w="6480">
+                      <a:solidFill>
+                        <a:srgbClr val="CFCFCF"/>
+                      </a:solidFill>
+                      <a:prstDash val="solid"/>
+                    </a:lnT>
+                    <a:lnB w="6480">
+                      <a:solidFill>
+                        <a:srgbClr val="CFCFCF"/>
+                      </a:solidFill>
+                      <a:prstDash val="solid"/>
+                    </a:lnB>
+                    <a:noFill/>
+                  </a:tcPr>
+                </a:tc>
+                <a:tc>
+                  <a:txBody>
+                    <a:bodyPr/>
+                    <a:lstStyle/>
+                    <a:p>
+                      <a:pPr defTabSz="914400">
+                        <a:lnSpc>
+                          <a:spcPct val="100000"/>
+                        </a:lnSpc>
+                        <a:tabLst>
+                          <a:tab pos="0" algn="l"/>
+                        </a:tabLst>
+                      </a:pPr>
+                      <a:r>
+                        <a:rPr lang="en-US" sz="1200" b="0" i="1" u="none" strike="noStrike">
+                          <a:solidFill>
+                            <a:srgbClr val="2C3E50"/>
+                          </a:solidFill>
+                          <a:effectLst/>
+                          <a:uFillTx/>
+                          <a:latin typeface="Calibri"/>
+                          <a:ea typeface="Calibri"/>
+                        </a:rPr>
+                        <a:t>disordered</a:t>
+                      </a:r>
+                      <a:endParaRPr lang="en-US" sz="1200" b="0" u="none" strike="noStrike">
+                        <a:solidFill>
+                          <a:srgbClr val="000000"/>
+                        </a:solidFill>
+                        <a:effectLst/>
+                        <a:uFillTx/>
+                        <a:latin typeface="Arial"/>
+                      </a:endParaRPr>
+                    </a:p>
+                  </a:txBody>
+                  <a:tcPr anchor="ctr">
+                    <a:lnL w="6480">
+                      <a:solidFill>
+                        <a:srgbClr val="CFCFCF"/>
+                      </a:solidFill>
+                      <a:prstDash val="solid"/>
+                    </a:lnL>
+                    <a:lnR w="6480">
+                      <a:solidFill>
+                        <a:srgbClr val="CFCFCF"/>
+                      </a:solidFill>
+                      <a:prstDash val="solid"/>
+                    </a:lnR>
+                    <a:lnT w="6480">
+                      <a:solidFill>
+                        <a:srgbClr val="CFCFCF"/>
+                      </a:solidFill>
+                      <a:prstDash val="solid"/>
+                    </a:lnT>
+                    <a:lnB w="6480">
+                      <a:solidFill>
+                        <a:srgbClr val="CFCFCF"/>
+                      </a:solidFill>
+                      <a:prstDash val="solid"/>
+                    </a:lnB>
+                    <a:noFill/>
+                  </a:tcPr>
+                </a:tc>
+                <a:extLst>
+                  <a:ext uri="{0D108BD9-81ED-4DB2-BD59-A6C34878D82A}">
+                    <a16:rowId xmlns:a16="http://schemas.microsoft.com/office/drawing/2014/main" val="10003"/>
+                  </a:ext>
+                </a:extLst>
+              </a:tr>
+              <a:tr h="310680">
+                <a:tc>
+                  <a:txBody>
+                    <a:bodyPr/>
+                    <a:lstStyle/>
+                    <a:p>
+                      <a:pPr defTabSz="914400">
+                        <a:lnSpc>
+                          <a:spcPct val="100000"/>
+                        </a:lnSpc>
+                        <a:tabLst>
+                          <a:tab pos="0" algn="l"/>
+                        </a:tabLst>
+                      </a:pPr>
+                      <a:r>
+                        <a:rPr lang="en-US" sz="1200" b="1" u="none" strike="noStrike">
+                          <a:solidFill>
+                            <a:srgbClr val="2C3E50"/>
+                          </a:solidFill>
+                          <a:effectLst/>
+                          <a:uFillTx/>
+                          <a:latin typeface="Calibri"/>
+                          <a:ea typeface="Calibri"/>
+                        </a:rPr>
+                        <a:t>FGF motif</a:t>
+                      </a:r>
+                      <a:endParaRPr lang="en-US" sz="1200" b="0" u="none" strike="noStrike">
+                        <a:solidFill>
+                          <a:srgbClr val="000000"/>
+                        </a:solidFill>
+                        <a:effectLst/>
+                        <a:uFillTx/>
+                        <a:latin typeface="Arial"/>
+                      </a:endParaRPr>
+                    </a:p>
+                  </a:txBody>
+                  <a:tcPr anchor="ctr">
+                    <a:lnL w="6480">
+                      <a:solidFill>
+                        <a:srgbClr val="CFCFCF"/>
+                      </a:solidFill>
+                      <a:prstDash val="solid"/>
+                    </a:lnL>
+                    <a:lnR w="6480">
+                      <a:solidFill>
+                        <a:srgbClr val="CFCFCF"/>
+                      </a:solidFill>
+                      <a:prstDash val="solid"/>
+                    </a:lnR>
+                    <a:lnT w="6480">
+                      <a:solidFill>
+                        <a:srgbClr val="CFCFCF"/>
+                      </a:solidFill>
+                      <a:prstDash val="solid"/>
+                    </a:lnT>
+                    <a:lnB w="6480">
+                      <a:solidFill>
+                        <a:srgbClr val="CFCFCF"/>
+                      </a:solidFill>
+                      <a:prstDash val="solid"/>
+                    </a:lnB>
+                    <a:solidFill>
+                      <a:srgbClr val="F0E8F4"/>
+                    </a:solidFill>
+                  </a:tcPr>
+                </a:tc>
+                <a:tc>
+                  <a:txBody>
+                    <a:bodyPr/>
+                    <a:lstStyle/>
+                    <a:p>
+                      <a:pPr defTabSz="914400">
+                        <a:lnSpc>
+                          <a:spcPct val="100000"/>
+                        </a:lnSpc>
+                        <a:tabLst>
+                          <a:tab pos="0" algn="l"/>
+                        </a:tabLst>
+                      </a:pPr>
+                      <a:r>
+                        <a:rPr lang="en-US" sz="1200" b="0" u="none" strike="noStrike">
+                          <a:solidFill>
+                            <a:srgbClr val="2C3E50"/>
+                          </a:solidFill>
+                          <a:effectLst/>
+                          <a:uFillTx/>
+                          <a:latin typeface="Calibri"/>
+                          <a:ea typeface="Calibri"/>
+                        </a:rPr>
+                        <a:t>166–168</a:t>
+                      </a:r>
+                      <a:endParaRPr lang="en-US" sz="1200" b="0" u="none" strike="noStrike">
+                        <a:solidFill>
+                          <a:srgbClr val="000000"/>
+                        </a:solidFill>
+                        <a:effectLst/>
+                        <a:uFillTx/>
+                        <a:latin typeface="Arial"/>
+                      </a:endParaRPr>
+                    </a:p>
+                  </a:txBody>
+                  <a:tcPr anchor="ctr">
+                    <a:lnL w="6480">
+                      <a:solidFill>
+                        <a:srgbClr val="CFCFCF"/>
+                      </a:solidFill>
+                      <a:prstDash val="solid"/>
+                    </a:lnL>
+                    <a:lnR w="6480">
+                      <a:solidFill>
+                        <a:srgbClr val="CFCFCF"/>
+                      </a:solidFill>
+                      <a:prstDash val="solid"/>
+                    </a:lnR>
+                    <a:lnT w="6480">
+                      <a:solidFill>
+                        <a:srgbClr val="CFCFCF"/>
+                      </a:solidFill>
+                      <a:prstDash val="solid"/>
+                    </a:lnT>
+                    <a:lnB w="6480">
+                      <a:solidFill>
+                        <a:srgbClr val="CFCFCF"/>
+                      </a:solidFill>
+                      <a:prstDash val="solid"/>
+                    </a:lnB>
+                    <a:solidFill>
+                      <a:srgbClr val="F0E8F4"/>
+                    </a:solidFill>
+                  </a:tcPr>
+                </a:tc>
+                <a:tc>
+                  <a:txBody>
+                    <a:bodyPr/>
+                    <a:lstStyle/>
+                    <a:p>
+                      <a:pPr defTabSz="914400">
+                        <a:lnSpc>
+                          <a:spcPct val="100000"/>
+                        </a:lnSpc>
+                        <a:tabLst>
+                          <a:tab pos="0" algn="l"/>
+                        </a:tabLst>
+                      </a:pPr>
+                      <a:r>
+                        <a:rPr lang="en-US" sz="1200" b="0" u="none" strike="noStrike">
+                          <a:solidFill>
+                            <a:srgbClr val="2C3E50"/>
+                          </a:solidFill>
+                          <a:effectLst/>
+                          <a:uFillTx/>
+                          <a:latin typeface="Calibri"/>
+                          <a:ea typeface="Calibri"/>
+                        </a:rPr>
+                        <a:t>PDS5A/B (cohesion)</a:t>
+                      </a:r>
+                      <a:endParaRPr lang="en-US" sz="1200" b="0" u="none" strike="noStrike">
+                        <a:solidFill>
+                          <a:srgbClr val="000000"/>
+                        </a:solidFill>
+                        <a:effectLst/>
+                        <a:uFillTx/>
+                        <a:latin typeface="Arial"/>
+                      </a:endParaRPr>
+                    </a:p>
+                  </a:txBody>
+                  <a:tcPr anchor="ctr">
+                    <a:lnL w="6480">
+                      <a:solidFill>
+                        <a:srgbClr val="CFCFCF"/>
+                      </a:solidFill>
+                      <a:prstDash val="solid"/>
+                    </a:lnL>
+                    <a:lnR w="6480">
+                      <a:solidFill>
+                        <a:srgbClr val="CFCFCF"/>
+                      </a:solidFill>
+                      <a:prstDash val="solid"/>
+                    </a:lnR>
+                    <a:lnT w="6480">
+                      <a:solidFill>
+                        <a:srgbClr val="CFCFCF"/>
+                      </a:solidFill>
+                      <a:prstDash val="solid"/>
+                    </a:lnT>
+                    <a:lnB w="6480">
+                      <a:solidFill>
+                        <a:srgbClr val="CFCFCF"/>
+                      </a:solidFill>
+                      <a:prstDash val="solid"/>
+                    </a:lnB>
+                    <a:solidFill>
+                      <a:srgbClr val="F0E8F4"/>
+                    </a:solidFill>
+                  </a:tcPr>
+                </a:tc>
+                <a:tc>
+                  <a:txBody>
+                    <a:bodyPr/>
+                    <a:lstStyle/>
+                    <a:p>
+                      <a:pPr defTabSz="914400">
+                        <a:lnSpc>
+                          <a:spcPct val="100000"/>
+                        </a:lnSpc>
+                        <a:tabLst>
+                          <a:tab pos="0" algn="l"/>
+                        </a:tabLst>
+                      </a:pPr>
+                      <a:r>
+                        <a:rPr lang="en-US" sz="1200" b="0" u="none" strike="noStrike">
+                          <a:solidFill>
+                            <a:srgbClr val="2C3E50"/>
+                          </a:solidFill>
+                          <a:effectLst/>
+                          <a:uFillTx/>
+                          <a:latin typeface="Calibri"/>
+                          <a:ea typeface="Calibri"/>
+                        </a:rPr>
+                        <a:t>0.47  (33%)</a:t>
+                      </a:r>
+                      <a:endParaRPr lang="en-US" sz="1200" b="0" u="none" strike="noStrike">
+                        <a:solidFill>
+                          <a:srgbClr val="000000"/>
+                        </a:solidFill>
+                        <a:effectLst/>
+                        <a:uFillTx/>
+                        <a:latin typeface="Arial"/>
+                      </a:endParaRPr>
+                    </a:p>
+                  </a:txBody>
+                  <a:tcPr anchor="ctr">
+                    <a:lnL w="6480">
+                      <a:solidFill>
+                        <a:srgbClr val="CFCFCF"/>
+                      </a:solidFill>
+                      <a:prstDash val="solid"/>
+                    </a:lnL>
+                    <a:lnR w="6480">
+                      <a:solidFill>
+                        <a:srgbClr val="CFCFCF"/>
+                      </a:solidFill>
+                      <a:prstDash val="solid"/>
+                    </a:lnR>
+                    <a:lnT w="6480">
+                      <a:solidFill>
+                        <a:srgbClr val="CFCFCF"/>
+                      </a:solidFill>
+                      <a:prstDash val="solid"/>
+                    </a:lnT>
+                    <a:lnB w="6480">
+                      <a:solidFill>
+                        <a:srgbClr val="CFCFCF"/>
+                      </a:solidFill>
+                      <a:prstDash val="solid"/>
+                    </a:lnB>
+                    <a:solidFill>
+                      <a:srgbClr val="F0E8F4"/>
+                    </a:solidFill>
+                  </a:tcPr>
+                </a:tc>
+                <a:tc>
+                  <a:txBody>
+                    <a:bodyPr/>
+                    <a:lstStyle/>
+                    <a:p>
+                      <a:pPr defTabSz="914400">
+                        <a:lnSpc>
+                          <a:spcPct val="100000"/>
+                        </a:lnSpc>
+                        <a:tabLst>
+                          <a:tab pos="0" algn="l"/>
+                        </a:tabLst>
+                      </a:pPr>
+                      <a:r>
+                        <a:rPr lang="en-US" sz="1200" b="0" i="1" u="none" strike="noStrike" dirty="0">
+                          <a:solidFill>
+                            <a:srgbClr val="2C3E50"/>
+                          </a:solidFill>
+                          <a:effectLst/>
+                          <a:uFillTx/>
+                          <a:latin typeface="Calibri"/>
+                          <a:ea typeface="Calibri"/>
+                        </a:rPr>
+                        <a:t>SLiM / ordered dip in IDR</a:t>
+                      </a:r>
+                      <a:endParaRPr lang="en-US" sz="1200" b="0" u="none" strike="noStrike" dirty="0">
+                        <a:solidFill>
+                          <a:srgbClr val="000000"/>
+                        </a:solidFill>
+                        <a:effectLst/>
+                        <a:uFillTx/>
+                        <a:latin typeface="Arial"/>
+                      </a:endParaRPr>
+                    </a:p>
+                  </a:txBody>
+                  <a:tcPr anchor="ctr">
+                    <a:lnL w="6480">
+                      <a:solidFill>
+                        <a:srgbClr val="CFCFCF"/>
+                      </a:solidFill>
+                      <a:prstDash val="solid"/>
+                    </a:lnL>
+                    <a:lnR w="6480">
+                      <a:solidFill>
+                        <a:srgbClr val="CFCFCF"/>
+                      </a:solidFill>
+                      <a:prstDash val="solid"/>
+                    </a:lnR>
+                    <a:lnT w="6480">
+                      <a:solidFill>
+                        <a:srgbClr val="CFCFCF"/>
+                      </a:solidFill>
+                      <a:prstDash val="solid"/>
+                    </a:lnT>
+                    <a:lnB w="6480">
+                      <a:solidFill>
+                        <a:srgbClr val="CFCFCF"/>
+                      </a:solidFill>
+                      <a:prstDash val="solid"/>
+                    </a:lnB>
+                    <a:solidFill>
+                      <a:srgbClr val="F0E8F4"/>
+                    </a:solidFill>
+                  </a:tcPr>
+                </a:tc>
+                <a:extLst>
+                  <a:ext uri="{0D108BD9-81ED-4DB2-BD59-A6C34878D82A}">
+                    <a16:rowId xmlns:a16="http://schemas.microsoft.com/office/drawing/2014/main" val="10004"/>
+                  </a:ext>
+                </a:extLst>
+              </a:tr>
+              <a:tr h="310680">
+                <a:tc>
+                  <a:txBody>
+                    <a:bodyPr/>
+                    <a:lstStyle/>
+                    <a:p>
+                      <a:pPr defTabSz="914400">
+                        <a:lnSpc>
+                          <a:spcPct val="100000"/>
+                        </a:lnSpc>
+                        <a:tabLst>
+                          <a:tab pos="0" algn="l"/>
+                        </a:tabLst>
+                      </a:pPr>
+                      <a:r>
+                        <a:rPr lang="en-US" sz="1200" b="1" u="none" strike="noStrike">
+                          <a:solidFill>
+                            <a:srgbClr val="2C3E50"/>
+                          </a:solidFill>
+                          <a:effectLst/>
+                          <a:uFillTx/>
+                          <a:latin typeface="Calibri"/>
+                          <a:ea typeface="Calibri"/>
+                        </a:rPr>
+                        <a:t>Ser209 site</a:t>
+                      </a:r>
+                      <a:endParaRPr lang="en-US" sz="1200" b="0" u="none" strike="noStrike">
+                        <a:solidFill>
+                          <a:srgbClr val="000000"/>
+                        </a:solidFill>
+                        <a:effectLst/>
+                        <a:uFillTx/>
+                        <a:latin typeface="Arial"/>
+                      </a:endParaRPr>
+                    </a:p>
+                  </a:txBody>
+                  <a:tcPr anchor="ctr">
+                    <a:lnL w="6480">
+                      <a:solidFill>
+                        <a:srgbClr val="CFCFCF"/>
+                      </a:solidFill>
+                      <a:prstDash val="solid"/>
+                    </a:lnL>
+                    <a:lnR w="6480">
+                      <a:solidFill>
+                        <a:srgbClr val="CFCFCF"/>
+                      </a:solidFill>
+                      <a:prstDash val="solid"/>
+                    </a:lnR>
+                    <a:lnT w="6480">
+                      <a:solidFill>
+                        <a:srgbClr val="CFCFCF"/>
+                      </a:solidFill>
+                      <a:prstDash val="solid"/>
+                    </a:lnT>
+                    <a:lnB w="6480">
+                      <a:solidFill>
+                        <a:srgbClr val="CFCFCF"/>
+                      </a:solidFill>
+                      <a:prstDash val="solid"/>
+                    </a:lnB>
+                    <a:noFill/>
+                  </a:tcPr>
+                </a:tc>
+                <a:tc>
+                  <a:txBody>
+                    <a:bodyPr/>
+                    <a:lstStyle/>
+                    <a:p>
+                      <a:pPr defTabSz="914400">
+                        <a:lnSpc>
+                          <a:spcPct val="100000"/>
+                        </a:lnSpc>
+                        <a:tabLst>
+                          <a:tab pos="0" algn="l"/>
+                        </a:tabLst>
+                      </a:pPr>
+                      <a:r>
+                        <a:rPr lang="en-US" sz="1200" b="0" u="none" strike="noStrike">
+                          <a:solidFill>
+                            <a:srgbClr val="2C3E50"/>
+                          </a:solidFill>
+                          <a:effectLst/>
+                          <a:uFillTx/>
+                          <a:latin typeface="Calibri"/>
+                          <a:ea typeface="Calibri"/>
+                        </a:rPr>
+                        <a:t>199–222</a:t>
+                      </a:r>
+                      <a:endParaRPr lang="en-US" sz="1200" b="0" u="none" strike="noStrike">
+                        <a:solidFill>
+                          <a:srgbClr val="000000"/>
+                        </a:solidFill>
+                        <a:effectLst/>
+                        <a:uFillTx/>
+                        <a:latin typeface="Arial"/>
+                      </a:endParaRPr>
+                    </a:p>
+                  </a:txBody>
+                  <a:tcPr anchor="ctr">
+                    <a:lnL w="6480">
+                      <a:solidFill>
+                        <a:srgbClr val="CFCFCF"/>
+                      </a:solidFill>
+                      <a:prstDash val="solid"/>
+                    </a:lnL>
+                    <a:lnR w="6480">
+                      <a:solidFill>
+                        <a:srgbClr val="CFCFCF"/>
+                      </a:solidFill>
+                      <a:prstDash val="solid"/>
+                    </a:lnR>
+                    <a:lnT w="6480">
+                      <a:solidFill>
+                        <a:srgbClr val="CFCFCF"/>
+                      </a:solidFill>
+                      <a:prstDash val="solid"/>
+                    </a:lnT>
+                    <a:lnB w="6480">
+                      <a:solidFill>
+                        <a:srgbClr val="CFCFCF"/>
+                      </a:solidFill>
+                      <a:prstDash val="solid"/>
+                    </a:lnB>
+                    <a:noFill/>
+                  </a:tcPr>
+                </a:tc>
+                <a:tc>
+                  <a:txBody>
+                    <a:bodyPr/>
+                    <a:lstStyle/>
+                    <a:p>
+                      <a:pPr defTabSz="914400">
+                        <a:lnSpc>
+                          <a:spcPct val="100000"/>
+                        </a:lnSpc>
+                        <a:tabLst>
+                          <a:tab pos="0" algn="l"/>
+                        </a:tabLst>
+                      </a:pPr>
+                      <a:r>
+                        <a:rPr lang="en-US" sz="1200" b="0" u="none" strike="noStrike">
+                          <a:solidFill>
+                            <a:srgbClr val="2C3E50"/>
+                          </a:solidFill>
+                          <a:effectLst/>
+                          <a:uFillTx/>
+                          <a:latin typeface="Calibri"/>
+                          <a:ea typeface="Calibri"/>
+                        </a:rPr>
+                        <a:t>ERK2 (phosphorylation)</a:t>
+                      </a:r>
+                      <a:endParaRPr lang="en-US" sz="1200" b="0" u="none" strike="noStrike">
+                        <a:solidFill>
+                          <a:srgbClr val="000000"/>
+                        </a:solidFill>
+                        <a:effectLst/>
+                        <a:uFillTx/>
+                        <a:latin typeface="Arial"/>
+                      </a:endParaRPr>
+                    </a:p>
+                  </a:txBody>
+                  <a:tcPr anchor="ctr">
+                    <a:lnL w="6480">
+                      <a:solidFill>
+                        <a:srgbClr val="CFCFCF"/>
+                      </a:solidFill>
+                      <a:prstDash val="solid"/>
+                    </a:lnL>
+                    <a:lnR w="6480">
+                      <a:solidFill>
+                        <a:srgbClr val="CFCFCF"/>
+                      </a:solidFill>
+                      <a:prstDash val="solid"/>
+                    </a:lnR>
+                    <a:lnT w="6480">
+                      <a:solidFill>
+                        <a:srgbClr val="CFCFCF"/>
+                      </a:solidFill>
+                      <a:prstDash val="solid"/>
+                    </a:lnT>
+                    <a:lnB w="6480">
+                      <a:solidFill>
+                        <a:srgbClr val="CFCFCF"/>
+                      </a:solidFill>
+                      <a:prstDash val="solid"/>
+                    </a:lnB>
+                    <a:noFill/>
+                  </a:tcPr>
+                </a:tc>
+                <a:tc>
+                  <a:txBody>
+                    <a:bodyPr/>
+                    <a:lstStyle/>
+                    <a:p>
+                      <a:pPr defTabSz="914400">
+                        <a:lnSpc>
+                          <a:spcPct val="100000"/>
+                        </a:lnSpc>
+                        <a:tabLst>
+                          <a:tab pos="0" algn="l"/>
+                        </a:tabLst>
+                      </a:pPr>
+                      <a:r>
+                        <a:rPr lang="en-US" sz="1200" b="0" u="none" strike="noStrike">
+                          <a:solidFill>
+                            <a:srgbClr val="2C3E50"/>
+                          </a:solidFill>
+                          <a:effectLst/>
+                          <a:uFillTx/>
+                          <a:latin typeface="Calibri"/>
+                          <a:ea typeface="Calibri"/>
+                        </a:rPr>
+                        <a:t>0.71  (96%)</a:t>
+                      </a:r>
+                      <a:endParaRPr lang="en-US" sz="1200" b="0" u="none" strike="noStrike">
+                        <a:solidFill>
+                          <a:srgbClr val="000000"/>
+                        </a:solidFill>
+                        <a:effectLst/>
+                        <a:uFillTx/>
+                        <a:latin typeface="Arial"/>
+                      </a:endParaRPr>
+                    </a:p>
+                  </a:txBody>
+                  <a:tcPr anchor="ctr">
+                    <a:lnL w="6480">
+                      <a:solidFill>
+                        <a:srgbClr val="CFCFCF"/>
+                      </a:solidFill>
+                      <a:prstDash val="solid"/>
+                    </a:lnL>
+                    <a:lnR w="6480">
+                      <a:solidFill>
+                        <a:srgbClr val="CFCFCF"/>
+                      </a:solidFill>
+                      <a:prstDash val="solid"/>
+                    </a:lnR>
+                    <a:lnT w="6480">
+                      <a:solidFill>
+                        <a:srgbClr val="CFCFCF"/>
+                      </a:solidFill>
+                      <a:prstDash val="solid"/>
+                    </a:lnT>
+                    <a:lnB w="6480">
+                      <a:solidFill>
+                        <a:srgbClr val="CFCFCF"/>
+                      </a:solidFill>
+                      <a:prstDash val="solid"/>
+                    </a:lnB>
+                    <a:noFill/>
+                  </a:tcPr>
+                </a:tc>
+                <a:tc>
+                  <a:txBody>
+                    <a:bodyPr/>
+                    <a:lstStyle/>
+                    <a:p>
+                      <a:pPr defTabSz="914400">
+                        <a:lnSpc>
+                          <a:spcPct val="100000"/>
+                        </a:lnSpc>
+                        <a:tabLst>
+                          <a:tab pos="0" algn="l"/>
+                        </a:tabLst>
+                      </a:pPr>
+                      <a:r>
+                        <a:rPr lang="en-US" sz="1200" b="0" i="1" u="none" strike="noStrike">
+                          <a:solidFill>
+                            <a:srgbClr val="2C3E50"/>
+                          </a:solidFill>
+                          <a:effectLst/>
+                          <a:uFillTx/>
+                          <a:latin typeface="Calibri"/>
+                          <a:ea typeface="Calibri"/>
+                        </a:rPr>
+                        <a:t>disordered</a:t>
+                      </a:r>
+                      <a:endParaRPr lang="en-US" sz="1200" b="0" u="none" strike="noStrike">
+                        <a:solidFill>
+                          <a:srgbClr val="000000"/>
+                        </a:solidFill>
+                        <a:effectLst/>
+                        <a:uFillTx/>
+                        <a:latin typeface="Arial"/>
+                      </a:endParaRPr>
+                    </a:p>
+                  </a:txBody>
+                  <a:tcPr anchor="ctr">
+                    <a:lnL w="6480">
+                      <a:solidFill>
+                        <a:srgbClr val="CFCFCF"/>
+                      </a:solidFill>
+                      <a:prstDash val="solid"/>
+                    </a:lnL>
+                    <a:lnR w="6480">
+                      <a:solidFill>
+                        <a:srgbClr val="CFCFCF"/>
+                      </a:solidFill>
+                      <a:prstDash val="solid"/>
+                    </a:lnR>
+                    <a:lnT w="6480">
+                      <a:solidFill>
+                        <a:srgbClr val="CFCFCF"/>
+                      </a:solidFill>
+                      <a:prstDash val="solid"/>
+                    </a:lnT>
+                    <a:lnB w="6480">
+                      <a:solidFill>
+                        <a:srgbClr val="CFCFCF"/>
+                      </a:solidFill>
+                      <a:prstDash val="solid"/>
+                    </a:lnB>
+                    <a:noFill/>
+                  </a:tcPr>
+                </a:tc>
+                <a:extLst>
+                  <a:ext uri="{0D108BD9-81ED-4DB2-BD59-A6C34878D82A}">
+                    <a16:rowId xmlns:a16="http://schemas.microsoft.com/office/drawing/2014/main" val="10005"/>
+                  </a:ext>
+                </a:extLst>
+              </a:tr>
+              <a:tr h="310680">
+                <a:tc>
+                  <a:txBody>
+                    <a:bodyPr/>
+                    <a:lstStyle/>
+                    <a:p>
+                      <a:pPr defTabSz="914400">
+                        <a:lnSpc>
+                          <a:spcPct val="100000"/>
+                        </a:lnSpc>
+                        <a:tabLst>
+                          <a:tab pos="0" algn="l"/>
+                        </a:tabLst>
+                      </a:pPr>
+                      <a:r>
+                        <a:rPr lang="en-US" sz="1200" b="1" u="none" strike="noStrike">
+                          <a:solidFill>
+                            <a:srgbClr val="2C3E50"/>
+                          </a:solidFill>
+                          <a:effectLst/>
+                          <a:uFillTx/>
+                          <a:latin typeface="Calibri"/>
+                          <a:ea typeface="Calibri"/>
+                        </a:rPr>
+                        <a:t>Sororin domain</a:t>
+                      </a:r>
+                      <a:endParaRPr lang="en-US" sz="1200" b="0" u="none" strike="noStrike">
+                        <a:solidFill>
+                          <a:srgbClr val="000000"/>
+                        </a:solidFill>
+                        <a:effectLst/>
+                        <a:uFillTx/>
+                        <a:latin typeface="Arial"/>
+                      </a:endParaRPr>
+                    </a:p>
+                  </a:txBody>
+                  <a:tcPr anchor="ctr">
+                    <a:lnL w="6480">
+                      <a:solidFill>
+                        <a:srgbClr val="CFCFCF"/>
+                      </a:solidFill>
+                      <a:prstDash val="solid"/>
+                    </a:lnL>
+                    <a:lnR w="6480">
+                      <a:solidFill>
+                        <a:srgbClr val="CFCFCF"/>
+                      </a:solidFill>
+                      <a:prstDash val="solid"/>
+                    </a:lnR>
+                    <a:lnT w="6480">
+                      <a:solidFill>
+                        <a:srgbClr val="CFCFCF"/>
+                      </a:solidFill>
+                      <a:prstDash val="solid"/>
+                    </a:lnT>
+                    <a:lnB w="6480">
+                      <a:solidFill>
+                        <a:srgbClr val="CFCFCF"/>
+                      </a:solidFill>
+                      <a:prstDash val="solid"/>
+                    </a:lnB>
+                    <a:solidFill>
+                      <a:srgbClr val="DCE7F3"/>
+                    </a:solidFill>
+                  </a:tcPr>
+                </a:tc>
+                <a:tc>
+                  <a:txBody>
+                    <a:bodyPr/>
+                    <a:lstStyle/>
+                    <a:p>
+                      <a:pPr defTabSz="914400">
+                        <a:lnSpc>
+                          <a:spcPct val="100000"/>
+                        </a:lnSpc>
+                        <a:tabLst>
+                          <a:tab pos="0" algn="l"/>
+                        </a:tabLst>
+                      </a:pPr>
+                      <a:r>
+                        <a:rPr lang="en-US" sz="1200" b="0" u="none" strike="noStrike">
+                          <a:solidFill>
+                            <a:srgbClr val="2C3E50"/>
+                          </a:solidFill>
+                          <a:effectLst/>
+                          <a:uFillTx/>
+                          <a:latin typeface="Calibri"/>
+                          <a:ea typeface="Calibri"/>
+                        </a:rPr>
+                        <a:t>230–252</a:t>
+                      </a:r>
+                      <a:endParaRPr lang="en-US" sz="1200" b="0" u="none" strike="noStrike">
+                        <a:solidFill>
+                          <a:srgbClr val="000000"/>
+                        </a:solidFill>
+                        <a:effectLst/>
+                        <a:uFillTx/>
+                        <a:latin typeface="Arial"/>
+                      </a:endParaRPr>
+                    </a:p>
+                  </a:txBody>
+                  <a:tcPr anchor="ctr">
+                    <a:lnL w="6480">
+                      <a:solidFill>
+                        <a:srgbClr val="CFCFCF"/>
+                      </a:solidFill>
+                      <a:prstDash val="solid"/>
+                    </a:lnL>
+                    <a:lnR w="6480">
+                      <a:solidFill>
+                        <a:srgbClr val="CFCFCF"/>
+                      </a:solidFill>
+                      <a:prstDash val="solid"/>
+                    </a:lnR>
+                    <a:lnT w="6480">
+                      <a:solidFill>
+                        <a:srgbClr val="CFCFCF"/>
+                      </a:solidFill>
+                      <a:prstDash val="solid"/>
+                    </a:lnT>
+                    <a:lnB w="6480">
+                      <a:solidFill>
+                        <a:srgbClr val="CFCFCF"/>
+                      </a:solidFill>
+                      <a:prstDash val="solid"/>
+                    </a:lnB>
+                    <a:solidFill>
+                      <a:srgbClr val="DCE7F3"/>
+                    </a:solidFill>
+                  </a:tcPr>
+                </a:tc>
+                <a:tc>
+                  <a:txBody>
+                    <a:bodyPr/>
+                    <a:lstStyle/>
+                    <a:p>
+                      <a:pPr defTabSz="914400">
+                        <a:lnSpc>
+                          <a:spcPct val="100000"/>
+                        </a:lnSpc>
+                        <a:tabLst>
+                          <a:tab pos="0" algn="l"/>
+                        </a:tabLst>
+                      </a:pPr>
+                      <a:r>
+                        <a:rPr lang="en-US" sz="1200" b="0" u="none" strike="noStrike">
+                          <a:solidFill>
+                            <a:srgbClr val="2C3E50"/>
+                          </a:solidFill>
+                          <a:effectLst/>
+                          <a:uFillTx/>
+                          <a:latin typeface="Calibri"/>
+                          <a:ea typeface="Calibri"/>
+                        </a:rPr>
+                        <a:t>cohesin core association</a:t>
+                      </a:r>
+                      <a:endParaRPr lang="en-US" sz="1200" b="0" u="none" strike="noStrike">
+                        <a:solidFill>
+                          <a:srgbClr val="000000"/>
+                        </a:solidFill>
+                        <a:effectLst/>
+                        <a:uFillTx/>
+                        <a:latin typeface="Arial"/>
+                      </a:endParaRPr>
+                    </a:p>
+                  </a:txBody>
+                  <a:tcPr anchor="ctr">
+                    <a:lnL w="6480">
+                      <a:solidFill>
+                        <a:srgbClr val="CFCFCF"/>
+                      </a:solidFill>
+                      <a:prstDash val="solid"/>
+                    </a:lnL>
+                    <a:lnR w="6480">
+                      <a:solidFill>
+                        <a:srgbClr val="CFCFCF"/>
+                      </a:solidFill>
+                      <a:prstDash val="solid"/>
+                    </a:lnR>
+                    <a:lnT w="6480">
+                      <a:solidFill>
+                        <a:srgbClr val="CFCFCF"/>
+                      </a:solidFill>
+                      <a:prstDash val="solid"/>
+                    </a:lnT>
+                    <a:lnB w="6480">
+                      <a:solidFill>
+                        <a:srgbClr val="CFCFCF"/>
+                      </a:solidFill>
+                      <a:prstDash val="solid"/>
+                    </a:lnB>
+                    <a:solidFill>
+                      <a:srgbClr val="DCE7F3"/>
+                    </a:solidFill>
+                  </a:tcPr>
+                </a:tc>
+                <a:tc>
+                  <a:txBody>
+                    <a:bodyPr/>
+                    <a:lstStyle/>
+                    <a:p>
+                      <a:pPr defTabSz="914400">
+                        <a:lnSpc>
+                          <a:spcPct val="100000"/>
+                        </a:lnSpc>
+                        <a:tabLst>
+                          <a:tab pos="0" algn="l"/>
+                        </a:tabLst>
+                      </a:pPr>
+                      <a:r>
+                        <a:rPr lang="en-US" sz="1200" b="0" u="none" strike="noStrike">
+                          <a:solidFill>
+                            <a:srgbClr val="2C3E50"/>
+                          </a:solidFill>
+                          <a:effectLst/>
+                          <a:uFillTx/>
+                          <a:latin typeface="Calibri"/>
+                          <a:ea typeface="Calibri"/>
+                        </a:rPr>
+                        <a:t>0.31  (0%)</a:t>
+                      </a:r>
+                      <a:endParaRPr lang="en-US" sz="1200" b="0" u="none" strike="noStrike">
+                        <a:solidFill>
+                          <a:srgbClr val="000000"/>
+                        </a:solidFill>
+                        <a:effectLst/>
+                        <a:uFillTx/>
+                        <a:latin typeface="Arial"/>
+                      </a:endParaRPr>
+                    </a:p>
+                  </a:txBody>
+                  <a:tcPr anchor="ctr">
+                    <a:lnL w="6480">
+                      <a:solidFill>
+                        <a:srgbClr val="CFCFCF"/>
+                      </a:solidFill>
+                      <a:prstDash val="solid"/>
+                    </a:lnL>
+                    <a:lnR w="6480">
+                      <a:solidFill>
+                        <a:srgbClr val="CFCFCF"/>
+                      </a:solidFill>
+                      <a:prstDash val="solid"/>
+                    </a:lnR>
+                    <a:lnT w="6480">
+                      <a:solidFill>
+                        <a:srgbClr val="CFCFCF"/>
+                      </a:solidFill>
+                      <a:prstDash val="solid"/>
+                    </a:lnT>
+                    <a:lnB w="6480">
+                      <a:solidFill>
+                        <a:srgbClr val="CFCFCF"/>
+                      </a:solidFill>
+                      <a:prstDash val="solid"/>
+                    </a:lnB>
+                    <a:solidFill>
+                      <a:srgbClr val="DCE7F3"/>
+                    </a:solidFill>
+                  </a:tcPr>
+                </a:tc>
+                <a:tc>
+                  <a:txBody>
+                    <a:bodyPr/>
+                    <a:lstStyle/>
+                    <a:p>
+                      <a:pPr defTabSz="914400">
+                        <a:lnSpc>
+                          <a:spcPct val="100000"/>
+                        </a:lnSpc>
+                        <a:tabLst>
+                          <a:tab pos="0" algn="l"/>
+                        </a:tabLst>
+                      </a:pPr>
+                      <a:r>
+                        <a:rPr lang="en-US" sz="1200" b="0" i="1" u="none" strike="noStrike" dirty="0">
+                          <a:solidFill>
+                            <a:srgbClr val="2C3E50"/>
+                          </a:solidFill>
+                          <a:effectLst/>
+                          <a:uFillTx/>
+                          <a:latin typeface="Calibri"/>
+                          <a:ea typeface="Calibri"/>
+                        </a:rPr>
+                        <a:t>folded</a:t>
+                      </a:r>
+                      <a:endParaRPr lang="en-US" sz="1200" b="0" u="none" strike="noStrike" dirty="0">
+                        <a:solidFill>
+                          <a:srgbClr val="000000"/>
+                        </a:solidFill>
+                        <a:effectLst/>
+                        <a:uFillTx/>
+                        <a:latin typeface="Arial"/>
+                      </a:endParaRPr>
+                    </a:p>
+                  </a:txBody>
+                  <a:tcPr anchor="ctr">
+                    <a:lnL w="6480">
+                      <a:solidFill>
+                        <a:srgbClr val="CFCFCF"/>
+                      </a:solidFill>
+                      <a:prstDash val="solid"/>
+                    </a:lnL>
+                    <a:lnR w="6480">
+                      <a:solidFill>
+                        <a:srgbClr val="CFCFCF"/>
+                      </a:solidFill>
+                      <a:prstDash val="solid"/>
+                    </a:lnR>
+                    <a:lnT w="6480">
+                      <a:solidFill>
+                        <a:srgbClr val="CFCFCF"/>
+                      </a:solidFill>
+                      <a:prstDash val="solid"/>
+                    </a:lnT>
+                    <a:lnB w="6480">
+                      <a:solidFill>
+                        <a:srgbClr val="CFCFCF"/>
+                      </a:solidFill>
+                      <a:prstDash val="solid"/>
+                    </a:lnB>
+                    <a:solidFill>
+                      <a:srgbClr val="DCE7F3"/>
+                    </a:solidFill>
+                  </a:tcPr>
+                </a:tc>
+                <a:extLst>
+                  <a:ext uri="{0D108BD9-81ED-4DB2-BD59-A6C34878D82A}">
+                    <a16:rowId xmlns:a16="http://schemas.microsoft.com/office/drawing/2014/main" val="10006"/>
+                  </a:ext>
+                </a:extLst>
+              </a:tr>
+            </a:tbl>
+          </a:graphicData>
+        </a:graphic>
+      </p:graphicFrame>
+      <p:sp>
+        <p:nvSpPr>
+          <p:cNvPr id="11" name="Text 2"/>
+          <p:cNvSpPr/>
+          <p:nvPr/>
+        </p:nvSpPr>
+        <p:spPr>
+          <a:xfrm>
+            <a:off x="502200" y="3337893"/>
+            <a:ext cx="11155320" cy="707431"/>
+          </a:xfrm>
+          <a:prstGeom prst="rect">
+            <a:avLst/>
+          </a:prstGeom>
+          <a:noFill/>
+          <a:ln w="0">
+            <a:noFill/>
+          </a:ln>
+        </p:spPr>
+        <p:style>
+          <a:lnRef idx="0">
+            <a:scrgbClr r="0" g="0" b="0"/>
+          </a:lnRef>
+          <a:fillRef idx="0">
+            <a:scrgbClr r="0" g="0" b="0"/>
+          </a:fillRef>
+          <a:effectRef idx="0">
+            <a:scrgbClr r="0" g="0" b="0"/>
+          </a:effectRef>
+          <a:fontRef idx="minor"/>
+        </p:style>
+        <p:txBody>
+          <a:bodyPr lIns="90000" tIns="45000" rIns="90000" bIns="45000" anchor="t">
+            <a:noAutofit/>
+          </a:bodyPr>
+          <a:lstStyle/>
+          <a:p>
+            <a:pPr defTabSz="914400">
+              <a:lnSpc>
+                <a:spcPct val="100000"/>
+              </a:lnSpc>
+              <a:tabLst>
+                <a:tab pos="0" algn="l"/>
+              </a:tabLst>
+            </a:pPr>
+            <a:r>
+              <a:rPr lang="en-US" sz="1250" b="0" u="none" strike="noStrike" dirty="0">
+                <a:solidFill>
+                  <a:srgbClr val="2C3E50"/>
+                </a:solidFill>
+                <a:effectLst/>
+                <a:uFillTx/>
+                <a:latin typeface="Calibri"/>
+                <a:ea typeface="Calibri"/>
+              </a:rPr>
+              <a:t>Only the C-terminal Sororin domain is folded (0.31, 0% disordered) — the </a:t>
+            </a:r>
+            <a:r>
+              <a:rPr lang="en-US" sz="1250" dirty="0">
+                <a:solidFill>
+                  <a:srgbClr val="2C3E50"/>
+                </a:solidFill>
+                <a:latin typeface="Calibri"/>
+                <a:ea typeface="Calibri"/>
+              </a:rPr>
+              <a:t>C</a:t>
+            </a:r>
+            <a:r>
+              <a:rPr lang="en-US" sz="1250" b="0" u="none" strike="noStrike" dirty="0">
+                <a:solidFill>
+                  <a:srgbClr val="2C3E50"/>
+                </a:solidFill>
+                <a:effectLst/>
+                <a:uFillTx/>
+                <a:latin typeface="Calibri"/>
+                <a:ea typeface="Calibri"/>
+              </a:rPr>
+              <a:t>ohesin anchor. Every other determinant sits in disorder.  </a:t>
+            </a:r>
+            <a:endParaRPr lang="en-US" sz="1250" b="0" u="none" strike="noStrike" dirty="0">
+              <a:solidFill>
+                <a:srgbClr val="000000"/>
+              </a:solidFill>
+              <a:effectLst/>
+              <a:uFillTx/>
+              <a:latin typeface="Arial"/>
+            </a:endParaRPr>
+          </a:p>
+          <a:p>
+            <a:pPr defTabSz="914400">
+              <a:lnSpc>
+                <a:spcPct val="100000"/>
+              </a:lnSpc>
+              <a:tabLst>
+                <a:tab pos="0" algn="l"/>
+              </a:tabLst>
+            </a:pPr>
+            <a:r>
+              <a:rPr lang="en-US" sz="1250" b="0" u="none" strike="noStrike" dirty="0">
+                <a:solidFill>
+                  <a:srgbClr val="2C3E50"/>
+                </a:solidFill>
+                <a:effectLst/>
+                <a:uFillTx/>
+                <a:latin typeface="Calibri"/>
+                <a:ea typeface="Calibri"/>
+              </a:rPr>
+              <a:t>The apparent exception — the FGF motif (0.47) — is a short-ordered</a:t>
+            </a:r>
+            <a:r>
+              <a:rPr lang="en-US" sz="1250" b="1" u="none" strike="noStrike" dirty="0">
+                <a:solidFill>
+                  <a:srgbClr val="762A83"/>
+                </a:solidFill>
+                <a:effectLst/>
+                <a:uFillTx/>
+                <a:latin typeface="Calibri"/>
+                <a:ea typeface="Calibri"/>
+              </a:rPr>
+              <a:t> dip inside disorder</a:t>
+            </a:r>
+            <a:r>
+              <a:rPr lang="en-US" sz="1250" b="0" u="none" strike="noStrike" dirty="0">
+                <a:solidFill>
+                  <a:srgbClr val="2C3E50"/>
+                </a:solidFill>
+                <a:effectLst/>
+                <a:uFillTx/>
+                <a:latin typeface="Calibri"/>
+                <a:ea typeface="Calibri"/>
+              </a:rPr>
+              <a:t>: the classic </a:t>
+            </a:r>
+            <a:r>
+              <a:rPr lang="en-US" sz="1250" b="0" u="none" strike="noStrike" dirty="0">
+                <a:solidFill>
+                  <a:srgbClr val="00B050"/>
+                </a:solidFill>
+                <a:effectLst/>
+                <a:uFillTx/>
+                <a:latin typeface="Calibri"/>
+                <a:ea typeface="Calibri"/>
+              </a:rPr>
+              <a:t>S</a:t>
+            </a:r>
+            <a:r>
+              <a:rPr lang="en-US" sz="1250" b="0" u="none" strike="noStrike" dirty="0">
+                <a:solidFill>
+                  <a:srgbClr val="2C3E50"/>
+                </a:solidFill>
+                <a:effectLst/>
+                <a:uFillTx/>
+                <a:latin typeface="Calibri"/>
+                <a:ea typeface="Calibri"/>
+              </a:rPr>
+              <a:t>hort-</a:t>
+            </a:r>
+            <a:r>
+              <a:rPr lang="en-US" sz="1250" b="0" u="none" strike="noStrike" dirty="0">
+                <a:solidFill>
+                  <a:srgbClr val="00B050"/>
+                </a:solidFill>
+                <a:effectLst/>
+                <a:uFillTx/>
+                <a:latin typeface="Calibri"/>
+                <a:ea typeface="Calibri"/>
+              </a:rPr>
+              <a:t>Li</a:t>
+            </a:r>
+            <a:r>
+              <a:rPr lang="en-US" sz="1250" b="0" u="none" strike="noStrike" dirty="0">
+                <a:solidFill>
+                  <a:srgbClr val="2C3E50"/>
+                </a:solidFill>
+                <a:effectLst/>
+                <a:uFillTx/>
+                <a:latin typeface="Calibri"/>
+                <a:ea typeface="Calibri"/>
+              </a:rPr>
+              <a:t>near-</a:t>
+            </a:r>
+            <a:r>
+              <a:rPr lang="en-US" sz="1250" b="0" u="none" strike="noStrike" dirty="0">
+                <a:solidFill>
+                  <a:srgbClr val="00B050"/>
+                </a:solidFill>
+                <a:effectLst/>
+                <a:uFillTx/>
+                <a:latin typeface="Calibri"/>
+                <a:ea typeface="Calibri"/>
+              </a:rPr>
+              <a:t>M</a:t>
+            </a:r>
+            <a:r>
+              <a:rPr lang="en-US" sz="1250" b="0" u="none" strike="noStrike" dirty="0">
+                <a:solidFill>
+                  <a:srgbClr val="2C3E50"/>
+                </a:solidFill>
+                <a:effectLst/>
+                <a:uFillTx/>
+                <a:latin typeface="Calibri"/>
+                <a:ea typeface="Calibri"/>
+              </a:rPr>
+              <a:t>otif (</a:t>
+            </a:r>
+            <a:r>
+              <a:rPr lang="en-US" sz="1250" b="0" u="none" strike="noStrike" dirty="0">
+                <a:solidFill>
+                  <a:srgbClr val="00B050"/>
+                </a:solidFill>
+                <a:effectLst/>
+                <a:uFillTx/>
+                <a:latin typeface="Calibri"/>
+                <a:ea typeface="Calibri"/>
+              </a:rPr>
+              <a:t>SLiM</a:t>
+            </a:r>
+            <a:r>
+              <a:rPr lang="en-US" sz="1250" b="0" u="none" strike="noStrike" dirty="0">
+                <a:solidFill>
+                  <a:srgbClr val="2C3E50"/>
+                </a:solidFill>
+                <a:effectLst/>
+                <a:uFillTx/>
+                <a:latin typeface="Calibri"/>
+                <a:ea typeface="Calibri"/>
+              </a:rPr>
+              <a:t>) signature — it becomes structured locally only to grab PDS5, which </a:t>
+            </a:r>
+            <a:r>
+              <a:rPr lang="en-US" sz="1250" b="1" i="1" u="none" strike="noStrike" dirty="0">
+                <a:solidFill>
+                  <a:srgbClr val="2C3E50"/>
+                </a:solidFill>
+                <a:effectLst/>
+                <a:uFillTx/>
+                <a:latin typeface="Calibri"/>
+                <a:ea typeface="Calibri"/>
+              </a:rPr>
+              <a:t>supports</a:t>
+            </a:r>
+            <a:r>
+              <a:rPr lang="en-US" sz="1250" b="0" u="none" strike="noStrike" dirty="0">
+                <a:solidFill>
+                  <a:srgbClr val="2C3E50"/>
+                </a:solidFill>
+                <a:effectLst/>
+                <a:uFillTx/>
+                <a:latin typeface="Calibri"/>
+                <a:ea typeface="Calibri"/>
+              </a:rPr>
+              <a:t> the fuzzy-hub picture rather than contradicting it.</a:t>
+            </a:r>
+            <a:endParaRPr lang="en-US" sz="1250" b="0" u="none" strike="noStrike" dirty="0">
+              <a:solidFill>
+                <a:srgbClr val="000000"/>
+              </a:solidFill>
+              <a:effectLst/>
+              <a:uFillTx/>
+              <a:latin typeface="Arial"/>
+            </a:endParaRPr>
+          </a:p>
+        </p:txBody>
+      </p:sp>
+      <p:sp>
+        <p:nvSpPr>
+          <p:cNvPr id="12" name="Text 3"/>
+          <p:cNvSpPr/>
+          <p:nvPr/>
+        </p:nvSpPr>
+        <p:spPr>
+          <a:xfrm>
+            <a:off x="516752" y="4216825"/>
+            <a:ext cx="11155320" cy="548280"/>
+          </a:xfrm>
+          <a:prstGeom prst="roundRect">
+            <a:avLst>
+              <a:gd name="adj" fmla="val 8333"/>
+            </a:avLst>
+          </a:prstGeom>
+          <a:solidFill>
+            <a:srgbClr val="F7F7F7"/>
+          </a:solidFill>
+          <a:ln w="9525">
+            <a:solidFill>
+              <a:srgbClr val="5A6B7B"/>
+            </a:solidFill>
+            <a:round/>
+          </a:ln>
+        </p:spPr>
+        <p:style>
+          <a:lnRef idx="0">
+            <a:scrgbClr r="0" g="0" b="0"/>
+          </a:lnRef>
+          <a:fillRef idx="0">
+            <a:scrgbClr r="0" g="0" b="0"/>
+          </a:fillRef>
+          <a:effectRef idx="0">
+            <a:scrgbClr r="0" g="0" b="0"/>
+          </a:effectRef>
+          <a:fontRef idx="minor"/>
+        </p:style>
+        <p:txBody>
+          <a:bodyPr lIns="63360" tIns="63360" rIns="63360" bIns="63360" anchor="ctr">
+            <a:noAutofit/>
+          </a:bodyPr>
+          <a:lstStyle/>
+          <a:p>
+            <a:pPr algn="ctr">
+              <a:tabLst>
+                <a:tab pos="0" algn="l"/>
+              </a:tabLst>
+            </a:pPr>
+            <a:r>
+              <a:rPr lang="en-US" sz="1400" b="0" u="none" strike="noStrike" dirty="0">
+                <a:solidFill>
+                  <a:srgbClr val="2C3E50"/>
+                </a:solidFill>
+                <a:effectLst/>
+                <a:uFillTx/>
+                <a:latin typeface="Calibri"/>
+              </a:rPr>
+              <a:t>→  </a:t>
+            </a:r>
+            <a:r>
+              <a:rPr lang="en-US" sz="1400" dirty="0"/>
+              <a:t>Sororin engages multiple partners through short linear motifs (SLiMs) embedded within intrinsically disordered regions </a:t>
+            </a:r>
+            <a:r>
+              <a:rPr lang="en-US" sz="1400" b="0" u="none" strike="noStrike" dirty="0">
+                <a:solidFill>
+                  <a:srgbClr val="2C3E50"/>
+                </a:solidFill>
+                <a:effectLst/>
+                <a:uFillTx/>
+                <a:latin typeface="Calibri"/>
+              </a:rPr>
+              <a:t>=  </a:t>
+            </a:r>
+            <a:r>
+              <a:rPr lang="en-US" sz="1400" b="1" u="none" strike="noStrike" dirty="0">
+                <a:solidFill>
+                  <a:srgbClr val="B9770E"/>
+                </a:solidFill>
+                <a:effectLst/>
+                <a:uFillTx/>
+                <a:latin typeface="Calibri"/>
+              </a:rPr>
+              <a:t>a fuzzy interaction hub.</a:t>
+            </a:r>
+            <a:endParaRPr lang="en-US" sz="1400" b="0" u="none" strike="noStrike" dirty="0">
+              <a:solidFill>
+                <a:srgbClr val="000000"/>
+              </a:solidFill>
+              <a:effectLst/>
+              <a:uFillTx/>
+              <a:latin typeface="Arial"/>
+            </a:endParaRPr>
+          </a:p>
+        </p:txBody>
+      </p:sp>
+    </p:spTree>
+  </p:cSld>
+  <p:clrMapOvr>
+    <a:masterClrMapping/>
+  </p:clrMapOvr>
+  <p:timing>
+    <p:tnLst>
+      <p:par>
+        <p:cTn id="1" dur="indefinite" restart="never" nodeType="tmRoot">
+          <p:childTnLst>
+            <p:seq concurrent="1" nextAc="seek">
+              <p:cTn id="2" dur="indefinite" nodeType="mainSeq">
+                <p:childTnLst>
+                  <p:par>
+                    <p:cTn id="3" fill="hold">
+                      <p:stCondLst>
+                        <p:cond delay="indefinite"/>
+                      </p:stCondLst>
+                      <p:childTnLst>
+                        <p:par>
+                          <p:cTn id="4" fill="hold">
+                            <p:stCondLst>
+                              <p:cond delay="0"/>
+                            </p:stCondLst>
+                            <p:childTnLst>
+                              <p:par>
+                                <p:cTn id="5" presetID="22" presetClass="entr" presetSubtype="1" fill="hold" nodeType="clickEffect">
+                                  <p:stCondLst>
+                                    <p:cond delay="0"/>
+                                  </p:stCondLst>
+                                  <p:childTnLst>
+                                    <p:set>
+                                      <p:cBhvr>
+                                        <p:cTn id="6" dur="1" fill="hold">
+                                          <p:stCondLst>
+                                            <p:cond delay="0"/>
+                                          </p:stCondLst>
+                                        </p:cTn>
+                                        <p:tgtEl>
+                                          <p:spTgt spid="10"/>
+                                        </p:tgtEl>
+                                        <p:attrNameLst>
+                                          <p:attrName>style.visibility</p:attrName>
+                                        </p:attrNameLst>
+                                      </p:cBhvr>
+                                      <p:to>
+                                        <p:strVal val="visible"/>
+                                      </p:to>
+                                    </p:set>
+                                    <p:animEffect transition="in" filter="wipe(up)">
+                                      <p:cBhvr>
+                                        <p:cTn id="7" dur="500"/>
+                                        <p:tgtEl>
+                                          <p:spTgt spid="10"/>
+                                        </p:tgtEl>
+                                      </p:cBhvr>
+                                    </p:animEffect>
+                                  </p:childTnLst>
+                                </p:cTn>
+                              </p:par>
+                            </p:childTnLst>
+                          </p:cTn>
+                        </p:par>
+                      </p:childTnLst>
+                    </p:cTn>
+                  </p:par>
+                  <p:par>
+                    <p:cTn id="8" fill="hold">
+                      <p:stCondLst>
+                        <p:cond delay="indefinite"/>
+                      </p:stCondLst>
+                      <p:childTnLst>
+                        <p:par>
+                          <p:cTn id="9" fill="hold">
+                            <p:stCondLst>
+                              <p:cond delay="0"/>
+                            </p:stCondLst>
+                            <p:childTnLst>
+                              <p:par>
+                                <p:cTn id="10" presetID="42" presetClass="entr" presetSubtype="0" fill="hold" grpId="0" nodeType="clickEffect">
+                                  <p:stCondLst>
+                                    <p:cond delay="0"/>
+                                  </p:stCondLst>
+                                  <p:childTnLst>
+                                    <p:set>
+                                      <p:cBhvr>
+                                        <p:cTn id="11" dur="1" fill="hold">
+                                          <p:stCondLst>
+                                            <p:cond delay="0"/>
+                                          </p:stCondLst>
+                                        </p:cTn>
+                                        <p:tgtEl>
+                                          <p:spTgt spid="11"/>
+                                        </p:tgtEl>
+                                        <p:attrNameLst>
+                                          <p:attrName>style.visibility</p:attrName>
+                                        </p:attrNameLst>
+                                      </p:cBhvr>
+                                      <p:to>
+                                        <p:strVal val="visible"/>
+                                      </p:to>
+                                    </p:set>
+                                    <p:animEffect transition="in" filter="fade">
+                                      <p:cBhvr>
+                                        <p:cTn id="12" dur="1000"/>
+                                        <p:tgtEl>
+                                          <p:spTgt spid="11"/>
+                                        </p:tgtEl>
+                                      </p:cBhvr>
+                                    </p:animEffect>
+                                    <p:anim calcmode="lin" valueType="num">
+                                      <p:cBhvr>
+                                        <p:cTn id="13" dur="1000" fill="hold"/>
+                                        <p:tgtEl>
+                                          <p:spTgt spid="11"/>
+                                        </p:tgtEl>
+                                        <p:attrNameLst>
+                                          <p:attrName>ppt_x</p:attrName>
+                                        </p:attrNameLst>
+                                      </p:cBhvr>
+                                      <p:tavLst>
+                                        <p:tav tm="0">
+                                          <p:val>
+                                            <p:strVal val="#ppt_x"/>
+                                          </p:val>
+                                        </p:tav>
+                                        <p:tav tm="100000">
+                                          <p:val>
+                                            <p:strVal val="#ppt_x"/>
+                                          </p:val>
+                                        </p:tav>
+                                      </p:tavLst>
+                                    </p:anim>
+                                    <p:anim calcmode="lin" valueType="num">
+                                      <p:cBhvr>
+                                        <p:cTn id="14" dur="1000" fill="hold"/>
+                                        <p:tgtEl>
+                                          <p:spTgt spid="11"/>
+                                        </p:tgtEl>
+                                        <p:attrNameLst>
+                                          <p:attrName>ppt_y</p:attrName>
+                                        </p:attrNameLst>
+                                      </p:cBhvr>
+                                      <p:tavLst>
+                                        <p:tav tm="0">
+                                          <p:val>
+                                            <p:strVal val="#ppt_y+.1"/>
+                                          </p:val>
+                                        </p:tav>
+                                        <p:tav tm="100000">
+                                          <p:val>
+                                            <p:strVal val="#ppt_y"/>
+                                          </p:val>
+                                        </p:tav>
+                                      </p:tavLst>
+                                    </p:anim>
+                                  </p:childTnLst>
+                                </p:cTn>
+                              </p:par>
+                            </p:childTnLst>
+                          </p:cTn>
+                        </p:par>
+                      </p:childTnLst>
+                    </p:cTn>
+                  </p:par>
+                  <p:par>
+                    <p:cTn id="15" fill="hold">
+                      <p:stCondLst>
+                        <p:cond delay="indefinite"/>
+                      </p:stCondLst>
+                      <p:childTnLst>
+                        <p:par>
+                          <p:cTn id="16" fill="hold">
+                            <p:stCondLst>
+                              <p:cond delay="0"/>
+                            </p:stCondLst>
+                            <p:childTnLst>
+                              <p:par>
+                                <p:cTn id="17" presetID="10" presetClass="entr" presetSubtype="0" fill="hold" grpId="0" nodeType="clickEffect">
+                                  <p:stCondLst>
+                                    <p:cond delay="0"/>
+                                  </p:stCondLst>
+                                  <p:childTnLst>
+                                    <p:set>
+                                      <p:cBhvr>
+                                        <p:cTn id="18" dur="1" fill="hold">
+                                          <p:stCondLst>
+                                            <p:cond delay="0"/>
+                                          </p:stCondLst>
+                                        </p:cTn>
+                                        <p:tgtEl>
+                                          <p:spTgt spid="12"/>
+                                        </p:tgtEl>
+                                        <p:attrNameLst>
+                                          <p:attrName>style.visibility</p:attrName>
+                                        </p:attrNameLst>
+                                      </p:cBhvr>
+                                      <p:to>
+                                        <p:strVal val="visible"/>
+                                      </p:to>
+                                    </p:set>
+                                    <p:animEffect transition="in" filter="fade">
+                                      <p:cBhvr>
+                                        <p:cTn id="19" dur="500"/>
+                                        <p:tgtEl>
+                                          <p:spTgt spid="12"/>
+                                        </p:tgtEl>
+                                      </p:cBhvr>
+                                    </p:animEffect>
+                                  </p:childTnLst>
+                                </p:cTn>
+                              </p:par>
+                            </p:childTnLst>
+                          </p:cTn>
+                        </p:par>
+                      </p:childTnLst>
+                    </p:cTn>
+                  </p:par>
+                  <p:par>
+                    <p:cTn id="20" fill="hold">
+                      <p:stCondLst>
+                        <p:cond delay="indefinite"/>
+                      </p:stCondLst>
+                      <p:childTnLst>
+                        <p:par>
+                          <p:cTn id="21" fill="hold">
+                            <p:stCondLst>
+                              <p:cond delay="0"/>
+                            </p:stCondLst>
+                            <p:childTnLst>
+                              <p:par>
+                                <p:cTn id="22" presetID="55" presetClass="entr" presetSubtype="0" fill="hold" grpId="0" nodeType="clickEffect">
+                                  <p:stCondLst>
+                                    <p:cond delay="0"/>
+                                  </p:stCondLst>
+                                  <p:childTnLst>
+                                    <p:set>
+                                      <p:cBhvr>
+                                        <p:cTn id="23" dur="1" fill="hold">
+                                          <p:stCondLst>
+                                            <p:cond delay="0"/>
+                                          </p:stCondLst>
+                                        </p:cTn>
+                                        <p:tgtEl>
+                                          <p:spTgt spid="9"/>
+                                        </p:tgtEl>
+                                        <p:attrNameLst>
+                                          <p:attrName>style.visibility</p:attrName>
+                                        </p:attrNameLst>
+                                      </p:cBhvr>
+                                      <p:to>
+                                        <p:strVal val="visible"/>
+                                      </p:to>
+                                    </p:set>
+                                    <p:anim calcmode="lin" valueType="num">
+                                      <p:cBhvr>
+                                        <p:cTn id="24" dur="1000" fill="hold"/>
+                                        <p:tgtEl>
+                                          <p:spTgt spid="9"/>
+                                        </p:tgtEl>
+                                        <p:attrNameLst>
+                                          <p:attrName>ppt_w</p:attrName>
+                                        </p:attrNameLst>
+                                      </p:cBhvr>
+                                      <p:tavLst>
+                                        <p:tav tm="0">
+                                          <p:val>
+                                            <p:strVal val="#ppt_w*0.70"/>
+                                          </p:val>
+                                        </p:tav>
+                                        <p:tav tm="100000">
+                                          <p:val>
+                                            <p:strVal val="#ppt_w"/>
+                                          </p:val>
+                                        </p:tav>
+                                      </p:tavLst>
+                                    </p:anim>
+                                    <p:anim calcmode="lin" valueType="num">
+                                      <p:cBhvr>
+                                        <p:cTn id="25" dur="1000" fill="hold"/>
+                                        <p:tgtEl>
+                                          <p:spTgt spid="9"/>
+                                        </p:tgtEl>
+                                        <p:attrNameLst>
+                                          <p:attrName>ppt_h</p:attrName>
+                                        </p:attrNameLst>
+                                      </p:cBhvr>
+                                      <p:tavLst>
+                                        <p:tav tm="0">
+                                          <p:val>
+                                            <p:strVal val="#ppt_h"/>
+                                          </p:val>
+                                        </p:tav>
+                                        <p:tav tm="100000">
+                                          <p:val>
+                                            <p:strVal val="#ppt_h"/>
+                                          </p:val>
+                                        </p:tav>
+                                      </p:tavLst>
+                                    </p:anim>
+                                    <p:animEffect transition="in" filter="fade">
+                                      <p:cBhvr>
+                                        <p:cTn id="26" dur="1000"/>
+                                        <p:tgtEl>
+                                          <p:spTgt spid="9"/>
+                                        </p:tgtEl>
+                                      </p:cBhvr>
+                                    </p:animEffect>
+                                  </p:childTnLst>
+                                </p:cTn>
+                              </p:par>
+                            </p:childTnLst>
+                          </p:cTn>
+                        </p:par>
+                      </p:childTnLst>
+                    </p:cTn>
+                  </p:par>
+                </p:childTnLst>
+              </p:cTn>
+              <p:prevCondLst>
+                <p:cond evt="onPrev" delay="0">
+                  <p:tgtEl>
+                    <p:sldTgt/>
+                  </p:tgtEl>
+                </p:cond>
+              </p:prevCondLst>
+              <p:nextCondLst>
+                <p:cond evt="onNext" delay="0">
+                  <p:tgtEl>
+                    <p:sldTgt/>
+                  </p:tgtEl>
+                </p:cond>
+              </p:nextCondLst>
+            </p:seq>
+          </p:childTnLst>
+        </p:cTn>
+      </p:par>
+    </p:tnLst>
+    <p:bldLst>
+      <p:bldP spid="9" grpId="0" animBg="1"/>
+      <p:bldP spid="11" grpId="0"/>
+      <p:bldP spid="12" grpId="0" animBg="1"/>
+    </p:bldLst>
+  </p:timing>
 </p:sld>
 </file>
 
@@ -15362,6 +18597,905 @@
       </p:grpSpPr>
       <p:sp>
         <p:nvSpPr>
+          <p:cNvPr id="8" name="Text 0"/>
+          <p:cNvSpPr/>
+          <p:nvPr/>
+        </p:nvSpPr>
+        <p:spPr>
+          <a:xfrm>
+            <a:off x="320040" y="128160"/>
+            <a:ext cx="11521080" cy="456840"/>
+          </a:xfrm>
+          <a:prstGeom prst="rect">
+            <a:avLst/>
+          </a:prstGeom>
+          <a:noFill/>
+          <a:ln w="0">
+            <a:noFill/>
+          </a:ln>
+        </p:spPr>
+        <p:style>
+          <a:lnRef idx="0">
+            <a:scrgbClr r="0" g="0" b="0"/>
+          </a:lnRef>
+          <a:fillRef idx="0">
+            <a:scrgbClr r="0" g="0" b="0"/>
+          </a:fillRef>
+          <a:effectRef idx="0">
+            <a:scrgbClr r="0" g="0" b="0"/>
+          </a:effectRef>
+          <a:fontRef idx="minor"/>
+        </p:style>
+        <p:txBody>
+          <a:bodyPr lIns="90000" tIns="45000" rIns="90000" bIns="45000" anchor="ctr">
+            <a:noAutofit/>
+          </a:bodyPr>
+          <a:lstStyle/>
+          <a:p>
+            <a:pPr algn="ctr" defTabSz="914400">
+              <a:lnSpc>
+                <a:spcPct val="100000"/>
+              </a:lnSpc>
+              <a:tabLst>
+                <a:tab pos="0" algn="l"/>
+              </a:tabLst>
+            </a:pPr>
+            <a:r>
+              <a:rPr lang="en-US" sz="2400" b="1" u="none" strike="noStrike">
+                <a:solidFill>
+                  <a:srgbClr val="2C3E50"/>
+                </a:solidFill>
+                <a:effectLst/>
+                <a:uFillTx/>
+                <a:latin typeface="Cambria"/>
+                <a:ea typeface="Cambria"/>
+              </a:rPr>
+              <a:t>How we measure disorder  —  UniProt · IUPred2 · ANCHOR2</a:t>
+            </a:r>
+            <a:endParaRPr lang="en-US" sz="2400" b="0" u="none" strike="noStrike">
+              <a:solidFill>
+                <a:srgbClr val="000000"/>
+              </a:solidFill>
+              <a:effectLst/>
+              <a:uFillTx/>
+              <a:latin typeface="Arial"/>
+            </a:endParaRPr>
+          </a:p>
+        </p:txBody>
+      </p:sp>
+      <p:sp>
+        <p:nvSpPr>
+          <p:cNvPr id="9" name="Text 1"/>
+          <p:cNvSpPr/>
+          <p:nvPr/>
+        </p:nvSpPr>
+        <p:spPr>
+          <a:xfrm>
+            <a:off x="320040" y="777240"/>
+            <a:ext cx="3702960" cy="1828440"/>
+          </a:xfrm>
+          <a:prstGeom prst="roundRect">
+            <a:avLst>
+              <a:gd name="adj" fmla="val 2500"/>
+            </a:avLst>
+          </a:prstGeom>
+          <a:solidFill>
+            <a:srgbClr val="FCEBD0"/>
+          </a:solidFill>
+          <a:ln w="16510">
+            <a:solidFill>
+              <a:srgbClr val="B9770E"/>
+            </a:solidFill>
+            <a:round/>
+          </a:ln>
+        </p:spPr>
+        <p:style>
+          <a:lnRef idx="0">
+            <a:scrgbClr r="0" g="0" b="0"/>
+          </a:lnRef>
+          <a:fillRef idx="0">
+            <a:scrgbClr r="0" g="0" b="0"/>
+          </a:fillRef>
+          <a:effectRef idx="0">
+            <a:scrgbClr r="0" g="0" b="0"/>
+          </a:effectRef>
+          <a:fontRef idx="minor"/>
+        </p:style>
+        <p:txBody>
+          <a:bodyPr lIns="101520" tIns="101520" rIns="101520" bIns="101520" anchor="t">
+            <a:noAutofit/>
+          </a:bodyPr>
+          <a:lstStyle/>
+          <a:p>
+            <a:pPr defTabSz="914400">
+              <a:lnSpc>
+                <a:spcPct val="100000"/>
+              </a:lnSpc>
+              <a:tabLst>
+                <a:tab pos="0" algn="l"/>
+              </a:tabLst>
+            </a:pPr>
+            <a:r>
+              <a:rPr lang="en-US" sz="1350" b="1" u="none" strike="noStrike" dirty="0">
+                <a:solidFill>
+                  <a:srgbClr val="B9770E"/>
+                </a:solidFill>
+                <a:effectLst/>
+                <a:uFillTx/>
+                <a:latin typeface="Calibri"/>
+              </a:rPr>
+              <a:t>UniProt — the annotation</a:t>
+            </a:r>
+            <a:endParaRPr lang="en-US" sz="1350" b="0" u="none" strike="noStrike" dirty="0">
+              <a:solidFill>
+                <a:srgbClr val="000000"/>
+              </a:solidFill>
+              <a:effectLst/>
+              <a:uFillTx/>
+              <a:latin typeface="Arial"/>
+            </a:endParaRPr>
+          </a:p>
+          <a:p>
+            <a:pPr defTabSz="914400">
+              <a:lnSpc>
+                <a:spcPct val="100000"/>
+              </a:lnSpc>
+              <a:tabLst>
+                <a:tab pos="0" algn="l"/>
+              </a:tabLst>
+            </a:pPr>
+            <a:r>
+              <a:rPr lang="en-US" sz="1000" b="0" i="1" u="none" strike="noStrike" dirty="0">
+                <a:solidFill>
+                  <a:srgbClr val="5A6B7B"/>
+                </a:solidFill>
+                <a:effectLst/>
+                <a:uFillTx/>
+                <a:latin typeface="Calibri"/>
+              </a:rPr>
+              <a:t>(the orange bands)</a:t>
+            </a:r>
+            <a:endParaRPr lang="en-US" sz="1000" b="0" u="none" strike="noStrike" dirty="0">
+              <a:solidFill>
+                <a:srgbClr val="000000"/>
+              </a:solidFill>
+              <a:effectLst/>
+              <a:uFillTx/>
+              <a:latin typeface="Arial"/>
+            </a:endParaRPr>
+          </a:p>
+          <a:p>
+            <a:pPr defTabSz="914400">
+              <a:lnSpc>
+                <a:spcPct val="100000"/>
+              </a:lnSpc>
+              <a:tabLst>
+                <a:tab pos="0" algn="l"/>
+              </a:tabLst>
+            </a:pPr>
+            <a:r>
+              <a:rPr lang="en-US" sz="1100" b="0" u="none" strike="noStrike" dirty="0">
+                <a:solidFill>
+                  <a:srgbClr val="2C3E50"/>
+                </a:solidFill>
+                <a:effectLst/>
+                <a:uFillTx/>
+                <a:latin typeface="Calibri"/>
+              </a:rPr>
+              <a:t>Curated, experimentally-supported disordered-region annotations. For Sororin: three IDRs (1–48, 72–142, 199–222) plus the folded C-terminal Sororin domain (230–252). These fixed blocks are the 'ground truth' shaded on the disorder map.</a:t>
+            </a:r>
+            <a:endParaRPr lang="en-US" sz="1100" b="0" u="none" strike="noStrike" dirty="0">
+              <a:solidFill>
+                <a:srgbClr val="000000"/>
+              </a:solidFill>
+              <a:effectLst/>
+              <a:uFillTx/>
+              <a:latin typeface="Arial"/>
+            </a:endParaRPr>
+          </a:p>
+        </p:txBody>
+      </p:sp>
+      <p:sp>
+        <p:nvSpPr>
+          <p:cNvPr id="10" name="Text 2"/>
+          <p:cNvSpPr/>
+          <p:nvPr/>
+        </p:nvSpPr>
+        <p:spPr>
+          <a:xfrm>
+            <a:off x="4206240" y="777240"/>
+            <a:ext cx="3702960" cy="1828440"/>
+          </a:xfrm>
+          <a:prstGeom prst="roundRect">
+            <a:avLst>
+              <a:gd name="adj" fmla="val 2500"/>
+            </a:avLst>
+          </a:prstGeom>
+          <a:solidFill>
+            <a:srgbClr val="F7DBDB"/>
+          </a:solidFill>
+          <a:ln w="16510">
+            <a:solidFill>
+              <a:srgbClr val="B2182B"/>
+            </a:solidFill>
+            <a:round/>
+          </a:ln>
+        </p:spPr>
+        <p:style>
+          <a:lnRef idx="0">
+            <a:scrgbClr r="0" g="0" b="0"/>
+          </a:lnRef>
+          <a:fillRef idx="0">
+            <a:scrgbClr r="0" g="0" b="0"/>
+          </a:fillRef>
+          <a:effectRef idx="0">
+            <a:scrgbClr r="0" g="0" b="0"/>
+          </a:effectRef>
+          <a:fontRef idx="minor"/>
+        </p:style>
+        <p:txBody>
+          <a:bodyPr lIns="101520" tIns="101520" rIns="101520" bIns="101520" anchor="t">
+            <a:noAutofit/>
+          </a:bodyPr>
+          <a:lstStyle/>
+          <a:p>
+            <a:pPr defTabSz="914400">
+              <a:lnSpc>
+                <a:spcPct val="100000"/>
+              </a:lnSpc>
+              <a:tabLst>
+                <a:tab pos="0" algn="l"/>
+              </a:tabLst>
+            </a:pPr>
+            <a:r>
+              <a:rPr lang="en-US" sz="1350" b="1" u="none" strike="noStrike">
+                <a:solidFill>
+                  <a:srgbClr val="B2182B"/>
+                </a:solidFill>
+                <a:effectLst/>
+                <a:uFillTx/>
+                <a:latin typeface="Calibri"/>
+              </a:rPr>
+              <a:t>IUPred2 — disorder prediction</a:t>
+            </a:r>
+            <a:endParaRPr lang="en-US" sz="1350" b="0" u="none" strike="noStrike">
+              <a:solidFill>
+                <a:srgbClr val="000000"/>
+              </a:solidFill>
+              <a:effectLst/>
+              <a:uFillTx/>
+              <a:latin typeface="Arial"/>
+            </a:endParaRPr>
+          </a:p>
+          <a:p>
+            <a:pPr defTabSz="914400">
+              <a:lnSpc>
+                <a:spcPct val="100000"/>
+              </a:lnSpc>
+              <a:tabLst>
+                <a:tab pos="0" algn="l"/>
+              </a:tabLst>
+            </a:pPr>
+            <a:r>
+              <a:rPr lang="en-US" sz="1000" b="0" i="1" u="none" strike="noStrike">
+                <a:solidFill>
+                  <a:srgbClr val="5A6B7B"/>
+                </a:solidFill>
+                <a:effectLst/>
+                <a:uFillTx/>
+                <a:latin typeface="Calibri"/>
+              </a:rPr>
+              <a:t>(the red curve)</a:t>
+            </a:r>
+            <a:endParaRPr lang="en-US" sz="1000" b="0" u="none" strike="noStrike">
+              <a:solidFill>
+                <a:srgbClr val="000000"/>
+              </a:solidFill>
+              <a:effectLst/>
+              <a:uFillTx/>
+              <a:latin typeface="Arial"/>
+            </a:endParaRPr>
+          </a:p>
+          <a:p>
+            <a:pPr defTabSz="914400">
+              <a:lnSpc>
+                <a:spcPct val="100000"/>
+              </a:lnSpc>
+              <a:tabLst>
+                <a:tab pos="0" algn="l"/>
+              </a:tabLst>
+            </a:pPr>
+            <a:r>
+              <a:rPr lang="en-US" sz="1100" b="0" u="none" strike="noStrike">
+                <a:solidFill>
+                  <a:srgbClr val="2C3E50"/>
+                </a:solidFill>
+                <a:effectLst/>
+                <a:uFillTx/>
+                <a:latin typeface="Calibri"/>
+              </a:rPr>
+              <a:t>A per-residue score from 0 to 1; &gt; 0.5 = predicted disordered. 61.5% of Sororin scores above 0.5. Sequence-only and energy-based — no structure or homology needed.</a:t>
+            </a:r>
+            <a:endParaRPr lang="en-US" sz="1100" b="0" u="none" strike="noStrike">
+              <a:solidFill>
+                <a:srgbClr val="000000"/>
+              </a:solidFill>
+              <a:effectLst/>
+              <a:uFillTx/>
+              <a:latin typeface="Arial"/>
+            </a:endParaRPr>
+          </a:p>
+        </p:txBody>
+      </p:sp>
+      <p:sp>
+        <p:nvSpPr>
+          <p:cNvPr id="11" name="Text 3"/>
+          <p:cNvSpPr/>
+          <p:nvPr/>
+        </p:nvSpPr>
+        <p:spPr>
+          <a:xfrm>
+            <a:off x="8092440" y="777240"/>
+            <a:ext cx="3748680" cy="1828440"/>
+          </a:xfrm>
+          <a:prstGeom prst="roundRect">
+            <a:avLst>
+              <a:gd name="adj" fmla="val 2500"/>
+            </a:avLst>
+          </a:prstGeom>
+          <a:solidFill>
+            <a:srgbClr val="DCE7F3"/>
+          </a:solidFill>
+          <a:ln w="16510">
+            <a:solidFill>
+              <a:srgbClr val="2166AC"/>
+            </a:solidFill>
+            <a:round/>
+          </a:ln>
+        </p:spPr>
+        <p:style>
+          <a:lnRef idx="0">
+            <a:scrgbClr r="0" g="0" b="0"/>
+          </a:lnRef>
+          <a:fillRef idx="0">
+            <a:scrgbClr r="0" g="0" b="0"/>
+          </a:fillRef>
+          <a:effectRef idx="0">
+            <a:scrgbClr r="0" g="0" b="0"/>
+          </a:effectRef>
+          <a:fontRef idx="minor"/>
+        </p:style>
+        <p:txBody>
+          <a:bodyPr lIns="101520" tIns="101520" rIns="101520" bIns="101520" anchor="t">
+            <a:noAutofit/>
+          </a:bodyPr>
+          <a:lstStyle/>
+          <a:p>
+            <a:pPr defTabSz="914400">
+              <a:lnSpc>
+                <a:spcPct val="100000"/>
+              </a:lnSpc>
+              <a:tabLst>
+                <a:tab pos="0" algn="l"/>
+              </a:tabLst>
+            </a:pPr>
+            <a:r>
+              <a:rPr lang="en-US" sz="1350" b="1" u="none" strike="noStrike">
+                <a:solidFill>
+                  <a:srgbClr val="2166AC"/>
+                </a:solidFill>
+                <a:effectLst/>
+                <a:uFillTx/>
+                <a:latin typeface="Calibri"/>
+              </a:rPr>
+              <a:t>ANCHOR2 — disordered binding</a:t>
+            </a:r>
+            <a:endParaRPr lang="en-US" sz="1350" b="0" u="none" strike="noStrike">
+              <a:solidFill>
+                <a:srgbClr val="000000"/>
+              </a:solidFill>
+              <a:effectLst/>
+              <a:uFillTx/>
+              <a:latin typeface="Arial"/>
+            </a:endParaRPr>
+          </a:p>
+          <a:p>
+            <a:pPr defTabSz="914400">
+              <a:lnSpc>
+                <a:spcPct val="100000"/>
+              </a:lnSpc>
+              <a:tabLst>
+                <a:tab pos="0" algn="l"/>
+              </a:tabLst>
+            </a:pPr>
+            <a:r>
+              <a:rPr lang="en-US" sz="1000" b="0" i="1" u="none" strike="noStrike">
+                <a:solidFill>
+                  <a:srgbClr val="5A6B7B"/>
+                </a:solidFill>
+                <a:effectLst/>
+                <a:uFillTx/>
+                <a:latin typeface="Calibri"/>
+              </a:rPr>
+              <a:t>(the blue curve)</a:t>
+            </a:r>
+            <a:endParaRPr lang="en-US" sz="1000" b="0" u="none" strike="noStrike">
+              <a:solidFill>
+                <a:srgbClr val="000000"/>
+              </a:solidFill>
+              <a:effectLst/>
+              <a:uFillTx/>
+              <a:latin typeface="Arial"/>
+            </a:endParaRPr>
+          </a:p>
+          <a:p>
+            <a:pPr defTabSz="914400">
+              <a:lnSpc>
+                <a:spcPct val="100000"/>
+              </a:lnSpc>
+              <a:tabLst>
+                <a:tab pos="0" algn="l"/>
+              </a:tabLst>
+            </a:pPr>
+            <a:r>
+              <a:rPr lang="en-US" sz="1100" b="0" u="none" strike="noStrike">
+                <a:solidFill>
+                  <a:srgbClr val="2C3E50"/>
+                </a:solidFill>
+                <a:effectLst/>
+                <a:uFillTx/>
+                <a:latin typeface="Calibri"/>
+              </a:rPr>
+              <a:t>Flags disordered stretches that can still bind a partner (fold-upon-binding) — 'binding-competent disorder.' It marks where the floppy chain actually does its interacting, not just where it is floppy.</a:t>
+            </a:r>
+            <a:endParaRPr lang="en-US" sz="1100" b="0" u="none" strike="noStrike">
+              <a:solidFill>
+                <a:srgbClr val="000000"/>
+              </a:solidFill>
+              <a:effectLst/>
+              <a:uFillTx/>
+              <a:latin typeface="Arial"/>
+            </a:endParaRPr>
+          </a:p>
+        </p:txBody>
+      </p:sp>
+      <p:sp>
+        <p:nvSpPr>
+          <p:cNvPr id="12" name="Text 4"/>
+          <p:cNvSpPr/>
+          <p:nvPr/>
+        </p:nvSpPr>
+        <p:spPr>
+          <a:xfrm>
+            <a:off x="320040" y="2788920"/>
+            <a:ext cx="5806080" cy="2239920"/>
+          </a:xfrm>
+          <a:prstGeom prst="roundRect">
+            <a:avLst>
+              <a:gd name="adj" fmla="val 2041"/>
+            </a:avLst>
+          </a:prstGeom>
+          <a:solidFill>
+            <a:srgbClr val="F4F0F7"/>
+          </a:solidFill>
+          <a:ln w="12700">
+            <a:solidFill>
+              <a:srgbClr val="762A83"/>
+            </a:solidFill>
+            <a:round/>
+          </a:ln>
+        </p:spPr>
+        <p:style>
+          <a:lnRef idx="0">
+            <a:scrgbClr r="0" g="0" b="0"/>
+          </a:lnRef>
+          <a:fillRef idx="0">
+            <a:scrgbClr r="0" g="0" b="0"/>
+          </a:fillRef>
+          <a:effectRef idx="0">
+            <a:scrgbClr r="0" g="0" b="0"/>
+          </a:effectRef>
+          <a:fontRef idx="minor"/>
+        </p:style>
+        <p:txBody>
+          <a:bodyPr lIns="114480" tIns="114480" rIns="114480" bIns="114480" anchor="t">
+            <a:noAutofit/>
+          </a:bodyPr>
+          <a:lstStyle/>
+          <a:p>
+            <a:pPr defTabSz="914400">
+              <a:lnSpc>
+                <a:spcPct val="100000"/>
+              </a:lnSpc>
+              <a:tabLst>
+                <a:tab pos="0" algn="l"/>
+              </a:tabLst>
+            </a:pPr>
+            <a:r>
+              <a:rPr lang="en-US" sz="1050" b="1" u="none" strike="noStrike">
+                <a:solidFill>
+                  <a:srgbClr val="762A83"/>
+                </a:solidFill>
+                <a:effectLst/>
+                <a:uFillTx/>
+                <a:latin typeface="Calibri"/>
+              </a:rPr>
+              <a:t>how IUPred2 works (reference):  </a:t>
+            </a:r>
+            <a:endParaRPr lang="en-US" sz="1050" b="0" u="none" strike="noStrike">
+              <a:solidFill>
+                <a:srgbClr val="000000"/>
+              </a:solidFill>
+              <a:effectLst/>
+              <a:uFillTx/>
+              <a:latin typeface="Arial"/>
+            </a:endParaRPr>
+          </a:p>
+          <a:p>
+            <a:pPr defTabSz="914400">
+              <a:lnSpc>
+                <a:spcPct val="100000"/>
+              </a:lnSpc>
+              <a:tabLst>
+                <a:tab pos="0" algn="l"/>
+              </a:tabLst>
+            </a:pPr>
+            <a:r>
+              <a:rPr lang="en-US" sz="1050" b="0" u="none" strike="noStrike">
+                <a:solidFill>
+                  <a:srgbClr val="2C3E50"/>
+                </a:solidFill>
+                <a:effectLst/>
+                <a:uFillTx/>
+                <a:latin typeface="Calibri"/>
+              </a:rPr>
+              <a:t>For each residue it estimates the stabilising pairwise contact energy that residue could gain by folding into a compact structure, from a statistical 20×20 amino-acid energy matrix applied over the local sequence composition:</a:t>
+            </a:r>
+            <a:endParaRPr lang="en-US" sz="1050" b="0" u="none" strike="noStrike">
+              <a:solidFill>
+                <a:srgbClr val="000000"/>
+              </a:solidFill>
+              <a:effectLst/>
+              <a:uFillTx/>
+              <a:latin typeface="Arial"/>
+            </a:endParaRPr>
+          </a:p>
+          <a:p>
+            <a:pPr defTabSz="914400">
+              <a:lnSpc>
+                <a:spcPct val="100000"/>
+              </a:lnSpc>
+              <a:tabLst>
+                <a:tab pos="0" algn="l"/>
+              </a:tabLst>
+            </a:pPr>
+            <a:r>
+              <a:rPr lang="en-US" sz="1100" b="1" i="1" u="none" strike="noStrike">
+                <a:solidFill>
+                  <a:srgbClr val="2C3E50"/>
+                </a:solidFill>
+                <a:effectLst/>
+                <a:uFillTx/>
+                <a:latin typeface="Calibri"/>
+              </a:rPr>
+              <a:t>E(i)  ≈  Σ over pairs (a,b)  of  M(a,b) · cₐ · c_b </a:t>
+            </a:r>
+            <a:endParaRPr lang="en-US" sz="1100" b="0" u="none" strike="noStrike">
+              <a:solidFill>
+                <a:srgbClr val="000000"/>
+              </a:solidFill>
+              <a:effectLst/>
+              <a:uFillTx/>
+              <a:latin typeface="Arial"/>
+            </a:endParaRPr>
+          </a:p>
+          <a:p>
+            <a:pPr defTabSz="914400">
+              <a:lnSpc>
+                <a:spcPct val="100000"/>
+              </a:lnSpc>
+              <a:tabLst>
+                <a:tab pos="0" algn="l"/>
+              </a:tabLst>
+            </a:pPr>
+            <a:r>
+              <a:rPr lang="en-US" sz="1050" b="0" u="none" strike="noStrike">
+                <a:solidFill>
+                  <a:srgbClr val="2C3E50"/>
+                </a:solidFill>
+                <a:effectLst/>
+                <a:uFillTx/>
+                <a:latin typeface="Calibri"/>
+              </a:rPr>
+              <a:t>Residues that cannot gather enough stabilising energy to fold are predicted disordered (high score). It is a mean-field energy estimate from sequence — the physics-flavoured part.</a:t>
+            </a:r>
+            <a:endParaRPr lang="en-US" sz="1050" b="0" u="none" strike="noStrike">
+              <a:solidFill>
+                <a:srgbClr val="000000"/>
+              </a:solidFill>
+              <a:effectLst/>
+              <a:uFillTx/>
+              <a:latin typeface="Arial"/>
+            </a:endParaRPr>
+          </a:p>
+        </p:txBody>
+      </p:sp>
+      <p:sp>
+        <p:nvSpPr>
+          <p:cNvPr id="13" name="Text 5"/>
+          <p:cNvSpPr/>
+          <p:nvPr/>
+        </p:nvSpPr>
+        <p:spPr>
+          <a:xfrm>
+            <a:off x="6355080" y="2788920"/>
+            <a:ext cx="5486040" cy="2239920"/>
+          </a:xfrm>
+          <a:prstGeom prst="roundRect">
+            <a:avLst>
+              <a:gd name="adj" fmla="val 2041"/>
+            </a:avLst>
+          </a:prstGeom>
+          <a:solidFill>
+            <a:srgbClr val="F4F0F7"/>
+          </a:solidFill>
+          <a:ln w="12700">
+            <a:solidFill>
+              <a:srgbClr val="762A83"/>
+            </a:solidFill>
+            <a:round/>
+          </a:ln>
+        </p:spPr>
+        <p:style>
+          <a:lnRef idx="0">
+            <a:scrgbClr r="0" g="0" b="0"/>
+          </a:lnRef>
+          <a:fillRef idx="0">
+            <a:scrgbClr r="0" g="0" b="0"/>
+          </a:fillRef>
+          <a:effectRef idx="0">
+            <a:scrgbClr r="0" g="0" b="0"/>
+          </a:effectRef>
+          <a:fontRef idx="minor"/>
+        </p:style>
+        <p:txBody>
+          <a:bodyPr lIns="114480" tIns="114480" rIns="114480" bIns="114480" anchor="t">
+            <a:noAutofit/>
+          </a:bodyPr>
+          <a:lstStyle/>
+          <a:p>
+            <a:pPr defTabSz="914400">
+              <a:lnSpc>
+                <a:spcPct val="100000"/>
+              </a:lnSpc>
+              <a:tabLst>
+                <a:tab pos="0" algn="l"/>
+              </a:tabLst>
+            </a:pPr>
+            <a:r>
+              <a:rPr lang="en-US" sz="1050" b="1" u="none" strike="noStrike">
+                <a:solidFill>
+                  <a:srgbClr val="762A83"/>
+                </a:solidFill>
+                <a:effectLst/>
+                <a:uFillTx/>
+                <a:latin typeface="Calibri"/>
+              </a:rPr>
+              <a:t>how ANCHOR2 works (reference):  </a:t>
+            </a:r>
+            <a:endParaRPr lang="en-US" sz="1050" b="0" u="none" strike="noStrike">
+              <a:solidFill>
+                <a:srgbClr val="000000"/>
+              </a:solidFill>
+              <a:effectLst/>
+              <a:uFillTx/>
+              <a:latin typeface="Arial"/>
+            </a:endParaRPr>
+          </a:p>
+          <a:p>
+            <a:pPr defTabSz="914400">
+              <a:lnSpc>
+                <a:spcPct val="100000"/>
+              </a:lnSpc>
+              <a:tabLst>
+                <a:tab pos="0" algn="l"/>
+              </a:tabLst>
+            </a:pPr>
+            <a:r>
+              <a:rPr lang="en-US" sz="1050" b="0" u="none" strike="noStrike">
+                <a:solidFill>
+                  <a:srgbClr val="2C3E50"/>
+                </a:solidFill>
+                <a:effectLst/>
+                <a:uFillTx/>
+                <a:latin typeface="Calibri"/>
+              </a:rPr>
+              <a:t>It asks a second energy question: a residue that cannot fold on its own — could it gain enough favourable energy by binding a generic globular partner? If yes, it is flagged as a disordered binding region.</a:t>
+            </a:r>
+            <a:endParaRPr lang="en-US" sz="1050" b="0" u="none" strike="noStrike">
+              <a:solidFill>
+                <a:srgbClr val="000000"/>
+              </a:solidFill>
+              <a:effectLst/>
+              <a:uFillTx/>
+              <a:latin typeface="Arial"/>
+            </a:endParaRPr>
+          </a:p>
+          <a:p>
+            <a:pPr defTabSz="914400">
+              <a:lnSpc>
+                <a:spcPct val="100000"/>
+              </a:lnSpc>
+              <a:tabLst>
+                <a:tab pos="0" algn="l"/>
+              </a:tabLst>
+            </a:pPr>
+            <a:r>
+              <a:rPr lang="en-US" sz="1050" b="1" i="1" u="none" strike="noStrike">
+                <a:solidFill>
+                  <a:srgbClr val="2C3E50"/>
+                </a:solidFill>
+                <a:effectLst/>
+                <a:uFillTx/>
+                <a:latin typeface="Calibri"/>
+              </a:rPr>
+              <a:t>disordered on its own  +  energetically favourable to bind  →  binding-competent disorder</a:t>
+            </a:r>
+            <a:endParaRPr lang="en-US" sz="1050" b="0" u="none" strike="noStrike">
+              <a:solidFill>
+                <a:srgbClr val="000000"/>
+              </a:solidFill>
+              <a:effectLst/>
+              <a:uFillTx/>
+              <a:latin typeface="Arial"/>
+            </a:endParaRPr>
+          </a:p>
+          <a:p>
+            <a:pPr defTabSz="914400">
+              <a:lnSpc>
+                <a:spcPct val="100000"/>
+              </a:lnSpc>
+              <a:tabLst>
+                <a:tab pos="0" algn="l"/>
+              </a:tabLst>
+            </a:pPr>
+            <a:r>
+              <a:rPr lang="en-US" sz="1050" b="0" u="none" strike="noStrike">
+                <a:solidFill>
+                  <a:srgbClr val="2C3E50"/>
+                </a:solidFill>
+                <a:effectLst/>
+                <a:uFillTx/>
+                <a:latin typeface="Calibri"/>
+              </a:rPr>
+              <a:t>This is how a floppy region that looks 'structureless' is still identified as a functional interaction site (e.g. the KEN box, the phospho-cluster).</a:t>
+            </a:r>
+            <a:endParaRPr lang="en-US" sz="1050" b="0" u="none" strike="noStrike">
+              <a:solidFill>
+                <a:srgbClr val="000000"/>
+              </a:solidFill>
+              <a:effectLst/>
+              <a:uFillTx/>
+              <a:latin typeface="Arial"/>
+            </a:endParaRPr>
+          </a:p>
+        </p:txBody>
+      </p:sp>
+      <p:sp>
+        <p:nvSpPr>
+          <p:cNvPr id="14" name="Text 6"/>
+          <p:cNvSpPr/>
+          <p:nvPr/>
+        </p:nvSpPr>
+        <p:spPr>
+          <a:xfrm>
+            <a:off x="320040" y="5257800"/>
+            <a:ext cx="11521080" cy="1096920"/>
+          </a:xfrm>
+          <a:prstGeom prst="rect">
+            <a:avLst/>
+          </a:prstGeom>
+          <a:noFill/>
+          <a:ln w="0">
+            <a:noFill/>
+          </a:ln>
+        </p:spPr>
+        <p:style>
+          <a:lnRef idx="0">
+            <a:scrgbClr r="0" g="0" b="0"/>
+          </a:lnRef>
+          <a:fillRef idx="0">
+            <a:scrgbClr r="0" g="0" b="0"/>
+          </a:fillRef>
+          <a:effectRef idx="0">
+            <a:scrgbClr r="0" g="0" b="0"/>
+          </a:effectRef>
+          <a:fontRef idx="minor"/>
+        </p:style>
+        <p:txBody>
+          <a:bodyPr lIns="90000" tIns="45000" rIns="90000" bIns="45000" anchor="t">
+            <a:noAutofit/>
+          </a:bodyPr>
+          <a:lstStyle/>
+          <a:p>
+            <a:pPr defTabSz="914400">
+              <a:lnSpc>
+                <a:spcPct val="100000"/>
+              </a:lnSpc>
+              <a:tabLst>
+                <a:tab pos="0" algn="l"/>
+              </a:tabLst>
+            </a:pPr>
+            <a:r>
+              <a:rPr lang="en-US" sz="1100" b="1" u="none" strike="noStrike" dirty="0">
+                <a:solidFill>
+                  <a:srgbClr val="1A7A34"/>
+                </a:solidFill>
+                <a:effectLst/>
+                <a:uFillTx/>
+                <a:latin typeface="Calibri"/>
+                <a:ea typeface="Calibri"/>
+              </a:rPr>
+              <a:t>How obtained:  </a:t>
+            </a:r>
+            <a:r>
+              <a:rPr lang="en-US" sz="1100" b="0" u="none" strike="noStrike" dirty="0">
+                <a:solidFill>
+                  <a:srgbClr val="5A6B7B"/>
+                </a:solidFill>
+                <a:effectLst/>
+                <a:uFillTx/>
+                <a:latin typeface="Calibri"/>
+                <a:ea typeface="Calibri"/>
+              </a:rPr>
+              <a:t>UniProt REST API (region annotations, script 01)  →  IUPred2A reference implementation + energy matrices, downloaded and run locally (script 03)  →  per-residue disorder + binding profile  →  the disorder map. </a:t>
+            </a:r>
+            <a:endParaRPr lang="en-US" sz="1100" b="0" u="none" strike="noStrike" dirty="0">
+              <a:solidFill>
+                <a:srgbClr val="000000"/>
+              </a:solidFill>
+              <a:effectLst/>
+              <a:uFillTx/>
+              <a:latin typeface="Arial"/>
+            </a:endParaRPr>
+          </a:p>
+        </p:txBody>
+      </p:sp>
+    </p:spTree>
+  </p:cSld>
+  <p:clrMapOvr>
+    <a:masterClrMapping/>
+  </p:clrMapOvr>
+</p:sld>
+</file>
+
+<file path=ppt/slides/slide9.xml><?xml version="1.0" encoding="utf-8"?>
+<p:sld xmlns:a="http://schemas.openxmlformats.org/drawingml/2006/main" xmlns:r="http://schemas.openxmlformats.org/officeDocument/2006/relationships" xmlns:p="http://schemas.openxmlformats.org/presentationml/2006/main">
+  <p:cSld>
+    <p:bg>
+      <p:bgPr>
+        <a:solidFill>
+          <a:srgbClr val="FFFFFF"/>
+        </a:solidFill>
+        <a:effectLst/>
+      </p:bgPr>
+    </p:bg>
+    <p:spTree>
+      <p:nvGrpSpPr>
+        <p:cNvPr id="1" name=""/>
+        <p:cNvGrpSpPr/>
+        <p:nvPr/>
+      </p:nvGrpSpPr>
+      <p:grpSpPr>
+        <a:xfrm>
+          <a:off x="0" y="0"/>
+          <a:ext cx="0" cy="0"/>
+          <a:chOff x="0" y="0"/>
+          <a:chExt cx="0" cy="0"/>
+        </a:xfrm>
+      </p:grpSpPr>
+      <p:sp>
+        <p:nvSpPr>
           <p:cNvPr id="50" name="Text 0"/>
           <p:cNvSpPr/>
           <p:nvPr/>
@@ -15428,202 +19562,244 @@
           </a:p>
         </p:txBody>
       </p:sp>
-      <p:pic>
-        <p:nvPicPr>
-          <p:cNvPr id="51" name="a_af" descr="/tmp/assets/af_crop.png"/>
-          <p:cNvPicPr/>
+      <p:grpSp>
+        <p:nvGrpSpPr>
+          <p:cNvPr id="3" name="Group 2">
+            <a:extLst>
+              <a:ext uri="{FF2B5EF4-FFF2-40B4-BE49-F238E27FC236}">
+                <a16:creationId xmlns:a16="http://schemas.microsoft.com/office/drawing/2014/main" id="{EFD8EA6D-D23F-825F-141B-CD8B7CDBCBAC}"/>
+              </a:ext>
+            </a:extLst>
+          </p:cNvPr>
+          <p:cNvGrpSpPr/>
           <p:nvPr/>
-        </p:nvPicPr>
-        <p:blipFill>
-          <a:blip r:embed="rId3"/>
-          <a:stretch/>
-        </p:blipFill>
-        <p:spPr>
+        </p:nvGrpSpPr>
+        <p:grpSpPr>
           <a:xfrm>
-            <a:off x="914400" y="1234440"/>
-            <a:ext cx="2631960" cy="3565800"/>
+            <a:off x="8321040" y="1083600"/>
+            <a:ext cx="3382920" cy="4845960"/>
+            <a:chOff x="548640" y="1234440"/>
+            <a:chExt cx="3382920" cy="4845960"/>
           </a:xfrm>
-          <a:prstGeom prst="rect">
-            <a:avLst/>
-          </a:prstGeom>
-          <a:noFill/>
-          <a:ln w="0">
+        </p:grpSpPr>
+        <p:pic>
+          <p:nvPicPr>
+            <p:cNvPr id="51" name="a_af" descr="/tmp/assets/af_crop.png"/>
+            <p:cNvPicPr/>
+            <p:nvPr/>
+          </p:nvPicPr>
+          <p:blipFill>
+            <a:blip r:embed="rId3"/>
+            <a:stretch/>
+          </p:blipFill>
+          <p:spPr>
+            <a:xfrm>
+              <a:off x="914400" y="1234440"/>
+              <a:ext cx="2631960" cy="3565800"/>
+            </a:xfrm>
+            <a:prstGeom prst="rect">
+              <a:avLst/>
+            </a:prstGeom>
             <a:noFill/>
-          </a:ln>
-        </p:spPr>
-      </p:pic>
-      <p:sp>
-        <p:nvSpPr>
-          <p:cNvPr id="52" name="Text 1"/>
-          <p:cNvSpPr/>
-          <p:nvPr/>
-        </p:nvSpPr>
-        <p:spPr>
-          <a:xfrm>
-            <a:off x="548640" y="4892040"/>
-            <a:ext cx="3382920" cy="1188360"/>
-          </a:xfrm>
-          <a:prstGeom prst="rect">
-            <a:avLst/>
-          </a:prstGeom>
-          <a:noFill/>
-          <a:ln w="0">
+            <a:ln w="0">
+              <a:noFill/>
+            </a:ln>
+          </p:spPr>
+        </p:pic>
+        <p:sp>
+          <p:nvSpPr>
+            <p:cNvPr id="52" name="Text 1"/>
+            <p:cNvSpPr/>
+            <p:nvPr/>
+          </p:nvSpPr>
+          <p:spPr>
+            <a:xfrm>
+              <a:off x="548640" y="4892040"/>
+              <a:ext cx="3382920" cy="1188360"/>
+            </a:xfrm>
+            <a:prstGeom prst="rect">
+              <a:avLst/>
+            </a:prstGeom>
             <a:noFill/>
-          </a:ln>
-        </p:spPr>
-        <p:style>
-          <a:lnRef idx="0">
-            <a:scrgbClr r="0" g="0" b="0"/>
-          </a:lnRef>
-          <a:fillRef idx="0">
-            <a:scrgbClr r="0" g="0" b="0"/>
-          </a:fillRef>
-          <a:effectRef idx="0">
-            <a:scrgbClr r="0" g="0" b="0"/>
-          </a:effectRef>
-          <a:fontRef idx="minor"/>
-        </p:style>
-        <p:txBody>
-          <a:bodyPr lIns="90000" tIns="45000" rIns="90000" bIns="45000" anchor="ctr">
-            <a:noAutofit/>
-          </a:bodyPr>
-          <a:lstStyle/>
-          <a:p>
-            <a:pPr defTabSz="914400">
-              <a:lnSpc>
-                <a:spcPct val="100000"/>
-              </a:lnSpc>
-              <a:tabLst>
-                <a:tab pos="0" algn="l"/>
-              </a:tabLst>
-            </a:pPr>
-            <a:r>
-              <a:rPr lang="en-US" sz="1200" b="0" u="none" strike="noStrike">
-                <a:solidFill>
-                  <a:srgbClr val="2C3E50"/>
+            <a:ln w="0">
+              <a:noFill/>
+            </a:ln>
+          </p:spPr>
+          <p:style>
+            <a:lnRef idx="0">
+              <a:scrgbClr r="0" g="0" b="0"/>
+            </a:lnRef>
+            <a:fillRef idx="0">
+              <a:scrgbClr r="0" g="0" b="0"/>
+            </a:fillRef>
+            <a:effectRef idx="0">
+              <a:scrgbClr r="0" g="0" b="0"/>
+            </a:effectRef>
+            <a:fontRef idx="minor"/>
+          </p:style>
+          <p:txBody>
+            <a:bodyPr lIns="90000" tIns="45000" rIns="90000" bIns="45000" anchor="ctr">
+              <a:noAutofit/>
+            </a:bodyPr>
+            <a:lstStyle/>
+            <a:p>
+              <a:pPr defTabSz="914400">
+                <a:lnSpc>
+                  <a:spcPct val="100000"/>
+                </a:lnSpc>
+                <a:tabLst>
+                  <a:tab pos="0" algn="l"/>
+                </a:tabLst>
+              </a:pPr>
+              <a:r>
+                <a:rPr lang="en-US" sz="1200" b="0" u="none" strike="noStrike">
+                  <a:solidFill>
+                    <a:srgbClr val="2C3E50"/>
+                  </a:solidFill>
+                  <a:effectLst/>
+                  <a:uFillTx/>
+                  <a:latin typeface="Calibri"/>
+                  <a:ea typeface="Calibri"/>
+                </a:rPr>
+                <a:t>AlphaFold 3D model — a floppy, extended chain with almost no fixed structure (one short helix = the folded C-terminus).</a:t>
+              </a:r>
+              <a:endParaRPr lang="en-US" sz="1200" b="0" u="none" strike="noStrike">
+                <a:solidFill>
+                  <a:srgbClr val="000000"/>
                 </a:solidFill>
                 <a:effectLst/>
                 <a:uFillTx/>
-                <a:latin typeface="Calibri"/>
-                <a:ea typeface="Calibri"/>
-              </a:rPr>
-              <a:t>AlphaFold 3D model — a floppy, extended chain with almost no fixed structure (one short helix = the folded C-terminus).</a:t>
-            </a:r>
-            <a:endParaRPr lang="en-US" sz="1200" b="0" u="none" strike="noStrike">
-              <a:solidFill>
-                <a:srgbClr val="000000"/>
-              </a:solidFill>
-              <a:effectLst/>
-              <a:uFillTx/>
-              <a:latin typeface="Arial"/>
-            </a:endParaRPr>
-          </a:p>
-        </p:txBody>
-      </p:sp>
-      <p:pic>
-        <p:nvPicPr>
-          <p:cNvPr id="53" name="a_disorder" descr="/tmp/assets/disorder_crop.png"/>
-          <p:cNvPicPr/>
+                <a:latin typeface="Arial"/>
+              </a:endParaRPr>
+            </a:p>
+          </p:txBody>
+        </p:sp>
+      </p:grpSp>
+      <p:grpSp>
+        <p:nvGrpSpPr>
+          <p:cNvPr id="2" name="Group 1">
+            <a:extLst>
+              <a:ext uri="{FF2B5EF4-FFF2-40B4-BE49-F238E27FC236}">
+                <a16:creationId xmlns:a16="http://schemas.microsoft.com/office/drawing/2014/main" id="{311E238E-9C79-74F0-97EE-7DDE6F755C51}"/>
+              </a:ext>
+            </a:extLst>
+          </p:cNvPr>
+          <p:cNvGrpSpPr/>
           <p:nvPr/>
-        </p:nvPicPr>
-        <p:blipFill>
-          <a:blip r:embed="rId4"/>
-          <a:stretch/>
-        </p:blipFill>
-        <p:spPr>
+        </p:nvGrpSpPr>
+        <p:grpSpPr>
           <a:xfrm>
-            <a:off x="4297680" y="1371600"/>
-            <a:ext cx="7406280" cy="4083480"/>
+            <a:off x="548640" y="983160"/>
+            <a:ext cx="7406280" cy="4891680"/>
+            <a:chOff x="4297680" y="1371600"/>
+            <a:chExt cx="7406280" cy="4891680"/>
           </a:xfrm>
-          <a:prstGeom prst="rect">
-            <a:avLst/>
-          </a:prstGeom>
-          <a:noFill/>
-          <a:ln w="0">
+        </p:grpSpPr>
+        <p:pic>
+          <p:nvPicPr>
+            <p:cNvPr id="53" name="a_disorder" descr="/tmp/assets/disorder_crop.png"/>
+            <p:cNvPicPr/>
+            <p:nvPr/>
+          </p:nvPicPr>
+          <p:blipFill>
+            <a:blip r:embed="rId4"/>
+            <a:stretch/>
+          </p:blipFill>
+          <p:spPr>
+            <a:xfrm>
+              <a:off x="4297680" y="1371600"/>
+              <a:ext cx="7406280" cy="4083480"/>
+            </a:xfrm>
+            <a:prstGeom prst="rect">
+              <a:avLst/>
+            </a:prstGeom>
             <a:noFill/>
-          </a:ln>
-        </p:spPr>
-      </p:pic>
-      <p:sp>
-        <p:nvSpPr>
-          <p:cNvPr id="54" name="Text 2"/>
-          <p:cNvSpPr/>
-          <p:nvPr/>
-        </p:nvSpPr>
-        <p:spPr>
-          <a:xfrm>
-            <a:off x="4297680" y="5623560"/>
-            <a:ext cx="7406280" cy="639720"/>
-          </a:xfrm>
-          <a:prstGeom prst="rect">
-            <a:avLst/>
-          </a:prstGeom>
-          <a:noFill/>
-          <a:ln w="0">
+            <a:ln w="0">
+              <a:noFill/>
+            </a:ln>
+          </p:spPr>
+        </p:pic>
+        <p:sp>
+          <p:nvSpPr>
+            <p:cNvPr id="54" name="Text 2"/>
+            <p:cNvSpPr/>
+            <p:nvPr/>
+          </p:nvSpPr>
+          <p:spPr>
+            <a:xfrm>
+              <a:off x="4297680" y="5623560"/>
+              <a:ext cx="7406280" cy="639720"/>
+            </a:xfrm>
+            <a:prstGeom prst="rect">
+              <a:avLst/>
+            </a:prstGeom>
             <a:noFill/>
-          </a:ln>
-        </p:spPr>
-        <p:style>
-          <a:lnRef idx="0">
-            <a:scrgbClr r="0" g="0" b="0"/>
-          </a:lnRef>
-          <a:fillRef idx="0">
-            <a:scrgbClr r="0" g="0" b="0"/>
-          </a:fillRef>
-          <a:effectRef idx="0">
-            <a:scrgbClr r="0" g="0" b="0"/>
-          </a:effectRef>
-          <a:fontRef idx="minor"/>
-        </p:style>
-        <p:txBody>
-          <a:bodyPr lIns="90000" tIns="45000" rIns="90000" bIns="45000" anchor="ctr">
-            <a:noAutofit/>
-          </a:bodyPr>
-          <a:lstStyle/>
-          <a:p>
-            <a:pPr defTabSz="914400">
-              <a:lnSpc>
-                <a:spcPct val="100000"/>
-              </a:lnSpc>
-              <a:tabLst>
-                <a:tab pos="0" algn="l"/>
-              </a:tabLst>
-            </a:pPr>
-            <a:r>
-              <a:rPr lang="en-US" sz="1150" b="0" i="1" u="none" strike="noStrike" dirty="0" err="1">
-                <a:solidFill>
-                  <a:srgbClr val="5A6B7B"/>
+            <a:ln w="0">
+              <a:noFill/>
+            </a:ln>
+          </p:spPr>
+          <p:style>
+            <a:lnRef idx="0">
+              <a:scrgbClr r="0" g="0" b="0"/>
+            </a:lnRef>
+            <a:fillRef idx="0">
+              <a:scrgbClr r="0" g="0" b="0"/>
+            </a:fillRef>
+            <a:effectRef idx="0">
+              <a:scrgbClr r="0" g="0" b="0"/>
+            </a:effectRef>
+            <a:fontRef idx="minor"/>
+          </p:style>
+          <p:txBody>
+            <a:bodyPr lIns="90000" tIns="45000" rIns="90000" bIns="45000" anchor="ctr">
+              <a:noAutofit/>
+            </a:bodyPr>
+            <a:lstStyle/>
+            <a:p>
+              <a:pPr defTabSz="914400">
+                <a:lnSpc>
+                  <a:spcPct val="100000"/>
+                </a:lnSpc>
+                <a:tabLst>
+                  <a:tab pos="0" algn="l"/>
+                </a:tabLst>
+              </a:pPr>
+              <a:r>
+                <a:rPr lang="en-US" sz="1150" b="0" i="1" u="none" strike="noStrike" dirty="0" err="1">
+                  <a:solidFill>
+                    <a:srgbClr val="5A6B7B"/>
+                  </a:solidFill>
+                  <a:effectLst/>
+                  <a:uFillTx/>
+                  <a:latin typeface="Calibri"/>
+                  <a:ea typeface="Calibri"/>
+                </a:rPr>
+                <a:t>IUPred</a:t>
+              </a:r>
+              <a:r>
+                <a:rPr lang="en-US" sz="1150" b="0" i="1" u="none" strike="noStrike" dirty="0">
+                  <a:solidFill>
+                    <a:srgbClr val="5A6B7B"/>
+                  </a:solidFill>
+                  <a:effectLst/>
+                  <a:uFillTx/>
+                  <a:latin typeface="Calibri"/>
+                  <a:ea typeface="Calibri"/>
+                </a:rPr>
+                <a:t> disorder profile: 61.5% disordered (red curve above 0.5). Only the C-terminal domain (aa 230–252) folds; the KEN box, FGF motif and Ser209 all sit in disordered regions.</a:t>
+              </a:r>
+              <a:endParaRPr lang="en-US" sz="1150" b="0" u="none" strike="noStrike" dirty="0">
+                <a:solidFill>
+                  <a:srgbClr val="000000"/>
                 </a:solidFill>
                 <a:effectLst/>
                 <a:uFillTx/>
-                <a:latin typeface="Calibri"/>
-                <a:ea typeface="Calibri"/>
-              </a:rPr>
-              <a:t>IUPred</a:t>
-            </a:r>
-            <a:r>
-              <a:rPr lang="en-US" sz="1150" b="0" i="1" u="none" strike="noStrike" dirty="0">
-                <a:solidFill>
-                  <a:srgbClr val="5A6B7B"/>
-                </a:solidFill>
-                <a:effectLst/>
-                <a:uFillTx/>
-                <a:latin typeface="Calibri"/>
-                <a:ea typeface="Calibri"/>
-              </a:rPr>
-              <a:t> disorder profile: 61.5% disordered (red curve above 0.5). Only the C-terminal domain (aa 230–252) folds; the KEN box, FGF motif and Ser209 all sit in disordered regions.</a:t>
-            </a:r>
-            <a:endParaRPr lang="en-US" sz="1150" b="0" u="none" strike="noStrike" dirty="0">
-              <a:solidFill>
-                <a:srgbClr val="000000"/>
-              </a:solidFill>
-              <a:effectLst/>
-              <a:uFillTx/>
-              <a:latin typeface="Arial"/>
-            </a:endParaRPr>
-          </a:p>
-        </p:txBody>
-      </p:sp>
+                <a:latin typeface="Arial"/>
+              </a:endParaRPr>
+            </a:p>
+          </p:txBody>
+        </p:sp>
+      </p:grpSp>
       <p:sp>
         <p:nvSpPr>
           <p:cNvPr id="55" name="a_key"/>
@@ -15632,7 +19808,7 @@
         </p:nvSpPr>
         <p:spPr>
           <a:xfrm>
-            <a:off x="548640" y="6327720"/>
+            <a:off x="534960" y="6098040"/>
             <a:ext cx="11091240" cy="411120"/>
           </a:xfrm>
           <a:prstGeom prst="roundRect">
@@ -15735,7 +19911,7 @@
                             </p:stCondLst>
                             <p:childTnLst>
                               <p:par>
-                                <p:cTn id="5" presetID="10" presetClass="entr" fill="hold" nodeType="clickEffect">
+                                <p:cTn id="5" presetID="10" presetClass="entr" presetSubtype="0" fill="hold" nodeType="clickEffect">
                                   <p:stCondLst>
                                     <p:cond delay="0"/>
                                   </p:stCondLst>
@@ -15748,7 +19924,7 @@
                                           </p:stCondLst>
                                         </p:cTn>
                                         <p:tgtEl>
-                                          <p:spTgt spid="51"/>
+                                          <p:spTgt spid="2"/>
                                         </p:tgtEl>
                                         <p:attrNameLst>
                                           <p:attrName>style.visibility</p:attrName>
@@ -15759,10 +19935,10 @@
                                       </p:to>
                                     </p:set>
                                     <p:animEffect transition="in" filter="fade">
-                                      <p:cBhvr additive="repl">
+                                      <p:cBhvr>
                                         <p:cTn id="7" dur="500"/>
                                         <p:tgtEl>
-                                          <p:spTgt spid="51"/>
+                                          <p:spTgt spid="2"/>
                                         </p:tgtEl>
                                       </p:cBhvr>
                                     </p:animEffect>
@@ -15788,7 +19964,7 @@
                             </p:stCondLst>
                             <p:childTnLst>
                               <p:par>
-                                <p:cTn id="10" presetID="10" presetClass="entr" fill="hold" nodeType="clickEffect">
+                                <p:cTn id="10" presetID="10" presetClass="entr" presetSubtype="0" fill="hold" nodeType="clickEffect">
                                   <p:stCondLst>
                                     <p:cond delay="0"/>
                                   </p:stCondLst>
@@ -15801,7 +19977,7 @@
                                           </p:stCondLst>
                                         </p:cTn>
                                         <p:tgtEl>
-                                          <p:spTgt spid="53"/>
+                                          <p:spTgt spid="3"/>
                                         </p:tgtEl>
                                         <p:attrNameLst>
                                           <p:attrName>style.visibility</p:attrName>
@@ -15812,10 +19988,10 @@
                                       </p:to>
                                     </p:set>
                                     <p:animEffect transition="in" filter="fade">
-                                      <p:cBhvr additive="repl">
+                                      <p:cBhvr>
                                         <p:cTn id="12" dur="500"/>
                                         <p:tgtEl>
-                                          <p:spTgt spid="53"/>
+                                          <p:spTgt spid="3"/>
                                         </p:tgtEl>
                                       </p:cBhvr>
                                     </p:animEffect>

--- a/Sororin_mechanism_flowchart.pptx
+++ b/Sororin_mechanism_flowchart.pptx
@@ -5,7 +5,7 @@
     <p:sldMasterId id="2147483648" r:id="rId1"/>
   </p:sldMasterIdLst>
   <p:notesMasterIdLst>
-    <p:notesMasterId r:id="rId12"/>
+    <p:notesMasterId r:id="rId13"/>
   </p:notesMasterIdLst>
   <p:sldIdLst>
     <p:sldId id="256" r:id="rId2"/>
@@ -18,6 +18,7 @@
     <p:sldId id="264" r:id="rId9"/>
     <p:sldId id="260" r:id="rId10"/>
     <p:sldId id="265" r:id="rId11"/>
+    <p:sldId id="266" r:id="rId12"/>
   </p:sldIdLst>
   <p:sldSz cx="12188825" cy="6858000"/>
   <p:notesSz cx="6858000" cy="12188825"/>
@@ -1414,6 +1415,112 @@
         </p:txBody>
       </p:sp>
     </p:spTree>
+  </p:cSld>
+  <p:clrMapOvr>
+    <a:masterClrMapping/>
+  </p:clrMapOvr>
+</p:notes>
+</file>
+
+<file path=ppt/notesSlides/notesSlide6.xml><?xml version="1.0" encoding="utf-8"?>
+<p:notes xmlns:a="http://schemas.openxmlformats.org/drawingml/2006/main" xmlns:r="http://schemas.openxmlformats.org/officeDocument/2006/relationships" xmlns:p="http://schemas.openxmlformats.org/presentationml/2006/main">
+  <p:cSld>
+    <p:spTree>
+      <p:nvGrpSpPr>
+        <p:cNvPr id="1" name=""/>
+        <p:cNvGrpSpPr/>
+        <p:nvPr/>
+      </p:nvGrpSpPr>
+      <p:grpSpPr>
+        <a:xfrm>
+          <a:off x="0" y="0"/>
+          <a:ext cx="0" cy="0"/>
+          <a:chOff x="0" y="0"/>
+          <a:chExt cx="0" cy="0"/>
+        </a:xfrm>
+      </p:grpSpPr>
+      <p:sp>
+        <p:nvSpPr>
+          <p:cNvPr id="2" name="Slide Image Placeholder 1"/>
+          <p:cNvSpPr>
+            <a:spLocks noGrp="1" noRot="1" noChangeAspect="1"/>
+          </p:cNvSpPr>
+          <p:nvPr>
+            <p:ph type="sldImg"/>
+          </p:nvPr>
+        </p:nvSpPr>
+        <p:spPr>
+          <a:xfrm>
+            <a:off x="217488" y="812800"/>
+            <a:ext cx="7124700" cy="4008438"/>
+          </a:xfrm>
+        </p:spPr>
+      </p:sp>
+      <p:sp>
+        <p:nvSpPr>
+          <p:cNvPr id="3" name="Notes Placeholder 2"/>
+          <p:cNvSpPr>
+            <a:spLocks noGrp="1"/>
+          </p:cNvSpPr>
+          <p:nvPr>
+            <p:ph type="body" idx="1"/>
+          </p:nvPr>
+        </p:nvSpPr>
+        <p:spPr/>
+        <p:txBody>
+          <a:bodyPr/>
+          <a:lstStyle/>
+          <a:p>
+            <a:endParaRPr lang="en-US" dirty="0"/>
+          </a:p>
+        </p:txBody>
+      </p:sp>
+      <p:sp>
+        <p:nvSpPr>
+          <p:cNvPr id="4" name="Slide Number Placeholder 3"/>
+          <p:cNvSpPr>
+            <a:spLocks noGrp="1"/>
+          </p:cNvSpPr>
+          <p:nvPr>
+            <p:ph type="sldNum" idx="3"/>
+          </p:nvPr>
+        </p:nvSpPr>
+        <p:spPr/>
+        <p:txBody>
+          <a:bodyPr/>
+          <a:lstStyle/>
+          <a:p>
+            <a:pPr indent="0" algn="r">
+              <a:buNone/>
+            </a:pPr>
+            <a:fld id="{ED1FE1BC-EA02-44F1-8101-5AC578654424}" type="slidenum">
+              <a:rPr lang="en-US" sz="1400" b="0" u="none" strike="noStrike" smtClean="0">
+                <a:solidFill>
+                  <a:srgbClr val="000000"/>
+                </a:solidFill>
+                <a:effectLst/>
+                <a:uFillTx/>
+                <a:latin typeface="Times New Roman"/>
+              </a:rPr>
+              <a:t>11</a:t>
+            </a:fld>
+            <a:endParaRPr lang="en-US" sz="1400" b="0" u="none" strike="noStrike">
+              <a:solidFill>
+                <a:srgbClr val="000000"/>
+              </a:solidFill>
+              <a:effectLst/>
+              <a:uFillTx/>
+              <a:latin typeface="Times New Roman"/>
+            </a:endParaRPr>
+          </a:p>
+        </p:txBody>
+      </p:sp>
+    </p:spTree>
+    <p:extLst>
+      <p:ext uri="{BB962C8B-B14F-4D97-AF65-F5344CB8AC3E}">
+        <p14:creationId xmlns:p14="http://schemas.microsoft.com/office/powerpoint/2010/main" val="4190029998"/>
+      </p:ext>
+    </p:extLst>
   </p:cSld>
   <p:clrMapOvr>
     <a:masterClrMapping/>
@@ -5707,6 +5814,1488 @@
       <p:bldP spid="9" grpId="0" animBg="1"/>
       <p:bldP spid="11" grpId="0"/>
       <p:bldP spid="12" grpId="0" animBg="1"/>
+    </p:bldLst>
+  </p:timing>
+</p:sld>
+</file>
+
+<file path=ppt/slides/slide11.xml><?xml version="1.0" encoding="utf-8"?>
+<p:sld xmlns:a="http://schemas.openxmlformats.org/drawingml/2006/main" xmlns:r="http://schemas.openxmlformats.org/officeDocument/2006/relationships" xmlns:p="http://schemas.openxmlformats.org/presentationml/2006/main">
+  <p:cSld>
+    <p:bg>
+      <p:bgPr>
+        <a:solidFill>
+          <a:srgbClr val="FFFFFF"/>
+        </a:solidFill>
+        <a:effectLst/>
+      </p:bgPr>
+    </p:bg>
+    <p:spTree>
+      <p:nvGrpSpPr>
+        <p:cNvPr id="1" name=""/>
+        <p:cNvGrpSpPr/>
+        <p:nvPr/>
+      </p:nvGrpSpPr>
+      <p:grpSpPr>
+        <a:xfrm>
+          <a:off x="0" y="0"/>
+          <a:ext cx="0" cy="0"/>
+          <a:chOff x="0" y="0"/>
+          <a:chExt cx="0" cy="0"/>
+        </a:xfrm>
+      </p:grpSpPr>
+      <p:sp>
+        <p:nvSpPr>
+          <p:cNvPr id="8" name="Text 0"/>
+          <p:cNvSpPr/>
+          <p:nvPr/>
+        </p:nvSpPr>
+        <p:spPr>
+          <a:xfrm>
+            <a:off x="274320" y="109800"/>
+            <a:ext cx="11612520" cy="411120"/>
+          </a:xfrm>
+          <a:prstGeom prst="rect">
+            <a:avLst/>
+          </a:prstGeom>
+          <a:noFill/>
+          <a:ln w="0">
+            <a:noFill/>
+          </a:ln>
+        </p:spPr>
+        <p:style>
+          <a:lnRef idx="0">
+            <a:scrgbClr r="0" g="0" b="0"/>
+          </a:lnRef>
+          <a:fillRef idx="0">
+            <a:scrgbClr r="0" g="0" b="0"/>
+          </a:fillRef>
+          <a:effectRef idx="0">
+            <a:scrgbClr r="0" g="0" b="0"/>
+          </a:effectRef>
+          <a:fontRef idx="minor"/>
+        </p:style>
+        <p:txBody>
+          <a:bodyPr lIns="90000" tIns="45000" rIns="90000" bIns="45000" anchor="ctr">
+            <a:noAutofit/>
+          </a:bodyPr>
+          <a:lstStyle/>
+          <a:p>
+            <a:pPr algn="ctr" defTabSz="914400">
+              <a:lnSpc>
+                <a:spcPct val="100000"/>
+              </a:lnSpc>
+              <a:tabLst>
+                <a:tab pos="0" algn="l"/>
+              </a:tabLst>
+            </a:pPr>
+            <a:r>
+              <a:rPr lang="en-US" sz="2200" b="1" u="none" strike="noStrike">
+                <a:solidFill>
+                  <a:srgbClr val="2C3E50"/>
+                </a:solidFill>
+                <a:effectLst/>
+                <a:uFillTx/>
+                <a:latin typeface="Cambria"/>
+                <a:ea typeface="Cambria"/>
+              </a:rPr>
+              <a:t>FuzPred — does each region fold, or stay fuzzy, when it binds?</a:t>
+            </a:r>
+            <a:endParaRPr lang="en-US" sz="2200" b="0" u="none" strike="noStrike">
+              <a:solidFill>
+                <a:srgbClr val="000000"/>
+              </a:solidFill>
+              <a:effectLst/>
+              <a:uFillTx/>
+              <a:latin typeface="Arial"/>
+            </a:endParaRPr>
+          </a:p>
+        </p:txBody>
+      </p:sp>
+      <p:grpSp>
+        <p:nvGrpSpPr>
+          <p:cNvPr id="2" name="Group 1">
+            <a:extLst>
+              <a:ext uri="{FF2B5EF4-FFF2-40B4-BE49-F238E27FC236}">
+                <a16:creationId xmlns:a16="http://schemas.microsoft.com/office/drawing/2014/main" id="{6147AA6C-DB40-3ECD-9047-56D82D6FB141}"/>
+              </a:ext>
+            </a:extLst>
+          </p:cNvPr>
+          <p:cNvGrpSpPr>
+            <a:grpSpLocks noChangeAspect="1"/>
+          </p:cNvGrpSpPr>
+          <p:nvPr/>
+        </p:nvGrpSpPr>
+        <p:grpSpPr>
+          <a:xfrm>
+            <a:off x="1689725" y="625078"/>
+            <a:ext cx="8809373" cy="3628898"/>
+            <a:chOff x="2326511" y="581220"/>
+            <a:chExt cx="7040520" cy="2900244"/>
+          </a:xfrm>
+        </p:grpSpPr>
+        <p:pic>
+          <p:nvPicPr>
+            <p:cNvPr id="9" name="Image 0" descr="/tmp/assets/fuzfig_crop.png"/>
+            <p:cNvPicPr/>
+            <p:nvPr/>
+          </p:nvPicPr>
+          <p:blipFill>
+            <a:blip r:embed="rId3"/>
+            <a:stretch/>
+          </p:blipFill>
+          <p:spPr>
+            <a:xfrm>
+              <a:off x="2326511" y="581220"/>
+              <a:ext cx="7040520" cy="2604600"/>
+            </a:xfrm>
+            <a:prstGeom prst="rect">
+              <a:avLst/>
+            </a:prstGeom>
+            <a:noFill/>
+            <a:ln w="0">
+              <a:noFill/>
+            </a:ln>
+          </p:spPr>
+        </p:pic>
+        <p:sp>
+          <p:nvSpPr>
+            <p:cNvPr id="10" name="Text 1"/>
+            <p:cNvSpPr/>
+            <p:nvPr/>
+          </p:nvSpPr>
+          <p:spPr>
+            <a:xfrm>
+              <a:off x="2326511" y="3262224"/>
+              <a:ext cx="7040520" cy="219240"/>
+            </a:xfrm>
+            <a:prstGeom prst="rect">
+              <a:avLst/>
+            </a:prstGeom>
+            <a:noFill/>
+            <a:ln w="0">
+              <a:noFill/>
+            </a:ln>
+          </p:spPr>
+          <p:style>
+            <a:lnRef idx="0">
+              <a:scrgbClr r="0" g="0" b="0"/>
+            </a:lnRef>
+            <a:fillRef idx="0">
+              <a:scrgbClr r="0" g="0" b="0"/>
+            </a:fillRef>
+            <a:effectRef idx="0">
+              <a:scrgbClr r="0" g="0" b="0"/>
+            </a:effectRef>
+            <a:fontRef idx="minor"/>
+          </p:style>
+          <p:txBody>
+            <a:bodyPr lIns="90000" tIns="45000" rIns="90000" bIns="45000" anchor="ctr">
+              <a:noAutofit/>
+            </a:bodyPr>
+            <a:lstStyle/>
+            <a:p>
+              <a:pPr algn="ctr" defTabSz="914400">
+                <a:lnSpc>
+                  <a:spcPct val="100000"/>
+                </a:lnSpc>
+                <a:tabLst>
+                  <a:tab pos="0" algn="l"/>
+                </a:tabLst>
+              </a:pPr>
+              <a:r>
+                <a:rPr lang="en-US" sz="850" b="0" i="1" u="none" strike="noStrike">
+                  <a:solidFill>
+                    <a:srgbClr val="5A6B7B"/>
+                  </a:solidFill>
+                  <a:effectLst/>
+                  <a:uFillTx/>
+                  <a:latin typeface="Calibri"/>
+                  <a:ea typeface="Calibri"/>
+                </a:rPr>
+                <a:t>Figure 4 (FuzPred): pDO blue · MBM green · region tracks · AlphaFold model</a:t>
+              </a:r>
+              <a:endParaRPr lang="en-US" sz="850" b="0" u="none" strike="noStrike">
+                <a:solidFill>
+                  <a:srgbClr val="000000"/>
+                </a:solidFill>
+                <a:effectLst/>
+                <a:uFillTx/>
+                <a:latin typeface="Arial"/>
+              </a:endParaRPr>
+            </a:p>
+          </p:txBody>
+        </p:sp>
+      </p:grpSp>
+      <p:sp>
+        <p:nvSpPr>
+          <p:cNvPr id="11" name="Text 2"/>
+          <p:cNvSpPr/>
+          <p:nvPr/>
+        </p:nvSpPr>
+        <p:spPr>
+          <a:xfrm>
+            <a:off x="540774" y="4460725"/>
+            <a:ext cx="3611876" cy="2170548"/>
+          </a:xfrm>
+          <a:prstGeom prst="roundRect">
+            <a:avLst>
+              <a:gd name="adj" fmla="val 1724"/>
+            </a:avLst>
+          </a:prstGeom>
+          <a:solidFill>
+            <a:srgbClr val="DCEFDD"/>
+          </a:solidFill>
+          <a:ln w="15240">
+            <a:solidFill>
+              <a:srgbClr val="1A7A34"/>
+            </a:solidFill>
+            <a:round/>
+          </a:ln>
+        </p:spPr>
+        <p:style>
+          <a:lnRef idx="0">
+            <a:scrgbClr r="0" g="0" b="0"/>
+          </a:lnRef>
+          <a:fillRef idx="0">
+            <a:scrgbClr r="0" g="0" b="0"/>
+          </a:fillRef>
+          <a:effectRef idx="0">
+            <a:scrgbClr r="0" g="0" b="0"/>
+          </a:effectRef>
+          <a:fontRef idx="minor"/>
+        </p:style>
+        <p:txBody>
+          <a:bodyPr lIns="114480" tIns="114480" rIns="114480" bIns="114480" anchor="t">
+            <a:noAutofit/>
+          </a:bodyPr>
+          <a:lstStyle/>
+          <a:p>
+            <a:pPr defTabSz="914400">
+              <a:lnSpc>
+                <a:spcPct val="100000"/>
+              </a:lnSpc>
+              <a:tabLst>
+                <a:tab pos="0" algn="l"/>
+              </a:tabLst>
+            </a:pPr>
+            <a:r>
+              <a:rPr lang="en-US" sz="1350" b="1" u="none" strike="noStrike" dirty="0">
+                <a:solidFill>
+                  <a:srgbClr val="2C3E50"/>
+                </a:solidFill>
+                <a:effectLst/>
+                <a:uFillTx/>
+                <a:latin typeface="Calibri"/>
+              </a:rPr>
+              <a:t>The direct test of ‘fuzzy’</a:t>
+            </a:r>
+            <a:endParaRPr lang="en-US" sz="1350" b="0" u="none" strike="noStrike" dirty="0">
+              <a:solidFill>
+                <a:srgbClr val="000000"/>
+              </a:solidFill>
+              <a:effectLst/>
+              <a:uFillTx/>
+              <a:latin typeface="Arial"/>
+            </a:endParaRPr>
+          </a:p>
+          <a:p>
+            <a:pPr defTabSz="914400">
+              <a:lnSpc>
+                <a:spcPct val="100000"/>
+              </a:lnSpc>
+              <a:tabLst>
+                <a:tab pos="0" algn="l"/>
+              </a:tabLst>
+            </a:pPr>
+            <a:r>
+              <a:rPr lang="en-US" sz="1100" b="0" u="none" strike="noStrike" dirty="0" err="1">
+                <a:solidFill>
+                  <a:srgbClr val="2C3E50"/>
+                </a:solidFill>
+                <a:effectLst/>
+                <a:uFillTx/>
+                <a:latin typeface="Calibri"/>
+              </a:rPr>
+              <a:t>FuzPred</a:t>
+            </a:r>
+            <a:r>
+              <a:rPr lang="en-US" sz="1100" b="0" u="none" strike="noStrike" dirty="0">
+                <a:solidFill>
+                  <a:srgbClr val="2C3E50"/>
+                </a:solidFill>
+                <a:effectLst/>
+                <a:uFillTx/>
+                <a:latin typeface="Calibri"/>
+              </a:rPr>
+              <a:t> (</a:t>
+            </a:r>
+            <a:r>
+              <a:rPr lang="en-US" sz="1100" b="0" u="none" strike="noStrike" dirty="0" err="1">
+                <a:solidFill>
+                  <a:srgbClr val="2C3E50"/>
+                </a:solidFill>
+                <a:effectLst/>
+                <a:uFillTx/>
+                <a:latin typeface="Calibri"/>
+              </a:rPr>
+              <a:t>Fuxreiter's</a:t>
+            </a:r>
+            <a:r>
+              <a:rPr lang="en-US" sz="1100" b="0" u="none" strike="noStrike" dirty="0">
+                <a:solidFill>
+                  <a:srgbClr val="2C3E50"/>
+                </a:solidFill>
+                <a:effectLst/>
+                <a:uFillTx/>
+                <a:latin typeface="Calibri"/>
+              </a:rPr>
+              <a:t> lab) predicts, per residue, whether a region folds on binding (</a:t>
+            </a:r>
+            <a:r>
+              <a:rPr lang="en-US" sz="1100" b="0" u="none" strike="noStrike" dirty="0" err="1">
+                <a:solidFill>
+                  <a:srgbClr val="2C3E50"/>
+                </a:solidFill>
+                <a:effectLst/>
+                <a:uFillTx/>
+                <a:latin typeface="Calibri"/>
+              </a:rPr>
+              <a:t>pDO</a:t>
+            </a:r>
+            <a:r>
+              <a:rPr lang="en-US" sz="1100" b="0" u="none" strike="noStrike" dirty="0">
+                <a:solidFill>
+                  <a:srgbClr val="2C3E50"/>
+                </a:solidFill>
+                <a:effectLst/>
+                <a:uFillTx/>
+                <a:latin typeface="Calibri"/>
+              </a:rPr>
+              <a:t>) or stays fuzzy, and how many binding modes it can adopt (MBM).</a:t>
+            </a:r>
+          </a:p>
+          <a:p>
+            <a:pPr defTabSz="914400">
+              <a:lnSpc>
+                <a:spcPct val="100000"/>
+              </a:lnSpc>
+              <a:tabLst>
+                <a:tab pos="0" algn="l"/>
+              </a:tabLst>
+            </a:pPr>
+            <a:endParaRPr lang="en-US" sz="1100" b="0" u="none" strike="noStrike" dirty="0">
+              <a:solidFill>
+                <a:srgbClr val="000000"/>
+              </a:solidFill>
+              <a:effectLst/>
+              <a:uFillTx/>
+              <a:latin typeface="Arial"/>
+            </a:endParaRPr>
+          </a:p>
+          <a:p>
+            <a:pPr defTabSz="914400">
+              <a:lnSpc>
+                <a:spcPct val="100000"/>
+              </a:lnSpc>
+              <a:tabLst>
+                <a:tab pos="0" algn="l"/>
+              </a:tabLst>
+            </a:pPr>
+            <a:r>
+              <a:rPr lang="en-US" sz="1200" b="1" u="none" strike="noStrike" dirty="0">
+                <a:solidFill>
+                  <a:srgbClr val="1A7A34"/>
+                </a:solidFill>
+                <a:effectLst/>
+                <a:uFillTx/>
+                <a:latin typeface="Calibri"/>
+              </a:rPr>
+              <a:t>median </a:t>
+            </a:r>
+            <a:r>
+              <a:rPr lang="en-US" sz="1200" b="1" u="none" strike="noStrike" dirty="0" err="1">
+                <a:solidFill>
+                  <a:srgbClr val="1A7A34"/>
+                </a:solidFill>
+                <a:effectLst/>
+                <a:uFillTx/>
+                <a:latin typeface="Calibri"/>
+              </a:rPr>
+              <a:t>pDO</a:t>
+            </a:r>
+            <a:r>
+              <a:rPr lang="en-US" sz="1200" b="1" u="none" strike="noStrike" dirty="0">
+                <a:solidFill>
+                  <a:srgbClr val="1A7A34"/>
+                </a:solidFill>
+                <a:effectLst/>
+                <a:uFillTx/>
+                <a:latin typeface="Calibri"/>
+              </a:rPr>
+              <a:t> 0.40   ·   68% multi-mode</a:t>
+            </a:r>
+            <a:endParaRPr lang="en-US" sz="1200" b="0" u="none" strike="noStrike" dirty="0">
+              <a:solidFill>
+                <a:srgbClr val="000000"/>
+              </a:solidFill>
+              <a:effectLst/>
+              <a:uFillTx/>
+              <a:latin typeface="Arial"/>
+            </a:endParaRPr>
+          </a:p>
+          <a:p>
+            <a:pPr defTabSz="914400">
+              <a:lnSpc>
+                <a:spcPct val="100000"/>
+              </a:lnSpc>
+              <a:tabLst>
+                <a:tab pos="0" algn="l"/>
+              </a:tabLst>
+            </a:pPr>
+            <a:r>
+              <a:rPr lang="en-US" sz="1200" b="1" u="none" strike="noStrike" dirty="0">
+                <a:solidFill>
+                  <a:srgbClr val="1A7A34"/>
+                </a:solidFill>
+                <a:effectLst/>
+                <a:uFillTx/>
+                <a:latin typeface="Calibri"/>
+              </a:rPr>
+              <a:t>63% context-dependent   ·   only 25% fold-on-binding</a:t>
+            </a:r>
+            <a:endParaRPr lang="en-US" sz="1200" b="0" u="none" strike="noStrike" dirty="0">
+              <a:solidFill>
+                <a:srgbClr val="000000"/>
+              </a:solidFill>
+              <a:effectLst/>
+              <a:uFillTx/>
+              <a:latin typeface="Arial"/>
+            </a:endParaRPr>
+          </a:p>
+          <a:p>
+            <a:pPr defTabSz="914400">
+              <a:lnSpc>
+                <a:spcPct val="100000"/>
+              </a:lnSpc>
+              <a:tabLst>
+                <a:tab pos="0" algn="l"/>
+              </a:tabLst>
+            </a:pPr>
+            <a:endParaRPr lang="en-US" sz="1150" b="1" u="none" strike="noStrike" dirty="0">
+              <a:solidFill>
+                <a:srgbClr val="B9770E"/>
+              </a:solidFill>
+              <a:effectLst/>
+              <a:uFillTx/>
+              <a:latin typeface="Calibri"/>
+            </a:endParaRPr>
+          </a:p>
+          <a:p>
+            <a:pPr defTabSz="914400">
+              <a:lnSpc>
+                <a:spcPct val="100000"/>
+              </a:lnSpc>
+              <a:tabLst>
+                <a:tab pos="0" algn="l"/>
+              </a:tabLst>
+            </a:pPr>
+            <a:r>
+              <a:rPr lang="en-US" sz="1150" b="1" u="none" strike="noStrike" dirty="0">
+                <a:solidFill>
+                  <a:srgbClr val="B9770E"/>
+                </a:solidFill>
+                <a:effectLst/>
+                <a:uFillTx/>
+                <a:latin typeface="Calibri"/>
+              </a:rPr>
+              <a:t>→ Sororin binds predominantly fuzzy &amp; multi-mode = a fuzzy hub, confirmed by her own method.</a:t>
+            </a:r>
+            <a:endParaRPr lang="en-US" sz="1150" b="0" u="none" strike="noStrike" dirty="0">
+              <a:solidFill>
+                <a:srgbClr val="000000"/>
+              </a:solidFill>
+              <a:effectLst/>
+              <a:uFillTx/>
+              <a:latin typeface="Arial"/>
+            </a:endParaRPr>
+          </a:p>
+        </p:txBody>
+      </p:sp>
+      <p:sp>
+        <p:nvSpPr>
+          <p:cNvPr id="12" name="Text 3"/>
+          <p:cNvSpPr/>
+          <p:nvPr/>
+        </p:nvSpPr>
+        <p:spPr>
+          <a:xfrm>
+            <a:off x="8036175" y="4454733"/>
+            <a:ext cx="3611876" cy="2170548"/>
+          </a:xfrm>
+          <a:prstGeom prst="roundRect">
+            <a:avLst>
+              <a:gd name="adj" fmla="val 1493"/>
+            </a:avLst>
+          </a:prstGeom>
+          <a:solidFill>
+            <a:srgbClr val="F7F7F7"/>
+          </a:solidFill>
+          <a:ln w="12700">
+            <a:solidFill>
+              <a:srgbClr val="5A6B7B"/>
+            </a:solidFill>
+            <a:round/>
+          </a:ln>
+        </p:spPr>
+        <p:style>
+          <a:lnRef idx="0">
+            <a:scrgbClr r="0" g="0" b="0"/>
+          </a:lnRef>
+          <a:fillRef idx="0">
+            <a:scrgbClr r="0" g="0" b="0"/>
+          </a:fillRef>
+          <a:effectRef idx="0">
+            <a:scrgbClr r="0" g="0" b="0"/>
+          </a:effectRef>
+          <a:fontRef idx="minor"/>
+        </p:style>
+        <p:txBody>
+          <a:bodyPr lIns="127080" tIns="127080" rIns="127080" bIns="127080" anchor="t">
+            <a:noAutofit/>
+          </a:bodyPr>
+          <a:lstStyle/>
+          <a:p>
+            <a:pPr defTabSz="914400">
+              <a:lnSpc>
+                <a:spcPct val="100000"/>
+              </a:lnSpc>
+              <a:tabLst>
+                <a:tab pos="0" algn="l"/>
+              </a:tabLst>
+            </a:pPr>
+            <a:r>
+              <a:rPr lang="en-US" sz="1300" b="1" u="none" strike="noStrike" dirty="0">
+                <a:solidFill>
+                  <a:srgbClr val="2C3E50"/>
+                </a:solidFill>
+                <a:effectLst/>
+                <a:uFillTx/>
+                <a:latin typeface="Calibri"/>
+              </a:rPr>
+              <a:t>What each determinant does when it binds</a:t>
+            </a:r>
+            <a:endParaRPr lang="en-US" sz="1300" b="0" u="none" strike="noStrike" dirty="0">
+              <a:solidFill>
+                <a:srgbClr val="000000"/>
+              </a:solidFill>
+              <a:effectLst/>
+              <a:uFillTx/>
+              <a:latin typeface="Arial"/>
+            </a:endParaRPr>
+          </a:p>
+          <a:p>
+            <a:pPr defTabSz="914400">
+              <a:lnSpc>
+                <a:spcPct val="100000"/>
+              </a:lnSpc>
+              <a:tabLst>
+                <a:tab pos="0" algn="l"/>
+              </a:tabLst>
+            </a:pPr>
+            <a:r>
+              <a:rPr lang="en-US" sz="1150" b="0" u="none" strike="noStrike" dirty="0">
+                <a:solidFill>
+                  <a:srgbClr val="2C3E50"/>
+                </a:solidFill>
+                <a:effectLst/>
+                <a:uFillTx/>
+                <a:latin typeface="Calibri"/>
+              </a:rPr>
+              <a:t>FGF motif — </a:t>
+            </a:r>
+            <a:r>
+              <a:rPr lang="en-US" sz="1150" b="0" u="none" strike="noStrike" dirty="0" err="1">
+                <a:solidFill>
+                  <a:srgbClr val="2C3E50"/>
+                </a:solidFill>
+                <a:effectLst/>
+                <a:uFillTx/>
+                <a:latin typeface="Calibri"/>
+              </a:rPr>
+              <a:t>pDO</a:t>
+            </a:r>
+            <a:r>
+              <a:rPr lang="en-US" sz="1150" b="0" u="none" strike="noStrike" dirty="0">
+                <a:solidFill>
+                  <a:srgbClr val="2C3E50"/>
+                </a:solidFill>
+                <a:effectLst/>
+                <a:uFillTx/>
+                <a:latin typeface="Calibri"/>
+              </a:rPr>
+              <a:t> 0.34, MBM 0.70  </a:t>
+            </a:r>
+            <a:r>
+              <a:rPr lang="en-US" sz="1150" b="1" u="none" strike="noStrike" dirty="0">
+                <a:solidFill>
+                  <a:srgbClr val="1A7A34"/>
+                </a:solidFill>
+                <a:effectLst/>
+                <a:uFillTx/>
+                <a:latin typeface="Calibri"/>
+              </a:rPr>
+              <a:t>→ stays fuzzy, multi-mode</a:t>
+            </a:r>
+            <a:endParaRPr lang="en-US" sz="1150" b="0" u="none" strike="noStrike" dirty="0">
+              <a:solidFill>
+                <a:srgbClr val="000000"/>
+              </a:solidFill>
+              <a:effectLst/>
+              <a:uFillTx/>
+              <a:latin typeface="Arial"/>
+            </a:endParaRPr>
+          </a:p>
+          <a:p>
+            <a:pPr defTabSz="914400">
+              <a:lnSpc>
+                <a:spcPct val="100000"/>
+              </a:lnSpc>
+              <a:tabLst>
+                <a:tab pos="0" algn="l"/>
+              </a:tabLst>
+            </a:pPr>
+            <a:r>
+              <a:rPr lang="en-US" sz="1150" b="0" u="none" strike="noStrike" dirty="0">
+                <a:solidFill>
+                  <a:srgbClr val="2C3E50"/>
+                </a:solidFill>
+                <a:effectLst/>
+                <a:uFillTx/>
+                <a:latin typeface="Calibri"/>
+              </a:rPr>
+              <a:t>Ser209 (ERK2) — </a:t>
+            </a:r>
+            <a:r>
+              <a:rPr lang="en-US" sz="1150" b="0" u="none" strike="noStrike" dirty="0" err="1">
+                <a:solidFill>
+                  <a:srgbClr val="2C3E50"/>
+                </a:solidFill>
+                <a:effectLst/>
+                <a:uFillTx/>
+                <a:latin typeface="Calibri"/>
+              </a:rPr>
+              <a:t>pDO</a:t>
+            </a:r>
+            <a:r>
+              <a:rPr lang="en-US" sz="1150" b="0" u="none" strike="noStrike" dirty="0">
+                <a:solidFill>
+                  <a:srgbClr val="2C3E50"/>
+                </a:solidFill>
+                <a:effectLst/>
+                <a:uFillTx/>
+                <a:latin typeface="Calibri"/>
+              </a:rPr>
+              <a:t> 0.33, MBM 0.80  </a:t>
+            </a:r>
+            <a:r>
+              <a:rPr lang="en-US" sz="1150" b="1" u="none" strike="noStrike" dirty="0">
+                <a:solidFill>
+                  <a:srgbClr val="1A7A34"/>
+                </a:solidFill>
+                <a:effectLst/>
+                <a:uFillTx/>
+                <a:latin typeface="Calibri"/>
+              </a:rPr>
+              <a:t>→ stays fuzzy, multi-mode</a:t>
+            </a:r>
+            <a:endParaRPr lang="en-US" sz="1150" b="0" u="none" strike="noStrike" dirty="0">
+              <a:solidFill>
+                <a:srgbClr val="000000"/>
+              </a:solidFill>
+              <a:effectLst/>
+              <a:uFillTx/>
+              <a:latin typeface="Arial"/>
+            </a:endParaRPr>
+          </a:p>
+          <a:p>
+            <a:pPr defTabSz="914400">
+              <a:lnSpc>
+                <a:spcPct val="100000"/>
+              </a:lnSpc>
+              <a:tabLst>
+                <a:tab pos="0" algn="l"/>
+              </a:tabLst>
+            </a:pPr>
+            <a:r>
+              <a:rPr lang="en-US" sz="1150" b="0" u="none" strike="noStrike" dirty="0">
+                <a:solidFill>
+                  <a:srgbClr val="2C3E50"/>
+                </a:solidFill>
+                <a:effectLst/>
+                <a:uFillTx/>
+                <a:latin typeface="Calibri"/>
+              </a:rPr>
+              <a:t>KEN box — </a:t>
+            </a:r>
+            <a:r>
+              <a:rPr lang="en-US" sz="1150" b="0" u="none" strike="noStrike" dirty="0" err="1">
+                <a:solidFill>
+                  <a:srgbClr val="2C3E50"/>
+                </a:solidFill>
+                <a:effectLst/>
+                <a:uFillTx/>
+                <a:latin typeface="Calibri"/>
+              </a:rPr>
+              <a:t>pDO</a:t>
+            </a:r>
+            <a:r>
+              <a:rPr lang="en-US" sz="1150" b="0" u="none" strike="noStrike" dirty="0">
+                <a:solidFill>
+                  <a:srgbClr val="2C3E50"/>
+                </a:solidFill>
+                <a:effectLst/>
+                <a:uFillTx/>
+                <a:latin typeface="Calibri"/>
+              </a:rPr>
+              <a:t> 0.87  </a:t>
+            </a:r>
+            <a:r>
+              <a:rPr lang="en-US" sz="1150" b="1" u="none" strike="noStrike" dirty="0">
+                <a:solidFill>
+                  <a:srgbClr val="2166AC"/>
+                </a:solidFill>
+                <a:effectLst/>
+                <a:uFillTx/>
+                <a:latin typeface="Calibri"/>
+              </a:rPr>
+              <a:t>→ folds on binding (degron grabbed by a folded machine)</a:t>
+            </a:r>
+            <a:endParaRPr lang="en-US" sz="1150" b="0" u="none" strike="noStrike" dirty="0">
+              <a:solidFill>
+                <a:srgbClr val="000000"/>
+              </a:solidFill>
+              <a:effectLst/>
+              <a:uFillTx/>
+              <a:latin typeface="Arial"/>
+            </a:endParaRPr>
+          </a:p>
+          <a:p>
+            <a:pPr defTabSz="914400">
+              <a:lnSpc>
+                <a:spcPct val="100000"/>
+              </a:lnSpc>
+              <a:tabLst>
+                <a:tab pos="0" algn="l"/>
+              </a:tabLst>
+            </a:pPr>
+            <a:r>
+              <a:rPr lang="en-US" sz="1150" b="0" u="none" strike="noStrike" dirty="0">
+                <a:solidFill>
+                  <a:srgbClr val="2C3E50"/>
+                </a:solidFill>
+                <a:effectLst/>
+                <a:uFillTx/>
+                <a:latin typeface="Calibri"/>
+              </a:rPr>
+              <a:t>C-terminal domain — </a:t>
+            </a:r>
+            <a:r>
+              <a:rPr lang="en-US" sz="1150" b="0" u="none" strike="noStrike" dirty="0" err="1">
+                <a:solidFill>
+                  <a:srgbClr val="2C3E50"/>
+                </a:solidFill>
+                <a:effectLst/>
+                <a:uFillTx/>
+                <a:latin typeface="Calibri"/>
+              </a:rPr>
+              <a:t>pDO</a:t>
+            </a:r>
+            <a:r>
+              <a:rPr lang="en-US" sz="1150" b="0" u="none" strike="noStrike" dirty="0">
+                <a:solidFill>
+                  <a:srgbClr val="2C3E50"/>
+                </a:solidFill>
+                <a:effectLst/>
+                <a:uFillTx/>
+                <a:latin typeface="Calibri"/>
+              </a:rPr>
+              <a:t> 0.66  </a:t>
+            </a:r>
+            <a:r>
+              <a:rPr lang="en-US" sz="1150" b="1" u="none" strike="noStrike" dirty="0">
+                <a:solidFill>
+                  <a:srgbClr val="2166AC"/>
+                </a:solidFill>
+                <a:effectLst/>
+                <a:uFillTx/>
+                <a:latin typeface="Calibri"/>
+              </a:rPr>
+              <a:t>→ folds (the one folded element)</a:t>
+            </a:r>
+            <a:endParaRPr lang="en-US" sz="1150" b="0" u="none" strike="noStrike" dirty="0">
+              <a:solidFill>
+                <a:srgbClr val="000000"/>
+              </a:solidFill>
+              <a:effectLst/>
+              <a:uFillTx/>
+              <a:latin typeface="Arial"/>
+            </a:endParaRPr>
+          </a:p>
+          <a:p>
+            <a:pPr defTabSz="914400">
+              <a:lnSpc>
+                <a:spcPct val="100000"/>
+              </a:lnSpc>
+              <a:tabLst>
+                <a:tab pos="0" algn="l"/>
+              </a:tabLst>
+            </a:pPr>
+            <a:r>
+              <a:rPr lang="en-US" sz="1150" b="0" i="1" u="none" strike="noStrike" dirty="0">
+                <a:solidFill>
+                  <a:srgbClr val="2C3E50"/>
+                </a:solidFill>
+                <a:effectLst/>
+                <a:uFillTx/>
+                <a:latin typeface="Calibri"/>
+              </a:rPr>
+              <a:t>→ most sites bind fuzzy; only the KEN degron and the folded domain fold.</a:t>
+            </a:r>
+            <a:endParaRPr lang="en-US" sz="1150" b="0" u="none" strike="noStrike" dirty="0">
+              <a:solidFill>
+                <a:srgbClr val="000000"/>
+              </a:solidFill>
+              <a:effectLst/>
+              <a:uFillTx/>
+              <a:latin typeface="Arial"/>
+            </a:endParaRPr>
+          </a:p>
+        </p:txBody>
+      </p:sp>
+      <p:sp>
+        <p:nvSpPr>
+          <p:cNvPr id="13" name="Text 4"/>
+          <p:cNvSpPr/>
+          <p:nvPr/>
+        </p:nvSpPr>
+        <p:spPr>
+          <a:xfrm>
+            <a:off x="4288473" y="4457729"/>
+            <a:ext cx="3611876" cy="2176540"/>
+          </a:xfrm>
+          <a:prstGeom prst="roundRect">
+            <a:avLst>
+              <a:gd name="adj" fmla="val 1493"/>
+            </a:avLst>
+          </a:prstGeom>
+          <a:solidFill>
+            <a:srgbClr val="F0E8F4"/>
+          </a:solidFill>
+          <a:ln w="12700">
+            <a:solidFill>
+              <a:srgbClr val="762A83"/>
+            </a:solidFill>
+            <a:round/>
+          </a:ln>
+        </p:spPr>
+        <p:style>
+          <a:lnRef idx="0">
+            <a:scrgbClr r="0" g="0" b="0"/>
+          </a:lnRef>
+          <a:fillRef idx="0">
+            <a:scrgbClr r="0" g="0" b="0"/>
+          </a:fillRef>
+          <a:effectRef idx="0">
+            <a:scrgbClr r="0" g="0" b="0"/>
+          </a:effectRef>
+          <a:fontRef idx="minor"/>
+        </p:style>
+        <p:txBody>
+          <a:bodyPr lIns="127080" tIns="127080" rIns="127080" bIns="127080" anchor="t">
+            <a:noAutofit/>
+          </a:bodyPr>
+          <a:lstStyle/>
+          <a:p>
+            <a:pPr defTabSz="914400">
+              <a:lnSpc>
+                <a:spcPct val="100000"/>
+              </a:lnSpc>
+              <a:tabLst>
+                <a:tab pos="0" algn="l"/>
+              </a:tabLst>
+            </a:pPr>
+            <a:r>
+              <a:rPr lang="en-US" sz="1300" b="1" u="none" strike="noStrike" dirty="0" err="1">
+                <a:solidFill>
+                  <a:srgbClr val="762A83"/>
+                </a:solidFill>
+                <a:effectLst/>
+                <a:uFillTx/>
+                <a:latin typeface="Calibri"/>
+              </a:rPr>
+              <a:t>IUPred</a:t>
+            </a:r>
+            <a:r>
+              <a:rPr lang="en-US" sz="1300" b="1" u="none" strike="noStrike" dirty="0">
+                <a:solidFill>
+                  <a:srgbClr val="762A83"/>
+                </a:solidFill>
+                <a:effectLst/>
+                <a:uFillTx/>
+                <a:latin typeface="Calibri"/>
+              </a:rPr>
+              <a:t> vs </a:t>
+            </a:r>
+            <a:r>
+              <a:rPr lang="en-US" sz="1300" b="1" u="none" strike="noStrike" dirty="0" err="1">
+                <a:solidFill>
+                  <a:srgbClr val="762A83"/>
+                </a:solidFill>
+                <a:effectLst/>
+                <a:uFillTx/>
+                <a:latin typeface="Calibri"/>
+              </a:rPr>
+              <a:t>FuzPred</a:t>
+            </a:r>
+            <a:r>
+              <a:rPr lang="en-US" sz="1300" b="1" u="none" strike="noStrike" dirty="0">
+                <a:solidFill>
+                  <a:srgbClr val="762A83"/>
+                </a:solidFill>
+                <a:effectLst/>
+                <a:uFillTx/>
+                <a:latin typeface="Calibri"/>
+              </a:rPr>
+              <a:t> — two different questions</a:t>
+            </a:r>
+            <a:endParaRPr lang="en-US" sz="1300" b="0" u="none" strike="noStrike" dirty="0">
+              <a:solidFill>
+                <a:srgbClr val="000000"/>
+              </a:solidFill>
+              <a:effectLst/>
+              <a:uFillTx/>
+              <a:latin typeface="Arial"/>
+            </a:endParaRPr>
+          </a:p>
+          <a:p>
+            <a:pPr defTabSz="914400">
+              <a:lnSpc>
+                <a:spcPct val="100000"/>
+              </a:lnSpc>
+              <a:tabLst>
+                <a:tab pos="0" algn="l"/>
+              </a:tabLst>
+            </a:pPr>
+            <a:r>
+              <a:rPr lang="en-US" sz="1150" b="1" u="none" strike="noStrike" dirty="0" err="1">
+                <a:solidFill>
+                  <a:srgbClr val="2C3E50"/>
+                </a:solidFill>
+                <a:effectLst/>
+                <a:uFillTx/>
+                <a:latin typeface="Calibri"/>
+              </a:rPr>
+              <a:t>IUPred</a:t>
+            </a:r>
+            <a:r>
+              <a:rPr lang="en-US" sz="1150" b="1" u="none" strike="noStrike" dirty="0">
+                <a:solidFill>
+                  <a:srgbClr val="2C3E50"/>
+                </a:solidFill>
+                <a:effectLst/>
+                <a:uFillTx/>
+                <a:latin typeface="Calibri"/>
+              </a:rPr>
+              <a:t> asks:  </a:t>
+            </a:r>
+            <a:r>
+              <a:rPr lang="en-US" sz="1150" b="0" i="1" u="none" strike="noStrike" dirty="0">
+                <a:solidFill>
+                  <a:srgbClr val="2C3E50"/>
+                </a:solidFill>
+                <a:effectLst/>
+                <a:uFillTx/>
+                <a:latin typeface="Calibri"/>
+              </a:rPr>
+              <a:t>is this region disordered on its own (free)?</a:t>
+            </a:r>
+            <a:endParaRPr lang="en-US" sz="1150" b="0" u="none" strike="noStrike" dirty="0">
+              <a:solidFill>
+                <a:srgbClr val="000000"/>
+              </a:solidFill>
+              <a:effectLst/>
+              <a:uFillTx/>
+              <a:latin typeface="Arial"/>
+            </a:endParaRPr>
+          </a:p>
+          <a:p>
+            <a:pPr defTabSz="914400">
+              <a:lnSpc>
+                <a:spcPct val="100000"/>
+              </a:lnSpc>
+              <a:tabLst>
+                <a:tab pos="0" algn="l"/>
+              </a:tabLst>
+            </a:pPr>
+            <a:r>
+              <a:rPr lang="en-US" sz="1150" b="1" u="none" strike="noStrike" dirty="0" err="1">
+                <a:solidFill>
+                  <a:srgbClr val="2C3E50"/>
+                </a:solidFill>
+                <a:effectLst/>
+                <a:uFillTx/>
+                <a:latin typeface="Calibri"/>
+              </a:rPr>
+              <a:t>FuzPred</a:t>
+            </a:r>
+            <a:r>
+              <a:rPr lang="en-US" sz="1150" b="1" u="none" strike="noStrike" dirty="0">
+                <a:solidFill>
+                  <a:srgbClr val="2C3E50"/>
+                </a:solidFill>
+                <a:effectLst/>
+                <a:uFillTx/>
+                <a:latin typeface="Calibri"/>
+              </a:rPr>
+              <a:t> (</a:t>
+            </a:r>
+            <a:r>
+              <a:rPr lang="en-US" sz="1150" b="1" u="none" strike="noStrike" dirty="0" err="1">
+                <a:solidFill>
+                  <a:srgbClr val="2C3E50"/>
+                </a:solidFill>
+                <a:effectLst/>
+                <a:uFillTx/>
+                <a:latin typeface="Calibri"/>
+              </a:rPr>
+              <a:t>pDO</a:t>
+            </a:r>
+            <a:r>
+              <a:rPr lang="en-US" sz="1150" b="1" u="none" strike="noStrike" dirty="0">
+                <a:solidFill>
+                  <a:srgbClr val="2C3E50"/>
+                </a:solidFill>
+                <a:effectLst/>
+                <a:uFillTx/>
+                <a:latin typeface="Calibri"/>
+              </a:rPr>
+              <a:t>) asks:  </a:t>
+            </a:r>
+            <a:r>
+              <a:rPr lang="en-US" sz="1150" b="0" i="1" u="none" strike="noStrike" dirty="0">
+                <a:solidFill>
+                  <a:srgbClr val="2C3E50"/>
+                </a:solidFill>
+                <a:effectLst/>
+                <a:uFillTx/>
+                <a:latin typeface="Calibri"/>
+              </a:rPr>
+              <a:t>when it binds, does it fold?</a:t>
+            </a:r>
+            <a:endParaRPr lang="en-US" sz="1150" b="0" u="none" strike="noStrike" dirty="0">
+              <a:solidFill>
+                <a:srgbClr val="000000"/>
+              </a:solidFill>
+              <a:effectLst/>
+              <a:uFillTx/>
+              <a:latin typeface="Arial"/>
+            </a:endParaRPr>
+          </a:p>
+          <a:p>
+            <a:pPr defTabSz="914400">
+              <a:lnSpc>
+                <a:spcPct val="100000"/>
+              </a:lnSpc>
+              <a:tabLst>
+                <a:tab pos="0" algn="l"/>
+              </a:tabLst>
+            </a:pPr>
+            <a:r>
+              <a:rPr lang="en-US" sz="1150" b="0" u="none" strike="noStrike" dirty="0">
+                <a:solidFill>
+                  <a:srgbClr val="2C3E50"/>
+                </a:solidFill>
+                <a:effectLst/>
+                <a:uFillTx/>
+                <a:latin typeface="Calibri"/>
+              </a:rPr>
+              <a:t>So the KEN box is disordered when free (</a:t>
+            </a:r>
+            <a:r>
+              <a:rPr lang="en-US" sz="1150" b="0" u="none" strike="noStrike" dirty="0" err="1">
+                <a:solidFill>
+                  <a:srgbClr val="2C3E50"/>
+                </a:solidFill>
+                <a:effectLst/>
+                <a:uFillTx/>
+                <a:latin typeface="Calibri"/>
+              </a:rPr>
+              <a:t>IUPred</a:t>
+            </a:r>
+            <a:r>
+              <a:rPr lang="en-US" sz="1150" b="0" u="none" strike="noStrike" dirty="0">
+                <a:solidFill>
+                  <a:srgbClr val="2C3E50"/>
+                </a:solidFill>
+                <a:effectLst/>
+                <a:uFillTx/>
+                <a:latin typeface="Calibri"/>
+              </a:rPr>
+              <a:t> 0.64) but folds when bound (</a:t>
+            </a:r>
+            <a:r>
+              <a:rPr lang="en-US" sz="1150" b="0" u="none" strike="noStrike" dirty="0" err="1">
+                <a:solidFill>
+                  <a:srgbClr val="2C3E50"/>
+                </a:solidFill>
+                <a:effectLst/>
+                <a:uFillTx/>
+                <a:latin typeface="Calibri"/>
+              </a:rPr>
+              <a:t>pDO</a:t>
+            </a:r>
+            <a:r>
+              <a:rPr lang="en-US" sz="1150" b="0" u="none" strike="noStrike" dirty="0">
+                <a:solidFill>
+                  <a:srgbClr val="2C3E50"/>
+                </a:solidFill>
+                <a:effectLst/>
+                <a:uFillTx/>
+                <a:latin typeface="Calibri"/>
+              </a:rPr>
+              <a:t> 0.87) — a disorder-to-order (fold-upon-binding) element. No contradiction.</a:t>
+            </a:r>
+            <a:endParaRPr lang="en-US" sz="1150" b="0" u="none" strike="noStrike" dirty="0">
+              <a:solidFill>
+                <a:srgbClr val="000000"/>
+              </a:solidFill>
+              <a:effectLst/>
+              <a:uFillTx/>
+              <a:latin typeface="Arial"/>
+            </a:endParaRPr>
+          </a:p>
+          <a:p>
+            <a:pPr defTabSz="914400">
+              <a:lnSpc>
+                <a:spcPct val="100000"/>
+              </a:lnSpc>
+              <a:tabLst>
+                <a:tab pos="0" algn="l"/>
+              </a:tabLst>
+            </a:pPr>
+            <a:endParaRPr lang="en-US" sz="1150" b="1" u="none" strike="noStrike" dirty="0">
+              <a:solidFill>
+                <a:srgbClr val="762A83"/>
+              </a:solidFill>
+              <a:effectLst/>
+              <a:uFillTx/>
+              <a:latin typeface="Calibri"/>
+            </a:endParaRPr>
+          </a:p>
+          <a:p>
+            <a:pPr defTabSz="914400">
+              <a:lnSpc>
+                <a:spcPct val="100000"/>
+              </a:lnSpc>
+              <a:tabLst>
+                <a:tab pos="0" algn="l"/>
+              </a:tabLst>
+            </a:pPr>
+            <a:r>
+              <a:rPr lang="en-US" sz="1150" b="1" u="none" strike="noStrike" dirty="0">
+                <a:solidFill>
+                  <a:srgbClr val="762A83"/>
+                </a:solidFill>
+                <a:effectLst/>
+                <a:uFillTx/>
+                <a:latin typeface="Calibri"/>
+              </a:rPr>
+              <a:t>→ disorder = the free state; </a:t>
+            </a:r>
+            <a:r>
+              <a:rPr lang="en-US" sz="1150" b="1" u="none" strike="noStrike" dirty="0" err="1">
+                <a:solidFill>
+                  <a:srgbClr val="762A83"/>
+                </a:solidFill>
+                <a:effectLst/>
+                <a:uFillTx/>
+                <a:latin typeface="Calibri"/>
+              </a:rPr>
+              <a:t>FuzPred</a:t>
+            </a:r>
+            <a:r>
+              <a:rPr lang="en-US" sz="1150" b="1" u="none" strike="noStrike" dirty="0">
+                <a:solidFill>
+                  <a:srgbClr val="762A83"/>
+                </a:solidFill>
+                <a:effectLst/>
+                <a:uFillTx/>
+                <a:latin typeface="Calibri"/>
+              </a:rPr>
+              <a:t> = the binding mode. Sororin's disordered regions aren't all alike: most stay fuzzy, the KEN degron folds.</a:t>
+            </a:r>
+            <a:endParaRPr lang="en-US" sz="1150" b="0" u="none" strike="noStrike" dirty="0">
+              <a:solidFill>
+                <a:srgbClr val="000000"/>
+              </a:solidFill>
+              <a:effectLst/>
+              <a:uFillTx/>
+              <a:latin typeface="Arial"/>
+            </a:endParaRPr>
+          </a:p>
+        </p:txBody>
+      </p:sp>
+    </p:spTree>
+  </p:cSld>
+  <p:clrMapOvr>
+    <a:masterClrMapping/>
+  </p:clrMapOvr>
+  <p:timing>
+    <p:tnLst>
+      <p:par>
+        <p:cTn id="1" dur="indefinite" restart="never" nodeType="tmRoot">
+          <p:childTnLst>
+            <p:seq concurrent="1" nextAc="seek">
+              <p:cTn id="2" dur="indefinite" nodeType="mainSeq">
+                <p:childTnLst>
+                  <p:par>
+                    <p:cTn id="3" fill="hold">
+                      <p:stCondLst>
+                        <p:cond delay="indefinite"/>
+                      </p:stCondLst>
+                      <p:childTnLst>
+                        <p:par>
+                          <p:cTn id="4" fill="hold">
+                            <p:stCondLst>
+                              <p:cond delay="0"/>
+                            </p:stCondLst>
+                            <p:childTnLst>
+                              <p:par>
+                                <p:cTn id="5" presetID="10" presetClass="entr" presetSubtype="0" fill="hold" nodeType="clickEffect">
+                                  <p:stCondLst>
+                                    <p:cond delay="0"/>
+                                  </p:stCondLst>
+                                  <p:childTnLst>
+                                    <p:set>
+                                      <p:cBhvr>
+                                        <p:cTn id="6" dur="1" fill="hold">
+                                          <p:stCondLst>
+                                            <p:cond delay="0"/>
+                                          </p:stCondLst>
+                                        </p:cTn>
+                                        <p:tgtEl>
+                                          <p:spTgt spid="2"/>
+                                        </p:tgtEl>
+                                        <p:attrNameLst>
+                                          <p:attrName>style.visibility</p:attrName>
+                                        </p:attrNameLst>
+                                      </p:cBhvr>
+                                      <p:to>
+                                        <p:strVal val="visible"/>
+                                      </p:to>
+                                    </p:set>
+                                    <p:animEffect transition="in" filter="fade">
+                                      <p:cBhvr>
+                                        <p:cTn id="7" dur="500"/>
+                                        <p:tgtEl>
+                                          <p:spTgt spid="2"/>
+                                        </p:tgtEl>
+                                      </p:cBhvr>
+                                    </p:animEffect>
+                                  </p:childTnLst>
+                                </p:cTn>
+                              </p:par>
+                            </p:childTnLst>
+                          </p:cTn>
+                        </p:par>
+                      </p:childTnLst>
+                    </p:cTn>
+                  </p:par>
+                  <p:par>
+                    <p:cTn id="8" fill="hold">
+                      <p:stCondLst>
+                        <p:cond delay="indefinite"/>
+                      </p:stCondLst>
+                      <p:childTnLst>
+                        <p:par>
+                          <p:cTn id="9" fill="hold">
+                            <p:stCondLst>
+                              <p:cond delay="0"/>
+                            </p:stCondLst>
+                            <p:childTnLst>
+                              <p:par>
+                                <p:cTn id="10" presetID="22" presetClass="entr" presetSubtype="8" fill="hold" grpId="0" nodeType="clickEffect">
+                                  <p:stCondLst>
+                                    <p:cond delay="0"/>
+                                  </p:stCondLst>
+                                  <p:childTnLst>
+                                    <p:set>
+                                      <p:cBhvr>
+                                        <p:cTn id="11" dur="1" fill="hold">
+                                          <p:stCondLst>
+                                            <p:cond delay="0"/>
+                                          </p:stCondLst>
+                                        </p:cTn>
+                                        <p:tgtEl>
+                                          <p:spTgt spid="11"/>
+                                        </p:tgtEl>
+                                        <p:attrNameLst>
+                                          <p:attrName>style.visibility</p:attrName>
+                                        </p:attrNameLst>
+                                      </p:cBhvr>
+                                      <p:to>
+                                        <p:strVal val="visible"/>
+                                      </p:to>
+                                    </p:set>
+                                    <p:animEffect transition="in" filter="wipe(left)">
+                                      <p:cBhvr>
+                                        <p:cTn id="12" dur="500"/>
+                                        <p:tgtEl>
+                                          <p:spTgt spid="11"/>
+                                        </p:tgtEl>
+                                      </p:cBhvr>
+                                    </p:animEffect>
+                                  </p:childTnLst>
+                                </p:cTn>
+                              </p:par>
+                            </p:childTnLst>
+                          </p:cTn>
+                        </p:par>
+                      </p:childTnLst>
+                    </p:cTn>
+                  </p:par>
+                  <p:par>
+                    <p:cTn id="13" fill="hold">
+                      <p:stCondLst>
+                        <p:cond delay="indefinite"/>
+                      </p:stCondLst>
+                      <p:childTnLst>
+                        <p:par>
+                          <p:cTn id="14" fill="hold">
+                            <p:stCondLst>
+                              <p:cond delay="0"/>
+                            </p:stCondLst>
+                            <p:childTnLst>
+                              <p:par>
+                                <p:cTn id="15" presetID="22" presetClass="entr" presetSubtype="8" fill="hold" grpId="0" nodeType="clickEffect">
+                                  <p:stCondLst>
+                                    <p:cond delay="0"/>
+                                  </p:stCondLst>
+                                  <p:childTnLst>
+                                    <p:set>
+                                      <p:cBhvr>
+                                        <p:cTn id="16" dur="1" fill="hold">
+                                          <p:stCondLst>
+                                            <p:cond delay="0"/>
+                                          </p:stCondLst>
+                                        </p:cTn>
+                                        <p:tgtEl>
+                                          <p:spTgt spid="13"/>
+                                        </p:tgtEl>
+                                        <p:attrNameLst>
+                                          <p:attrName>style.visibility</p:attrName>
+                                        </p:attrNameLst>
+                                      </p:cBhvr>
+                                      <p:to>
+                                        <p:strVal val="visible"/>
+                                      </p:to>
+                                    </p:set>
+                                    <p:animEffect transition="in" filter="wipe(left)">
+                                      <p:cBhvr>
+                                        <p:cTn id="17" dur="500"/>
+                                        <p:tgtEl>
+                                          <p:spTgt spid="13"/>
+                                        </p:tgtEl>
+                                      </p:cBhvr>
+                                    </p:animEffect>
+                                  </p:childTnLst>
+                                </p:cTn>
+                              </p:par>
+                            </p:childTnLst>
+                          </p:cTn>
+                        </p:par>
+                      </p:childTnLst>
+                    </p:cTn>
+                  </p:par>
+                  <p:par>
+                    <p:cTn id="18" fill="hold">
+                      <p:stCondLst>
+                        <p:cond delay="indefinite"/>
+                      </p:stCondLst>
+                      <p:childTnLst>
+                        <p:par>
+                          <p:cTn id="19" fill="hold">
+                            <p:stCondLst>
+                              <p:cond delay="0"/>
+                            </p:stCondLst>
+                            <p:childTnLst>
+                              <p:par>
+                                <p:cTn id="20" presetID="22" presetClass="entr" presetSubtype="8" fill="hold" grpId="0" nodeType="clickEffect">
+                                  <p:stCondLst>
+                                    <p:cond delay="0"/>
+                                  </p:stCondLst>
+                                  <p:childTnLst>
+                                    <p:set>
+                                      <p:cBhvr>
+                                        <p:cTn id="21" dur="1" fill="hold">
+                                          <p:stCondLst>
+                                            <p:cond delay="0"/>
+                                          </p:stCondLst>
+                                        </p:cTn>
+                                        <p:tgtEl>
+                                          <p:spTgt spid="12"/>
+                                        </p:tgtEl>
+                                        <p:attrNameLst>
+                                          <p:attrName>style.visibility</p:attrName>
+                                        </p:attrNameLst>
+                                      </p:cBhvr>
+                                      <p:to>
+                                        <p:strVal val="visible"/>
+                                      </p:to>
+                                    </p:set>
+                                    <p:animEffect transition="in" filter="wipe(left)">
+                                      <p:cBhvr>
+                                        <p:cTn id="22" dur="500"/>
+                                        <p:tgtEl>
+                                          <p:spTgt spid="12"/>
+                                        </p:tgtEl>
+                                      </p:cBhvr>
+                                    </p:animEffect>
+                                  </p:childTnLst>
+                                </p:cTn>
+                              </p:par>
+                            </p:childTnLst>
+                          </p:cTn>
+                        </p:par>
+                      </p:childTnLst>
+                    </p:cTn>
+                  </p:par>
+                </p:childTnLst>
+              </p:cTn>
+              <p:prevCondLst>
+                <p:cond evt="onPrev" delay="0">
+                  <p:tgtEl>
+                    <p:sldTgt/>
+                  </p:tgtEl>
+                </p:cond>
+              </p:prevCondLst>
+              <p:nextCondLst>
+                <p:cond evt="onNext" delay="0">
+                  <p:tgtEl>
+                    <p:sldTgt/>
+                  </p:tgtEl>
+                </p:cond>
+              </p:nextCondLst>
+            </p:seq>
+          </p:childTnLst>
+        </p:cTn>
+      </p:par>
+    </p:tnLst>
+    <p:bldLst>
+      <p:bldP spid="11" grpId="0" animBg="1"/>
+      <p:bldP spid="12" grpId="0" animBg="1"/>
+      <p:bldP spid="13" grpId="0" animBg="1"/>
     </p:bldLst>
   </p:timing>
 </p:sld>

--- a/Sororin_mechanism_flowchart.pptx
+++ b/Sororin_mechanism_flowchart.pptx
@@ -5,7 +5,7 @@
     <p:sldMasterId id="2147483648" r:id="rId1"/>
   </p:sldMasterIdLst>
   <p:notesMasterIdLst>
-    <p:notesMasterId r:id="rId13"/>
+    <p:notesMasterId r:id="rId14"/>
   </p:notesMasterIdLst>
   <p:sldIdLst>
     <p:sldId id="256" r:id="rId2"/>
@@ -19,6 +19,7 @@
     <p:sldId id="260" r:id="rId10"/>
     <p:sldId id="265" r:id="rId11"/>
     <p:sldId id="266" r:id="rId12"/>
+    <p:sldId id="267" r:id="rId13"/>
   </p:sldIdLst>
   <p:sldSz cx="12188825" cy="6858000"/>
   <p:notesSz cx="6858000" cy="12188825"/>
@@ -7296,6 +7297,3377 @@
       <p:bldP spid="11" grpId="0" animBg="1"/>
       <p:bldP spid="12" grpId="0" animBg="1"/>
       <p:bldP spid="13" grpId="0" animBg="1"/>
+    </p:bldLst>
+  </p:timing>
+</p:sld>
+</file>
+
+<file path=ppt/slides/slide12.xml><?xml version="1.0" encoding="utf-8"?>
+<p:sld xmlns:a="http://schemas.openxmlformats.org/drawingml/2006/main" xmlns:r="http://schemas.openxmlformats.org/officeDocument/2006/relationships" xmlns:p="http://schemas.openxmlformats.org/presentationml/2006/main">
+  <p:cSld>
+    <p:bg>
+      <p:bgPr>
+        <a:solidFill>
+          <a:srgbClr val="FFFFFF"/>
+        </a:solidFill>
+        <a:effectLst/>
+      </p:bgPr>
+    </p:bg>
+    <p:spTree>
+      <p:nvGrpSpPr>
+        <p:cNvPr id="1" name=""/>
+        <p:cNvGrpSpPr/>
+        <p:nvPr/>
+      </p:nvGrpSpPr>
+      <p:grpSpPr>
+        <a:xfrm>
+          <a:off x="0" y="0"/>
+          <a:ext cx="0" cy="0"/>
+          <a:chOff x="0" y="0"/>
+          <a:chExt cx="0" cy="0"/>
+        </a:xfrm>
+      </p:grpSpPr>
+      <p:sp>
+        <p:nvSpPr>
+          <p:cNvPr id="8" name="Text 0"/>
+          <p:cNvSpPr/>
+          <p:nvPr/>
+        </p:nvSpPr>
+        <p:spPr>
+          <a:xfrm>
+            <a:off x="274320" y="109800"/>
+            <a:ext cx="11612520" cy="411120"/>
+          </a:xfrm>
+          <a:prstGeom prst="rect">
+            <a:avLst/>
+          </a:prstGeom>
+          <a:noFill/>
+          <a:ln w="0">
+            <a:noFill/>
+          </a:ln>
+        </p:spPr>
+        <p:style>
+          <a:lnRef idx="0">
+            <a:scrgbClr r="0" g="0" b="0"/>
+          </a:lnRef>
+          <a:fillRef idx="0">
+            <a:scrgbClr r="0" g="0" b="0"/>
+          </a:fillRef>
+          <a:effectRef idx="0">
+            <a:scrgbClr r="0" g="0" b="0"/>
+          </a:effectRef>
+          <a:fontRef idx="minor"/>
+        </p:style>
+        <p:txBody>
+          <a:bodyPr lIns="90000" tIns="45000" rIns="90000" bIns="45000" anchor="ctr">
+            <a:noAutofit/>
+          </a:bodyPr>
+          <a:lstStyle/>
+          <a:p>
+            <a:pPr algn="ctr" defTabSz="914400">
+              <a:lnSpc>
+                <a:spcPct val="100000"/>
+              </a:lnSpc>
+              <a:tabLst>
+                <a:tab pos="0" algn="l"/>
+              </a:tabLst>
+            </a:pPr>
+            <a:r>
+              <a:rPr lang="en-US" sz="2000" b="1" u="none" strike="noStrike">
+                <a:solidFill>
+                  <a:srgbClr val="2C3E50"/>
+                </a:solidFill>
+                <a:effectLst/>
+                <a:uFillTx/>
+                <a:latin typeface="Cambria"/>
+                <a:ea typeface="Cambria"/>
+              </a:rPr>
+              <a:t>Result 3: regulation runs on the disordered chain — the switches flank the handles</a:t>
+            </a:r>
+            <a:endParaRPr lang="en-US" sz="2000" b="0" u="none" strike="noStrike">
+              <a:solidFill>
+                <a:srgbClr val="000000"/>
+              </a:solidFill>
+              <a:effectLst/>
+              <a:uFillTx/>
+              <a:latin typeface="Arial"/>
+            </a:endParaRPr>
+          </a:p>
+        </p:txBody>
+      </p:sp>
+      <p:sp>
+        <p:nvSpPr>
+          <p:cNvPr id="9" name="Text 1"/>
+          <p:cNvSpPr/>
+          <p:nvPr/>
+        </p:nvSpPr>
+        <p:spPr>
+          <a:xfrm>
+            <a:off x="1416864" y="668560"/>
+            <a:ext cx="5531760" cy="273960"/>
+          </a:xfrm>
+          <a:prstGeom prst="rect">
+            <a:avLst/>
+          </a:prstGeom>
+          <a:noFill/>
+          <a:ln w="0">
+            <a:noFill/>
+          </a:ln>
+        </p:spPr>
+        <p:style>
+          <a:lnRef idx="0">
+            <a:scrgbClr r="0" g="0" b="0"/>
+          </a:lnRef>
+          <a:fillRef idx="0">
+            <a:scrgbClr r="0" g="0" b="0"/>
+          </a:fillRef>
+          <a:effectRef idx="0">
+            <a:scrgbClr r="0" g="0" b="0"/>
+          </a:effectRef>
+          <a:fontRef idx="minor"/>
+        </p:style>
+        <p:txBody>
+          <a:bodyPr lIns="90000" tIns="45000" rIns="90000" bIns="45000" anchor="ctr">
+            <a:noAutofit/>
+          </a:bodyPr>
+          <a:lstStyle/>
+          <a:p>
+            <a:pPr defTabSz="914400">
+              <a:lnSpc>
+                <a:spcPct val="100000"/>
+              </a:lnSpc>
+              <a:tabLst>
+                <a:tab pos="0" algn="l"/>
+              </a:tabLst>
+            </a:pPr>
+            <a:r>
+              <a:rPr lang="en-US" sz="1050" b="1" u="none" strike="noStrike" dirty="0">
+                <a:solidFill>
+                  <a:srgbClr val="2C3E50"/>
+                </a:solidFill>
+                <a:effectLst/>
+                <a:uFillTx/>
+                <a:latin typeface="Calibri"/>
+                <a:ea typeface="Calibri"/>
+              </a:rPr>
+              <a:t>The 7 proline-directed (S/T-P) phospho-sites  —  candidate CDK1 / ERK targets (Table 4)</a:t>
+            </a:r>
+            <a:endParaRPr lang="en-US" sz="1050" b="0" u="none" strike="noStrike" dirty="0">
+              <a:solidFill>
+                <a:srgbClr val="000000"/>
+              </a:solidFill>
+              <a:effectLst/>
+              <a:uFillTx/>
+              <a:latin typeface="Arial"/>
+            </a:endParaRPr>
+          </a:p>
+        </p:txBody>
+      </p:sp>
+      <p:graphicFrame>
+        <p:nvGraphicFramePr>
+          <p:cNvPr id="10" name="Table 0"/>
+          <p:cNvGraphicFramePr/>
+          <p:nvPr>
+            <p:extLst>
+              <p:ext uri="{D42A27DB-BD31-4B8C-83A1-F6EECF244321}">
+                <p14:modId xmlns:p14="http://schemas.microsoft.com/office/powerpoint/2010/main" val="1750642304"/>
+              </p:ext>
+            </p:extLst>
+          </p:nvPr>
+        </p:nvGraphicFramePr>
+        <p:xfrm>
+          <a:off x="951864" y="1059980"/>
+          <a:ext cx="6461761" cy="3293800"/>
+        </p:xfrm>
+        <a:graphic>
+          <a:graphicData uri="http://schemas.openxmlformats.org/drawingml/2006/table">
+            <a:tbl>
+              <a:tblPr/>
+              <a:tblGrid>
+                <a:gridCol w="1228268">
+                  <a:extLst>
+                    <a:ext uri="{9D8B030D-6E8A-4147-A177-3AD203B41FA5}">
+                      <a16:colId xmlns:a16="http://schemas.microsoft.com/office/drawing/2014/main" val="20000"/>
+                    </a:ext>
+                  </a:extLst>
+                </a:gridCol>
+                <a:gridCol w="907851">
+                  <a:extLst>
+                    <a:ext uri="{9D8B030D-6E8A-4147-A177-3AD203B41FA5}">
+                      <a16:colId xmlns:a16="http://schemas.microsoft.com/office/drawing/2014/main" val="20001"/>
+                    </a:ext>
+                  </a:extLst>
+                </a:gridCol>
+                <a:gridCol w="2723552">
+                  <a:extLst>
+                    <a:ext uri="{9D8B030D-6E8A-4147-A177-3AD203B41FA5}">
+                      <a16:colId xmlns:a16="http://schemas.microsoft.com/office/drawing/2014/main" val="20002"/>
+                    </a:ext>
+                  </a:extLst>
+                </a:gridCol>
+                <a:gridCol w="1602090">
+                  <a:extLst>
+                    <a:ext uri="{9D8B030D-6E8A-4147-A177-3AD203B41FA5}">
+                      <a16:colId xmlns:a16="http://schemas.microsoft.com/office/drawing/2014/main" val="20003"/>
+                    </a:ext>
+                  </a:extLst>
+                </a:gridCol>
+              </a:tblGrid>
+              <a:tr h="411725">
+                <a:tc>
+                  <a:txBody>
+                    <a:bodyPr/>
+                    <a:lstStyle/>
+                    <a:p>
+                      <a:pPr defTabSz="914400">
+                        <a:lnSpc>
+                          <a:spcPct val="100000"/>
+                        </a:lnSpc>
+                        <a:tabLst>
+                          <a:tab pos="0" algn="l"/>
+                        </a:tabLst>
+                      </a:pPr>
+                      <a:r>
+                        <a:rPr lang="en-US" sz="1050" b="1" u="none" strike="noStrike">
+                          <a:solidFill>
+                            <a:srgbClr val="FFFFFF"/>
+                          </a:solidFill>
+                          <a:effectLst/>
+                          <a:uFillTx/>
+                          <a:latin typeface="Calibri"/>
+                          <a:ea typeface="Calibri"/>
+                        </a:rPr>
+                        <a:t>Site</a:t>
+                      </a:r>
+                      <a:endParaRPr lang="en-US" sz="1050" b="0" u="none" strike="noStrike">
+                        <a:solidFill>
+                          <a:srgbClr val="FFFFFF"/>
+                        </a:solidFill>
+                        <a:effectLst/>
+                        <a:uFillTx/>
+                        <a:latin typeface="Arial"/>
+                      </a:endParaRPr>
+                    </a:p>
+                  </a:txBody>
+                  <a:tcPr anchor="ctr">
+                    <a:lnL w="6480">
+                      <a:solidFill>
+                        <a:srgbClr val="CFCFCF"/>
+                      </a:solidFill>
+                      <a:prstDash val="solid"/>
+                    </a:lnL>
+                    <a:lnR w="6480">
+                      <a:solidFill>
+                        <a:srgbClr val="CFCFCF"/>
+                      </a:solidFill>
+                      <a:prstDash val="solid"/>
+                    </a:lnR>
+                    <a:lnT w="6480">
+                      <a:solidFill>
+                        <a:srgbClr val="CFCFCF"/>
+                      </a:solidFill>
+                      <a:prstDash val="solid"/>
+                    </a:lnT>
+                    <a:lnB w="6480">
+                      <a:solidFill>
+                        <a:srgbClr val="CFCFCF"/>
+                      </a:solidFill>
+                      <a:prstDash val="solid"/>
+                    </a:lnB>
+                    <a:solidFill>
+                      <a:srgbClr val="2C3E50"/>
+                    </a:solidFill>
+                  </a:tcPr>
+                </a:tc>
+                <a:tc>
+                  <a:txBody>
+                    <a:bodyPr/>
+                    <a:lstStyle/>
+                    <a:p>
+                      <a:pPr defTabSz="914400">
+                        <a:lnSpc>
+                          <a:spcPct val="100000"/>
+                        </a:lnSpc>
+                        <a:tabLst>
+                          <a:tab pos="0" algn="l"/>
+                        </a:tabLst>
+                      </a:pPr>
+                      <a:r>
+                        <a:rPr lang="en-US" sz="1050" b="1" u="none" strike="noStrike">
+                          <a:solidFill>
+                            <a:srgbClr val="FFFFFF"/>
+                          </a:solidFill>
+                          <a:effectLst/>
+                          <a:uFillTx/>
+                          <a:latin typeface="Calibri"/>
+                          <a:ea typeface="Calibri"/>
+                        </a:rPr>
+                        <a:t>S/T-P</a:t>
+                      </a:r>
+                      <a:endParaRPr lang="en-US" sz="1050" b="0" u="none" strike="noStrike">
+                        <a:solidFill>
+                          <a:srgbClr val="FFFFFF"/>
+                        </a:solidFill>
+                        <a:effectLst/>
+                        <a:uFillTx/>
+                        <a:latin typeface="Arial"/>
+                      </a:endParaRPr>
+                    </a:p>
+                  </a:txBody>
+                  <a:tcPr anchor="ctr">
+                    <a:lnL w="6480">
+                      <a:solidFill>
+                        <a:srgbClr val="CFCFCF"/>
+                      </a:solidFill>
+                      <a:prstDash val="solid"/>
+                    </a:lnL>
+                    <a:lnR w="6480">
+                      <a:solidFill>
+                        <a:srgbClr val="CFCFCF"/>
+                      </a:solidFill>
+                      <a:prstDash val="solid"/>
+                    </a:lnR>
+                    <a:lnT w="6480">
+                      <a:solidFill>
+                        <a:srgbClr val="CFCFCF"/>
+                      </a:solidFill>
+                      <a:prstDash val="solid"/>
+                    </a:lnT>
+                    <a:lnB w="6480">
+                      <a:solidFill>
+                        <a:srgbClr val="CFCFCF"/>
+                      </a:solidFill>
+                      <a:prstDash val="solid"/>
+                    </a:lnB>
+                    <a:solidFill>
+                      <a:srgbClr val="2C3E50"/>
+                    </a:solidFill>
+                  </a:tcPr>
+                </a:tc>
+                <a:tc>
+                  <a:txBody>
+                    <a:bodyPr/>
+                    <a:lstStyle/>
+                    <a:p>
+                      <a:pPr defTabSz="914400">
+                        <a:lnSpc>
+                          <a:spcPct val="100000"/>
+                        </a:lnSpc>
+                        <a:tabLst>
+                          <a:tab pos="0" algn="l"/>
+                        </a:tabLst>
+                      </a:pPr>
+                      <a:r>
+                        <a:rPr lang="en-US" sz="1050" b="1" u="none" strike="noStrike" dirty="0">
+                          <a:solidFill>
+                            <a:srgbClr val="FFFFFF"/>
+                          </a:solidFill>
+                          <a:effectLst/>
+                          <a:uFillTx/>
+                          <a:latin typeface="Calibri"/>
+                          <a:ea typeface="Calibri"/>
+                        </a:rPr>
+                        <a:t>Region</a:t>
+                      </a:r>
+                      <a:endParaRPr lang="en-US" sz="1050" b="0" u="none" strike="noStrike" dirty="0">
+                        <a:solidFill>
+                          <a:srgbClr val="FFFFFF"/>
+                        </a:solidFill>
+                        <a:effectLst/>
+                        <a:uFillTx/>
+                        <a:latin typeface="Arial"/>
+                      </a:endParaRPr>
+                    </a:p>
+                  </a:txBody>
+                  <a:tcPr anchor="ctr">
+                    <a:lnL w="6480">
+                      <a:solidFill>
+                        <a:srgbClr val="CFCFCF"/>
+                      </a:solidFill>
+                      <a:prstDash val="solid"/>
+                    </a:lnL>
+                    <a:lnR w="6480">
+                      <a:solidFill>
+                        <a:srgbClr val="CFCFCF"/>
+                      </a:solidFill>
+                      <a:prstDash val="solid"/>
+                    </a:lnR>
+                    <a:lnT w="6480">
+                      <a:solidFill>
+                        <a:srgbClr val="CFCFCF"/>
+                      </a:solidFill>
+                      <a:prstDash val="solid"/>
+                    </a:lnT>
+                    <a:lnB w="6480">
+                      <a:solidFill>
+                        <a:srgbClr val="CFCFCF"/>
+                      </a:solidFill>
+                      <a:prstDash val="solid"/>
+                    </a:lnB>
+                    <a:solidFill>
+                      <a:srgbClr val="2C3E50"/>
+                    </a:solidFill>
+                  </a:tcPr>
+                </a:tc>
+                <a:tc>
+                  <a:txBody>
+                    <a:bodyPr/>
+                    <a:lstStyle/>
+                    <a:p>
+                      <a:pPr defTabSz="914400">
+                        <a:lnSpc>
+                          <a:spcPct val="100000"/>
+                        </a:lnSpc>
+                        <a:tabLst>
+                          <a:tab pos="0" algn="l"/>
+                        </a:tabLst>
+                      </a:pPr>
+                      <a:r>
+                        <a:rPr lang="en-US" sz="1050" b="1" u="none" strike="noStrike" dirty="0">
+                          <a:solidFill>
+                            <a:srgbClr val="FFFFFF"/>
+                          </a:solidFill>
+                          <a:effectLst/>
+                          <a:uFillTx/>
+                          <a:latin typeface="Calibri"/>
+                          <a:ea typeface="Calibri"/>
+                        </a:rPr>
+                        <a:t>Role / kinase</a:t>
+                      </a:r>
+                      <a:endParaRPr lang="en-US" sz="1050" b="0" u="none" strike="noStrike" dirty="0">
+                        <a:solidFill>
+                          <a:srgbClr val="FFFFFF"/>
+                        </a:solidFill>
+                        <a:effectLst/>
+                        <a:uFillTx/>
+                        <a:latin typeface="Arial"/>
+                      </a:endParaRPr>
+                    </a:p>
+                  </a:txBody>
+                  <a:tcPr anchor="ctr">
+                    <a:lnL w="6480">
+                      <a:solidFill>
+                        <a:srgbClr val="CFCFCF"/>
+                      </a:solidFill>
+                      <a:prstDash val="solid"/>
+                    </a:lnL>
+                    <a:lnR w="6480">
+                      <a:solidFill>
+                        <a:srgbClr val="CFCFCF"/>
+                      </a:solidFill>
+                      <a:prstDash val="solid"/>
+                    </a:lnR>
+                    <a:lnT w="6480">
+                      <a:solidFill>
+                        <a:srgbClr val="CFCFCF"/>
+                      </a:solidFill>
+                      <a:prstDash val="solid"/>
+                    </a:lnT>
+                    <a:lnB w="6480">
+                      <a:solidFill>
+                        <a:srgbClr val="CFCFCF"/>
+                      </a:solidFill>
+                      <a:prstDash val="solid"/>
+                    </a:lnB>
+                    <a:solidFill>
+                      <a:srgbClr val="2C3E50"/>
+                    </a:solidFill>
+                  </a:tcPr>
+                </a:tc>
+                <a:extLst>
+                  <a:ext uri="{0D108BD9-81ED-4DB2-BD59-A6C34878D82A}">
+                    <a16:rowId xmlns:a16="http://schemas.microsoft.com/office/drawing/2014/main" val="10000"/>
+                  </a:ext>
+                </a:extLst>
+              </a:tr>
+              <a:tr h="411725">
+                <a:tc>
+                  <a:txBody>
+                    <a:bodyPr/>
+                    <a:lstStyle/>
+                    <a:p>
+                      <a:pPr defTabSz="914400">
+                        <a:lnSpc>
+                          <a:spcPct val="100000"/>
+                        </a:lnSpc>
+                        <a:tabLst>
+                          <a:tab pos="0" algn="l"/>
+                        </a:tabLst>
+                      </a:pPr>
+                      <a:r>
+                        <a:rPr lang="en-US" sz="1050" b="1" u="none" strike="noStrike">
+                          <a:solidFill>
+                            <a:srgbClr val="2C3E50"/>
+                          </a:solidFill>
+                          <a:effectLst/>
+                          <a:uFillTx/>
+                          <a:latin typeface="Calibri"/>
+                          <a:ea typeface="Calibri"/>
+                        </a:rPr>
+                        <a:t>Ser21</a:t>
+                      </a:r>
+                      <a:endParaRPr lang="en-US" sz="1050" b="0" u="none" strike="noStrike">
+                        <a:solidFill>
+                          <a:srgbClr val="000000"/>
+                        </a:solidFill>
+                        <a:effectLst/>
+                        <a:uFillTx/>
+                        <a:latin typeface="Arial"/>
+                      </a:endParaRPr>
+                    </a:p>
+                  </a:txBody>
+                  <a:tcPr anchor="ctr">
+                    <a:lnL w="6480">
+                      <a:solidFill>
+                        <a:srgbClr val="CFCFCF"/>
+                      </a:solidFill>
+                      <a:prstDash val="solid"/>
+                    </a:lnL>
+                    <a:lnR w="6480">
+                      <a:solidFill>
+                        <a:srgbClr val="CFCFCF"/>
+                      </a:solidFill>
+                      <a:prstDash val="solid"/>
+                    </a:lnR>
+                    <a:lnT w="6480">
+                      <a:solidFill>
+                        <a:srgbClr val="CFCFCF"/>
+                      </a:solidFill>
+                      <a:prstDash val="solid"/>
+                    </a:lnT>
+                    <a:lnB w="6480">
+                      <a:solidFill>
+                        <a:srgbClr val="CFCFCF"/>
+                      </a:solidFill>
+                      <a:prstDash val="solid"/>
+                    </a:lnB>
+                    <a:noFill/>
+                  </a:tcPr>
+                </a:tc>
+                <a:tc>
+                  <a:txBody>
+                    <a:bodyPr/>
+                    <a:lstStyle/>
+                    <a:p>
+                      <a:pPr algn="ctr" defTabSz="914400">
+                        <a:lnSpc>
+                          <a:spcPct val="100000"/>
+                        </a:lnSpc>
+                        <a:tabLst>
+                          <a:tab pos="0" algn="l"/>
+                        </a:tabLst>
+                      </a:pPr>
+                      <a:r>
+                        <a:rPr lang="en-US" sz="1050" b="0" u="none" strike="noStrike">
+                          <a:solidFill>
+                            <a:srgbClr val="2C3E50"/>
+                          </a:solidFill>
+                          <a:effectLst/>
+                          <a:uFillTx/>
+                          <a:latin typeface="Calibri"/>
+                          <a:ea typeface="Calibri"/>
+                        </a:rPr>
+                        <a:t>SP</a:t>
+                      </a:r>
+                      <a:endParaRPr lang="en-US" sz="1050" b="0" u="none" strike="noStrike">
+                        <a:solidFill>
+                          <a:srgbClr val="000000"/>
+                        </a:solidFill>
+                        <a:effectLst/>
+                        <a:uFillTx/>
+                        <a:latin typeface="Arial"/>
+                      </a:endParaRPr>
+                    </a:p>
+                  </a:txBody>
+                  <a:tcPr anchor="ctr">
+                    <a:lnL w="6480">
+                      <a:solidFill>
+                        <a:srgbClr val="CFCFCF"/>
+                      </a:solidFill>
+                      <a:prstDash val="solid"/>
+                    </a:lnL>
+                    <a:lnR w="6480">
+                      <a:solidFill>
+                        <a:srgbClr val="CFCFCF"/>
+                      </a:solidFill>
+                      <a:prstDash val="solid"/>
+                    </a:lnR>
+                    <a:lnT w="6480">
+                      <a:solidFill>
+                        <a:srgbClr val="CFCFCF"/>
+                      </a:solidFill>
+                      <a:prstDash val="solid"/>
+                    </a:lnT>
+                    <a:lnB w="6480">
+                      <a:solidFill>
+                        <a:srgbClr val="CFCFCF"/>
+                      </a:solidFill>
+                      <a:prstDash val="solid"/>
+                    </a:lnB>
+                    <a:noFill/>
+                  </a:tcPr>
+                </a:tc>
+                <a:tc>
+                  <a:txBody>
+                    <a:bodyPr/>
+                    <a:lstStyle/>
+                    <a:p>
+                      <a:pPr defTabSz="914400">
+                        <a:lnSpc>
+                          <a:spcPct val="100000"/>
+                        </a:lnSpc>
+                        <a:tabLst>
+                          <a:tab pos="0" algn="l"/>
+                        </a:tabLst>
+                      </a:pPr>
+                      <a:r>
+                        <a:rPr lang="en-US" sz="1050" b="0" u="none" strike="noStrike">
+                          <a:solidFill>
+                            <a:srgbClr val="2C3E50"/>
+                          </a:solidFill>
+                          <a:effectLst/>
+                          <a:uFillTx/>
+                          <a:latin typeface="Calibri"/>
+                          <a:ea typeface="Calibri"/>
+                        </a:rPr>
+                        <a:t>1–48  (N-term IDR)</a:t>
+                      </a:r>
+                      <a:endParaRPr lang="en-US" sz="1050" b="0" u="none" strike="noStrike">
+                        <a:solidFill>
+                          <a:srgbClr val="000000"/>
+                        </a:solidFill>
+                        <a:effectLst/>
+                        <a:uFillTx/>
+                        <a:latin typeface="Arial"/>
+                      </a:endParaRPr>
+                    </a:p>
+                  </a:txBody>
+                  <a:tcPr anchor="ctr">
+                    <a:lnL w="6480">
+                      <a:solidFill>
+                        <a:srgbClr val="CFCFCF"/>
+                      </a:solidFill>
+                      <a:prstDash val="solid"/>
+                    </a:lnL>
+                    <a:lnR w="6480">
+                      <a:solidFill>
+                        <a:srgbClr val="CFCFCF"/>
+                      </a:solidFill>
+                      <a:prstDash val="solid"/>
+                    </a:lnR>
+                    <a:lnT w="6480">
+                      <a:solidFill>
+                        <a:srgbClr val="CFCFCF"/>
+                      </a:solidFill>
+                      <a:prstDash val="solid"/>
+                    </a:lnT>
+                    <a:lnB w="6480">
+                      <a:solidFill>
+                        <a:srgbClr val="CFCFCF"/>
+                      </a:solidFill>
+                      <a:prstDash val="solid"/>
+                    </a:lnB>
+                    <a:noFill/>
+                  </a:tcPr>
+                </a:tc>
+                <a:tc>
+                  <a:txBody>
+                    <a:bodyPr/>
+                    <a:lstStyle/>
+                    <a:p>
+                      <a:pPr defTabSz="914400">
+                        <a:lnSpc>
+                          <a:spcPct val="100000"/>
+                        </a:lnSpc>
+                        <a:tabLst>
+                          <a:tab pos="0" algn="l"/>
+                        </a:tabLst>
+                      </a:pPr>
+                      <a:r>
+                        <a:rPr lang="en-US" sz="1050" b="0" i="1" u="none" strike="noStrike">
+                          <a:solidFill>
+                            <a:srgbClr val="2C3E50"/>
+                          </a:solidFill>
+                          <a:effectLst/>
+                          <a:uFillTx/>
+                          <a:latin typeface="Calibri"/>
+                          <a:ea typeface="Calibri"/>
+                        </a:rPr>
+                        <a:t>CDK1</a:t>
+                      </a:r>
+                      <a:endParaRPr lang="en-US" sz="1050" b="0" u="none" strike="noStrike">
+                        <a:solidFill>
+                          <a:srgbClr val="000000"/>
+                        </a:solidFill>
+                        <a:effectLst/>
+                        <a:uFillTx/>
+                        <a:latin typeface="Arial"/>
+                      </a:endParaRPr>
+                    </a:p>
+                  </a:txBody>
+                  <a:tcPr anchor="ctr">
+                    <a:lnL w="6480">
+                      <a:solidFill>
+                        <a:srgbClr val="CFCFCF"/>
+                      </a:solidFill>
+                      <a:prstDash val="solid"/>
+                    </a:lnL>
+                    <a:lnR w="6480">
+                      <a:solidFill>
+                        <a:srgbClr val="CFCFCF"/>
+                      </a:solidFill>
+                      <a:prstDash val="solid"/>
+                    </a:lnR>
+                    <a:lnT w="6480">
+                      <a:solidFill>
+                        <a:srgbClr val="CFCFCF"/>
+                      </a:solidFill>
+                      <a:prstDash val="solid"/>
+                    </a:lnT>
+                    <a:lnB w="6480">
+                      <a:solidFill>
+                        <a:srgbClr val="CFCFCF"/>
+                      </a:solidFill>
+                      <a:prstDash val="solid"/>
+                    </a:lnB>
+                    <a:noFill/>
+                  </a:tcPr>
+                </a:tc>
+                <a:extLst>
+                  <a:ext uri="{0D108BD9-81ED-4DB2-BD59-A6C34878D82A}">
+                    <a16:rowId xmlns:a16="http://schemas.microsoft.com/office/drawing/2014/main" val="10001"/>
+                  </a:ext>
+                </a:extLst>
+              </a:tr>
+              <a:tr h="411725">
+                <a:tc>
+                  <a:txBody>
+                    <a:bodyPr/>
+                    <a:lstStyle/>
+                    <a:p>
+                      <a:pPr defTabSz="914400">
+                        <a:lnSpc>
+                          <a:spcPct val="100000"/>
+                        </a:lnSpc>
+                        <a:tabLst>
+                          <a:tab pos="0" algn="l"/>
+                        </a:tabLst>
+                      </a:pPr>
+                      <a:r>
+                        <a:rPr lang="en-US" sz="1050" b="1" u="none" strike="noStrike">
+                          <a:solidFill>
+                            <a:srgbClr val="2C3E50"/>
+                          </a:solidFill>
+                          <a:effectLst/>
+                          <a:uFillTx/>
+                          <a:latin typeface="Calibri"/>
+                          <a:ea typeface="Calibri"/>
+                        </a:rPr>
+                        <a:t>Ser75</a:t>
+                      </a:r>
+                      <a:endParaRPr lang="en-US" sz="1050" b="0" u="none" strike="noStrike">
+                        <a:solidFill>
+                          <a:srgbClr val="000000"/>
+                        </a:solidFill>
+                        <a:effectLst/>
+                        <a:uFillTx/>
+                        <a:latin typeface="Arial"/>
+                      </a:endParaRPr>
+                    </a:p>
+                  </a:txBody>
+                  <a:tcPr anchor="ctr">
+                    <a:lnL w="6480">
+                      <a:solidFill>
+                        <a:srgbClr val="CFCFCF"/>
+                      </a:solidFill>
+                      <a:prstDash val="solid"/>
+                    </a:lnL>
+                    <a:lnR w="6480">
+                      <a:solidFill>
+                        <a:srgbClr val="CFCFCF"/>
+                      </a:solidFill>
+                      <a:prstDash val="solid"/>
+                    </a:lnR>
+                    <a:lnT w="6480">
+                      <a:solidFill>
+                        <a:srgbClr val="CFCFCF"/>
+                      </a:solidFill>
+                      <a:prstDash val="solid"/>
+                    </a:lnT>
+                    <a:lnB w="6480">
+                      <a:solidFill>
+                        <a:srgbClr val="CFCFCF"/>
+                      </a:solidFill>
+                      <a:prstDash val="solid"/>
+                    </a:lnB>
+                    <a:noFill/>
+                  </a:tcPr>
+                </a:tc>
+                <a:tc>
+                  <a:txBody>
+                    <a:bodyPr/>
+                    <a:lstStyle/>
+                    <a:p>
+                      <a:pPr algn="ctr" defTabSz="914400">
+                        <a:lnSpc>
+                          <a:spcPct val="100000"/>
+                        </a:lnSpc>
+                        <a:tabLst>
+                          <a:tab pos="0" algn="l"/>
+                        </a:tabLst>
+                      </a:pPr>
+                      <a:r>
+                        <a:rPr lang="en-US" sz="1050" b="0" u="none" strike="noStrike">
+                          <a:solidFill>
+                            <a:srgbClr val="2C3E50"/>
+                          </a:solidFill>
+                          <a:effectLst/>
+                          <a:uFillTx/>
+                          <a:latin typeface="Calibri"/>
+                          <a:ea typeface="Calibri"/>
+                        </a:rPr>
+                        <a:t>SP</a:t>
+                      </a:r>
+                      <a:endParaRPr lang="en-US" sz="1050" b="0" u="none" strike="noStrike">
+                        <a:solidFill>
+                          <a:srgbClr val="000000"/>
+                        </a:solidFill>
+                        <a:effectLst/>
+                        <a:uFillTx/>
+                        <a:latin typeface="Arial"/>
+                      </a:endParaRPr>
+                    </a:p>
+                  </a:txBody>
+                  <a:tcPr anchor="ctr">
+                    <a:lnL w="6480">
+                      <a:solidFill>
+                        <a:srgbClr val="CFCFCF"/>
+                      </a:solidFill>
+                      <a:prstDash val="solid"/>
+                    </a:lnL>
+                    <a:lnR w="6480">
+                      <a:solidFill>
+                        <a:srgbClr val="CFCFCF"/>
+                      </a:solidFill>
+                      <a:prstDash val="solid"/>
+                    </a:lnR>
+                    <a:lnT w="6480">
+                      <a:solidFill>
+                        <a:srgbClr val="CFCFCF"/>
+                      </a:solidFill>
+                      <a:prstDash val="solid"/>
+                    </a:lnT>
+                    <a:lnB w="6480">
+                      <a:solidFill>
+                        <a:srgbClr val="CFCFCF"/>
+                      </a:solidFill>
+                      <a:prstDash val="solid"/>
+                    </a:lnB>
+                    <a:noFill/>
+                  </a:tcPr>
+                </a:tc>
+                <a:tc>
+                  <a:txBody>
+                    <a:bodyPr/>
+                    <a:lstStyle/>
+                    <a:p>
+                      <a:pPr defTabSz="914400">
+                        <a:lnSpc>
+                          <a:spcPct val="100000"/>
+                        </a:lnSpc>
+                        <a:tabLst>
+                          <a:tab pos="0" algn="l"/>
+                        </a:tabLst>
+                      </a:pPr>
+                      <a:r>
+                        <a:rPr lang="en-US" sz="1050" b="0" u="none" strike="noStrike" dirty="0">
+                          <a:solidFill>
+                            <a:srgbClr val="2C3E50"/>
+                          </a:solidFill>
+                          <a:effectLst/>
+                          <a:uFillTx/>
+                          <a:latin typeface="Calibri"/>
+                          <a:ea typeface="Calibri"/>
+                        </a:rPr>
+                        <a:t>72–142  (central IDR)</a:t>
+                      </a:r>
+                      <a:endParaRPr lang="en-US" sz="1050" b="0" u="none" strike="noStrike" dirty="0">
+                        <a:solidFill>
+                          <a:srgbClr val="000000"/>
+                        </a:solidFill>
+                        <a:effectLst/>
+                        <a:uFillTx/>
+                        <a:latin typeface="Arial"/>
+                      </a:endParaRPr>
+                    </a:p>
+                  </a:txBody>
+                  <a:tcPr anchor="ctr">
+                    <a:lnL w="6480">
+                      <a:solidFill>
+                        <a:srgbClr val="CFCFCF"/>
+                      </a:solidFill>
+                      <a:prstDash val="solid"/>
+                    </a:lnL>
+                    <a:lnR w="6480">
+                      <a:solidFill>
+                        <a:srgbClr val="CFCFCF"/>
+                      </a:solidFill>
+                      <a:prstDash val="solid"/>
+                    </a:lnR>
+                    <a:lnT w="6480">
+                      <a:solidFill>
+                        <a:srgbClr val="CFCFCF"/>
+                      </a:solidFill>
+                      <a:prstDash val="solid"/>
+                    </a:lnT>
+                    <a:lnB w="6480">
+                      <a:solidFill>
+                        <a:srgbClr val="CFCFCF"/>
+                      </a:solidFill>
+                      <a:prstDash val="solid"/>
+                    </a:lnB>
+                    <a:noFill/>
+                  </a:tcPr>
+                </a:tc>
+                <a:tc>
+                  <a:txBody>
+                    <a:bodyPr/>
+                    <a:lstStyle/>
+                    <a:p>
+                      <a:pPr defTabSz="914400">
+                        <a:lnSpc>
+                          <a:spcPct val="100000"/>
+                        </a:lnSpc>
+                        <a:tabLst>
+                          <a:tab pos="0" algn="l"/>
+                        </a:tabLst>
+                      </a:pPr>
+                      <a:r>
+                        <a:rPr lang="en-US" sz="1050" b="0" i="1" u="none" strike="noStrike">
+                          <a:solidFill>
+                            <a:srgbClr val="2C3E50"/>
+                          </a:solidFill>
+                          <a:effectLst/>
+                          <a:uFillTx/>
+                          <a:latin typeface="Calibri"/>
+                          <a:ea typeface="Calibri"/>
+                        </a:rPr>
+                        <a:t>CDK1</a:t>
+                      </a:r>
+                      <a:endParaRPr lang="en-US" sz="1050" b="0" u="none" strike="noStrike">
+                        <a:solidFill>
+                          <a:srgbClr val="000000"/>
+                        </a:solidFill>
+                        <a:effectLst/>
+                        <a:uFillTx/>
+                        <a:latin typeface="Arial"/>
+                      </a:endParaRPr>
+                    </a:p>
+                  </a:txBody>
+                  <a:tcPr anchor="ctr">
+                    <a:lnL w="6480">
+                      <a:solidFill>
+                        <a:srgbClr val="CFCFCF"/>
+                      </a:solidFill>
+                      <a:prstDash val="solid"/>
+                    </a:lnL>
+                    <a:lnR w="6480">
+                      <a:solidFill>
+                        <a:srgbClr val="CFCFCF"/>
+                      </a:solidFill>
+                      <a:prstDash val="solid"/>
+                    </a:lnR>
+                    <a:lnT w="6480">
+                      <a:solidFill>
+                        <a:srgbClr val="CFCFCF"/>
+                      </a:solidFill>
+                      <a:prstDash val="solid"/>
+                    </a:lnT>
+                    <a:lnB w="6480">
+                      <a:solidFill>
+                        <a:srgbClr val="CFCFCF"/>
+                      </a:solidFill>
+                      <a:prstDash val="solid"/>
+                    </a:lnB>
+                    <a:noFill/>
+                  </a:tcPr>
+                </a:tc>
+                <a:extLst>
+                  <a:ext uri="{0D108BD9-81ED-4DB2-BD59-A6C34878D82A}">
+                    <a16:rowId xmlns:a16="http://schemas.microsoft.com/office/drawing/2014/main" val="10002"/>
+                  </a:ext>
+                </a:extLst>
+              </a:tr>
+              <a:tr h="411725">
+                <a:tc>
+                  <a:txBody>
+                    <a:bodyPr/>
+                    <a:lstStyle/>
+                    <a:p>
+                      <a:pPr defTabSz="914400">
+                        <a:lnSpc>
+                          <a:spcPct val="100000"/>
+                        </a:lnSpc>
+                        <a:tabLst>
+                          <a:tab pos="0" algn="l"/>
+                        </a:tabLst>
+                      </a:pPr>
+                      <a:r>
+                        <a:rPr lang="en-US" sz="1050" b="1" u="none" strike="noStrike">
+                          <a:solidFill>
+                            <a:srgbClr val="2C3E50"/>
+                          </a:solidFill>
+                          <a:effectLst/>
+                          <a:uFillTx/>
+                          <a:latin typeface="Calibri"/>
+                          <a:ea typeface="Calibri"/>
+                        </a:rPr>
+                        <a:t>Ser79</a:t>
+                      </a:r>
+                      <a:endParaRPr lang="en-US" sz="1050" b="0" u="none" strike="noStrike">
+                        <a:solidFill>
+                          <a:srgbClr val="000000"/>
+                        </a:solidFill>
+                        <a:effectLst/>
+                        <a:uFillTx/>
+                        <a:latin typeface="Arial"/>
+                      </a:endParaRPr>
+                    </a:p>
+                  </a:txBody>
+                  <a:tcPr anchor="ctr">
+                    <a:lnL w="6480">
+                      <a:solidFill>
+                        <a:srgbClr val="CFCFCF"/>
+                      </a:solidFill>
+                      <a:prstDash val="solid"/>
+                    </a:lnL>
+                    <a:lnR w="6480">
+                      <a:solidFill>
+                        <a:srgbClr val="CFCFCF"/>
+                      </a:solidFill>
+                      <a:prstDash val="solid"/>
+                    </a:lnR>
+                    <a:lnT w="6480">
+                      <a:solidFill>
+                        <a:srgbClr val="CFCFCF"/>
+                      </a:solidFill>
+                      <a:prstDash val="solid"/>
+                    </a:lnT>
+                    <a:lnB w="6480">
+                      <a:solidFill>
+                        <a:srgbClr val="CFCFCF"/>
+                      </a:solidFill>
+                      <a:prstDash val="solid"/>
+                    </a:lnB>
+                    <a:noFill/>
+                  </a:tcPr>
+                </a:tc>
+                <a:tc>
+                  <a:txBody>
+                    <a:bodyPr/>
+                    <a:lstStyle/>
+                    <a:p>
+                      <a:pPr algn="ctr" defTabSz="914400">
+                        <a:lnSpc>
+                          <a:spcPct val="100000"/>
+                        </a:lnSpc>
+                        <a:tabLst>
+                          <a:tab pos="0" algn="l"/>
+                        </a:tabLst>
+                      </a:pPr>
+                      <a:r>
+                        <a:rPr lang="en-US" sz="1050" b="0" u="none" strike="noStrike">
+                          <a:solidFill>
+                            <a:srgbClr val="2C3E50"/>
+                          </a:solidFill>
+                          <a:effectLst/>
+                          <a:uFillTx/>
+                          <a:latin typeface="Calibri"/>
+                          <a:ea typeface="Calibri"/>
+                        </a:rPr>
+                        <a:t>SP</a:t>
+                      </a:r>
+                      <a:endParaRPr lang="en-US" sz="1050" b="0" u="none" strike="noStrike">
+                        <a:solidFill>
+                          <a:srgbClr val="000000"/>
+                        </a:solidFill>
+                        <a:effectLst/>
+                        <a:uFillTx/>
+                        <a:latin typeface="Arial"/>
+                      </a:endParaRPr>
+                    </a:p>
+                  </a:txBody>
+                  <a:tcPr anchor="ctr">
+                    <a:lnL w="6480">
+                      <a:solidFill>
+                        <a:srgbClr val="CFCFCF"/>
+                      </a:solidFill>
+                      <a:prstDash val="solid"/>
+                    </a:lnL>
+                    <a:lnR w="6480">
+                      <a:solidFill>
+                        <a:srgbClr val="CFCFCF"/>
+                      </a:solidFill>
+                      <a:prstDash val="solid"/>
+                    </a:lnR>
+                    <a:lnT w="6480">
+                      <a:solidFill>
+                        <a:srgbClr val="CFCFCF"/>
+                      </a:solidFill>
+                      <a:prstDash val="solid"/>
+                    </a:lnT>
+                    <a:lnB w="6480">
+                      <a:solidFill>
+                        <a:srgbClr val="CFCFCF"/>
+                      </a:solidFill>
+                      <a:prstDash val="solid"/>
+                    </a:lnB>
+                    <a:noFill/>
+                  </a:tcPr>
+                </a:tc>
+                <a:tc>
+                  <a:txBody>
+                    <a:bodyPr/>
+                    <a:lstStyle/>
+                    <a:p>
+                      <a:pPr defTabSz="914400">
+                        <a:lnSpc>
+                          <a:spcPct val="100000"/>
+                        </a:lnSpc>
+                        <a:tabLst>
+                          <a:tab pos="0" algn="l"/>
+                        </a:tabLst>
+                      </a:pPr>
+                      <a:r>
+                        <a:rPr lang="en-US" sz="1050" b="0" u="none" strike="noStrike">
+                          <a:solidFill>
+                            <a:srgbClr val="2C3E50"/>
+                          </a:solidFill>
+                          <a:effectLst/>
+                          <a:uFillTx/>
+                          <a:latin typeface="Calibri"/>
+                          <a:ea typeface="Calibri"/>
+                        </a:rPr>
+                        <a:t>72–142  (central IDR)</a:t>
+                      </a:r>
+                      <a:endParaRPr lang="en-US" sz="1050" b="0" u="none" strike="noStrike">
+                        <a:solidFill>
+                          <a:srgbClr val="000000"/>
+                        </a:solidFill>
+                        <a:effectLst/>
+                        <a:uFillTx/>
+                        <a:latin typeface="Arial"/>
+                      </a:endParaRPr>
+                    </a:p>
+                  </a:txBody>
+                  <a:tcPr anchor="ctr">
+                    <a:lnL w="6480">
+                      <a:solidFill>
+                        <a:srgbClr val="CFCFCF"/>
+                      </a:solidFill>
+                      <a:prstDash val="solid"/>
+                    </a:lnL>
+                    <a:lnR w="6480">
+                      <a:solidFill>
+                        <a:srgbClr val="CFCFCF"/>
+                      </a:solidFill>
+                      <a:prstDash val="solid"/>
+                    </a:lnR>
+                    <a:lnT w="6480">
+                      <a:solidFill>
+                        <a:srgbClr val="CFCFCF"/>
+                      </a:solidFill>
+                      <a:prstDash val="solid"/>
+                    </a:lnT>
+                    <a:lnB w="6480">
+                      <a:solidFill>
+                        <a:srgbClr val="CFCFCF"/>
+                      </a:solidFill>
+                      <a:prstDash val="solid"/>
+                    </a:lnB>
+                    <a:noFill/>
+                  </a:tcPr>
+                </a:tc>
+                <a:tc>
+                  <a:txBody>
+                    <a:bodyPr/>
+                    <a:lstStyle/>
+                    <a:p>
+                      <a:pPr defTabSz="914400">
+                        <a:lnSpc>
+                          <a:spcPct val="100000"/>
+                        </a:lnSpc>
+                        <a:tabLst>
+                          <a:tab pos="0" algn="l"/>
+                        </a:tabLst>
+                      </a:pPr>
+                      <a:r>
+                        <a:rPr lang="en-US" sz="1050" b="0" i="1" u="none" strike="noStrike">
+                          <a:solidFill>
+                            <a:srgbClr val="2C3E50"/>
+                          </a:solidFill>
+                          <a:effectLst/>
+                          <a:uFillTx/>
+                          <a:latin typeface="Calibri"/>
+                          <a:ea typeface="Calibri"/>
+                        </a:rPr>
+                        <a:t>ERK/MAPK</a:t>
+                      </a:r>
+                      <a:endParaRPr lang="en-US" sz="1050" b="0" u="none" strike="noStrike">
+                        <a:solidFill>
+                          <a:srgbClr val="000000"/>
+                        </a:solidFill>
+                        <a:effectLst/>
+                        <a:uFillTx/>
+                        <a:latin typeface="Arial"/>
+                      </a:endParaRPr>
+                    </a:p>
+                  </a:txBody>
+                  <a:tcPr anchor="ctr">
+                    <a:lnL w="6480">
+                      <a:solidFill>
+                        <a:srgbClr val="CFCFCF"/>
+                      </a:solidFill>
+                      <a:prstDash val="solid"/>
+                    </a:lnL>
+                    <a:lnR w="6480">
+                      <a:solidFill>
+                        <a:srgbClr val="CFCFCF"/>
+                      </a:solidFill>
+                      <a:prstDash val="solid"/>
+                    </a:lnR>
+                    <a:lnT w="6480">
+                      <a:solidFill>
+                        <a:srgbClr val="CFCFCF"/>
+                      </a:solidFill>
+                      <a:prstDash val="solid"/>
+                    </a:lnT>
+                    <a:lnB w="6480">
+                      <a:solidFill>
+                        <a:srgbClr val="CFCFCF"/>
+                      </a:solidFill>
+                      <a:prstDash val="solid"/>
+                    </a:lnB>
+                    <a:noFill/>
+                  </a:tcPr>
+                </a:tc>
+                <a:extLst>
+                  <a:ext uri="{0D108BD9-81ED-4DB2-BD59-A6C34878D82A}">
+                    <a16:rowId xmlns:a16="http://schemas.microsoft.com/office/drawing/2014/main" val="10003"/>
+                  </a:ext>
+                </a:extLst>
+              </a:tr>
+              <a:tr h="411725">
+                <a:tc>
+                  <a:txBody>
+                    <a:bodyPr/>
+                    <a:lstStyle/>
+                    <a:p>
+                      <a:pPr defTabSz="914400">
+                        <a:lnSpc>
+                          <a:spcPct val="100000"/>
+                        </a:lnSpc>
+                        <a:tabLst>
+                          <a:tab pos="0" algn="l"/>
+                        </a:tabLst>
+                      </a:pPr>
+                      <a:r>
+                        <a:rPr lang="en-US" sz="1050" b="1" u="none" strike="noStrike">
+                          <a:solidFill>
+                            <a:srgbClr val="2C3E50"/>
+                          </a:solidFill>
+                          <a:effectLst/>
+                          <a:uFillTx/>
+                          <a:latin typeface="Calibri"/>
+                          <a:ea typeface="Calibri"/>
+                        </a:rPr>
+                        <a:t>Thr111</a:t>
+                      </a:r>
+                      <a:endParaRPr lang="en-US" sz="1050" b="0" u="none" strike="noStrike">
+                        <a:solidFill>
+                          <a:srgbClr val="000000"/>
+                        </a:solidFill>
+                        <a:effectLst/>
+                        <a:uFillTx/>
+                        <a:latin typeface="Arial"/>
+                      </a:endParaRPr>
+                    </a:p>
+                  </a:txBody>
+                  <a:tcPr anchor="ctr">
+                    <a:lnL w="6480">
+                      <a:solidFill>
+                        <a:srgbClr val="CFCFCF"/>
+                      </a:solidFill>
+                      <a:prstDash val="solid"/>
+                    </a:lnL>
+                    <a:lnR w="6480">
+                      <a:solidFill>
+                        <a:srgbClr val="CFCFCF"/>
+                      </a:solidFill>
+                      <a:prstDash val="solid"/>
+                    </a:lnR>
+                    <a:lnT w="6480">
+                      <a:solidFill>
+                        <a:srgbClr val="CFCFCF"/>
+                      </a:solidFill>
+                      <a:prstDash val="solid"/>
+                    </a:lnT>
+                    <a:lnB w="6480">
+                      <a:solidFill>
+                        <a:srgbClr val="CFCFCF"/>
+                      </a:solidFill>
+                      <a:prstDash val="solid"/>
+                    </a:lnB>
+                    <a:noFill/>
+                  </a:tcPr>
+                </a:tc>
+                <a:tc>
+                  <a:txBody>
+                    <a:bodyPr/>
+                    <a:lstStyle/>
+                    <a:p>
+                      <a:pPr algn="ctr" defTabSz="914400">
+                        <a:lnSpc>
+                          <a:spcPct val="100000"/>
+                        </a:lnSpc>
+                        <a:tabLst>
+                          <a:tab pos="0" algn="l"/>
+                        </a:tabLst>
+                      </a:pPr>
+                      <a:r>
+                        <a:rPr lang="en-US" sz="1050" b="0" u="none" strike="noStrike">
+                          <a:solidFill>
+                            <a:srgbClr val="2C3E50"/>
+                          </a:solidFill>
+                          <a:effectLst/>
+                          <a:uFillTx/>
+                          <a:latin typeface="Calibri"/>
+                          <a:ea typeface="Calibri"/>
+                        </a:rPr>
+                        <a:t>TP</a:t>
+                      </a:r>
+                      <a:endParaRPr lang="en-US" sz="1050" b="0" u="none" strike="noStrike">
+                        <a:solidFill>
+                          <a:srgbClr val="000000"/>
+                        </a:solidFill>
+                        <a:effectLst/>
+                        <a:uFillTx/>
+                        <a:latin typeface="Arial"/>
+                      </a:endParaRPr>
+                    </a:p>
+                  </a:txBody>
+                  <a:tcPr anchor="ctr">
+                    <a:lnL w="6480">
+                      <a:solidFill>
+                        <a:srgbClr val="CFCFCF"/>
+                      </a:solidFill>
+                      <a:prstDash val="solid"/>
+                    </a:lnL>
+                    <a:lnR w="6480">
+                      <a:solidFill>
+                        <a:srgbClr val="CFCFCF"/>
+                      </a:solidFill>
+                      <a:prstDash val="solid"/>
+                    </a:lnR>
+                    <a:lnT w="6480">
+                      <a:solidFill>
+                        <a:srgbClr val="CFCFCF"/>
+                      </a:solidFill>
+                      <a:prstDash val="solid"/>
+                    </a:lnT>
+                    <a:lnB w="6480">
+                      <a:solidFill>
+                        <a:srgbClr val="CFCFCF"/>
+                      </a:solidFill>
+                      <a:prstDash val="solid"/>
+                    </a:lnB>
+                    <a:noFill/>
+                  </a:tcPr>
+                </a:tc>
+                <a:tc>
+                  <a:txBody>
+                    <a:bodyPr/>
+                    <a:lstStyle/>
+                    <a:p>
+                      <a:pPr defTabSz="914400">
+                        <a:lnSpc>
+                          <a:spcPct val="100000"/>
+                        </a:lnSpc>
+                        <a:tabLst>
+                          <a:tab pos="0" algn="l"/>
+                        </a:tabLst>
+                      </a:pPr>
+                      <a:r>
+                        <a:rPr lang="en-US" sz="1050" b="0" u="none" strike="noStrike">
+                          <a:solidFill>
+                            <a:srgbClr val="2C3E50"/>
+                          </a:solidFill>
+                          <a:effectLst/>
+                          <a:uFillTx/>
+                          <a:latin typeface="Calibri"/>
+                          <a:ea typeface="Calibri"/>
+                        </a:rPr>
+                        <a:t>72–142  (central IDR)</a:t>
+                      </a:r>
+                      <a:endParaRPr lang="en-US" sz="1050" b="0" u="none" strike="noStrike">
+                        <a:solidFill>
+                          <a:srgbClr val="000000"/>
+                        </a:solidFill>
+                        <a:effectLst/>
+                        <a:uFillTx/>
+                        <a:latin typeface="Arial"/>
+                      </a:endParaRPr>
+                    </a:p>
+                  </a:txBody>
+                  <a:tcPr anchor="ctr">
+                    <a:lnL w="6480">
+                      <a:solidFill>
+                        <a:srgbClr val="CFCFCF"/>
+                      </a:solidFill>
+                      <a:prstDash val="solid"/>
+                    </a:lnL>
+                    <a:lnR w="6480">
+                      <a:solidFill>
+                        <a:srgbClr val="CFCFCF"/>
+                      </a:solidFill>
+                      <a:prstDash val="solid"/>
+                    </a:lnR>
+                    <a:lnT w="6480">
+                      <a:solidFill>
+                        <a:srgbClr val="CFCFCF"/>
+                      </a:solidFill>
+                      <a:prstDash val="solid"/>
+                    </a:lnT>
+                    <a:lnB w="6480">
+                      <a:solidFill>
+                        <a:srgbClr val="CFCFCF"/>
+                      </a:solidFill>
+                      <a:prstDash val="solid"/>
+                    </a:lnB>
+                    <a:noFill/>
+                  </a:tcPr>
+                </a:tc>
+                <a:tc>
+                  <a:txBody>
+                    <a:bodyPr/>
+                    <a:lstStyle/>
+                    <a:p>
+                      <a:pPr defTabSz="914400">
+                        <a:lnSpc>
+                          <a:spcPct val="100000"/>
+                        </a:lnSpc>
+                        <a:tabLst>
+                          <a:tab pos="0" algn="l"/>
+                        </a:tabLst>
+                      </a:pPr>
+                      <a:r>
+                        <a:rPr lang="en-US" sz="1050" b="0" i="1" u="none" strike="noStrike">
+                          <a:solidFill>
+                            <a:srgbClr val="2C3E50"/>
+                          </a:solidFill>
+                          <a:effectLst/>
+                          <a:uFillTx/>
+                          <a:latin typeface="Calibri"/>
+                          <a:ea typeface="Calibri"/>
+                        </a:rPr>
+                        <a:t>CDK1</a:t>
+                      </a:r>
+                      <a:endParaRPr lang="en-US" sz="1050" b="0" u="none" strike="noStrike">
+                        <a:solidFill>
+                          <a:srgbClr val="000000"/>
+                        </a:solidFill>
+                        <a:effectLst/>
+                        <a:uFillTx/>
+                        <a:latin typeface="Arial"/>
+                      </a:endParaRPr>
+                    </a:p>
+                  </a:txBody>
+                  <a:tcPr anchor="ctr">
+                    <a:lnL w="6480">
+                      <a:solidFill>
+                        <a:srgbClr val="CFCFCF"/>
+                      </a:solidFill>
+                      <a:prstDash val="solid"/>
+                    </a:lnL>
+                    <a:lnR w="6480">
+                      <a:solidFill>
+                        <a:srgbClr val="CFCFCF"/>
+                      </a:solidFill>
+                      <a:prstDash val="solid"/>
+                    </a:lnR>
+                    <a:lnT w="6480">
+                      <a:solidFill>
+                        <a:srgbClr val="CFCFCF"/>
+                      </a:solidFill>
+                      <a:prstDash val="solid"/>
+                    </a:lnT>
+                    <a:lnB w="6480">
+                      <a:solidFill>
+                        <a:srgbClr val="CFCFCF"/>
+                      </a:solidFill>
+                      <a:prstDash val="solid"/>
+                    </a:lnB>
+                    <a:noFill/>
+                  </a:tcPr>
+                </a:tc>
+                <a:extLst>
+                  <a:ext uri="{0D108BD9-81ED-4DB2-BD59-A6C34878D82A}">
+                    <a16:rowId xmlns:a16="http://schemas.microsoft.com/office/drawing/2014/main" val="10004"/>
+                  </a:ext>
+                </a:extLst>
+              </a:tr>
+              <a:tr h="411725">
+                <a:tc>
+                  <a:txBody>
+                    <a:bodyPr/>
+                    <a:lstStyle/>
+                    <a:p>
+                      <a:pPr defTabSz="914400">
+                        <a:lnSpc>
+                          <a:spcPct val="100000"/>
+                        </a:lnSpc>
+                        <a:tabLst>
+                          <a:tab pos="0" algn="l"/>
+                        </a:tabLst>
+                      </a:pPr>
+                      <a:r>
+                        <a:rPr lang="en-US" sz="1050" b="1" u="none" strike="noStrike">
+                          <a:solidFill>
+                            <a:srgbClr val="2C3E50"/>
+                          </a:solidFill>
+                          <a:effectLst/>
+                          <a:uFillTx/>
+                          <a:latin typeface="Calibri"/>
+                          <a:ea typeface="Calibri"/>
+                        </a:rPr>
+                        <a:t>Thr115</a:t>
+                      </a:r>
+                      <a:endParaRPr lang="en-US" sz="1050" b="0" u="none" strike="noStrike">
+                        <a:solidFill>
+                          <a:srgbClr val="000000"/>
+                        </a:solidFill>
+                        <a:effectLst/>
+                        <a:uFillTx/>
+                        <a:latin typeface="Arial"/>
+                      </a:endParaRPr>
+                    </a:p>
+                  </a:txBody>
+                  <a:tcPr anchor="ctr">
+                    <a:lnL w="6480">
+                      <a:solidFill>
+                        <a:srgbClr val="CFCFCF"/>
+                      </a:solidFill>
+                      <a:prstDash val="solid"/>
+                    </a:lnL>
+                    <a:lnR w="6480">
+                      <a:solidFill>
+                        <a:srgbClr val="CFCFCF"/>
+                      </a:solidFill>
+                      <a:prstDash val="solid"/>
+                    </a:lnR>
+                    <a:lnT w="6480">
+                      <a:solidFill>
+                        <a:srgbClr val="CFCFCF"/>
+                      </a:solidFill>
+                      <a:prstDash val="solid"/>
+                    </a:lnT>
+                    <a:lnB w="6480">
+                      <a:solidFill>
+                        <a:srgbClr val="CFCFCF"/>
+                      </a:solidFill>
+                      <a:prstDash val="solid"/>
+                    </a:lnB>
+                    <a:noFill/>
+                  </a:tcPr>
+                </a:tc>
+                <a:tc>
+                  <a:txBody>
+                    <a:bodyPr/>
+                    <a:lstStyle/>
+                    <a:p>
+                      <a:pPr algn="ctr" defTabSz="914400">
+                        <a:lnSpc>
+                          <a:spcPct val="100000"/>
+                        </a:lnSpc>
+                        <a:tabLst>
+                          <a:tab pos="0" algn="l"/>
+                        </a:tabLst>
+                      </a:pPr>
+                      <a:r>
+                        <a:rPr lang="en-US" sz="1050" b="0" u="none" strike="noStrike">
+                          <a:solidFill>
+                            <a:srgbClr val="2C3E50"/>
+                          </a:solidFill>
+                          <a:effectLst/>
+                          <a:uFillTx/>
+                          <a:latin typeface="Calibri"/>
+                          <a:ea typeface="Calibri"/>
+                        </a:rPr>
+                        <a:t>TP</a:t>
+                      </a:r>
+                      <a:endParaRPr lang="en-US" sz="1050" b="0" u="none" strike="noStrike">
+                        <a:solidFill>
+                          <a:srgbClr val="000000"/>
+                        </a:solidFill>
+                        <a:effectLst/>
+                        <a:uFillTx/>
+                        <a:latin typeface="Arial"/>
+                      </a:endParaRPr>
+                    </a:p>
+                  </a:txBody>
+                  <a:tcPr anchor="ctr">
+                    <a:lnL w="6480">
+                      <a:solidFill>
+                        <a:srgbClr val="CFCFCF"/>
+                      </a:solidFill>
+                      <a:prstDash val="solid"/>
+                    </a:lnL>
+                    <a:lnR w="6480">
+                      <a:solidFill>
+                        <a:srgbClr val="CFCFCF"/>
+                      </a:solidFill>
+                      <a:prstDash val="solid"/>
+                    </a:lnR>
+                    <a:lnT w="6480">
+                      <a:solidFill>
+                        <a:srgbClr val="CFCFCF"/>
+                      </a:solidFill>
+                      <a:prstDash val="solid"/>
+                    </a:lnT>
+                    <a:lnB w="6480">
+                      <a:solidFill>
+                        <a:srgbClr val="CFCFCF"/>
+                      </a:solidFill>
+                      <a:prstDash val="solid"/>
+                    </a:lnB>
+                    <a:noFill/>
+                  </a:tcPr>
+                </a:tc>
+                <a:tc>
+                  <a:txBody>
+                    <a:bodyPr/>
+                    <a:lstStyle/>
+                    <a:p>
+                      <a:pPr defTabSz="914400">
+                        <a:lnSpc>
+                          <a:spcPct val="100000"/>
+                        </a:lnSpc>
+                        <a:tabLst>
+                          <a:tab pos="0" algn="l"/>
+                        </a:tabLst>
+                      </a:pPr>
+                      <a:r>
+                        <a:rPr lang="en-US" sz="1050" b="0" u="none" strike="noStrike">
+                          <a:solidFill>
+                            <a:srgbClr val="2C3E50"/>
+                          </a:solidFill>
+                          <a:effectLst/>
+                          <a:uFillTx/>
+                          <a:latin typeface="Calibri"/>
+                          <a:ea typeface="Calibri"/>
+                        </a:rPr>
+                        <a:t>72–142  (central IDR)</a:t>
+                      </a:r>
+                      <a:endParaRPr lang="en-US" sz="1050" b="0" u="none" strike="noStrike">
+                        <a:solidFill>
+                          <a:srgbClr val="000000"/>
+                        </a:solidFill>
+                        <a:effectLst/>
+                        <a:uFillTx/>
+                        <a:latin typeface="Arial"/>
+                      </a:endParaRPr>
+                    </a:p>
+                  </a:txBody>
+                  <a:tcPr anchor="ctr">
+                    <a:lnL w="6480">
+                      <a:solidFill>
+                        <a:srgbClr val="CFCFCF"/>
+                      </a:solidFill>
+                      <a:prstDash val="solid"/>
+                    </a:lnL>
+                    <a:lnR w="6480">
+                      <a:solidFill>
+                        <a:srgbClr val="CFCFCF"/>
+                      </a:solidFill>
+                      <a:prstDash val="solid"/>
+                    </a:lnR>
+                    <a:lnT w="6480">
+                      <a:solidFill>
+                        <a:srgbClr val="CFCFCF"/>
+                      </a:solidFill>
+                      <a:prstDash val="solid"/>
+                    </a:lnT>
+                    <a:lnB w="6480">
+                      <a:solidFill>
+                        <a:srgbClr val="CFCFCF"/>
+                      </a:solidFill>
+                      <a:prstDash val="solid"/>
+                    </a:lnB>
+                    <a:noFill/>
+                  </a:tcPr>
+                </a:tc>
+                <a:tc>
+                  <a:txBody>
+                    <a:bodyPr/>
+                    <a:lstStyle/>
+                    <a:p>
+                      <a:pPr defTabSz="914400">
+                        <a:lnSpc>
+                          <a:spcPct val="100000"/>
+                        </a:lnSpc>
+                        <a:tabLst>
+                          <a:tab pos="0" algn="l"/>
+                        </a:tabLst>
+                      </a:pPr>
+                      <a:r>
+                        <a:rPr lang="en-US" sz="1050" b="0" i="1" u="none" strike="noStrike" dirty="0">
+                          <a:solidFill>
+                            <a:srgbClr val="2C3E50"/>
+                          </a:solidFill>
+                          <a:effectLst/>
+                          <a:uFillTx/>
+                          <a:latin typeface="Calibri"/>
+                          <a:ea typeface="Calibri"/>
+                        </a:rPr>
+                        <a:t>CDK1</a:t>
+                      </a:r>
+                      <a:endParaRPr lang="en-US" sz="1050" b="0" u="none" strike="noStrike" dirty="0">
+                        <a:solidFill>
+                          <a:srgbClr val="000000"/>
+                        </a:solidFill>
+                        <a:effectLst/>
+                        <a:uFillTx/>
+                        <a:latin typeface="Arial"/>
+                      </a:endParaRPr>
+                    </a:p>
+                  </a:txBody>
+                  <a:tcPr anchor="ctr">
+                    <a:lnL w="6480">
+                      <a:solidFill>
+                        <a:srgbClr val="CFCFCF"/>
+                      </a:solidFill>
+                      <a:prstDash val="solid"/>
+                    </a:lnL>
+                    <a:lnR w="6480">
+                      <a:solidFill>
+                        <a:srgbClr val="CFCFCF"/>
+                      </a:solidFill>
+                      <a:prstDash val="solid"/>
+                    </a:lnR>
+                    <a:lnT w="6480">
+                      <a:solidFill>
+                        <a:srgbClr val="CFCFCF"/>
+                      </a:solidFill>
+                      <a:prstDash val="solid"/>
+                    </a:lnT>
+                    <a:lnB w="6480">
+                      <a:solidFill>
+                        <a:srgbClr val="CFCFCF"/>
+                      </a:solidFill>
+                      <a:prstDash val="solid"/>
+                    </a:lnB>
+                    <a:noFill/>
+                  </a:tcPr>
+                </a:tc>
+                <a:extLst>
+                  <a:ext uri="{0D108BD9-81ED-4DB2-BD59-A6C34878D82A}">
+                    <a16:rowId xmlns:a16="http://schemas.microsoft.com/office/drawing/2014/main" val="10005"/>
+                  </a:ext>
+                </a:extLst>
+              </a:tr>
+              <a:tr h="411725">
+                <a:tc>
+                  <a:txBody>
+                    <a:bodyPr/>
+                    <a:lstStyle/>
+                    <a:p>
+                      <a:pPr defTabSz="914400">
+                        <a:lnSpc>
+                          <a:spcPct val="100000"/>
+                        </a:lnSpc>
+                        <a:tabLst>
+                          <a:tab pos="0" algn="l"/>
+                        </a:tabLst>
+                      </a:pPr>
+                      <a:r>
+                        <a:rPr lang="en-US" sz="1050" b="1" u="none" strike="noStrike">
+                          <a:solidFill>
+                            <a:srgbClr val="2C3E50"/>
+                          </a:solidFill>
+                          <a:effectLst/>
+                          <a:uFillTx/>
+                          <a:latin typeface="Calibri"/>
+                          <a:ea typeface="Calibri"/>
+                        </a:rPr>
+                        <a:t>Thr159</a:t>
+                      </a:r>
+                      <a:endParaRPr lang="en-US" sz="1050" b="0" u="none" strike="noStrike">
+                        <a:solidFill>
+                          <a:srgbClr val="000000"/>
+                        </a:solidFill>
+                        <a:effectLst/>
+                        <a:uFillTx/>
+                        <a:latin typeface="Arial"/>
+                      </a:endParaRPr>
+                    </a:p>
+                  </a:txBody>
+                  <a:tcPr anchor="ctr">
+                    <a:lnL w="6480">
+                      <a:solidFill>
+                        <a:srgbClr val="CFCFCF"/>
+                      </a:solidFill>
+                      <a:prstDash val="solid"/>
+                    </a:lnL>
+                    <a:lnR w="6480">
+                      <a:solidFill>
+                        <a:srgbClr val="CFCFCF"/>
+                      </a:solidFill>
+                      <a:prstDash val="solid"/>
+                    </a:lnR>
+                    <a:lnT w="6480">
+                      <a:solidFill>
+                        <a:srgbClr val="CFCFCF"/>
+                      </a:solidFill>
+                      <a:prstDash val="solid"/>
+                    </a:lnT>
+                    <a:lnB w="6480">
+                      <a:solidFill>
+                        <a:srgbClr val="CFCFCF"/>
+                      </a:solidFill>
+                      <a:prstDash val="solid"/>
+                    </a:lnB>
+                    <a:solidFill>
+                      <a:srgbClr val="FCEBD0"/>
+                    </a:solidFill>
+                  </a:tcPr>
+                </a:tc>
+                <a:tc>
+                  <a:txBody>
+                    <a:bodyPr/>
+                    <a:lstStyle/>
+                    <a:p>
+                      <a:pPr algn="ctr" defTabSz="914400">
+                        <a:lnSpc>
+                          <a:spcPct val="100000"/>
+                        </a:lnSpc>
+                        <a:tabLst>
+                          <a:tab pos="0" algn="l"/>
+                        </a:tabLst>
+                      </a:pPr>
+                      <a:r>
+                        <a:rPr lang="en-US" sz="1050" b="0" u="none" strike="noStrike">
+                          <a:solidFill>
+                            <a:srgbClr val="2C3E50"/>
+                          </a:solidFill>
+                          <a:effectLst/>
+                          <a:uFillTx/>
+                          <a:latin typeface="Calibri"/>
+                          <a:ea typeface="Calibri"/>
+                        </a:rPr>
+                        <a:t>TP</a:t>
+                      </a:r>
+                      <a:endParaRPr lang="en-US" sz="1050" b="0" u="none" strike="noStrike">
+                        <a:solidFill>
+                          <a:srgbClr val="000000"/>
+                        </a:solidFill>
+                        <a:effectLst/>
+                        <a:uFillTx/>
+                        <a:latin typeface="Arial"/>
+                      </a:endParaRPr>
+                    </a:p>
+                  </a:txBody>
+                  <a:tcPr anchor="ctr">
+                    <a:lnL w="6480">
+                      <a:solidFill>
+                        <a:srgbClr val="CFCFCF"/>
+                      </a:solidFill>
+                      <a:prstDash val="solid"/>
+                    </a:lnL>
+                    <a:lnR w="6480">
+                      <a:solidFill>
+                        <a:srgbClr val="CFCFCF"/>
+                      </a:solidFill>
+                      <a:prstDash val="solid"/>
+                    </a:lnR>
+                    <a:lnT w="6480">
+                      <a:solidFill>
+                        <a:srgbClr val="CFCFCF"/>
+                      </a:solidFill>
+                      <a:prstDash val="solid"/>
+                    </a:lnT>
+                    <a:lnB w="6480">
+                      <a:solidFill>
+                        <a:srgbClr val="CFCFCF"/>
+                      </a:solidFill>
+                      <a:prstDash val="solid"/>
+                    </a:lnB>
+                    <a:solidFill>
+                      <a:srgbClr val="FCEBD0"/>
+                    </a:solidFill>
+                  </a:tcPr>
+                </a:tc>
+                <a:tc>
+                  <a:txBody>
+                    <a:bodyPr/>
+                    <a:lstStyle/>
+                    <a:p>
+                      <a:pPr defTabSz="914400">
+                        <a:lnSpc>
+                          <a:spcPct val="100000"/>
+                        </a:lnSpc>
+                        <a:tabLst>
+                          <a:tab pos="0" algn="l"/>
+                        </a:tabLst>
+                      </a:pPr>
+                      <a:r>
+                        <a:rPr lang="en-US" sz="1050" b="0" u="none" strike="noStrike">
+                          <a:solidFill>
+                            <a:srgbClr val="2C3E50"/>
+                          </a:solidFill>
+                          <a:effectLst/>
+                          <a:uFillTx/>
+                          <a:latin typeface="Calibri"/>
+                          <a:ea typeface="Calibri"/>
+                        </a:rPr>
+                        <a:t>linker (pre-FGF)</a:t>
+                      </a:r>
+                      <a:endParaRPr lang="en-US" sz="1050" b="0" u="none" strike="noStrike">
+                        <a:solidFill>
+                          <a:srgbClr val="000000"/>
+                        </a:solidFill>
+                        <a:effectLst/>
+                        <a:uFillTx/>
+                        <a:latin typeface="Arial"/>
+                      </a:endParaRPr>
+                    </a:p>
+                  </a:txBody>
+                  <a:tcPr anchor="ctr">
+                    <a:lnL w="6480">
+                      <a:solidFill>
+                        <a:srgbClr val="CFCFCF"/>
+                      </a:solidFill>
+                      <a:prstDash val="solid"/>
+                    </a:lnL>
+                    <a:lnR w="6480">
+                      <a:solidFill>
+                        <a:srgbClr val="CFCFCF"/>
+                      </a:solidFill>
+                      <a:prstDash val="solid"/>
+                    </a:lnR>
+                    <a:lnT w="6480">
+                      <a:solidFill>
+                        <a:srgbClr val="CFCFCF"/>
+                      </a:solidFill>
+                      <a:prstDash val="solid"/>
+                    </a:lnT>
+                    <a:lnB w="6480">
+                      <a:solidFill>
+                        <a:srgbClr val="CFCFCF"/>
+                      </a:solidFill>
+                      <a:prstDash val="solid"/>
+                    </a:lnB>
+                    <a:solidFill>
+                      <a:srgbClr val="FCEBD0"/>
+                    </a:solidFill>
+                  </a:tcPr>
+                </a:tc>
+                <a:tc>
+                  <a:txBody>
+                    <a:bodyPr/>
+                    <a:lstStyle/>
+                    <a:p>
+                      <a:pPr defTabSz="914400">
+                        <a:lnSpc>
+                          <a:spcPct val="100000"/>
+                        </a:lnSpc>
+                        <a:tabLst>
+                          <a:tab pos="0" algn="l"/>
+                        </a:tabLst>
+                      </a:pPr>
+                      <a:r>
+                        <a:rPr lang="en-US" sz="1050" b="0" i="1" u="none" strike="noStrike" dirty="0">
+                          <a:solidFill>
+                            <a:srgbClr val="2C3E50"/>
+                          </a:solidFill>
+                          <a:effectLst/>
+                          <a:uFillTx/>
+                          <a:latin typeface="Calibri"/>
+                          <a:ea typeface="Calibri"/>
+                        </a:rPr>
+                        <a:t>CDK1</a:t>
+                      </a:r>
+                      <a:endParaRPr lang="en-US" sz="1050" b="0" u="none" strike="noStrike" dirty="0">
+                        <a:solidFill>
+                          <a:srgbClr val="000000"/>
+                        </a:solidFill>
+                        <a:effectLst/>
+                        <a:uFillTx/>
+                        <a:latin typeface="Arial"/>
+                      </a:endParaRPr>
+                    </a:p>
+                  </a:txBody>
+                  <a:tcPr anchor="ctr">
+                    <a:lnL w="6480">
+                      <a:solidFill>
+                        <a:srgbClr val="CFCFCF"/>
+                      </a:solidFill>
+                      <a:prstDash val="solid"/>
+                    </a:lnL>
+                    <a:lnR w="6480">
+                      <a:solidFill>
+                        <a:srgbClr val="CFCFCF"/>
+                      </a:solidFill>
+                      <a:prstDash val="solid"/>
+                    </a:lnR>
+                    <a:lnT w="6480">
+                      <a:solidFill>
+                        <a:srgbClr val="CFCFCF"/>
+                      </a:solidFill>
+                      <a:prstDash val="solid"/>
+                    </a:lnT>
+                    <a:lnB w="6480">
+                      <a:solidFill>
+                        <a:srgbClr val="CFCFCF"/>
+                      </a:solidFill>
+                      <a:prstDash val="solid"/>
+                    </a:lnB>
+                    <a:solidFill>
+                      <a:srgbClr val="FCEBD0"/>
+                    </a:solidFill>
+                  </a:tcPr>
+                </a:tc>
+                <a:extLst>
+                  <a:ext uri="{0D108BD9-81ED-4DB2-BD59-A6C34878D82A}">
+                    <a16:rowId xmlns:a16="http://schemas.microsoft.com/office/drawing/2014/main" val="10006"/>
+                  </a:ext>
+                </a:extLst>
+              </a:tr>
+              <a:tr h="411725">
+                <a:tc>
+                  <a:txBody>
+                    <a:bodyPr/>
+                    <a:lstStyle/>
+                    <a:p>
+                      <a:pPr defTabSz="914400">
+                        <a:lnSpc>
+                          <a:spcPct val="100000"/>
+                        </a:lnSpc>
+                        <a:tabLst>
+                          <a:tab pos="0" algn="l"/>
+                        </a:tabLst>
+                      </a:pPr>
+                      <a:r>
+                        <a:rPr lang="en-US" sz="1050" b="1" u="none" strike="noStrike">
+                          <a:solidFill>
+                            <a:srgbClr val="2C3E50"/>
+                          </a:solidFill>
+                          <a:effectLst/>
+                          <a:uFillTx/>
+                          <a:latin typeface="Calibri"/>
+                          <a:ea typeface="Calibri"/>
+                        </a:rPr>
+                        <a:t>Ser209</a:t>
+                      </a:r>
+                      <a:endParaRPr lang="en-US" sz="1050" b="0" u="none" strike="noStrike">
+                        <a:solidFill>
+                          <a:srgbClr val="000000"/>
+                        </a:solidFill>
+                        <a:effectLst/>
+                        <a:uFillTx/>
+                        <a:latin typeface="Arial"/>
+                      </a:endParaRPr>
+                    </a:p>
+                  </a:txBody>
+                  <a:tcPr anchor="ctr">
+                    <a:lnL w="6480">
+                      <a:solidFill>
+                        <a:srgbClr val="CFCFCF"/>
+                      </a:solidFill>
+                      <a:prstDash val="solid"/>
+                    </a:lnL>
+                    <a:lnR w="6480">
+                      <a:solidFill>
+                        <a:srgbClr val="CFCFCF"/>
+                      </a:solidFill>
+                      <a:prstDash val="solid"/>
+                    </a:lnR>
+                    <a:lnT w="6480">
+                      <a:solidFill>
+                        <a:srgbClr val="CFCFCF"/>
+                      </a:solidFill>
+                      <a:prstDash val="solid"/>
+                    </a:lnT>
+                    <a:lnB w="6480">
+                      <a:solidFill>
+                        <a:srgbClr val="CFCFCF"/>
+                      </a:solidFill>
+                      <a:prstDash val="solid"/>
+                    </a:lnB>
+                    <a:solidFill>
+                      <a:srgbClr val="F7DBDB"/>
+                    </a:solidFill>
+                  </a:tcPr>
+                </a:tc>
+                <a:tc>
+                  <a:txBody>
+                    <a:bodyPr/>
+                    <a:lstStyle/>
+                    <a:p>
+                      <a:pPr algn="ctr" defTabSz="914400">
+                        <a:lnSpc>
+                          <a:spcPct val="100000"/>
+                        </a:lnSpc>
+                        <a:tabLst>
+                          <a:tab pos="0" algn="l"/>
+                        </a:tabLst>
+                      </a:pPr>
+                      <a:r>
+                        <a:rPr lang="en-US" sz="1050" b="0" u="none" strike="noStrike">
+                          <a:solidFill>
+                            <a:srgbClr val="2C3E50"/>
+                          </a:solidFill>
+                          <a:effectLst/>
+                          <a:uFillTx/>
+                          <a:latin typeface="Calibri"/>
+                          <a:ea typeface="Calibri"/>
+                        </a:rPr>
+                        <a:t>SP</a:t>
+                      </a:r>
+                      <a:endParaRPr lang="en-US" sz="1050" b="0" u="none" strike="noStrike">
+                        <a:solidFill>
+                          <a:srgbClr val="000000"/>
+                        </a:solidFill>
+                        <a:effectLst/>
+                        <a:uFillTx/>
+                        <a:latin typeface="Arial"/>
+                      </a:endParaRPr>
+                    </a:p>
+                  </a:txBody>
+                  <a:tcPr anchor="ctr">
+                    <a:lnL w="6480">
+                      <a:solidFill>
+                        <a:srgbClr val="CFCFCF"/>
+                      </a:solidFill>
+                      <a:prstDash val="solid"/>
+                    </a:lnL>
+                    <a:lnR w="6480">
+                      <a:solidFill>
+                        <a:srgbClr val="CFCFCF"/>
+                      </a:solidFill>
+                      <a:prstDash val="solid"/>
+                    </a:lnR>
+                    <a:lnT w="6480">
+                      <a:solidFill>
+                        <a:srgbClr val="CFCFCF"/>
+                      </a:solidFill>
+                      <a:prstDash val="solid"/>
+                    </a:lnT>
+                    <a:lnB w="6480">
+                      <a:solidFill>
+                        <a:srgbClr val="CFCFCF"/>
+                      </a:solidFill>
+                      <a:prstDash val="solid"/>
+                    </a:lnB>
+                    <a:solidFill>
+                      <a:srgbClr val="F7DBDB"/>
+                    </a:solidFill>
+                  </a:tcPr>
+                </a:tc>
+                <a:tc>
+                  <a:txBody>
+                    <a:bodyPr/>
+                    <a:lstStyle/>
+                    <a:p>
+                      <a:pPr defTabSz="914400">
+                        <a:lnSpc>
+                          <a:spcPct val="100000"/>
+                        </a:lnSpc>
+                        <a:tabLst>
+                          <a:tab pos="0" algn="l"/>
+                        </a:tabLst>
+                      </a:pPr>
+                      <a:r>
+                        <a:rPr lang="en-US" sz="1050" b="0" u="none" strike="noStrike">
+                          <a:solidFill>
+                            <a:srgbClr val="2C3E50"/>
+                          </a:solidFill>
+                          <a:effectLst/>
+                          <a:uFillTx/>
+                          <a:latin typeface="Calibri"/>
+                          <a:ea typeface="Calibri"/>
+                        </a:rPr>
+                        <a:t>199–222  (C-term IDR)</a:t>
+                      </a:r>
+                      <a:endParaRPr lang="en-US" sz="1050" b="0" u="none" strike="noStrike">
+                        <a:solidFill>
+                          <a:srgbClr val="000000"/>
+                        </a:solidFill>
+                        <a:effectLst/>
+                        <a:uFillTx/>
+                        <a:latin typeface="Arial"/>
+                      </a:endParaRPr>
+                    </a:p>
+                  </a:txBody>
+                  <a:tcPr anchor="ctr">
+                    <a:lnL w="6480">
+                      <a:solidFill>
+                        <a:srgbClr val="CFCFCF"/>
+                      </a:solidFill>
+                      <a:prstDash val="solid"/>
+                    </a:lnL>
+                    <a:lnR w="6480">
+                      <a:solidFill>
+                        <a:srgbClr val="CFCFCF"/>
+                      </a:solidFill>
+                      <a:prstDash val="solid"/>
+                    </a:lnR>
+                    <a:lnT w="6480">
+                      <a:solidFill>
+                        <a:srgbClr val="CFCFCF"/>
+                      </a:solidFill>
+                      <a:prstDash val="solid"/>
+                    </a:lnT>
+                    <a:lnB w="6480">
+                      <a:solidFill>
+                        <a:srgbClr val="CFCFCF"/>
+                      </a:solidFill>
+                      <a:prstDash val="solid"/>
+                    </a:lnB>
+                    <a:solidFill>
+                      <a:srgbClr val="F7DBDB"/>
+                    </a:solidFill>
+                  </a:tcPr>
+                </a:tc>
+                <a:tc>
+                  <a:txBody>
+                    <a:bodyPr/>
+                    <a:lstStyle/>
+                    <a:p>
+                      <a:pPr defTabSz="914400">
+                        <a:lnSpc>
+                          <a:spcPct val="100000"/>
+                        </a:lnSpc>
+                        <a:tabLst>
+                          <a:tab pos="0" algn="l"/>
+                        </a:tabLst>
+                      </a:pPr>
+                      <a:r>
+                        <a:rPr lang="en-US" sz="1050" b="0" i="1" u="none" strike="noStrike" dirty="0">
+                          <a:solidFill>
+                            <a:srgbClr val="2C3E50"/>
+                          </a:solidFill>
+                          <a:effectLst/>
+                          <a:uFillTx/>
+                          <a:latin typeface="Calibri"/>
+                          <a:ea typeface="Calibri"/>
+                        </a:rPr>
+                        <a:t>ERK2 · lung cancer</a:t>
+                      </a:r>
+                      <a:endParaRPr lang="en-US" sz="1050" b="0" u="none" strike="noStrike" dirty="0">
+                        <a:solidFill>
+                          <a:srgbClr val="000000"/>
+                        </a:solidFill>
+                        <a:effectLst/>
+                        <a:uFillTx/>
+                        <a:latin typeface="Arial"/>
+                      </a:endParaRPr>
+                    </a:p>
+                  </a:txBody>
+                  <a:tcPr anchor="ctr">
+                    <a:lnL w="6480">
+                      <a:solidFill>
+                        <a:srgbClr val="CFCFCF"/>
+                      </a:solidFill>
+                      <a:prstDash val="solid"/>
+                    </a:lnL>
+                    <a:lnR w="6480">
+                      <a:solidFill>
+                        <a:srgbClr val="CFCFCF"/>
+                      </a:solidFill>
+                      <a:prstDash val="solid"/>
+                    </a:lnR>
+                    <a:lnT w="6480">
+                      <a:solidFill>
+                        <a:srgbClr val="CFCFCF"/>
+                      </a:solidFill>
+                      <a:prstDash val="solid"/>
+                    </a:lnT>
+                    <a:lnB w="6480">
+                      <a:solidFill>
+                        <a:srgbClr val="CFCFCF"/>
+                      </a:solidFill>
+                      <a:prstDash val="solid"/>
+                    </a:lnB>
+                    <a:solidFill>
+                      <a:srgbClr val="F7DBDB"/>
+                    </a:solidFill>
+                  </a:tcPr>
+                </a:tc>
+                <a:extLst>
+                  <a:ext uri="{0D108BD9-81ED-4DB2-BD59-A6C34878D82A}">
+                    <a16:rowId xmlns:a16="http://schemas.microsoft.com/office/drawing/2014/main" val="10007"/>
+                  </a:ext>
+                </a:extLst>
+              </a:tr>
+            </a:tbl>
+          </a:graphicData>
+        </a:graphic>
+      </p:graphicFrame>
+      <p:sp>
+        <p:nvSpPr>
+          <p:cNvPr id="11" name="Text 2"/>
+          <p:cNvSpPr/>
+          <p:nvPr/>
+        </p:nvSpPr>
+        <p:spPr>
+          <a:xfrm>
+            <a:off x="951864" y="4471240"/>
+            <a:ext cx="6461760" cy="639720"/>
+          </a:xfrm>
+          <a:prstGeom prst="rect">
+            <a:avLst/>
+          </a:prstGeom>
+          <a:noFill/>
+          <a:ln w="0">
+            <a:noFill/>
+          </a:ln>
+        </p:spPr>
+        <p:style>
+          <a:lnRef idx="0">
+            <a:scrgbClr r="0" g="0" b="0"/>
+          </a:lnRef>
+          <a:fillRef idx="0">
+            <a:scrgbClr r="0" g="0" b="0"/>
+          </a:fillRef>
+          <a:effectRef idx="0">
+            <a:scrgbClr r="0" g="0" b="0"/>
+          </a:effectRef>
+          <a:fontRef idx="minor"/>
+        </p:style>
+        <p:txBody>
+          <a:bodyPr lIns="90000" tIns="45000" rIns="90000" bIns="45000" anchor="t">
+            <a:noAutofit/>
+          </a:bodyPr>
+          <a:lstStyle/>
+          <a:p>
+            <a:pPr defTabSz="914400">
+              <a:lnSpc>
+                <a:spcPct val="100000"/>
+              </a:lnSpc>
+              <a:tabLst>
+                <a:tab pos="0" algn="l"/>
+              </a:tabLst>
+            </a:pPr>
+            <a:r>
+              <a:rPr lang="en-US" sz="1050" b="0" u="none" strike="noStrike" dirty="0">
+                <a:solidFill>
+                  <a:srgbClr val="2C3E50"/>
+                </a:solidFill>
+                <a:effectLst/>
+                <a:uFillTx/>
+                <a:latin typeface="Calibri"/>
+                <a:ea typeface="Calibri"/>
+              </a:rPr>
+              <a:t>6 of 7 sit in the disordered regions;  </a:t>
+            </a:r>
+            <a:r>
+              <a:rPr lang="en-US" sz="1050" b="1" u="none" strike="noStrike" dirty="0">
+                <a:solidFill>
+                  <a:srgbClr val="B9770E"/>
+                </a:solidFill>
+                <a:effectLst/>
+                <a:uFillTx/>
+                <a:latin typeface="Calibri"/>
+                <a:ea typeface="Calibri"/>
+              </a:rPr>
+              <a:t>Thr159</a:t>
+            </a:r>
+            <a:r>
+              <a:rPr lang="en-US" sz="1050" b="0" u="none" strike="noStrike" dirty="0">
+                <a:solidFill>
+                  <a:srgbClr val="2C3E50"/>
+                </a:solidFill>
+                <a:effectLst/>
+                <a:uFillTx/>
+                <a:latin typeface="Calibri"/>
+                <a:ea typeface="Calibri"/>
+              </a:rPr>
+              <a:t> is the one exception (the pre-FGF linker).  None is in the folded C-terminal domain.</a:t>
+            </a:r>
+            <a:endParaRPr lang="en-US" sz="1050" b="0" u="none" strike="noStrike" dirty="0">
+              <a:solidFill>
+                <a:srgbClr val="000000"/>
+              </a:solidFill>
+              <a:effectLst/>
+              <a:uFillTx/>
+              <a:latin typeface="Arial"/>
+            </a:endParaRPr>
+          </a:p>
+        </p:txBody>
+      </p:sp>
+      <p:sp>
+        <p:nvSpPr>
+          <p:cNvPr id="12" name="Text 3"/>
+          <p:cNvSpPr/>
+          <p:nvPr/>
+        </p:nvSpPr>
+        <p:spPr>
+          <a:xfrm>
+            <a:off x="8006080" y="1056860"/>
+            <a:ext cx="3586120" cy="1122680"/>
+          </a:xfrm>
+          <a:prstGeom prst="roundRect">
+            <a:avLst>
+              <a:gd name="adj" fmla="val 3226"/>
+            </a:avLst>
+          </a:prstGeom>
+          <a:solidFill>
+            <a:srgbClr val="DCE7F3"/>
+          </a:solidFill>
+          <a:ln w="13970">
+            <a:solidFill>
+              <a:srgbClr val="2166AC"/>
+            </a:solidFill>
+            <a:round/>
+          </a:ln>
+        </p:spPr>
+        <p:style>
+          <a:lnRef idx="0">
+            <a:scrgbClr r="0" g="0" b="0"/>
+          </a:lnRef>
+          <a:fillRef idx="0">
+            <a:scrgbClr r="0" g="0" b="0"/>
+          </a:fillRef>
+          <a:effectRef idx="0">
+            <a:scrgbClr r="0" g="0" b="0"/>
+          </a:effectRef>
+          <a:fontRef idx="minor"/>
+        </p:style>
+        <p:txBody>
+          <a:bodyPr lIns="114480" tIns="114480" rIns="114480" bIns="114480" anchor="t">
+            <a:noAutofit/>
+          </a:bodyPr>
+          <a:lstStyle/>
+          <a:p>
+            <a:pPr defTabSz="914400">
+              <a:lnSpc>
+                <a:spcPct val="100000"/>
+              </a:lnSpc>
+              <a:tabLst>
+                <a:tab pos="0" algn="l"/>
+              </a:tabLst>
+            </a:pPr>
+            <a:r>
+              <a:rPr lang="en-US" sz="1300" b="1" u="none" strike="noStrike" dirty="0">
+                <a:solidFill>
+                  <a:srgbClr val="2166AC"/>
+                </a:solidFill>
+                <a:effectLst/>
+                <a:uFillTx/>
+                <a:latin typeface="Calibri"/>
+              </a:rPr>
+              <a:t>The switches flank the handles</a:t>
+            </a:r>
+            <a:endParaRPr lang="en-US" sz="1300" b="0" u="none" strike="noStrike" dirty="0">
+              <a:solidFill>
+                <a:srgbClr val="000000"/>
+              </a:solidFill>
+              <a:effectLst/>
+              <a:uFillTx/>
+              <a:latin typeface="Arial"/>
+            </a:endParaRPr>
+          </a:p>
+          <a:p>
+            <a:pPr defTabSz="914400">
+              <a:lnSpc>
+                <a:spcPct val="100000"/>
+              </a:lnSpc>
+              <a:tabLst>
+                <a:tab pos="0" algn="l"/>
+              </a:tabLst>
+            </a:pPr>
+            <a:r>
+              <a:rPr lang="en-US" sz="1150" b="0" u="none" strike="noStrike" dirty="0">
+                <a:solidFill>
+                  <a:srgbClr val="2C3E50"/>
+                </a:solidFill>
+                <a:effectLst/>
+                <a:uFillTx/>
+                <a:latin typeface="Calibri"/>
+              </a:rPr>
+              <a:t>The phospho-sites sit right next to the motifs they control:  central cluster (Ser75–Thr115) surrounds the KEN box · Thr159 abuts the FGF motif · Ser209 sits in the C-terminal IDR.</a:t>
+            </a:r>
+            <a:endParaRPr lang="en-US" sz="1150" b="0" u="none" strike="noStrike" dirty="0">
+              <a:solidFill>
+                <a:srgbClr val="000000"/>
+              </a:solidFill>
+              <a:effectLst/>
+              <a:uFillTx/>
+              <a:latin typeface="Arial"/>
+            </a:endParaRPr>
+          </a:p>
+        </p:txBody>
+      </p:sp>
+      <p:sp>
+        <p:nvSpPr>
+          <p:cNvPr id="13" name="Text 4"/>
+          <p:cNvSpPr/>
+          <p:nvPr/>
+        </p:nvSpPr>
+        <p:spPr>
+          <a:xfrm>
+            <a:off x="8006080" y="2421020"/>
+            <a:ext cx="3586120" cy="1965600"/>
+          </a:xfrm>
+          <a:prstGeom prst="roundRect">
+            <a:avLst>
+              <a:gd name="adj" fmla="val 2326"/>
+            </a:avLst>
+          </a:prstGeom>
+          <a:solidFill>
+            <a:srgbClr val="FCEBD0"/>
+          </a:solidFill>
+          <a:ln w="13970">
+            <a:solidFill>
+              <a:srgbClr val="B9770E"/>
+            </a:solidFill>
+            <a:round/>
+          </a:ln>
+        </p:spPr>
+        <p:style>
+          <a:lnRef idx="0">
+            <a:scrgbClr r="0" g="0" b="0"/>
+          </a:lnRef>
+          <a:fillRef idx="0">
+            <a:scrgbClr r="0" g="0" b="0"/>
+          </a:fillRef>
+          <a:effectRef idx="0">
+            <a:scrgbClr r="0" g="0" b="0"/>
+          </a:effectRef>
+          <a:fontRef idx="minor"/>
+        </p:style>
+        <p:txBody>
+          <a:bodyPr lIns="114480" tIns="114480" rIns="114480" bIns="114480" anchor="t">
+            <a:noAutofit/>
+          </a:bodyPr>
+          <a:lstStyle/>
+          <a:p>
+            <a:pPr defTabSz="914400">
+              <a:lnSpc>
+                <a:spcPct val="100000"/>
+              </a:lnSpc>
+              <a:tabLst>
+                <a:tab pos="0" algn="l"/>
+              </a:tabLst>
+            </a:pPr>
+            <a:r>
+              <a:rPr lang="en-US" sz="1300" b="1" u="none" strike="noStrike" dirty="0">
+                <a:solidFill>
+                  <a:srgbClr val="B9770E"/>
+                </a:solidFill>
+                <a:effectLst/>
+                <a:uFillTx/>
+                <a:latin typeface="Calibri"/>
+              </a:rPr>
+              <a:t>Why it matters — fuzzy switching</a:t>
+            </a:r>
+            <a:endParaRPr lang="en-US" sz="1300" b="0" u="none" strike="noStrike" dirty="0">
+              <a:solidFill>
+                <a:srgbClr val="000000"/>
+              </a:solidFill>
+              <a:effectLst/>
+              <a:uFillTx/>
+              <a:latin typeface="Arial"/>
+            </a:endParaRPr>
+          </a:p>
+          <a:p>
+            <a:pPr defTabSz="914400">
+              <a:lnSpc>
+                <a:spcPct val="100000"/>
+              </a:lnSpc>
+              <a:tabLst>
+                <a:tab pos="0" algn="l"/>
+              </a:tabLst>
+            </a:pPr>
+            <a:r>
+              <a:rPr lang="en-US" sz="1150" b="0" u="none" strike="noStrike" dirty="0">
+                <a:solidFill>
+                  <a:srgbClr val="2C3E50"/>
+                </a:solidFill>
+                <a:effectLst/>
+                <a:uFillTx/>
+                <a:latin typeface="Calibri"/>
+              </a:rPr>
+              <a:t>The FGF handle is a short motif floating in a disordered, heavily-</a:t>
+            </a:r>
+            <a:r>
+              <a:rPr lang="en-US" sz="1150" b="0" u="none" strike="noStrike" dirty="0" err="1">
+                <a:solidFill>
+                  <a:srgbClr val="2C3E50"/>
+                </a:solidFill>
+                <a:effectLst/>
+                <a:uFillTx/>
+                <a:latin typeface="Calibri"/>
+              </a:rPr>
+              <a:t>phosphorylatable</a:t>
+            </a:r>
+            <a:r>
+              <a:rPr lang="en-US" sz="1150" b="0" u="none" strike="noStrike" dirty="0">
+                <a:solidFill>
+                  <a:srgbClr val="2C3E50"/>
+                </a:solidFill>
+                <a:effectLst/>
+                <a:uFillTx/>
+                <a:latin typeface="Calibri"/>
+              </a:rPr>
+              <a:t> stretch. So CDK1 (assisted by Aurora B) switches the Sororin–PDS5 grip </a:t>
+            </a:r>
+            <a:r>
+              <a:rPr lang="en-US" sz="1150" b="1" u="none" strike="noStrike" dirty="0">
+                <a:solidFill>
+                  <a:srgbClr val="2C3E50"/>
+                </a:solidFill>
+                <a:effectLst/>
+                <a:uFillTx/>
+                <a:latin typeface="Calibri"/>
+              </a:rPr>
+              <a:t>OFF just by tagging the nearby chain — no need to disrupt a folded domain.</a:t>
+            </a:r>
+            <a:r>
+              <a:rPr lang="en-US" sz="1150" b="0" u="none" strike="noStrike" dirty="0">
+                <a:solidFill>
+                  <a:srgbClr val="2C3E50"/>
+                </a:solidFill>
+                <a:effectLst/>
+                <a:uFillTx/>
+                <a:latin typeface="Calibri"/>
+              </a:rPr>
+              <a:t>  That charge-based, no-fold switch is only possible because the region is disordered = a fuzzy complex.</a:t>
+            </a:r>
+            <a:endParaRPr lang="en-US" sz="1150" b="0" u="none" strike="noStrike" dirty="0">
+              <a:solidFill>
+                <a:srgbClr val="000000"/>
+              </a:solidFill>
+              <a:effectLst/>
+              <a:uFillTx/>
+              <a:latin typeface="Arial"/>
+            </a:endParaRPr>
+          </a:p>
+        </p:txBody>
+      </p:sp>
+      <p:sp>
+        <p:nvSpPr>
+          <p:cNvPr id="14" name="Text 5"/>
+          <p:cNvSpPr/>
+          <p:nvPr/>
+        </p:nvSpPr>
+        <p:spPr>
+          <a:xfrm>
+            <a:off x="6035040" y="5110960"/>
+            <a:ext cx="5851800" cy="1122320"/>
+          </a:xfrm>
+          <a:prstGeom prst="roundRect">
+            <a:avLst>
+              <a:gd name="adj" fmla="val 2174"/>
+            </a:avLst>
+          </a:prstGeom>
+          <a:solidFill>
+            <a:srgbClr val="F0E8F4"/>
+          </a:solidFill>
+          <a:ln w="13970">
+            <a:solidFill>
+              <a:srgbClr val="762A83"/>
+            </a:solidFill>
+            <a:round/>
+          </a:ln>
+        </p:spPr>
+        <p:style>
+          <a:lnRef idx="0">
+            <a:scrgbClr r="0" g="0" b="0"/>
+          </a:lnRef>
+          <a:fillRef idx="0">
+            <a:scrgbClr r="0" g="0" b="0"/>
+          </a:fillRef>
+          <a:effectRef idx="0">
+            <a:scrgbClr r="0" g="0" b="0"/>
+          </a:effectRef>
+          <a:fontRef idx="minor"/>
+        </p:style>
+        <p:txBody>
+          <a:bodyPr lIns="114480" tIns="114480" rIns="114480" bIns="114480" anchor="t">
+            <a:noAutofit/>
+          </a:bodyPr>
+          <a:lstStyle/>
+          <a:p>
+            <a:pPr defTabSz="914400">
+              <a:lnSpc>
+                <a:spcPct val="100000"/>
+              </a:lnSpc>
+              <a:tabLst>
+                <a:tab pos="0" algn="l"/>
+              </a:tabLst>
+            </a:pPr>
+            <a:r>
+              <a:rPr lang="en-US" sz="1300" b="1" u="none" strike="noStrike" dirty="0">
+                <a:solidFill>
+                  <a:srgbClr val="762A83"/>
+                </a:solidFill>
+                <a:effectLst/>
+                <a:uFillTx/>
+                <a:latin typeface="Calibri"/>
+              </a:rPr>
+              <a:t>Same disordered scaffold in cancer</a:t>
+            </a:r>
+            <a:endParaRPr lang="en-US" sz="1300" b="0" u="none" strike="noStrike" dirty="0">
+              <a:solidFill>
+                <a:srgbClr val="000000"/>
+              </a:solidFill>
+              <a:effectLst/>
+              <a:uFillTx/>
+              <a:latin typeface="Arial"/>
+            </a:endParaRPr>
+          </a:p>
+          <a:p>
+            <a:pPr defTabSz="914400">
+              <a:lnSpc>
+                <a:spcPct val="100000"/>
+              </a:lnSpc>
+              <a:tabLst>
+                <a:tab pos="0" algn="l"/>
+              </a:tabLst>
+            </a:pPr>
+            <a:r>
+              <a:rPr lang="en-US" sz="1150" b="1" u="none" strike="noStrike" dirty="0">
+                <a:solidFill>
+                  <a:srgbClr val="762A83"/>
+                </a:solidFill>
+                <a:effectLst/>
+                <a:uFillTx/>
+                <a:latin typeface="Calibri"/>
+              </a:rPr>
+              <a:t>ERK2 → Ser209</a:t>
+            </a:r>
+            <a:r>
+              <a:rPr lang="en-US" sz="1150" b="0" u="none" strike="noStrike" dirty="0">
+                <a:solidFill>
+                  <a:srgbClr val="2C3E50"/>
+                </a:solidFill>
+                <a:effectLst/>
+                <a:uFillTx/>
+                <a:latin typeface="Calibri"/>
+              </a:rPr>
+              <a:t> (lung) — one of the most exposed positions;  </a:t>
+            </a:r>
+            <a:r>
+              <a:rPr lang="en-US" sz="1150" b="1" u="none" strike="noStrike" dirty="0">
+                <a:solidFill>
+                  <a:srgbClr val="762A83"/>
+                </a:solidFill>
+                <a:effectLst/>
+                <a:uFillTx/>
+                <a:latin typeface="Calibri"/>
+              </a:rPr>
+              <a:t>SPOP degron</a:t>
+            </a:r>
+            <a:r>
+              <a:rPr lang="en-US" sz="1150" b="0" u="none" strike="noStrike" dirty="0">
+                <a:solidFill>
+                  <a:srgbClr val="2C3E50"/>
+                </a:solidFill>
+                <a:effectLst/>
+                <a:uFillTx/>
+                <a:latin typeface="Calibri"/>
+              </a:rPr>
+              <a:t> (prostate) — a short motif that works only in accessible, disordered sequence.</a:t>
+            </a:r>
+            <a:endParaRPr lang="en-US" sz="1150" b="0" u="none" strike="noStrike" dirty="0">
+              <a:solidFill>
+                <a:srgbClr val="000000"/>
+              </a:solidFill>
+              <a:effectLst/>
+              <a:uFillTx/>
+              <a:latin typeface="Arial"/>
+            </a:endParaRPr>
+          </a:p>
+          <a:p>
+            <a:pPr defTabSz="914400">
+              <a:lnSpc>
+                <a:spcPct val="100000"/>
+              </a:lnSpc>
+              <a:tabLst>
+                <a:tab pos="0" algn="l"/>
+              </a:tabLst>
+            </a:pPr>
+            <a:r>
+              <a:rPr lang="en-US" sz="1150" b="1" u="none" strike="noStrike" dirty="0">
+                <a:solidFill>
+                  <a:srgbClr val="762A83"/>
+                </a:solidFill>
+                <a:effectLst/>
+                <a:uFillTx/>
+                <a:latin typeface="Calibri"/>
+              </a:rPr>
+              <a:t>→ mitotic inactivation, oncogenic ERK phosphorylation and SPOP turnover are all concentrated on the disordered regions.</a:t>
+            </a:r>
+            <a:endParaRPr lang="en-US" sz="1150" b="0" u="none" strike="noStrike" dirty="0">
+              <a:solidFill>
+                <a:srgbClr val="000000"/>
+              </a:solidFill>
+              <a:effectLst/>
+              <a:uFillTx/>
+              <a:latin typeface="Arial"/>
+            </a:endParaRPr>
+          </a:p>
+        </p:txBody>
+      </p:sp>
+      <p:sp>
+        <p:nvSpPr>
+          <p:cNvPr id="15" name="Text 6"/>
+          <p:cNvSpPr/>
+          <p:nvPr/>
+        </p:nvSpPr>
+        <p:spPr>
+          <a:xfrm>
+            <a:off x="375920" y="5110960"/>
+            <a:ext cx="5531760" cy="1122320"/>
+          </a:xfrm>
+          <a:prstGeom prst="roundRect">
+            <a:avLst>
+              <a:gd name="adj" fmla="val 2381"/>
+            </a:avLst>
+          </a:prstGeom>
+          <a:solidFill>
+            <a:srgbClr val="DCEFDD"/>
+          </a:solidFill>
+          <a:ln w="13970">
+            <a:solidFill>
+              <a:srgbClr val="1A7A34"/>
+            </a:solidFill>
+            <a:round/>
+          </a:ln>
+        </p:spPr>
+        <p:style>
+          <a:lnRef idx="0">
+            <a:scrgbClr r="0" g="0" b="0"/>
+          </a:lnRef>
+          <a:fillRef idx="0">
+            <a:scrgbClr r="0" g="0" b="0"/>
+          </a:fillRef>
+          <a:effectRef idx="0">
+            <a:scrgbClr r="0" g="0" b="0"/>
+          </a:effectRef>
+          <a:fontRef idx="minor"/>
+        </p:style>
+        <p:txBody>
+          <a:bodyPr lIns="114480" tIns="114480" rIns="114480" bIns="114480" anchor="t">
+            <a:noAutofit/>
+          </a:bodyPr>
+          <a:lstStyle/>
+          <a:p>
+            <a:pPr defTabSz="914400">
+              <a:lnSpc>
+                <a:spcPct val="100000"/>
+              </a:lnSpc>
+              <a:tabLst>
+                <a:tab pos="0" algn="l"/>
+              </a:tabLst>
+            </a:pPr>
+            <a:r>
+              <a:rPr lang="en-US" sz="1150" b="1" u="none" strike="noStrike" dirty="0">
+                <a:solidFill>
+                  <a:srgbClr val="1A7A34"/>
+                </a:solidFill>
+                <a:effectLst/>
+                <a:uFillTx/>
+                <a:latin typeface="Calibri"/>
+              </a:rPr>
+              <a:t>The mitotic switch this drives:  </a:t>
+            </a:r>
+            <a:endParaRPr lang="en-US" sz="1150" b="0" u="none" strike="noStrike" dirty="0">
+              <a:solidFill>
+                <a:srgbClr val="000000"/>
+              </a:solidFill>
+              <a:effectLst/>
+              <a:uFillTx/>
+              <a:latin typeface="Arial"/>
+            </a:endParaRPr>
+          </a:p>
+          <a:p>
+            <a:pPr defTabSz="914400">
+              <a:lnSpc>
+                <a:spcPct val="100000"/>
+              </a:lnSpc>
+              <a:tabLst>
+                <a:tab pos="0" algn="l"/>
+              </a:tabLst>
+            </a:pPr>
+            <a:r>
+              <a:rPr lang="en-US" sz="1150" b="0" u="none" strike="noStrike" dirty="0">
+                <a:solidFill>
+                  <a:srgbClr val="2C3E50"/>
+                </a:solidFill>
+                <a:effectLst/>
+                <a:uFillTx/>
+                <a:latin typeface="Calibri"/>
+              </a:rPr>
+              <a:t>CDK1 (+ Aurora B) phosphorylates Sororin  →  it lets go of PDS5  →  WAPL takes the seat  →  </a:t>
+            </a:r>
+            <a:r>
+              <a:rPr lang="en-US" sz="1150" b="0" u="none" strike="noStrike" dirty="0" err="1">
+                <a:solidFill>
+                  <a:srgbClr val="2C3E50"/>
+                </a:solidFill>
+                <a:effectLst/>
+                <a:uFillTx/>
+                <a:latin typeface="Calibri"/>
+              </a:rPr>
+              <a:t>cohesin</a:t>
+            </a:r>
+            <a:r>
+              <a:rPr lang="en-US" sz="1150" b="0" u="none" strike="noStrike" dirty="0">
+                <a:solidFill>
+                  <a:srgbClr val="2C3E50"/>
+                </a:solidFill>
+                <a:effectLst/>
+                <a:uFillTx/>
+                <a:latin typeface="Calibri"/>
+              </a:rPr>
+              <a:t> ring opens  →  sisters separate.</a:t>
+            </a:r>
+            <a:endParaRPr lang="en-US" sz="1150" b="0" u="none" strike="noStrike" dirty="0">
+              <a:solidFill>
+                <a:srgbClr val="000000"/>
+              </a:solidFill>
+              <a:effectLst/>
+              <a:uFillTx/>
+              <a:latin typeface="Arial"/>
+            </a:endParaRPr>
+          </a:p>
+          <a:p>
+            <a:pPr defTabSz="914400">
+              <a:lnSpc>
+                <a:spcPct val="100000"/>
+              </a:lnSpc>
+              <a:tabLst>
+                <a:tab pos="0" algn="l"/>
+              </a:tabLst>
+            </a:pPr>
+            <a:r>
+              <a:rPr lang="en-US" sz="1050" b="0" i="1" u="none" strike="noStrike" dirty="0">
+                <a:solidFill>
+                  <a:srgbClr val="5A6B7B"/>
+                </a:solidFill>
+                <a:effectLst/>
+                <a:uFillTx/>
+                <a:latin typeface="Calibri"/>
+              </a:rPr>
+              <a:t>Reversible: a phosphatase can strip the tag back off (unlike degron destruction, which is permanent).</a:t>
+            </a:r>
+            <a:endParaRPr lang="en-US" sz="1050" b="0" u="none" strike="noStrike" dirty="0">
+              <a:solidFill>
+                <a:srgbClr val="000000"/>
+              </a:solidFill>
+              <a:effectLst/>
+              <a:uFillTx/>
+              <a:latin typeface="Arial"/>
+            </a:endParaRPr>
+          </a:p>
+        </p:txBody>
+      </p:sp>
+    </p:spTree>
+  </p:cSld>
+  <p:clrMapOvr>
+    <a:masterClrMapping/>
+  </p:clrMapOvr>
+  <p:timing>
+    <p:tnLst>
+      <p:par>
+        <p:cTn id="1" dur="indefinite" restart="never" nodeType="tmRoot">
+          <p:childTnLst>
+            <p:seq concurrent="1" nextAc="seek">
+              <p:cTn id="2" dur="indefinite" nodeType="mainSeq">
+                <p:childTnLst>
+                  <p:par>
+                    <p:cTn id="3" fill="hold">
+                      <p:stCondLst>
+                        <p:cond delay="indefinite"/>
+                      </p:stCondLst>
+                      <p:childTnLst>
+                        <p:par>
+                          <p:cTn id="4" fill="hold">
+                            <p:stCondLst>
+                              <p:cond delay="0"/>
+                            </p:stCondLst>
+                            <p:childTnLst>
+                              <p:par>
+                                <p:cTn id="5" presetID="22" presetClass="entr" presetSubtype="1" fill="hold" nodeType="clickEffect">
+                                  <p:stCondLst>
+                                    <p:cond delay="0"/>
+                                  </p:stCondLst>
+                                  <p:childTnLst>
+                                    <p:set>
+                                      <p:cBhvr>
+                                        <p:cTn id="6" dur="1" fill="hold">
+                                          <p:stCondLst>
+                                            <p:cond delay="0"/>
+                                          </p:stCondLst>
+                                        </p:cTn>
+                                        <p:tgtEl>
+                                          <p:spTgt spid="10"/>
+                                        </p:tgtEl>
+                                        <p:attrNameLst>
+                                          <p:attrName>style.visibility</p:attrName>
+                                        </p:attrNameLst>
+                                      </p:cBhvr>
+                                      <p:to>
+                                        <p:strVal val="visible"/>
+                                      </p:to>
+                                    </p:set>
+                                    <p:animEffect transition="in" filter="wipe(up)">
+                                      <p:cBhvr>
+                                        <p:cTn id="7" dur="500"/>
+                                        <p:tgtEl>
+                                          <p:spTgt spid="10"/>
+                                        </p:tgtEl>
+                                      </p:cBhvr>
+                                    </p:animEffect>
+                                  </p:childTnLst>
+                                </p:cTn>
+                              </p:par>
+                              <p:par>
+                                <p:cTn id="8" presetID="10" presetClass="entr" presetSubtype="0" fill="hold" grpId="0" nodeType="withEffect">
+                                  <p:stCondLst>
+                                    <p:cond delay="0"/>
+                                  </p:stCondLst>
+                                  <p:childTnLst>
+                                    <p:set>
+                                      <p:cBhvr>
+                                        <p:cTn id="9" dur="1" fill="hold">
+                                          <p:stCondLst>
+                                            <p:cond delay="0"/>
+                                          </p:stCondLst>
+                                        </p:cTn>
+                                        <p:tgtEl>
+                                          <p:spTgt spid="9"/>
+                                        </p:tgtEl>
+                                        <p:attrNameLst>
+                                          <p:attrName>style.visibility</p:attrName>
+                                        </p:attrNameLst>
+                                      </p:cBhvr>
+                                      <p:to>
+                                        <p:strVal val="visible"/>
+                                      </p:to>
+                                    </p:set>
+                                    <p:animEffect transition="in" filter="fade">
+                                      <p:cBhvr>
+                                        <p:cTn id="10" dur="500"/>
+                                        <p:tgtEl>
+                                          <p:spTgt spid="9"/>
+                                        </p:tgtEl>
+                                      </p:cBhvr>
+                                    </p:animEffect>
+                                  </p:childTnLst>
+                                </p:cTn>
+                              </p:par>
+                            </p:childTnLst>
+                          </p:cTn>
+                        </p:par>
+                      </p:childTnLst>
+                    </p:cTn>
+                  </p:par>
+                  <p:par>
+                    <p:cTn id="11" fill="hold">
+                      <p:stCondLst>
+                        <p:cond delay="indefinite"/>
+                      </p:stCondLst>
+                      <p:childTnLst>
+                        <p:par>
+                          <p:cTn id="12" fill="hold">
+                            <p:stCondLst>
+                              <p:cond delay="0"/>
+                            </p:stCondLst>
+                            <p:childTnLst>
+                              <p:par>
+                                <p:cTn id="13" presetID="10" presetClass="entr" presetSubtype="0" fill="hold" grpId="0" nodeType="clickEffect">
+                                  <p:stCondLst>
+                                    <p:cond delay="0"/>
+                                  </p:stCondLst>
+                                  <p:childTnLst>
+                                    <p:set>
+                                      <p:cBhvr>
+                                        <p:cTn id="14" dur="1" fill="hold">
+                                          <p:stCondLst>
+                                            <p:cond delay="0"/>
+                                          </p:stCondLst>
+                                        </p:cTn>
+                                        <p:tgtEl>
+                                          <p:spTgt spid="11"/>
+                                        </p:tgtEl>
+                                        <p:attrNameLst>
+                                          <p:attrName>style.visibility</p:attrName>
+                                        </p:attrNameLst>
+                                      </p:cBhvr>
+                                      <p:to>
+                                        <p:strVal val="visible"/>
+                                      </p:to>
+                                    </p:set>
+                                    <p:animEffect transition="in" filter="fade">
+                                      <p:cBhvr>
+                                        <p:cTn id="15" dur="500"/>
+                                        <p:tgtEl>
+                                          <p:spTgt spid="11"/>
+                                        </p:tgtEl>
+                                      </p:cBhvr>
+                                    </p:animEffect>
+                                  </p:childTnLst>
+                                </p:cTn>
+                              </p:par>
+                            </p:childTnLst>
+                          </p:cTn>
+                        </p:par>
+                      </p:childTnLst>
+                    </p:cTn>
+                  </p:par>
+                  <p:par>
+                    <p:cTn id="16" fill="hold">
+                      <p:stCondLst>
+                        <p:cond delay="indefinite"/>
+                      </p:stCondLst>
+                      <p:childTnLst>
+                        <p:par>
+                          <p:cTn id="17" fill="hold">
+                            <p:stCondLst>
+                              <p:cond delay="0"/>
+                            </p:stCondLst>
+                            <p:childTnLst>
+                              <p:par>
+                                <p:cTn id="18" presetID="10" presetClass="entr" presetSubtype="0" fill="hold" grpId="0" nodeType="clickEffect">
+                                  <p:stCondLst>
+                                    <p:cond delay="0"/>
+                                  </p:stCondLst>
+                                  <p:childTnLst>
+                                    <p:set>
+                                      <p:cBhvr>
+                                        <p:cTn id="19" dur="1" fill="hold">
+                                          <p:stCondLst>
+                                            <p:cond delay="0"/>
+                                          </p:stCondLst>
+                                        </p:cTn>
+                                        <p:tgtEl>
+                                          <p:spTgt spid="15"/>
+                                        </p:tgtEl>
+                                        <p:attrNameLst>
+                                          <p:attrName>style.visibility</p:attrName>
+                                        </p:attrNameLst>
+                                      </p:cBhvr>
+                                      <p:to>
+                                        <p:strVal val="visible"/>
+                                      </p:to>
+                                    </p:set>
+                                    <p:animEffect transition="in" filter="fade">
+                                      <p:cBhvr>
+                                        <p:cTn id="20" dur="500"/>
+                                        <p:tgtEl>
+                                          <p:spTgt spid="15"/>
+                                        </p:tgtEl>
+                                      </p:cBhvr>
+                                    </p:animEffect>
+                                  </p:childTnLst>
+                                </p:cTn>
+                              </p:par>
+                            </p:childTnLst>
+                          </p:cTn>
+                        </p:par>
+                      </p:childTnLst>
+                    </p:cTn>
+                  </p:par>
+                  <p:par>
+                    <p:cTn id="21" fill="hold">
+                      <p:stCondLst>
+                        <p:cond delay="indefinite"/>
+                      </p:stCondLst>
+                      <p:childTnLst>
+                        <p:par>
+                          <p:cTn id="22" fill="hold">
+                            <p:stCondLst>
+                              <p:cond delay="0"/>
+                            </p:stCondLst>
+                            <p:childTnLst>
+                              <p:par>
+                                <p:cTn id="23" presetID="10" presetClass="entr" presetSubtype="0" fill="hold" grpId="0" nodeType="clickEffect">
+                                  <p:stCondLst>
+                                    <p:cond delay="0"/>
+                                  </p:stCondLst>
+                                  <p:childTnLst>
+                                    <p:set>
+                                      <p:cBhvr>
+                                        <p:cTn id="24" dur="1" fill="hold">
+                                          <p:stCondLst>
+                                            <p:cond delay="0"/>
+                                          </p:stCondLst>
+                                        </p:cTn>
+                                        <p:tgtEl>
+                                          <p:spTgt spid="14"/>
+                                        </p:tgtEl>
+                                        <p:attrNameLst>
+                                          <p:attrName>style.visibility</p:attrName>
+                                        </p:attrNameLst>
+                                      </p:cBhvr>
+                                      <p:to>
+                                        <p:strVal val="visible"/>
+                                      </p:to>
+                                    </p:set>
+                                    <p:animEffect transition="in" filter="fade">
+                                      <p:cBhvr>
+                                        <p:cTn id="25" dur="500"/>
+                                        <p:tgtEl>
+                                          <p:spTgt spid="14"/>
+                                        </p:tgtEl>
+                                      </p:cBhvr>
+                                    </p:animEffect>
+                                  </p:childTnLst>
+                                </p:cTn>
+                              </p:par>
+                            </p:childTnLst>
+                          </p:cTn>
+                        </p:par>
+                      </p:childTnLst>
+                    </p:cTn>
+                  </p:par>
+                  <p:par>
+                    <p:cTn id="26" fill="hold">
+                      <p:stCondLst>
+                        <p:cond delay="indefinite"/>
+                      </p:stCondLst>
+                      <p:childTnLst>
+                        <p:par>
+                          <p:cTn id="27" fill="hold">
+                            <p:stCondLst>
+                              <p:cond delay="0"/>
+                            </p:stCondLst>
+                            <p:childTnLst>
+                              <p:par>
+                                <p:cTn id="28" presetID="10" presetClass="entr" presetSubtype="0" fill="hold" grpId="0" nodeType="clickEffect">
+                                  <p:stCondLst>
+                                    <p:cond delay="0"/>
+                                  </p:stCondLst>
+                                  <p:childTnLst>
+                                    <p:set>
+                                      <p:cBhvr>
+                                        <p:cTn id="29" dur="1" fill="hold">
+                                          <p:stCondLst>
+                                            <p:cond delay="0"/>
+                                          </p:stCondLst>
+                                        </p:cTn>
+                                        <p:tgtEl>
+                                          <p:spTgt spid="12"/>
+                                        </p:tgtEl>
+                                        <p:attrNameLst>
+                                          <p:attrName>style.visibility</p:attrName>
+                                        </p:attrNameLst>
+                                      </p:cBhvr>
+                                      <p:to>
+                                        <p:strVal val="visible"/>
+                                      </p:to>
+                                    </p:set>
+                                    <p:animEffect transition="in" filter="fade">
+                                      <p:cBhvr>
+                                        <p:cTn id="30" dur="500"/>
+                                        <p:tgtEl>
+                                          <p:spTgt spid="12"/>
+                                        </p:tgtEl>
+                                      </p:cBhvr>
+                                    </p:animEffect>
+                                  </p:childTnLst>
+                                </p:cTn>
+                              </p:par>
+                            </p:childTnLst>
+                          </p:cTn>
+                        </p:par>
+                      </p:childTnLst>
+                    </p:cTn>
+                  </p:par>
+                  <p:par>
+                    <p:cTn id="31" fill="hold">
+                      <p:stCondLst>
+                        <p:cond delay="indefinite"/>
+                      </p:stCondLst>
+                      <p:childTnLst>
+                        <p:par>
+                          <p:cTn id="32" fill="hold">
+                            <p:stCondLst>
+                              <p:cond delay="0"/>
+                            </p:stCondLst>
+                            <p:childTnLst>
+                              <p:par>
+                                <p:cTn id="33" presetID="10" presetClass="entr" presetSubtype="0" fill="hold" grpId="0" nodeType="clickEffect">
+                                  <p:stCondLst>
+                                    <p:cond delay="0"/>
+                                  </p:stCondLst>
+                                  <p:childTnLst>
+                                    <p:set>
+                                      <p:cBhvr>
+                                        <p:cTn id="34" dur="1" fill="hold">
+                                          <p:stCondLst>
+                                            <p:cond delay="0"/>
+                                          </p:stCondLst>
+                                        </p:cTn>
+                                        <p:tgtEl>
+                                          <p:spTgt spid="13"/>
+                                        </p:tgtEl>
+                                        <p:attrNameLst>
+                                          <p:attrName>style.visibility</p:attrName>
+                                        </p:attrNameLst>
+                                      </p:cBhvr>
+                                      <p:to>
+                                        <p:strVal val="visible"/>
+                                      </p:to>
+                                    </p:set>
+                                    <p:animEffect transition="in" filter="fade">
+                                      <p:cBhvr>
+                                        <p:cTn id="35" dur="500"/>
+                                        <p:tgtEl>
+                                          <p:spTgt spid="13"/>
+                                        </p:tgtEl>
+                                      </p:cBhvr>
+                                    </p:animEffect>
+                                  </p:childTnLst>
+                                </p:cTn>
+                              </p:par>
+                            </p:childTnLst>
+                          </p:cTn>
+                        </p:par>
+                      </p:childTnLst>
+                    </p:cTn>
+                  </p:par>
+                </p:childTnLst>
+              </p:cTn>
+              <p:prevCondLst>
+                <p:cond evt="onPrev" delay="0">
+                  <p:tgtEl>
+                    <p:sldTgt/>
+                  </p:tgtEl>
+                </p:cond>
+              </p:prevCondLst>
+              <p:nextCondLst>
+                <p:cond evt="onNext" delay="0">
+                  <p:tgtEl>
+                    <p:sldTgt/>
+                  </p:tgtEl>
+                </p:cond>
+              </p:nextCondLst>
+            </p:seq>
+          </p:childTnLst>
+        </p:cTn>
+      </p:par>
+    </p:tnLst>
+    <p:bldLst>
+      <p:bldP spid="9" grpId="0"/>
+      <p:bldP spid="11" grpId="0"/>
+      <p:bldP spid="12" grpId="0" animBg="1"/>
+      <p:bldP spid="13" grpId="0" animBg="1"/>
+      <p:bldP spid="14" grpId="0" animBg="1"/>
+      <p:bldP spid="15" grpId="0" animBg="1"/>
     </p:bldLst>
   </p:timing>
 </p:sld>

--- a/Sororin_mechanism_flowchart.pptx
+++ b/Sororin_mechanism_flowchart.pptx
@@ -5,7 +5,7 @@
     <p:sldMasterId id="2147483648" r:id="rId1"/>
   </p:sldMasterIdLst>
   <p:notesMasterIdLst>
-    <p:notesMasterId r:id="rId14"/>
+    <p:notesMasterId r:id="rId15"/>
   </p:notesMasterIdLst>
   <p:sldIdLst>
     <p:sldId id="256" r:id="rId2"/>
@@ -20,6 +20,7 @@
     <p:sldId id="265" r:id="rId11"/>
     <p:sldId id="266" r:id="rId12"/>
     <p:sldId id="267" r:id="rId13"/>
+    <p:sldId id="268" r:id="rId14"/>
   </p:sldIdLst>
   <p:sldSz cx="12188825" cy="6858000"/>
   <p:notesSz cx="6858000" cy="12188825"/>
@@ -9963,7 +9964,7 @@
         </p:nvSpPr>
         <p:spPr>
           <a:xfrm>
-            <a:off x="6035040" y="5110960"/>
+            <a:off x="5994612" y="4986660"/>
             <a:ext cx="5851800" cy="1122320"/>
           </a:xfrm>
           <a:prstGeom prst="roundRect">
@@ -10128,7 +10129,7 @@
         </p:nvSpPr>
         <p:spPr>
           <a:xfrm>
-            <a:off x="375920" y="5110960"/>
+            <a:off x="375920" y="4986660"/>
             <a:ext cx="5531760" cy="1122320"/>
           </a:xfrm>
           <a:prstGeom prst="roundRect">
@@ -10269,6 +10270,89 @@
               </a:solidFill>
               <a:effectLst/>
               <a:uFillTx/>
+              <a:latin typeface="Arial"/>
+            </a:endParaRPr>
+          </a:p>
+        </p:txBody>
+      </p:sp>
+      <p:sp>
+        <p:nvSpPr>
+          <p:cNvPr id="40" name="ELM crosscheck footer"/>
+          <p:cNvSpPr/>
+          <p:nvPr/>
+        </p:nvSpPr>
+        <p:spPr>
+          <a:xfrm>
+            <a:off x="342412" y="6226860"/>
+            <a:ext cx="11504000" cy="515000"/>
+          </a:xfrm>
+          <a:prstGeom prst="roundRect">
+            <a:avLst>
+              <a:gd name="adj" fmla="val 4200"/>
+            </a:avLst>
+          </a:prstGeom>
+          <a:solidFill>
+            <a:srgbClr val="E7F1F3"/>
+          </a:solidFill>
+          <a:ln w="13970">
+            <a:solidFill>
+              <a:srgbClr val="2E8090"/>
+            </a:solidFill>
+            <a:round/>
+          </a:ln>
+        </p:spPr>
+        <p:style>
+          <a:lnRef idx="0">
+            <a:scrgbClr r="0" g="0" b="0"/>
+          </a:lnRef>
+          <a:fillRef idx="0">
+            <a:scrgbClr r="0" g="0" b="0"/>
+          </a:fillRef>
+          <a:effectRef idx="0">
+            <a:scrgbClr r="0" g="0" b="0"/>
+          </a:effectRef>
+          <a:fontRef idx="minor"/>
+        </p:style>
+        <p:txBody>
+          <a:bodyPr lIns="100440" tIns="54000" rIns="100440" bIns="36000" anchor="ctr">
+            <a:noAutofit/>
+          </a:bodyPr>
+          <a:lstStyle/>
+          <a:p>
+            <a:pPr defTabSz="914400">
+              <a:lnSpc>
+                <a:spcPct val="102000"/>
+              </a:lnSpc>
+              <a:tabLst>
+                <a:tab pos="0" algn="l"/>
+              </a:tabLst>
+            </a:pPr>
+            <a:r>
+              <a:rPr lang="en-US" sz="1050" b="1" u="none" strike="noStrike" dirty="0">
+                <a:solidFill>
+                  <a:srgbClr val="1F6F7A"/>
+                </a:solidFill>
+                <a:effectLst/>
+                <a:uFillTx/>
+                <a:latin typeface="Calibri"/>
+              </a:rPr>
+              <a:t>Cross-check — short linear motifs (paper §3.4):  </a:t>
+            </a:r>
+            <a:r>
+              <a:rPr lang="en-US" sz="1050" b="0" u="none" strike="noStrike" dirty="0">
+                <a:solidFill>
+                  <a:srgbClr val="2C3E50"/>
+                </a:solidFill>
+                <a:effectLst/>
+                <a:uFillTx/>
+                <a:latin typeface="Calibri"/>
+              </a:rPr>
+              <a:t>an independent ELM scan of the raw sequence recovers this very same CDK1 cluster — nine proline-directed (S/T-P) motifs — and re-finds the KEN box, so the phospho-sites are confirmed by a second, pattern-based method (it also flags candidate SPOP degrons).</a:t>
+            </a:r>
+            <a:endParaRPr lang="en-US" sz="1050" b="0" dirty="0">
+              <a:solidFill>
+                <a:srgbClr val="000000"/>
+              </a:solidFill>
               <a:latin typeface="Arial"/>
             </a:endParaRPr>
           </a:p>
@@ -10640,6 +10724,59 @@
                       </p:childTnLst>
                     </p:cTn>
                   </p:par>
+                  <p:par>
+                    <p:cTn id="36" fill="hold">
+                      <p:stCondLst>
+                        <p:cond delay="indefinite"/>
+                      </p:stCondLst>
+                      <p:childTnLst>
+                        <p:par>
+                          <p:cTn id="37" fill="hold">
+                            <p:stCondLst>
+                              <p:cond delay="0"/>
+                            </p:stCondLst>
+                            <p:childTnLst>
+                              <p:par>
+                                <p:cTn id="38" presetID="22" presetClass="entr" presetSubtype="1" fill="hold" grpId="0" nodeType="clickEffect">
+                                  <p:stCondLst>
+                                    <p:cond delay="0"/>
+                                  </p:stCondLst>
+                                  <p:childTnLst>
+                                    <p:set>
+                                      <p:cBhvr>
+                                        <p:cTn id="39" dur="1" fill="hold">
+                                          <p:stCondLst>
+                                            <p:cond delay="0"/>
+                                          </p:stCondLst>
+                                        </p:cTn>
+                                        <p:tgtEl>
+                                          <p:spTgt spid="40"/>
+                                        </p:tgtEl>
+                                        <p:attrNameLst>
+                                          <p:attrName>style.visibility</p:attrName>
+                                        </p:attrNameLst>
+                                      </p:cBhvr>
+                                      <p:to>
+                                        <p:strVal val="visible"/>
+                                      </p:to>
+                                    </p:set>
+                                    <p:animEffect transition="in" filter="wipe(up)">
+                                      <p:cBhvr>
+                                        <p:cTn id="40" dur="500"/>
+                                        <p:tgtEl>
+                                          <p:spTgt spid="40"/>
+                                        </p:tgtEl>
+                                      </p:cBhvr>
+                                    </p:animEffect>
+                                  </p:childTnLst>
+                                </p:cTn>
+                              </p:par>
+                            </p:childTnLst>
+                          </p:cTn>
+                        </p:par>
+                      </p:childTnLst>
+                    </p:cTn>
+                  </p:par>
                 </p:childTnLst>
               </p:cTn>
               <p:prevCondLst>
@@ -10668,6 +10805,5637 @@
       <p:bldP spid="13" grpId="0" animBg="1"/>
       <p:bldP spid="14" grpId="0" animBg="1"/>
       <p:bldP spid="15" grpId="0" animBg="1"/>
+      <p:bldP spid="40" grpId="0" animBg="1"/>
+    </p:bldLst>
+  </p:timing>
+</p:sld>
+</file>
+
+<file path=ppt/slides/slide13.xml><?xml version="1.0" encoding="utf-8"?>
+<p:sld xmlns:a="http://schemas.openxmlformats.org/drawingml/2006/main" xmlns:r="http://schemas.openxmlformats.org/officeDocument/2006/relationships" xmlns:p="http://schemas.openxmlformats.org/presentationml/2006/main">
+  <p:cSld>
+    <p:spTree>
+      <p:nvGrpSpPr>
+        <p:cNvPr id="1" name=""/>
+        <p:cNvGrpSpPr/>
+        <p:nvPr/>
+      </p:nvGrpSpPr>
+      <p:grpSpPr>
+        <a:xfrm>
+          <a:off x="0" y="0"/>
+          <a:ext cx="0" cy="0"/>
+          <a:chOff x="0" y="0"/>
+          <a:chExt cx="0" cy="0"/>
+        </a:xfrm>
+      </p:grpSpPr>
+      <p:sp>
+        <p:nvSpPr>
+          <p:cNvPr id="8" name="Text 0"/>
+          <p:cNvSpPr/>
+          <p:nvPr/>
+        </p:nvSpPr>
+        <p:spPr>
+          <a:xfrm>
+            <a:off x="274320" y="91440"/>
+            <a:ext cx="11639880" cy="502560"/>
+          </a:xfrm>
+          <a:prstGeom prst="rect">
+            <a:avLst/>
+          </a:prstGeom>
+          <a:noFill/>
+          <a:ln w="0">
+            <a:noFill/>
+          </a:ln>
+        </p:spPr>
+        <p:style>
+          <a:lnRef idx="0">
+            <a:scrgbClr r="0" g="0" b="0"/>
+          </a:lnRef>
+          <a:fillRef idx="0">
+            <a:scrgbClr r="0" g="0" b="0"/>
+          </a:fillRef>
+          <a:effectRef idx="0">
+            <a:scrgbClr r="0" g="0" b="0"/>
+          </a:effectRef>
+          <a:fontRef idx="minor"/>
+        </p:style>
+        <p:txBody>
+          <a:bodyPr lIns="90000" tIns="45000" rIns="90000" bIns="45000" anchor="ctr">
+            <a:noAutofit/>
+          </a:bodyPr>
+          <a:lstStyle/>
+          <a:p>
+            <a:pPr algn="ctr" defTabSz="914400">
+              <a:lnSpc>
+                <a:spcPct val="100000"/>
+              </a:lnSpc>
+              <a:tabLst>
+                <a:tab pos="0" algn="l"/>
+              </a:tabLst>
+            </a:pPr>
+            <a:r>
+              <a:rPr lang="en-US" sz="1800" b="1" u="none" strike="noStrike" dirty="0">
+                <a:solidFill>
+                  <a:srgbClr val="2C3E50"/>
+                </a:solidFill>
+                <a:effectLst/>
+                <a:uFillTx/>
+                <a:latin typeface="Calibri"/>
+                <a:ea typeface="Calibri"/>
+              </a:rPr>
+              <a:t>Result 4 - robustness: two more methods, one architecture (the disorder is not an artifact of analysis method)</a:t>
+            </a:r>
+            <a:endParaRPr lang="en-US" sz="1800" b="0" u="none" strike="noStrike" dirty="0">
+              <a:solidFill>
+                <a:srgbClr val="000000"/>
+              </a:solidFill>
+              <a:effectLst/>
+              <a:uFillTx/>
+              <a:latin typeface="Arial"/>
+            </a:endParaRPr>
+          </a:p>
+        </p:txBody>
+      </p:sp>
+      <p:sp>
+        <p:nvSpPr>
+          <p:cNvPr id="9" name="Text 1"/>
+          <p:cNvSpPr/>
+          <p:nvPr/>
+        </p:nvSpPr>
+        <p:spPr>
+          <a:xfrm>
+            <a:off x="320040" y="713160"/>
+            <a:ext cx="3401280" cy="1481040"/>
+          </a:xfrm>
+          <a:prstGeom prst="roundRect">
+            <a:avLst>
+              <a:gd name="adj" fmla="val 3704"/>
+            </a:avLst>
+          </a:prstGeom>
+          <a:solidFill>
+            <a:srgbClr val="DBE9F5"/>
+          </a:solidFill>
+          <a:ln w="19050">
+            <a:solidFill>
+              <a:srgbClr val="2166AC"/>
+            </a:solidFill>
+            <a:round/>
+          </a:ln>
+        </p:spPr>
+        <p:style>
+          <a:lnRef idx="0">
+            <a:scrgbClr r="0" g="0" b="0"/>
+          </a:lnRef>
+          <a:fillRef idx="0">
+            <a:scrgbClr r="0" g="0" b="0"/>
+          </a:fillRef>
+          <a:effectRef idx="0">
+            <a:scrgbClr r="0" g="0" b="0"/>
+          </a:effectRef>
+          <a:fontRef idx="minor"/>
+        </p:style>
+        <p:txBody>
+          <a:bodyPr lIns="90000" tIns="45000" rIns="90000" bIns="45000" anchor="ctr">
+            <a:noAutofit/>
+          </a:bodyPr>
+          <a:lstStyle/>
+          <a:p>
+            <a:pPr algn="ctr" defTabSz="914400">
+              <a:lnSpc>
+                <a:spcPct val="98000"/>
+              </a:lnSpc>
+              <a:tabLst>
+                <a:tab pos="0" algn="l"/>
+              </a:tabLst>
+            </a:pPr>
+            <a:r>
+              <a:rPr lang="en-US" sz="1200" b="1" u="none" strike="noStrike">
+                <a:solidFill>
+                  <a:srgbClr val="2166AC"/>
+                </a:solidFill>
+                <a:effectLst/>
+                <a:uFillTx/>
+                <a:latin typeface="Calibri"/>
+                <a:ea typeface="Calibri"/>
+              </a:rPr>
+              <a:t>IUPred2 + ANCHOR2</a:t>
+            </a:r>
+            <a:endParaRPr lang="en-US" sz="1200" b="0" u="none" strike="noStrike">
+              <a:solidFill>
+                <a:srgbClr val="000000"/>
+              </a:solidFill>
+              <a:effectLst/>
+              <a:uFillTx/>
+              <a:latin typeface="Arial"/>
+            </a:endParaRPr>
+          </a:p>
+          <a:p>
+            <a:pPr algn="ctr" defTabSz="914400">
+              <a:lnSpc>
+                <a:spcPct val="98000"/>
+              </a:lnSpc>
+              <a:tabLst>
+                <a:tab pos="0" algn="l"/>
+              </a:tabLst>
+            </a:pPr>
+            <a:r>
+              <a:rPr lang="en-US" sz="850" b="0" i="1" u="none" strike="noStrike">
+                <a:solidFill>
+                  <a:srgbClr val="5A6B7B"/>
+                </a:solidFill>
+                <a:effectLst/>
+                <a:uFillTx/>
+                <a:latin typeface="Calibri"/>
+                <a:ea typeface="Calibri"/>
+              </a:rPr>
+              <a:t>disorder predictor - our §3.2 baseline</a:t>
+            </a:r>
+            <a:endParaRPr lang="en-US" sz="850" b="0" u="none" strike="noStrike">
+              <a:solidFill>
+                <a:srgbClr val="000000"/>
+              </a:solidFill>
+              <a:effectLst/>
+              <a:uFillTx/>
+              <a:latin typeface="Arial"/>
+            </a:endParaRPr>
+          </a:p>
+          <a:p>
+            <a:pPr algn="ctr" defTabSz="914400">
+              <a:lnSpc>
+                <a:spcPct val="98000"/>
+              </a:lnSpc>
+              <a:tabLst>
+                <a:tab pos="0" algn="l"/>
+              </a:tabLst>
+            </a:pPr>
+            <a:r>
+              <a:rPr lang="en-US" sz="3000" b="1" u="none" strike="noStrike">
+                <a:solidFill>
+                  <a:srgbClr val="2166AC"/>
+                </a:solidFill>
+                <a:effectLst/>
+                <a:uFillTx/>
+                <a:latin typeface="Calibri"/>
+                <a:ea typeface="Calibri"/>
+              </a:rPr>
+              <a:t>61.5%</a:t>
+            </a:r>
+            <a:endParaRPr lang="en-US" sz="3000" b="0" u="none" strike="noStrike">
+              <a:solidFill>
+                <a:srgbClr val="000000"/>
+              </a:solidFill>
+              <a:effectLst/>
+              <a:uFillTx/>
+              <a:latin typeface="Arial"/>
+            </a:endParaRPr>
+          </a:p>
+          <a:p>
+            <a:pPr algn="ctr" defTabSz="914400">
+              <a:lnSpc>
+                <a:spcPct val="98000"/>
+              </a:lnSpc>
+              <a:tabLst>
+                <a:tab pos="0" algn="l"/>
+              </a:tabLst>
+            </a:pPr>
+            <a:r>
+              <a:rPr lang="en-US" sz="950" b="0" u="none" strike="noStrike">
+                <a:solidFill>
+                  <a:srgbClr val="2C3E50"/>
+                </a:solidFill>
+                <a:effectLst/>
+                <a:uFillTx/>
+                <a:latin typeface="Calibri"/>
+                <a:ea typeface="Calibri"/>
+              </a:rPr>
+              <a:t>of residues disordered</a:t>
+            </a:r>
+            <a:endParaRPr lang="en-US" sz="950" b="0" u="none" strike="noStrike">
+              <a:solidFill>
+                <a:srgbClr val="000000"/>
+              </a:solidFill>
+              <a:effectLst/>
+              <a:uFillTx/>
+              <a:latin typeface="Arial"/>
+            </a:endParaRPr>
+          </a:p>
+        </p:txBody>
+      </p:sp>
+      <p:sp>
+        <p:nvSpPr>
+          <p:cNvPr id="10" name="Text 2"/>
+          <p:cNvSpPr/>
+          <p:nvPr/>
+        </p:nvSpPr>
+        <p:spPr>
+          <a:xfrm>
+            <a:off x="3675960" y="1033200"/>
+            <a:ext cx="566640" cy="822600"/>
+          </a:xfrm>
+          <a:prstGeom prst="rect">
+            <a:avLst/>
+          </a:prstGeom>
+          <a:noFill/>
+          <a:ln w="0">
+            <a:noFill/>
+          </a:ln>
+        </p:spPr>
+        <p:style>
+          <a:lnRef idx="0">
+            <a:scrgbClr r="0" g="0" b="0"/>
+          </a:lnRef>
+          <a:fillRef idx="0">
+            <a:scrgbClr r="0" g="0" b="0"/>
+          </a:fillRef>
+          <a:effectRef idx="0">
+            <a:scrgbClr r="0" g="0" b="0"/>
+          </a:effectRef>
+          <a:fontRef idx="minor"/>
+        </p:style>
+        <p:txBody>
+          <a:bodyPr lIns="90000" tIns="45000" rIns="90000" bIns="45000" anchor="ctr">
+            <a:noAutofit/>
+          </a:bodyPr>
+          <a:lstStyle/>
+          <a:p>
+            <a:pPr algn="ctr" defTabSz="914400">
+              <a:lnSpc>
+                <a:spcPct val="100000"/>
+              </a:lnSpc>
+              <a:tabLst>
+                <a:tab pos="0" algn="l"/>
+              </a:tabLst>
+            </a:pPr>
+            <a:r>
+              <a:rPr lang="en-US" sz="3000" b="1" u="none" strike="noStrike" dirty="0">
+                <a:solidFill>
+                  <a:srgbClr val="1F6F7A"/>
+                </a:solidFill>
+                <a:effectLst/>
+                <a:uFillTx/>
+                <a:latin typeface="Calibri"/>
+                <a:ea typeface="Calibri"/>
+              </a:rPr>
+              <a:t>≈</a:t>
+            </a:r>
+            <a:endParaRPr lang="en-US" sz="3000" b="0" u="none" strike="noStrike" dirty="0">
+              <a:solidFill>
+                <a:srgbClr val="000000"/>
+              </a:solidFill>
+              <a:effectLst/>
+              <a:uFillTx/>
+              <a:latin typeface="Arial"/>
+            </a:endParaRPr>
+          </a:p>
+          <a:p>
+            <a:pPr algn="ctr" defTabSz="914400">
+              <a:lnSpc>
+                <a:spcPct val="100000"/>
+              </a:lnSpc>
+              <a:tabLst>
+                <a:tab pos="0" algn="l"/>
+              </a:tabLst>
+            </a:pPr>
+            <a:r>
+              <a:rPr lang="en-US" sz="800" b="0" i="1" u="none" strike="noStrike" dirty="0">
+                <a:solidFill>
+                  <a:srgbClr val="5A6B7B"/>
+                </a:solidFill>
+                <a:effectLst/>
+                <a:uFillTx/>
+                <a:latin typeface="Calibri"/>
+                <a:ea typeface="Calibri"/>
+              </a:rPr>
+              <a:t>within 2.4%</a:t>
+            </a:r>
+            <a:endParaRPr lang="en-US" sz="800" b="0" u="none" strike="noStrike" dirty="0">
+              <a:solidFill>
+                <a:srgbClr val="000000"/>
+              </a:solidFill>
+              <a:effectLst/>
+              <a:uFillTx/>
+              <a:latin typeface="Arial"/>
+            </a:endParaRPr>
+          </a:p>
+        </p:txBody>
+      </p:sp>
+      <p:sp>
+        <p:nvSpPr>
+          <p:cNvPr id="11" name="Text 3"/>
+          <p:cNvSpPr/>
+          <p:nvPr/>
+        </p:nvSpPr>
+        <p:spPr>
+          <a:xfrm>
+            <a:off x="4233600" y="713160"/>
+            <a:ext cx="3401280" cy="1481040"/>
+          </a:xfrm>
+          <a:prstGeom prst="roundRect">
+            <a:avLst>
+              <a:gd name="adj" fmla="val 3704"/>
+            </a:avLst>
+          </a:prstGeom>
+          <a:solidFill>
+            <a:srgbClr val="E3F2F4"/>
+          </a:solidFill>
+          <a:ln w="19050">
+            <a:solidFill>
+              <a:srgbClr val="2E8090"/>
+            </a:solidFill>
+            <a:round/>
+          </a:ln>
+        </p:spPr>
+        <p:style>
+          <a:lnRef idx="0">
+            <a:scrgbClr r="0" g="0" b="0"/>
+          </a:lnRef>
+          <a:fillRef idx="0">
+            <a:scrgbClr r="0" g="0" b="0"/>
+          </a:fillRef>
+          <a:effectRef idx="0">
+            <a:scrgbClr r="0" g="0" b="0"/>
+          </a:effectRef>
+          <a:fontRef idx="minor"/>
+        </p:style>
+        <p:txBody>
+          <a:bodyPr lIns="90000" tIns="45000" rIns="90000" bIns="45000" anchor="ctr">
+            <a:noAutofit/>
+          </a:bodyPr>
+          <a:lstStyle/>
+          <a:p>
+            <a:pPr algn="ctr" defTabSz="914400">
+              <a:lnSpc>
+                <a:spcPct val="98000"/>
+              </a:lnSpc>
+              <a:tabLst>
+                <a:tab pos="0" algn="l"/>
+              </a:tabLst>
+            </a:pPr>
+            <a:r>
+              <a:rPr lang="en-US" sz="1200" b="1" u="none" strike="noStrike" dirty="0">
+                <a:solidFill>
+                  <a:srgbClr val="1F6F7A"/>
+                </a:solidFill>
+                <a:effectLst/>
+                <a:uFillTx/>
+                <a:latin typeface="Calibri"/>
+                <a:ea typeface="Calibri"/>
+              </a:rPr>
+              <a:t>DISOPRED3</a:t>
+            </a:r>
+            <a:endParaRPr lang="en-US" sz="1200" b="0" u="none" strike="noStrike" dirty="0">
+              <a:solidFill>
+                <a:srgbClr val="000000"/>
+              </a:solidFill>
+              <a:effectLst/>
+              <a:uFillTx/>
+              <a:latin typeface="Arial"/>
+            </a:endParaRPr>
+          </a:p>
+          <a:p>
+            <a:pPr algn="ctr" defTabSz="914400">
+              <a:lnSpc>
+                <a:spcPct val="98000"/>
+              </a:lnSpc>
+              <a:tabLst>
+                <a:tab pos="0" algn="l"/>
+              </a:tabLst>
+            </a:pPr>
+            <a:r>
+              <a:rPr lang="en-US" sz="850" b="0" i="1" u="none" strike="noStrike" dirty="0">
+                <a:solidFill>
+                  <a:srgbClr val="5A6B7B"/>
+                </a:solidFill>
+                <a:effectLst/>
+                <a:uFillTx/>
+                <a:latin typeface="Calibri"/>
+                <a:ea typeface="Calibri"/>
+              </a:rPr>
+              <a:t>second disorder predictor - different algorithm</a:t>
+            </a:r>
+            <a:endParaRPr lang="en-US" sz="850" b="0" u="none" strike="noStrike" dirty="0">
+              <a:solidFill>
+                <a:srgbClr val="000000"/>
+              </a:solidFill>
+              <a:effectLst/>
+              <a:uFillTx/>
+              <a:latin typeface="Arial"/>
+            </a:endParaRPr>
+          </a:p>
+          <a:p>
+            <a:pPr algn="ctr" defTabSz="914400">
+              <a:lnSpc>
+                <a:spcPct val="98000"/>
+              </a:lnSpc>
+              <a:tabLst>
+                <a:tab pos="0" algn="l"/>
+              </a:tabLst>
+            </a:pPr>
+            <a:r>
+              <a:rPr lang="en-US" sz="3000" b="1" u="none" strike="noStrike" dirty="0">
+                <a:solidFill>
+                  <a:srgbClr val="1F6F7A"/>
+                </a:solidFill>
+                <a:effectLst/>
+                <a:uFillTx/>
+                <a:latin typeface="Calibri"/>
+                <a:ea typeface="Calibri"/>
+              </a:rPr>
+              <a:t>63.9%</a:t>
+            </a:r>
+            <a:endParaRPr lang="en-US" sz="3000" b="0" u="none" strike="noStrike" dirty="0">
+              <a:solidFill>
+                <a:srgbClr val="000000"/>
+              </a:solidFill>
+              <a:effectLst/>
+              <a:uFillTx/>
+              <a:latin typeface="Arial"/>
+            </a:endParaRPr>
+          </a:p>
+          <a:p>
+            <a:pPr algn="ctr" defTabSz="914400">
+              <a:lnSpc>
+                <a:spcPct val="98000"/>
+              </a:lnSpc>
+              <a:tabLst>
+                <a:tab pos="0" algn="l"/>
+              </a:tabLst>
+            </a:pPr>
+            <a:r>
+              <a:rPr lang="en-US" sz="950" b="0" u="none" strike="noStrike" dirty="0">
+                <a:solidFill>
+                  <a:srgbClr val="2C3E50"/>
+                </a:solidFill>
+                <a:effectLst/>
+                <a:uFillTx/>
+                <a:latin typeface="Calibri"/>
+                <a:ea typeface="Calibri"/>
+              </a:rPr>
+              <a:t>of residues disordered</a:t>
+            </a:r>
+            <a:endParaRPr lang="en-US" sz="950" b="0" u="none" strike="noStrike" dirty="0">
+              <a:solidFill>
+                <a:srgbClr val="000000"/>
+              </a:solidFill>
+              <a:effectLst/>
+              <a:uFillTx/>
+              <a:latin typeface="Arial"/>
+            </a:endParaRPr>
+          </a:p>
+        </p:txBody>
+      </p:sp>
+      <p:sp>
+        <p:nvSpPr>
+          <p:cNvPr id="12" name="Text 4"/>
+          <p:cNvSpPr/>
+          <p:nvPr/>
+        </p:nvSpPr>
+        <p:spPr>
+          <a:xfrm>
+            <a:off x="8138160" y="713160"/>
+            <a:ext cx="3730320" cy="1481040"/>
+          </a:xfrm>
+          <a:prstGeom prst="roundRect">
+            <a:avLst>
+              <a:gd name="adj" fmla="val 3704"/>
+            </a:avLst>
+          </a:prstGeom>
+          <a:solidFill>
+            <a:srgbClr val="F1E7F3"/>
+          </a:solidFill>
+          <a:ln w="19050">
+            <a:solidFill>
+              <a:srgbClr val="8E5AA0"/>
+            </a:solidFill>
+            <a:round/>
+          </a:ln>
+        </p:spPr>
+        <p:style>
+          <a:lnRef idx="0">
+            <a:scrgbClr r="0" g="0" b="0"/>
+          </a:lnRef>
+          <a:fillRef idx="0">
+            <a:scrgbClr r="0" g="0" b="0"/>
+          </a:fillRef>
+          <a:effectRef idx="0">
+            <a:scrgbClr r="0" g="0" b="0"/>
+          </a:effectRef>
+          <a:fontRef idx="minor"/>
+        </p:style>
+        <p:txBody>
+          <a:bodyPr lIns="90000" tIns="45000" rIns="90000" bIns="45000" anchor="ctr">
+            <a:noAutofit/>
+          </a:bodyPr>
+          <a:lstStyle/>
+          <a:p>
+            <a:pPr algn="ctr" defTabSz="914400">
+              <a:lnSpc>
+                <a:spcPct val="98000"/>
+              </a:lnSpc>
+              <a:tabLst>
+                <a:tab pos="0" algn="l"/>
+              </a:tabLst>
+            </a:pPr>
+            <a:r>
+              <a:rPr lang="en-US" sz="1200" b="1" u="none" strike="noStrike">
+                <a:solidFill>
+                  <a:srgbClr val="762A83"/>
+                </a:solidFill>
+                <a:effectLst/>
+                <a:uFillTx/>
+                <a:latin typeface="Calibri"/>
+                <a:ea typeface="Calibri"/>
+              </a:rPr>
+              <a:t>PSIPRED 4.0</a:t>
+            </a:r>
+            <a:endParaRPr lang="en-US" sz="1200" b="0" u="none" strike="noStrike">
+              <a:solidFill>
+                <a:srgbClr val="000000"/>
+              </a:solidFill>
+              <a:effectLst/>
+              <a:uFillTx/>
+              <a:latin typeface="Arial"/>
+            </a:endParaRPr>
+          </a:p>
+          <a:p>
+            <a:pPr algn="ctr" defTabSz="914400">
+              <a:lnSpc>
+                <a:spcPct val="98000"/>
+              </a:lnSpc>
+              <a:tabLst>
+                <a:tab pos="0" algn="l"/>
+              </a:tabLst>
+            </a:pPr>
+            <a:r>
+              <a:rPr lang="en-US" sz="850" b="0" i="1" u="none" strike="noStrike">
+                <a:solidFill>
+                  <a:srgbClr val="5A6B7B"/>
+                </a:solidFill>
+                <a:effectLst/>
+                <a:uFillTx/>
+                <a:latin typeface="Calibri"/>
+                <a:ea typeface="Calibri"/>
+              </a:rPr>
+              <a:t>secondary structure - a different axis (helix / strand / coil)</a:t>
+            </a:r>
+            <a:endParaRPr lang="en-US" sz="850" b="0" u="none" strike="noStrike">
+              <a:solidFill>
+                <a:srgbClr val="000000"/>
+              </a:solidFill>
+              <a:effectLst/>
+              <a:uFillTx/>
+              <a:latin typeface="Arial"/>
+            </a:endParaRPr>
+          </a:p>
+          <a:p>
+            <a:pPr algn="ctr" defTabSz="914400">
+              <a:lnSpc>
+                <a:spcPct val="98000"/>
+              </a:lnSpc>
+              <a:tabLst>
+                <a:tab pos="0" algn="l"/>
+              </a:tabLst>
+            </a:pPr>
+            <a:r>
+              <a:rPr lang="en-US" sz="2600" b="1" u="none" strike="noStrike">
+                <a:solidFill>
+                  <a:srgbClr val="762A83"/>
+                </a:solidFill>
+                <a:effectLst/>
+                <a:uFillTx/>
+                <a:latin typeface="Calibri"/>
+                <a:ea typeface="Calibri"/>
+              </a:rPr>
+              <a:t>78.2% coil</a:t>
+            </a:r>
+            <a:endParaRPr lang="en-US" sz="2600" b="0" u="none" strike="noStrike">
+              <a:solidFill>
+                <a:srgbClr val="000000"/>
+              </a:solidFill>
+              <a:effectLst/>
+              <a:uFillTx/>
+              <a:latin typeface="Arial"/>
+            </a:endParaRPr>
+          </a:p>
+          <a:p>
+            <a:pPr algn="ctr" defTabSz="914400">
+              <a:lnSpc>
+                <a:spcPct val="98000"/>
+              </a:lnSpc>
+              <a:tabLst>
+                <a:tab pos="0" algn="l"/>
+              </a:tabLst>
+            </a:pPr>
+            <a:r>
+              <a:rPr lang="en-US" sz="950" b="0" u="none" strike="noStrike">
+                <a:solidFill>
+                  <a:srgbClr val="2C3E50"/>
+                </a:solidFill>
+                <a:effectLst/>
+                <a:uFillTx/>
+                <a:latin typeface="Calibri"/>
+                <a:ea typeface="Calibri"/>
+              </a:rPr>
+              <a:t>18.7% helix  ·  3.2% strand</a:t>
+            </a:r>
+            <a:endParaRPr lang="en-US" sz="950" b="0" u="none" strike="noStrike">
+              <a:solidFill>
+                <a:srgbClr val="000000"/>
+              </a:solidFill>
+              <a:effectLst/>
+              <a:uFillTx/>
+              <a:latin typeface="Arial"/>
+            </a:endParaRPr>
+          </a:p>
+        </p:txBody>
+      </p:sp>
+      <p:sp>
+        <p:nvSpPr>
+          <p:cNvPr id="13" name="Text 5"/>
+          <p:cNvSpPr/>
+          <p:nvPr/>
+        </p:nvSpPr>
+        <p:spPr>
+          <a:xfrm>
+            <a:off x="320040" y="2286000"/>
+            <a:ext cx="11548440" cy="840960"/>
+          </a:xfrm>
+          <a:prstGeom prst="roundRect">
+            <a:avLst>
+              <a:gd name="adj" fmla="val 5435"/>
+            </a:avLst>
+          </a:prstGeom>
+          <a:solidFill>
+            <a:srgbClr val="DCEFDD"/>
+          </a:solidFill>
+          <a:ln w="19050">
+            <a:solidFill>
+              <a:srgbClr val="1A7A34"/>
+            </a:solidFill>
+            <a:round/>
+          </a:ln>
+        </p:spPr>
+        <p:style>
+          <a:lnRef idx="0">
+            <a:scrgbClr r="0" g="0" b="0"/>
+          </a:lnRef>
+          <a:fillRef idx="0">
+            <a:scrgbClr r="0" g="0" b="0"/>
+          </a:fillRef>
+          <a:effectRef idx="0">
+            <a:scrgbClr r="0" g="0" b="0"/>
+          </a:effectRef>
+          <a:fontRef idx="minor"/>
+        </p:style>
+        <p:txBody>
+          <a:bodyPr lIns="90000" tIns="45000" rIns="90000" bIns="45000" anchor="ctr">
+            <a:noAutofit/>
+          </a:bodyPr>
+          <a:lstStyle/>
+          <a:p>
+            <a:pPr algn="ctr" defTabSz="914400">
+              <a:lnSpc>
+                <a:spcPct val="100000"/>
+              </a:lnSpc>
+              <a:tabLst>
+                <a:tab pos="0" algn="l"/>
+              </a:tabLst>
+            </a:pPr>
+            <a:r>
+              <a:rPr lang="en-US" sz="1250" b="1" u="none" strike="noStrike" dirty="0">
+                <a:solidFill>
+                  <a:srgbClr val="1A7A34"/>
+                </a:solidFill>
+                <a:effectLst/>
+                <a:uFillTx/>
+                <a:latin typeface="Calibri"/>
+                <a:ea typeface="Calibri"/>
+              </a:rPr>
+              <a:t>All three converge on one ordered element  →  </a:t>
+            </a:r>
+            <a:r>
+              <a:rPr lang="en-US" sz="1250" b="0" u="none" strike="noStrike" dirty="0">
+                <a:solidFill>
+                  <a:srgbClr val="2C3E50"/>
+                </a:solidFill>
+                <a:effectLst/>
+                <a:uFillTx/>
+                <a:latin typeface="Calibri"/>
+                <a:ea typeface="Calibri"/>
+              </a:rPr>
+              <a:t>the C-terminal Sororin domain (230-252): 83% ordered secondary structure, 70% helix, 0% disordered.  </a:t>
+            </a:r>
+            <a:r>
+              <a:rPr lang="en-US" sz="1250" b="1" u="none" strike="noStrike" dirty="0">
+                <a:solidFill>
+                  <a:srgbClr val="2C3E50"/>
+                </a:solidFill>
+                <a:effectLst/>
+                <a:uFillTx/>
+                <a:latin typeface="Calibri"/>
+                <a:ea typeface="Calibri"/>
+              </a:rPr>
+              <a:t>The rest of the chain is coil and disordered.</a:t>
+            </a:r>
+            <a:endParaRPr lang="en-US" sz="1250" b="0" u="none" strike="noStrike" dirty="0">
+              <a:solidFill>
+                <a:srgbClr val="000000"/>
+              </a:solidFill>
+              <a:effectLst/>
+              <a:uFillTx/>
+              <a:latin typeface="Arial"/>
+            </a:endParaRPr>
+          </a:p>
+        </p:txBody>
+      </p:sp>
+      <p:grpSp>
+        <p:nvGrpSpPr>
+          <p:cNvPr id="2" name="Group 1">
+            <a:extLst>
+              <a:ext uri="{FF2B5EF4-FFF2-40B4-BE49-F238E27FC236}">
+                <a16:creationId xmlns:a16="http://schemas.microsoft.com/office/drawing/2014/main" id="{E2C5F58E-9504-622B-C70F-B7F63185FB1D}"/>
+              </a:ext>
+            </a:extLst>
+          </p:cNvPr>
+          <p:cNvGrpSpPr/>
+          <p:nvPr/>
+        </p:nvGrpSpPr>
+        <p:grpSpPr>
+          <a:xfrm>
+            <a:off x="320040" y="3291840"/>
+            <a:ext cx="6858000" cy="3035880"/>
+            <a:chOff x="320040" y="3291840"/>
+            <a:chExt cx="6858000" cy="3035880"/>
+          </a:xfrm>
+        </p:grpSpPr>
+        <p:sp>
+          <p:nvSpPr>
+            <p:cNvPr id="14" name="Text 6"/>
+            <p:cNvSpPr/>
+            <p:nvPr/>
+          </p:nvSpPr>
+          <p:spPr>
+            <a:xfrm>
+              <a:off x="320040" y="3291840"/>
+              <a:ext cx="6857640" cy="255600"/>
+            </a:xfrm>
+            <a:prstGeom prst="rect">
+              <a:avLst/>
+            </a:prstGeom>
+            <a:noFill/>
+            <a:ln w="0">
+              <a:noFill/>
+            </a:ln>
+          </p:spPr>
+          <p:style>
+            <a:lnRef idx="0">
+              <a:scrgbClr r="0" g="0" b="0"/>
+            </a:lnRef>
+            <a:fillRef idx="0">
+              <a:scrgbClr r="0" g="0" b="0"/>
+            </a:fillRef>
+            <a:effectRef idx="0">
+              <a:scrgbClr r="0" g="0" b="0"/>
+            </a:effectRef>
+            <a:fontRef idx="minor"/>
+          </p:style>
+          <p:txBody>
+            <a:bodyPr lIns="90000" tIns="45000" rIns="90000" bIns="45000" anchor="ctr">
+              <a:noAutofit/>
+            </a:bodyPr>
+            <a:lstStyle/>
+            <a:p>
+              <a:pPr defTabSz="914400">
+                <a:lnSpc>
+                  <a:spcPct val="100000"/>
+                </a:lnSpc>
+                <a:tabLst>
+                  <a:tab pos="0" algn="l"/>
+                </a:tabLst>
+              </a:pPr>
+              <a:r>
+                <a:rPr lang="en-US" sz="1000" b="1" u="none" strike="noStrike" dirty="0">
+                  <a:solidFill>
+                    <a:srgbClr val="2C3E50"/>
+                  </a:solidFill>
+                  <a:effectLst/>
+                  <a:uFillTx/>
+                  <a:latin typeface="Calibri"/>
+                  <a:ea typeface="Calibri"/>
+                </a:rPr>
+                <a:t>PSIPRED secondary structure &amp; DISOPRED3 disorder, per region (Table 6)</a:t>
+              </a:r>
+              <a:endParaRPr lang="en-US" sz="1000" b="0" u="none" strike="noStrike" dirty="0">
+                <a:solidFill>
+                  <a:srgbClr val="000000"/>
+                </a:solidFill>
+                <a:effectLst/>
+                <a:uFillTx/>
+                <a:latin typeface="Arial"/>
+              </a:endParaRPr>
+            </a:p>
+          </p:txBody>
+        </p:sp>
+        <p:graphicFrame>
+          <p:nvGraphicFramePr>
+            <p:cNvPr id="15" name="Table 0"/>
+            <p:cNvGraphicFramePr/>
+            <p:nvPr>
+              <p:extLst>
+                <p:ext uri="{D42A27DB-BD31-4B8C-83A1-F6EECF244321}">
+                  <p14:modId xmlns:p14="http://schemas.microsoft.com/office/powerpoint/2010/main" val="3623137487"/>
+                </p:ext>
+              </p:extLst>
+            </p:nvPr>
+          </p:nvGraphicFramePr>
+          <p:xfrm>
+            <a:off x="320040" y="3584520"/>
+            <a:ext cx="6858000" cy="2743200"/>
+          </p:xfrm>
+          <a:graphic>
+            <a:graphicData uri="http://schemas.openxmlformats.org/drawingml/2006/table">
+              <a:tbl>
+                <a:tblPr/>
+                <a:tblGrid>
+                  <a:gridCol w="2331720">
+                    <a:extLst>
+                      <a:ext uri="{9D8B030D-6E8A-4147-A177-3AD203B41FA5}">
+                        <a16:colId xmlns:a16="http://schemas.microsoft.com/office/drawing/2014/main" val="20000"/>
+                      </a:ext>
+                    </a:extLst>
+                  </a:gridCol>
+                  <a:gridCol w="1051560">
+                    <a:extLst>
+                      <a:ext uri="{9D8B030D-6E8A-4147-A177-3AD203B41FA5}">
+                        <a16:colId xmlns:a16="http://schemas.microsoft.com/office/drawing/2014/main" val="20001"/>
+                      </a:ext>
+                    </a:extLst>
+                  </a:gridCol>
+                  <a:gridCol w="868680">
+                    <a:extLst>
+                      <a:ext uri="{9D8B030D-6E8A-4147-A177-3AD203B41FA5}">
+                        <a16:colId xmlns:a16="http://schemas.microsoft.com/office/drawing/2014/main" val="20002"/>
+                      </a:ext>
+                    </a:extLst>
+                  </a:gridCol>
+                  <a:gridCol w="868680">
+                    <a:extLst>
+                      <a:ext uri="{9D8B030D-6E8A-4147-A177-3AD203B41FA5}">
+                        <a16:colId xmlns:a16="http://schemas.microsoft.com/office/drawing/2014/main" val="20003"/>
+                      </a:ext>
+                    </a:extLst>
+                  </a:gridCol>
+                  <a:gridCol w="868680">
+                    <a:extLst>
+                      <a:ext uri="{9D8B030D-6E8A-4147-A177-3AD203B41FA5}">
+                        <a16:colId xmlns:a16="http://schemas.microsoft.com/office/drawing/2014/main" val="20004"/>
+                      </a:ext>
+                    </a:extLst>
+                  </a:gridCol>
+                  <a:gridCol w="868680">
+                    <a:extLst>
+                      <a:ext uri="{9D8B030D-6E8A-4147-A177-3AD203B41FA5}">
+                        <a16:colId xmlns:a16="http://schemas.microsoft.com/office/drawing/2014/main" val="20005"/>
+                      </a:ext>
+                    </a:extLst>
+                  </a:gridCol>
+                </a:tblGrid>
+                <a:tr h="274320">
+                  <a:tc>
+                    <a:txBody>
+                      <a:bodyPr/>
+                      <a:lstStyle/>
+                      <a:p>
+                        <a:pPr algn="ctr" defTabSz="914400">
+                          <a:lnSpc>
+                            <a:spcPct val="100000"/>
+                          </a:lnSpc>
+                          <a:tabLst>
+                            <a:tab pos="0" algn="l"/>
+                          </a:tabLst>
+                        </a:pPr>
+                        <a:r>
+                          <a:rPr lang="en-US" sz="900" b="1" u="none" strike="noStrike">
+                            <a:solidFill>
+                              <a:srgbClr val="FFFFFF"/>
+                            </a:solidFill>
+                            <a:effectLst/>
+                            <a:uFillTx/>
+                            <a:latin typeface="Calibri"/>
+                            <a:ea typeface="Calibri"/>
+                          </a:rPr>
+                          <a:t>Region</a:t>
+                        </a:r>
+                        <a:endParaRPr lang="en-US" sz="900" b="0" u="none" strike="noStrike">
+                          <a:solidFill>
+                            <a:srgbClr val="FFFFFF"/>
+                          </a:solidFill>
+                          <a:effectLst/>
+                          <a:uFillTx/>
+                          <a:latin typeface="Arial"/>
+                        </a:endParaRPr>
+                      </a:p>
+                    </a:txBody>
+                    <a:tcPr anchor="ctr">
+                      <a:lnL w="6480">
+                        <a:solidFill>
+                          <a:srgbClr val="CBD5DD"/>
+                        </a:solidFill>
+                        <a:prstDash val="solid"/>
+                      </a:lnL>
+                      <a:lnR w="6480">
+                        <a:solidFill>
+                          <a:srgbClr val="CBD5DD"/>
+                        </a:solidFill>
+                        <a:prstDash val="solid"/>
+                      </a:lnR>
+                      <a:lnT w="6480">
+                        <a:solidFill>
+                          <a:srgbClr val="CBD5DD"/>
+                        </a:solidFill>
+                        <a:prstDash val="solid"/>
+                      </a:lnT>
+                      <a:lnB w="6480">
+                        <a:solidFill>
+                          <a:srgbClr val="CBD5DD"/>
+                        </a:solidFill>
+                        <a:prstDash val="solid"/>
+                      </a:lnB>
+                      <a:solidFill>
+                        <a:srgbClr val="2C3E50"/>
+                      </a:solidFill>
+                    </a:tcPr>
+                  </a:tc>
+                  <a:tc>
+                    <a:txBody>
+                      <a:bodyPr/>
+                      <a:lstStyle/>
+                      <a:p>
+                        <a:pPr algn="ctr" defTabSz="914400">
+                          <a:lnSpc>
+                            <a:spcPct val="100000"/>
+                          </a:lnSpc>
+                          <a:tabLst>
+                            <a:tab pos="0" algn="l"/>
+                          </a:tabLst>
+                        </a:pPr>
+                        <a:r>
+                          <a:rPr lang="en-US" sz="900" b="1" u="none" strike="noStrike">
+                            <a:solidFill>
+                              <a:srgbClr val="FFFFFF"/>
+                            </a:solidFill>
+                            <a:effectLst/>
+                            <a:uFillTx/>
+                            <a:latin typeface="Calibri"/>
+                            <a:ea typeface="Calibri"/>
+                          </a:rPr>
+                          <a:t>Residues</a:t>
+                        </a:r>
+                        <a:endParaRPr lang="en-US" sz="900" b="0" u="none" strike="noStrike">
+                          <a:solidFill>
+                            <a:srgbClr val="FFFFFF"/>
+                          </a:solidFill>
+                          <a:effectLst/>
+                          <a:uFillTx/>
+                          <a:latin typeface="Arial"/>
+                        </a:endParaRPr>
+                      </a:p>
+                    </a:txBody>
+                    <a:tcPr anchor="ctr">
+                      <a:lnL w="6480">
+                        <a:solidFill>
+                          <a:srgbClr val="CBD5DD"/>
+                        </a:solidFill>
+                        <a:prstDash val="solid"/>
+                      </a:lnL>
+                      <a:lnR w="6480">
+                        <a:solidFill>
+                          <a:srgbClr val="CBD5DD"/>
+                        </a:solidFill>
+                        <a:prstDash val="solid"/>
+                      </a:lnR>
+                      <a:lnT w="6480">
+                        <a:solidFill>
+                          <a:srgbClr val="CBD5DD"/>
+                        </a:solidFill>
+                        <a:prstDash val="solid"/>
+                      </a:lnT>
+                      <a:lnB w="6480">
+                        <a:solidFill>
+                          <a:srgbClr val="CBD5DD"/>
+                        </a:solidFill>
+                        <a:prstDash val="solid"/>
+                      </a:lnB>
+                      <a:solidFill>
+                        <a:srgbClr val="2C3E50"/>
+                      </a:solidFill>
+                    </a:tcPr>
+                  </a:tc>
+                  <a:tc>
+                    <a:txBody>
+                      <a:bodyPr/>
+                      <a:lstStyle/>
+                      <a:p>
+                        <a:pPr algn="ctr" defTabSz="914400">
+                          <a:lnSpc>
+                            <a:spcPct val="100000"/>
+                          </a:lnSpc>
+                          <a:tabLst>
+                            <a:tab pos="0" algn="l"/>
+                          </a:tabLst>
+                        </a:pPr>
+                        <a:r>
+                          <a:rPr lang="en-US" sz="900" b="1" u="none" strike="noStrike">
+                            <a:solidFill>
+                              <a:srgbClr val="FFFFFF"/>
+                            </a:solidFill>
+                            <a:effectLst/>
+                            <a:uFillTx/>
+                            <a:latin typeface="Calibri"/>
+                            <a:ea typeface="Calibri"/>
+                          </a:rPr>
+                          <a:t>% helix</a:t>
+                        </a:r>
+                        <a:endParaRPr lang="en-US" sz="900" b="0" u="none" strike="noStrike">
+                          <a:solidFill>
+                            <a:srgbClr val="FFFFFF"/>
+                          </a:solidFill>
+                          <a:effectLst/>
+                          <a:uFillTx/>
+                          <a:latin typeface="Arial"/>
+                        </a:endParaRPr>
+                      </a:p>
+                    </a:txBody>
+                    <a:tcPr anchor="ctr">
+                      <a:lnL w="6480">
+                        <a:solidFill>
+                          <a:srgbClr val="CBD5DD"/>
+                        </a:solidFill>
+                        <a:prstDash val="solid"/>
+                      </a:lnL>
+                      <a:lnR w="6480">
+                        <a:solidFill>
+                          <a:srgbClr val="CBD5DD"/>
+                        </a:solidFill>
+                        <a:prstDash val="solid"/>
+                      </a:lnR>
+                      <a:lnT w="6480">
+                        <a:solidFill>
+                          <a:srgbClr val="CBD5DD"/>
+                        </a:solidFill>
+                        <a:prstDash val="solid"/>
+                      </a:lnT>
+                      <a:lnB w="6480">
+                        <a:solidFill>
+                          <a:srgbClr val="CBD5DD"/>
+                        </a:solidFill>
+                        <a:prstDash val="solid"/>
+                      </a:lnB>
+                      <a:solidFill>
+                        <a:srgbClr val="2C3E50"/>
+                      </a:solidFill>
+                    </a:tcPr>
+                  </a:tc>
+                  <a:tc>
+                    <a:txBody>
+                      <a:bodyPr/>
+                      <a:lstStyle/>
+                      <a:p>
+                        <a:pPr algn="ctr" defTabSz="914400">
+                          <a:lnSpc>
+                            <a:spcPct val="100000"/>
+                          </a:lnSpc>
+                          <a:tabLst>
+                            <a:tab pos="0" algn="l"/>
+                          </a:tabLst>
+                        </a:pPr>
+                        <a:r>
+                          <a:rPr lang="en-US" sz="900" b="1" u="none" strike="noStrike">
+                            <a:solidFill>
+                              <a:srgbClr val="FFFFFF"/>
+                            </a:solidFill>
+                            <a:effectLst/>
+                            <a:uFillTx/>
+                            <a:latin typeface="Calibri"/>
+                            <a:ea typeface="Calibri"/>
+                          </a:rPr>
+                          <a:t>% strand</a:t>
+                        </a:r>
+                        <a:endParaRPr lang="en-US" sz="900" b="0" u="none" strike="noStrike">
+                          <a:solidFill>
+                            <a:srgbClr val="FFFFFF"/>
+                          </a:solidFill>
+                          <a:effectLst/>
+                          <a:uFillTx/>
+                          <a:latin typeface="Arial"/>
+                        </a:endParaRPr>
+                      </a:p>
+                    </a:txBody>
+                    <a:tcPr anchor="ctr">
+                      <a:lnL w="6480">
+                        <a:solidFill>
+                          <a:srgbClr val="CBD5DD"/>
+                        </a:solidFill>
+                        <a:prstDash val="solid"/>
+                      </a:lnL>
+                      <a:lnR w="6480">
+                        <a:solidFill>
+                          <a:srgbClr val="CBD5DD"/>
+                        </a:solidFill>
+                        <a:prstDash val="solid"/>
+                      </a:lnR>
+                      <a:lnT w="6480">
+                        <a:solidFill>
+                          <a:srgbClr val="CBD5DD"/>
+                        </a:solidFill>
+                        <a:prstDash val="solid"/>
+                      </a:lnT>
+                      <a:lnB w="6480">
+                        <a:solidFill>
+                          <a:srgbClr val="CBD5DD"/>
+                        </a:solidFill>
+                        <a:prstDash val="solid"/>
+                      </a:lnB>
+                      <a:solidFill>
+                        <a:srgbClr val="2C3E50"/>
+                      </a:solidFill>
+                    </a:tcPr>
+                  </a:tc>
+                  <a:tc>
+                    <a:txBody>
+                      <a:bodyPr/>
+                      <a:lstStyle/>
+                      <a:p>
+                        <a:pPr algn="ctr" defTabSz="914400">
+                          <a:lnSpc>
+                            <a:spcPct val="100000"/>
+                          </a:lnSpc>
+                          <a:tabLst>
+                            <a:tab pos="0" algn="l"/>
+                          </a:tabLst>
+                        </a:pPr>
+                        <a:r>
+                          <a:rPr lang="en-US" sz="900" b="1" u="none" strike="noStrike">
+                            <a:solidFill>
+                              <a:srgbClr val="FFFFFF"/>
+                            </a:solidFill>
+                            <a:effectLst/>
+                            <a:uFillTx/>
+                            <a:latin typeface="Calibri"/>
+                            <a:ea typeface="Calibri"/>
+                          </a:rPr>
+                          <a:t>% coil</a:t>
+                        </a:r>
+                        <a:endParaRPr lang="en-US" sz="900" b="0" u="none" strike="noStrike">
+                          <a:solidFill>
+                            <a:srgbClr val="FFFFFF"/>
+                          </a:solidFill>
+                          <a:effectLst/>
+                          <a:uFillTx/>
+                          <a:latin typeface="Arial"/>
+                        </a:endParaRPr>
+                      </a:p>
+                    </a:txBody>
+                    <a:tcPr anchor="ctr">
+                      <a:lnL w="6480">
+                        <a:solidFill>
+                          <a:srgbClr val="CBD5DD"/>
+                        </a:solidFill>
+                        <a:prstDash val="solid"/>
+                      </a:lnL>
+                      <a:lnR w="6480">
+                        <a:solidFill>
+                          <a:srgbClr val="CBD5DD"/>
+                        </a:solidFill>
+                        <a:prstDash val="solid"/>
+                      </a:lnR>
+                      <a:lnT w="6480">
+                        <a:solidFill>
+                          <a:srgbClr val="CBD5DD"/>
+                        </a:solidFill>
+                        <a:prstDash val="solid"/>
+                      </a:lnT>
+                      <a:lnB w="6480">
+                        <a:solidFill>
+                          <a:srgbClr val="CBD5DD"/>
+                        </a:solidFill>
+                        <a:prstDash val="solid"/>
+                      </a:lnB>
+                      <a:solidFill>
+                        <a:srgbClr val="2C3E50"/>
+                      </a:solidFill>
+                    </a:tcPr>
+                  </a:tc>
+                  <a:tc>
+                    <a:txBody>
+                      <a:bodyPr/>
+                      <a:lstStyle/>
+                      <a:p>
+                        <a:pPr algn="ctr" defTabSz="914400">
+                          <a:lnSpc>
+                            <a:spcPct val="100000"/>
+                          </a:lnSpc>
+                          <a:tabLst>
+                            <a:tab pos="0" algn="l"/>
+                          </a:tabLst>
+                        </a:pPr>
+                        <a:r>
+                          <a:rPr lang="en-US" sz="900" b="1" u="none" strike="noStrike">
+                            <a:solidFill>
+                              <a:srgbClr val="FFFFFF"/>
+                            </a:solidFill>
+                            <a:effectLst/>
+                            <a:uFillTx/>
+                            <a:latin typeface="Calibri"/>
+                            <a:ea typeface="Calibri"/>
+                          </a:rPr>
+                          <a:t>% dis.</a:t>
+                        </a:r>
+                        <a:endParaRPr lang="en-US" sz="900" b="0" u="none" strike="noStrike">
+                          <a:solidFill>
+                            <a:srgbClr val="FFFFFF"/>
+                          </a:solidFill>
+                          <a:effectLst/>
+                          <a:uFillTx/>
+                          <a:latin typeface="Arial"/>
+                        </a:endParaRPr>
+                      </a:p>
+                    </a:txBody>
+                    <a:tcPr anchor="ctr">
+                      <a:lnL w="6480">
+                        <a:solidFill>
+                          <a:srgbClr val="CBD5DD"/>
+                        </a:solidFill>
+                        <a:prstDash val="solid"/>
+                      </a:lnL>
+                      <a:lnR w="6480">
+                        <a:solidFill>
+                          <a:srgbClr val="CBD5DD"/>
+                        </a:solidFill>
+                        <a:prstDash val="solid"/>
+                      </a:lnR>
+                      <a:lnT w="6480">
+                        <a:solidFill>
+                          <a:srgbClr val="CBD5DD"/>
+                        </a:solidFill>
+                        <a:prstDash val="solid"/>
+                      </a:lnT>
+                      <a:lnB w="6480">
+                        <a:solidFill>
+                          <a:srgbClr val="CBD5DD"/>
+                        </a:solidFill>
+                        <a:prstDash val="solid"/>
+                      </a:lnB>
+                      <a:solidFill>
+                        <a:srgbClr val="2C3E50"/>
+                      </a:solidFill>
+                    </a:tcPr>
+                  </a:tc>
+                  <a:extLst>
+                    <a:ext uri="{0D108BD9-81ED-4DB2-BD59-A6C34878D82A}">
+                      <a16:rowId xmlns:a16="http://schemas.microsoft.com/office/drawing/2014/main" val="10000"/>
+                    </a:ext>
+                  </a:extLst>
+                </a:tr>
+                <a:tr h="274320">
+                  <a:tc>
+                    <a:txBody>
+                      <a:bodyPr/>
+                      <a:lstStyle/>
+                      <a:p>
+                        <a:pPr defTabSz="914400">
+                          <a:lnSpc>
+                            <a:spcPct val="100000"/>
+                          </a:lnSpc>
+                          <a:tabLst>
+                            <a:tab pos="0" algn="l"/>
+                          </a:tabLst>
+                        </a:pPr>
+                        <a:r>
+                          <a:rPr lang="en-US" sz="900" b="0" u="none" strike="noStrike">
+                            <a:solidFill>
+                              <a:srgbClr val="2C3E50"/>
+                            </a:solidFill>
+                            <a:effectLst/>
+                            <a:uFillTx/>
+                            <a:latin typeface="Calibri"/>
+                            <a:ea typeface="Calibri"/>
+                          </a:rPr>
+                          <a:t>N-terminal IDR</a:t>
+                        </a:r>
+                        <a:endParaRPr lang="en-US" sz="900" b="0" u="none" strike="noStrike">
+                          <a:solidFill>
+                            <a:srgbClr val="000000"/>
+                          </a:solidFill>
+                          <a:effectLst/>
+                          <a:uFillTx/>
+                          <a:latin typeface="Arial"/>
+                        </a:endParaRPr>
+                      </a:p>
+                    </a:txBody>
+                    <a:tcPr anchor="ctr">
+                      <a:lnL w="6480">
+                        <a:solidFill>
+                          <a:srgbClr val="CBD5DD"/>
+                        </a:solidFill>
+                        <a:prstDash val="solid"/>
+                      </a:lnL>
+                      <a:lnR w="6480">
+                        <a:solidFill>
+                          <a:srgbClr val="CBD5DD"/>
+                        </a:solidFill>
+                        <a:prstDash val="solid"/>
+                      </a:lnR>
+                      <a:lnT w="6480">
+                        <a:solidFill>
+                          <a:srgbClr val="CBD5DD"/>
+                        </a:solidFill>
+                        <a:prstDash val="solid"/>
+                      </a:lnT>
+                      <a:lnB w="6480">
+                        <a:solidFill>
+                          <a:srgbClr val="CBD5DD"/>
+                        </a:solidFill>
+                        <a:prstDash val="solid"/>
+                      </a:lnB>
+                      <a:noFill/>
+                    </a:tcPr>
+                  </a:tc>
+                  <a:tc>
+                    <a:txBody>
+                      <a:bodyPr/>
+                      <a:lstStyle/>
+                      <a:p>
+                        <a:pPr algn="ctr" defTabSz="914400">
+                          <a:lnSpc>
+                            <a:spcPct val="100000"/>
+                          </a:lnSpc>
+                          <a:tabLst>
+                            <a:tab pos="0" algn="l"/>
+                          </a:tabLst>
+                        </a:pPr>
+                        <a:r>
+                          <a:rPr lang="en-US" sz="900" b="0" u="none" strike="noStrike">
+                            <a:solidFill>
+                              <a:srgbClr val="2C3E50"/>
+                            </a:solidFill>
+                            <a:effectLst/>
+                            <a:uFillTx/>
+                            <a:latin typeface="Calibri"/>
+                            <a:ea typeface="Calibri"/>
+                          </a:rPr>
+                          <a:t>1-48</a:t>
+                        </a:r>
+                        <a:endParaRPr lang="en-US" sz="900" b="0" u="none" strike="noStrike">
+                          <a:solidFill>
+                            <a:srgbClr val="000000"/>
+                          </a:solidFill>
+                          <a:effectLst/>
+                          <a:uFillTx/>
+                          <a:latin typeface="Arial"/>
+                        </a:endParaRPr>
+                      </a:p>
+                    </a:txBody>
+                    <a:tcPr anchor="ctr">
+                      <a:lnL w="6480">
+                        <a:solidFill>
+                          <a:srgbClr val="CBD5DD"/>
+                        </a:solidFill>
+                        <a:prstDash val="solid"/>
+                      </a:lnL>
+                      <a:lnR w="6480">
+                        <a:solidFill>
+                          <a:srgbClr val="CBD5DD"/>
+                        </a:solidFill>
+                        <a:prstDash val="solid"/>
+                      </a:lnR>
+                      <a:lnT w="6480">
+                        <a:solidFill>
+                          <a:srgbClr val="CBD5DD"/>
+                        </a:solidFill>
+                        <a:prstDash val="solid"/>
+                      </a:lnT>
+                      <a:lnB w="6480">
+                        <a:solidFill>
+                          <a:srgbClr val="CBD5DD"/>
+                        </a:solidFill>
+                        <a:prstDash val="solid"/>
+                      </a:lnB>
+                      <a:noFill/>
+                    </a:tcPr>
+                  </a:tc>
+                  <a:tc>
+                    <a:txBody>
+                      <a:bodyPr/>
+                      <a:lstStyle/>
+                      <a:p>
+                        <a:pPr algn="ctr" defTabSz="914400">
+                          <a:lnSpc>
+                            <a:spcPct val="100000"/>
+                          </a:lnSpc>
+                          <a:tabLst>
+                            <a:tab pos="0" algn="l"/>
+                          </a:tabLst>
+                        </a:pPr>
+                        <a:r>
+                          <a:rPr lang="en-US" sz="900" b="0" u="none" strike="noStrike">
+                            <a:solidFill>
+                              <a:srgbClr val="2C3E50"/>
+                            </a:solidFill>
+                            <a:effectLst/>
+                            <a:uFillTx/>
+                            <a:latin typeface="Calibri"/>
+                            <a:ea typeface="Calibri"/>
+                          </a:rPr>
+                          <a:t>0</a:t>
+                        </a:r>
+                        <a:endParaRPr lang="en-US" sz="900" b="0" u="none" strike="noStrike">
+                          <a:solidFill>
+                            <a:srgbClr val="000000"/>
+                          </a:solidFill>
+                          <a:effectLst/>
+                          <a:uFillTx/>
+                          <a:latin typeface="Arial"/>
+                        </a:endParaRPr>
+                      </a:p>
+                    </a:txBody>
+                    <a:tcPr anchor="ctr">
+                      <a:lnL w="6480">
+                        <a:solidFill>
+                          <a:srgbClr val="CBD5DD"/>
+                        </a:solidFill>
+                        <a:prstDash val="solid"/>
+                      </a:lnL>
+                      <a:lnR w="6480">
+                        <a:solidFill>
+                          <a:srgbClr val="CBD5DD"/>
+                        </a:solidFill>
+                        <a:prstDash val="solid"/>
+                      </a:lnR>
+                      <a:lnT w="6480">
+                        <a:solidFill>
+                          <a:srgbClr val="CBD5DD"/>
+                        </a:solidFill>
+                        <a:prstDash val="solid"/>
+                      </a:lnT>
+                      <a:lnB w="6480">
+                        <a:solidFill>
+                          <a:srgbClr val="CBD5DD"/>
+                        </a:solidFill>
+                        <a:prstDash val="solid"/>
+                      </a:lnB>
+                      <a:noFill/>
+                    </a:tcPr>
+                  </a:tc>
+                  <a:tc>
+                    <a:txBody>
+                      <a:bodyPr/>
+                      <a:lstStyle/>
+                      <a:p>
+                        <a:pPr algn="ctr" defTabSz="914400">
+                          <a:lnSpc>
+                            <a:spcPct val="100000"/>
+                          </a:lnSpc>
+                          <a:tabLst>
+                            <a:tab pos="0" algn="l"/>
+                          </a:tabLst>
+                        </a:pPr>
+                        <a:r>
+                          <a:rPr lang="en-US" sz="900" b="0" u="none" strike="noStrike">
+                            <a:solidFill>
+                              <a:srgbClr val="2C3E50"/>
+                            </a:solidFill>
+                            <a:effectLst/>
+                            <a:uFillTx/>
+                            <a:latin typeface="Calibri"/>
+                            <a:ea typeface="Calibri"/>
+                          </a:rPr>
+                          <a:t>0</a:t>
+                        </a:r>
+                        <a:endParaRPr lang="en-US" sz="900" b="0" u="none" strike="noStrike">
+                          <a:solidFill>
+                            <a:srgbClr val="000000"/>
+                          </a:solidFill>
+                          <a:effectLst/>
+                          <a:uFillTx/>
+                          <a:latin typeface="Arial"/>
+                        </a:endParaRPr>
+                      </a:p>
+                    </a:txBody>
+                    <a:tcPr anchor="ctr">
+                      <a:lnL w="6480">
+                        <a:solidFill>
+                          <a:srgbClr val="CBD5DD"/>
+                        </a:solidFill>
+                        <a:prstDash val="solid"/>
+                      </a:lnL>
+                      <a:lnR w="6480">
+                        <a:solidFill>
+                          <a:srgbClr val="CBD5DD"/>
+                        </a:solidFill>
+                        <a:prstDash val="solid"/>
+                      </a:lnR>
+                      <a:lnT w="6480">
+                        <a:solidFill>
+                          <a:srgbClr val="CBD5DD"/>
+                        </a:solidFill>
+                        <a:prstDash val="solid"/>
+                      </a:lnT>
+                      <a:lnB w="6480">
+                        <a:solidFill>
+                          <a:srgbClr val="CBD5DD"/>
+                        </a:solidFill>
+                        <a:prstDash val="solid"/>
+                      </a:lnB>
+                      <a:noFill/>
+                    </a:tcPr>
+                  </a:tc>
+                  <a:tc>
+                    <a:txBody>
+                      <a:bodyPr/>
+                      <a:lstStyle/>
+                      <a:p>
+                        <a:pPr algn="ctr" defTabSz="914400">
+                          <a:lnSpc>
+                            <a:spcPct val="100000"/>
+                          </a:lnSpc>
+                          <a:tabLst>
+                            <a:tab pos="0" algn="l"/>
+                          </a:tabLst>
+                        </a:pPr>
+                        <a:r>
+                          <a:rPr lang="en-US" sz="900" b="0" u="none" strike="noStrike">
+                            <a:solidFill>
+                              <a:srgbClr val="2C3E50"/>
+                            </a:solidFill>
+                            <a:effectLst/>
+                            <a:uFillTx/>
+                            <a:latin typeface="Calibri"/>
+                            <a:ea typeface="Calibri"/>
+                          </a:rPr>
+                          <a:t>100</a:t>
+                        </a:r>
+                        <a:endParaRPr lang="en-US" sz="900" b="0" u="none" strike="noStrike">
+                          <a:solidFill>
+                            <a:srgbClr val="000000"/>
+                          </a:solidFill>
+                          <a:effectLst/>
+                          <a:uFillTx/>
+                          <a:latin typeface="Arial"/>
+                        </a:endParaRPr>
+                      </a:p>
+                    </a:txBody>
+                    <a:tcPr anchor="ctr">
+                      <a:lnL w="6480">
+                        <a:solidFill>
+                          <a:srgbClr val="CBD5DD"/>
+                        </a:solidFill>
+                        <a:prstDash val="solid"/>
+                      </a:lnL>
+                      <a:lnR w="6480">
+                        <a:solidFill>
+                          <a:srgbClr val="CBD5DD"/>
+                        </a:solidFill>
+                        <a:prstDash val="solid"/>
+                      </a:lnR>
+                      <a:lnT w="6480">
+                        <a:solidFill>
+                          <a:srgbClr val="CBD5DD"/>
+                        </a:solidFill>
+                        <a:prstDash val="solid"/>
+                      </a:lnT>
+                      <a:lnB w="6480">
+                        <a:solidFill>
+                          <a:srgbClr val="CBD5DD"/>
+                        </a:solidFill>
+                        <a:prstDash val="solid"/>
+                      </a:lnB>
+                      <a:noFill/>
+                    </a:tcPr>
+                  </a:tc>
+                  <a:tc>
+                    <a:txBody>
+                      <a:bodyPr/>
+                      <a:lstStyle/>
+                      <a:p>
+                        <a:pPr algn="ctr" defTabSz="914400">
+                          <a:lnSpc>
+                            <a:spcPct val="100000"/>
+                          </a:lnSpc>
+                          <a:tabLst>
+                            <a:tab pos="0" algn="l"/>
+                          </a:tabLst>
+                        </a:pPr>
+                        <a:r>
+                          <a:rPr lang="en-US" sz="900" b="0" u="none" strike="noStrike">
+                            <a:solidFill>
+                              <a:srgbClr val="2C3E50"/>
+                            </a:solidFill>
+                            <a:effectLst/>
+                            <a:uFillTx/>
+                            <a:latin typeface="Calibri"/>
+                            <a:ea typeface="Calibri"/>
+                          </a:rPr>
+                          <a:t>100</a:t>
+                        </a:r>
+                        <a:endParaRPr lang="en-US" sz="900" b="0" u="none" strike="noStrike">
+                          <a:solidFill>
+                            <a:srgbClr val="000000"/>
+                          </a:solidFill>
+                          <a:effectLst/>
+                          <a:uFillTx/>
+                          <a:latin typeface="Arial"/>
+                        </a:endParaRPr>
+                      </a:p>
+                    </a:txBody>
+                    <a:tcPr anchor="ctr">
+                      <a:lnL w="6480">
+                        <a:solidFill>
+                          <a:srgbClr val="CBD5DD"/>
+                        </a:solidFill>
+                        <a:prstDash val="solid"/>
+                      </a:lnL>
+                      <a:lnR w="6480">
+                        <a:solidFill>
+                          <a:srgbClr val="CBD5DD"/>
+                        </a:solidFill>
+                        <a:prstDash val="solid"/>
+                      </a:lnR>
+                      <a:lnT w="6480">
+                        <a:solidFill>
+                          <a:srgbClr val="CBD5DD"/>
+                        </a:solidFill>
+                        <a:prstDash val="solid"/>
+                      </a:lnT>
+                      <a:lnB w="6480">
+                        <a:solidFill>
+                          <a:srgbClr val="CBD5DD"/>
+                        </a:solidFill>
+                        <a:prstDash val="solid"/>
+                      </a:lnB>
+                      <a:noFill/>
+                    </a:tcPr>
+                  </a:tc>
+                  <a:extLst>
+                    <a:ext uri="{0D108BD9-81ED-4DB2-BD59-A6C34878D82A}">
+                      <a16:rowId xmlns:a16="http://schemas.microsoft.com/office/drawing/2014/main" val="10001"/>
+                    </a:ext>
+                  </a:extLst>
+                </a:tr>
+                <a:tr h="274320">
+                  <a:tc>
+                    <a:txBody>
+                      <a:bodyPr/>
+                      <a:lstStyle/>
+                      <a:p>
+                        <a:pPr defTabSz="914400">
+                          <a:lnSpc>
+                            <a:spcPct val="100000"/>
+                          </a:lnSpc>
+                          <a:tabLst>
+                            <a:tab pos="0" algn="l"/>
+                          </a:tabLst>
+                        </a:pPr>
+                        <a:r>
+                          <a:rPr lang="en-US" sz="900" b="0" u="none" strike="noStrike">
+                            <a:solidFill>
+                              <a:srgbClr val="2C3E50"/>
+                            </a:solidFill>
+                            <a:effectLst/>
+                            <a:uFillTx/>
+                            <a:latin typeface="Calibri"/>
+                            <a:ea typeface="Calibri"/>
+                          </a:rPr>
+                          <a:t>Central IDR</a:t>
+                        </a:r>
+                        <a:endParaRPr lang="en-US" sz="900" b="0" u="none" strike="noStrike">
+                          <a:solidFill>
+                            <a:srgbClr val="000000"/>
+                          </a:solidFill>
+                          <a:effectLst/>
+                          <a:uFillTx/>
+                          <a:latin typeface="Arial"/>
+                        </a:endParaRPr>
+                      </a:p>
+                    </a:txBody>
+                    <a:tcPr anchor="ctr">
+                      <a:lnL w="6480">
+                        <a:solidFill>
+                          <a:srgbClr val="CBD5DD"/>
+                        </a:solidFill>
+                        <a:prstDash val="solid"/>
+                      </a:lnL>
+                      <a:lnR w="6480">
+                        <a:solidFill>
+                          <a:srgbClr val="CBD5DD"/>
+                        </a:solidFill>
+                        <a:prstDash val="solid"/>
+                      </a:lnR>
+                      <a:lnT w="6480">
+                        <a:solidFill>
+                          <a:srgbClr val="CBD5DD"/>
+                        </a:solidFill>
+                        <a:prstDash val="solid"/>
+                      </a:lnT>
+                      <a:lnB w="6480">
+                        <a:solidFill>
+                          <a:srgbClr val="CBD5DD"/>
+                        </a:solidFill>
+                        <a:prstDash val="solid"/>
+                      </a:lnB>
+                      <a:noFill/>
+                    </a:tcPr>
+                  </a:tc>
+                  <a:tc>
+                    <a:txBody>
+                      <a:bodyPr/>
+                      <a:lstStyle/>
+                      <a:p>
+                        <a:pPr algn="ctr" defTabSz="914400">
+                          <a:lnSpc>
+                            <a:spcPct val="100000"/>
+                          </a:lnSpc>
+                          <a:tabLst>
+                            <a:tab pos="0" algn="l"/>
+                          </a:tabLst>
+                        </a:pPr>
+                        <a:r>
+                          <a:rPr lang="en-US" sz="900" b="0" u="none" strike="noStrike" dirty="0">
+                            <a:solidFill>
+                              <a:srgbClr val="2C3E50"/>
+                            </a:solidFill>
+                            <a:effectLst/>
+                            <a:uFillTx/>
+                            <a:latin typeface="Calibri"/>
+                            <a:ea typeface="Calibri"/>
+                          </a:rPr>
+                          <a:t>72-142</a:t>
+                        </a:r>
+                        <a:endParaRPr lang="en-US" sz="900" b="0" u="none" strike="noStrike" dirty="0">
+                          <a:solidFill>
+                            <a:srgbClr val="000000"/>
+                          </a:solidFill>
+                          <a:effectLst/>
+                          <a:uFillTx/>
+                          <a:latin typeface="Arial"/>
+                        </a:endParaRPr>
+                      </a:p>
+                    </a:txBody>
+                    <a:tcPr anchor="ctr">
+                      <a:lnL w="6480">
+                        <a:solidFill>
+                          <a:srgbClr val="CBD5DD"/>
+                        </a:solidFill>
+                        <a:prstDash val="solid"/>
+                      </a:lnL>
+                      <a:lnR w="6480">
+                        <a:solidFill>
+                          <a:srgbClr val="CBD5DD"/>
+                        </a:solidFill>
+                        <a:prstDash val="solid"/>
+                      </a:lnR>
+                      <a:lnT w="6480">
+                        <a:solidFill>
+                          <a:srgbClr val="CBD5DD"/>
+                        </a:solidFill>
+                        <a:prstDash val="solid"/>
+                      </a:lnT>
+                      <a:lnB w="6480">
+                        <a:solidFill>
+                          <a:srgbClr val="CBD5DD"/>
+                        </a:solidFill>
+                        <a:prstDash val="solid"/>
+                      </a:lnB>
+                      <a:noFill/>
+                    </a:tcPr>
+                  </a:tc>
+                  <a:tc>
+                    <a:txBody>
+                      <a:bodyPr/>
+                      <a:lstStyle/>
+                      <a:p>
+                        <a:pPr algn="ctr" defTabSz="914400">
+                          <a:lnSpc>
+                            <a:spcPct val="100000"/>
+                          </a:lnSpc>
+                          <a:tabLst>
+                            <a:tab pos="0" algn="l"/>
+                          </a:tabLst>
+                        </a:pPr>
+                        <a:r>
+                          <a:rPr lang="en-US" sz="900" b="0" u="none" strike="noStrike">
+                            <a:solidFill>
+                              <a:srgbClr val="2C3E50"/>
+                            </a:solidFill>
+                            <a:effectLst/>
+                            <a:uFillTx/>
+                            <a:latin typeface="Calibri"/>
+                            <a:ea typeface="Calibri"/>
+                          </a:rPr>
+                          <a:t>21</a:t>
+                        </a:r>
+                        <a:endParaRPr lang="en-US" sz="900" b="0" u="none" strike="noStrike">
+                          <a:solidFill>
+                            <a:srgbClr val="000000"/>
+                          </a:solidFill>
+                          <a:effectLst/>
+                          <a:uFillTx/>
+                          <a:latin typeface="Arial"/>
+                        </a:endParaRPr>
+                      </a:p>
+                    </a:txBody>
+                    <a:tcPr anchor="ctr">
+                      <a:lnL w="6480">
+                        <a:solidFill>
+                          <a:srgbClr val="CBD5DD"/>
+                        </a:solidFill>
+                        <a:prstDash val="solid"/>
+                      </a:lnL>
+                      <a:lnR w="6480">
+                        <a:solidFill>
+                          <a:srgbClr val="CBD5DD"/>
+                        </a:solidFill>
+                        <a:prstDash val="solid"/>
+                      </a:lnR>
+                      <a:lnT w="6480">
+                        <a:solidFill>
+                          <a:srgbClr val="CBD5DD"/>
+                        </a:solidFill>
+                        <a:prstDash val="solid"/>
+                      </a:lnT>
+                      <a:lnB w="6480">
+                        <a:solidFill>
+                          <a:srgbClr val="CBD5DD"/>
+                        </a:solidFill>
+                        <a:prstDash val="solid"/>
+                      </a:lnB>
+                      <a:noFill/>
+                    </a:tcPr>
+                  </a:tc>
+                  <a:tc>
+                    <a:txBody>
+                      <a:bodyPr/>
+                      <a:lstStyle/>
+                      <a:p>
+                        <a:pPr algn="ctr" defTabSz="914400">
+                          <a:lnSpc>
+                            <a:spcPct val="100000"/>
+                          </a:lnSpc>
+                          <a:tabLst>
+                            <a:tab pos="0" algn="l"/>
+                          </a:tabLst>
+                        </a:pPr>
+                        <a:r>
+                          <a:rPr lang="en-US" sz="900" b="0" u="none" strike="noStrike">
+                            <a:solidFill>
+                              <a:srgbClr val="2C3E50"/>
+                            </a:solidFill>
+                            <a:effectLst/>
+                            <a:uFillTx/>
+                            <a:latin typeface="Calibri"/>
+                            <a:ea typeface="Calibri"/>
+                          </a:rPr>
+                          <a:t>0</a:t>
+                        </a:r>
+                        <a:endParaRPr lang="en-US" sz="900" b="0" u="none" strike="noStrike">
+                          <a:solidFill>
+                            <a:srgbClr val="000000"/>
+                          </a:solidFill>
+                          <a:effectLst/>
+                          <a:uFillTx/>
+                          <a:latin typeface="Arial"/>
+                        </a:endParaRPr>
+                      </a:p>
+                    </a:txBody>
+                    <a:tcPr anchor="ctr">
+                      <a:lnL w="6480">
+                        <a:solidFill>
+                          <a:srgbClr val="CBD5DD"/>
+                        </a:solidFill>
+                        <a:prstDash val="solid"/>
+                      </a:lnL>
+                      <a:lnR w="6480">
+                        <a:solidFill>
+                          <a:srgbClr val="CBD5DD"/>
+                        </a:solidFill>
+                        <a:prstDash val="solid"/>
+                      </a:lnR>
+                      <a:lnT w="6480">
+                        <a:solidFill>
+                          <a:srgbClr val="CBD5DD"/>
+                        </a:solidFill>
+                        <a:prstDash val="solid"/>
+                      </a:lnT>
+                      <a:lnB w="6480">
+                        <a:solidFill>
+                          <a:srgbClr val="CBD5DD"/>
+                        </a:solidFill>
+                        <a:prstDash val="solid"/>
+                      </a:lnB>
+                      <a:noFill/>
+                    </a:tcPr>
+                  </a:tc>
+                  <a:tc>
+                    <a:txBody>
+                      <a:bodyPr/>
+                      <a:lstStyle/>
+                      <a:p>
+                        <a:pPr algn="ctr" defTabSz="914400">
+                          <a:lnSpc>
+                            <a:spcPct val="100000"/>
+                          </a:lnSpc>
+                          <a:tabLst>
+                            <a:tab pos="0" algn="l"/>
+                          </a:tabLst>
+                        </a:pPr>
+                        <a:r>
+                          <a:rPr lang="en-US" sz="900" b="0" u="none" strike="noStrike">
+                            <a:solidFill>
+                              <a:srgbClr val="2C3E50"/>
+                            </a:solidFill>
+                            <a:effectLst/>
+                            <a:uFillTx/>
+                            <a:latin typeface="Calibri"/>
+                            <a:ea typeface="Calibri"/>
+                          </a:rPr>
+                          <a:t>79</a:t>
+                        </a:r>
+                        <a:endParaRPr lang="en-US" sz="900" b="0" u="none" strike="noStrike">
+                          <a:solidFill>
+                            <a:srgbClr val="000000"/>
+                          </a:solidFill>
+                          <a:effectLst/>
+                          <a:uFillTx/>
+                          <a:latin typeface="Arial"/>
+                        </a:endParaRPr>
+                      </a:p>
+                    </a:txBody>
+                    <a:tcPr anchor="ctr">
+                      <a:lnL w="6480">
+                        <a:solidFill>
+                          <a:srgbClr val="CBD5DD"/>
+                        </a:solidFill>
+                        <a:prstDash val="solid"/>
+                      </a:lnL>
+                      <a:lnR w="6480">
+                        <a:solidFill>
+                          <a:srgbClr val="CBD5DD"/>
+                        </a:solidFill>
+                        <a:prstDash val="solid"/>
+                      </a:lnR>
+                      <a:lnT w="6480">
+                        <a:solidFill>
+                          <a:srgbClr val="CBD5DD"/>
+                        </a:solidFill>
+                        <a:prstDash val="solid"/>
+                      </a:lnT>
+                      <a:lnB w="6480">
+                        <a:solidFill>
+                          <a:srgbClr val="CBD5DD"/>
+                        </a:solidFill>
+                        <a:prstDash val="solid"/>
+                      </a:lnB>
+                      <a:noFill/>
+                    </a:tcPr>
+                  </a:tc>
+                  <a:tc>
+                    <a:txBody>
+                      <a:bodyPr/>
+                      <a:lstStyle/>
+                      <a:p>
+                        <a:pPr algn="ctr" defTabSz="914400">
+                          <a:lnSpc>
+                            <a:spcPct val="100000"/>
+                          </a:lnSpc>
+                          <a:tabLst>
+                            <a:tab pos="0" algn="l"/>
+                          </a:tabLst>
+                        </a:pPr>
+                        <a:r>
+                          <a:rPr lang="en-US" sz="900" b="0" u="none" strike="noStrike">
+                            <a:solidFill>
+                              <a:srgbClr val="2C3E50"/>
+                            </a:solidFill>
+                            <a:effectLst/>
+                            <a:uFillTx/>
+                            <a:latin typeface="Calibri"/>
+                            <a:ea typeface="Calibri"/>
+                          </a:rPr>
+                          <a:t>85</a:t>
+                        </a:r>
+                        <a:endParaRPr lang="en-US" sz="900" b="0" u="none" strike="noStrike">
+                          <a:solidFill>
+                            <a:srgbClr val="000000"/>
+                          </a:solidFill>
+                          <a:effectLst/>
+                          <a:uFillTx/>
+                          <a:latin typeface="Arial"/>
+                        </a:endParaRPr>
+                      </a:p>
+                    </a:txBody>
+                    <a:tcPr anchor="ctr">
+                      <a:lnL w="6480">
+                        <a:solidFill>
+                          <a:srgbClr val="CBD5DD"/>
+                        </a:solidFill>
+                        <a:prstDash val="solid"/>
+                      </a:lnL>
+                      <a:lnR w="6480">
+                        <a:solidFill>
+                          <a:srgbClr val="CBD5DD"/>
+                        </a:solidFill>
+                        <a:prstDash val="solid"/>
+                      </a:lnR>
+                      <a:lnT w="6480">
+                        <a:solidFill>
+                          <a:srgbClr val="CBD5DD"/>
+                        </a:solidFill>
+                        <a:prstDash val="solid"/>
+                      </a:lnT>
+                      <a:lnB w="6480">
+                        <a:solidFill>
+                          <a:srgbClr val="CBD5DD"/>
+                        </a:solidFill>
+                        <a:prstDash val="solid"/>
+                      </a:lnB>
+                      <a:noFill/>
+                    </a:tcPr>
+                  </a:tc>
+                  <a:extLst>
+                    <a:ext uri="{0D108BD9-81ED-4DB2-BD59-A6C34878D82A}">
+                      <a16:rowId xmlns:a16="http://schemas.microsoft.com/office/drawing/2014/main" val="10002"/>
+                    </a:ext>
+                  </a:extLst>
+                </a:tr>
+                <a:tr h="274320">
+                  <a:tc>
+                    <a:txBody>
+                      <a:bodyPr/>
+                      <a:lstStyle/>
+                      <a:p>
+                        <a:pPr defTabSz="914400">
+                          <a:lnSpc>
+                            <a:spcPct val="100000"/>
+                          </a:lnSpc>
+                          <a:tabLst>
+                            <a:tab pos="0" algn="l"/>
+                          </a:tabLst>
+                        </a:pPr>
+                        <a:r>
+                          <a:rPr lang="en-US" sz="900" b="0" u="none" strike="noStrike">
+                            <a:solidFill>
+                              <a:srgbClr val="2C3E50"/>
+                            </a:solidFill>
+                            <a:effectLst/>
+                            <a:uFillTx/>
+                            <a:latin typeface="Calibri"/>
+                            <a:ea typeface="Calibri"/>
+                          </a:rPr>
+                          <a:t>C-terminal IDR</a:t>
+                        </a:r>
+                        <a:endParaRPr lang="en-US" sz="900" b="0" u="none" strike="noStrike">
+                          <a:solidFill>
+                            <a:srgbClr val="000000"/>
+                          </a:solidFill>
+                          <a:effectLst/>
+                          <a:uFillTx/>
+                          <a:latin typeface="Arial"/>
+                        </a:endParaRPr>
+                      </a:p>
+                    </a:txBody>
+                    <a:tcPr anchor="ctr">
+                      <a:lnL w="6480">
+                        <a:solidFill>
+                          <a:srgbClr val="CBD5DD"/>
+                        </a:solidFill>
+                        <a:prstDash val="solid"/>
+                      </a:lnL>
+                      <a:lnR w="6480">
+                        <a:solidFill>
+                          <a:srgbClr val="CBD5DD"/>
+                        </a:solidFill>
+                        <a:prstDash val="solid"/>
+                      </a:lnR>
+                      <a:lnT w="6480">
+                        <a:solidFill>
+                          <a:srgbClr val="CBD5DD"/>
+                        </a:solidFill>
+                        <a:prstDash val="solid"/>
+                      </a:lnT>
+                      <a:lnB w="6480">
+                        <a:solidFill>
+                          <a:srgbClr val="CBD5DD"/>
+                        </a:solidFill>
+                        <a:prstDash val="solid"/>
+                      </a:lnB>
+                      <a:noFill/>
+                    </a:tcPr>
+                  </a:tc>
+                  <a:tc>
+                    <a:txBody>
+                      <a:bodyPr/>
+                      <a:lstStyle/>
+                      <a:p>
+                        <a:pPr algn="ctr" defTabSz="914400">
+                          <a:lnSpc>
+                            <a:spcPct val="100000"/>
+                          </a:lnSpc>
+                          <a:tabLst>
+                            <a:tab pos="0" algn="l"/>
+                          </a:tabLst>
+                        </a:pPr>
+                        <a:r>
+                          <a:rPr lang="en-US" sz="900" b="0" u="none" strike="noStrike">
+                            <a:solidFill>
+                              <a:srgbClr val="2C3E50"/>
+                            </a:solidFill>
+                            <a:effectLst/>
+                            <a:uFillTx/>
+                            <a:latin typeface="Calibri"/>
+                            <a:ea typeface="Calibri"/>
+                          </a:rPr>
+                          <a:t>199-222</a:t>
+                        </a:r>
+                        <a:endParaRPr lang="en-US" sz="900" b="0" u="none" strike="noStrike">
+                          <a:solidFill>
+                            <a:srgbClr val="000000"/>
+                          </a:solidFill>
+                          <a:effectLst/>
+                          <a:uFillTx/>
+                          <a:latin typeface="Arial"/>
+                        </a:endParaRPr>
+                      </a:p>
+                    </a:txBody>
+                    <a:tcPr anchor="ctr">
+                      <a:lnL w="6480">
+                        <a:solidFill>
+                          <a:srgbClr val="CBD5DD"/>
+                        </a:solidFill>
+                        <a:prstDash val="solid"/>
+                      </a:lnL>
+                      <a:lnR w="6480">
+                        <a:solidFill>
+                          <a:srgbClr val="CBD5DD"/>
+                        </a:solidFill>
+                        <a:prstDash val="solid"/>
+                      </a:lnR>
+                      <a:lnT w="6480">
+                        <a:solidFill>
+                          <a:srgbClr val="CBD5DD"/>
+                        </a:solidFill>
+                        <a:prstDash val="solid"/>
+                      </a:lnT>
+                      <a:lnB w="6480">
+                        <a:solidFill>
+                          <a:srgbClr val="CBD5DD"/>
+                        </a:solidFill>
+                        <a:prstDash val="solid"/>
+                      </a:lnB>
+                      <a:noFill/>
+                    </a:tcPr>
+                  </a:tc>
+                  <a:tc>
+                    <a:txBody>
+                      <a:bodyPr/>
+                      <a:lstStyle/>
+                      <a:p>
+                        <a:pPr algn="ctr" defTabSz="914400">
+                          <a:lnSpc>
+                            <a:spcPct val="100000"/>
+                          </a:lnSpc>
+                          <a:tabLst>
+                            <a:tab pos="0" algn="l"/>
+                          </a:tabLst>
+                        </a:pPr>
+                        <a:r>
+                          <a:rPr lang="en-US" sz="900" b="0" u="none" strike="noStrike">
+                            <a:solidFill>
+                              <a:srgbClr val="2C3E50"/>
+                            </a:solidFill>
+                            <a:effectLst/>
+                            <a:uFillTx/>
+                            <a:latin typeface="Calibri"/>
+                            <a:ea typeface="Calibri"/>
+                          </a:rPr>
+                          <a:t>8</a:t>
+                        </a:r>
+                        <a:endParaRPr lang="en-US" sz="900" b="0" u="none" strike="noStrike">
+                          <a:solidFill>
+                            <a:srgbClr val="000000"/>
+                          </a:solidFill>
+                          <a:effectLst/>
+                          <a:uFillTx/>
+                          <a:latin typeface="Arial"/>
+                        </a:endParaRPr>
+                      </a:p>
+                    </a:txBody>
+                    <a:tcPr anchor="ctr">
+                      <a:lnL w="6480">
+                        <a:solidFill>
+                          <a:srgbClr val="CBD5DD"/>
+                        </a:solidFill>
+                        <a:prstDash val="solid"/>
+                      </a:lnL>
+                      <a:lnR w="6480">
+                        <a:solidFill>
+                          <a:srgbClr val="CBD5DD"/>
+                        </a:solidFill>
+                        <a:prstDash val="solid"/>
+                      </a:lnR>
+                      <a:lnT w="6480">
+                        <a:solidFill>
+                          <a:srgbClr val="CBD5DD"/>
+                        </a:solidFill>
+                        <a:prstDash val="solid"/>
+                      </a:lnT>
+                      <a:lnB w="6480">
+                        <a:solidFill>
+                          <a:srgbClr val="CBD5DD"/>
+                        </a:solidFill>
+                        <a:prstDash val="solid"/>
+                      </a:lnB>
+                      <a:noFill/>
+                    </a:tcPr>
+                  </a:tc>
+                  <a:tc>
+                    <a:txBody>
+                      <a:bodyPr/>
+                      <a:lstStyle/>
+                      <a:p>
+                        <a:pPr algn="ctr" defTabSz="914400">
+                          <a:lnSpc>
+                            <a:spcPct val="100000"/>
+                          </a:lnSpc>
+                          <a:tabLst>
+                            <a:tab pos="0" algn="l"/>
+                          </a:tabLst>
+                        </a:pPr>
+                        <a:r>
+                          <a:rPr lang="en-US" sz="900" b="0" u="none" strike="noStrike">
+                            <a:solidFill>
+                              <a:srgbClr val="2C3E50"/>
+                            </a:solidFill>
+                            <a:effectLst/>
+                            <a:uFillTx/>
+                            <a:latin typeface="Calibri"/>
+                            <a:ea typeface="Calibri"/>
+                          </a:rPr>
+                          <a:t>0</a:t>
+                        </a:r>
+                        <a:endParaRPr lang="en-US" sz="900" b="0" u="none" strike="noStrike">
+                          <a:solidFill>
+                            <a:srgbClr val="000000"/>
+                          </a:solidFill>
+                          <a:effectLst/>
+                          <a:uFillTx/>
+                          <a:latin typeface="Arial"/>
+                        </a:endParaRPr>
+                      </a:p>
+                    </a:txBody>
+                    <a:tcPr anchor="ctr">
+                      <a:lnL w="6480">
+                        <a:solidFill>
+                          <a:srgbClr val="CBD5DD"/>
+                        </a:solidFill>
+                        <a:prstDash val="solid"/>
+                      </a:lnL>
+                      <a:lnR w="6480">
+                        <a:solidFill>
+                          <a:srgbClr val="CBD5DD"/>
+                        </a:solidFill>
+                        <a:prstDash val="solid"/>
+                      </a:lnR>
+                      <a:lnT w="6480">
+                        <a:solidFill>
+                          <a:srgbClr val="CBD5DD"/>
+                        </a:solidFill>
+                        <a:prstDash val="solid"/>
+                      </a:lnT>
+                      <a:lnB w="6480">
+                        <a:solidFill>
+                          <a:srgbClr val="CBD5DD"/>
+                        </a:solidFill>
+                        <a:prstDash val="solid"/>
+                      </a:lnB>
+                      <a:noFill/>
+                    </a:tcPr>
+                  </a:tc>
+                  <a:tc>
+                    <a:txBody>
+                      <a:bodyPr/>
+                      <a:lstStyle/>
+                      <a:p>
+                        <a:pPr algn="ctr" defTabSz="914400">
+                          <a:lnSpc>
+                            <a:spcPct val="100000"/>
+                          </a:lnSpc>
+                          <a:tabLst>
+                            <a:tab pos="0" algn="l"/>
+                          </a:tabLst>
+                        </a:pPr>
+                        <a:r>
+                          <a:rPr lang="en-US" sz="900" b="0" u="none" strike="noStrike">
+                            <a:solidFill>
+                              <a:srgbClr val="2C3E50"/>
+                            </a:solidFill>
+                            <a:effectLst/>
+                            <a:uFillTx/>
+                            <a:latin typeface="Calibri"/>
+                            <a:ea typeface="Calibri"/>
+                          </a:rPr>
+                          <a:t>92</a:t>
+                        </a:r>
+                        <a:endParaRPr lang="en-US" sz="900" b="0" u="none" strike="noStrike">
+                          <a:solidFill>
+                            <a:srgbClr val="000000"/>
+                          </a:solidFill>
+                          <a:effectLst/>
+                          <a:uFillTx/>
+                          <a:latin typeface="Arial"/>
+                        </a:endParaRPr>
+                      </a:p>
+                    </a:txBody>
+                    <a:tcPr anchor="ctr">
+                      <a:lnL w="6480">
+                        <a:solidFill>
+                          <a:srgbClr val="CBD5DD"/>
+                        </a:solidFill>
+                        <a:prstDash val="solid"/>
+                      </a:lnL>
+                      <a:lnR w="6480">
+                        <a:solidFill>
+                          <a:srgbClr val="CBD5DD"/>
+                        </a:solidFill>
+                        <a:prstDash val="solid"/>
+                      </a:lnR>
+                      <a:lnT w="6480">
+                        <a:solidFill>
+                          <a:srgbClr val="CBD5DD"/>
+                        </a:solidFill>
+                        <a:prstDash val="solid"/>
+                      </a:lnT>
+                      <a:lnB w="6480">
+                        <a:solidFill>
+                          <a:srgbClr val="CBD5DD"/>
+                        </a:solidFill>
+                        <a:prstDash val="solid"/>
+                      </a:lnB>
+                      <a:noFill/>
+                    </a:tcPr>
+                  </a:tc>
+                  <a:tc>
+                    <a:txBody>
+                      <a:bodyPr/>
+                      <a:lstStyle/>
+                      <a:p>
+                        <a:pPr algn="ctr" defTabSz="914400">
+                          <a:lnSpc>
+                            <a:spcPct val="100000"/>
+                          </a:lnSpc>
+                          <a:tabLst>
+                            <a:tab pos="0" algn="l"/>
+                          </a:tabLst>
+                        </a:pPr>
+                        <a:r>
+                          <a:rPr lang="en-US" sz="900" b="0" u="none" strike="noStrike">
+                            <a:solidFill>
+                              <a:srgbClr val="2C3E50"/>
+                            </a:solidFill>
+                            <a:effectLst/>
+                            <a:uFillTx/>
+                            <a:latin typeface="Calibri"/>
+                            <a:ea typeface="Calibri"/>
+                          </a:rPr>
+                          <a:t>46</a:t>
+                        </a:r>
+                        <a:endParaRPr lang="en-US" sz="900" b="0" u="none" strike="noStrike">
+                          <a:solidFill>
+                            <a:srgbClr val="000000"/>
+                          </a:solidFill>
+                          <a:effectLst/>
+                          <a:uFillTx/>
+                          <a:latin typeface="Arial"/>
+                        </a:endParaRPr>
+                      </a:p>
+                    </a:txBody>
+                    <a:tcPr anchor="ctr">
+                      <a:lnL w="6480">
+                        <a:solidFill>
+                          <a:srgbClr val="CBD5DD"/>
+                        </a:solidFill>
+                        <a:prstDash val="solid"/>
+                      </a:lnL>
+                      <a:lnR w="6480">
+                        <a:solidFill>
+                          <a:srgbClr val="CBD5DD"/>
+                        </a:solidFill>
+                        <a:prstDash val="solid"/>
+                      </a:lnR>
+                      <a:lnT w="6480">
+                        <a:solidFill>
+                          <a:srgbClr val="CBD5DD"/>
+                        </a:solidFill>
+                        <a:prstDash val="solid"/>
+                      </a:lnT>
+                      <a:lnB w="6480">
+                        <a:solidFill>
+                          <a:srgbClr val="CBD5DD"/>
+                        </a:solidFill>
+                        <a:prstDash val="solid"/>
+                      </a:lnB>
+                      <a:noFill/>
+                    </a:tcPr>
+                  </a:tc>
+                  <a:extLst>
+                    <a:ext uri="{0D108BD9-81ED-4DB2-BD59-A6C34878D82A}">
+                      <a16:rowId xmlns:a16="http://schemas.microsoft.com/office/drawing/2014/main" val="10003"/>
+                    </a:ext>
+                  </a:extLst>
+                </a:tr>
+                <a:tr h="274320">
+                  <a:tc>
+                    <a:txBody>
+                      <a:bodyPr/>
+                      <a:lstStyle/>
+                      <a:p>
+                        <a:pPr defTabSz="914400">
+                          <a:lnSpc>
+                            <a:spcPct val="100000"/>
+                          </a:lnSpc>
+                          <a:tabLst>
+                            <a:tab pos="0" algn="l"/>
+                          </a:tabLst>
+                        </a:pPr>
+                        <a:r>
+                          <a:rPr lang="en-US" sz="900" b="0" u="none" strike="noStrike">
+                            <a:solidFill>
+                              <a:srgbClr val="2C3E50"/>
+                            </a:solidFill>
+                            <a:effectLst/>
+                            <a:uFillTx/>
+                            <a:latin typeface="Calibri"/>
+                            <a:ea typeface="Calibri"/>
+                          </a:rPr>
+                          <a:t>KEN box (APC/C)</a:t>
+                        </a:r>
+                        <a:endParaRPr lang="en-US" sz="900" b="0" u="none" strike="noStrike">
+                          <a:solidFill>
+                            <a:srgbClr val="000000"/>
+                          </a:solidFill>
+                          <a:effectLst/>
+                          <a:uFillTx/>
+                          <a:latin typeface="Arial"/>
+                        </a:endParaRPr>
+                      </a:p>
+                    </a:txBody>
+                    <a:tcPr anchor="ctr">
+                      <a:lnL w="6480">
+                        <a:solidFill>
+                          <a:srgbClr val="CBD5DD"/>
+                        </a:solidFill>
+                        <a:prstDash val="solid"/>
+                      </a:lnL>
+                      <a:lnR w="6480">
+                        <a:solidFill>
+                          <a:srgbClr val="CBD5DD"/>
+                        </a:solidFill>
+                        <a:prstDash val="solid"/>
+                      </a:lnR>
+                      <a:lnT w="6480">
+                        <a:solidFill>
+                          <a:srgbClr val="CBD5DD"/>
+                        </a:solidFill>
+                        <a:prstDash val="solid"/>
+                      </a:lnT>
+                      <a:lnB w="6480">
+                        <a:solidFill>
+                          <a:srgbClr val="CBD5DD"/>
+                        </a:solidFill>
+                        <a:prstDash val="solid"/>
+                      </a:lnB>
+                      <a:noFill/>
+                    </a:tcPr>
+                  </a:tc>
+                  <a:tc>
+                    <a:txBody>
+                      <a:bodyPr/>
+                      <a:lstStyle/>
+                      <a:p>
+                        <a:pPr algn="ctr" defTabSz="914400">
+                          <a:lnSpc>
+                            <a:spcPct val="100000"/>
+                          </a:lnSpc>
+                          <a:tabLst>
+                            <a:tab pos="0" algn="l"/>
+                          </a:tabLst>
+                        </a:pPr>
+                        <a:r>
+                          <a:rPr lang="en-US" sz="900" b="0" u="none" strike="noStrike">
+                            <a:solidFill>
+                              <a:srgbClr val="2C3E50"/>
+                            </a:solidFill>
+                            <a:effectLst/>
+                            <a:uFillTx/>
+                            <a:latin typeface="Calibri"/>
+                            <a:ea typeface="Calibri"/>
+                          </a:rPr>
+                          <a:t>88-90</a:t>
+                        </a:r>
+                        <a:endParaRPr lang="en-US" sz="900" b="0" u="none" strike="noStrike">
+                          <a:solidFill>
+                            <a:srgbClr val="000000"/>
+                          </a:solidFill>
+                          <a:effectLst/>
+                          <a:uFillTx/>
+                          <a:latin typeface="Arial"/>
+                        </a:endParaRPr>
+                      </a:p>
+                    </a:txBody>
+                    <a:tcPr anchor="ctr">
+                      <a:lnL w="6480">
+                        <a:solidFill>
+                          <a:srgbClr val="CBD5DD"/>
+                        </a:solidFill>
+                        <a:prstDash val="solid"/>
+                      </a:lnL>
+                      <a:lnR w="6480">
+                        <a:solidFill>
+                          <a:srgbClr val="CBD5DD"/>
+                        </a:solidFill>
+                        <a:prstDash val="solid"/>
+                      </a:lnR>
+                      <a:lnT w="6480">
+                        <a:solidFill>
+                          <a:srgbClr val="CBD5DD"/>
+                        </a:solidFill>
+                        <a:prstDash val="solid"/>
+                      </a:lnT>
+                      <a:lnB w="6480">
+                        <a:solidFill>
+                          <a:srgbClr val="CBD5DD"/>
+                        </a:solidFill>
+                        <a:prstDash val="solid"/>
+                      </a:lnB>
+                      <a:noFill/>
+                    </a:tcPr>
+                  </a:tc>
+                  <a:tc>
+                    <a:txBody>
+                      <a:bodyPr/>
+                      <a:lstStyle/>
+                      <a:p>
+                        <a:pPr algn="ctr" defTabSz="914400">
+                          <a:lnSpc>
+                            <a:spcPct val="100000"/>
+                          </a:lnSpc>
+                          <a:tabLst>
+                            <a:tab pos="0" algn="l"/>
+                          </a:tabLst>
+                        </a:pPr>
+                        <a:r>
+                          <a:rPr lang="en-US" sz="900" b="0" u="none" strike="noStrike">
+                            <a:solidFill>
+                              <a:srgbClr val="2C3E50"/>
+                            </a:solidFill>
+                            <a:effectLst/>
+                            <a:uFillTx/>
+                            <a:latin typeface="Calibri"/>
+                            <a:ea typeface="Calibri"/>
+                          </a:rPr>
+                          <a:t>0</a:t>
+                        </a:r>
+                        <a:endParaRPr lang="en-US" sz="900" b="0" u="none" strike="noStrike">
+                          <a:solidFill>
+                            <a:srgbClr val="000000"/>
+                          </a:solidFill>
+                          <a:effectLst/>
+                          <a:uFillTx/>
+                          <a:latin typeface="Arial"/>
+                        </a:endParaRPr>
+                      </a:p>
+                    </a:txBody>
+                    <a:tcPr anchor="ctr">
+                      <a:lnL w="6480">
+                        <a:solidFill>
+                          <a:srgbClr val="CBD5DD"/>
+                        </a:solidFill>
+                        <a:prstDash val="solid"/>
+                      </a:lnL>
+                      <a:lnR w="6480">
+                        <a:solidFill>
+                          <a:srgbClr val="CBD5DD"/>
+                        </a:solidFill>
+                        <a:prstDash val="solid"/>
+                      </a:lnR>
+                      <a:lnT w="6480">
+                        <a:solidFill>
+                          <a:srgbClr val="CBD5DD"/>
+                        </a:solidFill>
+                        <a:prstDash val="solid"/>
+                      </a:lnT>
+                      <a:lnB w="6480">
+                        <a:solidFill>
+                          <a:srgbClr val="CBD5DD"/>
+                        </a:solidFill>
+                        <a:prstDash val="solid"/>
+                      </a:lnB>
+                      <a:noFill/>
+                    </a:tcPr>
+                  </a:tc>
+                  <a:tc>
+                    <a:txBody>
+                      <a:bodyPr/>
+                      <a:lstStyle/>
+                      <a:p>
+                        <a:pPr algn="ctr" defTabSz="914400">
+                          <a:lnSpc>
+                            <a:spcPct val="100000"/>
+                          </a:lnSpc>
+                          <a:tabLst>
+                            <a:tab pos="0" algn="l"/>
+                          </a:tabLst>
+                        </a:pPr>
+                        <a:r>
+                          <a:rPr lang="en-US" sz="900" b="0" u="none" strike="noStrike">
+                            <a:solidFill>
+                              <a:srgbClr val="2C3E50"/>
+                            </a:solidFill>
+                            <a:effectLst/>
+                            <a:uFillTx/>
+                            <a:latin typeface="Calibri"/>
+                            <a:ea typeface="Calibri"/>
+                          </a:rPr>
+                          <a:t>0</a:t>
+                        </a:r>
+                        <a:endParaRPr lang="en-US" sz="900" b="0" u="none" strike="noStrike">
+                          <a:solidFill>
+                            <a:srgbClr val="000000"/>
+                          </a:solidFill>
+                          <a:effectLst/>
+                          <a:uFillTx/>
+                          <a:latin typeface="Arial"/>
+                        </a:endParaRPr>
+                      </a:p>
+                    </a:txBody>
+                    <a:tcPr anchor="ctr">
+                      <a:lnL w="6480">
+                        <a:solidFill>
+                          <a:srgbClr val="CBD5DD"/>
+                        </a:solidFill>
+                        <a:prstDash val="solid"/>
+                      </a:lnL>
+                      <a:lnR w="6480">
+                        <a:solidFill>
+                          <a:srgbClr val="CBD5DD"/>
+                        </a:solidFill>
+                        <a:prstDash val="solid"/>
+                      </a:lnR>
+                      <a:lnT w="6480">
+                        <a:solidFill>
+                          <a:srgbClr val="CBD5DD"/>
+                        </a:solidFill>
+                        <a:prstDash val="solid"/>
+                      </a:lnT>
+                      <a:lnB w="6480">
+                        <a:solidFill>
+                          <a:srgbClr val="CBD5DD"/>
+                        </a:solidFill>
+                        <a:prstDash val="solid"/>
+                      </a:lnB>
+                      <a:noFill/>
+                    </a:tcPr>
+                  </a:tc>
+                  <a:tc>
+                    <a:txBody>
+                      <a:bodyPr/>
+                      <a:lstStyle/>
+                      <a:p>
+                        <a:pPr algn="ctr" defTabSz="914400">
+                          <a:lnSpc>
+                            <a:spcPct val="100000"/>
+                          </a:lnSpc>
+                          <a:tabLst>
+                            <a:tab pos="0" algn="l"/>
+                          </a:tabLst>
+                        </a:pPr>
+                        <a:r>
+                          <a:rPr lang="en-US" sz="900" b="0" u="none" strike="noStrike">
+                            <a:solidFill>
+                              <a:srgbClr val="2C3E50"/>
+                            </a:solidFill>
+                            <a:effectLst/>
+                            <a:uFillTx/>
+                            <a:latin typeface="Calibri"/>
+                            <a:ea typeface="Calibri"/>
+                          </a:rPr>
+                          <a:t>100</a:t>
+                        </a:r>
+                        <a:endParaRPr lang="en-US" sz="900" b="0" u="none" strike="noStrike">
+                          <a:solidFill>
+                            <a:srgbClr val="000000"/>
+                          </a:solidFill>
+                          <a:effectLst/>
+                          <a:uFillTx/>
+                          <a:latin typeface="Arial"/>
+                        </a:endParaRPr>
+                      </a:p>
+                    </a:txBody>
+                    <a:tcPr anchor="ctr">
+                      <a:lnL w="6480">
+                        <a:solidFill>
+                          <a:srgbClr val="CBD5DD"/>
+                        </a:solidFill>
+                        <a:prstDash val="solid"/>
+                      </a:lnL>
+                      <a:lnR w="6480">
+                        <a:solidFill>
+                          <a:srgbClr val="CBD5DD"/>
+                        </a:solidFill>
+                        <a:prstDash val="solid"/>
+                      </a:lnR>
+                      <a:lnT w="6480">
+                        <a:solidFill>
+                          <a:srgbClr val="CBD5DD"/>
+                        </a:solidFill>
+                        <a:prstDash val="solid"/>
+                      </a:lnT>
+                      <a:lnB w="6480">
+                        <a:solidFill>
+                          <a:srgbClr val="CBD5DD"/>
+                        </a:solidFill>
+                        <a:prstDash val="solid"/>
+                      </a:lnB>
+                      <a:noFill/>
+                    </a:tcPr>
+                  </a:tc>
+                  <a:tc>
+                    <a:txBody>
+                      <a:bodyPr/>
+                      <a:lstStyle/>
+                      <a:p>
+                        <a:pPr algn="ctr" defTabSz="914400">
+                          <a:lnSpc>
+                            <a:spcPct val="100000"/>
+                          </a:lnSpc>
+                          <a:tabLst>
+                            <a:tab pos="0" algn="l"/>
+                          </a:tabLst>
+                        </a:pPr>
+                        <a:r>
+                          <a:rPr lang="en-US" sz="900" b="0" u="none" strike="noStrike">
+                            <a:solidFill>
+                              <a:srgbClr val="2C3E50"/>
+                            </a:solidFill>
+                            <a:effectLst/>
+                            <a:uFillTx/>
+                            <a:latin typeface="Calibri"/>
+                            <a:ea typeface="Calibri"/>
+                          </a:rPr>
+                          <a:t>100</a:t>
+                        </a:r>
+                        <a:endParaRPr lang="en-US" sz="900" b="0" u="none" strike="noStrike">
+                          <a:solidFill>
+                            <a:srgbClr val="000000"/>
+                          </a:solidFill>
+                          <a:effectLst/>
+                          <a:uFillTx/>
+                          <a:latin typeface="Arial"/>
+                        </a:endParaRPr>
+                      </a:p>
+                    </a:txBody>
+                    <a:tcPr anchor="ctr">
+                      <a:lnL w="6480">
+                        <a:solidFill>
+                          <a:srgbClr val="CBD5DD"/>
+                        </a:solidFill>
+                        <a:prstDash val="solid"/>
+                      </a:lnL>
+                      <a:lnR w="6480">
+                        <a:solidFill>
+                          <a:srgbClr val="CBD5DD"/>
+                        </a:solidFill>
+                        <a:prstDash val="solid"/>
+                      </a:lnR>
+                      <a:lnT w="6480">
+                        <a:solidFill>
+                          <a:srgbClr val="CBD5DD"/>
+                        </a:solidFill>
+                        <a:prstDash val="solid"/>
+                      </a:lnT>
+                      <a:lnB w="6480">
+                        <a:solidFill>
+                          <a:srgbClr val="CBD5DD"/>
+                        </a:solidFill>
+                        <a:prstDash val="solid"/>
+                      </a:lnB>
+                      <a:noFill/>
+                    </a:tcPr>
+                  </a:tc>
+                  <a:extLst>
+                    <a:ext uri="{0D108BD9-81ED-4DB2-BD59-A6C34878D82A}">
+                      <a16:rowId xmlns:a16="http://schemas.microsoft.com/office/drawing/2014/main" val="10004"/>
+                    </a:ext>
+                  </a:extLst>
+                </a:tr>
+                <a:tr h="274320">
+                  <a:tc>
+                    <a:txBody>
+                      <a:bodyPr/>
+                      <a:lstStyle/>
+                      <a:p>
+                        <a:pPr defTabSz="914400">
+                          <a:lnSpc>
+                            <a:spcPct val="100000"/>
+                          </a:lnSpc>
+                          <a:tabLst>
+                            <a:tab pos="0" algn="l"/>
+                          </a:tabLst>
+                        </a:pPr>
+                        <a:r>
+                          <a:rPr lang="en-US" sz="900" b="0" u="none" strike="noStrike">
+                            <a:solidFill>
+                              <a:srgbClr val="2C3E50"/>
+                            </a:solidFill>
+                            <a:effectLst/>
+                            <a:uFillTx/>
+                            <a:latin typeface="Calibri"/>
+                            <a:ea typeface="Calibri"/>
+                          </a:rPr>
+                          <a:t>MAPK docking (ERK2)</a:t>
+                        </a:r>
+                        <a:endParaRPr lang="en-US" sz="900" b="0" u="none" strike="noStrike">
+                          <a:solidFill>
+                            <a:srgbClr val="000000"/>
+                          </a:solidFill>
+                          <a:effectLst/>
+                          <a:uFillTx/>
+                          <a:latin typeface="Arial"/>
+                        </a:endParaRPr>
+                      </a:p>
+                    </a:txBody>
+                    <a:tcPr anchor="ctr">
+                      <a:lnL w="6480">
+                        <a:solidFill>
+                          <a:srgbClr val="CBD5DD"/>
+                        </a:solidFill>
+                        <a:prstDash val="solid"/>
+                      </a:lnL>
+                      <a:lnR w="6480">
+                        <a:solidFill>
+                          <a:srgbClr val="CBD5DD"/>
+                        </a:solidFill>
+                        <a:prstDash val="solid"/>
+                      </a:lnR>
+                      <a:lnT w="6480">
+                        <a:solidFill>
+                          <a:srgbClr val="CBD5DD"/>
+                        </a:solidFill>
+                        <a:prstDash val="solid"/>
+                      </a:lnT>
+                      <a:lnB w="6480">
+                        <a:solidFill>
+                          <a:srgbClr val="CBD5DD"/>
+                        </a:solidFill>
+                        <a:prstDash val="solid"/>
+                      </a:lnB>
+                      <a:noFill/>
+                    </a:tcPr>
+                  </a:tc>
+                  <a:tc>
+                    <a:txBody>
+                      <a:bodyPr/>
+                      <a:lstStyle/>
+                      <a:p>
+                        <a:pPr algn="ctr" defTabSz="914400">
+                          <a:lnSpc>
+                            <a:spcPct val="100000"/>
+                          </a:lnSpc>
+                          <a:tabLst>
+                            <a:tab pos="0" algn="l"/>
+                          </a:tabLst>
+                        </a:pPr>
+                        <a:r>
+                          <a:rPr lang="en-US" sz="900" b="0" u="none" strike="noStrike">
+                            <a:solidFill>
+                              <a:srgbClr val="2C3E50"/>
+                            </a:solidFill>
+                            <a:effectLst/>
+                            <a:uFillTx/>
+                            <a:latin typeface="Calibri"/>
+                            <a:ea typeface="Calibri"/>
+                          </a:rPr>
+                          <a:t>77-84</a:t>
+                        </a:r>
+                        <a:endParaRPr lang="en-US" sz="900" b="0" u="none" strike="noStrike">
+                          <a:solidFill>
+                            <a:srgbClr val="000000"/>
+                          </a:solidFill>
+                          <a:effectLst/>
+                          <a:uFillTx/>
+                          <a:latin typeface="Arial"/>
+                        </a:endParaRPr>
+                      </a:p>
+                    </a:txBody>
+                    <a:tcPr anchor="ctr">
+                      <a:lnL w="6480">
+                        <a:solidFill>
+                          <a:srgbClr val="CBD5DD"/>
+                        </a:solidFill>
+                        <a:prstDash val="solid"/>
+                      </a:lnL>
+                      <a:lnR w="6480">
+                        <a:solidFill>
+                          <a:srgbClr val="CBD5DD"/>
+                        </a:solidFill>
+                        <a:prstDash val="solid"/>
+                      </a:lnR>
+                      <a:lnT w="6480">
+                        <a:solidFill>
+                          <a:srgbClr val="CBD5DD"/>
+                        </a:solidFill>
+                        <a:prstDash val="solid"/>
+                      </a:lnT>
+                      <a:lnB w="6480">
+                        <a:solidFill>
+                          <a:srgbClr val="CBD5DD"/>
+                        </a:solidFill>
+                        <a:prstDash val="solid"/>
+                      </a:lnB>
+                      <a:noFill/>
+                    </a:tcPr>
+                  </a:tc>
+                  <a:tc>
+                    <a:txBody>
+                      <a:bodyPr/>
+                      <a:lstStyle/>
+                      <a:p>
+                        <a:pPr algn="ctr" defTabSz="914400">
+                          <a:lnSpc>
+                            <a:spcPct val="100000"/>
+                          </a:lnSpc>
+                          <a:tabLst>
+                            <a:tab pos="0" algn="l"/>
+                          </a:tabLst>
+                        </a:pPr>
+                        <a:r>
+                          <a:rPr lang="en-US" sz="900" b="0" u="none" strike="noStrike">
+                            <a:solidFill>
+                              <a:srgbClr val="2C3E50"/>
+                            </a:solidFill>
+                            <a:effectLst/>
+                            <a:uFillTx/>
+                            <a:latin typeface="Calibri"/>
+                            <a:ea typeface="Calibri"/>
+                          </a:rPr>
+                          <a:t>12</a:t>
+                        </a:r>
+                        <a:endParaRPr lang="en-US" sz="900" b="0" u="none" strike="noStrike">
+                          <a:solidFill>
+                            <a:srgbClr val="000000"/>
+                          </a:solidFill>
+                          <a:effectLst/>
+                          <a:uFillTx/>
+                          <a:latin typeface="Arial"/>
+                        </a:endParaRPr>
+                      </a:p>
+                    </a:txBody>
+                    <a:tcPr anchor="ctr">
+                      <a:lnL w="6480">
+                        <a:solidFill>
+                          <a:srgbClr val="CBD5DD"/>
+                        </a:solidFill>
+                        <a:prstDash val="solid"/>
+                      </a:lnL>
+                      <a:lnR w="6480">
+                        <a:solidFill>
+                          <a:srgbClr val="CBD5DD"/>
+                        </a:solidFill>
+                        <a:prstDash val="solid"/>
+                      </a:lnR>
+                      <a:lnT w="6480">
+                        <a:solidFill>
+                          <a:srgbClr val="CBD5DD"/>
+                        </a:solidFill>
+                        <a:prstDash val="solid"/>
+                      </a:lnT>
+                      <a:lnB w="6480">
+                        <a:solidFill>
+                          <a:srgbClr val="CBD5DD"/>
+                        </a:solidFill>
+                        <a:prstDash val="solid"/>
+                      </a:lnB>
+                      <a:noFill/>
+                    </a:tcPr>
+                  </a:tc>
+                  <a:tc>
+                    <a:txBody>
+                      <a:bodyPr/>
+                      <a:lstStyle/>
+                      <a:p>
+                        <a:pPr algn="ctr" defTabSz="914400">
+                          <a:lnSpc>
+                            <a:spcPct val="100000"/>
+                          </a:lnSpc>
+                          <a:tabLst>
+                            <a:tab pos="0" algn="l"/>
+                          </a:tabLst>
+                        </a:pPr>
+                        <a:r>
+                          <a:rPr lang="en-US" sz="900" b="0" u="none" strike="noStrike">
+                            <a:solidFill>
+                              <a:srgbClr val="2C3E50"/>
+                            </a:solidFill>
+                            <a:effectLst/>
+                            <a:uFillTx/>
+                            <a:latin typeface="Calibri"/>
+                            <a:ea typeface="Calibri"/>
+                          </a:rPr>
+                          <a:t>0</a:t>
+                        </a:r>
+                        <a:endParaRPr lang="en-US" sz="900" b="0" u="none" strike="noStrike">
+                          <a:solidFill>
+                            <a:srgbClr val="000000"/>
+                          </a:solidFill>
+                          <a:effectLst/>
+                          <a:uFillTx/>
+                          <a:latin typeface="Arial"/>
+                        </a:endParaRPr>
+                      </a:p>
+                    </a:txBody>
+                    <a:tcPr anchor="ctr">
+                      <a:lnL w="6480">
+                        <a:solidFill>
+                          <a:srgbClr val="CBD5DD"/>
+                        </a:solidFill>
+                        <a:prstDash val="solid"/>
+                      </a:lnL>
+                      <a:lnR w="6480">
+                        <a:solidFill>
+                          <a:srgbClr val="CBD5DD"/>
+                        </a:solidFill>
+                        <a:prstDash val="solid"/>
+                      </a:lnR>
+                      <a:lnT w="6480">
+                        <a:solidFill>
+                          <a:srgbClr val="CBD5DD"/>
+                        </a:solidFill>
+                        <a:prstDash val="solid"/>
+                      </a:lnT>
+                      <a:lnB w="6480">
+                        <a:solidFill>
+                          <a:srgbClr val="CBD5DD"/>
+                        </a:solidFill>
+                        <a:prstDash val="solid"/>
+                      </a:lnB>
+                      <a:noFill/>
+                    </a:tcPr>
+                  </a:tc>
+                  <a:tc>
+                    <a:txBody>
+                      <a:bodyPr/>
+                      <a:lstStyle/>
+                      <a:p>
+                        <a:pPr algn="ctr" defTabSz="914400">
+                          <a:lnSpc>
+                            <a:spcPct val="100000"/>
+                          </a:lnSpc>
+                          <a:tabLst>
+                            <a:tab pos="0" algn="l"/>
+                          </a:tabLst>
+                        </a:pPr>
+                        <a:r>
+                          <a:rPr lang="en-US" sz="900" b="0" u="none" strike="noStrike">
+                            <a:solidFill>
+                              <a:srgbClr val="2C3E50"/>
+                            </a:solidFill>
+                            <a:effectLst/>
+                            <a:uFillTx/>
+                            <a:latin typeface="Calibri"/>
+                            <a:ea typeface="Calibri"/>
+                          </a:rPr>
+                          <a:t>88</a:t>
+                        </a:r>
+                        <a:endParaRPr lang="en-US" sz="900" b="0" u="none" strike="noStrike">
+                          <a:solidFill>
+                            <a:srgbClr val="000000"/>
+                          </a:solidFill>
+                          <a:effectLst/>
+                          <a:uFillTx/>
+                          <a:latin typeface="Arial"/>
+                        </a:endParaRPr>
+                      </a:p>
+                    </a:txBody>
+                    <a:tcPr anchor="ctr">
+                      <a:lnL w="6480">
+                        <a:solidFill>
+                          <a:srgbClr val="CBD5DD"/>
+                        </a:solidFill>
+                        <a:prstDash val="solid"/>
+                      </a:lnL>
+                      <a:lnR w="6480">
+                        <a:solidFill>
+                          <a:srgbClr val="CBD5DD"/>
+                        </a:solidFill>
+                        <a:prstDash val="solid"/>
+                      </a:lnR>
+                      <a:lnT w="6480">
+                        <a:solidFill>
+                          <a:srgbClr val="CBD5DD"/>
+                        </a:solidFill>
+                        <a:prstDash val="solid"/>
+                      </a:lnT>
+                      <a:lnB w="6480">
+                        <a:solidFill>
+                          <a:srgbClr val="CBD5DD"/>
+                        </a:solidFill>
+                        <a:prstDash val="solid"/>
+                      </a:lnB>
+                      <a:noFill/>
+                    </a:tcPr>
+                  </a:tc>
+                  <a:tc>
+                    <a:txBody>
+                      <a:bodyPr/>
+                      <a:lstStyle/>
+                      <a:p>
+                        <a:pPr algn="ctr" defTabSz="914400">
+                          <a:lnSpc>
+                            <a:spcPct val="100000"/>
+                          </a:lnSpc>
+                          <a:tabLst>
+                            <a:tab pos="0" algn="l"/>
+                          </a:tabLst>
+                        </a:pPr>
+                        <a:r>
+                          <a:rPr lang="en-US" sz="900" b="0" u="none" strike="noStrike">
+                            <a:solidFill>
+                              <a:srgbClr val="2C3E50"/>
+                            </a:solidFill>
+                            <a:effectLst/>
+                            <a:uFillTx/>
+                            <a:latin typeface="Calibri"/>
+                            <a:ea typeface="Calibri"/>
+                          </a:rPr>
+                          <a:t>100</a:t>
+                        </a:r>
+                        <a:endParaRPr lang="en-US" sz="900" b="0" u="none" strike="noStrike">
+                          <a:solidFill>
+                            <a:srgbClr val="000000"/>
+                          </a:solidFill>
+                          <a:effectLst/>
+                          <a:uFillTx/>
+                          <a:latin typeface="Arial"/>
+                        </a:endParaRPr>
+                      </a:p>
+                    </a:txBody>
+                    <a:tcPr anchor="ctr">
+                      <a:lnL w="6480">
+                        <a:solidFill>
+                          <a:srgbClr val="CBD5DD"/>
+                        </a:solidFill>
+                        <a:prstDash val="solid"/>
+                      </a:lnL>
+                      <a:lnR w="6480">
+                        <a:solidFill>
+                          <a:srgbClr val="CBD5DD"/>
+                        </a:solidFill>
+                        <a:prstDash val="solid"/>
+                      </a:lnR>
+                      <a:lnT w="6480">
+                        <a:solidFill>
+                          <a:srgbClr val="CBD5DD"/>
+                        </a:solidFill>
+                        <a:prstDash val="solid"/>
+                      </a:lnT>
+                      <a:lnB w="6480">
+                        <a:solidFill>
+                          <a:srgbClr val="CBD5DD"/>
+                        </a:solidFill>
+                        <a:prstDash val="solid"/>
+                      </a:lnB>
+                      <a:noFill/>
+                    </a:tcPr>
+                  </a:tc>
+                  <a:extLst>
+                    <a:ext uri="{0D108BD9-81ED-4DB2-BD59-A6C34878D82A}">
+                      <a16:rowId xmlns:a16="http://schemas.microsoft.com/office/drawing/2014/main" val="10005"/>
+                    </a:ext>
+                  </a:extLst>
+                </a:tr>
+                <a:tr h="274320">
+                  <a:tc>
+                    <a:txBody>
+                      <a:bodyPr/>
+                      <a:lstStyle/>
+                      <a:p>
+                        <a:pPr defTabSz="914400">
+                          <a:lnSpc>
+                            <a:spcPct val="100000"/>
+                          </a:lnSpc>
+                          <a:tabLst>
+                            <a:tab pos="0" algn="l"/>
+                          </a:tabLst>
+                        </a:pPr>
+                        <a:r>
+                          <a:rPr lang="en-US" sz="900" b="0" u="none" strike="noStrike">
+                            <a:solidFill>
+                              <a:srgbClr val="2C3E50"/>
+                            </a:solidFill>
+                            <a:effectLst/>
+                            <a:uFillTx/>
+                            <a:latin typeface="Calibri"/>
+                            <a:ea typeface="Calibri"/>
+                          </a:rPr>
+                          <a:t>SPOP degron 1</a:t>
+                        </a:r>
+                        <a:endParaRPr lang="en-US" sz="900" b="0" u="none" strike="noStrike">
+                          <a:solidFill>
+                            <a:srgbClr val="000000"/>
+                          </a:solidFill>
+                          <a:effectLst/>
+                          <a:uFillTx/>
+                          <a:latin typeface="Arial"/>
+                        </a:endParaRPr>
+                      </a:p>
+                    </a:txBody>
+                    <a:tcPr anchor="ctr">
+                      <a:lnL w="6480">
+                        <a:solidFill>
+                          <a:srgbClr val="CBD5DD"/>
+                        </a:solidFill>
+                        <a:prstDash val="solid"/>
+                      </a:lnL>
+                      <a:lnR w="6480">
+                        <a:solidFill>
+                          <a:srgbClr val="CBD5DD"/>
+                        </a:solidFill>
+                        <a:prstDash val="solid"/>
+                      </a:lnR>
+                      <a:lnT w="6480">
+                        <a:solidFill>
+                          <a:srgbClr val="CBD5DD"/>
+                        </a:solidFill>
+                        <a:prstDash val="solid"/>
+                      </a:lnT>
+                      <a:lnB w="6480">
+                        <a:solidFill>
+                          <a:srgbClr val="CBD5DD"/>
+                        </a:solidFill>
+                        <a:prstDash val="solid"/>
+                      </a:lnB>
+                      <a:noFill/>
+                    </a:tcPr>
+                  </a:tc>
+                  <a:tc>
+                    <a:txBody>
+                      <a:bodyPr/>
+                      <a:lstStyle/>
+                      <a:p>
+                        <a:pPr algn="ctr" defTabSz="914400">
+                          <a:lnSpc>
+                            <a:spcPct val="100000"/>
+                          </a:lnSpc>
+                          <a:tabLst>
+                            <a:tab pos="0" algn="l"/>
+                          </a:tabLst>
+                        </a:pPr>
+                        <a:r>
+                          <a:rPr lang="en-US" sz="900" b="0" u="none" strike="noStrike">
+                            <a:solidFill>
+                              <a:srgbClr val="2C3E50"/>
+                            </a:solidFill>
+                            <a:effectLst/>
+                            <a:uFillTx/>
+                            <a:latin typeface="Calibri"/>
+                            <a:ea typeface="Calibri"/>
+                          </a:rPr>
+                          <a:t>122-126</a:t>
+                        </a:r>
+                        <a:endParaRPr lang="en-US" sz="900" b="0" u="none" strike="noStrike">
+                          <a:solidFill>
+                            <a:srgbClr val="000000"/>
+                          </a:solidFill>
+                          <a:effectLst/>
+                          <a:uFillTx/>
+                          <a:latin typeface="Arial"/>
+                        </a:endParaRPr>
+                      </a:p>
+                    </a:txBody>
+                    <a:tcPr anchor="ctr">
+                      <a:lnL w="6480">
+                        <a:solidFill>
+                          <a:srgbClr val="CBD5DD"/>
+                        </a:solidFill>
+                        <a:prstDash val="solid"/>
+                      </a:lnL>
+                      <a:lnR w="6480">
+                        <a:solidFill>
+                          <a:srgbClr val="CBD5DD"/>
+                        </a:solidFill>
+                        <a:prstDash val="solid"/>
+                      </a:lnR>
+                      <a:lnT w="6480">
+                        <a:solidFill>
+                          <a:srgbClr val="CBD5DD"/>
+                        </a:solidFill>
+                        <a:prstDash val="solid"/>
+                      </a:lnT>
+                      <a:lnB w="6480">
+                        <a:solidFill>
+                          <a:srgbClr val="CBD5DD"/>
+                        </a:solidFill>
+                        <a:prstDash val="solid"/>
+                      </a:lnB>
+                      <a:noFill/>
+                    </a:tcPr>
+                  </a:tc>
+                  <a:tc>
+                    <a:txBody>
+                      <a:bodyPr/>
+                      <a:lstStyle/>
+                      <a:p>
+                        <a:pPr algn="ctr" defTabSz="914400">
+                          <a:lnSpc>
+                            <a:spcPct val="100000"/>
+                          </a:lnSpc>
+                          <a:tabLst>
+                            <a:tab pos="0" algn="l"/>
+                          </a:tabLst>
+                        </a:pPr>
+                        <a:r>
+                          <a:rPr lang="en-US" sz="900" b="0" u="none" strike="noStrike">
+                            <a:solidFill>
+                              <a:srgbClr val="2C3E50"/>
+                            </a:solidFill>
+                            <a:effectLst/>
+                            <a:uFillTx/>
+                            <a:latin typeface="Calibri"/>
+                            <a:ea typeface="Calibri"/>
+                          </a:rPr>
+                          <a:t>0</a:t>
+                        </a:r>
+                        <a:endParaRPr lang="en-US" sz="900" b="0" u="none" strike="noStrike">
+                          <a:solidFill>
+                            <a:srgbClr val="000000"/>
+                          </a:solidFill>
+                          <a:effectLst/>
+                          <a:uFillTx/>
+                          <a:latin typeface="Arial"/>
+                        </a:endParaRPr>
+                      </a:p>
+                    </a:txBody>
+                    <a:tcPr anchor="ctr">
+                      <a:lnL w="6480">
+                        <a:solidFill>
+                          <a:srgbClr val="CBD5DD"/>
+                        </a:solidFill>
+                        <a:prstDash val="solid"/>
+                      </a:lnL>
+                      <a:lnR w="6480">
+                        <a:solidFill>
+                          <a:srgbClr val="CBD5DD"/>
+                        </a:solidFill>
+                        <a:prstDash val="solid"/>
+                      </a:lnR>
+                      <a:lnT w="6480">
+                        <a:solidFill>
+                          <a:srgbClr val="CBD5DD"/>
+                        </a:solidFill>
+                        <a:prstDash val="solid"/>
+                      </a:lnT>
+                      <a:lnB w="6480">
+                        <a:solidFill>
+                          <a:srgbClr val="CBD5DD"/>
+                        </a:solidFill>
+                        <a:prstDash val="solid"/>
+                      </a:lnB>
+                      <a:noFill/>
+                    </a:tcPr>
+                  </a:tc>
+                  <a:tc>
+                    <a:txBody>
+                      <a:bodyPr/>
+                      <a:lstStyle/>
+                      <a:p>
+                        <a:pPr algn="ctr" defTabSz="914400">
+                          <a:lnSpc>
+                            <a:spcPct val="100000"/>
+                          </a:lnSpc>
+                          <a:tabLst>
+                            <a:tab pos="0" algn="l"/>
+                          </a:tabLst>
+                        </a:pPr>
+                        <a:r>
+                          <a:rPr lang="en-US" sz="900" b="0" u="none" strike="noStrike">
+                            <a:solidFill>
+                              <a:srgbClr val="2C3E50"/>
+                            </a:solidFill>
+                            <a:effectLst/>
+                            <a:uFillTx/>
+                            <a:latin typeface="Calibri"/>
+                            <a:ea typeface="Calibri"/>
+                          </a:rPr>
+                          <a:t>0</a:t>
+                        </a:r>
+                        <a:endParaRPr lang="en-US" sz="900" b="0" u="none" strike="noStrike">
+                          <a:solidFill>
+                            <a:srgbClr val="000000"/>
+                          </a:solidFill>
+                          <a:effectLst/>
+                          <a:uFillTx/>
+                          <a:latin typeface="Arial"/>
+                        </a:endParaRPr>
+                      </a:p>
+                    </a:txBody>
+                    <a:tcPr anchor="ctr">
+                      <a:lnL w="6480">
+                        <a:solidFill>
+                          <a:srgbClr val="CBD5DD"/>
+                        </a:solidFill>
+                        <a:prstDash val="solid"/>
+                      </a:lnL>
+                      <a:lnR w="6480">
+                        <a:solidFill>
+                          <a:srgbClr val="CBD5DD"/>
+                        </a:solidFill>
+                        <a:prstDash val="solid"/>
+                      </a:lnR>
+                      <a:lnT w="6480">
+                        <a:solidFill>
+                          <a:srgbClr val="CBD5DD"/>
+                        </a:solidFill>
+                        <a:prstDash val="solid"/>
+                      </a:lnT>
+                      <a:lnB w="6480">
+                        <a:solidFill>
+                          <a:srgbClr val="CBD5DD"/>
+                        </a:solidFill>
+                        <a:prstDash val="solid"/>
+                      </a:lnB>
+                      <a:noFill/>
+                    </a:tcPr>
+                  </a:tc>
+                  <a:tc>
+                    <a:txBody>
+                      <a:bodyPr/>
+                      <a:lstStyle/>
+                      <a:p>
+                        <a:pPr algn="ctr" defTabSz="914400">
+                          <a:lnSpc>
+                            <a:spcPct val="100000"/>
+                          </a:lnSpc>
+                          <a:tabLst>
+                            <a:tab pos="0" algn="l"/>
+                          </a:tabLst>
+                        </a:pPr>
+                        <a:r>
+                          <a:rPr lang="en-US" sz="900" b="0" u="none" strike="noStrike">
+                            <a:solidFill>
+                              <a:srgbClr val="2C3E50"/>
+                            </a:solidFill>
+                            <a:effectLst/>
+                            <a:uFillTx/>
+                            <a:latin typeface="Calibri"/>
+                            <a:ea typeface="Calibri"/>
+                          </a:rPr>
+                          <a:t>100</a:t>
+                        </a:r>
+                        <a:endParaRPr lang="en-US" sz="900" b="0" u="none" strike="noStrike">
+                          <a:solidFill>
+                            <a:srgbClr val="000000"/>
+                          </a:solidFill>
+                          <a:effectLst/>
+                          <a:uFillTx/>
+                          <a:latin typeface="Arial"/>
+                        </a:endParaRPr>
+                      </a:p>
+                    </a:txBody>
+                    <a:tcPr anchor="ctr">
+                      <a:lnL w="6480">
+                        <a:solidFill>
+                          <a:srgbClr val="CBD5DD"/>
+                        </a:solidFill>
+                        <a:prstDash val="solid"/>
+                      </a:lnL>
+                      <a:lnR w="6480">
+                        <a:solidFill>
+                          <a:srgbClr val="CBD5DD"/>
+                        </a:solidFill>
+                        <a:prstDash val="solid"/>
+                      </a:lnR>
+                      <a:lnT w="6480">
+                        <a:solidFill>
+                          <a:srgbClr val="CBD5DD"/>
+                        </a:solidFill>
+                        <a:prstDash val="solid"/>
+                      </a:lnT>
+                      <a:lnB w="6480">
+                        <a:solidFill>
+                          <a:srgbClr val="CBD5DD"/>
+                        </a:solidFill>
+                        <a:prstDash val="solid"/>
+                      </a:lnB>
+                      <a:noFill/>
+                    </a:tcPr>
+                  </a:tc>
+                  <a:tc>
+                    <a:txBody>
+                      <a:bodyPr/>
+                      <a:lstStyle/>
+                      <a:p>
+                        <a:pPr algn="ctr" defTabSz="914400">
+                          <a:lnSpc>
+                            <a:spcPct val="100000"/>
+                          </a:lnSpc>
+                          <a:tabLst>
+                            <a:tab pos="0" algn="l"/>
+                          </a:tabLst>
+                        </a:pPr>
+                        <a:r>
+                          <a:rPr lang="en-US" sz="900" b="0" u="none" strike="noStrike">
+                            <a:solidFill>
+                              <a:srgbClr val="2C3E50"/>
+                            </a:solidFill>
+                            <a:effectLst/>
+                            <a:uFillTx/>
+                            <a:latin typeface="Calibri"/>
+                            <a:ea typeface="Calibri"/>
+                          </a:rPr>
+                          <a:t>100</a:t>
+                        </a:r>
+                        <a:endParaRPr lang="en-US" sz="900" b="0" u="none" strike="noStrike">
+                          <a:solidFill>
+                            <a:srgbClr val="000000"/>
+                          </a:solidFill>
+                          <a:effectLst/>
+                          <a:uFillTx/>
+                          <a:latin typeface="Arial"/>
+                        </a:endParaRPr>
+                      </a:p>
+                    </a:txBody>
+                    <a:tcPr anchor="ctr">
+                      <a:lnL w="6480">
+                        <a:solidFill>
+                          <a:srgbClr val="CBD5DD"/>
+                        </a:solidFill>
+                        <a:prstDash val="solid"/>
+                      </a:lnL>
+                      <a:lnR w="6480">
+                        <a:solidFill>
+                          <a:srgbClr val="CBD5DD"/>
+                        </a:solidFill>
+                        <a:prstDash val="solid"/>
+                      </a:lnR>
+                      <a:lnT w="6480">
+                        <a:solidFill>
+                          <a:srgbClr val="CBD5DD"/>
+                        </a:solidFill>
+                        <a:prstDash val="solid"/>
+                      </a:lnT>
+                      <a:lnB w="6480">
+                        <a:solidFill>
+                          <a:srgbClr val="CBD5DD"/>
+                        </a:solidFill>
+                        <a:prstDash val="solid"/>
+                      </a:lnB>
+                      <a:noFill/>
+                    </a:tcPr>
+                  </a:tc>
+                  <a:extLst>
+                    <a:ext uri="{0D108BD9-81ED-4DB2-BD59-A6C34878D82A}">
+                      <a16:rowId xmlns:a16="http://schemas.microsoft.com/office/drawing/2014/main" val="10006"/>
+                    </a:ext>
+                  </a:extLst>
+                </a:tr>
+                <a:tr h="274320">
+                  <a:tc>
+                    <a:txBody>
+                      <a:bodyPr/>
+                      <a:lstStyle/>
+                      <a:p>
+                        <a:pPr defTabSz="914400">
+                          <a:lnSpc>
+                            <a:spcPct val="100000"/>
+                          </a:lnSpc>
+                          <a:tabLst>
+                            <a:tab pos="0" algn="l"/>
+                          </a:tabLst>
+                        </a:pPr>
+                        <a:r>
+                          <a:rPr lang="en-US" sz="900" b="1" u="none" strike="noStrike">
+                            <a:solidFill>
+                              <a:srgbClr val="B23A1E"/>
+                            </a:solidFill>
+                            <a:effectLst/>
+                            <a:uFillTx/>
+                            <a:latin typeface="Calibri"/>
+                            <a:ea typeface="Calibri"/>
+                          </a:rPr>
+                          <a:t>FGF motif (PDS5)</a:t>
+                        </a:r>
+                        <a:endParaRPr lang="en-US" sz="900" b="0" u="none" strike="noStrike">
+                          <a:solidFill>
+                            <a:srgbClr val="000000"/>
+                          </a:solidFill>
+                          <a:effectLst/>
+                          <a:uFillTx/>
+                          <a:latin typeface="Arial"/>
+                        </a:endParaRPr>
+                      </a:p>
+                    </a:txBody>
+                    <a:tcPr anchor="ctr">
+                      <a:lnL w="6480">
+                        <a:solidFill>
+                          <a:srgbClr val="CBD5DD"/>
+                        </a:solidFill>
+                        <a:prstDash val="solid"/>
+                      </a:lnL>
+                      <a:lnR w="6480">
+                        <a:solidFill>
+                          <a:srgbClr val="CBD5DD"/>
+                        </a:solidFill>
+                        <a:prstDash val="solid"/>
+                      </a:lnR>
+                      <a:lnT w="6480">
+                        <a:solidFill>
+                          <a:srgbClr val="CBD5DD"/>
+                        </a:solidFill>
+                        <a:prstDash val="solid"/>
+                      </a:lnT>
+                      <a:lnB w="6480">
+                        <a:solidFill>
+                          <a:srgbClr val="CBD5DD"/>
+                        </a:solidFill>
+                        <a:prstDash val="solid"/>
+                      </a:lnB>
+                      <a:solidFill>
+                        <a:srgbClr val="FBE4DC"/>
+                      </a:solidFill>
+                    </a:tcPr>
+                  </a:tc>
+                  <a:tc>
+                    <a:txBody>
+                      <a:bodyPr/>
+                      <a:lstStyle/>
+                      <a:p>
+                        <a:pPr algn="ctr" defTabSz="914400">
+                          <a:lnSpc>
+                            <a:spcPct val="100000"/>
+                          </a:lnSpc>
+                          <a:tabLst>
+                            <a:tab pos="0" algn="l"/>
+                          </a:tabLst>
+                        </a:pPr>
+                        <a:r>
+                          <a:rPr lang="en-US" sz="900" b="1" u="none" strike="noStrike">
+                            <a:solidFill>
+                              <a:srgbClr val="B23A1E"/>
+                            </a:solidFill>
+                            <a:effectLst/>
+                            <a:uFillTx/>
+                            <a:latin typeface="Calibri"/>
+                            <a:ea typeface="Calibri"/>
+                          </a:rPr>
+                          <a:t>166-168</a:t>
+                        </a:r>
+                        <a:endParaRPr lang="en-US" sz="900" b="0" u="none" strike="noStrike">
+                          <a:solidFill>
+                            <a:srgbClr val="000000"/>
+                          </a:solidFill>
+                          <a:effectLst/>
+                          <a:uFillTx/>
+                          <a:latin typeface="Arial"/>
+                        </a:endParaRPr>
+                      </a:p>
+                    </a:txBody>
+                    <a:tcPr anchor="ctr">
+                      <a:lnL w="6480">
+                        <a:solidFill>
+                          <a:srgbClr val="CBD5DD"/>
+                        </a:solidFill>
+                        <a:prstDash val="solid"/>
+                      </a:lnL>
+                      <a:lnR w="6480">
+                        <a:solidFill>
+                          <a:srgbClr val="CBD5DD"/>
+                        </a:solidFill>
+                        <a:prstDash val="solid"/>
+                      </a:lnR>
+                      <a:lnT w="6480">
+                        <a:solidFill>
+                          <a:srgbClr val="CBD5DD"/>
+                        </a:solidFill>
+                        <a:prstDash val="solid"/>
+                      </a:lnT>
+                      <a:lnB w="6480">
+                        <a:solidFill>
+                          <a:srgbClr val="CBD5DD"/>
+                        </a:solidFill>
+                        <a:prstDash val="solid"/>
+                      </a:lnB>
+                      <a:solidFill>
+                        <a:srgbClr val="FBE4DC"/>
+                      </a:solidFill>
+                    </a:tcPr>
+                  </a:tc>
+                  <a:tc>
+                    <a:txBody>
+                      <a:bodyPr/>
+                      <a:lstStyle/>
+                      <a:p>
+                        <a:pPr algn="ctr" defTabSz="914400">
+                          <a:lnSpc>
+                            <a:spcPct val="100000"/>
+                          </a:lnSpc>
+                          <a:tabLst>
+                            <a:tab pos="0" algn="l"/>
+                          </a:tabLst>
+                        </a:pPr>
+                        <a:r>
+                          <a:rPr lang="en-US" sz="900" b="0" u="none" strike="noStrike">
+                            <a:solidFill>
+                              <a:srgbClr val="B23A1E"/>
+                            </a:solidFill>
+                            <a:effectLst/>
+                            <a:uFillTx/>
+                            <a:latin typeface="Calibri"/>
+                            <a:ea typeface="Calibri"/>
+                          </a:rPr>
+                          <a:t>0</a:t>
+                        </a:r>
+                        <a:endParaRPr lang="en-US" sz="900" b="0" u="none" strike="noStrike">
+                          <a:solidFill>
+                            <a:srgbClr val="000000"/>
+                          </a:solidFill>
+                          <a:effectLst/>
+                          <a:uFillTx/>
+                          <a:latin typeface="Arial"/>
+                        </a:endParaRPr>
+                      </a:p>
+                    </a:txBody>
+                    <a:tcPr anchor="ctr">
+                      <a:lnL w="6480">
+                        <a:solidFill>
+                          <a:srgbClr val="CBD5DD"/>
+                        </a:solidFill>
+                        <a:prstDash val="solid"/>
+                      </a:lnL>
+                      <a:lnR w="6480">
+                        <a:solidFill>
+                          <a:srgbClr val="CBD5DD"/>
+                        </a:solidFill>
+                        <a:prstDash val="solid"/>
+                      </a:lnR>
+                      <a:lnT w="6480">
+                        <a:solidFill>
+                          <a:srgbClr val="CBD5DD"/>
+                        </a:solidFill>
+                        <a:prstDash val="solid"/>
+                      </a:lnT>
+                      <a:lnB w="6480">
+                        <a:solidFill>
+                          <a:srgbClr val="CBD5DD"/>
+                        </a:solidFill>
+                        <a:prstDash val="solid"/>
+                      </a:lnB>
+                      <a:solidFill>
+                        <a:srgbClr val="FBE4DC"/>
+                      </a:solidFill>
+                    </a:tcPr>
+                  </a:tc>
+                  <a:tc>
+                    <a:txBody>
+                      <a:bodyPr/>
+                      <a:lstStyle/>
+                      <a:p>
+                        <a:pPr algn="ctr" defTabSz="914400">
+                          <a:lnSpc>
+                            <a:spcPct val="100000"/>
+                          </a:lnSpc>
+                          <a:tabLst>
+                            <a:tab pos="0" algn="l"/>
+                          </a:tabLst>
+                        </a:pPr>
+                        <a:r>
+                          <a:rPr lang="en-US" sz="900" b="0" u="none" strike="noStrike">
+                            <a:solidFill>
+                              <a:srgbClr val="B23A1E"/>
+                            </a:solidFill>
+                            <a:effectLst/>
+                            <a:uFillTx/>
+                            <a:latin typeface="Calibri"/>
+                            <a:ea typeface="Calibri"/>
+                          </a:rPr>
+                          <a:t>0</a:t>
+                        </a:r>
+                        <a:endParaRPr lang="en-US" sz="900" b="0" u="none" strike="noStrike">
+                          <a:solidFill>
+                            <a:srgbClr val="000000"/>
+                          </a:solidFill>
+                          <a:effectLst/>
+                          <a:uFillTx/>
+                          <a:latin typeface="Arial"/>
+                        </a:endParaRPr>
+                      </a:p>
+                    </a:txBody>
+                    <a:tcPr anchor="ctr">
+                      <a:lnL w="6480">
+                        <a:solidFill>
+                          <a:srgbClr val="CBD5DD"/>
+                        </a:solidFill>
+                        <a:prstDash val="solid"/>
+                      </a:lnL>
+                      <a:lnR w="6480">
+                        <a:solidFill>
+                          <a:srgbClr val="CBD5DD"/>
+                        </a:solidFill>
+                        <a:prstDash val="solid"/>
+                      </a:lnR>
+                      <a:lnT w="6480">
+                        <a:solidFill>
+                          <a:srgbClr val="CBD5DD"/>
+                        </a:solidFill>
+                        <a:prstDash val="solid"/>
+                      </a:lnT>
+                      <a:lnB w="6480">
+                        <a:solidFill>
+                          <a:srgbClr val="CBD5DD"/>
+                        </a:solidFill>
+                        <a:prstDash val="solid"/>
+                      </a:lnB>
+                      <a:solidFill>
+                        <a:srgbClr val="FBE4DC"/>
+                      </a:solidFill>
+                    </a:tcPr>
+                  </a:tc>
+                  <a:tc>
+                    <a:txBody>
+                      <a:bodyPr/>
+                      <a:lstStyle/>
+                      <a:p>
+                        <a:pPr algn="ctr" defTabSz="914400">
+                          <a:lnSpc>
+                            <a:spcPct val="100000"/>
+                          </a:lnSpc>
+                          <a:tabLst>
+                            <a:tab pos="0" algn="l"/>
+                          </a:tabLst>
+                        </a:pPr>
+                        <a:r>
+                          <a:rPr lang="en-US" sz="900" b="1" u="none" strike="noStrike">
+                            <a:solidFill>
+                              <a:srgbClr val="B23A1E"/>
+                            </a:solidFill>
+                            <a:effectLst/>
+                            <a:uFillTx/>
+                            <a:latin typeface="Calibri"/>
+                            <a:ea typeface="Calibri"/>
+                          </a:rPr>
+                          <a:t>100</a:t>
+                        </a:r>
+                        <a:endParaRPr lang="en-US" sz="900" b="0" u="none" strike="noStrike">
+                          <a:solidFill>
+                            <a:srgbClr val="000000"/>
+                          </a:solidFill>
+                          <a:effectLst/>
+                          <a:uFillTx/>
+                          <a:latin typeface="Arial"/>
+                        </a:endParaRPr>
+                      </a:p>
+                    </a:txBody>
+                    <a:tcPr anchor="ctr">
+                      <a:lnL w="6480">
+                        <a:solidFill>
+                          <a:srgbClr val="CBD5DD"/>
+                        </a:solidFill>
+                        <a:prstDash val="solid"/>
+                      </a:lnL>
+                      <a:lnR w="6480">
+                        <a:solidFill>
+                          <a:srgbClr val="CBD5DD"/>
+                        </a:solidFill>
+                        <a:prstDash val="solid"/>
+                      </a:lnR>
+                      <a:lnT w="6480">
+                        <a:solidFill>
+                          <a:srgbClr val="CBD5DD"/>
+                        </a:solidFill>
+                        <a:prstDash val="solid"/>
+                      </a:lnT>
+                      <a:lnB w="6480">
+                        <a:solidFill>
+                          <a:srgbClr val="CBD5DD"/>
+                        </a:solidFill>
+                        <a:prstDash val="solid"/>
+                      </a:lnB>
+                      <a:solidFill>
+                        <a:srgbClr val="FBE4DC"/>
+                      </a:solidFill>
+                    </a:tcPr>
+                  </a:tc>
+                  <a:tc>
+                    <a:txBody>
+                      <a:bodyPr/>
+                      <a:lstStyle/>
+                      <a:p>
+                        <a:pPr algn="ctr" defTabSz="914400">
+                          <a:lnSpc>
+                            <a:spcPct val="100000"/>
+                          </a:lnSpc>
+                          <a:tabLst>
+                            <a:tab pos="0" algn="l"/>
+                          </a:tabLst>
+                        </a:pPr>
+                        <a:r>
+                          <a:rPr lang="en-US" sz="900" b="1" u="none" strike="noStrike">
+                            <a:solidFill>
+                              <a:srgbClr val="B23A1E"/>
+                            </a:solidFill>
+                            <a:effectLst/>
+                            <a:uFillTx/>
+                            <a:latin typeface="Calibri"/>
+                            <a:ea typeface="Calibri"/>
+                          </a:rPr>
+                          <a:t>0</a:t>
+                        </a:r>
+                        <a:endParaRPr lang="en-US" sz="900" b="0" u="none" strike="noStrike">
+                          <a:solidFill>
+                            <a:srgbClr val="000000"/>
+                          </a:solidFill>
+                          <a:effectLst/>
+                          <a:uFillTx/>
+                          <a:latin typeface="Arial"/>
+                        </a:endParaRPr>
+                      </a:p>
+                    </a:txBody>
+                    <a:tcPr anchor="ctr">
+                      <a:lnL w="6480">
+                        <a:solidFill>
+                          <a:srgbClr val="CBD5DD"/>
+                        </a:solidFill>
+                        <a:prstDash val="solid"/>
+                      </a:lnL>
+                      <a:lnR w="6480">
+                        <a:solidFill>
+                          <a:srgbClr val="CBD5DD"/>
+                        </a:solidFill>
+                        <a:prstDash val="solid"/>
+                      </a:lnR>
+                      <a:lnT w="6480">
+                        <a:solidFill>
+                          <a:srgbClr val="CBD5DD"/>
+                        </a:solidFill>
+                        <a:prstDash val="solid"/>
+                      </a:lnT>
+                      <a:lnB w="6480">
+                        <a:solidFill>
+                          <a:srgbClr val="CBD5DD"/>
+                        </a:solidFill>
+                        <a:prstDash val="solid"/>
+                      </a:lnB>
+                      <a:solidFill>
+                        <a:srgbClr val="FBE4DC"/>
+                      </a:solidFill>
+                    </a:tcPr>
+                  </a:tc>
+                  <a:extLst>
+                    <a:ext uri="{0D108BD9-81ED-4DB2-BD59-A6C34878D82A}">
+                      <a16:rowId xmlns:a16="http://schemas.microsoft.com/office/drawing/2014/main" val="10007"/>
+                    </a:ext>
+                  </a:extLst>
+                </a:tr>
+                <a:tr h="274320">
+                  <a:tc>
+                    <a:txBody>
+                      <a:bodyPr/>
+                      <a:lstStyle/>
+                      <a:p>
+                        <a:pPr defTabSz="914400">
+                          <a:lnSpc>
+                            <a:spcPct val="100000"/>
+                          </a:lnSpc>
+                          <a:tabLst>
+                            <a:tab pos="0" algn="l"/>
+                          </a:tabLst>
+                        </a:pPr>
+                        <a:r>
+                          <a:rPr lang="en-US" sz="900" b="0" u="none" strike="noStrike">
+                            <a:solidFill>
+                              <a:srgbClr val="2C3E50"/>
+                            </a:solidFill>
+                            <a:effectLst/>
+                            <a:uFillTx/>
+                            <a:latin typeface="Calibri"/>
+                            <a:ea typeface="Calibri"/>
+                          </a:rPr>
+                          <a:t>PLK1 motif</a:t>
+                        </a:r>
+                        <a:endParaRPr lang="en-US" sz="900" b="0" u="none" strike="noStrike">
+                          <a:solidFill>
+                            <a:srgbClr val="000000"/>
+                          </a:solidFill>
+                          <a:effectLst/>
+                          <a:uFillTx/>
+                          <a:latin typeface="Arial"/>
+                        </a:endParaRPr>
+                      </a:p>
+                    </a:txBody>
+                    <a:tcPr anchor="ctr">
+                      <a:lnL w="6480">
+                        <a:solidFill>
+                          <a:srgbClr val="CBD5DD"/>
+                        </a:solidFill>
+                        <a:prstDash val="solid"/>
+                      </a:lnL>
+                      <a:lnR w="6480">
+                        <a:solidFill>
+                          <a:srgbClr val="CBD5DD"/>
+                        </a:solidFill>
+                        <a:prstDash val="solid"/>
+                      </a:lnR>
+                      <a:lnT w="6480">
+                        <a:solidFill>
+                          <a:srgbClr val="CBD5DD"/>
+                        </a:solidFill>
+                        <a:prstDash val="solid"/>
+                      </a:lnT>
+                      <a:lnB w="6480">
+                        <a:solidFill>
+                          <a:srgbClr val="CBD5DD"/>
+                        </a:solidFill>
+                        <a:prstDash val="solid"/>
+                      </a:lnB>
+                      <a:noFill/>
+                    </a:tcPr>
+                  </a:tc>
+                  <a:tc>
+                    <a:txBody>
+                      <a:bodyPr/>
+                      <a:lstStyle/>
+                      <a:p>
+                        <a:pPr algn="ctr" defTabSz="914400">
+                          <a:lnSpc>
+                            <a:spcPct val="100000"/>
+                          </a:lnSpc>
+                          <a:tabLst>
+                            <a:tab pos="0" algn="l"/>
+                          </a:tabLst>
+                        </a:pPr>
+                        <a:r>
+                          <a:rPr lang="en-US" sz="900" b="0" u="none" strike="noStrike">
+                            <a:solidFill>
+                              <a:srgbClr val="2C3E50"/>
+                            </a:solidFill>
+                            <a:effectLst/>
+                            <a:uFillTx/>
+                            <a:latin typeface="Calibri"/>
+                            <a:ea typeface="Calibri"/>
+                          </a:rPr>
+                          <a:t>201-207</a:t>
+                        </a:r>
+                        <a:endParaRPr lang="en-US" sz="900" b="0" u="none" strike="noStrike">
+                          <a:solidFill>
+                            <a:srgbClr val="000000"/>
+                          </a:solidFill>
+                          <a:effectLst/>
+                          <a:uFillTx/>
+                          <a:latin typeface="Arial"/>
+                        </a:endParaRPr>
+                      </a:p>
+                    </a:txBody>
+                    <a:tcPr anchor="ctr">
+                      <a:lnL w="6480">
+                        <a:solidFill>
+                          <a:srgbClr val="CBD5DD"/>
+                        </a:solidFill>
+                        <a:prstDash val="solid"/>
+                      </a:lnL>
+                      <a:lnR w="6480">
+                        <a:solidFill>
+                          <a:srgbClr val="CBD5DD"/>
+                        </a:solidFill>
+                        <a:prstDash val="solid"/>
+                      </a:lnR>
+                      <a:lnT w="6480">
+                        <a:solidFill>
+                          <a:srgbClr val="CBD5DD"/>
+                        </a:solidFill>
+                        <a:prstDash val="solid"/>
+                      </a:lnT>
+                      <a:lnB w="6480">
+                        <a:solidFill>
+                          <a:srgbClr val="CBD5DD"/>
+                        </a:solidFill>
+                        <a:prstDash val="solid"/>
+                      </a:lnB>
+                      <a:noFill/>
+                    </a:tcPr>
+                  </a:tc>
+                  <a:tc>
+                    <a:txBody>
+                      <a:bodyPr/>
+                      <a:lstStyle/>
+                      <a:p>
+                        <a:pPr algn="ctr" defTabSz="914400">
+                          <a:lnSpc>
+                            <a:spcPct val="100000"/>
+                          </a:lnSpc>
+                          <a:tabLst>
+                            <a:tab pos="0" algn="l"/>
+                          </a:tabLst>
+                        </a:pPr>
+                        <a:r>
+                          <a:rPr lang="en-US" sz="900" b="0" u="none" strike="noStrike">
+                            <a:solidFill>
+                              <a:srgbClr val="2C3E50"/>
+                            </a:solidFill>
+                            <a:effectLst/>
+                            <a:uFillTx/>
+                            <a:latin typeface="Calibri"/>
+                            <a:ea typeface="Calibri"/>
+                          </a:rPr>
+                          <a:t>0</a:t>
+                        </a:r>
+                        <a:endParaRPr lang="en-US" sz="900" b="0" u="none" strike="noStrike">
+                          <a:solidFill>
+                            <a:srgbClr val="000000"/>
+                          </a:solidFill>
+                          <a:effectLst/>
+                          <a:uFillTx/>
+                          <a:latin typeface="Arial"/>
+                        </a:endParaRPr>
+                      </a:p>
+                    </a:txBody>
+                    <a:tcPr anchor="ctr">
+                      <a:lnL w="6480">
+                        <a:solidFill>
+                          <a:srgbClr val="CBD5DD"/>
+                        </a:solidFill>
+                        <a:prstDash val="solid"/>
+                      </a:lnL>
+                      <a:lnR w="6480">
+                        <a:solidFill>
+                          <a:srgbClr val="CBD5DD"/>
+                        </a:solidFill>
+                        <a:prstDash val="solid"/>
+                      </a:lnR>
+                      <a:lnT w="6480">
+                        <a:solidFill>
+                          <a:srgbClr val="CBD5DD"/>
+                        </a:solidFill>
+                        <a:prstDash val="solid"/>
+                      </a:lnT>
+                      <a:lnB w="6480">
+                        <a:solidFill>
+                          <a:srgbClr val="CBD5DD"/>
+                        </a:solidFill>
+                        <a:prstDash val="solid"/>
+                      </a:lnB>
+                      <a:noFill/>
+                    </a:tcPr>
+                  </a:tc>
+                  <a:tc>
+                    <a:txBody>
+                      <a:bodyPr/>
+                      <a:lstStyle/>
+                      <a:p>
+                        <a:pPr algn="ctr" defTabSz="914400">
+                          <a:lnSpc>
+                            <a:spcPct val="100000"/>
+                          </a:lnSpc>
+                          <a:tabLst>
+                            <a:tab pos="0" algn="l"/>
+                          </a:tabLst>
+                        </a:pPr>
+                        <a:r>
+                          <a:rPr lang="en-US" sz="900" b="0" u="none" strike="noStrike">
+                            <a:solidFill>
+                              <a:srgbClr val="2C3E50"/>
+                            </a:solidFill>
+                            <a:effectLst/>
+                            <a:uFillTx/>
+                            <a:latin typeface="Calibri"/>
+                            <a:ea typeface="Calibri"/>
+                          </a:rPr>
+                          <a:t>0</a:t>
+                        </a:r>
+                        <a:endParaRPr lang="en-US" sz="900" b="0" u="none" strike="noStrike">
+                          <a:solidFill>
+                            <a:srgbClr val="000000"/>
+                          </a:solidFill>
+                          <a:effectLst/>
+                          <a:uFillTx/>
+                          <a:latin typeface="Arial"/>
+                        </a:endParaRPr>
+                      </a:p>
+                    </a:txBody>
+                    <a:tcPr anchor="ctr">
+                      <a:lnL w="6480">
+                        <a:solidFill>
+                          <a:srgbClr val="CBD5DD"/>
+                        </a:solidFill>
+                        <a:prstDash val="solid"/>
+                      </a:lnL>
+                      <a:lnR w="6480">
+                        <a:solidFill>
+                          <a:srgbClr val="CBD5DD"/>
+                        </a:solidFill>
+                        <a:prstDash val="solid"/>
+                      </a:lnR>
+                      <a:lnT w="6480">
+                        <a:solidFill>
+                          <a:srgbClr val="CBD5DD"/>
+                        </a:solidFill>
+                        <a:prstDash val="solid"/>
+                      </a:lnT>
+                      <a:lnB w="6480">
+                        <a:solidFill>
+                          <a:srgbClr val="CBD5DD"/>
+                        </a:solidFill>
+                        <a:prstDash val="solid"/>
+                      </a:lnB>
+                      <a:noFill/>
+                    </a:tcPr>
+                  </a:tc>
+                  <a:tc>
+                    <a:txBody>
+                      <a:bodyPr/>
+                      <a:lstStyle/>
+                      <a:p>
+                        <a:pPr algn="ctr" defTabSz="914400">
+                          <a:lnSpc>
+                            <a:spcPct val="100000"/>
+                          </a:lnSpc>
+                          <a:tabLst>
+                            <a:tab pos="0" algn="l"/>
+                          </a:tabLst>
+                        </a:pPr>
+                        <a:r>
+                          <a:rPr lang="en-US" sz="900" b="0" u="none" strike="noStrike">
+                            <a:solidFill>
+                              <a:srgbClr val="2C3E50"/>
+                            </a:solidFill>
+                            <a:effectLst/>
+                            <a:uFillTx/>
+                            <a:latin typeface="Calibri"/>
+                            <a:ea typeface="Calibri"/>
+                          </a:rPr>
+                          <a:t>100</a:t>
+                        </a:r>
+                        <a:endParaRPr lang="en-US" sz="900" b="0" u="none" strike="noStrike">
+                          <a:solidFill>
+                            <a:srgbClr val="000000"/>
+                          </a:solidFill>
+                          <a:effectLst/>
+                          <a:uFillTx/>
+                          <a:latin typeface="Arial"/>
+                        </a:endParaRPr>
+                      </a:p>
+                    </a:txBody>
+                    <a:tcPr anchor="ctr">
+                      <a:lnL w="6480">
+                        <a:solidFill>
+                          <a:srgbClr val="CBD5DD"/>
+                        </a:solidFill>
+                        <a:prstDash val="solid"/>
+                      </a:lnL>
+                      <a:lnR w="6480">
+                        <a:solidFill>
+                          <a:srgbClr val="CBD5DD"/>
+                        </a:solidFill>
+                        <a:prstDash val="solid"/>
+                      </a:lnR>
+                      <a:lnT w="6480">
+                        <a:solidFill>
+                          <a:srgbClr val="CBD5DD"/>
+                        </a:solidFill>
+                        <a:prstDash val="solid"/>
+                      </a:lnT>
+                      <a:lnB w="6480">
+                        <a:solidFill>
+                          <a:srgbClr val="CBD5DD"/>
+                        </a:solidFill>
+                        <a:prstDash val="solid"/>
+                      </a:lnB>
+                      <a:noFill/>
+                    </a:tcPr>
+                  </a:tc>
+                  <a:tc>
+                    <a:txBody>
+                      <a:bodyPr/>
+                      <a:lstStyle/>
+                      <a:p>
+                        <a:pPr algn="ctr" defTabSz="914400">
+                          <a:lnSpc>
+                            <a:spcPct val="100000"/>
+                          </a:lnSpc>
+                          <a:tabLst>
+                            <a:tab pos="0" algn="l"/>
+                          </a:tabLst>
+                        </a:pPr>
+                        <a:r>
+                          <a:rPr lang="en-US" sz="900" b="0" u="none" strike="noStrike">
+                            <a:solidFill>
+                              <a:srgbClr val="2C3E50"/>
+                            </a:solidFill>
+                            <a:effectLst/>
+                            <a:uFillTx/>
+                            <a:latin typeface="Calibri"/>
+                            <a:ea typeface="Calibri"/>
+                          </a:rPr>
+                          <a:t>0</a:t>
+                        </a:r>
+                        <a:endParaRPr lang="en-US" sz="900" b="0" u="none" strike="noStrike">
+                          <a:solidFill>
+                            <a:srgbClr val="000000"/>
+                          </a:solidFill>
+                          <a:effectLst/>
+                          <a:uFillTx/>
+                          <a:latin typeface="Arial"/>
+                        </a:endParaRPr>
+                      </a:p>
+                    </a:txBody>
+                    <a:tcPr anchor="ctr">
+                      <a:lnL w="6480">
+                        <a:solidFill>
+                          <a:srgbClr val="CBD5DD"/>
+                        </a:solidFill>
+                        <a:prstDash val="solid"/>
+                      </a:lnL>
+                      <a:lnR w="6480">
+                        <a:solidFill>
+                          <a:srgbClr val="CBD5DD"/>
+                        </a:solidFill>
+                        <a:prstDash val="solid"/>
+                      </a:lnR>
+                      <a:lnT w="6480">
+                        <a:solidFill>
+                          <a:srgbClr val="CBD5DD"/>
+                        </a:solidFill>
+                        <a:prstDash val="solid"/>
+                      </a:lnT>
+                      <a:lnB w="6480">
+                        <a:solidFill>
+                          <a:srgbClr val="CBD5DD"/>
+                        </a:solidFill>
+                        <a:prstDash val="solid"/>
+                      </a:lnB>
+                      <a:noFill/>
+                    </a:tcPr>
+                  </a:tc>
+                  <a:extLst>
+                    <a:ext uri="{0D108BD9-81ED-4DB2-BD59-A6C34878D82A}">
+                      <a16:rowId xmlns:a16="http://schemas.microsoft.com/office/drawing/2014/main" val="10008"/>
+                    </a:ext>
+                  </a:extLst>
+                </a:tr>
+                <a:tr h="274320">
+                  <a:tc>
+                    <a:txBody>
+                      <a:bodyPr/>
+                      <a:lstStyle/>
+                      <a:p>
+                        <a:pPr defTabSz="914400">
+                          <a:lnSpc>
+                            <a:spcPct val="100000"/>
+                          </a:lnSpc>
+                          <a:tabLst>
+                            <a:tab pos="0" algn="l"/>
+                          </a:tabLst>
+                        </a:pPr>
+                        <a:r>
+                          <a:rPr lang="en-US" sz="900" b="1" u="none" strike="noStrike" dirty="0">
+                            <a:solidFill>
+                              <a:srgbClr val="2166AC"/>
+                            </a:solidFill>
+                            <a:effectLst/>
+                            <a:uFillTx/>
+                            <a:latin typeface="Calibri"/>
+                            <a:ea typeface="Calibri"/>
+                          </a:rPr>
+                          <a:t>Sororin domain</a:t>
+                        </a:r>
+                        <a:endParaRPr lang="en-US" sz="900" b="0" u="none" strike="noStrike" dirty="0">
+                          <a:solidFill>
+                            <a:srgbClr val="000000"/>
+                          </a:solidFill>
+                          <a:effectLst/>
+                          <a:uFillTx/>
+                          <a:latin typeface="Arial"/>
+                        </a:endParaRPr>
+                      </a:p>
+                    </a:txBody>
+                    <a:tcPr anchor="ctr">
+                      <a:lnL w="6480">
+                        <a:solidFill>
+                          <a:srgbClr val="CBD5DD"/>
+                        </a:solidFill>
+                        <a:prstDash val="solid"/>
+                      </a:lnL>
+                      <a:lnR w="6480">
+                        <a:solidFill>
+                          <a:srgbClr val="CBD5DD"/>
+                        </a:solidFill>
+                        <a:prstDash val="solid"/>
+                      </a:lnR>
+                      <a:lnT w="6480">
+                        <a:solidFill>
+                          <a:srgbClr val="CBD5DD"/>
+                        </a:solidFill>
+                        <a:prstDash val="solid"/>
+                      </a:lnT>
+                      <a:lnB w="6480">
+                        <a:solidFill>
+                          <a:srgbClr val="CBD5DD"/>
+                        </a:solidFill>
+                        <a:prstDash val="solid"/>
+                      </a:lnB>
+                      <a:solidFill>
+                        <a:srgbClr val="D6E4F5"/>
+                      </a:solidFill>
+                    </a:tcPr>
+                  </a:tc>
+                  <a:tc>
+                    <a:txBody>
+                      <a:bodyPr/>
+                      <a:lstStyle/>
+                      <a:p>
+                        <a:pPr algn="ctr" defTabSz="914400">
+                          <a:lnSpc>
+                            <a:spcPct val="100000"/>
+                          </a:lnSpc>
+                          <a:tabLst>
+                            <a:tab pos="0" algn="l"/>
+                          </a:tabLst>
+                        </a:pPr>
+                        <a:r>
+                          <a:rPr lang="en-US" sz="900" b="1" u="none" strike="noStrike">
+                            <a:solidFill>
+                              <a:srgbClr val="2166AC"/>
+                            </a:solidFill>
+                            <a:effectLst/>
+                            <a:uFillTx/>
+                            <a:latin typeface="Calibri"/>
+                            <a:ea typeface="Calibri"/>
+                          </a:rPr>
+                          <a:t>230-252</a:t>
+                        </a:r>
+                        <a:endParaRPr lang="en-US" sz="900" b="0" u="none" strike="noStrike">
+                          <a:solidFill>
+                            <a:srgbClr val="000000"/>
+                          </a:solidFill>
+                          <a:effectLst/>
+                          <a:uFillTx/>
+                          <a:latin typeface="Arial"/>
+                        </a:endParaRPr>
+                      </a:p>
+                    </a:txBody>
+                    <a:tcPr anchor="ctr">
+                      <a:lnL w="6480">
+                        <a:solidFill>
+                          <a:srgbClr val="CBD5DD"/>
+                        </a:solidFill>
+                        <a:prstDash val="solid"/>
+                      </a:lnL>
+                      <a:lnR w="6480">
+                        <a:solidFill>
+                          <a:srgbClr val="CBD5DD"/>
+                        </a:solidFill>
+                        <a:prstDash val="solid"/>
+                      </a:lnR>
+                      <a:lnT w="6480">
+                        <a:solidFill>
+                          <a:srgbClr val="CBD5DD"/>
+                        </a:solidFill>
+                        <a:prstDash val="solid"/>
+                      </a:lnT>
+                      <a:lnB w="6480">
+                        <a:solidFill>
+                          <a:srgbClr val="CBD5DD"/>
+                        </a:solidFill>
+                        <a:prstDash val="solid"/>
+                      </a:lnB>
+                      <a:solidFill>
+                        <a:srgbClr val="D6E4F5"/>
+                      </a:solidFill>
+                    </a:tcPr>
+                  </a:tc>
+                  <a:tc>
+                    <a:txBody>
+                      <a:bodyPr/>
+                      <a:lstStyle/>
+                      <a:p>
+                        <a:pPr algn="ctr" defTabSz="914400">
+                          <a:lnSpc>
+                            <a:spcPct val="100000"/>
+                          </a:lnSpc>
+                          <a:tabLst>
+                            <a:tab pos="0" algn="l"/>
+                          </a:tabLst>
+                        </a:pPr>
+                        <a:r>
+                          <a:rPr lang="en-US" sz="900" b="1" u="none" strike="noStrike">
+                            <a:solidFill>
+                              <a:srgbClr val="2166AC"/>
+                            </a:solidFill>
+                            <a:effectLst/>
+                            <a:uFillTx/>
+                            <a:latin typeface="Calibri"/>
+                            <a:ea typeface="Calibri"/>
+                          </a:rPr>
+                          <a:t>70</a:t>
+                        </a:r>
+                        <a:endParaRPr lang="en-US" sz="900" b="0" u="none" strike="noStrike">
+                          <a:solidFill>
+                            <a:srgbClr val="000000"/>
+                          </a:solidFill>
+                          <a:effectLst/>
+                          <a:uFillTx/>
+                          <a:latin typeface="Arial"/>
+                        </a:endParaRPr>
+                      </a:p>
+                    </a:txBody>
+                    <a:tcPr anchor="ctr">
+                      <a:lnL w="6480">
+                        <a:solidFill>
+                          <a:srgbClr val="CBD5DD"/>
+                        </a:solidFill>
+                        <a:prstDash val="solid"/>
+                      </a:lnL>
+                      <a:lnR w="6480">
+                        <a:solidFill>
+                          <a:srgbClr val="CBD5DD"/>
+                        </a:solidFill>
+                        <a:prstDash val="solid"/>
+                      </a:lnR>
+                      <a:lnT w="6480">
+                        <a:solidFill>
+                          <a:srgbClr val="CBD5DD"/>
+                        </a:solidFill>
+                        <a:prstDash val="solid"/>
+                      </a:lnT>
+                      <a:lnB w="6480">
+                        <a:solidFill>
+                          <a:srgbClr val="CBD5DD"/>
+                        </a:solidFill>
+                        <a:prstDash val="solid"/>
+                      </a:lnB>
+                      <a:solidFill>
+                        <a:srgbClr val="D6E4F5"/>
+                      </a:solidFill>
+                    </a:tcPr>
+                  </a:tc>
+                  <a:tc>
+                    <a:txBody>
+                      <a:bodyPr/>
+                      <a:lstStyle/>
+                      <a:p>
+                        <a:pPr algn="ctr" defTabSz="914400">
+                          <a:lnSpc>
+                            <a:spcPct val="100000"/>
+                          </a:lnSpc>
+                          <a:tabLst>
+                            <a:tab pos="0" algn="l"/>
+                          </a:tabLst>
+                        </a:pPr>
+                        <a:r>
+                          <a:rPr lang="en-US" sz="900" b="0" u="none" strike="noStrike">
+                            <a:solidFill>
+                              <a:srgbClr val="2166AC"/>
+                            </a:solidFill>
+                            <a:effectLst/>
+                            <a:uFillTx/>
+                            <a:latin typeface="Calibri"/>
+                            <a:ea typeface="Calibri"/>
+                          </a:rPr>
+                          <a:t>13</a:t>
+                        </a:r>
+                        <a:endParaRPr lang="en-US" sz="900" b="0" u="none" strike="noStrike">
+                          <a:solidFill>
+                            <a:srgbClr val="000000"/>
+                          </a:solidFill>
+                          <a:effectLst/>
+                          <a:uFillTx/>
+                          <a:latin typeface="Arial"/>
+                        </a:endParaRPr>
+                      </a:p>
+                    </a:txBody>
+                    <a:tcPr anchor="ctr">
+                      <a:lnL w="6480">
+                        <a:solidFill>
+                          <a:srgbClr val="CBD5DD"/>
+                        </a:solidFill>
+                        <a:prstDash val="solid"/>
+                      </a:lnL>
+                      <a:lnR w="6480">
+                        <a:solidFill>
+                          <a:srgbClr val="CBD5DD"/>
+                        </a:solidFill>
+                        <a:prstDash val="solid"/>
+                      </a:lnR>
+                      <a:lnT w="6480">
+                        <a:solidFill>
+                          <a:srgbClr val="CBD5DD"/>
+                        </a:solidFill>
+                        <a:prstDash val="solid"/>
+                      </a:lnT>
+                      <a:lnB w="6480">
+                        <a:solidFill>
+                          <a:srgbClr val="CBD5DD"/>
+                        </a:solidFill>
+                        <a:prstDash val="solid"/>
+                      </a:lnB>
+                      <a:solidFill>
+                        <a:srgbClr val="D6E4F5"/>
+                      </a:solidFill>
+                    </a:tcPr>
+                  </a:tc>
+                  <a:tc>
+                    <a:txBody>
+                      <a:bodyPr/>
+                      <a:lstStyle/>
+                      <a:p>
+                        <a:pPr algn="ctr" defTabSz="914400">
+                          <a:lnSpc>
+                            <a:spcPct val="100000"/>
+                          </a:lnSpc>
+                          <a:tabLst>
+                            <a:tab pos="0" algn="l"/>
+                          </a:tabLst>
+                        </a:pPr>
+                        <a:r>
+                          <a:rPr lang="en-US" sz="900" b="1" u="none" strike="noStrike">
+                            <a:solidFill>
+                              <a:srgbClr val="2166AC"/>
+                            </a:solidFill>
+                            <a:effectLst/>
+                            <a:uFillTx/>
+                            <a:latin typeface="Calibri"/>
+                            <a:ea typeface="Calibri"/>
+                          </a:rPr>
+                          <a:t>17</a:t>
+                        </a:r>
+                        <a:endParaRPr lang="en-US" sz="900" b="0" u="none" strike="noStrike">
+                          <a:solidFill>
+                            <a:srgbClr val="000000"/>
+                          </a:solidFill>
+                          <a:effectLst/>
+                          <a:uFillTx/>
+                          <a:latin typeface="Arial"/>
+                        </a:endParaRPr>
+                      </a:p>
+                    </a:txBody>
+                    <a:tcPr anchor="ctr">
+                      <a:lnL w="6480">
+                        <a:solidFill>
+                          <a:srgbClr val="CBD5DD"/>
+                        </a:solidFill>
+                        <a:prstDash val="solid"/>
+                      </a:lnL>
+                      <a:lnR w="6480">
+                        <a:solidFill>
+                          <a:srgbClr val="CBD5DD"/>
+                        </a:solidFill>
+                        <a:prstDash val="solid"/>
+                      </a:lnR>
+                      <a:lnT w="6480">
+                        <a:solidFill>
+                          <a:srgbClr val="CBD5DD"/>
+                        </a:solidFill>
+                        <a:prstDash val="solid"/>
+                      </a:lnT>
+                      <a:lnB w="6480">
+                        <a:solidFill>
+                          <a:srgbClr val="CBD5DD"/>
+                        </a:solidFill>
+                        <a:prstDash val="solid"/>
+                      </a:lnB>
+                      <a:solidFill>
+                        <a:srgbClr val="D6E4F5"/>
+                      </a:solidFill>
+                    </a:tcPr>
+                  </a:tc>
+                  <a:tc>
+                    <a:txBody>
+                      <a:bodyPr/>
+                      <a:lstStyle/>
+                      <a:p>
+                        <a:pPr algn="ctr" defTabSz="914400">
+                          <a:lnSpc>
+                            <a:spcPct val="100000"/>
+                          </a:lnSpc>
+                          <a:tabLst>
+                            <a:tab pos="0" algn="l"/>
+                          </a:tabLst>
+                        </a:pPr>
+                        <a:r>
+                          <a:rPr lang="en-US" sz="900" b="1" u="none" strike="noStrike" dirty="0">
+                            <a:solidFill>
+                              <a:srgbClr val="2166AC"/>
+                            </a:solidFill>
+                            <a:effectLst/>
+                            <a:uFillTx/>
+                            <a:latin typeface="Calibri"/>
+                            <a:ea typeface="Calibri"/>
+                          </a:rPr>
+                          <a:t>0</a:t>
+                        </a:r>
+                        <a:endParaRPr lang="en-US" sz="900" b="0" u="none" strike="noStrike" dirty="0">
+                          <a:solidFill>
+                            <a:srgbClr val="000000"/>
+                          </a:solidFill>
+                          <a:effectLst/>
+                          <a:uFillTx/>
+                          <a:latin typeface="Arial"/>
+                        </a:endParaRPr>
+                      </a:p>
+                    </a:txBody>
+                    <a:tcPr anchor="ctr">
+                      <a:lnL w="6480">
+                        <a:solidFill>
+                          <a:srgbClr val="CBD5DD"/>
+                        </a:solidFill>
+                        <a:prstDash val="solid"/>
+                      </a:lnL>
+                      <a:lnR w="6480">
+                        <a:solidFill>
+                          <a:srgbClr val="CBD5DD"/>
+                        </a:solidFill>
+                        <a:prstDash val="solid"/>
+                      </a:lnR>
+                      <a:lnT w="6480">
+                        <a:solidFill>
+                          <a:srgbClr val="CBD5DD"/>
+                        </a:solidFill>
+                        <a:prstDash val="solid"/>
+                      </a:lnT>
+                      <a:lnB w="6480">
+                        <a:solidFill>
+                          <a:srgbClr val="CBD5DD"/>
+                        </a:solidFill>
+                        <a:prstDash val="solid"/>
+                      </a:lnB>
+                      <a:solidFill>
+                        <a:srgbClr val="D6E4F5"/>
+                      </a:solidFill>
+                    </a:tcPr>
+                  </a:tc>
+                  <a:extLst>
+                    <a:ext uri="{0D108BD9-81ED-4DB2-BD59-A6C34878D82A}">
+                      <a16:rowId xmlns:a16="http://schemas.microsoft.com/office/drawing/2014/main" val="10009"/>
+                    </a:ext>
+                  </a:extLst>
+                </a:tr>
+              </a:tbl>
+            </a:graphicData>
+          </a:graphic>
+        </p:graphicFrame>
+      </p:grpSp>
+      <p:grpSp>
+        <p:nvGrpSpPr>
+          <p:cNvPr id="3" name="Group 2">
+            <a:extLst>
+              <a:ext uri="{FF2B5EF4-FFF2-40B4-BE49-F238E27FC236}">
+                <a16:creationId xmlns:a16="http://schemas.microsoft.com/office/drawing/2014/main" id="{0722C7F3-63D2-BB09-5532-8366BB652B30}"/>
+              </a:ext>
+            </a:extLst>
+          </p:cNvPr>
+          <p:cNvGrpSpPr/>
+          <p:nvPr/>
+        </p:nvGrpSpPr>
+        <p:grpSpPr>
+          <a:xfrm>
+            <a:off x="7315200" y="3246120"/>
+            <a:ext cx="4571640" cy="2459700"/>
+            <a:chOff x="7315200" y="3246120"/>
+            <a:chExt cx="4571640" cy="2459700"/>
+          </a:xfrm>
+        </p:grpSpPr>
+        <p:sp>
+          <p:nvSpPr>
+            <p:cNvPr id="16" name="Text 7"/>
+            <p:cNvSpPr/>
+            <p:nvPr/>
+          </p:nvSpPr>
+          <p:spPr>
+            <a:xfrm>
+              <a:off x="7315200" y="3246120"/>
+              <a:ext cx="4571640" cy="237240"/>
+            </a:xfrm>
+            <a:prstGeom prst="rect">
+              <a:avLst/>
+            </a:prstGeom>
+            <a:noFill/>
+            <a:ln w="0">
+              <a:noFill/>
+            </a:ln>
+          </p:spPr>
+          <p:style>
+            <a:lnRef idx="0">
+              <a:scrgbClr r="0" g="0" b="0"/>
+            </a:lnRef>
+            <a:fillRef idx="0">
+              <a:scrgbClr r="0" g="0" b="0"/>
+            </a:fillRef>
+            <a:effectRef idx="0">
+              <a:scrgbClr r="0" g="0" b="0"/>
+            </a:effectRef>
+            <a:fontRef idx="minor"/>
+          </p:style>
+          <p:txBody>
+            <a:bodyPr lIns="90000" tIns="45000" rIns="90000" bIns="45000" anchor="ctr">
+              <a:noAutofit/>
+            </a:bodyPr>
+            <a:lstStyle/>
+            <a:p>
+              <a:pPr algn="ctr" defTabSz="914400">
+                <a:lnSpc>
+                  <a:spcPct val="100000"/>
+                </a:lnSpc>
+                <a:tabLst>
+                  <a:tab pos="0" algn="l"/>
+                </a:tabLst>
+              </a:pPr>
+              <a:r>
+                <a:rPr lang="en-US" sz="1100" b="1" u="none" strike="noStrike">
+                  <a:solidFill>
+                    <a:srgbClr val="2C3E50"/>
+                  </a:solidFill>
+                  <a:effectLst/>
+                  <a:uFillTx/>
+                  <a:latin typeface="Calibri"/>
+                  <a:ea typeface="Calibri"/>
+                </a:rPr>
+                <a:t>What PSIPRED labels — helix / strand / coil</a:t>
+              </a:r>
+              <a:endParaRPr lang="en-US" sz="1100" b="0" u="none" strike="noStrike">
+                <a:solidFill>
+                  <a:srgbClr val="000000"/>
+                </a:solidFill>
+                <a:effectLst/>
+                <a:uFillTx/>
+                <a:latin typeface="Arial"/>
+              </a:endParaRPr>
+            </a:p>
+          </p:txBody>
+        </p:sp>
+        <p:pic>
+          <p:nvPicPr>
+            <p:cNvPr id="17" name="Image 0" descr="/tmp/helix_illus.png"/>
+            <p:cNvPicPr>
+              <a:picLocks noChangeAspect="1"/>
+            </p:cNvPicPr>
+            <p:nvPr/>
+          </p:nvPicPr>
+          <p:blipFill>
+            <a:blip r:embed="rId2"/>
+            <a:stretch/>
+          </p:blipFill>
+          <p:spPr>
+            <a:xfrm>
+              <a:off x="7945026" y="3547440"/>
+              <a:ext cx="3487661" cy="2035560"/>
+            </a:xfrm>
+            <a:prstGeom prst="rect">
+              <a:avLst/>
+            </a:prstGeom>
+            <a:noFill/>
+            <a:ln w="0">
+              <a:noFill/>
+            </a:ln>
+          </p:spPr>
+        </p:pic>
+        <p:sp>
+          <p:nvSpPr>
+            <p:cNvPr id="18" name="Text 8"/>
+            <p:cNvSpPr/>
+            <p:nvPr/>
+          </p:nvSpPr>
+          <p:spPr>
+            <a:xfrm>
+              <a:off x="7945025" y="5583000"/>
+              <a:ext cx="3487661" cy="122820"/>
+            </a:xfrm>
+            <a:prstGeom prst="rect">
+              <a:avLst/>
+            </a:prstGeom>
+            <a:noFill/>
+            <a:ln w="0">
+              <a:noFill/>
+            </a:ln>
+          </p:spPr>
+          <p:style>
+            <a:lnRef idx="0">
+              <a:scrgbClr r="0" g="0" b="0"/>
+            </a:lnRef>
+            <a:fillRef idx="0">
+              <a:scrgbClr r="0" g="0" b="0"/>
+            </a:fillRef>
+            <a:effectRef idx="0">
+              <a:scrgbClr r="0" g="0" b="0"/>
+            </a:effectRef>
+            <a:fontRef idx="minor"/>
+          </p:style>
+          <p:txBody>
+            <a:bodyPr lIns="90000" tIns="45000" rIns="90000" bIns="45000" anchor="ctr">
+              <a:noAutofit/>
+            </a:bodyPr>
+            <a:lstStyle/>
+            <a:p>
+              <a:pPr algn="ctr" defTabSz="914400">
+                <a:lnSpc>
+                  <a:spcPct val="100000"/>
+                </a:lnSpc>
+                <a:tabLst>
+                  <a:tab pos="0" algn="l"/>
+                </a:tabLst>
+              </a:pPr>
+              <a:r>
+                <a:rPr lang="en-US" sz="700" b="0" i="1" u="none" strike="noStrike" dirty="0">
+                  <a:solidFill>
+                    <a:srgbClr val="5A6B7B"/>
+                  </a:solidFill>
+                  <a:effectLst/>
+                  <a:uFillTx/>
+                  <a:latin typeface="Calibri"/>
+                  <a:ea typeface="Calibri"/>
+                </a:rPr>
+                <a:t>Illustration: Molecules 2024, DOI 10.3390/molecules30010128</a:t>
+              </a:r>
+              <a:endParaRPr lang="en-US" sz="700" b="0" u="none" strike="noStrike" dirty="0">
+                <a:solidFill>
+                  <a:srgbClr val="000000"/>
+                </a:solidFill>
+                <a:effectLst/>
+                <a:uFillTx/>
+                <a:latin typeface="Arial"/>
+              </a:endParaRPr>
+            </a:p>
+          </p:txBody>
+        </p:sp>
+      </p:grpSp>
+      <p:sp>
+        <p:nvSpPr>
+          <p:cNvPr id="19" name="Text 9"/>
+          <p:cNvSpPr/>
+          <p:nvPr/>
+        </p:nvSpPr>
+        <p:spPr>
+          <a:xfrm>
+            <a:off x="7577328" y="5803896"/>
+            <a:ext cx="4059936" cy="770784"/>
+          </a:xfrm>
+          <a:prstGeom prst="roundRect">
+            <a:avLst>
+              <a:gd name="adj" fmla="val 5556"/>
+            </a:avLst>
+          </a:prstGeom>
+          <a:solidFill>
+            <a:srgbClr val="FBEFD6"/>
+          </a:solidFill>
+          <a:ln w="19050">
+            <a:solidFill>
+              <a:srgbClr val="D19A2E"/>
+            </a:solidFill>
+            <a:round/>
+          </a:ln>
+        </p:spPr>
+        <p:style>
+          <a:lnRef idx="0">
+            <a:scrgbClr r="0" g="0" b="0"/>
+          </a:lnRef>
+          <a:fillRef idx="0">
+            <a:scrgbClr r="0" g="0" b="0"/>
+          </a:fillRef>
+          <a:effectRef idx="0">
+            <a:scrgbClr r="0" g="0" b="0"/>
+          </a:effectRef>
+          <a:fontRef idx="minor"/>
+        </p:style>
+        <p:txBody>
+          <a:bodyPr lIns="90000" tIns="45000" rIns="90000" bIns="45000" anchor="ctr">
+            <a:noAutofit/>
+          </a:bodyPr>
+          <a:lstStyle/>
+          <a:p>
+            <a:pPr defTabSz="914400">
+              <a:lnSpc>
+                <a:spcPct val="98000"/>
+              </a:lnSpc>
+              <a:tabLst>
+                <a:tab pos="0" algn="l"/>
+              </a:tabLst>
+            </a:pPr>
+            <a:r>
+              <a:rPr lang="en-US" sz="900" b="1" u="none" strike="noStrike" dirty="0">
+                <a:solidFill>
+                  <a:srgbClr val="B8760A"/>
+                </a:solidFill>
+                <a:effectLst/>
+                <a:uFillTx/>
+                <a:latin typeface="Calibri"/>
+                <a:ea typeface="Calibri"/>
+              </a:rPr>
+              <a:t>coil ≠ disordered.  </a:t>
+            </a:r>
+            <a:r>
+              <a:rPr lang="en-US" sz="900" b="0" u="none" strike="noStrike" dirty="0">
+                <a:solidFill>
+                  <a:srgbClr val="2C3E50"/>
+                </a:solidFill>
+                <a:effectLst/>
+                <a:uFillTx/>
+                <a:latin typeface="Calibri"/>
+                <a:ea typeface="Calibri"/>
+              </a:rPr>
+              <a:t>“Coil” only means not helix/strand — a coil can still be ordered. Two different axes (shape vs. disorder) agreeing is what makes the result method-independent. Telling exception: the </a:t>
+            </a:r>
+            <a:r>
+              <a:rPr lang="en-US" sz="900" b="1" u="none" strike="noStrike" dirty="0">
+                <a:solidFill>
+                  <a:srgbClr val="B23A1E"/>
+                </a:solidFill>
+                <a:effectLst/>
+                <a:uFillTx/>
+                <a:latin typeface="Calibri"/>
+                <a:ea typeface="Calibri"/>
+              </a:rPr>
+              <a:t>FGF motif is 100% coil yet 0% disorder</a:t>
+            </a:r>
+            <a:r>
+              <a:rPr lang="en-US" sz="900" b="0" u="none" strike="noStrike" dirty="0">
+                <a:solidFill>
+                  <a:srgbClr val="2C3E50"/>
+                </a:solidFill>
+                <a:effectLst/>
+                <a:uFillTx/>
+                <a:latin typeface="Calibri"/>
+                <a:ea typeface="Calibri"/>
+              </a:rPr>
+              <a:t> — a local ordered dip (a SLiM).</a:t>
+            </a:r>
+            <a:endParaRPr lang="en-US" sz="900" b="0" u="none" strike="noStrike" dirty="0">
+              <a:solidFill>
+                <a:srgbClr val="000000"/>
+              </a:solidFill>
+              <a:effectLst/>
+              <a:uFillTx/>
+              <a:latin typeface="Arial"/>
+            </a:endParaRPr>
+          </a:p>
+        </p:txBody>
+      </p:sp>
+    </p:spTree>
+  </p:cSld>
+  <p:clrMapOvr>
+    <a:masterClrMapping/>
+  </p:clrMapOvr>
+  <p:timing>
+    <p:tnLst>
+      <p:par>
+        <p:cTn id="1" dur="indefinite" restart="never" nodeType="tmRoot">
+          <p:childTnLst>
+            <p:seq concurrent="1" nextAc="seek">
+              <p:cTn id="2" dur="indefinite" nodeType="mainSeq">
+                <p:childTnLst>
+                  <p:par>
+                    <p:cTn id="3" fill="hold">
+                      <p:stCondLst>
+                        <p:cond delay="indefinite"/>
+                      </p:stCondLst>
+                      <p:childTnLst>
+                        <p:par>
+                          <p:cTn id="4" fill="hold">
+                            <p:stCondLst>
+                              <p:cond delay="0"/>
+                            </p:stCondLst>
+                            <p:childTnLst>
+                              <p:par>
+                                <p:cTn id="5" presetID="16" presetClass="entr" presetSubtype="37" fill="hold" grpId="0" nodeType="clickEffect">
+                                  <p:stCondLst>
+                                    <p:cond delay="0"/>
+                                  </p:stCondLst>
+                                  <p:childTnLst>
+                                    <p:set>
+                                      <p:cBhvr>
+                                        <p:cTn id="6" dur="1" fill="hold">
+                                          <p:stCondLst>
+                                            <p:cond delay="0"/>
+                                          </p:stCondLst>
+                                        </p:cTn>
+                                        <p:tgtEl>
+                                          <p:spTgt spid="9"/>
+                                        </p:tgtEl>
+                                        <p:attrNameLst>
+                                          <p:attrName>style.visibility</p:attrName>
+                                        </p:attrNameLst>
+                                      </p:cBhvr>
+                                      <p:to>
+                                        <p:strVal val="visible"/>
+                                      </p:to>
+                                    </p:set>
+                                    <p:animEffect transition="in" filter="barn(outVertical)">
+                                      <p:cBhvr>
+                                        <p:cTn id="7" dur="500"/>
+                                        <p:tgtEl>
+                                          <p:spTgt spid="9"/>
+                                        </p:tgtEl>
+                                      </p:cBhvr>
+                                    </p:animEffect>
+                                  </p:childTnLst>
+                                </p:cTn>
+                              </p:par>
+                            </p:childTnLst>
+                          </p:cTn>
+                        </p:par>
+                      </p:childTnLst>
+                    </p:cTn>
+                  </p:par>
+                  <p:par>
+                    <p:cTn id="8" fill="hold">
+                      <p:stCondLst>
+                        <p:cond delay="indefinite"/>
+                      </p:stCondLst>
+                      <p:childTnLst>
+                        <p:par>
+                          <p:cTn id="9" fill="hold">
+                            <p:stCondLst>
+                              <p:cond delay="0"/>
+                            </p:stCondLst>
+                            <p:childTnLst>
+                              <p:par>
+                                <p:cTn id="10" presetID="16" presetClass="entr" presetSubtype="37" fill="hold" grpId="0" nodeType="clickEffect">
+                                  <p:stCondLst>
+                                    <p:cond delay="0"/>
+                                  </p:stCondLst>
+                                  <p:childTnLst>
+                                    <p:set>
+                                      <p:cBhvr>
+                                        <p:cTn id="11" dur="1" fill="hold">
+                                          <p:stCondLst>
+                                            <p:cond delay="0"/>
+                                          </p:stCondLst>
+                                        </p:cTn>
+                                        <p:tgtEl>
+                                          <p:spTgt spid="11"/>
+                                        </p:tgtEl>
+                                        <p:attrNameLst>
+                                          <p:attrName>style.visibility</p:attrName>
+                                        </p:attrNameLst>
+                                      </p:cBhvr>
+                                      <p:to>
+                                        <p:strVal val="visible"/>
+                                      </p:to>
+                                    </p:set>
+                                    <p:animEffect transition="in" filter="barn(outVertical)">
+                                      <p:cBhvr>
+                                        <p:cTn id="12" dur="500"/>
+                                        <p:tgtEl>
+                                          <p:spTgt spid="11"/>
+                                        </p:tgtEl>
+                                      </p:cBhvr>
+                                    </p:animEffect>
+                                  </p:childTnLst>
+                                </p:cTn>
+                              </p:par>
+                            </p:childTnLst>
+                          </p:cTn>
+                        </p:par>
+                      </p:childTnLst>
+                    </p:cTn>
+                  </p:par>
+                  <p:par>
+                    <p:cTn id="13" fill="hold">
+                      <p:stCondLst>
+                        <p:cond delay="indefinite"/>
+                      </p:stCondLst>
+                      <p:childTnLst>
+                        <p:par>
+                          <p:cTn id="14" fill="hold">
+                            <p:stCondLst>
+                              <p:cond delay="0"/>
+                            </p:stCondLst>
+                            <p:childTnLst>
+                              <p:par>
+                                <p:cTn id="15" presetID="10" presetClass="entr" presetSubtype="0" fill="hold" grpId="0" nodeType="clickEffect">
+                                  <p:stCondLst>
+                                    <p:cond delay="0"/>
+                                  </p:stCondLst>
+                                  <p:childTnLst>
+                                    <p:set>
+                                      <p:cBhvr>
+                                        <p:cTn id="16" dur="1" fill="hold">
+                                          <p:stCondLst>
+                                            <p:cond delay="0"/>
+                                          </p:stCondLst>
+                                        </p:cTn>
+                                        <p:tgtEl>
+                                          <p:spTgt spid="10"/>
+                                        </p:tgtEl>
+                                        <p:attrNameLst>
+                                          <p:attrName>style.visibility</p:attrName>
+                                        </p:attrNameLst>
+                                      </p:cBhvr>
+                                      <p:to>
+                                        <p:strVal val="visible"/>
+                                      </p:to>
+                                    </p:set>
+                                    <p:animEffect transition="in" filter="fade">
+                                      <p:cBhvr>
+                                        <p:cTn id="17" dur="500"/>
+                                        <p:tgtEl>
+                                          <p:spTgt spid="10"/>
+                                        </p:tgtEl>
+                                      </p:cBhvr>
+                                    </p:animEffect>
+                                  </p:childTnLst>
+                                </p:cTn>
+                              </p:par>
+                            </p:childTnLst>
+                          </p:cTn>
+                        </p:par>
+                      </p:childTnLst>
+                    </p:cTn>
+                  </p:par>
+                  <p:par>
+                    <p:cTn id="18" fill="hold">
+                      <p:stCondLst>
+                        <p:cond delay="indefinite"/>
+                      </p:stCondLst>
+                      <p:childTnLst>
+                        <p:par>
+                          <p:cTn id="19" fill="hold">
+                            <p:stCondLst>
+                              <p:cond delay="0"/>
+                            </p:stCondLst>
+                            <p:childTnLst>
+                              <p:par>
+                                <p:cTn id="20" presetID="42" presetClass="entr" presetSubtype="0" fill="hold" grpId="0" nodeType="clickEffect">
+                                  <p:stCondLst>
+                                    <p:cond delay="0"/>
+                                  </p:stCondLst>
+                                  <p:childTnLst>
+                                    <p:set>
+                                      <p:cBhvr>
+                                        <p:cTn id="21" dur="1" fill="hold">
+                                          <p:stCondLst>
+                                            <p:cond delay="0"/>
+                                          </p:stCondLst>
+                                        </p:cTn>
+                                        <p:tgtEl>
+                                          <p:spTgt spid="12"/>
+                                        </p:tgtEl>
+                                        <p:attrNameLst>
+                                          <p:attrName>style.visibility</p:attrName>
+                                        </p:attrNameLst>
+                                      </p:cBhvr>
+                                      <p:to>
+                                        <p:strVal val="visible"/>
+                                      </p:to>
+                                    </p:set>
+                                    <p:animEffect transition="in" filter="fade">
+                                      <p:cBhvr>
+                                        <p:cTn id="22" dur="1000"/>
+                                        <p:tgtEl>
+                                          <p:spTgt spid="12"/>
+                                        </p:tgtEl>
+                                      </p:cBhvr>
+                                    </p:animEffect>
+                                    <p:anim calcmode="lin" valueType="num">
+                                      <p:cBhvr>
+                                        <p:cTn id="23" dur="1000" fill="hold"/>
+                                        <p:tgtEl>
+                                          <p:spTgt spid="12"/>
+                                        </p:tgtEl>
+                                        <p:attrNameLst>
+                                          <p:attrName>ppt_x</p:attrName>
+                                        </p:attrNameLst>
+                                      </p:cBhvr>
+                                      <p:tavLst>
+                                        <p:tav tm="0">
+                                          <p:val>
+                                            <p:strVal val="#ppt_x"/>
+                                          </p:val>
+                                        </p:tav>
+                                        <p:tav tm="100000">
+                                          <p:val>
+                                            <p:strVal val="#ppt_x"/>
+                                          </p:val>
+                                        </p:tav>
+                                      </p:tavLst>
+                                    </p:anim>
+                                    <p:anim calcmode="lin" valueType="num">
+                                      <p:cBhvr>
+                                        <p:cTn id="24" dur="1000" fill="hold"/>
+                                        <p:tgtEl>
+                                          <p:spTgt spid="12"/>
+                                        </p:tgtEl>
+                                        <p:attrNameLst>
+                                          <p:attrName>ppt_y</p:attrName>
+                                        </p:attrNameLst>
+                                      </p:cBhvr>
+                                      <p:tavLst>
+                                        <p:tav tm="0">
+                                          <p:val>
+                                            <p:strVal val="#ppt_y+.1"/>
+                                          </p:val>
+                                        </p:tav>
+                                        <p:tav tm="100000">
+                                          <p:val>
+                                            <p:strVal val="#ppt_y"/>
+                                          </p:val>
+                                        </p:tav>
+                                      </p:tavLst>
+                                    </p:anim>
+                                  </p:childTnLst>
+                                </p:cTn>
+                              </p:par>
+                            </p:childTnLst>
+                          </p:cTn>
+                        </p:par>
+                      </p:childTnLst>
+                    </p:cTn>
+                  </p:par>
+                  <p:par>
+                    <p:cTn id="25" fill="hold">
+                      <p:stCondLst>
+                        <p:cond delay="indefinite"/>
+                      </p:stCondLst>
+                      <p:childTnLst>
+                        <p:par>
+                          <p:cTn id="26" fill="hold">
+                            <p:stCondLst>
+                              <p:cond delay="0"/>
+                            </p:stCondLst>
+                            <p:childTnLst>
+                              <p:par>
+                                <p:cTn id="27" presetID="10" presetClass="entr" presetSubtype="0" fill="hold" grpId="0" nodeType="clickEffect">
+                                  <p:stCondLst>
+                                    <p:cond delay="0"/>
+                                  </p:stCondLst>
+                                  <p:childTnLst>
+                                    <p:set>
+                                      <p:cBhvr>
+                                        <p:cTn id="28" dur="1" fill="hold">
+                                          <p:stCondLst>
+                                            <p:cond delay="0"/>
+                                          </p:stCondLst>
+                                        </p:cTn>
+                                        <p:tgtEl>
+                                          <p:spTgt spid="13"/>
+                                        </p:tgtEl>
+                                        <p:attrNameLst>
+                                          <p:attrName>style.visibility</p:attrName>
+                                        </p:attrNameLst>
+                                      </p:cBhvr>
+                                      <p:to>
+                                        <p:strVal val="visible"/>
+                                      </p:to>
+                                    </p:set>
+                                    <p:animEffect transition="in" filter="fade">
+                                      <p:cBhvr>
+                                        <p:cTn id="29" dur="500"/>
+                                        <p:tgtEl>
+                                          <p:spTgt spid="13"/>
+                                        </p:tgtEl>
+                                      </p:cBhvr>
+                                    </p:animEffect>
+                                  </p:childTnLst>
+                                </p:cTn>
+                              </p:par>
+                            </p:childTnLst>
+                          </p:cTn>
+                        </p:par>
+                      </p:childTnLst>
+                    </p:cTn>
+                  </p:par>
+                  <p:par>
+                    <p:cTn id="30" fill="hold">
+                      <p:stCondLst>
+                        <p:cond delay="indefinite"/>
+                      </p:stCondLst>
+                      <p:childTnLst>
+                        <p:par>
+                          <p:cTn id="31" fill="hold">
+                            <p:stCondLst>
+                              <p:cond delay="0"/>
+                            </p:stCondLst>
+                            <p:childTnLst>
+                              <p:par>
+                                <p:cTn id="32" presetID="22" presetClass="entr" presetSubtype="1" fill="hold" nodeType="clickEffect">
+                                  <p:stCondLst>
+                                    <p:cond delay="0"/>
+                                  </p:stCondLst>
+                                  <p:childTnLst>
+                                    <p:set>
+                                      <p:cBhvr>
+                                        <p:cTn id="33" dur="1" fill="hold">
+                                          <p:stCondLst>
+                                            <p:cond delay="0"/>
+                                          </p:stCondLst>
+                                        </p:cTn>
+                                        <p:tgtEl>
+                                          <p:spTgt spid="2"/>
+                                        </p:tgtEl>
+                                        <p:attrNameLst>
+                                          <p:attrName>style.visibility</p:attrName>
+                                        </p:attrNameLst>
+                                      </p:cBhvr>
+                                      <p:to>
+                                        <p:strVal val="visible"/>
+                                      </p:to>
+                                    </p:set>
+                                    <p:animEffect transition="in" filter="wipe(up)">
+                                      <p:cBhvr>
+                                        <p:cTn id="34" dur="500"/>
+                                        <p:tgtEl>
+                                          <p:spTgt spid="2"/>
+                                        </p:tgtEl>
+                                      </p:cBhvr>
+                                    </p:animEffect>
+                                  </p:childTnLst>
+                                </p:cTn>
+                              </p:par>
+                            </p:childTnLst>
+                          </p:cTn>
+                        </p:par>
+                      </p:childTnLst>
+                    </p:cTn>
+                  </p:par>
+                  <p:par>
+                    <p:cTn id="35" fill="hold">
+                      <p:stCondLst>
+                        <p:cond delay="indefinite"/>
+                      </p:stCondLst>
+                      <p:childTnLst>
+                        <p:par>
+                          <p:cTn id="36" fill="hold">
+                            <p:stCondLst>
+                              <p:cond delay="0"/>
+                            </p:stCondLst>
+                            <p:childTnLst>
+                              <p:par>
+                                <p:cTn id="37" presetID="10" presetClass="entr" presetSubtype="0" fill="hold" nodeType="clickEffect">
+                                  <p:stCondLst>
+                                    <p:cond delay="0"/>
+                                  </p:stCondLst>
+                                  <p:childTnLst>
+                                    <p:set>
+                                      <p:cBhvr>
+                                        <p:cTn id="38" dur="1" fill="hold">
+                                          <p:stCondLst>
+                                            <p:cond delay="0"/>
+                                          </p:stCondLst>
+                                        </p:cTn>
+                                        <p:tgtEl>
+                                          <p:spTgt spid="3"/>
+                                        </p:tgtEl>
+                                        <p:attrNameLst>
+                                          <p:attrName>style.visibility</p:attrName>
+                                        </p:attrNameLst>
+                                      </p:cBhvr>
+                                      <p:to>
+                                        <p:strVal val="visible"/>
+                                      </p:to>
+                                    </p:set>
+                                    <p:animEffect transition="in" filter="fade">
+                                      <p:cBhvr>
+                                        <p:cTn id="39" dur="500"/>
+                                        <p:tgtEl>
+                                          <p:spTgt spid="3"/>
+                                        </p:tgtEl>
+                                      </p:cBhvr>
+                                    </p:animEffect>
+                                  </p:childTnLst>
+                                </p:cTn>
+                              </p:par>
+                            </p:childTnLst>
+                          </p:cTn>
+                        </p:par>
+                      </p:childTnLst>
+                    </p:cTn>
+                  </p:par>
+                  <p:par>
+                    <p:cTn id="40" fill="hold">
+                      <p:stCondLst>
+                        <p:cond delay="indefinite"/>
+                      </p:stCondLst>
+                      <p:childTnLst>
+                        <p:par>
+                          <p:cTn id="41" fill="hold">
+                            <p:stCondLst>
+                              <p:cond delay="0"/>
+                            </p:stCondLst>
+                            <p:childTnLst>
+                              <p:par>
+                                <p:cTn id="42" presetID="10" presetClass="entr" presetSubtype="0" fill="hold" grpId="0" nodeType="clickEffect">
+                                  <p:stCondLst>
+                                    <p:cond delay="0"/>
+                                  </p:stCondLst>
+                                  <p:childTnLst>
+                                    <p:set>
+                                      <p:cBhvr>
+                                        <p:cTn id="43" dur="1" fill="hold">
+                                          <p:stCondLst>
+                                            <p:cond delay="0"/>
+                                          </p:stCondLst>
+                                        </p:cTn>
+                                        <p:tgtEl>
+                                          <p:spTgt spid="19"/>
+                                        </p:tgtEl>
+                                        <p:attrNameLst>
+                                          <p:attrName>style.visibility</p:attrName>
+                                        </p:attrNameLst>
+                                      </p:cBhvr>
+                                      <p:to>
+                                        <p:strVal val="visible"/>
+                                      </p:to>
+                                    </p:set>
+                                    <p:animEffect transition="in" filter="fade">
+                                      <p:cBhvr>
+                                        <p:cTn id="44" dur="500"/>
+                                        <p:tgtEl>
+                                          <p:spTgt spid="19"/>
+                                        </p:tgtEl>
+                                      </p:cBhvr>
+                                    </p:animEffect>
+                                  </p:childTnLst>
+                                </p:cTn>
+                              </p:par>
+                            </p:childTnLst>
+                          </p:cTn>
+                        </p:par>
+                      </p:childTnLst>
+                    </p:cTn>
+                  </p:par>
+                </p:childTnLst>
+              </p:cTn>
+              <p:prevCondLst>
+                <p:cond evt="onPrev" delay="0">
+                  <p:tgtEl>
+                    <p:sldTgt/>
+                  </p:tgtEl>
+                </p:cond>
+              </p:prevCondLst>
+              <p:nextCondLst>
+                <p:cond evt="onNext" delay="0">
+                  <p:tgtEl>
+                    <p:sldTgt/>
+                  </p:tgtEl>
+                </p:cond>
+              </p:nextCondLst>
+            </p:seq>
+          </p:childTnLst>
+        </p:cTn>
+      </p:par>
+    </p:tnLst>
+    <p:bldLst>
+      <p:bldP spid="9" grpId="0" animBg="1"/>
+      <p:bldP spid="10" grpId="0"/>
+      <p:bldP spid="11" grpId="0" animBg="1"/>
+      <p:bldP spid="12" grpId="0" animBg="1"/>
+      <p:bldP spid="13" grpId="0" animBg="1"/>
+      <p:bldP spid="19" grpId="0" animBg="1"/>
     </p:bldLst>
   </p:timing>
 </p:sld>

--- a/Sororin_mechanism_flowchart.pptx
+++ b/Sororin_mechanism_flowchart.pptx
@@ -5,7 +5,7 @@
     <p:sldMasterId id="2147483648" r:id="rId1"/>
   </p:sldMasterIdLst>
   <p:notesMasterIdLst>
-    <p:notesMasterId r:id="rId15"/>
+    <p:notesMasterId r:id="rId17"/>
   </p:notesMasterIdLst>
   <p:sldIdLst>
     <p:sldId id="256" r:id="rId2"/>
@@ -21,6 +21,8 @@
     <p:sldId id="266" r:id="rId12"/>
     <p:sldId id="267" r:id="rId13"/>
     <p:sldId id="268" r:id="rId14"/>
+    <p:sldId id="269" r:id="rId15"/>
+    <p:sldId id="270" r:id="rId16"/>
   </p:sldIdLst>
   <p:sldSz cx="12188825" cy="6858000"/>
   <p:notesSz cx="6858000" cy="12188825"/>
@@ -1552,6 +1554,18 @@
   <p:clrMapOvr>
     <a:masterClrMapping/>
   </p:clrMapOvr>
+  <mc:AlternateContent xmlns:mc="http://schemas.openxmlformats.org/markup-compatibility/2006">
+    <mc:Choice xmlns:p14="http://schemas.microsoft.com/office/powerpoint/2010/main" Requires="p14">
+      <p:transition spd="slow" p14:dur="3400">
+        <p14:reveal/>
+      </p:transition>
+    </mc:Choice>
+    <mc:Fallback>
+      <p:transition spd="slow">
+        <p:fade/>
+      </p:transition>
+    </mc:Fallback>
+  </mc:AlternateContent>
 </p:sldLayout>
 </file>
 
@@ -1976,6 +1990,18 @@
   <p:sldLayoutIdLst>
     <p:sldLayoutId id="2147483649" r:id="rId1"/>
   </p:sldLayoutIdLst>
+  <mc:AlternateContent xmlns:mc="http://schemas.openxmlformats.org/markup-compatibility/2006">
+    <mc:Choice xmlns:p14="http://schemas.microsoft.com/office/powerpoint/2010/main" Requires="p14">
+      <p:transition spd="slow" p14:dur="3400">
+        <p14:reveal/>
+      </p:transition>
+    </mc:Choice>
+    <mc:Fallback>
+      <p:transition spd="slow">
+        <p:fade/>
+      </p:transition>
+    </mc:Fallback>
+  </mc:AlternateContent>
   <p:txStyles>
     <p:titleStyle>
       <a:lvl1pPr algn="l" defTabSz="914400" rtl="0" eaLnBrk="1" latinLnBrk="0" hangingPunct="1">
@@ -2316,8 +2342,8 @@
         </p:nvSpPr>
         <p:spPr>
           <a:xfrm>
-            <a:off x="731520" y="1828800"/>
-            <a:ext cx="8503560" cy="1462680"/>
+            <a:off x="731520" y="1554660"/>
+            <a:ext cx="8503560" cy="1736820"/>
           </a:xfrm>
           <a:prstGeom prst="rect">
             <a:avLst/>
@@ -2580,11 +2606,127 @@
           </a:p>
         </p:txBody>
       </p:sp>
+      <p:sp>
+        <p:nvSpPr>
+          <p:cNvPr id="25" name="Author"/>
+          <p:cNvSpPr/>
+          <p:nvPr/>
+        </p:nvSpPr>
+        <p:spPr>
+          <a:xfrm>
+            <a:off x="749880" y="4995000"/>
+            <a:ext cx="8229240" cy="953516"/>
+          </a:xfrm>
+          <a:prstGeom prst="rect">
+            <a:avLst/>
+          </a:prstGeom>
+          <a:noFill/>
+          <a:ln w="0">
+            <a:noFill/>
+          </a:ln>
+        </p:spPr>
+        <p:style>
+          <a:lnRef idx="0">
+            <a:scrgbClr r="0" g="0" b="0"/>
+          </a:lnRef>
+          <a:fillRef idx="0">
+            <a:scrgbClr r="0" g="0" b="0"/>
+          </a:fillRef>
+          <a:effectRef idx="0">
+            <a:scrgbClr r="0" g="0" b="0"/>
+          </a:effectRef>
+          <a:fontRef idx="minor"/>
+        </p:style>
+        <p:txBody>
+          <a:bodyPr lIns="90000" tIns="45000" rIns="90000" bIns="45000" anchor="t">
+            <a:noAutofit/>
+          </a:bodyPr>
+          <a:lstStyle/>
+          <a:p>
+            <a:pPr defTabSz="914400">
+              <a:lnSpc>
+                <a:spcPct val="102000"/>
+              </a:lnSpc>
+            </a:pPr>
+            <a:r>
+              <a:rPr lang="en-US" sz="1600" b="1" dirty="0">
+                <a:solidFill>
+                  <a:srgbClr val="FFFFFF"/>
+                </a:solidFill>
+                <a:latin typeface="Calibri"/>
+              </a:rPr>
+              <a:t>Amirhossein Rezaei</a:t>
+            </a:r>
+          </a:p>
+          <a:p>
+            <a:pPr defTabSz="914400">
+              <a:lnSpc>
+                <a:spcPct val="102000"/>
+              </a:lnSpc>
+            </a:pPr>
+            <a:r>
+              <a:rPr lang="en-US" sz="1300" b="0" dirty="0">
+                <a:solidFill>
+                  <a:srgbClr val="9FB0D8"/>
+                </a:solidFill>
+                <a:latin typeface="Calibri"/>
+              </a:rPr>
+              <a:t>University of Padova</a:t>
+            </a:r>
+          </a:p>
+          <a:p>
+            <a:pPr defTabSz="914400">
+              <a:lnSpc>
+                <a:spcPct val="102000"/>
+              </a:lnSpc>
+            </a:pPr>
+            <a:endParaRPr lang="en-US" sz="1300" dirty="0">
+              <a:solidFill>
+                <a:srgbClr val="9FB0D8"/>
+              </a:solidFill>
+              <a:latin typeface="Calibri"/>
+            </a:endParaRPr>
+          </a:p>
+          <a:p>
+            <a:pPr>
+              <a:lnSpc>
+                <a:spcPct val="102000"/>
+              </a:lnSpc>
+            </a:pPr>
+            <a:r>
+              <a:rPr lang="en-US" sz="1300" dirty="0">
+                <a:solidFill>
+                  <a:schemeClr val="bg2">
+                    <a:lumMod val="75000"/>
+                  </a:schemeClr>
+                </a:solidFill>
+              </a:rPr>
+              <a:t>https://amirh0ss3in.github.io/</a:t>
+            </a:r>
+            <a:endParaRPr lang="en-US" sz="1300" b="0" dirty="0">
+              <a:solidFill>
+                <a:schemeClr val="bg2">
+                  <a:lumMod val="75000"/>
+                </a:schemeClr>
+              </a:solidFill>
+              <a:latin typeface="Calibri"/>
+            </a:endParaRPr>
+          </a:p>
+        </p:txBody>
+      </p:sp>
     </p:spTree>
   </p:cSld>
   <p:clrMapOvr>
     <a:masterClrMapping/>
   </p:clrMapOvr>
+  <mc:AlternateContent xmlns:mc="http://schemas.openxmlformats.org/markup-compatibility/2006">
+    <mc:Choice xmlns:p14="http://schemas.microsoft.com/office/powerpoint/2010/main" Requires="p14">
+      <p:transition p14:dur="0"/>
+    </mc:Choice>
+    <mc:Fallback>
+      <p:transition/>
+    </mc:Fallback>
+  </mc:AlternateContent>
 </p:sld>
 </file>
 
@@ -5479,6 +5621,18 @@
   <p:clrMapOvr>
     <a:masterClrMapping/>
   </p:clrMapOvr>
+  <mc:AlternateContent xmlns:mc="http://schemas.openxmlformats.org/markup-compatibility/2006">
+    <mc:Choice xmlns:p14="http://schemas.microsoft.com/office/powerpoint/2010/main" Requires="p14">
+      <p:transition spd="slow" p14:dur="3400">
+        <p14:reveal/>
+      </p:transition>
+    </mc:Choice>
+    <mc:Fallback>
+      <p:transition spd="slow">
+        <p:fade/>
+      </p:transition>
+    </mc:Fallback>
+  </mc:AlternateContent>
   <p:timing>
     <p:tnLst>
       <p:par>
@@ -7053,6 +7207,18 @@
   <p:clrMapOvr>
     <a:masterClrMapping/>
   </p:clrMapOvr>
+  <mc:AlternateContent xmlns:mc="http://schemas.openxmlformats.org/markup-compatibility/2006">
+    <mc:Choice xmlns:p14="http://schemas.microsoft.com/office/powerpoint/2010/main" Requires="p14">
+      <p:transition spd="slow" p14:dur="3400">
+        <p14:reveal/>
+      </p:transition>
+    </mc:Choice>
+    <mc:Fallback>
+      <p:transition spd="slow">
+        <p:fade/>
+      </p:transition>
+    </mc:Fallback>
+  </mc:AlternateContent>
   <p:timing>
     <p:tnLst>
       <p:par>
@@ -10363,6 +10529,18 @@
   <p:clrMapOvr>
     <a:masterClrMapping/>
   </p:clrMapOvr>
+  <mc:AlternateContent xmlns:mc="http://schemas.openxmlformats.org/markup-compatibility/2006">
+    <mc:Choice xmlns:p14="http://schemas.microsoft.com/office/powerpoint/2010/main" Requires="p14">
+      <p:transition spd="slow" p14:dur="3400">
+        <p14:reveal/>
+      </p:transition>
+    </mc:Choice>
+    <mc:Fallback>
+      <p:transition spd="slow">
+        <p:fade/>
+      </p:transition>
+    </mc:Fallback>
+  </mc:AlternateContent>
   <p:timing>
     <p:tnLst>
       <p:par>
@@ -15930,6 +16108,18 @@
   <p:clrMapOvr>
     <a:masterClrMapping/>
   </p:clrMapOvr>
+  <mc:AlternateContent xmlns:mc="http://schemas.openxmlformats.org/markup-compatibility/2006">
+    <mc:Choice xmlns:p14="http://schemas.microsoft.com/office/powerpoint/2010/main" Requires="p14">
+      <p:transition spd="slow" p14:dur="3400">
+        <p14:reveal/>
+      </p:transition>
+    </mc:Choice>
+    <mc:Fallback>
+      <p:transition spd="slow">
+        <p:fade/>
+      </p:transition>
+    </mc:Fallback>
+  </mc:AlternateContent>
   <p:timing>
     <p:tnLst>
       <p:par>
@@ -16436,6 +16626,2847 @@
       <p:bldP spid="12" grpId="0" animBg="1"/>
       <p:bldP spid="13" grpId="0" animBg="1"/>
       <p:bldP spid="19" grpId="0" animBg="1"/>
+    </p:bldLst>
+  </p:timing>
+</p:sld>
+</file>
+
+<file path=ppt/slides/slide14.xml><?xml version="1.0" encoding="utf-8"?>
+<p:sld xmlns:a="http://schemas.openxmlformats.org/drawingml/2006/main" xmlns:r="http://schemas.openxmlformats.org/officeDocument/2006/relationships" xmlns:p="http://schemas.openxmlformats.org/presentationml/2006/main">
+  <p:cSld>
+    <p:spTree>
+      <p:nvGrpSpPr>
+        <p:cNvPr id="1" name=""/>
+        <p:cNvGrpSpPr/>
+        <p:nvPr/>
+      </p:nvGrpSpPr>
+      <p:grpSpPr>
+        <a:xfrm>
+          <a:off x="0" y="0"/>
+          <a:ext cx="0" cy="0"/>
+          <a:chOff x="0" y="0"/>
+          <a:chExt cx="0" cy="0"/>
+        </a:xfrm>
+      </p:grpSpPr>
+      <p:sp>
+        <p:nvSpPr>
+          <p:cNvPr id="10" name="Text 0"/>
+          <p:cNvSpPr/>
+          <p:nvPr/>
+        </p:nvSpPr>
+        <p:spPr>
+          <a:xfrm>
+            <a:off x="274320" y="109800"/>
+            <a:ext cx="11639880" cy="456840"/>
+          </a:xfrm>
+          <a:prstGeom prst="rect">
+            <a:avLst/>
+          </a:prstGeom>
+          <a:noFill/>
+          <a:ln w="0">
+            <a:noFill/>
+          </a:ln>
+        </p:spPr>
+        <p:style>
+          <a:lnRef idx="0">
+            <a:scrgbClr r="0" g="0" b="0"/>
+          </a:lnRef>
+          <a:fillRef idx="0">
+            <a:scrgbClr r="0" g="0" b="0"/>
+          </a:fillRef>
+          <a:effectRef idx="0">
+            <a:scrgbClr r="0" g="0" b="0"/>
+          </a:effectRef>
+          <a:fontRef idx="minor"/>
+        </p:style>
+        <p:txBody>
+          <a:bodyPr lIns="90000" tIns="45000" rIns="90000" bIns="45000" anchor="ctr">
+            <a:noAutofit/>
+          </a:bodyPr>
+          <a:lstStyle/>
+          <a:p>
+            <a:pPr algn="ctr" defTabSz="914400">
+              <a:lnSpc>
+                <a:spcPct val="100000"/>
+              </a:lnSpc>
+              <a:tabLst>
+                <a:tab pos="0" algn="l"/>
+              </a:tabLst>
+            </a:pPr>
+            <a:r>
+              <a:rPr lang="en-US" sz="1900" b="1" u="none" strike="noStrike">
+                <a:solidFill>
+                  <a:srgbClr val="2C3E50"/>
+                </a:solidFill>
+                <a:effectLst/>
+                <a:uFillTx/>
+                <a:latin typeface="Calibri"/>
+                <a:ea typeface="Calibri"/>
+              </a:rPr>
+              <a:t>Conclusion: Sororin is a fuzzy cohesin hub — a switchboard built on disorder</a:t>
+            </a:r>
+            <a:endParaRPr lang="en-US" sz="1900" b="0" u="none" strike="noStrike">
+              <a:solidFill>
+                <a:srgbClr val="000000"/>
+              </a:solidFill>
+              <a:effectLst/>
+              <a:uFillTx/>
+              <a:latin typeface="Arial"/>
+            </a:endParaRPr>
+          </a:p>
+        </p:txBody>
+      </p:sp>
+      <p:sp>
+        <p:nvSpPr>
+          <p:cNvPr id="11" name="Text 1"/>
+          <p:cNvSpPr/>
+          <p:nvPr/>
+        </p:nvSpPr>
+        <p:spPr>
+          <a:xfrm>
+            <a:off x="320040" y="658440"/>
+            <a:ext cx="11548440" cy="840960"/>
+          </a:xfrm>
+          <a:prstGeom prst="roundRect">
+            <a:avLst>
+              <a:gd name="adj" fmla="val 5435"/>
+            </a:avLst>
+          </a:prstGeom>
+          <a:solidFill>
+            <a:srgbClr val="2C3E50"/>
+          </a:solidFill>
+          <a:ln w="0">
+            <a:noFill/>
+          </a:ln>
+        </p:spPr>
+        <p:style>
+          <a:lnRef idx="0">
+            <a:scrgbClr r="0" g="0" b="0"/>
+          </a:lnRef>
+          <a:fillRef idx="0">
+            <a:scrgbClr r="0" g="0" b="0"/>
+          </a:fillRef>
+          <a:effectRef idx="0">
+            <a:scrgbClr r="0" g="0" b="0"/>
+          </a:effectRef>
+          <a:fontRef idx="minor"/>
+        </p:style>
+        <p:txBody>
+          <a:bodyPr lIns="90000" tIns="45000" rIns="90000" bIns="45000" anchor="ctr">
+            <a:noAutofit/>
+          </a:bodyPr>
+          <a:lstStyle/>
+          <a:p>
+            <a:pPr algn="ctr" defTabSz="914400">
+              <a:lnSpc>
+                <a:spcPct val="100000"/>
+              </a:lnSpc>
+              <a:tabLst>
+                <a:tab pos="0" algn="l"/>
+              </a:tabLst>
+            </a:pPr>
+            <a:r>
+              <a:rPr lang="en-US" sz="1250" b="0" i="1" u="none" strike="noStrike" dirty="0">
+                <a:solidFill>
+                  <a:srgbClr val="D6E3EE"/>
+                </a:solidFill>
+                <a:effectLst/>
+                <a:uFillTx/>
+                <a:latin typeface="Calibri"/>
+                <a:ea typeface="Calibri"/>
+              </a:rPr>
+              <a:t>Does Sororin engage its partners through folded domains or through disorder?   </a:t>
+            </a:r>
+            <a:r>
+              <a:rPr lang="en-US" sz="1250" b="1" u="none" strike="noStrike" dirty="0">
+                <a:solidFill>
+                  <a:srgbClr val="FFFFFF"/>
+                </a:solidFill>
+                <a:effectLst/>
+                <a:uFillTx/>
+                <a:latin typeface="Calibri"/>
+                <a:ea typeface="Calibri"/>
+              </a:rPr>
+              <a:t>→  It is built on disorder.  </a:t>
+            </a:r>
+            <a:r>
+              <a:rPr lang="en-US" sz="1250" b="0" u="none" strike="noStrike" dirty="0">
+                <a:solidFill>
+                  <a:srgbClr val="FFFFFF"/>
+                </a:solidFill>
+                <a:effectLst/>
+                <a:uFillTx/>
+                <a:latin typeface="Calibri"/>
+                <a:ea typeface="Calibri"/>
+              </a:rPr>
+              <a:t>Where a partner-specific claim can be made at all, it is a short linear motif embedded in that disorder — not disorder in the abstract — that explains the edge.</a:t>
+            </a:r>
+            <a:endParaRPr lang="en-US" sz="1250" b="0" u="none" strike="noStrike" dirty="0">
+              <a:solidFill>
+                <a:srgbClr val="FFFFFF"/>
+              </a:solidFill>
+              <a:effectLst/>
+              <a:uFillTx/>
+              <a:latin typeface="Arial"/>
+            </a:endParaRPr>
+          </a:p>
+        </p:txBody>
+      </p:sp>
+      <p:sp>
+        <p:nvSpPr>
+          <p:cNvPr id="12" name="Text 2"/>
+          <p:cNvSpPr/>
+          <p:nvPr/>
+        </p:nvSpPr>
+        <p:spPr>
+          <a:xfrm>
+            <a:off x="320040" y="1627560"/>
+            <a:ext cx="2788560" cy="2084400"/>
+          </a:xfrm>
+          <a:prstGeom prst="roundRect">
+            <a:avLst>
+              <a:gd name="adj" fmla="val 2193"/>
+            </a:avLst>
+          </a:prstGeom>
+          <a:solidFill>
+            <a:srgbClr val="E3F2F4"/>
+          </a:solidFill>
+          <a:ln w="19050">
+            <a:solidFill>
+              <a:srgbClr val="1F6F7A"/>
+            </a:solidFill>
+            <a:round/>
+          </a:ln>
+        </p:spPr>
+        <p:style>
+          <a:lnRef idx="0">
+            <a:scrgbClr r="0" g="0" b="0"/>
+          </a:lnRef>
+          <a:fillRef idx="0">
+            <a:scrgbClr r="0" g="0" b="0"/>
+          </a:fillRef>
+          <a:effectRef idx="0">
+            <a:scrgbClr r="0" g="0" b="0"/>
+          </a:effectRef>
+          <a:fontRef idx="minor"/>
+        </p:style>
+        <p:txBody>
+          <a:bodyPr lIns="101520" tIns="101520" rIns="101520" bIns="101520" anchor="t">
+            <a:noAutofit/>
+          </a:bodyPr>
+          <a:lstStyle/>
+          <a:p>
+            <a:r>
+              <a:rPr lang="en-US" sz="1100" b="1" u="none" strike="noStrike" dirty="0">
+                <a:solidFill>
+                  <a:srgbClr val="1F6F7A"/>
+                </a:solidFill>
+                <a:effectLst/>
+                <a:uFillTx/>
+                <a:latin typeface="Calibri"/>
+                <a:ea typeface="Calibri"/>
+              </a:rPr>
+              <a:t>Result 1 · Network</a:t>
+            </a:r>
+            <a:endParaRPr lang="en-US" sz="1100" b="0" u="none" strike="noStrike" dirty="0">
+              <a:solidFill>
+                <a:srgbClr val="000000"/>
+              </a:solidFill>
+              <a:effectLst/>
+              <a:uFillTx/>
+              <a:latin typeface="Arial"/>
+            </a:endParaRPr>
+          </a:p>
+          <a:p>
+            <a:pPr defTabSz="914400">
+              <a:lnSpc>
+                <a:spcPct val="100000"/>
+              </a:lnSpc>
+              <a:tabLst>
+                <a:tab pos="0" algn="l"/>
+              </a:tabLst>
+            </a:pPr>
+            <a:endParaRPr lang="en-US" sz="1100" b="0" u="none" strike="noStrike" dirty="0">
+              <a:solidFill>
+                <a:srgbClr val="000000"/>
+              </a:solidFill>
+              <a:effectLst/>
+              <a:uFillTx/>
+              <a:latin typeface="Arial"/>
+            </a:endParaRPr>
+          </a:p>
+          <a:p>
+            <a:pPr defTabSz="914400">
+              <a:lnSpc>
+                <a:spcPct val="100000"/>
+              </a:lnSpc>
+              <a:tabLst>
+                <a:tab pos="0" algn="l"/>
+              </a:tabLst>
+            </a:pPr>
+            <a:r>
+              <a:rPr lang="en-US" sz="1000" b="0" u="none" strike="noStrike" dirty="0">
+                <a:solidFill>
+                  <a:srgbClr val="2C3E50"/>
+                </a:solidFill>
+                <a:effectLst/>
+                <a:uFillTx/>
+                <a:latin typeface="Calibri"/>
+                <a:ea typeface="Calibri"/>
+              </a:rPr>
+              <a:t>A small, high-confidence hub of a dense </a:t>
+            </a:r>
+            <a:r>
+              <a:rPr lang="en-US" sz="1000" b="0" u="none" strike="noStrike" dirty="0" err="1">
+                <a:solidFill>
+                  <a:srgbClr val="2C3E50"/>
+                </a:solidFill>
+                <a:effectLst/>
+                <a:uFillTx/>
+                <a:latin typeface="Calibri"/>
+                <a:ea typeface="Calibri"/>
+              </a:rPr>
+              <a:t>cohesin</a:t>
+            </a:r>
+            <a:r>
+              <a:rPr lang="en-US" sz="1000" b="0" u="none" strike="noStrike" dirty="0">
+                <a:solidFill>
+                  <a:srgbClr val="2C3E50"/>
+                </a:solidFill>
+                <a:effectLst/>
+                <a:uFillTx/>
+                <a:latin typeface="Calibri"/>
+                <a:ea typeface="Calibri"/>
+              </a:rPr>
+              <a:t> module (density 0.89) — and itself ~62% intrinsically disordered.</a:t>
+            </a:r>
+            <a:endParaRPr lang="en-US" sz="1000" b="0" u="none" strike="noStrike" dirty="0">
+              <a:solidFill>
+                <a:srgbClr val="000000"/>
+              </a:solidFill>
+              <a:effectLst/>
+              <a:uFillTx/>
+              <a:latin typeface="Arial"/>
+            </a:endParaRPr>
+          </a:p>
+        </p:txBody>
+      </p:sp>
+      <p:sp>
+        <p:nvSpPr>
+          <p:cNvPr id="13" name="Text 3"/>
+          <p:cNvSpPr/>
+          <p:nvPr/>
+        </p:nvSpPr>
+        <p:spPr>
+          <a:xfrm>
+            <a:off x="3246120" y="1627560"/>
+            <a:ext cx="2788560" cy="2084400"/>
+          </a:xfrm>
+          <a:prstGeom prst="roundRect">
+            <a:avLst>
+              <a:gd name="adj" fmla="val 2193"/>
+            </a:avLst>
+          </a:prstGeom>
+          <a:solidFill>
+            <a:srgbClr val="FBEAD9"/>
+          </a:solidFill>
+          <a:ln w="19050">
+            <a:solidFill>
+              <a:srgbClr val="C0601F"/>
+            </a:solidFill>
+            <a:round/>
+          </a:ln>
+        </p:spPr>
+        <p:style>
+          <a:lnRef idx="0">
+            <a:scrgbClr r="0" g="0" b="0"/>
+          </a:lnRef>
+          <a:fillRef idx="0">
+            <a:scrgbClr r="0" g="0" b="0"/>
+          </a:fillRef>
+          <a:effectRef idx="0">
+            <a:scrgbClr r="0" g="0" b="0"/>
+          </a:effectRef>
+          <a:fontRef idx="minor"/>
+        </p:style>
+        <p:txBody>
+          <a:bodyPr lIns="101520" tIns="101520" rIns="101520" bIns="101520" anchor="t">
+            <a:noAutofit/>
+          </a:bodyPr>
+          <a:lstStyle/>
+          <a:p>
+            <a:r>
+              <a:rPr lang="en-US" sz="1100" b="1" u="none" strike="noStrike" dirty="0">
+                <a:solidFill>
+                  <a:srgbClr val="C0601F"/>
+                </a:solidFill>
+                <a:effectLst/>
+                <a:uFillTx/>
+                <a:latin typeface="Calibri"/>
+                <a:ea typeface="Calibri"/>
+              </a:rPr>
+              <a:t>Result 2 · Disorder</a:t>
+            </a:r>
+            <a:endParaRPr lang="en-US" sz="1100" b="0" u="none" strike="noStrike" dirty="0">
+              <a:solidFill>
+                <a:srgbClr val="000000"/>
+              </a:solidFill>
+              <a:effectLst/>
+              <a:uFillTx/>
+              <a:latin typeface="Arial"/>
+            </a:endParaRPr>
+          </a:p>
+          <a:p>
+            <a:pPr defTabSz="914400">
+              <a:lnSpc>
+                <a:spcPct val="100000"/>
+              </a:lnSpc>
+              <a:tabLst>
+                <a:tab pos="0" algn="l"/>
+              </a:tabLst>
+            </a:pPr>
+            <a:endParaRPr lang="en-US" sz="1100" b="0" u="none" strike="noStrike" dirty="0">
+              <a:solidFill>
+                <a:srgbClr val="000000"/>
+              </a:solidFill>
+              <a:effectLst/>
+              <a:uFillTx/>
+              <a:latin typeface="Arial"/>
+            </a:endParaRPr>
+          </a:p>
+          <a:p>
+            <a:pPr defTabSz="914400">
+              <a:lnSpc>
+                <a:spcPct val="100000"/>
+              </a:lnSpc>
+              <a:tabLst>
+                <a:tab pos="0" algn="l"/>
+              </a:tabLst>
+            </a:pPr>
+            <a:r>
+              <a:rPr lang="en-US" sz="1000" b="0" u="none" strike="noStrike" dirty="0">
+                <a:solidFill>
+                  <a:srgbClr val="2C3E50"/>
+                </a:solidFill>
+                <a:effectLst/>
+                <a:uFillTx/>
+                <a:latin typeface="Calibri"/>
+                <a:ea typeface="Calibri"/>
+              </a:rPr>
+              <a:t>APC/C (KEN), PDS5 (FGF) and ERK2 (Ser209) determinants all sit in disordered segments; only the short C-terminal domain is folded.</a:t>
+            </a:r>
+            <a:endParaRPr lang="en-US" sz="1000" b="0" u="none" strike="noStrike" dirty="0">
+              <a:solidFill>
+                <a:srgbClr val="000000"/>
+              </a:solidFill>
+              <a:effectLst/>
+              <a:uFillTx/>
+              <a:latin typeface="Arial"/>
+            </a:endParaRPr>
+          </a:p>
+        </p:txBody>
+      </p:sp>
+      <p:sp>
+        <p:nvSpPr>
+          <p:cNvPr id="14" name="Text 4"/>
+          <p:cNvSpPr/>
+          <p:nvPr/>
+        </p:nvSpPr>
+        <p:spPr>
+          <a:xfrm>
+            <a:off x="6172200" y="1627560"/>
+            <a:ext cx="2788560" cy="2084400"/>
+          </a:xfrm>
+          <a:prstGeom prst="roundRect">
+            <a:avLst>
+              <a:gd name="adj" fmla="val 2193"/>
+            </a:avLst>
+          </a:prstGeom>
+          <a:solidFill>
+            <a:srgbClr val="DCEFDD"/>
+          </a:solidFill>
+          <a:ln w="19050">
+            <a:solidFill>
+              <a:srgbClr val="1A7A34"/>
+            </a:solidFill>
+            <a:round/>
+          </a:ln>
+        </p:spPr>
+        <p:style>
+          <a:lnRef idx="0">
+            <a:scrgbClr r="0" g="0" b="0"/>
+          </a:lnRef>
+          <a:fillRef idx="0">
+            <a:scrgbClr r="0" g="0" b="0"/>
+          </a:fillRef>
+          <a:effectRef idx="0">
+            <a:scrgbClr r="0" g="0" b="0"/>
+          </a:effectRef>
+          <a:fontRef idx="minor"/>
+        </p:style>
+        <p:txBody>
+          <a:bodyPr lIns="101520" tIns="101520" rIns="101520" bIns="101520" anchor="t">
+            <a:noAutofit/>
+          </a:bodyPr>
+          <a:lstStyle/>
+          <a:p>
+            <a:r>
+              <a:rPr lang="en-US" sz="1100" b="1" u="none" strike="noStrike" dirty="0">
+                <a:solidFill>
+                  <a:srgbClr val="1A7A34"/>
+                </a:solidFill>
+                <a:effectLst/>
+                <a:uFillTx/>
+                <a:latin typeface="Calibri"/>
+                <a:ea typeface="Calibri"/>
+              </a:rPr>
+              <a:t>Result 3 · </a:t>
+            </a:r>
+            <a:r>
+              <a:rPr lang="en-US" sz="1100" b="1" u="none" strike="noStrike" dirty="0" err="1">
+                <a:solidFill>
+                  <a:srgbClr val="1A7A34"/>
+                </a:solidFill>
+                <a:effectLst/>
+                <a:uFillTx/>
+                <a:latin typeface="Calibri"/>
+                <a:ea typeface="Calibri"/>
+              </a:rPr>
+              <a:t>Phospho</a:t>
+            </a:r>
+            <a:endParaRPr lang="en-US" sz="1100" b="0" u="none" strike="noStrike" dirty="0">
+              <a:solidFill>
+                <a:srgbClr val="000000"/>
+              </a:solidFill>
+              <a:effectLst/>
+              <a:uFillTx/>
+              <a:latin typeface="Arial"/>
+            </a:endParaRPr>
+          </a:p>
+          <a:p>
+            <a:pPr defTabSz="914400">
+              <a:lnSpc>
+                <a:spcPct val="100000"/>
+              </a:lnSpc>
+              <a:tabLst>
+                <a:tab pos="0" algn="l"/>
+              </a:tabLst>
+            </a:pPr>
+            <a:endParaRPr lang="en-US" sz="1100" b="0" u="none" strike="noStrike" dirty="0">
+              <a:solidFill>
+                <a:srgbClr val="000000"/>
+              </a:solidFill>
+              <a:effectLst/>
+              <a:uFillTx/>
+              <a:latin typeface="Arial"/>
+            </a:endParaRPr>
+          </a:p>
+          <a:p>
+            <a:pPr defTabSz="914400">
+              <a:lnSpc>
+                <a:spcPct val="100000"/>
+              </a:lnSpc>
+              <a:tabLst>
+                <a:tab pos="0" algn="l"/>
+              </a:tabLst>
+            </a:pPr>
+            <a:r>
+              <a:rPr lang="en-US" sz="1000" b="0" u="none" strike="noStrike" dirty="0">
+                <a:solidFill>
+                  <a:srgbClr val="2C3E50"/>
+                </a:solidFill>
+                <a:effectLst/>
+                <a:uFillTx/>
+                <a:latin typeface="Calibri"/>
+                <a:ea typeface="Calibri"/>
+              </a:rPr>
+              <a:t>Seven proline-directed phospho-sites lie outside the folded domain — in the disordered regions and linker flanking those determinants.</a:t>
+            </a:r>
+            <a:endParaRPr lang="en-US" sz="1000" b="0" u="none" strike="noStrike" dirty="0">
+              <a:solidFill>
+                <a:srgbClr val="000000"/>
+              </a:solidFill>
+              <a:effectLst/>
+              <a:uFillTx/>
+              <a:latin typeface="Arial"/>
+            </a:endParaRPr>
+          </a:p>
+        </p:txBody>
+      </p:sp>
+      <p:sp>
+        <p:nvSpPr>
+          <p:cNvPr id="15" name="Text 5"/>
+          <p:cNvSpPr/>
+          <p:nvPr/>
+        </p:nvSpPr>
+        <p:spPr>
+          <a:xfrm>
+            <a:off x="9098280" y="1627560"/>
+            <a:ext cx="2788560" cy="2084400"/>
+          </a:xfrm>
+          <a:prstGeom prst="roundRect">
+            <a:avLst>
+              <a:gd name="adj" fmla="val 2193"/>
+            </a:avLst>
+          </a:prstGeom>
+          <a:solidFill>
+            <a:srgbClr val="F1E7F3"/>
+          </a:solidFill>
+          <a:ln w="19050">
+            <a:solidFill>
+              <a:srgbClr val="762A83"/>
+            </a:solidFill>
+            <a:round/>
+          </a:ln>
+        </p:spPr>
+        <p:style>
+          <a:lnRef idx="0">
+            <a:scrgbClr r="0" g="0" b="0"/>
+          </a:lnRef>
+          <a:fillRef idx="0">
+            <a:scrgbClr r="0" g="0" b="0"/>
+          </a:fillRef>
+          <a:effectRef idx="0">
+            <a:scrgbClr r="0" g="0" b="0"/>
+          </a:effectRef>
+          <a:fontRef idx="minor"/>
+        </p:style>
+        <p:txBody>
+          <a:bodyPr lIns="101520" tIns="101520" rIns="101520" bIns="101520" anchor="t">
+            <a:noAutofit/>
+          </a:bodyPr>
+          <a:lstStyle/>
+          <a:p>
+            <a:r>
+              <a:rPr lang="en-US" sz="1100" b="1" u="none" strike="noStrike">
+                <a:solidFill>
+                  <a:srgbClr val="762A83"/>
+                </a:solidFill>
+                <a:effectLst/>
+                <a:uFillTx/>
+                <a:latin typeface="Calibri"/>
+                <a:ea typeface="Calibri"/>
+              </a:rPr>
+              <a:t>§3.4 · Linear motifs</a:t>
+            </a:r>
+            <a:endParaRPr lang="en-US" sz="1100" b="0" u="none" strike="noStrike">
+              <a:solidFill>
+                <a:srgbClr val="000000"/>
+              </a:solidFill>
+              <a:effectLst/>
+              <a:uFillTx/>
+              <a:latin typeface="Arial"/>
+            </a:endParaRPr>
+          </a:p>
+          <a:p>
+            <a:pPr defTabSz="914400">
+              <a:lnSpc>
+                <a:spcPct val="100000"/>
+              </a:lnSpc>
+              <a:tabLst>
+                <a:tab pos="0" algn="l"/>
+              </a:tabLst>
+            </a:pPr>
+            <a:endParaRPr lang="en-US" sz="1100" b="0" u="none" strike="noStrike">
+              <a:solidFill>
+                <a:srgbClr val="000000"/>
+              </a:solidFill>
+              <a:effectLst/>
+              <a:uFillTx/>
+              <a:latin typeface="Arial"/>
+            </a:endParaRPr>
+          </a:p>
+          <a:p>
+            <a:pPr defTabSz="914400">
+              <a:lnSpc>
+                <a:spcPct val="100000"/>
+              </a:lnSpc>
+              <a:tabLst>
+                <a:tab pos="0" algn="l"/>
+              </a:tabLst>
+            </a:pPr>
+            <a:r>
+              <a:rPr lang="en-US" sz="1000" b="0" u="none" strike="noStrike">
+                <a:solidFill>
+                  <a:srgbClr val="2C3E50"/>
+                </a:solidFill>
+                <a:effectLst/>
+                <a:uFillTx/>
+                <a:latin typeface="Calibri"/>
+                <a:ea typeface="Calibri"/>
+              </a:rPr>
+              <a:t>ELM anchors 4 of 5 partners (APC/C, SPOP, ERK2, PLK1) to a specific short motif — predominantly, not exclusively, within disorder.</a:t>
+            </a:r>
+            <a:endParaRPr lang="en-US" sz="1000" b="0" u="none" strike="noStrike">
+              <a:solidFill>
+                <a:srgbClr val="000000"/>
+              </a:solidFill>
+              <a:effectLst/>
+              <a:uFillTx/>
+              <a:latin typeface="Arial"/>
+            </a:endParaRPr>
+          </a:p>
+        </p:txBody>
+      </p:sp>
+      <p:sp>
+        <p:nvSpPr>
+          <p:cNvPr id="16" name="Text 6"/>
+          <p:cNvSpPr/>
+          <p:nvPr/>
+        </p:nvSpPr>
+        <p:spPr>
+          <a:xfrm>
+            <a:off x="320040" y="3877200"/>
+            <a:ext cx="11548440" cy="1371240"/>
+          </a:xfrm>
+          <a:prstGeom prst="roundRect">
+            <a:avLst>
+              <a:gd name="adj" fmla="val 3333"/>
+            </a:avLst>
+          </a:prstGeom>
+          <a:solidFill>
+            <a:srgbClr val="DCEFDD"/>
+          </a:solidFill>
+          <a:ln w="19050">
+            <a:solidFill>
+              <a:srgbClr val="1A7A34"/>
+            </a:solidFill>
+            <a:round/>
+          </a:ln>
+        </p:spPr>
+        <p:style>
+          <a:lnRef idx="0">
+            <a:scrgbClr r="0" g="0" b="0"/>
+          </a:lnRef>
+          <a:fillRef idx="0">
+            <a:scrgbClr r="0" g="0" b="0"/>
+          </a:fillRef>
+          <a:effectRef idx="0">
+            <a:scrgbClr r="0" g="0" b="0"/>
+          </a:effectRef>
+          <a:fontRef idx="minor"/>
+        </p:style>
+        <p:txBody>
+          <a:bodyPr lIns="152280" tIns="152280" rIns="152280" bIns="152280" anchor="ctr">
+            <a:noAutofit/>
+          </a:bodyPr>
+          <a:lstStyle/>
+          <a:p>
+            <a:pPr defTabSz="914400">
+              <a:lnSpc>
+                <a:spcPct val="105000"/>
+              </a:lnSpc>
+              <a:tabLst>
+                <a:tab pos="0" algn="l"/>
+              </a:tabLst>
+            </a:pPr>
+            <a:r>
+              <a:rPr lang="en-US" sz="1200" b="1" u="none" strike="noStrike" dirty="0">
+                <a:solidFill>
+                  <a:srgbClr val="1A7A34"/>
+                </a:solidFill>
+                <a:effectLst/>
+                <a:uFillTx/>
+                <a:latin typeface="Calibri"/>
+                <a:ea typeface="Calibri"/>
+              </a:rPr>
+              <a:t>The model — a fuzzy Cohesin hub.  </a:t>
+            </a:r>
+            <a:r>
+              <a:rPr lang="en-US" sz="1200" b="0" u="none" strike="noStrike" dirty="0">
+                <a:solidFill>
+                  <a:srgbClr val="2C3E50"/>
+                </a:solidFill>
+                <a:effectLst/>
+                <a:uFillTx/>
+                <a:latin typeface="Calibri"/>
+                <a:ea typeface="Calibri"/>
+              </a:rPr>
+              <a:t>A mostly disordered chain displays a set of short linear motifs (KEN degron · FGF motif · two SPOP degrons · MAPK docking) interleaved with proline-directed phospho-sites, so kinases and ubiquitin ligases switch individual contacts on and off </a:t>
+            </a:r>
+            <a:r>
+              <a:rPr lang="en-US" sz="1200" b="1" u="none" strike="noStrike" dirty="0">
+                <a:solidFill>
+                  <a:srgbClr val="2C3E50"/>
+                </a:solidFill>
+                <a:effectLst/>
+                <a:uFillTx/>
+                <a:latin typeface="Calibri"/>
+                <a:ea typeface="Calibri"/>
+              </a:rPr>
+              <a:t>without re</a:t>
+            </a:r>
+            <a:r>
+              <a:rPr lang="en-US" sz="1200" b="1" dirty="0">
+                <a:solidFill>
+                  <a:srgbClr val="2C3E50"/>
+                </a:solidFill>
+                <a:latin typeface="Calibri"/>
+                <a:ea typeface="Calibri"/>
+              </a:rPr>
+              <a:t>-</a:t>
+            </a:r>
+            <a:r>
+              <a:rPr lang="en-US" sz="1200" b="1" u="none" strike="noStrike" dirty="0">
+                <a:solidFill>
+                  <a:srgbClr val="2C3E50"/>
+                </a:solidFill>
+                <a:effectLst/>
+                <a:uFillTx/>
+                <a:latin typeface="Calibri"/>
+                <a:ea typeface="Calibri"/>
+              </a:rPr>
+              <a:t>modelling a folded core</a:t>
+            </a:r>
+            <a:r>
+              <a:rPr lang="en-US" sz="1200" b="0" u="none" strike="noStrike" dirty="0">
+                <a:solidFill>
+                  <a:srgbClr val="2C3E50"/>
+                </a:solidFill>
+                <a:effectLst/>
+                <a:uFillTx/>
+                <a:latin typeface="Calibri"/>
+                <a:ea typeface="Calibri"/>
+              </a:rPr>
+              <a:t>.  The disorder is what makes Sororin an efficient, multiply-regulated switchboard for </a:t>
+            </a:r>
+            <a:r>
+              <a:rPr lang="en-US" sz="1200" dirty="0">
+                <a:solidFill>
+                  <a:srgbClr val="2C3E50"/>
+                </a:solidFill>
+                <a:latin typeface="Calibri"/>
+                <a:ea typeface="Calibri"/>
+              </a:rPr>
+              <a:t>C</a:t>
+            </a:r>
+            <a:r>
+              <a:rPr lang="en-US" sz="1200" b="0" u="none" strike="noStrike" dirty="0">
+                <a:solidFill>
+                  <a:srgbClr val="2C3E50"/>
+                </a:solidFill>
+                <a:effectLst/>
+                <a:uFillTx/>
+                <a:latin typeface="Calibri"/>
+                <a:ea typeface="Calibri"/>
+              </a:rPr>
+              <a:t>ohesin.</a:t>
+            </a:r>
+            <a:endParaRPr lang="en-US" sz="1200" b="0" u="none" strike="noStrike" dirty="0">
+              <a:solidFill>
+                <a:srgbClr val="000000"/>
+              </a:solidFill>
+              <a:effectLst/>
+              <a:uFillTx/>
+              <a:latin typeface="Arial"/>
+            </a:endParaRPr>
+          </a:p>
+        </p:txBody>
+      </p:sp>
+      <p:sp>
+        <p:nvSpPr>
+          <p:cNvPr id="17" name="Text 7"/>
+          <p:cNvSpPr/>
+          <p:nvPr/>
+        </p:nvSpPr>
+        <p:spPr>
+          <a:xfrm>
+            <a:off x="320040" y="5440680"/>
+            <a:ext cx="11548440" cy="776880"/>
+          </a:xfrm>
+          <a:prstGeom prst="rect">
+            <a:avLst/>
+          </a:prstGeom>
+          <a:noFill/>
+          <a:ln w="0">
+            <a:noFill/>
+          </a:ln>
+        </p:spPr>
+        <p:style>
+          <a:lnRef idx="0">
+            <a:scrgbClr r="0" g="0" b="0"/>
+          </a:lnRef>
+          <a:fillRef idx="0">
+            <a:scrgbClr r="0" g="0" b="0"/>
+          </a:fillRef>
+          <a:effectRef idx="0">
+            <a:scrgbClr r="0" g="0" b="0"/>
+          </a:effectRef>
+          <a:fontRef idx="minor"/>
+        </p:style>
+        <p:txBody>
+          <a:bodyPr lIns="90000" tIns="45000" rIns="90000" bIns="45000" anchor="ctr">
+            <a:noAutofit/>
+          </a:bodyPr>
+          <a:lstStyle/>
+          <a:p>
+            <a:pPr defTabSz="914400">
+              <a:lnSpc>
+                <a:spcPct val="100000"/>
+              </a:lnSpc>
+              <a:tabLst>
+                <a:tab pos="0" algn="l"/>
+              </a:tabLst>
+            </a:pPr>
+            <a:r>
+              <a:rPr lang="en-US" sz="1000" b="1" i="1" u="none" strike="noStrike" dirty="0">
+                <a:solidFill>
+                  <a:srgbClr val="5A6B7B"/>
+                </a:solidFill>
+                <a:effectLst/>
+                <a:uFillTx/>
+                <a:latin typeface="Calibri"/>
+                <a:ea typeface="Calibri"/>
+              </a:rPr>
+              <a:t>Consistent with known biology:  </a:t>
+            </a:r>
+            <a:r>
+              <a:rPr lang="en-US" sz="1000" b="0" i="1" u="none" strike="noStrike" dirty="0">
+                <a:solidFill>
+                  <a:srgbClr val="5A6B7B"/>
+                </a:solidFill>
+                <a:effectLst/>
+                <a:uFillTx/>
+                <a:latin typeface="Calibri"/>
+                <a:ea typeface="Calibri"/>
+              </a:rPr>
+              <a:t>Cdk1/Aurora B release Sororin from PDS5 and activate WAPL (Nishiyama 2013);  the PDS5B–FGF contact is a short linear motif (Ouyang 2016);  the C-terminal domain is required for cohesion (Wu 2011).</a:t>
+            </a:r>
+            <a:endParaRPr lang="en-US" sz="1000" b="0" u="none" strike="noStrike" dirty="0">
+              <a:solidFill>
+                <a:srgbClr val="000000"/>
+              </a:solidFill>
+              <a:effectLst/>
+              <a:uFillTx/>
+              <a:latin typeface="Arial"/>
+            </a:endParaRPr>
+          </a:p>
+        </p:txBody>
+      </p:sp>
+    </p:spTree>
+  </p:cSld>
+  <p:clrMapOvr>
+    <a:masterClrMapping/>
+  </p:clrMapOvr>
+  <mc:AlternateContent xmlns:mc="http://schemas.openxmlformats.org/markup-compatibility/2006">
+    <mc:Choice xmlns:p14="http://schemas.microsoft.com/office/powerpoint/2010/main" Requires="p14">
+      <p:transition spd="slow" p14:dur="3400">
+        <p14:reveal/>
+      </p:transition>
+    </mc:Choice>
+    <mc:Fallback>
+      <p:transition spd="slow">
+        <p:fade/>
+      </p:transition>
+    </mc:Fallback>
+  </mc:AlternateContent>
+  <p:timing>
+    <p:tnLst>
+      <p:par>
+        <p:cTn id="1" dur="indefinite" restart="never" nodeType="tmRoot">
+          <p:childTnLst>
+            <p:seq concurrent="1" nextAc="seek">
+              <p:cTn id="2" dur="indefinite" nodeType="mainSeq">
+                <p:childTnLst>
+                  <p:par>
+                    <p:cTn id="3" fill="hold">
+                      <p:stCondLst>
+                        <p:cond delay="indefinite"/>
+                      </p:stCondLst>
+                      <p:childTnLst>
+                        <p:par>
+                          <p:cTn id="4" fill="hold">
+                            <p:stCondLst>
+                              <p:cond delay="0"/>
+                            </p:stCondLst>
+                            <p:childTnLst>
+                              <p:par>
+                                <p:cTn id="5" presetID="10" presetClass="entr" presetSubtype="0" fill="hold" grpId="0" nodeType="clickEffect">
+                                  <p:stCondLst>
+                                    <p:cond delay="0"/>
+                                  </p:stCondLst>
+                                  <p:childTnLst>
+                                    <p:set>
+                                      <p:cBhvr>
+                                        <p:cTn id="6" dur="1" fill="hold">
+                                          <p:stCondLst>
+                                            <p:cond delay="0"/>
+                                          </p:stCondLst>
+                                        </p:cTn>
+                                        <p:tgtEl>
+                                          <p:spTgt spid="11"/>
+                                        </p:tgtEl>
+                                        <p:attrNameLst>
+                                          <p:attrName>style.visibility</p:attrName>
+                                        </p:attrNameLst>
+                                      </p:cBhvr>
+                                      <p:to>
+                                        <p:strVal val="visible"/>
+                                      </p:to>
+                                    </p:set>
+                                    <p:animEffect transition="in" filter="fade">
+                                      <p:cBhvr>
+                                        <p:cTn id="7" dur="500"/>
+                                        <p:tgtEl>
+                                          <p:spTgt spid="11"/>
+                                        </p:tgtEl>
+                                      </p:cBhvr>
+                                    </p:animEffect>
+                                  </p:childTnLst>
+                                </p:cTn>
+                              </p:par>
+                            </p:childTnLst>
+                          </p:cTn>
+                        </p:par>
+                      </p:childTnLst>
+                    </p:cTn>
+                  </p:par>
+                  <p:par>
+                    <p:cTn id="8" fill="hold">
+                      <p:stCondLst>
+                        <p:cond delay="indefinite"/>
+                      </p:stCondLst>
+                      <p:childTnLst>
+                        <p:par>
+                          <p:cTn id="9" fill="hold">
+                            <p:stCondLst>
+                              <p:cond delay="0"/>
+                            </p:stCondLst>
+                            <p:childTnLst>
+                              <p:par>
+                                <p:cTn id="10" presetID="10" presetClass="entr" presetSubtype="0" fill="hold" grpId="0" nodeType="clickEffect">
+                                  <p:stCondLst>
+                                    <p:cond delay="0"/>
+                                  </p:stCondLst>
+                                  <p:childTnLst>
+                                    <p:set>
+                                      <p:cBhvr>
+                                        <p:cTn id="11" dur="1" fill="hold">
+                                          <p:stCondLst>
+                                            <p:cond delay="0"/>
+                                          </p:stCondLst>
+                                        </p:cTn>
+                                        <p:tgtEl>
+                                          <p:spTgt spid="12">
+                                            <p:bg/>
+                                          </p:spTgt>
+                                        </p:tgtEl>
+                                        <p:attrNameLst>
+                                          <p:attrName>style.visibility</p:attrName>
+                                        </p:attrNameLst>
+                                      </p:cBhvr>
+                                      <p:to>
+                                        <p:strVal val="visible"/>
+                                      </p:to>
+                                    </p:set>
+                                    <p:animEffect transition="in" filter="fade">
+                                      <p:cBhvr>
+                                        <p:cTn id="12" dur="500"/>
+                                        <p:tgtEl>
+                                          <p:spTgt spid="12">
+                                            <p:bg/>
+                                          </p:spTgt>
+                                        </p:tgtEl>
+                                      </p:cBhvr>
+                                    </p:animEffect>
+                                  </p:childTnLst>
+                                </p:cTn>
+                              </p:par>
+                              <p:par>
+                                <p:cTn id="13" presetID="10" presetClass="entr" presetSubtype="0" fill="hold" grpId="0" nodeType="withEffect">
+                                  <p:stCondLst>
+                                    <p:cond delay="0"/>
+                                  </p:stCondLst>
+                                  <p:childTnLst>
+                                    <p:set>
+                                      <p:cBhvr>
+                                        <p:cTn id="14" dur="1" fill="hold">
+                                          <p:stCondLst>
+                                            <p:cond delay="0"/>
+                                          </p:stCondLst>
+                                        </p:cTn>
+                                        <p:tgtEl>
+                                          <p:spTgt spid="12">
+                                            <p:txEl>
+                                              <p:pRg st="0" end="0"/>
+                                            </p:txEl>
+                                          </p:spTgt>
+                                        </p:tgtEl>
+                                        <p:attrNameLst>
+                                          <p:attrName>style.visibility</p:attrName>
+                                        </p:attrNameLst>
+                                      </p:cBhvr>
+                                      <p:to>
+                                        <p:strVal val="visible"/>
+                                      </p:to>
+                                    </p:set>
+                                    <p:animEffect transition="in" filter="fade">
+                                      <p:cBhvr>
+                                        <p:cTn id="15" dur="500"/>
+                                        <p:tgtEl>
+                                          <p:spTgt spid="12">
+                                            <p:txEl>
+                                              <p:pRg st="0" end="0"/>
+                                            </p:txEl>
+                                          </p:spTgt>
+                                        </p:tgtEl>
+                                      </p:cBhvr>
+                                    </p:animEffect>
+                                  </p:childTnLst>
+                                </p:cTn>
+                              </p:par>
+                              <p:par>
+                                <p:cTn id="16" presetID="10" presetClass="entr" presetSubtype="0" fill="hold" grpId="0" nodeType="withEffect">
+                                  <p:stCondLst>
+                                    <p:cond delay="0"/>
+                                  </p:stCondLst>
+                                  <p:childTnLst>
+                                    <p:set>
+                                      <p:cBhvr>
+                                        <p:cTn id="17" dur="1" fill="hold">
+                                          <p:stCondLst>
+                                            <p:cond delay="0"/>
+                                          </p:stCondLst>
+                                        </p:cTn>
+                                        <p:tgtEl>
+                                          <p:spTgt spid="12">
+                                            <p:txEl>
+                                              <p:pRg st="2" end="2"/>
+                                            </p:txEl>
+                                          </p:spTgt>
+                                        </p:tgtEl>
+                                        <p:attrNameLst>
+                                          <p:attrName>style.visibility</p:attrName>
+                                        </p:attrNameLst>
+                                      </p:cBhvr>
+                                      <p:to>
+                                        <p:strVal val="visible"/>
+                                      </p:to>
+                                    </p:set>
+                                    <p:animEffect transition="in" filter="fade">
+                                      <p:cBhvr>
+                                        <p:cTn id="18" dur="500"/>
+                                        <p:tgtEl>
+                                          <p:spTgt spid="12">
+                                            <p:txEl>
+                                              <p:pRg st="2" end="2"/>
+                                            </p:txEl>
+                                          </p:spTgt>
+                                        </p:tgtEl>
+                                      </p:cBhvr>
+                                    </p:animEffect>
+                                  </p:childTnLst>
+                                </p:cTn>
+                              </p:par>
+                              <p:par>
+                                <p:cTn id="19" presetID="10" presetClass="entr" presetSubtype="0" fill="hold" grpId="0" nodeType="withEffect">
+                                  <p:stCondLst>
+                                    <p:cond delay="0"/>
+                                  </p:stCondLst>
+                                  <p:childTnLst>
+                                    <p:set>
+                                      <p:cBhvr>
+                                        <p:cTn id="20" dur="1" fill="hold">
+                                          <p:stCondLst>
+                                            <p:cond delay="0"/>
+                                          </p:stCondLst>
+                                        </p:cTn>
+                                        <p:tgtEl>
+                                          <p:spTgt spid="13">
+                                            <p:bg/>
+                                          </p:spTgt>
+                                        </p:tgtEl>
+                                        <p:attrNameLst>
+                                          <p:attrName>style.visibility</p:attrName>
+                                        </p:attrNameLst>
+                                      </p:cBhvr>
+                                      <p:to>
+                                        <p:strVal val="visible"/>
+                                      </p:to>
+                                    </p:set>
+                                    <p:animEffect transition="in" filter="fade">
+                                      <p:cBhvr>
+                                        <p:cTn id="21" dur="500"/>
+                                        <p:tgtEl>
+                                          <p:spTgt spid="13">
+                                            <p:bg/>
+                                          </p:spTgt>
+                                        </p:tgtEl>
+                                      </p:cBhvr>
+                                    </p:animEffect>
+                                  </p:childTnLst>
+                                </p:cTn>
+                              </p:par>
+                              <p:par>
+                                <p:cTn id="22" presetID="10" presetClass="entr" presetSubtype="0" fill="hold" grpId="0" nodeType="withEffect">
+                                  <p:stCondLst>
+                                    <p:cond delay="0"/>
+                                  </p:stCondLst>
+                                  <p:childTnLst>
+                                    <p:set>
+                                      <p:cBhvr>
+                                        <p:cTn id="23" dur="1" fill="hold">
+                                          <p:stCondLst>
+                                            <p:cond delay="0"/>
+                                          </p:stCondLst>
+                                        </p:cTn>
+                                        <p:tgtEl>
+                                          <p:spTgt spid="13">
+                                            <p:txEl>
+                                              <p:pRg st="0" end="0"/>
+                                            </p:txEl>
+                                          </p:spTgt>
+                                        </p:tgtEl>
+                                        <p:attrNameLst>
+                                          <p:attrName>style.visibility</p:attrName>
+                                        </p:attrNameLst>
+                                      </p:cBhvr>
+                                      <p:to>
+                                        <p:strVal val="visible"/>
+                                      </p:to>
+                                    </p:set>
+                                    <p:animEffect transition="in" filter="fade">
+                                      <p:cBhvr>
+                                        <p:cTn id="24" dur="500"/>
+                                        <p:tgtEl>
+                                          <p:spTgt spid="13">
+                                            <p:txEl>
+                                              <p:pRg st="0" end="0"/>
+                                            </p:txEl>
+                                          </p:spTgt>
+                                        </p:tgtEl>
+                                      </p:cBhvr>
+                                    </p:animEffect>
+                                  </p:childTnLst>
+                                </p:cTn>
+                              </p:par>
+                              <p:par>
+                                <p:cTn id="25" presetID="10" presetClass="entr" presetSubtype="0" fill="hold" grpId="0" nodeType="withEffect">
+                                  <p:stCondLst>
+                                    <p:cond delay="0"/>
+                                  </p:stCondLst>
+                                  <p:childTnLst>
+                                    <p:set>
+                                      <p:cBhvr>
+                                        <p:cTn id="26" dur="1" fill="hold">
+                                          <p:stCondLst>
+                                            <p:cond delay="0"/>
+                                          </p:stCondLst>
+                                        </p:cTn>
+                                        <p:tgtEl>
+                                          <p:spTgt spid="13">
+                                            <p:txEl>
+                                              <p:pRg st="2" end="2"/>
+                                            </p:txEl>
+                                          </p:spTgt>
+                                        </p:tgtEl>
+                                        <p:attrNameLst>
+                                          <p:attrName>style.visibility</p:attrName>
+                                        </p:attrNameLst>
+                                      </p:cBhvr>
+                                      <p:to>
+                                        <p:strVal val="visible"/>
+                                      </p:to>
+                                    </p:set>
+                                    <p:animEffect transition="in" filter="fade">
+                                      <p:cBhvr>
+                                        <p:cTn id="27" dur="500"/>
+                                        <p:tgtEl>
+                                          <p:spTgt spid="13">
+                                            <p:txEl>
+                                              <p:pRg st="2" end="2"/>
+                                            </p:txEl>
+                                          </p:spTgt>
+                                        </p:tgtEl>
+                                      </p:cBhvr>
+                                    </p:animEffect>
+                                  </p:childTnLst>
+                                </p:cTn>
+                              </p:par>
+                              <p:par>
+                                <p:cTn id="28" presetID="10" presetClass="entr" presetSubtype="0" fill="hold" grpId="0" nodeType="withEffect">
+                                  <p:stCondLst>
+                                    <p:cond delay="0"/>
+                                  </p:stCondLst>
+                                  <p:childTnLst>
+                                    <p:set>
+                                      <p:cBhvr>
+                                        <p:cTn id="29" dur="1" fill="hold">
+                                          <p:stCondLst>
+                                            <p:cond delay="0"/>
+                                          </p:stCondLst>
+                                        </p:cTn>
+                                        <p:tgtEl>
+                                          <p:spTgt spid="14">
+                                            <p:bg/>
+                                          </p:spTgt>
+                                        </p:tgtEl>
+                                        <p:attrNameLst>
+                                          <p:attrName>style.visibility</p:attrName>
+                                        </p:attrNameLst>
+                                      </p:cBhvr>
+                                      <p:to>
+                                        <p:strVal val="visible"/>
+                                      </p:to>
+                                    </p:set>
+                                    <p:animEffect transition="in" filter="fade">
+                                      <p:cBhvr>
+                                        <p:cTn id="30" dur="500"/>
+                                        <p:tgtEl>
+                                          <p:spTgt spid="14">
+                                            <p:bg/>
+                                          </p:spTgt>
+                                        </p:tgtEl>
+                                      </p:cBhvr>
+                                    </p:animEffect>
+                                  </p:childTnLst>
+                                </p:cTn>
+                              </p:par>
+                              <p:par>
+                                <p:cTn id="31" presetID="10" presetClass="entr" presetSubtype="0" fill="hold" grpId="0" nodeType="withEffect">
+                                  <p:stCondLst>
+                                    <p:cond delay="0"/>
+                                  </p:stCondLst>
+                                  <p:childTnLst>
+                                    <p:set>
+                                      <p:cBhvr>
+                                        <p:cTn id="32" dur="1" fill="hold">
+                                          <p:stCondLst>
+                                            <p:cond delay="0"/>
+                                          </p:stCondLst>
+                                        </p:cTn>
+                                        <p:tgtEl>
+                                          <p:spTgt spid="14">
+                                            <p:txEl>
+                                              <p:pRg st="0" end="0"/>
+                                            </p:txEl>
+                                          </p:spTgt>
+                                        </p:tgtEl>
+                                        <p:attrNameLst>
+                                          <p:attrName>style.visibility</p:attrName>
+                                        </p:attrNameLst>
+                                      </p:cBhvr>
+                                      <p:to>
+                                        <p:strVal val="visible"/>
+                                      </p:to>
+                                    </p:set>
+                                    <p:animEffect transition="in" filter="fade">
+                                      <p:cBhvr>
+                                        <p:cTn id="33" dur="500"/>
+                                        <p:tgtEl>
+                                          <p:spTgt spid="14">
+                                            <p:txEl>
+                                              <p:pRg st="0" end="0"/>
+                                            </p:txEl>
+                                          </p:spTgt>
+                                        </p:tgtEl>
+                                      </p:cBhvr>
+                                    </p:animEffect>
+                                  </p:childTnLst>
+                                </p:cTn>
+                              </p:par>
+                              <p:par>
+                                <p:cTn id="34" presetID="10" presetClass="entr" presetSubtype="0" fill="hold" grpId="0" nodeType="withEffect">
+                                  <p:stCondLst>
+                                    <p:cond delay="0"/>
+                                  </p:stCondLst>
+                                  <p:childTnLst>
+                                    <p:set>
+                                      <p:cBhvr>
+                                        <p:cTn id="35" dur="1" fill="hold">
+                                          <p:stCondLst>
+                                            <p:cond delay="0"/>
+                                          </p:stCondLst>
+                                        </p:cTn>
+                                        <p:tgtEl>
+                                          <p:spTgt spid="14">
+                                            <p:txEl>
+                                              <p:pRg st="2" end="2"/>
+                                            </p:txEl>
+                                          </p:spTgt>
+                                        </p:tgtEl>
+                                        <p:attrNameLst>
+                                          <p:attrName>style.visibility</p:attrName>
+                                        </p:attrNameLst>
+                                      </p:cBhvr>
+                                      <p:to>
+                                        <p:strVal val="visible"/>
+                                      </p:to>
+                                    </p:set>
+                                    <p:animEffect transition="in" filter="fade">
+                                      <p:cBhvr>
+                                        <p:cTn id="36" dur="500"/>
+                                        <p:tgtEl>
+                                          <p:spTgt spid="14">
+                                            <p:txEl>
+                                              <p:pRg st="2" end="2"/>
+                                            </p:txEl>
+                                          </p:spTgt>
+                                        </p:tgtEl>
+                                      </p:cBhvr>
+                                    </p:animEffect>
+                                  </p:childTnLst>
+                                </p:cTn>
+                              </p:par>
+                              <p:par>
+                                <p:cTn id="37" presetID="10" presetClass="entr" presetSubtype="0" fill="hold" grpId="0" nodeType="withEffect">
+                                  <p:stCondLst>
+                                    <p:cond delay="0"/>
+                                  </p:stCondLst>
+                                  <p:childTnLst>
+                                    <p:set>
+                                      <p:cBhvr>
+                                        <p:cTn id="38" dur="1" fill="hold">
+                                          <p:stCondLst>
+                                            <p:cond delay="0"/>
+                                          </p:stCondLst>
+                                        </p:cTn>
+                                        <p:tgtEl>
+                                          <p:spTgt spid="15">
+                                            <p:bg/>
+                                          </p:spTgt>
+                                        </p:tgtEl>
+                                        <p:attrNameLst>
+                                          <p:attrName>style.visibility</p:attrName>
+                                        </p:attrNameLst>
+                                      </p:cBhvr>
+                                      <p:to>
+                                        <p:strVal val="visible"/>
+                                      </p:to>
+                                    </p:set>
+                                    <p:animEffect transition="in" filter="fade">
+                                      <p:cBhvr>
+                                        <p:cTn id="39" dur="500"/>
+                                        <p:tgtEl>
+                                          <p:spTgt spid="15">
+                                            <p:bg/>
+                                          </p:spTgt>
+                                        </p:tgtEl>
+                                      </p:cBhvr>
+                                    </p:animEffect>
+                                  </p:childTnLst>
+                                </p:cTn>
+                              </p:par>
+                              <p:par>
+                                <p:cTn id="40" presetID="10" presetClass="entr" presetSubtype="0" fill="hold" grpId="0" nodeType="withEffect">
+                                  <p:stCondLst>
+                                    <p:cond delay="0"/>
+                                  </p:stCondLst>
+                                  <p:childTnLst>
+                                    <p:set>
+                                      <p:cBhvr>
+                                        <p:cTn id="41" dur="1" fill="hold">
+                                          <p:stCondLst>
+                                            <p:cond delay="0"/>
+                                          </p:stCondLst>
+                                        </p:cTn>
+                                        <p:tgtEl>
+                                          <p:spTgt spid="15">
+                                            <p:txEl>
+                                              <p:pRg st="0" end="0"/>
+                                            </p:txEl>
+                                          </p:spTgt>
+                                        </p:tgtEl>
+                                        <p:attrNameLst>
+                                          <p:attrName>style.visibility</p:attrName>
+                                        </p:attrNameLst>
+                                      </p:cBhvr>
+                                      <p:to>
+                                        <p:strVal val="visible"/>
+                                      </p:to>
+                                    </p:set>
+                                    <p:animEffect transition="in" filter="fade">
+                                      <p:cBhvr>
+                                        <p:cTn id="42" dur="500"/>
+                                        <p:tgtEl>
+                                          <p:spTgt spid="15">
+                                            <p:txEl>
+                                              <p:pRg st="0" end="0"/>
+                                            </p:txEl>
+                                          </p:spTgt>
+                                        </p:tgtEl>
+                                      </p:cBhvr>
+                                    </p:animEffect>
+                                  </p:childTnLst>
+                                </p:cTn>
+                              </p:par>
+                              <p:par>
+                                <p:cTn id="43" presetID="10" presetClass="entr" presetSubtype="0" fill="hold" grpId="0" nodeType="withEffect">
+                                  <p:stCondLst>
+                                    <p:cond delay="0"/>
+                                  </p:stCondLst>
+                                  <p:childTnLst>
+                                    <p:set>
+                                      <p:cBhvr>
+                                        <p:cTn id="44" dur="1" fill="hold">
+                                          <p:stCondLst>
+                                            <p:cond delay="0"/>
+                                          </p:stCondLst>
+                                        </p:cTn>
+                                        <p:tgtEl>
+                                          <p:spTgt spid="15">
+                                            <p:txEl>
+                                              <p:pRg st="2" end="2"/>
+                                            </p:txEl>
+                                          </p:spTgt>
+                                        </p:tgtEl>
+                                        <p:attrNameLst>
+                                          <p:attrName>style.visibility</p:attrName>
+                                        </p:attrNameLst>
+                                      </p:cBhvr>
+                                      <p:to>
+                                        <p:strVal val="visible"/>
+                                      </p:to>
+                                    </p:set>
+                                    <p:animEffect transition="in" filter="fade">
+                                      <p:cBhvr>
+                                        <p:cTn id="45" dur="500"/>
+                                        <p:tgtEl>
+                                          <p:spTgt spid="15">
+                                            <p:txEl>
+                                              <p:pRg st="2" end="2"/>
+                                            </p:txEl>
+                                          </p:spTgt>
+                                        </p:tgtEl>
+                                      </p:cBhvr>
+                                    </p:animEffect>
+                                  </p:childTnLst>
+                                </p:cTn>
+                              </p:par>
+                            </p:childTnLst>
+                          </p:cTn>
+                        </p:par>
+                      </p:childTnLst>
+                    </p:cTn>
+                  </p:par>
+                  <p:par>
+                    <p:cTn id="46" fill="hold">
+                      <p:stCondLst>
+                        <p:cond delay="indefinite"/>
+                      </p:stCondLst>
+                      <p:childTnLst>
+                        <p:par>
+                          <p:cTn id="47" fill="hold">
+                            <p:stCondLst>
+                              <p:cond delay="0"/>
+                            </p:stCondLst>
+                            <p:childTnLst>
+                              <p:par>
+                                <p:cTn id="48" presetID="10" presetClass="entr" presetSubtype="0" fill="hold" grpId="0" nodeType="clickEffect">
+                                  <p:stCondLst>
+                                    <p:cond delay="0"/>
+                                  </p:stCondLst>
+                                  <p:childTnLst>
+                                    <p:set>
+                                      <p:cBhvr>
+                                        <p:cTn id="49" dur="1" fill="hold">
+                                          <p:stCondLst>
+                                            <p:cond delay="0"/>
+                                          </p:stCondLst>
+                                        </p:cTn>
+                                        <p:tgtEl>
+                                          <p:spTgt spid="16"/>
+                                        </p:tgtEl>
+                                        <p:attrNameLst>
+                                          <p:attrName>style.visibility</p:attrName>
+                                        </p:attrNameLst>
+                                      </p:cBhvr>
+                                      <p:to>
+                                        <p:strVal val="visible"/>
+                                      </p:to>
+                                    </p:set>
+                                    <p:animEffect transition="in" filter="fade">
+                                      <p:cBhvr>
+                                        <p:cTn id="50" dur="500"/>
+                                        <p:tgtEl>
+                                          <p:spTgt spid="16"/>
+                                        </p:tgtEl>
+                                      </p:cBhvr>
+                                    </p:animEffect>
+                                  </p:childTnLst>
+                                </p:cTn>
+                              </p:par>
+                            </p:childTnLst>
+                          </p:cTn>
+                        </p:par>
+                      </p:childTnLst>
+                    </p:cTn>
+                  </p:par>
+                  <p:par>
+                    <p:cTn id="51" fill="hold">
+                      <p:stCondLst>
+                        <p:cond delay="indefinite"/>
+                      </p:stCondLst>
+                      <p:childTnLst>
+                        <p:par>
+                          <p:cTn id="52" fill="hold">
+                            <p:stCondLst>
+                              <p:cond delay="0"/>
+                            </p:stCondLst>
+                            <p:childTnLst>
+                              <p:par>
+                                <p:cTn id="53" presetID="10" presetClass="entr" presetSubtype="0" fill="hold" grpId="0" nodeType="clickEffect">
+                                  <p:stCondLst>
+                                    <p:cond delay="0"/>
+                                  </p:stCondLst>
+                                  <p:childTnLst>
+                                    <p:set>
+                                      <p:cBhvr>
+                                        <p:cTn id="54" dur="1" fill="hold">
+                                          <p:stCondLst>
+                                            <p:cond delay="0"/>
+                                          </p:stCondLst>
+                                        </p:cTn>
+                                        <p:tgtEl>
+                                          <p:spTgt spid="17"/>
+                                        </p:tgtEl>
+                                        <p:attrNameLst>
+                                          <p:attrName>style.visibility</p:attrName>
+                                        </p:attrNameLst>
+                                      </p:cBhvr>
+                                      <p:to>
+                                        <p:strVal val="visible"/>
+                                      </p:to>
+                                    </p:set>
+                                    <p:animEffect transition="in" filter="fade">
+                                      <p:cBhvr>
+                                        <p:cTn id="55" dur="500"/>
+                                        <p:tgtEl>
+                                          <p:spTgt spid="17"/>
+                                        </p:tgtEl>
+                                      </p:cBhvr>
+                                    </p:animEffect>
+                                  </p:childTnLst>
+                                </p:cTn>
+                              </p:par>
+                            </p:childTnLst>
+                          </p:cTn>
+                        </p:par>
+                      </p:childTnLst>
+                    </p:cTn>
+                  </p:par>
+                </p:childTnLst>
+              </p:cTn>
+              <p:prevCondLst>
+                <p:cond evt="onPrev" delay="0">
+                  <p:tgtEl>
+                    <p:sldTgt/>
+                  </p:tgtEl>
+                </p:cond>
+              </p:prevCondLst>
+              <p:nextCondLst>
+                <p:cond evt="onNext" delay="0">
+                  <p:tgtEl>
+                    <p:sldTgt/>
+                  </p:tgtEl>
+                </p:cond>
+              </p:nextCondLst>
+            </p:seq>
+          </p:childTnLst>
+        </p:cTn>
+      </p:par>
+    </p:tnLst>
+    <p:bldLst>
+      <p:bldP spid="11" grpId="0" animBg="1"/>
+      <p:bldP spid="12" grpId="0" build="allAtOnce" animBg="1"/>
+      <p:bldP spid="13" grpId="0" build="allAtOnce" animBg="1"/>
+      <p:bldP spid="14" grpId="0" build="allAtOnce" animBg="1"/>
+      <p:bldP spid="15" grpId="0" build="allAtOnce" animBg="1"/>
+      <p:bldP spid="16" grpId="0" animBg="1"/>
+      <p:bldP spid="17" grpId="0"/>
+    </p:bldLst>
+  </p:timing>
+</p:sld>
+</file>
+
+<file path=ppt/slides/slide15.xml><?xml version="1.0" encoding="utf-8"?>
+<p:sld xmlns:a="http://schemas.openxmlformats.org/drawingml/2006/main" xmlns:r="http://schemas.openxmlformats.org/officeDocument/2006/relationships" xmlns:p="http://schemas.openxmlformats.org/presentationml/2006/main">
+  <p:cSld>
+    <p:spTree>
+      <p:nvGrpSpPr>
+        <p:cNvPr id="1" name=""/>
+        <p:cNvGrpSpPr/>
+        <p:nvPr/>
+      </p:nvGrpSpPr>
+      <p:grpSpPr>
+        <a:xfrm>
+          <a:off x="0" y="0"/>
+          <a:ext cx="0" cy="0"/>
+          <a:chOff x="0" y="0"/>
+          <a:chExt cx="0" cy="0"/>
+        </a:xfrm>
+      </p:grpSpPr>
+      <p:sp>
+        <p:nvSpPr>
+          <p:cNvPr id="8" name="Text 0"/>
+          <p:cNvSpPr/>
+          <p:nvPr/>
+        </p:nvSpPr>
+        <p:spPr>
+          <a:xfrm>
+            <a:off x="274320" y="137160"/>
+            <a:ext cx="11639880" cy="456840"/>
+          </a:xfrm>
+          <a:prstGeom prst="rect">
+            <a:avLst/>
+          </a:prstGeom>
+          <a:noFill/>
+          <a:ln w="0">
+            <a:noFill/>
+          </a:ln>
+        </p:spPr>
+        <p:style>
+          <a:lnRef idx="0">
+            <a:scrgbClr r="0" g="0" b="0"/>
+          </a:lnRef>
+          <a:fillRef idx="0">
+            <a:scrgbClr r="0" g="0" b="0"/>
+          </a:fillRef>
+          <a:effectRef idx="0">
+            <a:scrgbClr r="0" g="0" b="0"/>
+          </a:effectRef>
+          <a:fontRef idx="minor"/>
+        </p:style>
+        <p:txBody>
+          <a:bodyPr lIns="90000" tIns="45000" rIns="90000" bIns="45000" anchor="ctr">
+            <a:noAutofit/>
+          </a:bodyPr>
+          <a:lstStyle/>
+          <a:p>
+            <a:pPr algn="ctr" defTabSz="914400">
+              <a:lnSpc>
+                <a:spcPct val="100000"/>
+              </a:lnSpc>
+              <a:tabLst>
+                <a:tab pos="0" algn="l"/>
+              </a:tabLst>
+            </a:pPr>
+            <a:r>
+              <a:rPr lang="en-US" sz="2000" b="1" u="none" strike="noStrike">
+                <a:solidFill>
+                  <a:srgbClr val="2C3E50"/>
+                </a:solidFill>
+                <a:effectLst/>
+                <a:uFillTx/>
+                <a:latin typeface="Calibri"/>
+                <a:ea typeface="Calibri"/>
+              </a:rPr>
+              <a:t>Future directions — testing the predictions</a:t>
+            </a:r>
+            <a:endParaRPr lang="en-US" sz="2000" b="0" u="none" strike="noStrike">
+              <a:solidFill>
+                <a:srgbClr val="000000"/>
+              </a:solidFill>
+              <a:effectLst/>
+              <a:uFillTx/>
+              <a:latin typeface="Arial"/>
+            </a:endParaRPr>
+          </a:p>
+        </p:txBody>
+      </p:sp>
+      <p:sp>
+        <p:nvSpPr>
+          <p:cNvPr id="9" name="Text 1"/>
+          <p:cNvSpPr/>
+          <p:nvPr/>
+        </p:nvSpPr>
+        <p:spPr>
+          <a:xfrm>
+            <a:off x="307031" y="660173"/>
+            <a:ext cx="11548440" cy="351333"/>
+          </a:xfrm>
+          <a:prstGeom prst="roundRect">
+            <a:avLst>
+              <a:gd name="adj" fmla="val 5000"/>
+            </a:avLst>
+          </a:prstGeom>
+          <a:solidFill>
+            <a:srgbClr val="2C3E50"/>
+          </a:solidFill>
+          <a:ln w="0">
+            <a:noFill/>
+          </a:ln>
+        </p:spPr>
+        <p:style>
+          <a:lnRef idx="0">
+            <a:scrgbClr r="0" g="0" b="0"/>
+          </a:lnRef>
+          <a:fillRef idx="0">
+            <a:scrgbClr r="0" g="0" b="0"/>
+          </a:fillRef>
+          <a:effectRef idx="0">
+            <a:scrgbClr r="0" g="0" b="0"/>
+          </a:effectRef>
+          <a:fontRef idx="minor"/>
+        </p:style>
+        <p:txBody>
+          <a:bodyPr lIns="90000" tIns="45000" rIns="90000" bIns="45000" anchor="ctr">
+            <a:noAutofit/>
+          </a:bodyPr>
+          <a:lstStyle/>
+          <a:p>
+            <a:pPr algn="ctr" defTabSz="914400">
+              <a:lnSpc>
+                <a:spcPct val="105000"/>
+              </a:lnSpc>
+              <a:tabLst>
+                <a:tab pos="0" algn="l"/>
+              </a:tabLst>
+            </a:pPr>
+            <a:r>
+              <a:rPr lang="en-US" sz="1350" b="1" u="none" strike="noStrike" dirty="0">
+                <a:solidFill>
+                  <a:srgbClr val="FFFFFF"/>
+                </a:solidFill>
+                <a:effectLst/>
+                <a:uFillTx/>
+                <a:latin typeface="Calibri"/>
+                <a:ea typeface="Calibri"/>
+              </a:rPr>
+              <a:t>This is a computational study — everything here is a prediction.  </a:t>
+            </a:r>
+            <a:r>
+              <a:rPr lang="en-US" sz="1350" b="0" u="none" strike="noStrike" dirty="0">
+                <a:solidFill>
+                  <a:srgbClr val="FFFFFF"/>
+                </a:solidFill>
+                <a:effectLst/>
+                <a:uFillTx/>
+                <a:latin typeface="Calibri"/>
+                <a:ea typeface="Calibri"/>
+              </a:rPr>
+              <a:t>The natural next step is to test those predictions in the lab, rather than only predicting them.</a:t>
+            </a:r>
+            <a:endParaRPr lang="en-US" sz="1350" b="0" u="none" strike="noStrike" dirty="0">
+              <a:solidFill>
+                <a:srgbClr val="FFFFFF"/>
+              </a:solidFill>
+              <a:effectLst/>
+              <a:uFillTx/>
+              <a:latin typeface="Arial"/>
+            </a:endParaRPr>
+          </a:p>
+        </p:txBody>
+      </p:sp>
+      <p:sp>
+        <p:nvSpPr>
+          <p:cNvPr id="10" name="Text 2"/>
+          <p:cNvSpPr/>
+          <p:nvPr/>
+        </p:nvSpPr>
+        <p:spPr>
+          <a:xfrm>
+            <a:off x="320039" y="1142668"/>
+            <a:ext cx="3140915" cy="5197172"/>
+          </a:xfrm>
+          <a:prstGeom prst="roundRect">
+            <a:avLst>
+              <a:gd name="adj" fmla="val 1493"/>
+            </a:avLst>
+          </a:prstGeom>
+          <a:solidFill>
+            <a:srgbClr val="DBE9F5"/>
+          </a:solidFill>
+          <a:ln w="19050">
+            <a:solidFill>
+              <a:srgbClr val="2166AC"/>
+            </a:solidFill>
+            <a:round/>
+          </a:ln>
+        </p:spPr>
+        <p:style>
+          <a:lnRef idx="0">
+            <a:scrgbClr r="0" g="0" b="0"/>
+          </a:lnRef>
+          <a:fillRef idx="0">
+            <a:scrgbClr r="0" g="0" b="0"/>
+          </a:fillRef>
+          <a:effectRef idx="0">
+            <a:scrgbClr r="0" g="0" b="0"/>
+          </a:effectRef>
+          <a:fontRef idx="minor"/>
+        </p:style>
+        <p:txBody>
+          <a:bodyPr lIns="177840" tIns="177840" rIns="177840" bIns="177840" anchor="t">
+            <a:noAutofit/>
+          </a:bodyPr>
+          <a:lstStyle/>
+          <a:p>
+            <a:r>
+              <a:rPr lang="en-US" sz="1400" b="1" u="none" strike="noStrike" dirty="0">
+                <a:solidFill>
+                  <a:srgbClr val="2166AC"/>
+                </a:solidFill>
+                <a:effectLst/>
+                <a:uFillTx/>
+                <a:latin typeface="Calibri"/>
+                <a:ea typeface="Calibri"/>
+              </a:rPr>
+              <a:t>1 · See it directly</a:t>
+            </a:r>
+            <a:endParaRPr lang="en-US" sz="1400" b="0" u="none" strike="noStrike" dirty="0">
+              <a:solidFill>
+                <a:srgbClr val="000000"/>
+              </a:solidFill>
+              <a:effectLst/>
+              <a:uFillTx/>
+              <a:latin typeface="Arial"/>
+            </a:endParaRPr>
+          </a:p>
+          <a:p>
+            <a:pPr algn="just" defTabSz="914400">
+              <a:lnSpc>
+                <a:spcPct val="105000"/>
+              </a:lnSpc>
+              <a:tabLst>
+                <a:tab pos="0" algn="l"/>
+              </a:tabLst>
+            </a:pPr>
+            <a:r>
+              <a:rPr lang="en-US" sz="1200" b="0" u="none" strike="noStrike" dirty="0">
+                <a:solidFill>
+                  <a:srgbClr val="2C3E50"/>
+                </a:solidFill>
+                <a:effectLst/>
+                <a:uFillTx/>
+                <a:latin typeface="Calibri"/>
+                <a:ea typeface="Calibri"/>
+              </a:rPr>
+              <a:t>Solve the real 3-D structure of Sororin bound to its partner PDS5, to confirm with your own eyes that it stays disordered when it binds — instead of only predicting it.</a:t>
+            </a:r>
+            <a:endParaRPr lang="en-US" sz="1200" b="0" u="none" strike="noStrike" dirty="0">
+              <a:solidFill>
+                <a:srgbClr val="000000"/>
+              </a:solidFill>
+              <a:effectLst/>
+              <a:uFillTx/>
+              <a:latin typeface="Arial"/>
+            </a:endParaRPr>
+          </a:p>
+        </p:txBody>
+      </p:sp>
+      <p:sp>
+        <p:nvSpPr>
+          <p:cNvPr id="11" name="Text 3"/>
+          <p:cNvSpPr/>
+          <p:nvPr/>
+        </p:nvSpPr>
+        <p:spPr>
+          <a:xfrm>
+            <a:off x="3549445" y="1142668"/>
+            <a:ext cx="5063613" cy="5197172"/>
+          </a:xfrm>
+          <a:prstGeom prst="roundRect">
+            <a:avLst>
+              <a:gd name="adj" fmla="val 1493"/>
+            </a:avLst>
+          </a:prstGeom>
+          <a:solidFill>
+            <a:srgbClr val="F1E7F3"/>
+          </a:solidFill>
+          <a:ln w="19050">
+            <a:solidFill>
+              <a:srgbClr val="762A83"/>
+            </a:solidFill>
+            <a:round/>
+          </a:ln>
+        </p:spPr>
+        <p:style>
+          <a:lnRef idx="0">
+            <a:scrgbClr r="0" g="0" b="0"/>
+          </a:lnRef>
+          <a:fillRef idx="0">
+            <a:scrgbClr r="0" g="0" b="0"/>
+          </a:fillRef>
+          <a:effectRef idx="0">
+            <a:scrgbClr r="0" g="0" b="0"/>
+          </a:effectRef>
+          <a:fontRef idx="minor"/>
+        </p:style>
+        <p:txBody>
+          <a:bodyPr lIns="177840" tIns="177840" rIns="177840" bIns="177840" anchor="t">
+            <a:noAutofit/>
+          </a:bodyPr>
+          <a:lstStyle/>
+          <a:p>
+            <a:r>
+              <a:rPr lang="en-US" sz="1400" b="1" u="none" strike="noStrike" dirty="0">
+                <a:solidFill>
+                  <a:srgbClr val="762A83"/>
+                </a:solidFill>
+                <a:effectLst/>
+                <a:uFillTx/>
+                <a:latin typeface="Calibri"/>
+                <a:ea typeface="Calibri"/>
+              </a:rPr>
+              <a:t>2 · Test the new binding sites</a:t>
+            </a:r>
+            <a:endParaRPr lang="en-US" sz="1400" b="0" u="none" strike="noStrike" dirty="0">
+              <a:solidFill>
+                <a:srgbClr val="000000"/>
+              </a:solidFill>
+              <a:effectLst/>
+              <a:uFillTx/>
+              <a:latin typeface="Arial"/>
+            </a:endParaRPr>
+          </a:p>
+          <a:p>
+            <a:pPr algn="justLow" defTabSz="914400">
+              <a:lnSpc>
+                <a:spcPct val="105000"/>
+              </a:lnSpc>
+              <a:tabLst>
+                <a:tab pos="0" algn="l"/>
+              </a:tabLst>
+            </a:pPr>
+            <a:r>
+              <a:rPr lang="en-US" sz="1200" b="0" u="none" strike="noStrike" dirty="0">
+                <a:solidFill>
+                  <a:srgbClr val="2C3E50"/>
+                </a:solidFill>
+                <a:effectLst/>
+                <a:uFillTx/>
+                <a:latin typeface="Calibri"/>
+                <a:ea typeface="Calibri"/>
+              </a:rPr>
+              <a:t>The two predicted SPOP sites (residues 122–126 and 155–159) are the novel finding. Break them by mutation and check whether Sororin then survives longer — if it does, the sites are real.</a:t>
+            </a:r>
+            <a:endParaRPr lang="en-US" sz="1200" b="0" u="none" strike="noStrike" dirty="0">
+              <a:solidFill>
+                <a:srgbClr val="000000"/>
+              </a:solidFill>
+              <a:effectLst/>
+              <a:uFillTx/>
+              <a:latin typeface="Arial"/>
+            </a:endParaRPr>
+          </a:p>
+        </p:txBody>
+      </p:sp>
+      <p:sp>
+        <p:nvSpPr>
+          <p:cNvPr id="12" name="Text 4"/>
+          <p:cNvSpPr/>
+          <p:nvPr/>
+        </p:nvSpPr>
+        <p:spPr>
+          <a:xfrm>
+            <a:off x="8727566" y="1142668"/>
+            <a:ext cx="3140914" cy="5200122"/>
+          </a:xfrm>
+          <a:prstGeom prst="roundRect">
+            <a:avLst>
+              <a:gd name="adj" fmla="val 1493"/>
+            </a:avLst>
+          </a:prstGeom>
+          <a:solidFill>
+            <a:srgbClr val="E3F2F4"/>
+          </a:solidFill>
+          <a:ln w="19050">
+            <a:solidFill>
+              <a:srgbClr val="1F6F7A"/>
+            </a:solidFill>
+            <a:round/>
+          </a:ln>
+        </p:spPr>
+        <p:style>
+          <a:lnRef idx="0">
+            <a:scrgbClr r="0" g="0" b="0"/>
+          </a:lnRef>
+          <a:fillRef idx="0">
+            <a:scrgbClr r="0" g="0" b="0"/>
+          </a:fillRef>
+          <a:effectRef idx="0">
+            <a:scrgbClr r="0" g="0" b="0"/>
+          </a:effectRef>
+          <a:fontRef idx="minor"/>
+        </p:style>
+        <p:txBody>
+          <a:bodyPr lIns="177840" tIns="177840" rIns="177840" bIns="177840" anchor="t">
+            <a:noAutofit/>
+          </a:bodyPr>
+          <a:lstStyle/>
+          <a:p>
+            <a:r>
+              <a:rPr lang="en-US" sz="1400" b="1" u="none" strike="noStrike" dirty="0">
+                <a:solidFill>
+                  <a:srgbClr val="1F6F7A"/>
+                </a:solidFill>
+                <a:effectLst/>
+                <a:uFillTx/>
+                <a:latin typeface="Calibri"/>
+                <a:ea typeface="Calibri"/>
+              </a:rPr>
+              <a:t>3 · Back the predictions up</a:t>
+            </a:r>
+            <a:endParaRPr lang="en-US" sz="1400" b="0" u="none" strike="noStrike" dirty="0">
+              <a:solidFill>
+                <a:srgbClr val="000000"/>
+              </a:solidFill>
+              <a:effectLst/>
+              <a:uFillTx/>
+              <a:latin typeface="Arial"/>
+            </a:endParaRPr>
+          </a:p>
+          <a:p>
+            <a:pPr defTabSz="914400">
+              <a:lnSpc>
+                <a:spcPct val="105000"/>
+              </a:lnSpc>
+              <a:tabLst>
+                <a:tab pos="0" algn="l"/>
+              </a:tabLst>
+            </a:pPr>
+            <a:r>
+              <a:rPr lang="en-US" sz="1200" b="0" u="none" strike="noStrike" dirty="0">
+                <a:solidFill>
+                  <a:srgbClr val="2C3E50"/>
+                </a:solidFill>
+                <a:effectLst/>
+                <a:uFillTx/>
+                <a:latin typeface="Calibri"/>
+                <a:ea typeface="Calibri"/>
+              </a:rPr>
+              <a:t>Apart from the KEN box, the motifs found here are predictions, not confirmed results — they remain hypotheses still to be tested experimentally.</a:t>
+            </a:r>
+            <a:endParaRPr lang="en-US" sz="1200" b="0" u="none" strike="noStrike" dirty="0">
+              <a:solidFill>
+                <a:srgbClr val="000000"/>
+              </a:solidFill>
+              <a:effectLst/>
+              <a:uFillTx/>
+              <a:latin typeface="Arial"/>
+            </a:endParaRPr>
+          </a:p>
+        </p:txBody>
+      </p:sp>
+      <p:sp>
+        <p:nvSpPr>
+          <p:cNvPr id="13" name="Text 5"/>
+          <p:cNvSpPr/>
+          <p:nvPr/>
+        </p:nvSpPr>
+        <p:spPr>
+          <a:xfrm>
+            <a:off x="320040" y="6473952"/>
+            <a:ext cx="11548440" cy="246888"/>
+          </a:xfrm>
+          <a:prstGeom prst="roundRect">
+            <a:avLst>
+              <a:gd name="adj" fmla="val 5882"/>
+            </a:avLst>
+          </a:prstGeom>
+          <a:solidFill>
+            <a:srgbClr val="DCEFDD"/>
+          </a:solidFill>
+          <a:ln w="19050">
+            <a:solidFill>
+              <a:srgbClr val="1A7A34"/>
+            </a:solidFill>
+            <a:round/>
+          </a:ln>
+        </p:spPr>
+        <p:style>
+          <a:lnRef idx="0">
+            <a:scrgbClr r="0" g="0" b="0"/>
+          </a:lnRef>
+          <a:fillRef idx="0">
+            <a:scrgbClr r="0" g="0" b="0"/>
+          </a:fillRef>
+          <a:effectRef idx="0">
+            <a:scrgbClr r="0" g="0" b="0"/>
+          </a:effectRef>
+          <a:fontRef idx="minor"/>
+        </p:style>
+        <p:txBody>
+          <a:bodyPr lIns="90000" tIns="45000" rIns="90000" bIns="45000" anchor="ctr">
+            <a:noAutofit/>
+          </a:bodyPr>
+          <a:lstStyle/>
+          <a:p>
+            <a:pPr algn="ctr" defTabSz="914400">
+              <a:lnSpc>
+                <a:spcPct val="100000"/>
+              </a:lnSpc>
+              <a:tabLst>
+                <a:tab pos="0" algn="l"/>
+              </a:tabLst>
+            </a:pPr>
+            <a:r>
+              <a:rPr lang="en-US" sz="1250" b="1" u="none" strike="noStrike" dirty="0">
+                <a:solidFill>
+                  <a:srgbClr val="1A7A34"/>
+                </a:solidFill>
+                <a:effectLst/>
+                <a:uFillTx/>
+                <a:latin typeface="Calibri"/>
+                <a:ea typeface="Calibri"/>
+              </a:rPr>
+              <a:t>In one sentence:  </a:t>
+            </a:r>
+            <a:r>
+              <a:rPr lang="en-US" sz="1250" b="0" u="none" strike="noStrike" dirty="0">
+                <a:solidFill>
+                  <a:srgbClr val="2C3E50"/>
+                </a:solidFill>
+                <a:effectLst/>
+                <a:uFillTx/>
+                <a:latin typeface="Calibri"/>
+                <a:ea typeface="Calibri"/>
+              </a:rPr>
+              <a:t>the study is computational, so the honest next step is experimental confirmation of what it predicts.</a:t>
+            </a:r>
+            <a:endParaRPr lang="en-US" sz="1250" b="0" u="none" strike="noStrike" dirty="0">
+              <a:solidFill>
+                <a:srgbClr val="000000"/>
+              </a:solidFill>
+              <a:effectLst/>
+              <a:uFillTx/>
+              <a:latin typeface="Arial"/>
+            </a:endParaRPr>
+          </a:p>
+        </p:txBody>
+      </p:sp>
+      <p:grpSp>
+        <p:nvGrpSpPr>
+          <p:cNvPr id="7" name="Group 6">
+            <a:extLst>
+              <a:ext uri="{FF2B5EF4-FFF2-40B4-BE49-F238E27FC236}">
+                <a16:creationId xmlns:a16="http://schemas.microsoft.com/office/drawing/2014/main" id="{13A6D024-7B1D-3A68-A427-AB791000971D}"/>
+              </a:ext>
+            </a:extLst>
+          </p:cNvPr>
+          <p:cNvGrpSpPr/>
+          <p:nvPr/>
+        </p:nvGrpSpPr>
+        <p:grpSpPr>
+          <a:xfrm>
+            <a:off x="507179" y="2724685"/>
+            <a:ext cx="2766633" cy="2822348"/>
+            <a:chOff x="841117" y="3429000"/>
+            <a:chExt cx="2766633" cy="2822348"/>
+          </a:xfrm>
+        </p:grpSpPr>
+        <p:pic>
+          <p:nvPicPr>
+            <p:cNvPr id="4" name="Picture 3">
+              <a:extLst>
+                <a:ext uri="{FF2B5EF4-FFF2-40B4-BE49-F238E27FC236}">
+                  <a16:creationId xmlns:a16="http://schemas.microsoft.com/office/drawing/2014/main" id="{983A1B7D-83BB-047B-330B-A1D2FCED5FED}"/>
+                </a:ext>
+              </a:extLst>
+            </p:cNvPr>
+            <p:cNvPicPr>
+              <a:picLocks noChangeAspect="1"/>
+            </p:cNvPicPr>
+            <p:nvPr/>
+          </p:nvPicPr>
+          <p:blipFill>
+            <a:blip r:embed="rId2">
+              <a:extLst>
+                <a:ext uri="{28A0092B-C50C-407E-A947-70E740481C1C}">
+                  <a14:useLocalDpi xmlns:a14="http://schemas.microsoft.com/office/drawing/2010/main" val="0"/>
+                </a:ext>
+              </a:extLst>
+            </a:blip>
+            <a:stretch>
+              <a:fillRect/>
+            </a:stretch>
+          </p:blipFill>
+          <p:spPr>
+            <a:xfrm>
+              <a:off x="1202059" y="3429000"/>
+              <a:ext cx="1984641" cy="2453016"/>
+            </a:xfrm>
+            <a:prstGeom prst="rect">
+              <a:avLst/>
+            </a:prstGeom>
+          </p:spPr>
+        </p:pic>
+        <p:sp>
+          <p:nvSpPr>
+            <p:cNvPr id="6" name="TextBox 5">
+              <a:extLst>
+                <a:ext uri="{FF2B5EF4-FFF2-40B4-BE49-F238E27FC236}">
+                  <a16:creationId xmlns:a16="http://schemas.microsoft.com/office/drawing/2014/main" id="{B4F3CB91-6A71-065C-D91E-03596C9C49CF}"/>
+                </a:ext>
+              </a:extLst>
+            </p:cNvPr>
+            <p:cNvSpPr txBox="1"/>
+            <p:nvPr/>
+          </p:nvSpPr>
+          <p:spPr>
+            <a:xfrm>
+              <a:off x="841117" y="5882016"/>
+              <a:ext cx="2766633" cy="369332"/>
+            </a:xfrm>
+            <a:prstGeom prst="rect">
+              <a:avLst/>
+            </a:prstGeom>
+            <a:noFill/>
+          </p:spPr>
+          <p:txBody>
+            <a:bodyPr wrap="square" rtlCol="0">
+              <a:spAutoFit/>
+            </a:bodyPr>
+            <a:lstStyle/>
+            <a:p>
+              <a:pPr algn="ctr"/>
+              <a:r>
+                <a:rPr lang="en-US" sz="900" dirty="0"/>
+                <a:t>A 900 MHz Nuclear Magnetic Resonance instrument with a 21.1 T magnet at HWB-NMR, Birmingham, UK</a:t>
+              </a:r>
+            </a:p>
+          </p:txBody>
+        </p:sp>
+      </p:grpSp>
+      <p:pic>
+        <p:nvPicPr>
+          <p:cNvPr id="15" name="Picture 14">
+            <a:extLst>
+              <a:ext uri="{FF2B5EF4-FFF2-40B4-BE49-F238E27FC236}">
+                <a16:creationId xmlns:a16="http://schemas.microsoft.com/office/drawing/2014/main" id="{AB6C2DEC-1592-EF2F-8FB8-4ED921284831}"/>
+              </a:ext>
+            </a:extLst>
+          </p:cNvPr>
+          <p:cNvPicPr>
+            <a:picLocks noChangeAspect="1"/>
+          </p:cNvPicPr>
+          <p:nvPr/>
+        </p:nvPicPr>
+        <p:blipFill>
+          <a:blip r:embed="rId3" cstate="print">
+            <a:extLst>
+              <a:ext uri="{28A0092B-C50C-407E-A947-70E740481C1C}">
+                <a14:useLocalDpi xmlns:a14="http://schemas.microsoft.com/office/drawing/2010/main" val="0"/>
+              </a:ext>
+            </a:extLst>
+          </a:blip>
+          <a:stretch>
+            <a:fillRect/>
+          </a:stretch>
+        </p:blipFill>
+        <p:spPr>
+          <a:xfrm>
+            <a:off x="3812752" y="2320413"/>
+            <a:ext cx="4536998" cy="3630893"/>
+          </a:xfrm>
+          <a:prstGeom prst="rect">
+            <a:avLst/>
+          </a:prstGeom>
+        </p:spPr>
+      </p:pic>
+      <p:pic>
+        <p:nvPicPr>
+          <p:cNvPr id="17" name="Picture 16">
+            <a:extLst>
+              <a:ext uri="{FF2B5EF4-FFF2-40B4-BE49-F238E27FC236}">
+                <a16:creationId xmlns:a16="http://schemas.microsoft.com/office/drawing/2014/main" id="{95666895-1DA2-AF11-4157-E0F33107E149}"/>
+              </a:ext>
+            </a:extLst>
+          </p:cNvPr>
+          <p:cNvPicPr>
+            <a:picLocks noChangeAspect="1"/>
+          </p:cNvPicPr>
+          <p:nvPr/>
+        </p:nvPicPr>
+        <p:blipFill>
+          <a:blip r:embed="rId4" cstate="print">
+            <a:extLst>
+              <a:ext uri="{28A0092B-C50C-407E-A947-70E740481C1C}">
+                <a14:useLocalDpi xmlns:a14="http://schemas.microsoft.com/office/drawing/2010/main" val="0"/>
+              </a:ext>
+            </a:extLst>
+          </a:blip>
+          <a:stretch>
+            <a:fillRect/>
+          </a:stretch>
+        </p:blipFill>
+        <p:spPr>
+          <a:xfrm>
+            <a:off x="8935387" y="2938619"/>
+            <a:ext cx="2725271" cy="1945681"/>
+          </a:xfrm>
+          <a:prstGeom prst="rect">
+            <a:avLst/>
+          </a:prstGeom>
+        </p:spPr>
+      </p:pic>
+    </p:spTree>
+  </p:cSld>
+  <p:clrMapOvr>
+    <a:masterClrMapping/>
+  </p:clrMapOvr>
+  <mc:AlternateContent xmlns:mc="http://schemas.openxmlformats.org/markup-compatibility/2006">
+    <mc:Choice xmlns:p14="http://schemas.microsoft.com/office/powerpoint/2010/main" Requires="p14">
+      <p:transition spd="slow" p14:dur="3400">
+        <p14:reveal/>
+      </p:transition>
+    </mc:Choice>
+    <mc:Fallback>
+      <p:transition spd="slow">
+        <p:fade/>
+      </p:transition>
+    </mc:Fallback>
+  </mc:AlternateContent>
+  <p:timing>
+    <p:tnLst>
+      <p:par>
+        <p:cTn id="1" dur="indefinite" restart="never" nodeType="tmRoot">
+          <p:childTnLst>
+            <p:seq concurrent="1" nextAc="seek">
+              <p:cTn id="2" dur="indefinite" nodeType="mainSeq">
+                <p:childTnLst>
+                  <p:par>
+                    <p:cTn id="3" fill="hold">
+                      <p:stCondLst>
+                        <p:cond delay="indefinite"/>
+                      </p:stCondLst>
+                      <p:childTnLst>
+                        <p:par>
+                          <p:cTn id="4" fill="hold">
+                            <p:stCondLst>
+                              <p:cond delay="0"/>
+                            </p:stCondLst>
+                            <p:childTnLst>
+                              <p:par>
+                                <p:cTn id="5" presetID="10" presetClass="entr" presetSubtype="0" fill="hold" grpId="0" nodeType="clickEffect">
+                                  <p:stCondLst>
+                                    <p:cond delay="0"/>
+                                  </p:stCondLst>
+                                  <p:childTnLst>
+                                    <p:set>
+                                      <p:cBhvr>
+                                        <p:cTn id="6" dur="1" fill="hold">
+                                          <p:stCondLst>
+                                            <p:cond delay="0"/>
+                                          </p:stCondLst>
+                                        </p:cTn>
+                                        <p:tgtEl>
+                                          <p:spTgt spid="9"/>
+                                        </p:tgtEl>
+                                        <p:attrNameLst>
+                                          <p:attrName>style.visibility</p:attrName>
+                                        </p:attrNameLst>
+                                      </p:cBhvr>
+                                      <p:to>
+                                        <p:strVal val="visible"/>
+                                      </p:to>
+                                    </p:set>
+                                    <p:animEffect transition="in" filter="fade">
+                                      <p:cBhvr>
+                                        <p:cTn id="7" dur="500"/>
+                                        <p:tgtEl>
+                                          <p:spTgt spid="9"/>
+                                        </p:tgtEl>
+                                      </p:cBhvr>
+                                    </p:animEffect>
+                                  </p:childTnLst>
+                                </p:cTn>
+                              </p:par>
+                            </p:childTnLst>
+                          </p:cTn>
+                        </p:par>
+                      </p:childTnLst>
+                    </p:cTn>
+                  </p:par>
+                  <p:par>
+                    <p:cTn id="8" fill="hold">
+                      <p:stCondLst>
+                        <p:cond delay="indefinite"/>
+                      </p:stCondLst>
+                      <p:childTnLst>
+                        <p:par>
+                          <p:cTn id="9" fill="hold">
+                            <p:stCondLst>
+                              <p:cond delay="0"/>
+                            </p:stCondLst>
+                            <p:childTnLst>
+                              <p:par>
+                                <p:cTn id="10" presetID="10" presetClass="entr" presetSubtype="0" fill="hold" grpId="0" nodeType="clickEffect">
+                                  <p:stCondLst>
+                                    <p:cond delay="0"/>
+                                  </p:stCondLst>
+                                  <p:childTnLst>
+                                    <p:set>
+                                      <p:cBhvr>
+                                        <p:cTn id="11" dur="1" fill="hold">
+                                          <p:stCondLst>
+                                            <p:cond delay="0"/>
+                                          </p:stCondLst>
+                                        </p:cTn>
+                                        <p:tgtEl>
+                                          <p:spTgt spid="10"/>
+                                        </p:tgtEl>
+                                        <p:attrNameLst>
+                                          <p:attrName>style.visibility</p:attrName>
+                                        </p:attrNameLst>
+                                      </p:cBhvr>
+                                      <p:to>
+                                        <p:strVal val="visible"/>
+                                      </p:to>
+                                    </p:set>
+                                    <p:animEffect transition="in" filter="fade">
+                                      <p:cBhvr>
+                                        <p:cTn id="12" dur="500"/>
+                                        <p:tgtEl>
+                                          <p:spTgt spid="10"/>
+                                        </p:tgtEl>
+                                      </p:cBhvr>
+                                    </p:animEffect>
+                                  </p:childTnLst>
+                                </p:cTn>
+                              </p:par>
+                            </p:childTnLst>
+                          </p:cTn>
+                        </p:par>
+                      </p:childTnLst>
+                    </p:cTn>
+                  </p:par>
+                  <p:par>
+                    <p:cTn id="13" fill="hold">
+                      <p:stCondLst>
+                        <p:cond delay="indefinite"/>
+                      </p:stCondLst>
+                      <p:childTnLst>
+                        <p:par>
+                          <p:cTn id="14" fill="hold">
+                            <p:stCondLst>
+                              <p:cond delay="0"/>
+                            </p:stCondLst>
+                            <p:childTnLst>
+                              <p:par>
+                                <p:cTn id="15" presetID="10" presetClass="entr" presetSubtype="0" fill="hold" nodeType="clickEffect">
+                                  <p:stCondLst>
+                                    <p:cond delay="0"/>
+                                  </p:stCondLst>
+                                  <p:childTnLst>
+                                    <p:set>
+                                      <p:cBhvr>
+                                        <p:cTn id="16" dur="1" fill="hold">
+                                          <p:stCondLst>
+                                            <p:cond delay="0"/>
+                                          </p:stCondLst>
+                                        </p:cTn>
+                                        <p:tgtEl>
+                                          <p:spTgt spid="7"/>
+                                        </p:tgtEl>
+                                        <p:attrNameLst>
+                                          <p:attrName>style.visibility</p:attrName>
+                                        </p:attrNameLst>
+                                      </p:cBhvr>
+                                      <p:to>
+                                        <p:strVal val="visible"/>
+                                      </p:to>
+                                    </p:set>
+                                    <p:animEffect transition="in" filter="fade">
+                                      <p:cBhvr>
+                                        <p:cTn id="17" dur="500"/>
+                                        <p:tgtEl>
+                                          <p:spTgt spid="7"/>
+                                        </p:tgtEl>
+                                      </p:cBhvr>
+                                    </p:animEffect>
+                                  </p:childTnLst>
+                                </p:cTn>
+                              </p:par>
+                            </p:childTnLst>
+                          </p:cTn>
+                        </p:par>
+                      </p:childTnLst>
+                    </p:cTn>
+                  </p:par>
+                  <p:par>
+                    <p:cTn id="18" fill="hold">
+                      <p:stCondLst>
+                        <p:cond delay="indefinite"/>
+                      </p:stCondLst>
+                      <p:childTnLst>
+                        <p:par>
+                          <p:cTn id="19" fill="hold">
+                            <p:stCondLst>
+                              <p:cond delay="0"/>
+                            </p:stCondLst>
+                            <p:childTnLst>
+                              <p:par>
+                                <p:cTn id="20" presetID="10" presetClass="entr" presetSubtype="0" fill="hold" grpId="0" nodeType="clickEffect">
+                                  <p:stCondLst>
+                                    <p:cond delay="0"/>
+                                  </p:stCondLst>
+                                  <p:childTnLst>
+                                    <p:set>
+                                      <p:cBhvr>
+                                        <p:cTn id="21" dur="1" fill="hold">
+                                          <p:stCondLst>
+                                            <p:cond delay="0"/>
+                                          </p:stCondLst>
+                                        </p:cTn>
+                                        <p:tgtEl>
+                                          <p:spTgt spid="11"/>
+                                        </p:tgtEl>
+                                        <p:attrNameLst>
+                                          <p:attrName>style.visibility</p:attrName>
+                                        </p:attrNameLst>
+                                      </p:cBhvr>
+                                      <p:to>
+                                        <p:strVal val="visible"/>
+                                      </p:to>
+                                    </p:set>
+                                    <p:animEffect transition="in" filter="fade">
+                                      <p:cBhvr>
+                                        <p:cTn id="22" dur="500"/>
+                                        <p:tgtEl>
+                                          <p:spTgt spid="11"/>
+                                        </p:tgtEl>
+                                      </p:cBhvr>
+                                    </p:animEffect>
+                                  </p:childTnLst>
+                                </p:cTn>
+                              </p:par>
+                            </p:childTnLst>
+                          </p:cTn>
+                        </p:par>
+                      </p:childTnLst>
+                    </p:cTn>
+                  </p:par>
+                  <p:par>
+                    <p:cTn id="23" fill="hold">
+                      <p:stCondLst>
+                        <p:cond delay="indefinite"/>
+                      </p:stCondLst>
+                      <p:childTnLst>
+                        <p:par>
+                          <p:cTn id="24" fill="hold">
+                            <p:stCondLst>
+                              <p:cond delay="0"/>
+                            </p:stCondLst>
+                            <p:childTnLst>
+                              <p:par>
+                                <p:cTn id="25" presetID="10" presetClass="entr" presetSubtype="0" fill="hold" nodeType="clickEffect">
+                                  <p:stCondLst>
+                                    <p:cond delay="0"/>
+                                  </p:stCondLst>
+                                  <p:childTnLst>
+                                    <p:set>
+                                      <p:cBhvr>
+                                        <p:cTn id="26" dur="1" fill="hold">
+                                          <p:stCondLst>
+                                            <p:cond delay="0"/>
+                                          </p:stCondLst>
+                                        </p:cTn>
+                                        <p:tgtEl>
+                                          <p:spTgt spid="15"/>
+                                        </p:tgtEl>
+                                        <p:attrNameLst>
+                                          <p:attrName>style.visibility</p:attrName>
+                                        </p:attrNameLst>
+                                      </p:cBhvr>
+                                      <p:to>
+                                        <p:strVal val="visible"/>
+                                      </p:to>
+                                    </p:set>
+                                    <p:animEffect transition="in" filter="fade">
+                                      <p:cBhvr>
+                                        <p:cTn id="27" dur="500"/>
+                                        <p:tgtEl>
+                                          <p:spTgt spid="15"/>
+                                        </p:tgtEl>
+                                      </p:cBhvr>
+                                    </p:animEffect>
+                                  </p:childTnLst>
+                                </p:cTn>
+                              </p:par>
+                            </p:childTnLst>
+                          </p:cTn>
+                        </p:par>
+                      </p:childTnLst>
+                    </p:cTn>
+                  </p:par>
+                  <p:par>
+                    <p:cTn id="28" fill="hold">
+                      <p:stCondLst>
+                        <p:cond delay="indefinite"/>
+                      </p:stCondLst>
+                      <p:childTnLst>
+                        <p:par>
+                          <p:cTn id="29" fill="hold">
+                            <p:stCondLst>
+                              <p:cond delay="0"/>
+                            </p:stCondLst>
+                            <p:childTnLst>
+                              <p:par>
+                                <p:cTn id="30" presetID="10" presetClass="entr" presetSubtype="0" fill="hold" grpId="0" nodeType="clickEffect">
+                                  <p:stCondLst>
+                                    <p:cond delay="0"/>
+                                  </p:stCondLst>
+                                  <p:childTnLst>
+                                    <p:set>
+                                      <p:cBhvr>
+                                        <p:cTn id="31" dur="1" fill="hold">
+                                          <p:stCondLst>
+                                            <p:cond delay="0"/>
+                                          </p:stCondLst>
+                                        </p:cTn>
+                                        <p:tgtEl>
+                                          <p:spTgt spid="12"/>
+                                        </p:tgtEl>
+                                        <p:attrNameLst>
+                                          <p:attrName>style.visibility</p:attrName>
+                                        </p:attrNameLst>
+                                      </p:cBhvr>
+                                      <p:to>
+                                        <p:strVal val="visible"/>
+                                      </p:to>
+                                    </p:set>
+                                    <p:animEffect transition="in" filter="fade">
+                                      <p:cBhvr>
+                                        <p:cTn id="32" dur="500"/>
+                                        <p:tgtEl>
+                                          <p:spTgt spid="12"/>
+                                        </p:tgtEl>
+                                      </p:cBhvr>
+                                    </p:animEffect>
+                                  </p:childTnLst>
+                                </p:cTn>
+                              </p:par>
+                            </p:childTnLst>
+                          </p:cTn>
+                        </p:par>
+                      </p:childTnLst>
+                    </p:cTn>
+                  </p:par>
+                  <p:par>
+                    <p:cTn id="33" fill="hold">
+                      <p:stCondLst>
+                        <p:cond delay="indefinite"/>
+                      </p:stCondLst>
+                      <p:childTnLst>
+                        <p:par>
+                          <p:cTn id="34" fill="hold">
+                            <p:stCondLst>
+                              <p:cond delay="0"/>
+                            </p:stCondLst>
+                            <p:childTnLst>
+                              <p:par>
+                                <p:cTn id="35" presetID="10" presetClass="entr" presetSubtype="0" fill="hold" nodeType="clickEffect">
+                                  <p:stCondLst>
+                                    <p:cond delay="0"/>
+                                  </p:stCondLst>
+                                  <p:childTnLst>
+                                    <p:set>
+                                      <p:cBhvr>
+                                        <p:cTn id="36" dur="1" fill="hold">
+                                          <p:stCondLst>
+                                            <p:cond delay="0"/>
+                                          </p:stCondLst>
+                                        </p:cTn>
+                                        <p:tgtEl>
+                                          <p:spTgt spid="17"/>
+                                        </p:tgtEl>
+                                        <p:attrNameLst>
+                                          <p:attrName>style.visibility</p:attrName>
+                                        </p:attrNameLst>
+                                      </p:cBhvr>
+                                      <p:to>
+                                        <p:strVal val="visible"/>
+                                      </p:to>
+                                    </p:set>
+                                    <p:animEffect transition="in" filter="fade">
+                                      <p:cBhvr>
+                                        <p:cTn id="37" dur="500"/>
+                                        <p:tgtEl>
+                                          <p:spTgt spid="17"/>
+                                        </p:tgtEl>
+                                      </p:cBhvr>
+                                    </p:animEffect>
+                                  </p:childTnLst>
+                                </p:cTn>
+                              </p:par>
+                            </p:childTnLst>
+                          </p:cTn>
+                        </p:par>
+                      </p:childTnLst>
+                    </p:cTn>
+                  </p:par>
+                  <p:par>
+                    <p:cTn id="38" fill="hold">
+                      <p:stCondLst>
+                        <p:cond delay="indefinite"/>
+                      </p:stCondLst>
+                      <p:childTnLst>
+                        <p:par>
+                          <p:cTn id="39" fill="hold">
+                            <p:stCondLst>
+                              <p:cond delay="0"/>
+                            </p:stCondLst>
+                            <p:childTnLst>
+                              <p:par>
+                                <p:cTn id="40" presetID="10" presetClass="entr" presetSubtype="0" fill="hold" grpId="0" nodeType="clickEffect">
+                                  <p:stCondLst>
+                                    <p:cond delay="0"/>
+                                  </p:stCondLst>
+                                  <p:childTnLst>
+                                    <p:set>
+                                      <p:cBhvr>
+                                        <p:cTn id="41" dur="1" fill="hold">
+                                          <p:stCondLst>
+                                            <p:cond delay="0"/>
+                                          </p:stCondLst>
+                                        </p:cTn>
+                                        <p:tgtEl>
+                                          <p:spTgt spid="13"/>
+                                        </p:tgtEl>
+                                        <p:attrNameLst>
+                                          <p:attrName>style.visibility</p:attrName>
+                                        </p:attrNameLst>
+                                      </p:cBhvr>
+                                      <p:to>
+                                        <p:strVal val="visible"/>
+                                      </p:to>
+                                    </p:set>
+                                    <p:animEffect transition="in" filter="fade">
+                                      <p:cBhvr>
+                                        <p:cTn id="42" dur="500"/>
+                                        <p:tgtEl>
+                                          <p:spTgt spid="13"/>
+                                        </p:tgtEl>
+                                      </p:cBhvr>
+                                    </p:animEffect>
+                                  </p:childTnLst>
+                                </p:cTn>
+                              </p:par>
+                            </p:childTnLst>
+                          </p:cTn>
+                        </p:par>
+                      </p:childTnLst>
+                    </p:cTn>
+                  </p:par>
+                </p:childTnLst>
+              </p:cTn>
+              <p:prevCondLst>
+                <p:cond evt="onPrev" delay="0">
+                  <p:tgtEl>
+                    <p:sldTgt/>
+                  </p:tgtEl>
+                </p:cond>
+              </p:prevCondLst>
+              <p:nextCondLst>
+                <p:cond evt="onNext" delay="0">
+                  <p:tgtEl>
+                    <p:sldTgt/>
+                  </p:tgtEl>
+                </p:cond>
+              </p:nextCondLst>
+            </p:seq>
+          </p:childTnLst>
+        </p:cTn>
+      </p:par>
+    </p:tnLst>
+    <p:bldLst>
+      <p:bldP spid="9" grpId="0" animBg="1"/>
+      <p:bldP spid="10" grpId="0" animBg="1"/>
+      <p:bldP spid="11" grpId="0" animBg="1"/>
+      <p:bldP spid="12" grpId="0" animBg="1"/>
+      <p:bldP spid="13" grpId="0" animBg="1"/>
     </p:bldLst>
   </p:timing>
 </p:sld>
@@ -18879,6 +21910,18 @@
   <p:clrMapOvr>
     <a:masterClrMapping/>
   </p:clrMapOvr>
+  <mc:AlternateContent xmlns:mc="http://schemas.openxmlformats.org/markup-compatibility/2006">
+    <mc:Choice xmlns:p14="http://schemas.microsoft.com/office/powerpoint/2010/main" Requires="p14">
+      <p:transition spd="slow" p14:dur="3400">
+        <p14:reveal/>
+      </p:transition>
+    </mc:Choice>
+    <mc:Fallback>
+      <p:transition spd="slow">
+        <p:fade/>
+      </p:transition>
+    </mc:Fallback>
+  </mc:AlternateContent>
   <p:timing>
     <p:tnLst>
       <p:par>
@@ -19750,6 +22793,18 @@
   <p:clrMapOvr>
     <a:masterClrMapping/>
   </p:clrMapOvr>
+  <mc:AlternateContent xmlns:mc="http://schemas.openxmlformats.org/markup-compatibility/2006">
+    <mc:Choice xmlns:p14="http://schemas.microsoft.com/office/powerpoint/2010/main" Requires="p14">
+      <p:transition spd="slow" p14:dur="3400">
+        <p14:reveal/>
+      </p:transition>
+    </mc:Choice>
+    <mc:Fallback>
+      <p:transition spd="slow">
+        <p:fade/>
+      </p:transition>
+    </mc:Fallback>
+  </mc:AlternateContent>
   <p:timing>
     <p:tnLst>
       <p:par>
@@ -21339,6 +24394,18 @@
   <p:clrMapOvr>
     <a:masterClrMapping/>
   </p:clrMapOvr>
+  <mc:AlternateContent xmlns:mc="http://schemas.openxmlformats.org/markup-compatibility/2006">
+    <mc:Choice xmlns:p14="http://schemas.microsoft.com/office/powerpoint/2010/main" Requires="p14">
+      <p:transition spd="slow" p14:dur="3400">
+        <p14:reveal/>
+      </p:transition>
+    </mc:Choice>
+    <mc:Fallback>
+      <p:transition spd="slow">
+        <p:fade/>
+      </p:transition>
+    </mc:Fallback>
+  </mc:AlternateContent>
   <p:timing>
     <p:tnLst>
       <p:par>
@@ -24748,6 +27815,18 @@
   <p:clrMapOvr>
     <a:masterClrMapping/>
   </p:clrMapOvr>
+  <mc:AlternateContent xmlns:mc="http://schemas.openxmlformats.org/markup-compatibility/2006">
+    <mc:Choice xmlns:p14="http://schemas.microsoft.com/office/powerpoint/2010/main" Requires="p14">
+      <p:transition spd="slow" p14:dur="3400">
+        <p14:reveal/>
+      </p:transition>
+    </mc:Choice>
+    <mc:Fallback>
+      <p:transition spd="slow">
+        <p:fade/>
+      </p:transition>
+    </mc:Fallback>
+  </mc:AlternateContent>
   <p:timing>
     <p:tnLst>
       <p:par>
@@ -28001,6 +31080,18 @@
   <p:clrMapOvr>
     <a:masterClrMapping/>
   </p:clrMapOvr>
+  <mc:AlternateContent xmlns:mc="http://schemas.openxmlformats.org/markup-compatibility/2006">
+    <mc:Choice xmlns:p14="http://schemas.microsoft.com/office/powerpoint/2010/main" Requires="p14">
+      <p:transition spd="slow" p14:dur="3400">
+        <p14:reveal/>
+      </p:transition>
+    </mc:Choice>
+    <mc:Fallback>
+      <p:transition spd="slow">
+        <p:fade/>
+      </p:transition>
+    </mc:Fallback>
+  </mc:AlternateContent>
   <p:timing>
     <p:tnLst>
       <p:par>
@@ -29296,6 +32387,18 @@
   <p:clrMapOvr>
     <a:masterClrMapping/>
   </p:clrMapOvr>
+  <mc:AlternateContent xmlns:mc="http://schemas.openxmlformats.org/markup-compatibility/2006">
+    <mc:Choice xmlns:p14="http://schemas.microsoft.com/office/powerpoint/2010/main" Requires="p14">
+      <p:transition spd="slow" p14:dur="3400">
+        <p14:reveal/>
+      </p:transition>
+    </mc:Choice>
+    <mc:Fallback>
+      <p:transition spd="slow">
+        <p:fade/>
+      </p:transition>
+    </mc:Fallback>
+  </mc:AlternateContent>
 </p:sld>
 </file>
 
@@ -29841,7 +32944,7 @@
               </a:tabLst>
             </a:pPr>
             <a:r>
-              <a:rPr lang="en-US" sz="1050" b="1" u="none" strike="noStrike">
+              <a:rPr lang="en-US" sz="1050" b="1" u="none" strike="noStrike" dirty="0">
                 <a:solidFill>
                   <a:srgbClr val="762A83"/>
                 </a:solidFill>
@@ -29851,7 +32954,7 @@
               </a:rPr>
               <a:t>how IUPred2 works (reference):  </a:t>
             </a:r>
-            <a:endParaRPr lang="en-US" sz="1050" b="0" u="none" strike="noStrike">
+            <a:endParaRPr lang="en-US" sz="1050" b="0" u="none" strike="noStrike" dirty="0">
               <a:solidFill>
                 <a:srgbClr val="000000"/>
               </a:solidFill>
@@ -29870,7 +32973,7 @@
               </a:tabLst>
             </a:pPr>
             <a:r>
-              <a:rPr lang="en-US" sz="1050" b="0" u="none" strike="noStrike">
+              <a:rPr lang="en-US" sz="1050" b="0" u="none" strike="noStrike" dirty="0">
                 <a:solidFill>
                   <a:srgbClr val="2C3E50"/>
                 </a:solidFill>
@@ -29878,9 +32981,31 @@
                 <a:uFillTx/>
                 <a:latin typeface="Calibri"/>
               </a:rPr>
-              <a:t>For each residue it estimates the stabilising pairwise contact energy that residue could gain by folding into a compact structure, from a statistical 20×20 amino-acid energy matrix applied over the local sequence composition:</a:t>
+              <a:t>For each residue it estimates the </a:t>
             </a:r>
-            <a:endParaRPr lang="en-US" sz="1050" b="0" u="none" strike="noStrike">
+            <a:r>
+              <a:rPr lang="en-US" sz="1050" b="0" u="none" strike="noStrike" dirty="0" err="1">
+                <a:solidFill>
+                  <a:srgbClr val="2C3E50"/>
+                </a:solidFill>
+                <a:effectLst/>
+                <a:uFillTx/>
+                <a:latin typeface="Calibri"/>
+              </a:rPr>
+              <a:t>stabilising</a:t>
+            </a:r>
+            <a:r>
+              <a:rPr lang="en-US" sz="1050" b="0" u="none" strike="noStrike" dirty="0">
+                <a:solidFill>
+                  <a:srgbClr val="2C3E50"/>
+                </a:solidFill>
+                <a:effectLst/>
+                <a:uFillTx/>
+                <a:latin typeface="Calibri"/>
+              </a:rPr>
+              <a:t> pairwise contact energy that residue could gain by folding into a compact structure, from a statistical 20×20 amino-acid energy matrix applied over the local sequence composition:</a:t>
+            </a:r>
+            <a:endParaRPr lang="en-US" sz="1050" b="0" u="none" strike="noStrike" dirty="0">
               <a:solidFill>
                 <a:srgbClr val="000000"/>
               </a:solidFill>
@@ -29899,7 +33024,7 @@
               </a:tabLst>
             </a:pPr>
             <a:r>
-              <a:rPr lang="en-US" sz="1100" b="1" i="1" u="none" strike="noStrike">
+              <a:rPr lang="en-US" sz="1100" b="1" i="1" u="none" strike="noStrike" dirty="0">
                 <a:solidFill>
                   <a:srgbClr val="2C3E50"/>
                 </a:solidFill>
@@ -29907,9 +33032,97 @@
                 <a:uFillTx/>
                 <a:latin typeface="Calibri"/>
               </a:rPr>
-              <a:t>E(i)  ≈  Σ over pairs (a,b)  of  M(a,b) · cₐ · c_b </a:t>
+              <a:t>E(</a:t>
             </a:r>
-            <a:endParaRPr lang="en-US" sz="1100" b="0" u="none" strike="noStrike">
+            <a:r>
+              <a:rPr lang="en-US" sz="1100" b="1" i="1" u="none" strike="noStrike" dirty="0" err="1">
+                <a:solidFill>
+                  <a:srgbClr val="2C3E50"/>
+                </a:solidFill>
+                <a:effectLst/>
+                <a:uFillTx/>
+                <a:latin typeface="Calibri"/>
+              </a:rPr>
+              <a:t>i</a:t>
+            </a:r>
+            <a:r>
+              <a:rPr lang="en-US" sz="1100" b="1" i="1" u="none" strike="noStrike" dirty="0">
+                <a:solidFill>
+                  <a:srgbClr val="2C3E50"/>
+                </a:solidFill>
+                <a:effectLst/>
+                <a:uFillTx/>
+                <a:latin typeface="Calibri"/>
+              </a:rPr>
+              <a:t>)  ≈  Σ over pairs (</a:t>
+            </a:r>
+            <a:r>
+              <a:rPr lang="en-US" sz="1100" b="1" i="1" u="none" strike="noStrike" dirty="0" err="1">
+                <a:solidFill>
+                  <a:srgbClr val="2C3E50"/>
+                </a:solidFill>
+                <a:effectLst/>
+                <a:uFillTx/>
+                <a:latin typeface="Calibri"/>
+              </a:rPr>
+              <a:t>a,b</a:t>
+            </a:r>
+            <a:r>
+              <a:rPr lang="en-US" sz="1100" b="1" i="1" u="none" strike="noStrike" dirty="0">
+                <a:solidFill>
+                  <a:srgbClr val="2C3E50"/>
+                </a:solidFill>
+                <a:effectLst/>
+                <a:uFillTx/>
+                <a:latin typeface="Calibri"/>
+              </a:rPr>
+              <a:t>)  of  M(</a:t>
+            </a:r>
+            <a:r>
+              <a:rPr lang="en-US" sz="1100" b="1" i="1" u="none" strike="noStrike" dirty="0" err="1">
+                <a:solidFill>
+                  <a:srgbClr val="2C3E50"/>
+                </a:solidFill>
+                <a:effectLst/>
+                <a:uFillTx/>
+                <a:latin typeface="Calibri"/>
+              </a:rPr>
+              <a:t>a,b</a:t>
+            </a:r>
+            <a:r>
+              <a:rPr lang="en-US" sz="1100" b="1" i="1" u="none" strike="noStrike" dirty="0">
+                <a:solidFill>
+                  <a:srgbClr val="2C3E50"/>
+                </a:solidFill>
+                <a:effectLst/>
+                <a:uFillTx/>
+                <a:latin typeface="Calibri"/>
+              </a:rPr>
+              <a:t>) · cₐ · </a:t>
+            </a:r>
+            <a:r>
+              <a:rPr lang="en-US" sz="1100" b="1" i="1" u="none" strike="noStrike" dirty="0" err="1">
+                <a:solidFill>
+                  <a:srgbClr val="2C3E50"/>
+                </a:solidFill>
+                <a:effectLst/>
+                <a:uFillTx/>
+                <a:latin typeface="Calibri"/>
+              </a:rPr>
+              <a:t>c_b</a:t>
+            </a:r>
+            <a:r>
+              <a:rPr lang="en-US" sz="1100" b="1" i="1" u="none" strike="noStrike" dirty="0">
+                <a:solidFill>
+                  <a:srgbClr val="2C3E50"/>
+                </a:solidFill>
+                <a:effectLst/>
+                <a:uFillTx/>
+                <a:latin typeface="Calibri"/>
+              </a:rPr>
+              <a:t> </a:t>
+            </a:r>
+            <a:endParaRPr lang="en-US" sz="1100" b="0" u="none" strike="noStrike" dirty="0">
               <a:solidFill>
                 <a:srgbClr val="000000"/>
               </a:solidFill>
@@ -29928,7 +33141,7 @@
               </a:tabLst>
             </a:pPr>
             <a:r>
-              <a:rPr lang="en-US" sz="1050" b="0" u="none" strike="noStrike">
+              <a:rPr lang="en-US" sz="1050" b="0" u="none" strike="noStrike" dirty="0">
                 <a:solidFill>
                   <a:srgbClr val="2C3E50"/>
                 </a:solidFill>
@@ -29936,9 +33149,53 @@
                 <a:uFillTx/>
                 <a:latin typeface="Calibri"/>
               </a:rPr>
-              <a:t>Residues that cannot gather enough stabilising energy to fold are predicted disordered (high score). It is a mean-field energy estimate from sequence — the physics-flavoured part.</a:t>
+              <a:t>Residues that cannot gather enough </a:t>
             </a:r>
-            <a:endParaRPr lang="en-US" sz="1050" b="0" u="none" strike="noStrike">
+            <a:r>
+              <a:rPr lang="en-US" sz="1050" b="0" u="none" strike="noStrike" dirty="0" err="1">
+                <a:solidFill>
+                  <a:srgbClr val="2C3E50"/>
+                </a:solidFill>
+                <a:effectLst/>
+                <a:uFillTx/>
+                <a:latin typeface="Calibri"/>
+              </a:rPr>
+              <a:t>stabilising</a:t>
+            </a:r>
+            <a:r>
+              <a:rPr lang="en-US" sz="1050" b="0" u="none" strike="noStrike" dirty="0">
+                <a:solidFill>
+                  <a:srgbClr val="2C3E50"/>
+                </a:solidFill>
+                <a:effectLst/>
+                <a:uFillTx/>
+                <a:latin typeface="Calibri"/>
+              </a:rPr>
+              <a:t> energy to fold are predicted disordered (high score). It is a mean-field energy estimate from sequence — the physics-</a:t>
+            </a:r>
+            <a:r>
+              <a:rPr lang="en-US" sz="1050" b="0" u="none" strike="noStrike" dirty="0" err="1">
+                <a:solidFill>
+                  <a:srgbClr val="2C3E50"/>
+                </a:solidFill>
+                <a:effectLst/>
+                <a:uFillTx/>
+                <a:latin typeface="Calibri"/>
+              </a:rPr>
+              <a:t>flavoured</a:t>
+            </a:r>
+            <a:r>
+              <a:rPr lang="en-US" sz="1050" b="0" u="none" strike="noStrike" dirty="0">
+                <a:solidFill>
+                  <a:srgbClr val="2C3E50"/>
+                </a:solidFill>
+                <a:effectLst/>
+                <a:uFillTx/>
+                <a:latin typeface="Calibri"/>
+              </a:rPr>
+              <a:t> part.</a:t>
+            </a:r>
+            <a:endParaRPr lang="en-US" sz="1050" b="0" u="none" strike="noStrike" dirty="0">
               <a:solidFill>
                 <a:srgbClr val="000000"/>
               </a:solidFill>
@@ -30002,7 +33259,7 @@
               </a:tabLst>
             </a:pPr>
             <a:r>
-              <a:rPr lang="en-US" sz="1050" b="1" u="none" strike="noStrike">
+              <a:rPr lang="en-US" sz="1050" b="1" u="none" strike="noStrike" dirty="0">
                 <a:solidFill>
                   <a:srgbClr val="762A83"/>
                 </a:solidFill>
@@ -30012,7 +33269,7 @@
               </a:rPr>
               <a:t>how ANCHOR2 works (reference):  </a:t>
             </a:r>
-            <a:endParaRPr lang="en-US" sz="1050" b="0" u="none" strike="noStrike">
+            <a:endParaRPr lang="en-US" sz="1050" b="0" u="none" strike="noStrike" dirty="0">
               <a:solidFill>
                 <a:srgbClr val="000000"/>
               </a:solidFill>
@@ -30031,7 +33288,7 @@
               </a:tabLst>
             </a:pPr>
             <a:r>
-              <a:rPr lang="en-US" sz="1050" b="0" u="none" strike="noStrike">
+              <a:rPr lang="en-US" sz="1050" b="0" u="none" strike="noStrike" dirty="0">
                 <a:solidFill>
                   <a:srgbClr val="2C3E50"/>
                 </a:solidFill>
@@ -30039,9 +33296,31 @@
                 <a:uFillTx/>
                 <a:latin typeface="Calibri"/>
               </a:rPr>
-              <a:t>It asks a second energy question: a residue that cannot fold on its own — could it gain enough favourable energy by binding a generic globular partner? If yes, it is flagged as a disordered binding region.</a:t>
+              <a:t>It asks a second energy question: a residue that cannot fold on its own — could it gain enough </a:t>
             </a:r>
-            <a:endParaRPr lang="en-US" sz="1050" b="0" u="none" strike="noStrike">
+            <a:r>
+              <a:rPr lang="en-US" sz="1050" b="0" u="none" strike="noStrike" dirty="0" err="1">
+                <a:solidFill>
+                  <a:srgbClr val="2C3E50"/>
+                </a:solidFill>
+                <a:effectLst/>
+                <a:uFillTx/>
+                <a:latin typeface="Calibri"/>
+              </a:rPr>
+              <a:t>favourable</a:t>
+            </a:r>
+            <a:r>
+              <a:rPr lang="en-US" sz="1050" b="0" u="none" strike="noStrike" dirty="0">
+                <a:solidFill>
+                  <a:srgbClr val="2C3E50"/>
+                </a:solidFill>
+                <a:effectLst/>
+                <a:uFillTx/>
+                <a:latin typeface="Calibri"/>
+              </a:rPr>
+              <a:t> energy by binding a generic globular partner? If yes, it is flagged as a disordered binding region.</a:t>
+            </a:r>
+            <a:endParaRPr lang="en-US" sz="1050" b="0" u="none" strike="noStrike" dirty="0">
               <a:solidFill>
                 <a:srgbClr val="000000"/>
               </a:solidFill>
@@ -30060,7 +33339,7 @@
               </a:tabLst>
             </a:pPr>
             <a:r>
-              <a:rPr lang="en-US" sz="1050" b="1" i="1" u="none" strike="noStrike">
+              <a:rPr lang="en-US" sz="1050" b="1" i="1" u="none" strike="noStrike" dirty="0">
                 <a:solidFill>
                   <a:srgbClr val="2C3E50"/>
                 </a:solidFill>
@@ -30068,9 +33347,31 @@
                 <a:uFillTx/>
                 <a:latin typeface="Calibri"/>
               </a:rPr>
-              <a:t>disordered on its own  +  energetically favourable to bind  →  binding-competent disorder</a:t>
+              <a:t>disordered on its own  +  energetically </a:t>
             </a:r>
-            <a:endParaRPr lang="en-US" sz="1050" b="0" u="none" strike="noStrike">
+            <a:r>
+              <a:rPr lang="en-US" sz="1050" b="1" i="1" u="none" strike="noStrike" dirty="0" err="1">
+                <a:solidFill>
+                  <a:srgbClr val="2C3E50"/>
+                </a:solidFill>
+                <a:effectLst/>
+                <a:uFillTx/>
+                <a:latin typeface="Calibri"/>
+              </a:rPr>
+              <a:t>favourable</a:t>
+            </a:r>
+            <a:r>
+              <a:rPr lang="en-US" sz="1050" b="1" i="1" u="none" strike="noStrike" dirty="0">
+                <a:solidFill>
+                  <a:srgbClr val="2C3E50"/>
+                </a:solidFill>
+                <a:effectLst/>
+                <a:uFillTx/>
+                <a:latin typeface="Calibri"/>
+              </a:rPr>
+              <a:t> to bind  →  binding-competent disorder</a:t>
+            </a:r>
+            <a:endParaRPr lang="en-US" sz="1050" b="0" u="none" strike="noStrike" dirty="0">
               <a:solidFill>
                 <a:srgbClr val="000000"/>
               </a:solidFill>
@@ -30089,7 +33390,7 @@
               </a:tabLst>
             </a:pPr>
             <a:r>
-              <a:rPr lang="en-US" sz="1050" b="0" u="none" strike="noStrike">
+              <a:rPr lang="en-US" sz="1050" b="0" u="none" strike="noStrike" dirty="0">
                 <a:solidFill>
                   <a:srgbClr val="2C3E50"/>
                 </a:solidFill>
@@ -30099,7 +33400,7 @@
               </a:rPr>
               <a:t>This is how a floppy region that looks 'structureless' is still identified as a functional interaction site (e.g. the KEN box, the phospho-cluster).</a:t>
             </a:r>
-            <a:endParaRPr lang="en-US" sz="1050" b="0" u="none" strike="noStrike">
+            <a:endParaRPr lang="en-US" sz="1050" b="0" u="none" strike="noStrike" dirty="0">
               <a:solidFill>
                 <a:srgbClr val="000000"/>
               </a:solidFill>
@@ -30195,6 +33496,550 @@
   <p:clrMapOvr>
     <a:masterClrMapping/>
   </p:clrMapOvr>
+  <mc:AlternateContent xmlns:mc="http://schemas.openxmlformats.org/markup-compatibility/2006">
+    <mc:Choice xmlns:p14="http://schemas.microsoft.com/office/powerpoint/2010/main" Requires="p14">
+      <p:transition spd="slow" p14:dur="3400">
+        <p14:reveal/>
+      </p:transition>
+    </mc:Choice>
+    <mc:Fallback>
+      <p:transition spd="slow">
+        <p:fade/>
+      </p:transition>
+    </mc:Fallback>
+  </mc:AlternateContent>
+  <p:timing>
+    <p:tnLst>
+      <p:par>
+        <p:cTn id="1" dur="indefinite" restart="never" nodeType="tmRoot">
+          <p:childTnLst>
+            <p:seq concurrent="1" nextAc="seek">
+              <p:cTn id="2" dur="indefinite" nodeType="mainSeq">
+                <p:childTnLst>
+                  <p:par>
+                    <p:cTn id="3" fill="hold">
+                      <p:stCondLst>
+                        <p:cond delay="indefinite"/>
+                      </p:stCondLst>
+                      <p:childTnLst>
+                        <p:par>
+                          <p:cTn id="4" fill="hold">
+                            <p:stCondLst>
+                              <p:cond delay="0"/>
+                            </p:stCondLst>
+                            <p:childTnLst>
+                              <p:par>
+                                <p:cTn id="5" presetID="10" presetClass="entr" presetSubtype="0" fill="hold" grpId="0" nodeType="clickEffect">
+                                  <p:stCondLst>
+                                    <p:cond delay="0"/>
+                                  </p:stCondLst>
+                                  <p:childTnLst>
+                                    <p:set>
+                                      <p:cBhvr>
+                                        <p:cTn id="6" dur="1" fill="hold">
+                                          <p:stCondLst>
+                                            <p:cond delay="0"/>
+                                          </p:stCondLst>
+                                        </p:cTn>
+                                        <p:tgtEl>
+                                          <p:spTgt spid="9"/>
+                                        </p:tgtEl>
+                                        <p:attrNameLst>
+                                          <p:attrName>style.visibility</p:attrName>
+                                        </p:attrNameLst>
+                                      </p:cBhvr>
+                                      <p:to>
+                                        <p:strVal val="visible"/>
+                                      </p:to>
+                                    </p:set>
+                                    <p:animEffect transition="in" filter="fade">
+                                      <p:cBhvr>
+                                        <p:cTn id="7" dur="500"/>
+                                        <p:tgtEl>
+                                          <p:spTgt spid="9"/>
+                                        </p:tgtEl>
+                                      </p:cBhvr>
+                                    </p:animEffect>
+                                  </p:childTnLst>
+                                </p:cTn>
+                              </p:par>
+                            </p:childTnLst>
+                          </p:cTn>
+                        </p:par>
+                      </p:childTnLst>
+                    </p:cTn>
+                  </p:par>
+                  <p:par>
+                    <p:cTn id="8" fill="hold">
+                      <p:stCondLst>
+                        <p:cond delay="indefinite"/>
+                      </p:stCondLst>
+                      <p:childTnLst>
+                        <p:par>
+                          <p:cTn id="9" fill="hold">
+                            <p:stCondLst>
+                              <p:cond delay="0"/>
+                            </p:stCondLst>
+                            <p:childTnLst>
+                              <p:par>
+                                <p:cTn id="10" presetID="10" presetClass="entr" presetSubtype="0" fill="hold" grpId="0" nodeType="clickEffect">
+                                  <p:stCondLst>
+                                    <p:cond delay="0"/>
+                                  </p:stCondLst>
+                                  <p:childTnLst>
+                                    <p:set>
+                                      <p:cBhvr>
+                                        <p:cTn id="11" dur="1" fill="hold">
+                                          <p:stCondLst>
+                                            <p:cond delay="0"/>
+                                          </p:stCondLst>
+                                        </p:cTn>
+                                        <p:tgtEl>
+                                          <p:spTgt spid="10"/>
+                                        </p:tgtEl>
+                                        <p:attrNameLst>
+                                          <p:attrName>style.visibility</p:attrName>
+                                        </p:attrNameLst>
+                                      </p:cBhvr>
+                                      <p:to>
+                                        <p:strVal val="visible"/>
+                                      </p:to>
+                                    </p:set>
+                                    <p:animEffect transition="in" filter="fade">
+                                      <p:cBhvr>
+                                        <p:cTn id="12" dur="500"/>
+                                        <p:tgtEl>
+                                          <p:spTgt spid="10"/>
+                                        </p:tgtEl>
+                                      </p:cBhvr>
+                                    </p:animEffect>
+                                  </p:childTnLst>
+                                </p:cTn>
+                              </p:par>
+                            </p:childTnLst>
+                          </p:cTn>
+                        </p:par>
+                      </p:childTnLst>
+                    </p:cTn>
+                  </p:par>
+                  <p:par>
+                    <p:cTn id="13" fill="hold">
+                      <p:stCondLst>
+                        <p:cond delay="indefinite"/>
+                      </p:stCondLst>
+                      <p:childTnLst>
+                        <p:par>
+                          <p:cTn id="14" fill="hold">
+                            <p:stCondLst>
+                              <p:cond delay="0"/>
+                            </p:stCondLst>
+                            <p:childTnLst>
+                              <p:par>
+                                <p:cTn id="15" presetID="10" presetClass="entr" presetSubtype="0" fill="hold" grpId="0" nodeType="clickEffect">
+                                  <p:stCondLst>
+                                    <p:cond delay="0"/>
+                                  </p:stCondLst>
+                                  <p:childTnLst>
+                                    <p:set>
+                                      <p:cBhvr>
+                                        <p:cTn id="16" dur="1" fill="hold">
+                                          <p:stCondLst>
+                                            <p:cond delay="0"/>
+                                          </p:stCondLst>
+                                        </p:cTn>
+                                        <p:tgtEl>
+                                          <p:spTgt spid="11"/>
+                                        </p:tgtEl>
+                                        <p:attrNameLst>
+                                          <p:attrName>style.visibility</p:attrName>
+                                        </p:attrNameLst>
+                                      </p:cBhvr>
+                                      <p:to>
+                                        <p:strVal val="visible"/>
+                                      </p:to>
+                                    </p:set>
+                                    <p:animEffect transition="in" filter="fade">
+                                      <p:cBhvr>
+                                        <p:cTn id="17" dur="500"/>
+                                        <p:tgtEl>
+                                          <p:spTgt spid="11"/>
+                                        </p:tgtEl>
+                                      </p:cBhvr>
+                                    </p:animEffect>
+                                  </p:childTnLst>
+                                </p:cTn>
+                              </p:par>
+                            </p:childTnLst>
+                          </p:cTn>
+                        </p:par>
+                      </p:childTnLst>
+                    </p:cTn>
+                  </p:par>
+                  <p:par>
+                    <p:cTn id="18" fill="hold">
+                      <p:stCondLst>
+                        <p:cond delay="indefinite"/>
+                      </p:stCondLst>
+                      <p:childTnLst>
+                        <p:par>
+                          <p:cTn id="19" fill="hold">
+                            <p:stCondLst>
+                              <p:cond delay="0"/>
+                            </p:stCondLst>
+                            <p:childTnLst>
+                              <p:par>
+                                <p:cTn id="20" presetID="10" presetClass="entr" presetSubtype="0" fill="hold" grpId="0" nodeType="clickEffect">
+                                  <p:stCondLst>
+                                    <p:cond delay="0"/>
+                                  </p:stCondLst>
+                                  <p:childTnLst>
+                                    <p:set>
+                                      <p:cBhvr>
+                                        <p:cTn id="21" dur="1" fill="hold">
+                                          <p:stCondLst>
+                                            <p:cond delay="0"/>
+                                          </p:stCondLst>
+                                        </p:cTn>
+                                        <p:tgtEl>
+                                          <p:spTgt spid="12"/>
+                                        </p:tgtEl>
+                                        <p:attrNameLst>
+                                          <p:attrName>style.visibility</p:attrName>
+                                        </p:attrNameLst>
+                                      </p:cBhvr>
+                                      <p:to>
+                                        <p:strVal val="visible"/>
+                                      </p:to>
+                                    </p:set>
+                                    <p:animEffect transition="in" filter="fade">
+                                      <p:cBhvr>
+                                        <p:cTn id="22" dur="500"/>
+                                        <p:tgtEl>
+                                          <p:spTgt spid="12"/>
+                                        </p:tgtEl>
+                                      </p:cBhvr>
+                                    </p:animEffect>
+                                  </p:childTnLst>
+                                </p:cTn>
+                              </p:par>
+                            </p:childTnLst>
+                          </p:cTn>
+                        </p:par>
+                      </p:childTnLst>
+                    </p:cTn>
+                  </p:par>
+                  <p:par>
+                    <p:cTn id="23" fill="hold">
+                      <p:stCondLst>
+                        <p:cond delay="indefinite"/>
+                      </p:stCondLst>
+                      <p:childTnLst>
+                        <p:par>
+                          <p:cTn id="24" fill="hold">
+                            <p:stCondLst>
+                              <p:cond delay="0"/>
+                            </p:stCondLst>
+                            <p:childTnLst>
+                              <p:par>
+                                <p:cTn id="25" presetID="10" presetClass="entr" presetSubtype="0" fill="hold" grpId="0" nodeType="clickEffect">
+                                  <p:stCondLst>
+                                    <p:cond delay="0"/>
+                                  </p:stCondLst>
+                                  <p:childTnLst>
+                                    <p:set>
+                                      <p:cBhvr>
+                                        <p:cTn id="26" dur="1" fill="hold">
+                                          <p:stCondLst>
+                                            <p:cond delay="0"/>
+                                          </p:stCondLst>
+                                        </p:cTn>
+                                        <p:tgtEl>
+                                          <p:spTgt spid="13">
+                                            <p:bg/>
+                                          </p:spTgt>
+                                        </p:tgtEl>
+                                        <p:attrNameLst>
+                                          <p:attrName>style.visibility</p:attrName>
+                                        </p:attrNameLst>
+                                      </p:cBhvr>
+                                      <p:to>
+                                        <p:strVal val="visible"/>
+                                      </p:to>
+                                    </p:set>
+                                    <p:animEffect transition="in" filter="fade">
+                                      <p:cBhvr>
+                                        <p:cTn id="27" dur="500"/>
+                                        <p:tgtEl>
+                                          <p:spTgt spid="13">
+                                            <p:bg/>
+                                          </p:spTgt>
+                                        </p:tgtEl>
+                                      </p:cBhvr>
+                                    </p:animEffect>
+                                  </p:childTnLst>
+                                </p:cTn>
+                              </p:par>
+                              <p:par>
+                                <p:cTn id="28" presetID="10" presetClass="entr" presetSubtype="0" fill="hold" grpId="0" nodeType="withEffect">
+                                  <p:stCondLst>
+                                    <p:cond delay="0"/>
+                                  </p:stCondLst>
+                                  <p:childTnLst>
+                                    <p:set>
+                                      <p:cBhvr>
+                                        <p:cTn id="29" dur="1" fill="hold">
+                                          <p:stCondLst>
+                                            <p:cond delay="0"/>
+                                          </p:stCondLst>
+                                        </p:cTn>
+                                        <p:tgtEl>
+                                          <p:spTgt spid="13">
+                                            <p:txEl>
+                                              <p:pRg st="0" end="0"/>
+                                            </p:txEl>
+                                          </p:spTgt>
+                                        </p:tgtEl>
+                                        <p:attrNameLst>
+                                          <p:attrName>style.visibility</p:attrName>
+                                        </p:attrNameLst>
+                                      </p:cBhvr>
+                                      <p:to>
+                                        <p:strVal val="visible"/>
+                                      </p:to>
+                                    </p:set>
+                                    <p:animEffect transition="in" filter="fade">
+                                      <p:cBhvr>
+                                        <p:cTn id="30" dur="500"/>
+                                        <p:tgtEl>
+                                          <p:spTgt spid="13">
+                                            <p:txEl>
+                                              <p:pRg st="0" end="0"/>
+                                            </p:txEl>
+                                          </p:spTgt>
+                                        </p:tgtEl>
+                                      </p:cBhvr>
+                                    </p:animEffect>
+                                  </p:childTnLst>
+                                </p:cTn>
+                              </p:par>
+                              <p:par>
+                                <p:cTn id="31" presetID="10" presetClass="entr" presetSubtype="0" fill="hold" grpId="0" nodeType="withEffect">
+                                  <p:stCondLst>
+                                    <p:cond delay="0"/>
+                                  </p:stCondLst>
+                                  <p:childTnLst>
+                                    <p:set>
+                                      <p:cBhvr>
+                                        <p:cTn id="32" dur="1" fill="hold">
+                                          <p:stCondLst>
+                                            <p:cond delay="0"/>
+                                          </p:stCondLst>
+                                        </p:cTn>
+                                        <p:tgtEl>
+                                          <p:spTgt spid="13">
+                                            <p:txEl>
+                                              <p:pRg st="1" end="1"/>
+                                            </p:txEl>
+                                          </p:spTgt>
+                                        </p:tgtEl>
+                                        <p:attrNameLst>
+                                          <p:attrName>style.visibility</p:attrName>
+                                        </p:attrNameLst>
+                                      </p:cBhvr>
+                                      <p:to>
+                                        <p:strVal val="visible"/>
+                                      </p:to>
+                                    </p:set>
+                                    <p:animEffect transition="in" filter="fade">
+                                      <p:cBhvr>
+                                        <p:cTn id="33" dur="500"/>
+                                        <p:tgtEl>
+                                          <p:spTgt spid="13">
+                                            <p:txEl>
+                                              <p:pRg st="1" end="1"/>
+                                            </p:txEl>
+                                          </p:spTgt>
+                                        </p:tgtEl>
+                                      </p:cBhvr>
+                                    </p:animEffect>
+                                  </p:childTnLst>
+                                </p:cTn>
+                              </p:par>
+                              <p:par>
+                                <p:cTn id="34" presetID="10" presetClass="entr" presetSubtype="0" fill="hold" grpId="0" nodeType="withEffect">
+                                  <p:stCondLst>
+                                    <p:cond delay="0"/>
+                                  </p:stCondLst>
+                                  <p:childTnLst>
+                                    <p:set>
+                                      <p:cBhvr>
+                                        <p:cTn id="35" dur="1" fill="hold">
+                                          <p:stCondLst>
+                                            <p:cond delay="0"/>
+                                          </p:stCondLst>
+                                        </p:cTn>
+                                        <p:tgtEl>
+                                          <p:spTgt spid="13">
+                                            <p:txEl>
+                                              <p:pRg st="2" end="2"/>
+                                            </p:txEl>
+                                          </p:spTgt>
+                                        </p:tgtEl>
+                                        <p:attrNameLst>
+                                          <p:attrName>style.visibility</p:attrName>
+                                        </p:attrNameLst>
+                                      </p:cBhvr>
+                                      <p:to>
+                                        <p:strVal val="visible"/>
+                                      </p:to>
+                                    </p:set>
+                                    <p:animEffect transition="in" filter="fade">
+                                      <p:cBhvr>
+                                        <p:cTn id="36" dur="500"/>
+                                        <p:tgtEl>
+                                          <p:spTgt spid="13">
+                                            <p:txEl>
+                                              <p:pRg st="2" end="2"/>
+                                            </p:txEl>
+                                          </p:spTgt>
+                                        </p:tgtEl>
+                                      </p:cBhvr>
+                                    </p:animEffect>
+                                  </p:childTnLst>
+                                </p:cTn>
+                              </p:par>
+                              <p:par>
+                                <p:cTn id="37" presetID="10" presetClass="entr" presetSubtype="0" fill="hold" grpId="0" nodeType="withEffect">
+                                  <p:stCondLst>
+                                    <p:cond delay="0"/>
+                                  </p:stCondLst>
+                                  <p:childTnLst>
+                                    <p:set>
+                                      <p:cBhvr>
+                                        <p:cTn id="38" dur="1" fill="hold">
+                                          <p:stCondLst>
+                                            <p:cond delay="0"/>
+                                          </p:stCondLst>
+                                        </p:cTn>
+                                        <p:tgtEl>
+                                          <p:spTgt spid="13">
+                                            <p:txEl>
+                                              <p:pRg st="3" end="3"/>
+                                            </p:txEl>
+                                          </p:spTgt>
+                                        </p:tgtEl>
+                                        <p:attrNameLst>
+                                          <p:attrName>style.visibility</p:attrName>
+                                        </p:attrNameLst>
+                                      </p:cBhvr>
+                                      <p:to>
+                                        <p:strVal val="visible"/>
+                                      </p:to>
+                                    </p:set>
+                                    <p:animEffect transition="in" filter="fade">
+                                      <p:cBhvr>
+                                        <p:cTn id="39" dur="500"/>
+                                        <p:tgtEl>
+                                          <p:spTgt spid="13">
+                                            <p:txEl>
+                                              <p:pRg st="3" end="3"/>
+                                            </p:txEl>
+                                          </p:spTgt>
+                                        </p:tgtEl>
+                                      </p:cBhvr>
+                                    </p:animEffect>
+                                  </p:childTnLst>
+                                </p:cTn>
+                              </p:par>
+                            </p:childTnLst>
+                          </p:cTn>
+                        </p:par>
+                      </p:childTnLst>
+                    </p:cTn>
+                  </p:par>
+                  <p:par>
+                    <p:cTn id="40" fill="hold">
+                      <p:stCondLst>
+                        <p:cond delay="indefinite"/>
+                      </p:stCondLst>
+                      <p:childTnLst>
+                        <p:par>
+                          <p:cTn id="41" fill="hold">
+                            <p:stCondLst>
+                              <p:cond delay="0"/>
+                            </p:stCondLst>
+                            <p:childTnLst>
+                              <p:par>
+                                <p:cTn id="42" presetID="10" presetClass="entr" presetSubtype="0" fill="hold" grpId="0" nodeType="clickEffect">
+                                  <p:stCondLst>
+                                    <p:cond delay="0"/>
+                                  </p:stCondLst>
+                                  <p:childTnLst>
+                                    <p:set>
+                                      <p:cBhvr>
+                                        <p:cTn id="43" dur="1" fill="hold">
+                                          <p:stCondLst>
+                                            <p:cond delay="0"/>
+                                          </p:stCondLst>
+                                        </p:cTn>
+                                        <p:tgtEl>
+                                          <p:spTgt spid="14"/>
+                                        </p:tgtEl>
+                                        <p:attrNameLst>
+                                          <p:attrName>style.visibility</p:attrName>
+                                        </p:attrNameLst>
+                                      </p:cBhvr>
+                                      <p:to>
+                                        <p:strVal val="visible"/>
+                                      </p:to>
+                                    </p:set>
+                                    <p:animEffect transition="in" filter="fade">
+                                      <p:cBhvr>
+                                        <p:cTn id="44" dur="500"/>
+                                        <p:tgtEl>
+                                          <p:spTgt spid="14"/>
+                                        </p:tgtEl>
+                                      </p:cBhvr>
+                                    </p:animEffect>
+                                  </p:childTnLst>
+                                </p:cTn>
+                              </p:par>
+                            </p:childTnLst>
+                          </p:cTn>
+                        </p:par>
+                      </p:childTnLst>
+                    </p:cTn>
+                  </p:par>
+                </p:childTnLst>
+              </p:cTn>
+              <p:prevCondLst>
+                <p:cond evt="onPrev" delay="0">
+                  <p:tgtEl>
+                    <p:sldTgt/>
+                  </p:tgtEl>
+                </p:cond>
+              </p:prevCondLst>
+              <p:nextCondLst>
+                <p:cond evt="onNext" delay="0">
+                  <p:tgtEl>
+                    <p:sldTgt/>
+                  </p:tgtEl>
+                </p:cond>
+              </p:nextCondLst>
+            </p:seq>
+          </p:childTnLst>
+        </p:cTn>
+      </p:par>
+    </p:tnLst>
+    <p:bldLst>
+      <p:bldP spid="9" grpId="0" animBg="1"/>
+      <p:bldP spid="10" grpId="0" animBg="1"/>
+      <p:bldP spid="11" grpId="0" animBg="1"/>
+      <p:bldP spid="12" grpId="0" animBg="1"/>
+      <p:bldP spid="13" grpId="0" build="allAtOnce" animBg="1"/>
+      <p:bldP spid="14" grpId="0"/>
+    </p:bldLst>
+  </p:timing>
 </p:sld>
 </file>
 
@@ -30619,6 +34464,18 @@
   <p:clrMapOvr>
     <a:masterClrMapping/>
   </p:clrMapOvr>
+  <mc:AlternateContent xmlns:mc="http://schemas.openxmlformats.org/markup-compatibility/2006">
+    <mc:Choice xmlns:p14="http://schemas.microsoft.com/office/powerpoint/2010/main" Requires="p14">
+      <p:transition spd="slow" p14:dur="3400">
+        <p14:reveal/>
+      </p:transition>
+    </mc:Choice>
+    <mc:Fallback>
+      <p:transition spd="slow">
+        <p:fade/>
+      </p:transition>
+    </mc:Fallback>
+  </mc:AlternateContent>
   <p:timing>
     <p:tnLst>
       <p:par>

--- a/Sororin_mechanism_flowchart.pptx
+++ b/Sororin_mechanism_flowchart.pptx
@@ -12,6 +12,7 @@
     <p:sldId id="257" r:id="rId3"/>
     <p:sldId id="258" r:id="rId4"/>
     <p:sldId id="259" r:id="rId5"/>
+    <p:sldId id="272" r:id="rId23"/>
     <p:sldId id="261" r:id="rId6"/>
     <p:sldId id="264" r:id="rId7"/>
     <p:sldId id="260" r:id="rId8"/>
@@ -19622,6 +19623,2133 @@
 </p:sld>
 </file>
 
+<file path=ppt/slides/slide17.xml><?xml version="1.0" encoding="utf-8"?>
+<p:sld xmlns:a="http://schemas.openxmlformats.org/drawingml/2006/main" xmlns:p="http://schemas.openxmlformats.org/presentationml/2006/main" xmlns:r="http://schemas.openxmlformats.org/officeDocument/2006/relationships" xmlns:p14="http://schemas.microsoft.com/office/powerpoint/2010/main" xmlns:p15="http://schemas.microsoft.com/office/powerpoint/2012/main" xmlns:mc="http://schemas.openxmlformats.org/markup-compatibility/2006">
+  <p:cSld>
+    <p:spTree>
+      <p:nvGrpSpPr>
+        <p:cNvPr id="1" name=""/>
+        <p:cNvGrpSpPr/>
+        <p:nvPr/>
+      </p:nvGrpSpPr>
+      <p:grpSpPr>
+        <a:xfrm>
+          <a:off x="0" y="0"/>
+          <a:ext cx="0" cy="0"/>
+          <a:chOff x="0" y="0"/>
+          <a:chExt cx="0" cy="0"/>
+        </a:xfrm>
+      </p:grpSpPr>
+      <p:sp>
+        <p:nvSpPr>
+          <p:cNvPr id="8" name="Text 0"/>
+          <p:cNvSpPr/>
+          <p:nvPr/>
+        </p:nvSpPr>
+        <p:spPr>
+          <a:xfrm>
+            <a:off x="274320" y="109800"/>
+            <a:ext cx="11639880" cy="456840"/>
+          </a:xfrm>
+          <a:prstGeom prst="rect">
+            <a:avLst/>
+          </a:prstGeom>
+          <a:noFill/>
+          <a:ln w="0">
+            <a:noFill/>
+          </a:ln>
+        </p:spPr>
+        <p:style>
+          <a:lnRef idx="0"/>
+          <a:fillRef idx="0"/>
+          <a:effectRef idx="0"/>
+          <a:fontRef idx="minor"/>
+        </p:style>
+        <p:txBody>
+          <a:bodyPr lIns="90000" tIns="45000" rIns="90000" bIns="45000" anchor="ctr">
+            <a:noAutofit/>
+          </a:bodyPr>
+          <a:p>
+            <a:pPr algn="ctr" defTabSz="914400">
+              <a:lnSpc>
+                <a:spcPct val="100000"/>
+              </a:lnSpc>
+              <a:tabLst>
+                <a:tab pos="0" algn="l"/>
+              </a:tabLst>
+            </a:pPr>
+            <a:r>
+              <a:rPr lang="en-US" sz="1900" b="1" u="none" strike="noStrike">
+                <a:solidFill>
+                  <a:srgbClr val="2C3E50"/>
+                </a:solidFill>
+                <a:effectLst/>
+                <a:uFillTx/>
+                <a:latin typeface="Calibri"/>
+                <a:ea typeface="Calibri"/>
+              </a:rPr>
+              <a:t>How this was done — the tool chain, and what each claim rests on</a:t>
+            </a:r>
+            <a:endParaRPr lang="en-US" sz="1900" b="0" u="none" strike="noStrike">
+              <a:solidFill>
+                <a:srgbClr val="000000"/>
+              </a:solidFill>
+              <a:effectLst/>
+              <a:uFillTx/>
+              <a:latin typeface="Arial"/>
+            </a:endParaRPr>
+          </a:p>
+        </p:txBody>
+      </p:sp>
+      <p:sp>
+        <p:nvSpPr>
+          <p:cNvPr id="9" name="Text 1"/>
+          <p:cNvSpPr/>
+          <p:nvPr/>
+        </p:nvSpPr>
+        <p:spPr>
+          <a:xfrm>
+            <a:off x="320040" y="640080"/>
+            <a:ext cx="11548440" cy="712800"/>
+          </a:xfrm>
+          <a:prstGeom prst="roundRect">
+            <a:avLst>
+              <a:gd name="adj" fmla="val 6410"/>
+            </a:avLst>
+          </a:prstGeom>
+          <a:solidFill>
+            <a:srgbClr val="2C3E50"/>
+          </a:solidFill>
+          <a:ln w="0">
+            <a:noFill/>
+          </a:ln>
+        </p:spPr>
+        <p:style>
+          <a:lnRef idx="0"/>
+          <a:fillRef idx="0"/>
+          <a:effectRef idx="0"/>
+          <a:fontRef idx="minor"/>
+        </p:style>
+        <p:txBody>
+          <a:bodyPr lIns="90000" tIns="45000" rIns="90000" bIns="45000" anchor="ctr">
+            <a:noAutofit/>
+          </a:bodyPr>
+          <a:p>
+            <a:pPr algn="ctr" defTabSz="914400">
+              <a:lnSpc>
+                <a:spcPct val="100000"/>
+              </a:lnSpc>
+              <a:tabLst>
+                <a:tab pos="0" algn="l"/>
+              </a:tabLst>
+            </a:pPr>
+            <a:r>
+              <a:rPr lang="en-US" sz="1150" b="1" u="none" strike="noStrike">
+                <a:solidFill>
+                  <a:srgbClr val="FFFFFF"/>
+                </a:solidFill>
+                <a:effectLst/>
+                <a:uFillTx/>
+                <a:latin typeface="Calibri"/>
+                <a:ea typeface="Calibri"/>
+              </a:rPr>
+              <a:t>This is a computational study.  </a:t>
+            </a:r>
+            <a:r>
+              <a:rPr lang="en-US" sz="1150" b="0" u="none" strike="noStrike">
+                <a:solidFill>
+                  <a:srgbClr val="FFFFFF"/>
+                </a:solidFill>
+                <a:effectLst/>
+                <a:uFillTx/>
+                <a:latin typeface="Calibri"/>
+                <a:ea typeface="Calibri"/>
+              </a:rPr>
+              <a:t>Everything comes from public databases and sequence-based prediction — no experiments were performed. So I separate below what is </a:t>
+            </a:r>
+            <a:r>
+              <a:rPr lang="en-US" sz="1150" b="1" u="none" strike="noStrike">
+                <a:solidFill>
+                  <a:srgbClr val="CFE3F5"/>
+                </a:solidFill>
+                <a:effectLst/>
+                <a:uFillTx/>
+                <a:latin typeface="Calibri"/>
+                <a:ea typeface="Calibri"/>
+              </a:rPr>
+              <a:t>curated data</a:t>
+            </a:r>
+            <a:r>
+              <a:rPr lang="en-US" sz="1150" b="0" u="none" strike="noStrike">
+                <a:solidFill>
+                  <a:srgbClr val="FFFFFF"/>
+                </a:solidFill>
+                <a:effectLst/>
+                <a:uFillTx/>
+                <a:latin typeface="Calibri"/>
+                <a:ea typeface="Calibri"/>
+              </a:rPr>
+              <a:t>, what is </a:t>
+            </a:r>
+            <a:r>
+              <a:rPr lang="en-US" sz="1150" b="1" u="none" strike="noStrike">
+                <a:solidFill>
+                  <a:srgbClr val="CFE3F5"/>
+                </a:solidFill>
+                <a:effectLst/>
+                <a:uFillTx/>
+                <a:latin typeface="Calibri"/>
+                <a:ea typeface="Calibri"/>
+              </a:rPr>
+              <a:t>prediction cross-checked by several methods</a:t>
+            </a:r>
+            <a:r>
+              <a:rPr lang="en-US" sz="1150" b="0" u="none" strike="noStrike">
+                <a:solidFill>
+                  <a:srgbClr val="FFFFFF"/>
+                </a:solidFill>
+                <a:effectLst/>
+                <a:uFillTx/>
+                <a:latin typeface="Calibri"/>
+                <a:ea typeface="Calibri"/>
+              </a:rPr>
+              <a:t>, and what remains a </a:t>
+            </a:r>
+            <a:r>
+              <a:rPr lang="en-US" sz="1150" b="1" u="none" strike="noStrike">
+                <a:solidFill>
+                  <a:srgbClr val="CFE3F5"/>
+                </a:solidFill>
+                <a:effectLst/>
+                <a:uFillTx/>
+                <a:latin typeface="Calibri"/>
+                <a:ea typeface="Calibri"/>
+              </a:rPr>
+              <a:t>hypothesis to be tested.</a:t>
+            </a:r>
+            <a:endParaRPr lang="en-US" sz="1150" b="0" u="none" strike="noStrike">
+              <a:solidFill>
+                <a:srgbClr val="FFFFFF"/>
+              </a:solidFill>
+              <a:effectLst/>
+              <a:uFillTx/>
+              <a:latin typeface="Arial"/>
+            </a:endParaRPr>
+          </a:p>
+        </p:txBody>
+      </p:sp>
+      <p:sp>
+        <p:nvSpPr>
+          <p:cNvPr id="10" name="Text 2"/>
+          <p:cNvSpPr/>
+          <p:nvPr/>
+        </p:nvSpPr>
+        <p:spPr>
+          <a:xfrm>
+            <a:off x="320040" y="1481400"/>
+            <a:ext cx="5486040" cy="219240"/>
+          </a:xfrm>
+          <a:prstGeom prst="rect">
+            <a:avLst/>
+          </a:prstGeom>
+          <a:noFill/>
+          <a:ln w="0">
+            <a:noFill/>
+          </a:ln>
+        </p:spPr>
+        <p:style>
+          <a:lnRef idx="0"/>
+          <a:fillRef idx="0"/>
+          <a:effectRef idx="0"/>
+          <a:fontRef idx="minor"/>
+        </p:style>
+        <p:txBody>
+          <a:bodyPr lIns="90000" tIns="45000" rIns="90000" bIns="45000" anchor="ctr">
+            <a:noAutofit/>
+          </a:bodyPr>
+          <a:p>
+            <a:pPr defTabSz="914400">
+              <a:lnSpc>
+                <a:spcPct val="100000"/>
+              </a:lnSpc>
+              <a:tabLst>
+                <a:tab pos="0" algn="l"/>
+              </a:tabLst>
+            </a:pPr>
+            <a:r>
+              <a:rPr lang="en-US" sz="1100" b="1" u="none" strike="noStrike">
+                <a:solidFill>
+                  <a:srgbClr val="2C3E50"/>
+                </a:solidFill>
+                <a:effectLst/>
+                <a:uFillTx/>
+                <a:latin typeface="Calibri"/>
+                <a:ea typeface="Calibri"/>
+              </a:rPr>
+              <a:t>The pipeline</a:t>
+            </a:r>
+            <a:endParaRPr lang="en-US" sz="1100" b="0" u="none" strike="noStrike">
+              <a:solidFill>
+                <a:srgbClr val="000000"/>
+              </a:solidFill>
+              <a:effectLst/>
+              <a:uFillTx/>
+              <a:latin typeface="Arial"/>
+            </a:endParaRPr>
+          </a:p>
+        </p:txBody>
+      </p:sp>
+      <p:sp>
+        <p:nvSpPr>
+          <p:cNvPr id="11" name="Text 3"/>
+          <p:cNvSpPr/>
+          <p:nvPr/>
+        </p:nvSpPr>
+        <p:spPr>
+          <a:xfrm>
+            <a:off x="320040" y="1755720"/>
+            <a:ext cx="1737000" cy="1170000"/>
+          </a:xfrm>
+          <a:prstGeom prst="roundRect">
+            <a:avLst>
+              <a:gd name="adj" fmla="val 5469"/>
+            </a:avLst>
+          </a:prstGeom>
+          <a:solidFill>
+            <a:srgbClr val="DBE9F5"/>
+          </a:solidFill>
+          <a:ln w="17780">
+            <a:solidFill>
+              <a:srgbClr val="2166AC"/>
+            </a:solidFill>
+            <a:round/>
+          </a:ln>
+        </p:spPr>
+        <p:style>
+          <a:lnRef idx="0"/>
+          <a:fillRef idx="0"/>
+          <a:effectRef idx="0"/>
+          <a:fontRef idx="minor"/>
+        </p:style>
+        <p:txBody>
+          <a:bodyPr lIns="63360" tIns="63360" rIns="63360" bIns="63360" anchor="ctr">
+            <a:noAutofit/>
+          </a:bodyPr>
+          <a:p>
+            <a:r>
+              <a:rPr lang="en-US" sz="1050" b="1" u="none" strike="noStrike">
+                <a:solidFill>
+                  <a:srgbClr val="2166AC"/>
+                </a:solidFill>
+                <a:effectLst/>
+                <a:uFillTx/>
+                <a:latin typeface="Calibri"/>
+                <a:ea typeface="Calibri"/>
+              </a:rPr>
+              <a:t>UniProt</a:t>
+            </a:r>
+            <a:endParaRPr lang="en-US" sz="1050" b="0" u="none" strike="noStrike">
+              <a:solidFill>
+                <a:srgbClr val="000000"/>
+              </a:solidFill>
+              <a:effectLst/>
+              <a:uFillTx/>
+              <a:latin typeface="Arial"/>
+            </a:endParaRPr>
+          </a:p>
+          <a:p>
+            <a:pPr algn="ctr" defTabSz="914400">
+              <a:lnSpc>
+                <a:spcPct val="95000"/>
+              </a:lnSpc>
+              <a:tabLst>
+                <a:tab pos="0" algn="l"/>
+              </a:tabLst>
+            </a:pPr>
+            <a:endParaRPr lang="en-US" sz="1050" b="0" u="none" strike="noStrike">
+              <a:solidFill>
+                <a:srgbClr val="000000"/>
+              </a:solidFill>
+              <a:effectLst/>
+              <a:uFillTx/>
+              <a:latin typeface="Arial"/>
+            </a:endParaRPr>
+          </a:p>
+          <a:p>
+            <a:pPr algn="ctr" defTabSz="914400">
+              <a:lnSpc>
+                <a:spcPct val="95000"/>
+              </a:lnSpc>
+              <a:tabLst>
+                <a:tab pos="0" algn="l"/>
+              </a:tabLst>
+            </a:pPr>
+            <a:r>
+              <a:rPr lang="en-US" sz="850" b="0" u="none" strike="noStrike">
+                <a:solidFill>
+                  <a:srgbClr val="2C3E50"/>
+                </a:solidFill>
+                <a:effectLst/>
+                <a:uFillTx/>
+                <a:latin typeface="Calibri"/>
+                <a:ea typeface="Calibri"/>
+              </a:rPr>
+              <a:t>sequence, IDRs,</a:t>
+            </a:r>
+            <a:endParaRPr lang="en-US" sz="850" b="0" u="none" strike="noStrike">
+              <a:solidFill>
+                <a:srgbClr val="000000"/>
+              </a:solidFill>
+              <a:effectLst/>
+              <a:uFillTx/>
+              <a:latin typeface="Arial"/>
+            </a:endParaRPr>
+          </a:p>
+          <a:p>
+            <a:pPr algn="ctr" defTabSz="914400">
+              <a:lnSpc>
+                <a:spcPct val="95000"/>
+              </a:lnSpc>
+              <a:tabLst>
+                <a:tab pos="0" algn="l"/>
+              </a:tabLst>
+            </a:pPr>
+            <a:r>
+              <a:rPr lang="en-US" sz="850" b="0" u="none" strike="noStrike">
+                <a:solidFill>
+                  <a:srgbClr val="2C3E50"/>
+                </a:solidFill>
+                <a:effectLst/>
+                <a:uFillTx/>
+                <a:latin typeface="Calibri"/>
+                <a:ea typeface="Calibri"/>
+              </a:rPr>
+              <a:t>motifs, phospho-sites</a:t>
+            </a:r>
+            <a:endParaRPr lang="en-US" sz="850" b="0" u="none" strike="noStrike">
+              <a:solidFill>
+                <a:srgbClr val="000000"/>
+              </a:solidFill>
+              <a:effectLst/>
+              <a:uFillTx/>
+              <a:latin typeface="Arial"/>
+            </a:endParaRPr>
+          </a:p>
+        </p:txBody>
+      </p:sp>
+      <p:sp>
+        <p:nvSpPr>
+          <p:cNvPr id="12" name="Text 4"/>
+          <p:cNvSpPr/>
+          <p:nvPr/>
+        </p:nvSpPr>
+        <p:spPr>
+          <a:xfrm>
+            <a:off x="2286000" y="1755720"/>
+            <a:ext cx="1737000" cy="1170000"/>
+          </a:xfrm>
+          <a:prstGeom prst="roundRect">
+            <a:avLst>
+              <a:gd name="adj" fmla="val 5469"/>
+            </a:avLst>
+          </a:prstGeom>
+          <a:solidFill>
+            <a:srgbClr val="E3F2F4"/>
+          </a:solidFill>
+          <a:ln w="17780">
+            <a:solidFill>
+              <a:srgbClr val="2E8090"/>
+            </a:solidFill>
+            <a:round/>
+          </a:ln>
+        </p:spPr>
+        <p:style>
+          <a:lnRef idx="0"/>
+          <a:fillRef idx="0"/>
+          <a:effectRef idx="0"/>
+          <a:fontRef idx="minor"/>
+        </p:style>
+        <p:txBody>
+          <a:bodyPr lIns="63360" tIns="63360" rIns="63360" bIns="63360" anchor="ctr">
+            <a:noAutofit/>
+          </a:bodyPr>
+          <a:p>
+            <a:r>
+              <a:rPr lang="en-US" sz="1050" b="1" u="none" strike="noStrike">
+                <a:solidFill>
+                  <a:srgbClr val="1F6F7A"/>
+                </a:solidFill>
+                <a:effectLst/>
+                <a:uFillTx/>
+                <a:latin typeface="Calibri"/>
+                <a:ea typeface="Calibri"/>
+              </a:rPr>
+              <a:t>STRING</a:t>
+            </a:r>
+            <a:endParaRPr lang="en-US" sz="1050" b="0" u="none" strike="noStrike">
+              <a:solidFill>
+                <a:srgbClr val="000000"/>
+              </a:solidFill>
+              <a:effectLst/>
+              <a:uFillTx/>
+              <a:latin typeface="Arial"/>
+            </a:endParaRPr>
+          </a:p>
+          <a:p>
+            <a:r>
+              <a:rPr lang="en-US" sz="1050" b="1" u="none" strike="noStrike">
+                <a:solidFill>
+                  <a:srgbClr val="1F6F7A"/>
+                </a:solidFill>
+                <a:effectLst/>
+                <a:uFillTx/>
+                <a:latin typeface="Calibri"/>
+                <a:ea typeface="Calibri"/>
+              </a:rPr>
+              <a:t>+ Cytoscape</a:t>
+            </a:r>
+            <a:endParaRPr lang="en-US" sz="1050" b="0" u="none" strike="noStrike">
+              <a:solidFill>
+                <a:srgbClr val="000000"/>
+              </a:solidFill>
+              <a:effectLst/>
+              <a:uFillTx/>
+              <a:latin typeface="Arial"/>
+            </a:endParaRPr>
+          </a:p>
+          <a:p>
+            <a:pPr algn="ctr" defTabSz="914400">
+              <a:lnSpc>
+                <a:spcPct val="95000"/>
+              </a:lnSpc>
+              <a:tabLst>
+                <a:tab pos="0" algn="l"/>
+              </a:tabLst>
+            </a:pPr>
+            <a:endParaRPr lang="en-US" sz="1050" b="0" u="none" strike="noStrike">
+              <a:solidFill>
+                <a:srgbClr val="000000"/>
+              </a:solidFill>
+              <a:effectLst/>
+              <a:uFillTx/>
+              <a:latin typeface="Arial"/>
+            </a:endParaRPr>
+          </a:p>
+          <a:p>
+            <a:pPr algn="ctr" defTabSz="914400">
+              <a:lnSpc>
+                <a:spcPct val="95000"/>
+              </a:lnSpc>
+              <a:tabLst>
+                <a:tab pos="0" algn="l"/>
+              </a:tabLst>
+            </a:pPr>
+            <a:r>
+              <a:rPr lang="en-US" sz="850" b="0" u="none" strike="noStrike">
+                <a:solidFill>
+                  <a:srgbClr val="2C3E50"/>
+                </a:solidFill>
+                <a:effectLst/>
+                <a:uFillTx/>
+                <a:latin typeface="Calibri"/>
+                <a:ea typeface="Calibri"/>
+              </a:rPr>
+              <a:t>network, topology,</a:t>
+            </a:r>
+            <a:endParaRPr lang="en-US" sz="850" b="0" u="none" strike="noStrike">
+              <a:solidFill>
+                <a:srgbClr val="000000"/>
+              </a:solidFill>
+              <a:effectLst/>
+              <a:uFillTx/>
+              <a:latin typeface="Arial"/>
+            </a:endParaRPr>
+          </a:p>
+          <a:p>
+            <a:pPr algn="ctr" defTabSz="914400">
+              <a:lnSpc>
+                <a:spcPct val="95000"/>
+              </a:lnSpc>
+              <a:tabLst>
+                <a:tab pos="0" algn="l"/>
+              </a:tabLst>
+            </a:pPr>
+            <a:r>
+              <a:rPr lang="en-US" sz="850" b="0" u="none" strike="noStrike">
+                <a:solidFill>
+                  <a:srgbClr val="2C3E50"/>
+                </a:solidFill>
+                <a:effectLst/>
+                <a:uFillTx/>
+                <a:latin typeface="Calibri"/>
+                <a:ea typeface="Calibri"/>
+              </a:rPr>
+              <a:t>GO/KEGG enrichment</a:t>
+            </a:r>
+            <a:endParaRPr lang="en-US" sz="850" b="0" u="none" strike="noStrike">
+              <a:solidFill>
+                <a:srgbClr val="000000"/>
+              </a:solidFill>
+              <a:effectLst/>
+              <a:uFillTx/>
+              <a:latin typeface="Arial"/>
+            </a:endParaRPr>
+          </a:p>
+        </p:txBody>
+      </p:sp>
+      <p:sp>
+        <p:nvSpPr>
+          <p:cNvPr id="13" name="Text 5"/>
+          <p:cNvSpPr/>
+          <p:nvPr/>
+        </p:nvSpPr>
+        <p:spPr>
+          <a:xfrm>
+            <a:off x="4251960" y="1755720"/>
+            <a:ext cx="1737000" cy="1170000"/>
+          </a:xfrm>
+          <a:prstGeom prst="roundRect">
+            <a:avLst>
+              <a:gd name="adj" fmla="val 5469"/>
+            </a:avLst>
+          </a:prstGeom>
+          <a:solidFill>
+            <a:srgbClr val="FBEFD6"/>
+          </a:solidFill>
+          <a:ln w="17780">
+            <a:solidFill>
+              <a:srgbClr val="D19A2E"/>
+            </a:solidFill>
+            <a:round/>
+          </a:ln>
+        </p:spPr>
+        <p:style>
+          <a:lnRef idx="0"/>
+          <a:fillRef idx="0"/>
+          <a:effectRef idx="0"/>
+          <a:fontRef idx="minor"/>
+        </p:style>
+        <p:txBody>
+          <a:bodyPr lIns="63360" tIns="63360" rIns="63360" bIns="63360" anchor="ctr">
+            <a:noAutofit/>
+          </a:bodyPr>
+          <a:p>
+            <a:r>
+              <a:rPr lang="en-US" sz="1050" b="1" u="none" strike="noStrike">
+                <a:solidFill>
+                  <a:srgbClr val="B26A00"/>
+                </a:solidFill>
+                <a:effectLst/>
+                <a:uFillTx/>
+                <a:latin typeface="Calibri"/>
+                <a:ea typeface="Calibri"/>
+              </a:rPr>
+              <a:t>IUPred2</a:t>
+            </a:r>
+            <a:endParaRPr lang="en-US" sz="1050" b="0" u="none" strike="noStrike">
+              <a:solidFill>
+                <a:srgbClr val="000000"/>
+              </a:solidFill>
+              <a:effectLst/>
+              <a:uFillTx/>
+              <a:latin typeface="Arial"/>
+            </a:endParaRPr>
+          </a:p>
+          <a:p>
+            <a:r>
+              <a:rPr lang="en-US" sz="1050" b="1" u="none" strike="noStrike">
+                <a:solidFill>
+                  <a:srgbClr val="B26A00"/>
+                </a:solidFill>
+                <a:effectLst/>
+                <a:uFillTx/>
+                <a:latin typeface="Calibri"/>
+                <a:ea typeface="Calibri"/>
+              </a:rPr>
+              <a:t>+ ANCHOR2</a:t>
+            </a:r>
+            <a:endParaRPr lang="en-US" sz="1050" b="0" u="none" strike="noStrike">
+              <a:solidFill>
+                <a:srgbClr val="000000"/>
+              </a:solidFill>
+              <a:effectLst/>
+              <a:uFillTx/>
+              <a:latin typeface="Arial"/>
+            </a:endParaRPr>
+          </a:p>
+          <a:p>
+            <a:pPr algn="ctr" defTabSz="914400">
+              <a:lnSpc>
+                <a:spcPct val="95000"/>
+              </a:lnSpc>
+              <a:tabLst>
+                <a:tab pos="0" algn="l"/>
+              </a:tabLst>
+            </a:pPr>
+            <a:endParaRPr lang="en-US" sz="1050" b="0" u="none" strike="noStrike">
+              <a:solidFill>
+                <a:srgbClr val="000000"/>
+              </a:solidFill>
+              <a:effectLst/>
+              <a:uFillTx/>
+              <a:latin typeface="Arial"/>
+            </a:endParaRPr>
+          </a:p>
+          <a:p>
+            <a:pPr algn="ctr" defTabSz="914400">
+              <a:lnSpc>
+                <a:spcPct val="95000"/>
+              </a:lnSpc>
+              <a:tabLst>
+                <a:tab pos="0" algn="l"/>
+              </a:tabLst>
+            </a:pPr>
+            <a:r>
+              <a:rPr lang="en-US" sz="850" b="0" u="none" strike="noStrike">
+                <a:solidFill>
+                  <a:srgbClr val="2C3E50"/>
+                </a:solidFill>
+                <a:effectLst/>
+                <a:uFillTx/>
+                <a:latin typeface="Calibri"/>
+                <a:ea typeface="Calibri"/>
+              </a:rPr>
+              <a:t>per-residue disorder</a:t>
+            </a:r>
+            <a:endParaRPr lang="en-US" sz="850" b="0" u="none" strike="noStrike">
+              <a:solidFill>
+                <a:srgbClr val="000000"/>
+              </a:solidFill>
+              <a:effectLst/>
+              <a:uFillTx/>
+              <a:latin typeface="Arial"/>
+            </a:endParaRPr>
+          </a:p>
+          <a:p>
+            <a:pPr algn="ctr" defTabSz="914400">
+              <a:lnSpc>
+                <a:spcPct val="95000"/>
+              </a:lnSpc>
+              <a:tabLst>
+                <a:tab pos="0" algn="l"/>
+              </a:tabLst>
+            </a:pPr>
+            <a:r>
+              <a:rPr lang="en-US" sz="850" b="0" u="none" strike="noStrike">
+                <a:solidFill>
+                  <a:srgbClr val="2C3E50"/>
+                </a:solidFill>
+                <a:effectLst/>
+                <a:uFillTx/>
+                <a:latin typeface="Calibri"/>
+                <a:ea typeface="Calibri"/>
+              </a:rPr>
+              <a:t>&amp; binding regions</a:t>
+            </a:r>
+            <a:endParaRPr lang="en-US" sz="850" b="0" u="none" strike="noStrike">
+              <a:solidFill>
+                <a:srgbClr val="000000"/>
+              </a:solidFill>
+              <a:effectLst/>
+              <a:uFillTx/>
+              <a:latin typeface="Arial"/>
+            </a:endParaRPr>
+          </a:p>
+        </p:txBody>
+      </p:sp>
+      <p:sp>
+        <p:nvSpPr>
+          <p:cNvPr id="14" name="Text 6"/>
+          <p:cNvSpPr/>
+          <p:nvPr/>
+        </p:nvSpPr>
+        <p:spPr>
+          <a:xfrm>
+            <a:off x="6217920" y="1755720"/>
+            <a:ext cx="1737000" cy="1170000"/>
+          </a:xfrm>
+          <a:prstGeom prst="roundRect">
+            <a:avLst>
+              <a:gd name="adj" fmla="val 5469"/>
+            </a:avLst>
+          </a:prstGeom>
+          <a:solidFill>
+            <a:srgbClr val="F1E7F3"/>
+          </a:solidFill>
+          <a:ln w="17780">
+            <a:solidFill>
+              <a:srgbClr val="8E5AA0"/>
+            </a:solidFill>
+            <a:round/>
+          </a:ln>
+        </p:spPr>
+        <p:style>
+          <a:lnRef idx="0"/>
+          <a:fillRef idx="0"/>
+          <a:effectRef idx="0"/>
+          <a:fontRef idx="minor"/>
+        </p:style>
+        <p:txBody>
+          <a:bodyPr lIns="63360" tIns="63360" rIns="63360" bIns="63360" anchor="ctr">
+            <a:noAutofit/>
+          </a:bodyPr>
+          <a:p>
+            <a:r>
+              <a:rPr lang="en-US" sz="1050" b="1" u="none" strike="noStrike">
+                <a:solidFill>
+                  <a:srgbClr val="762A83"/>
+                </a:solidFill>
+                <a:effectLst/>
+                <a:uFillTx/>
+                <a:latin typeface="Calibri"/>
+                <a:ea typeface="Calibri"/>
+              </a:rPr>
+              <a:t>ELM</a:t>
+            </a:r>
+            <a:endParaRPr lang="en-US" sz="1050" b="0" u="none" strike="noStrike">
+              <a:solidFill>
+                <a:srgbClr val="000000"/>
+              </a:solidFill>
+              <a:effectLst/>
+              <a:uFillTx/>
+              <a:latin typeface="Arial"/>
+            </a:endParaRPr>
+          </a:p>
+          <a:p>
+            <a:pPr algn="ctr" defTabSz="914400">
+              <a:lnSpc>
+                <a:spcPct val="95000"/>
+              </a:lnSpc>
+              <a:tabLst>
+                <a:tab pos="0" algn="l"/>
+              </a:tabLst>
+            </a:pPr>
+            <a:endParaRPr lang="en-US" sz="1050" b="0" u="none" strike="noStrike">
+              <a:solidFill>
+                <a:srgbClr val="000000"/>
+              </a:solidFill>
+              <a:effectLst/>
+              <a:uFillTx/>
+              <a:latin typeface="Arial"/>
+            </a:endParaRPr>
+          </a:p>
+          <a:p>
+            <a:pPr algn="ctr" defTabSz="914400">
+              <a:lnSpc>
+                <a:spcPct val="95000"/>
+              </a:lnSpc>
+              <a:tabLst>
+                <a:tab pos="0" algn="l"/>
+              </a:tabLst>
+            </a:pPr>
+            <a:r>
+              <a:rPr lang="en-US" sz="850" b="0" u="none" strike="noStrike">
+                <a:solidFill>
+                  <a:srgbClr val="2C3E50"/>
+                </a:solidFill>
+                <a:effectLst/>
+                <a:uFillTx/>
+                <a:latin typeface="Calibri"/>
+                <a:ea typeface="Calibri"/>
+              </a:rPr>
+              <a:t>short linear motifs,</a:t>
+            </a:r>
+            <a:endParaRPr lang="en-US" sz="850" b="0" u="none" strike="noStrike">
+              <a:solidFill>
+                <a:srgbClr val="000000"/>
+              </a:solidFill>
+              <a:effectLst/>
+              <a:uFillTx/>
+              <a:latin typeface="Arial"/>
+            </a:endParaRPr>
+          </a:p>
+          <a:p>
+            <a:pPr algn="ctr" defTabSz="914400">
+              <a:lnSpc>
+                <a:spcPct val="95000"/>
+              </a:lnSpc>
+              <a:tabLst>
+                <a:tab pos="0" algn="l"/>
+              </a:tabLst>
+            </a:pPr>
+            <a:r>
+              <a:rPr lang="en-US" sz="850" b="0" u="none" strike="noStrike">
+                <a:solidFill>
+                  <a:srgbClr val="2C3E50"/>
+                </a:solidFill>
+                <a:effectLst/>
+                <a:uFillTx/>
+                <a:latin typeface="Calibri"/>
+                <a:ea typeface="Calibri"/>
+              </a:rPr>
+              <a:t>filtered by partner</a:t>
+            </a:r>
+            <a:endParaRPr lang="en-US" sz="850" b="0" u="none" strike="noStrike">
+              <a:solidFill>
+                <a:srgbClr val="000000"/>
+              </a:solidFill>
+              <a:effectLst/>
+              <a:uFillTx/>
+              <a:latin typeface="Arial"/>
+            </a:endParaRPr>
+          </a:p>
+        </p:txBody>
+      </p:sp>
+      <p:sp>
+        <p:nvSpPr>
+          <p:cNvPr id="15" name="Text 7"/>
+          <p:cNvSpPr/>
+          <p:nvPr/>
+        </p:nvSpPr>
+        <p:spPr>
+          <a:xfrm>
+            <a:off x="8183880" y="1755720"/>
+            <a:ext cx="1737000" cy="1170000"/>
+          </a:xfrm>
+          <a:prstGeom prst="roundRect">
+            <a:avLst>
+              <a:gd name="adj" fmla="val 5469"/>
+            </a:avLst>
+          </a:prstGeom>
+          <a:solidFill>
+            <a:srgbClr val="DCEFDD"/>
+          </a:solidFill>
+          <a:ln w="17780">
+            <a:solidFill>
+              <a:srgbClr val="1A7A34"/>
+            </a:solidFill>
+            <a:round/>
+          </a:ln>
+        </p:spPr>
+        <p:style>
+          <a:lnRef idx="0"/>
+          <a:fillRef idx="0"/>
+          <a:effectRef idx="0"/>
+          <a:fontRef idx="minor"/>
+        </p:style>
+        <p:txBody>
+          <a:bodyPr lIns="63360" tIns="63360" rIns="63360" bIns="63360" anchor="ctr">
+            <a:noAutofit/>
+          </a:bodyPr>
+          <a:p>
+            <a:r>
+              <a:rPr lang="en-US" sz="1050" b="1" u="none" strike="noStrike">
+                <a:solidFill>
+                  <a:srgbClr val="1A7A34"/>
+                </a:solidFill>
+                <a:effectLst/>
+                <a:uFillTx/>
+                <a:latin typeface="Calibri"/>
+                <a:ea typeface="Calibri"/>
+              </a:rPr>
+              <a:t>GOR IV · PSIPRED</a:t>
+            </a:r>
+            <a:endParaRPr lang="en-US" sz="1050" b="0" u="none" strike="noStrike">
+              <a:solidFill>
+                <a:srgbClr val="000000"/>
+              </a:solidFill>
+              <a:effectLst/>
+              <a:uFillTx/>
+              <a:latin typeface="Arial"/>
+            </a:endParaRPr>
+          </a:p>
+          <a:p>
+            <a:r>
+              <a:rPr lang="en-US" sz="1050" b="1" u="none" strike="noStrike">
+                <a:solidFill>
+                  <a:srgbClr val="1A7A34"/>
+                </a:solidFill>
+                <a:effectLst/>
+                <a:uFillTx/>
+                <a:latin typeface="Calibri"/>
+                <a:ea typeface="Calibri"/>
+              </a:rPr>
+              <a:t>DISOPRED3</a:t>
+            </a:r>
+            <a:endParaRPr lang="en-US" sz="1050" b="0" u="none" strike="noStrike">
+              <a:solidFill>
+                <a:srgbClr val="000000"/>
+              </a:solidFill>
+              <a:effectLst/>
+              <a:uFillTx/>
+              <a:latin typeface="Arial"/>
+            </a:endParaRPr>
+          </a:p>
+          <a:p>
+            <a:pPr algn="ctr" defTabSz="914400">
+              <a:lnSpc>
+                <a:spcPct val="95000"/>
+              </a:lnSpc>
+              <a:tabLst>
+                <a:tab pos="0" algn="l"/>
+              </a:tabLst>
+            </a:pPr>
+            <a:endParaRPr lang="en-US" sz="1050" b="0" u="none" strike="noStrike">
+              <a:solidFill>
+                <a:srgbClr val="000000"/>
+              </a:solidFill>
+              <a:effectLst/>
+              <a:uFillTx/>
+              <a:latin typeface="Arial"/>
+            </a:endParaRPr>
+          </a:p>
+          <a:p>
+            <a:pPr algn="ctr" defTabSz="914400">
+              <a:lnSpc>
+                <a:spcPct val="95000"/>
+              </a:lnSpc>
+              <a:tabLst>
+                <a:tab pos="0" algn="l"/>
+              </a:tabLst>
+            </a:pPr>
+            <a:r>
+              <a:rPr lang="en-US" sz="850" b="0" u="none" strike="noStrike">
+                <a:solidFill>
+                  <a:srgbClr val="2C3E50"/>
+                </a:solidFill>
+                <a:effectLst/>
+                <a:uFillTx/>
+                <a:latin typeface="Calibri"/>
+                <a:ea typeface="Calibri"/>
+              </a:rPr>
+              <a:t>secondary structure</a:t>
+            </a:r>
+            <a:endParaRPr lang="en-US" sz="850" b="0" u="none" strike="noStrike">
+              <a:solidFill>
+                <a:srgbClr val="000000"/>
+              </a:solidFill>
+              <a:effectLst/>
+              <a:uFillTx/>
+              <a:latin typeface="Arial"/>
+            </a:endParaRPr>
+          </a:p>
+          <a:p>
+            <a:pPr algn="ctr" defTabSz="914400">
+              <a:lnSpc>
+                <a:spcPct val="95000"/>
+              </a:lnSpc>
+              <a:tabLst>
+                <a:tab pos="0" algn="l"/>
+              </a:tabLst>
+            </a:pPr>
+            <a:r>
+              <a:rPr lang="en-US" sz="850" b="0" u="none" strike="noStrike">
+                <a:solidFill>
+                  <a:srgbClr val="2C3E50"/>
+                </a:solidFill>
+                <a:effectLst/>
+                <a:uFillTx/>
+                <a:latin typeface="Calibri"/>
+                <a:ea typeface="Calibri"/>
+              </a:rPr>
+              <a:t>+ 2nd disorder check</a:t>
+            </a:r>
+            <a:endParaRPr lang="en-US" sz="850" b="0" u="none" strike="noStrike">
+              <a:solidFill>
+                <a:srgbClr val="000000"/>
+              </a:solidFill>
+              <a:effectLst/>
+              <a:uFillTx/>
+              <a:latin typeface="Arial"/>
+            </a:endParaRPr>
+          </a:p>
+        </p:txBody>
+      </p:sp>
+      <p:sp>
+        <p:nvSpPr>
+          <p:cNvPr id="16" name="Text 8"/>
+          <p:cNvSpPr/>
+          <p:nvPr/>
+        </p:nvSpPr>
+        <p:spPr>
+          <a:xfrm>
+            <a:off x="10149840" y="1755720"/>
+            <a:ext cx="1737000" cy="1170000"/>
+          </a:xfrm>
+          <a:prstGeom prst="roundRect">
+            <a:avLst>
+              <a:gd name="adj" fmla="val 5469"/>
+            </a:avLst>
+          </a:prstGeom>
+          <a:solidFill>
+            <a:srgbClr val="DBE9F5"/>
+          </a:solidFill>
+          <a:ln w="17780">
+            <a:solidFill>
+              <a:srgbClr val="2166AC"/>
+            </a:solidFill>
+            <a:round/>
+          </a:ln>
+        </p:spPr>
+        <p:style>
+          <a:lnRef idx="0"/>
+          <a:fillRef idx="0"/>
+          <a:effectRef idx="0"/>
+          <a:fontRef idx="minor"/>
+        </p:style>
+        <p:txBody>
+          <a:bodyPr lIns="63360" tIns="63360" rIns="63360" bIns="63360" anchor="ctr">
+            <a:noAutofit/>
+          </a:bodyPr>
+          <a:p>
+            <a:r>
+              <a:rPr lang="en-US" sz="1050" b="1" u="none" strike="noStrike">
+                <a:solidFill>
+                  <a:srgbClr val="2166AC"/>
+                </a:solidFill>
+                <a:effectLst/>
+                <a:uFillTx/>
+                <a:latin typeface="Calibri"/>
+                <a:ea typeface="Calibri"/>
+              </a:rPr>
+              <a:t>FuzPred</a:t>
+            </a:r>
+            <a:endParaRPr lang="en-US" sz="1050" b="0" u="none" strike="noStrike">
+              <a:solidFill>
+                <a:srgbClr val="000000"/>
+              </a:solidFill>
+              <a:effectLst/>
+              <a:uFillTx/>
+              <a:latin typeface="Arial"/>
+            </a:endParaRPr>
+          </a:p>
+          <a:p>
+            <a:pPr algn="ctr" defTabSz="914400">
+              <a:lnSpc>
+                <a:spcPct val="95000"/>
+              </a:lnSpc>
+              <a:tabLst>
+                <a:tab pos="0" algn="l"/>
+              </a:tabLst>
+            </a:pPr>
+            <a:endParaRPr lang="en-US" sz="1050" b="0" u="none" strike="noStrike">
+              <a:solidFill>
+                <a:srgbClr val="000000"/>
+              </a:solidFill>
+              <a:effectLst/>
+              <a:uFillTx/>
+              <a:latin typeface="Arial"/>
+            </a:endParaRPr>
+          </a:p>
+          <a:p>
+            <a:pPr algn="ctr" defTabSz="914400">
+              <a:lnSpc>
+                <a:spcPct val="95000"/>
+              </a:lnSpc>
+              <a:tabLst>
+                <a:tab pos="0" algn="l"/>
+              </a:tabLst>
+            </a:pPr>
+            <a:r>
+              <a:rPr lang="en-US" sz="850" b="0" u="none" strike="noStrike">
+                <a:solidFill>
+                  <a:srgbClr val="2C3E50"/>
+                </a:solidFill>
+                <a:effectLst/>
+                <a:uFillTx/>
+                <a:latin typeface="Calibri"/>
+                <a:ea typeface="Calibri"/>
+              </a:rPr>
+              <a:t>binding mode:</a:t>
+            </a:r>
+            <a:endParaRPr lang="en-US" sz="850" b="0" u="none" strike="noStrike">
+              <a:solidFill>
+                <a:srgbClr val="000000"/>
+              </a:solidFill>
+              <a:effectLst/>
+              <a:uFillTx/>
+              <a:latin typeface="Arial"/>
+            </a:endParaRPr>
+          </a:p>
+          <a:p>
+            <a:pPr algn="ctr" defTabSz="914400">
+              <a:lnSpc>
+                <a:spcPct val="95000"/>
+              </a:lnSpc>
+              <a:tabLst>
+                <a:tab pos="0" algn="l"/>
+              </a:tabLst>
+            </a:pPr>
+            <a:r>
+              <a:rPr lang="en-US" sz="850" b="0" u="none" strike="noStrike">
+                <a:solidFill>
+                  <a:srgbClr val="2C3E50"/>
+                </a:solidFill>
+                <a:effectLst/>
+                <a:uFillTx/>
+                <a:latin typeface="Calibri"/>
+                <a:ea typeface="Calibri"/>
+              </a:rPr>
+              <a:t>folds or stays fuzzy</a:t>
+            </a:r>
+            <a:endParaRPr lang="en-US" sz="850" b="0" u="none" strike="noStrike">
+              <a:solidFill>
+                <a:srgbClr val="000000"/>
+              </a:solidFill>
+              <a:effectLst/>
+              <a:uFillTx/>
+              <a:latin typeface="Arial"/>
+            </a:endParaRPr>
+          </a:p>
+        </p:txBody>
+      </p:sp>
+      <p:sp>
+        <p:nvSpPr>
+          <p:cNvPr id="17" name="Text 9"/>
+          <p:cNvSpPr/>
+          <p:nvPr/>
+        </p:nvSpPr>
+        <p:spPr>
+          <a:xfrm>
+            <a:off x="2039040" y="2139840"/>
+            <a:ext cx="264960" cy="365400"/>
+          </a:xfrm>
+          <a:prstGeom prst="rect">
+            <a:avLst/>
+          </a:prstGeom>
+          <a:noFill/>
+          <a:ln w="0">
+            <a:noFill/>
+          </a:ln>
+        </p:spPr>
+        <p:style>
+          <a:lnRef idx="0"/>
+          <a:fillRef idx="0"/>
+          <a:effectRef idx="0"/>
+          <a:fontRef idx="minor"/>
+        </p:style>
+        <p:txBody>
+          <a:bodyPr lIns="90000" tIns="45000" rIns="90000" bIns="45000" anchor="ctr">
+            <a:noAutofit/>
+          </a:bodyPr>
+          <a:p>
+            <a:pPr algn="ctr" defTabSz="914400">
+              <a:lnSpc>
+                <a:spcPct val="100000"/>
+              </a:lnSpc>
+              <a:tabLst>
+                <a:tab pos="0" algn="l"/>
+              </a:tabLst>
+            </a:pPr>
+            <a:r>
+              <a:rPr lang="en-US" sz="1500" b="1" u="none" strike="noStrike">
+                <a:solidFill>
+                  <a:srgbClr val="5A6B7B"/>
+                </a:solidFill>
+                <a:effectLst/>
+                <a:uFillTx/>
+                <a:latin typeface="Calibri"/>
+                <a:ea typeface="Calibri"/>
+              </a:rPr>
+              <a:t>→</a:t>
+            </a:r>
+            <a:endParaRPr lang="en-US" sz="1500" b="0" u="none" strike="noStrike">
+              <a:solidFill>
+                <a:srgbClr val="000000"/>
+              </a:solidFill>
+              <a:effectLst/>
+              <a:uFillTx/>
+              <a:latin typeface="Arial"/>
+            </a:endParaRPr>
+          </a:p>
+        </p:txBody>
+      </p:sp>
+      <p:sp>
+        <p:nvSpPr>
+          <p:cNvPr id="18" name="Text 10"/>
+          <p:cNvSpPr/>
+          <p:nvPr/>
+        </p:nvSpPr>
+        <p:spPr>
+          <a:xfrm>
+            <a:off x="4005000" y="2139840"/>
+            <a:ext cx="264960" cy="365400"/>
+          </a:xfrm>
+          <a:prstGeom prst="rect">
+            <a:avLst/>
+          </a:prstGeom>
+          <a:noFill/>
+          <a:ln w="0">
+            <a:noFill/>
+          </a:ln>
+        </p:spPr>
+        <p:style>
+          <a:lnRef idx="0"/>
+          <a:fillRef idx="0"/>
+          <a:effectRef idx="0"/>
+          <a:fontRef idx="minor"/>
+        </p:style>
+        <p:txBody>
+          <a:bodyPr lIns="90000" tIns="45000" rIns="90000" bIns="45000" anchor="ctr">
+            <a:noAutofit/>
+          </a:bodyPr>
+          <a:p>
+            <a:pPr algn="ctr" defTabSz="914400">
+              <a:lnSpc>
+                <a:spcPct val="100000"/>
+              </a:lnSpc>
+              <a:tabLst>
+                <a:tab pos="0" algn="l"/>
+              </a:tabLst>
+            </a:pPr>
+            <a:r>
+              <a:rPr lang="en-US" sz="1500" b="1" u="none" strike="noStrike">
+                <a:solidFill>
+                  <a:srgbClr val="5A6B7B"/>
+                </a:solidFill>
+                <a:effectLst/>
+                <a:uFillTx/>
+                <a:latin typeface="Calibri"/>
+                <a:ea typeface="Calibri"/>
+              </a:rPr>
+              <a:t>→</a:t>
+            </a:r>
+            <a:endParaRPr lang="en-US" sz="1500" b="0" u="none" strike="noStrike">
+              <a:solidFill>
+                <a:srgbClr val="000000"/>
+              </a:solidFill>
+              <a:effectLst/>
+              <a:uFillTx/>
+              <a:latin typeface="Arial"/>
+            </a:endParaRPr>
+          </a:p>
+        </p:txBody>
+      </p:sp>
+      <p:sp>
+        <p:nvSpPr>
+          <p:cNvPr id="19" name="Text 11"/>
+          <p:cNvSpPr/>
+          <p:nvPr/>
+        </p:nvSpPr>
+        <p:spPr>
+          <a:xfrm>
+            <a:off x="5970960" y="2139840"/>
+            <a:ext cx="264960" cy="365400"/>
+          </a:xfrm>
+          <a:prstGeom prst="rect">
+            <a:avLst/>
+          </a:prstGeom>
+          <a:noFill/>
+          <a:ln w="0">
+            <a:noFill/>
+          </a:ln>
+        </p:spPr>
+        <p:style>
+          <a:lnRef idx="0"/>
+          <a:fillRef idx="0"/>
+          <a:effectRef idx="0"/>
+          <a:fontRef idx="minor"/>
+        </p:style>
+        <p:txBody>
+          <a:bodyPr lIns="90000" tIns="45000" rIns="90000" bIns="45000" anchor="ctr">
+            <a:noAutofit/>
+          </a:bodyPr>
+          <a:p>
+            <a:pPr algn="ctr" defTabSz="914400">
+              <a:lnSpc>
+                <a:spcPct val="100000"/>
+              </a:lnSpc>
+              <a:tabLst>
+                <a:tab pos="0" algn="l"/>
+              </a:tabLst>
+            </a:pPr>
+            <a:r>
+              <a:rPr lang="en-US" sz="1500" b="1" u="none" strike="noStrike">
+                <a:solidFill>
+                  <a:srgbClr val="5A6B7B"/>
+                </a:solidFill>
+                <a:effectLst/>
+                <a:uFillTx/>
+                <a:latin typeface="Calibri"/>
+                <a:ea typeface="Calibri"/>
+              </a:rPr>
+              <a:t>→</a:t>
+            </a:r>
+            <a:endParaRPr lang="en-US" sz="1500" b="0" u="none" strike="noStrike">
+              <a:solidFill>
+                <a:srgbClr val="000000"/>
+              </a:solidFill>
+              <a:effectLst/>
+              <a:uFillTx/>
+              <a:latin typeface="Arial"/>
+            </a:endParaRPr>
+          </a:p>
+        </p:txBody>
+      </p:sp>
+      <p:sp>
+        <p:nvSpPr>
+          <p:cNvPr id="20" name="Text 12"/>
+          <p:cNvSpPr/>
+          <p:nvPr/>
+        </p:nvSpPr>
+        <p:spPr>
+          <a:xfrm>
+            <a:off x="7936920" y="2139840"/>
+            <a:ext cx="264960" cy="365400"/>
+          </a:xfrm>
+          <a:prstGeom prst="rect">
+            <a:avLst/>
+          </a:prstGeom>
+          <a:noFill/>
+          <a:ln w="0">
+            <a:noFill/>
+          </a:ln>
+        </p:spPr>
+        <p:style>
+          <a:lnRef idx="0"/>
+          <a:fillRef idx="0"/>
+          <a:effectRef idx="0"/>
+          <a:fontRef idx="minor"/>
+        </p:style>
+        <p:txBody>
+          <a:bodyPr lIns="90000" tIns="45000" rIns="90000" bIns="45000" anchor="ctr">
+            <a:noAutofit/>
+          </a:bodyPr>
+          <a:p>
+            <a:pPr algn="ctr" defTabSz="914400">
+              <a:lnSpc>
+                <a:spcPct val="100000"/>
+              </a:lnSpc>
+              <a:tabLst>
+                <a:tab pos="0" algn="l"/>
+              </a:tabLst>
+            </a:pPr>
+            <a:r>
+              <a:rPr lang="en-US" sz="1500" b="1" u="none" strike="noStrike">
+                <a:solidFill>
+                  <a:srgbClr val="5A6B7B"/>
+                </a:solidFill>
+                <a:effectLst/>
+                <a:uFillTx/>
+                <a:latin typeface="Calibri"/>
+                <a:ea typeface="Calibri"/>
+              </a:rPr>
+              <a:t>→</a:t>
+            </a:r>
+            <a:endParaRPr lang="en-US" sz="1500" b="0" u="none" strike="noStrike">
+              <a:solidFill>
+                <a:srgbClr val="000000"/>
+              </a:solidFill>
+              <a:effectLst/>
+              <a:uFillTx/>
+              <a:latin typeface="Arial"/>
+            </a:endParaRPr>
+          </a:p>
+        </p:txBody>
+      </p:sp>
+      <p:sp>
+        <p:nvSpPr>
+          <p:cNvPr id="21" name="Text 13"/>
+          <p:cNvSpPr/>
+          <p:nvPr/>
+        </p:nvSpPr>
+        <p:spPr>
+          <a:xfrm>
+            <a:off x="9902880" y="2139840"/>
+            <a:ext cx="264960" cy="365400"/>
+          </a:xfrm>
+          <a:prstGeom prst="rect">
+            <a:avLst/>
+          </a:prstGeom>
+          <a:noFill/>
+          <a:ln w="0">
+            <a:noFill/>
+          </a:ln>
+        </p:spPr>
+        <p:style>
+          <a:lnRef idx="0"/>
+          <a:fillRef idx="0"/>
+          <a:effectRef idx="0"/>
+          <a:fontRef idx="minor"/>
+        </p:style>
+        <p:txBody>
+          <a:bodyPr lIns="90000" tIns="45000" rIns="90000" bIns="45000" anchor="ctr">
+            <a:noAutofit/>
+          </a:bodyPr>
+          <a:p>
+            <a:pPr algn="ctr" defTabSz="914400">
+              <a:lnSpc>
+                <a:spcPct val="100000"/>
+              </a:lnSpc>
+              <a:tabLst>
+                <a:tab pos="0" algn="l"/>
+              </a:tabLst>
+            </a:pPr>
+            <a:r>
+              <a:rPr lang="en-US" sz="1500" b="1" u="none" strike="noStrike">
+                <a:solidFill>
+                  <a:srgbClr val="5A6B7B"/>
+                </a:solidFill>
+                <a:effectLst/>
+                <a:uFillTx/>
+                <a:latin typeface="Calibri"/>
+                <a:ea typeface="Calibri"/>
+              </a:rPr>
+              <a:t>→</a:t>
+            </a:r>
+            <a:endParaRPr lang="en-US" sz="1500" b="0" u="none" strike="noStrike">
+              <a:solidFill>
+                <a:srgbClr val="000000"/>
+              </a:solidFill>
+              <a:effectLst/>
+              <a:uFillTx/>
+              <a:latin typeface="Arial"/>
+            </a:endParaRPr>
+          </a:p>
+        </p:txBody>
+      </p:sp>
+      <p:sp>
+        <p:nvSpPr>
+          <p:cNvPr id="22" name="Text 14"/>
+          <p:cNvSpPr/>
+          <p:nvPr/>
+        </p:nvSpPr>
+        <p:spPr>
+          <a:xfrm>
+            <a:off x="320040" y="3072240"/>
+            <a:ext cx="5486040" cy="219240"/>
+          </a:xfrm>
+          <a:prstGeom prst="rect">
+            <a:avLst/>
+          </a:prstGeom>
+          <a:noFill/>
+          <a:ln w="0">
+            <a:noFill/>
+          </a:ln>
+        </p:spPr>
+        <p:style>
+          <a:lnRef idx="0"/>
+          <a:fillRef idx="0"/>
+          <a:effectRef idx="0"/>
+          <a:fontRef idx="minor"/>
+        </p:style>
+        <p:txBody>
+          <a:bodyPr lIns="90000" tIns="45000" rIns="90000" bIns="45000" anchor="ctr">
+            <a:noAutofit/>
+          </a:bodyPr>
+          <a:p>
+            <a:pPr defTabSz="914400">
+              <a:lnSpc>
+                <a:spcPct val="100000"/>
+              </a:lnSpc>
+              <a:tabLst>
+                <a:tab pos="0" algn="l"/>
+              </a:tabLst>
+            </a:pPr>
+            <a:r>
+              <a:rPr lang="en-US" sz="1100" b="1" u="none" strike="noStrike">
+                <a:solidFill>
+                  <a:srgbClr val="2C3E50"/>
+                </a:solidFill>
+                <a:effectLst/>
+                <a:uFillTx/>
+                <a:latin typeface="Calibri"/>
+                <a:ea typeface="Calibri"/>
+              </a:rPr>
+              <a:t>What each result rests on</a:t>
+            </a:r>
+            <a:endParaRPr lang="en-US" sz="1100" b="0" u="none" strike="noStrike">
+              <a:solidFill>
+                <a:srgbClr val="000000"/>
+              </a:solidFill>
+              <a:effectLst/>
+              <a:uFillTx/>
+              <a:latin typeface="Arial"/>
+            </a:endParaRPr>
+          </a:p>
+        </p:txBody>
+      </p:sp>
+      <p:sp>
+        <p:nvSpPr>
+          <p:cNvPr id="23" name="Text 15"/>
+          <p:cNvSpPr/>
+          <p:nvPr/>
+        </p:nvSpPr>
+        <p:spPr>
+          <a:xfrm>
+            <a:off x="320040" y="3328560"/>
+            <a:ext cx="3657240" cy="2285640"/>
+          </a:xfrm>
+          <a:prstGeom prst="roundRect">
+            <a:avLst>
+              <a:gd name="adj" fmla="val 2000"/>
+            </a:avLst>
+          </a:prstGeom>
+          <a:solidFill>
+            <a:srgbClr val="DBE9F5"/>
+          </a:solidFill>
+          <a:ln w="19050">
+            <a:solidFill>
+              <a:srgbClr val="2166AC"/>
+            </a:solidFill>
+            <a:round/>
+          </a:ln>
+        </p:spPr>
+        <p:style>
+          <a:lnRef idx="0"/>
+          <a:fillRef idx="0"/>
+          <a:effectRef idx="0"/>
+          <a:fontRef idx="minor"/>
+        </p:style>
+        <p:txBody>
+          <a:bodyPr lIns="152280" tIns="152280" rIns="152280" bIns="152280" anchor="t">
+            <a:noAutofit/>
+          </a:bodyPr>
+          <a:p>
+            <a:r>
+              <a:rPr lang="en-US" sz="1200" b="1" u="none" strike="noStrike">
+                <a:solidFill>
+                  <a:srgbClr val="2166AC"/>
+                </a:solidFill>
+                <a:effectLst/>
+                <a:uFillTx/>
+                <a:latin typeface="Calibri"/>
+                <a:ea typeface="Calibri"/>
+              </a:rPr>
+              <a:t>1 · Curated data — not predicted</a:t>
+            </a:r>
+            <a:endParaRPr lang="en-US" sz="1200" b="0" u="none" strike="noStrike">
+              <a:solidFill>
+                <a:srgbClr val="000000"/>
+              </a:solidFill>
+              <a:effectLst/>
+              <a:uFillTx/>
+              <a:latin typeface="Arial"/>
+            </a:endParaRPr>
+          </a:p>
+          <a:p>
+            <a:endParaRPr lang="en-US" sz="1200" b="0" u="none" strike="noStrike">
+              <a:solidFill>
+                <a:srgbClr val="000000"/>
+              </a:solidFill>
+              <a:effectLst/>
+              <a:uFillTx/>
+              <a:latin typeface="Arial"/>
+            </a:endParaRPr>
+          </a:p>
+          <a:p>
+            <a:pPr defTabSz="914400">
+              <a:lnSpc>
+                <a:spcPct val="102000"/>
+              </a:lnSpc>
+              <a:tabLst>
+                <a:tab pos="0" algn="l"/>
+              </a:tabLst>
+            </a:pPr>
+            <a:endParaRPr lang="en-US" sz="1200" b="0" u="none" strike="noStrike">
+              <a:solidFill>
+                <a:srgbClr val="000000"/>
+              </a:solidFill>
+              <a:effectLst/>
+              <a:uFillTx/>
+              <a:latin typeface="Arial"/>
+            </a:endParaRPr>
+          </a:p>
+          <a:p>
+            <a:pPr defTabSz="914400">
+              <a:lnSpc>
+                <a:spcPct val="102000"/>
+              </a:lnSpc>
+              <a:tabLst>
+                <a:tab pos="0" algn="l"/>
+              </a:tabLst>
+            </a:pPr>
+            <a:r>
+              <a:rPr lang="en-US" sz="1050" b="0" u="none" strike="noStrike">
+                <a:solidFill>
+                  <a:srgbClr val="2C3E50"/>
+                </a:solidFill>
+                <a:effectLst/>
+                <a:uFillTx/>
+                <a:latin typeface="Calibri"/>
+                <a:ea typeface="Calibri"/>
+              </a:rPr>
+              <a:t>The 252-residue sequence, the annotated IDRs, the KEN box and FGF motif, the 13 phospho-sites, and the STRING confidence scores.</a:t>
+            </a:r>
+            <a:endParaRPr lang="en-US" sz="1050" b="0" u="none" strike="noStrike">
+              <a:solidFill>
+                <a:srgbClr val="000000"/>
+              </a:solidFill>
+              <a:effectLst/>
+              <a:uFillTx/>
+              <a:latin typeface="Arial"/>
+            </a:endParaRPr>
+          </a:p>
+          <a:p>
+            <a:pPr defTabSz="914400">
+              <a:lnSpc>
+                <a:spcPct val="102000"/>
+              </a:lnSpc>
+              <a:tabLst>
+                <a:tab pos="0" algn="l"/>
+              </a:tabLst>
+            </a:pPr>
+            <a:endParaRPr lang="en-US" sz="1050" b="0" u="none" strike="noStrike">
+              <a:solidFill>
+                <a:srgbClr val="000000"/>
+              </a:solidFill>
+              <a:effectLst/>
+              <a:uFillTx/>
+              <a:latin typeface="Arial"/>
+            </a:endParaRPr>
+          </a:p>
+          <a:p>
+            <a:pPr defTabSz="914400">
+              <a:lnSpc>
+                <a:spcPct val="102000"/>
+              </a:lnSpc>
+              <a:tabLst>
+                <a:tab pos="0" algn="l"/>
+              </a:tabLst>
+            </a:pPr>
+            <a:r>
+              <a:rPr lang="en-US" sz="1000" b="0" i="1" u="none" strike="noStrike">
+                <a:solidFill>
+                  <a:srgbClr val="5A6B7B"/>
+                </a:solidFill>
+                <a:effectLst/>
+                <a:uFillTx/>
+                <a:latin typeface="Calibri"/>
+                <a:ea typeface="Calibri"/>
+              </a:rPr>
+              <a:t>These come from UniProt/STRING and the primary literature — experimentally supported, not my inference.</a:t>
+            </a:r>
+            <a:endParaRPr lang="en-US" sz="1000" b="0" u="none" strike="noStrike">
+              <a:solidFill>
+                <a:srgbClr val="000000"/>
+              </a:solidFill>
+              <a:effectLst/>
+              <a:uFillTx/>
+              <a:latin typeface="Arial"/>
+            </a:endParaRPr>
+          </a:p>
+        </p:txBody>
+      </p:sp>
+      <p:sp>
+        <p:nvSpPr>
+          <p:cNvPr id="24" name="Text 16"/>
+          <p:cNvSpPr/>
+          <p:nvPr/>
+        </p:nvSpPr>
+        <p:spPr>
+          <a:xfrm>
+            <a:off x="4251960" y="3328560"/>
+            <a:ext cx="3657240" cy="2285640"/>
+          </a:xfrm>
+          <a:prstGeom prst="roundRect">
+            <a:avLst>
+              <a:gd name="adj" fmla="val 2000"/>
+            </a:avLst>
+          </a:prstGeom>
+          <a:solidFill>
+            <a:srgbClr val="DCEFDD"/>
+          </a:solidFill>
+          <a:ln w="19050">
+            <a:solidFill>
+              <a:srgbClr val="1A7A34"/>
+            </a:solidFill>
+            <a:round/>
+          </a:ln>
+        </p:spPr>
+        <p:style>
+          <a:lnRef idx="0"/>
+          <a:fillRef idx="0"/>
+          <a:effectRef idx="0"/>
+          <a:fontRef idx="minor"/>
+        </p:style>
+        <p:txBody>
+          <a:bodyPr lIns="152280" tIns="152280" rIns="152280" bIns="152280" anchor="t">
+            <a:noAutofit/>
+          </a:bodyPr>
+          <a:p>
+            <a:r>
+              <a:rPr lang="en-US" sz="1200" b="1" u="none" strike="noStrike">
+                <a:solidFill>
+                  <a:srgbClr val="1A7A34"/>
+                </a:solidFill>
+                <a:effectLst/>
+                <a:uFillTx/>
+                <a:latin typeface="Calibri"/>
+                <a:ea typeface="Calibri"/>
+              </a:rPr>
+              <a:t>2 · Prediction — cross-checked</a:t>
+            </a:r>
+            <a:endParaRPr lang="en-US" sz="1200" b="0" u="none" strike="noStrike">
+              <a:solidFill>
+                <a:srgbClr val="000000"/>
+              </a:solidFill>
+              <a:effectLst/>
+              <a:uFillTx/>
+              <a:latin typeface="Arial"/>
+            </a:endParaRPr>
+          </a:p>
+          <a:p>
+            <a:endParaRPr lang="en-US" sz="1200" b="0" u="none" strike="noStrike">
+              <a:solidFill>
+                <a:srgbClr val="000000"/>
+              </a:solidFill>
+              <a:effectLst/>
+              <a:uFillTx/>
+              <a:latin typeface="Arial"/>
+            </a:endParaRPr>
+          </a:p>
+          <a:p>
+            <a:pPr defTabSz="914400">
+              <a:lnSpc>
+                <a:spcPct val="102000"/>
+              </a:lnSpc>
+              <a:tabLst>
+                <a:tab pos="0" algn="l"/>
+              </a:tabLst>
+            </a:pPr>
+            <a:endParaRPr lang="en-US" sz="1200" b="0" u="none" strike="noStrike">
+              <a:solidFill>
+                <a:srgbClr val="000000"/>
+              </a:solidFill>
+              <a:effectLst/>
+              <a:uFillTx/>
+              <a:latin typeface="Arial"/>
+            </a:endParaRPr>
+          </a:p>
+          <a:p>
+            <a:pPr defTabSz="914400">
+              <a:lnSpc>
+                <a:spcPct val="102000"/>
+              </a:lnSpc>
+              <a:tabLst>
+                <a:tab pos="0" algn="l"/>
+              </a:tabLst>
+            </a:pPr>
+            <a:r>
+              <a:rPr lang="en-US" sz="1050" b="0" u="none" strike="noStrike">
+                <a:solidFill>
+                  <a:srgbClr val="2C3E50"/>
+                </a:solidFill>
+                <a:effectLst/>
+                <a:uFillTx/>
+                <a:latin typeface="Calibri"/>
+                <a:ea typeface="Calibri"/>
+              </a:rPr>
+              <a:t>61.5% disordered (IUPred2), independently 63.9% (DISOPRED3).  One folded element, the C-terminal domain, recovered by PSIPRED and GOR IV alike.</a:t>
+            </a:r>
+            <a:endParaRPr lang="en-US" sz="1050" b="0" u="none" strike="noStrike">
+              <a:solidFill>
+                <a:srgbClr val="000000"/>
+              </a:solidFill>
+              <a:effectLst/>
+              <a:uFillTx/>
+              <a:latin typeface="Arial"/>
+            </a:endParaRPr>
+          </a:p>
+          <a:p>
+            <a:pPr defTabSz="914400">
+              <a:lnSpc>
+                <a:spcPct val="102000"/>
+              </a:lnSpc>
+              <a:tabLst>
+                <a:tab pos="0" algn="l"/>
+              </a:tabLst>
+            </a:pPr>
+            <a:endParaRPr lang="en-US" sz="1050" b="0" u="none" strike="noStrike">
+              <a:solidFill>
+                <a:srgbClr val="000000"/>
+              </a:solidFill>
+              <a:effectLst/>
+              <a:uFillTx/>
+              <a:latin typeface="Arial"/>
+            </a:endParaRPr>
+          </a:p>
+          <a:p>
+            <a:pPr defTabSz="914400">
+              <a:lnSpc>
+                <a:spcPct val="102000"/>
+              </a:lnSpc>
+              <a:tabLst>
+                <a:tab pos="0" algn="l"/>
+              </a:tabLst>
+            </a:pPr>
+            <a:r>
+              <a:rPr lang="en-US" sz="1000" b="0" i="1" u="none" strike="noStrike">
+                <a:solidFill>
+                  <a:srgbClr val="5A6B7B"/>
+                </a:solidFill>
+                <a:effectLst/>
+                <a:uFillTx/>
+                <a:latin typeface="Calibri"/>
+                <a:ea typeface="Calibri"/>
+              </a:rPr>
+              <a:t>Predictions — but reproduced by methods that work on different principles, so not an artifact of one tool.</a:t>
+            </a:r>
+            <a:endParaRPr lang="en-US" sz="1000" b="0" u="none" strike="noStrike">
+              <a:solidFill>
+                <a:srgbClr val="000000"/>
+              </a:solidFill>
+              <a:effectLst/>
+              <a:uFillTx/>
+              <a:latin typeface="Arial"/>
+            </a:endParaRPr>
+          </a:p>
+        </p:txBody>
+      </p:sp>
+      <p:sp>
+        <p:nvSpPr>
+          <p:cNvPr id="25" name="Text 17"/>
+          <p:cNvSpPr/>
+          <p:nvPr/>
+        </p:nvSpPr>
+        <p:spPr>
+          <a:xfrm>
+            <a:off x="8183880" y="3328560"/>
+            <a:ext cx="3657240" cy="2285640"/>
+          </a:xfrm>
+          <a:prstGeom prst="roundRect">
+            <a:avLst>
+              <a:gd name="adj" fmla="val 2000"/>
+            </a:avLst>
+          </a:prstGeom>
+          <a:solidFill>
+            <a:srgbClr val="FBEFD6"/>
+          </a:solidFill>
+          <a:ln w="19050">
+            <a:solidFill>
+              <a:srgbClr val="D19A2E"/>
+            </a:solidFill>
+            <a:round/>
+          </a:ln>
+        </p:spPr>
+        <p:style>
+          <a:lnRef idx="0"/>
+          <a:fillRef idx="0"/>
+          <a:effectRef idx="0"/>
+          <a:fontRef idx="minor"/>
+        </p:style>
+        <p:txBody>
+          <a:bodyPr lIns="152280" tIns="152280" rIns="152280" bIns="152280" anchor="t">
+            <a:noAutofit/>
+          </a:bodyPr>
+          <a:p>
+            <a:r>
+              <a:rPr lang="en-US" sz="1200" b="1" u="none" strike="noStrike">
+                <a:solidFill>
+                  <a:srgbClr val="B26A00"/>
+                </a:solidFill>
+                <a:effectLst/>
+                <a:uFillTx/>
+                <a:latin typeface="Calibri"/>
+                <a:ea typeface="Calibri"/>
+              </a:rPr>
+              <a:t>3 · Hypotheses — still to be tested</a:t>
+            </a:r>
+            <a:endParaRPr lang="en-US" sz="1200" b="0" u="none" strike="noStrike">
+              <a:solidFill>
+                <a:srgbClr val="000000"/>
+              </a:solidFill>
+              <a:effectLst/>
+              <a:uFillTx/>
+              <a:latin typeface="Arial"/>
+            </a:endParaRPr>
+          </a:p>
+          <a:p>
+            <a:endParaRPr lang="en-US" sz="1200" b="0" u="none" strike="noStrike">
+              <a:solidFill>
+                <a:srgbClr val="000000"/>
+              </a:solidFill>
+              <a:effectLst/>
+              <a:uFillTx/>
+              <a:latin typeface="Arial"/>
+            </a:endParaRPr>
+          </a:p>
+          <a:p>
+            <a:pPr defTabSz="914400">
+              <a:lnSpc>
+                <a:spcPct val="102000"/>
+              </a:lnSpc>
+              <a:tabLst>
+                <a:tab pos="0" algn="l"/>
+              </a:tabLst>
+            </a:pPr>
+            <a:endParaRPr lang="en-US" sz="1200" b="0" u="none" strike="noStrike">
+              <a:solidFill>
+                <a:srgbClr val="000000"/>
+              </a:solidFill>
+              <a:effectLst/>
+              <a:uFillTx/>
+              <a:latin typeface="Arial"/>
+            </a:endParaRPr>
+          </a:p>
+          <a:p>
+            <a:pPr defTabSz="914400">
+              <a:lnSpc>
+                <a:spcPct val="102000"/>
+              </a:lnSpc>
+              <a:tabLst>
+                <a:tab pos="0" algn="l"/>
+              </a:tabLst>
+            </a:pPr>
+            <a:r>
+              <a:rPr lang="en-US" sz="1050" b="0" u="none" strike="noStrike">
+                <a:solidFill>
+                  <a:srgbClr val="2C3E50"/>
+                </a:solidFill>
+                <a:effectLst/>
+                <a:uFillTx/>
+                <a:latin typeface="Calibri"/>
+                <a:ea typeface="Calibri"/>
+              </a:rPr>
+              <a:t>The two candidate SPOP degrons (122–126, 155–159), the MAPK docking motif (77–84) and the PLK1 site (201–207).</a:t>
+            </a:r>
+            <a:endParaRPr lang="en-US" sz="1050" b="0" u="none" strike="noStrike">
+              <a:solidFill>
+                <a:srgbClr val="000000"/>
+              </a:solidFill>
+              <a:effectLst/>
+              <a:uFillTx/>
+              <a:latin typeface="Arial"/>
+            </a:endParaRPr>
+          </a:p>
+          <a:p>
+            <a:pPr defTabSz="914400">
+              <a:lnSpc>
+                <a:spcPct val="102000"/>
+              </a:lnSpc>
+              <a:tabLst>
+                <a:tab pos="0" algn="l"/>
+              </a:tabLst>
+            </a:pPr>
+            <a:endParaRPr lang="en-US" sz="1050" b="0" u="none" strike="noStrike">
+              <a:solidFill>
+                <a:srgbClr val="000000"/>
+              </a:solidFill>
+              <a:effectLst/>
+              <a:uFillTx/>
+              <a:latin typeface="Arial"/>
+            </a:endParaRPr>
+          </a:p>
+          <a:p>
+            <a:pPr defTabSz="914400">
+              <a:lnSpc>
+                <a:spcPct val="102000"/>
+              </a:lnSpc>
+              <a:tabLst>
+                <a:tab pos="0" algn="l"/>
+              </a:tabLst>
+            </a:pPr>
+            <a:r>
+              <a:rPr lang="en-US" sz="1000" b="0" i="1" u="none" strike="noStrike">
+                <a:solidFill>
+                  <a:srgbClr val="5A6B7B"/>
+                </a:solidFill>
+                <a:effectLst/>
+                <a:uFillTx/>
+                <a:latin typeface="Calibri"/>
+                <a:ea typeface="Calibri"/>
+              </a:rPr>
+              <a:t>Sequence-based predictions with no experimental validation in Sororin. I label these “candidate” throughout.</a:t>
+            </a:r>
+            <a:endParaRPr lang="en-US" sz="1000" b="0" u="none" strike="noStrike">
+              <a:solidFill>
+                <a:srgbClr val="000000"/>
+              </a:solidFill>
+              <a:effectLst/>
+              <a:uFillTx/>
+              <a:latin typeface="Arial"/>
+            </a:endParaRPr>
+          </a:p>
+        </p:txBody>
+      </p:sp>
+      <p:sp>
+        <p:nvSpPr>
+          <p:cNvPr id="26" name="Text 18"/>
+          <p:cNvSpPr/>
+          <p:nvPr/>
+        </p:nvSpPr>
+        <p:spPr>
+          <a:xfrm>
+            <a:off x="320040" y="5779080"/>
+            <a:ext cx="11548440" cy="566640"/>
+          </a:xfrm>
+          <a:prstGeom prst="roundRect">
+            <a:avLst>
+              <a:gd name="adj" fmla="val 8065"/>
+            </a:avLst>
+          </a:prstGeom>
+          <a:solidFill>
+            <a:srgbClr val="DCEFDD"/>
+          </a:solidFill>
+          <a:ln w="17780">
+            <a:solidFill>
+              <a:srgbClr val="1A7A34"/>
+            </a:solidFill>
+            <a:round/>
+          </a:ln>
+        </p:spPr>
+        <p:style>
+          <a:lnRef idx="0"/>
+          <a:fillRef idx="0"/>
+          <a:effectRef idx="0"/>
+          <a:fontRef idx="minor"/>
+        </p:style>
+        <p:txBody>
+          <a:bodyPr lIns="90000" tIns="45000" rIns="90000" bIns="45000" anchor="ctr">
+            <a:noAutofit/>
+          </a:bodyPr>
+          <a:p>
+            <a:pPr algn="ctr" defTabSz="914400">
+              <a:lnSpc>
+                <a:spcPct val="100000"/>
+              </a:lnSpc>
+              <a:tabLst>
+                <a:tab pos="0" algn="l"/>
+              </a:tabLst>
+            </a:pPr>
+            <a:r>
+              <a:rPr lang="en-US" sz="1100" b="1" u="none" strike="noStrike">
+                <a:solidFill>
+                  <a:srgbClr val="1A7A34"/>
+                </a:solidFill>
+                <a:effectLst/>
+                <a:uFillTx/>
+                <a:latin typeface="Calibri"/>
+                <a:ea typeface="Calibri"/>
+              </a:rPr>
+              <a:t>The one motif that is both predicted and already validated is the KEN box</a:t>
+            </a:r>
+            <a:r>
+              <a:rPr lang="en-US" sz="1100" b="0" u="none" strike="noStrike">
+                <a:solidFill>
+                  <a:srgbClr val="2C3E50"/>
+                </a:solidFill>
+                <a:effectLst/>
+                <a:uFillTx/>
+                <a:latin typeface="Calibri"/>
+                <a:ea typeface="Calibri"/>
+              </a:rPr>
+              <a:t> — ELM re-found it independently, which is what gives confidence in the rest of the screen.</a:t>
+            </a:r>
+            <a:endParaRPr lang="en-US" sz="1100" b="0" u="none" strike="noStrike">
+              <a:solidFill>
+                <a:srgbClr val="000000"/>
+              </a:solidFill>
+              <a:effectLst/>
+              <a:uFillTx/>
+              <a:latin typeface="Arial"/>
+            </a:endParaRPr>
+          </a:p>
+        </p:txBody>
+      </p:sp>
+    </p:spTree>
+  </p:cSld>
+  <mc:AlternateContent>
+    <mc:Choice Requires="p14">
+      <p:transition spd="slow" p14:dur="2000"/>
+    </mc:Choice>
+    <mc:Fallback>
+      <p:transition spd="slow"/>
+    </mc:Fallback>
+  </mc:AlternateContent>
+</p:sld>
+</file>
+
 <file path=ppt/slides/slide2.xml><?xml version="1.0" encoding="utf-8"?>
 <p:sld xmlns:a="http://schemas.openxmlformats.org/drawingml/2006/main" xmlns:r="http://schemas.openxmlformats.org/officeDocument/2006/relationships" xmlns:p="http://schemas.openxmlformats.org/presentationml/2006/main">
   <p:cSld>

--- a/Sororin_mechanism_flowchart.pptx
+++ b/Sororin_mechanism_flowchart.pptx
@@ -5,14 +5,13 @@
     <p:sldMasterId id="2147483648" r:id="rId1"/>
   </p:sldMasterIdLst>
   <p:notesMasterIdLst>
-    <p:notesMasterId r:id="rId18"/>
+    <p:notesMasterId r:id="rId19"/>
   </p:notesMasterIdLst>
   <p:sldIdLst>
     <p:sldId id="256" r:id="rId2"/>
     <p:sldId id="257" r:id="rId3"/>
     <p:sldId id="258" r:id="rId4"/>
     <p:sldId id="259" r:id="rId5"/>
-    <p:sldId id="272" r:id="rId23"/>
     <p:sldId id="261" r:id="rId6"/>
     <p:sldId id="264" r:id="rId7"/>
     <p:sldId id="260" r:id="rId8"/>
@@ -25,6 +24,7 @@
     <p:sldId id="271" r:id="rId15"/>
     <p:sldId id="262" r:id="rId16"/>
     <p:sldId id="263" r:id="rId17"/>
+    <p:sldId id="272" r:id="rId18"/>
   </p:sldIdLst>
   <p:sldSz cx="12188825" cy="6858000"/>
   <p:notesSz cx="6858000" cy="12188825"/>
@@ -19624,7 +19624,7 @@
 </file>
 
 <file path=ppt/slides/slide17.xml><?xml version="1.0" encoding="utf-8"?>
-<p:sld xmlns:a="http://schemas.openxmlformats.org/drawingml/2006/main" xmlns:p="http://schemas.openxmlformats.org/presentationml/2006/main" xmlns:r="http://schemas.openxmlformats.org/officeDocument/2006/relationships" xmlns:p14="http://schemas.microsoft.com/office/powerpoint/2010/main" xmlns:p15="http://schemas.microsoft.com/office/powerpoint/2012/main" xmlns:mc="http://schemas.openxmlformats.org/markup-compatibility/2006">
+<p:sld xmlns:a="http://schemas.openxmlformats.org/drawingml/2006/main" xmlns:r="http://schemas.openxmlformats.org/officeDocument/2006/relationships" xmlns:p="http://schemas.openxmlformats.org/presentationml/2006/main">
   <p:cSld>
     <p:spTree>
       <p:nvGrpSpPr>
@@ -19660,15 +19660,22 @@
           </a:ln>
         </p:spPr>
         <p:style>
-          <a:lnRef idx="0"/>
-          <a:fillRef idx="0"/>
-          <a:effectRef idx="0"/>
+          <a:lnRef idx="0">
+            <a:scrgbClr r="0" g="0" b="0"/>
+          </a:lnRef>
+          <a:fillRef idx="0">
+            <a:scrgbClr r="0" g="0" b="0"/>
+          </a:fillRef>
+          <a:effectRef idx="0">
+            <a:scrgbClr r="0" g="0" b="0"/>
+          </a:effectRef>
           <a:fontRef idx="minor"/>
         </p:style>
         <p:txBody>
           <a:bodyPr lIns="90000" tIns="45000" rIns="90000" bIns="45000" anchor="ctr">
             <a:noAutofit/>
           </a:bodyPr>
+          <a:lstStyle/>
           <a:p>
             <a:pPr algn="ctr" defTabSz="914400">
               <a:lnSpc>
@@ -19725,15 +19732,22 @@
           </a:ln>
         </p:spPr>
         <p:style>
-          <a:lnRef idx="0"/>
-          <a:fillRef idx="0"/>
-          <a:effectRef idx="0"/>
+          <a:lnRef idx="0">
+            <a:scrgbClr r="0" g="0" b="0"/>
+          </a:lnRef>
+          <a:fillRef idx="0">
+            <a:scrgbClr r="0" g="0" b="0"/>
+          </a:fillRef>
+          <a:effectRef idx="0">
+            <a:scrgbClr r="0" g="0" b="0"/>
+          </a:effectRef>
           <a:fontRef idx="minor"/>
         </p:style>
         <p:txBody>
           <a:bodyPr lIns="90000" tIns="45000" rIns="90000" bIns="45000" anchor="ctr">
             <a:noAutofit/>
           </a:bodyPr>
+          <a:lstStyle/>
           <a:p>
             <a:pPr algn="ctr" defTabSz="914400">
               <a:lnSpc>
@@ -19858,15 +19872,22 @@
           </a:ln>
         </p:spPr>
         <p:style>
-          <a:lnRef idx="0"/>
-          <a:fillRef idx="0"/>
-          <a:effectRef idx="0"/>
+          <a:lnRef idx="0">
+            <a:scrgbClr r="0" g="0" b="0"/>
+          </a:lnRef>
+          <a:fillRef idx="0">
+            <a:scrgbClr r="0" g="0" b="0"/>
+          </a:fillRef>
+          <a:effectRef idx="0">
+            <a:scrgbClr r="0" g="0" b="0"/>
+          </a:effectRef>
           <a:fontRef idx="minor"/>
         </p:style>
         <p:txBody>
           <a:bodyPr lIns="90000" tIns="45000" rIns="90000" bIns="45000" anchor="ctr">
             <a:noAutofit/>
           </a:bodyPr>
+          <a:lstStyle/>
           <a:p>
             <a:pPr defTabSz="914400">
               <a:lnSpc>
@@ -19926,15 +19947,22 @@
           </a:ln>
         </p:spPr>
         <p:style>
-          <a:lnRef idx="0"/>
-          <a:fillRef idx="0"/>
-          <a:effectRef idx="0"/>
+          <a:lnRef idx="0">
+            <a:scrgbClr r="0" g="0" b="0"/>
+          </a:lnRef>
+          <a:fillRef idx="0">
+            <a:scrgbClr r="0" g="0" b="0"/>
+          </a:fillRef>
+          <a:effectRef idx="0">
+            <a:scrgbClr r="0" g="0" b="0"/>
+          </a:effectRef>
           <a:fontRef idx="minor"/>
         </p:style>
         <p:txBody>
           <a:bodyPr lIns="63360" tIns="63360" rIns="63360" bIns="63360" anchor="ctr">
             <a:noAutofit/>
           </a:bodyPr>
+          <a:lstStyle/>
           <a:p>
             <a:r>
               <a:rPr lang="en-US" sz="1050" b="1" u="none" strike="noStrike">
@@ -20064,15 +20092,22 @@
           </a:ln>
         </p:spPr>
         <p:style>
-          <a:lnRef idx="0"/>
-          <a:fillRef idx="0"/>
-          <a:effectRef idx="0"/>
+          <a:lnRef idx="0">
+            <a:scrgbClr r="0" g="0" b="0"/>
+          </a:lnRef>
+          <a:fillRef idx="0">
+            <a:scrgbClr r="0" g="0" b="0"/>
+          </a:fillRef>
+          <a:effectRef idx="0">
+            <a:scrgbClr r="0" g="0" b="0"/>
+          </a:effectRef>
           <a:fontRef idx="minor"/>
         </p:style>
         <p:txBody>
           <a:bodyPr lIns="63360" tIns="63360" rIns="63360" bIns="63360" anchor="ctr">
             <a:noAutofit/>
           </a:bodyPr>
+          <a:lstStyle/>
           <a:p>
             <a:r>
               <a:rPr lang="en-US" sz="1050" b="1" u="none" strike="noStrike">
@@ -20224,15 +20259,22 @@
           </a:ln>
         </p:spPr>
         <p:style>
-          <a:lnRef idx="0"/>
-          <a:fillRef idx="0"/>
-          <a:effectRef idx="0"/>
+          <a:lnRef idx="0">
+            <a:scrgbClr r="0" g="0" b="0"/>
+          </a:lnRef>
+          <a:fillRef idx="0">
+            <a:scrgbClr r="0" g="0" b="0"/>
+          </a:fillRef>
+          <a:effectRef idx="0">
+            <a:scrgbClr r="0" g="0" b="0"/>
+          </a:effectRef>
           <a:fontRef idx="minor"/>
         </p:style>
         <p:txBody>
           <a:bodyPr lIns="63360" tIns="63360" rIns="63360" bIns="63360" anchor="ctr">
             <a:noAutofit/>
           </a:bodyPr>
+          <a:lstStyle/>
           <a:p>
             <a:r>
               <a:rPr lang="en-US" sz="1050" b="1" u="none" strike="noStrike">
@@ -20384,15 +20426,22 @@
           </a:ln>
         </p:spPr>
         <p:style>
-          <a:lnRef idx="0"/>
-          <a:fillRef idx="0"/>
-          <a:effectRef idx="0"/>
+          <a:lnRef idx="0">
+            <a:scrgbClr r="0" g="0" b="0"/>
+          </a:lnRef>
+          <a:fillRef idx="0">
+            <a:scrgbClr r="0" g="0" b="0"/>
+          </a:fillRef>
+          <a:effectRef idx="0">
+            <a:scrgbClr r="0" g="0" b="0"/>
+          </a:effectRef>
           <a:fontRef idx="minor"/>
         </p:style>
         <p:txBody>
           <a:bodyPr lIns="63360" tIns="63360" rIns="63360" bIns="63360" anchor="ctr">
             <a:noAutofit/>
           </a:bodyPr>
+          <a:lstStyle/>
           <a:p>
             <a:r>
               <a:rPr lang="en-US" sz="1050" b="1" u="none" strike="noStrike">
@@ -20522,15 +20571,22 @@
           </a:ln>
         </p:spPr>
         <p:style>
-          <a:lnRef idx="0"/>
-          <a:fillRef idx="0"/>
-          <a:effectRef idx="0"/>
+          <a:lnRef idx="0">
+            <a:scrgbClr r="0" g="0" b="0"/>
+          </a:lnRef>
+          <a:fillRef idx="0">
+            <a:scrgbClr r="0" g="0" b="0"/>
+          </a:fillRef>
+          <a:effectRef idx="0">
+            <a:scrgbClr r="0" g="0" b="0"/>
+          </a:effectRef>
           <a:fontRef idx="minor"/>
         </p:style>
         <p:txBody>
           <a:bodyPr lIns="63360" tIns="63360" rIns="63360" bIns="63360" anchor="ctr">
             <a:noAutofit/>
           </a:bodyPr>
+          <a:lstStyle/>
           <a:p>
             <a:r>
               <a:rPr lang="en-US" sz="1050" b="1" u="none" strike="noStrike">
@@ -20682,15 +20738,22 @@
           </a:ln>
         </p:spPr>
         <p:style>
-          <a:lnRef idx="0"/>
-          <a:fillRef idx="0"/>
-          <a:effectRef idx="0"/>
+          <a:lnRef idx="0">
+            <a:scrgbClr r="0" g="0" b="0"/>
+          </a:lnRef>
+          <a:fillRef idx="0">
+            <a:scrgbClr r="0" g="0" b="0"/>
+          </a:fillRef>
+          <a:effectRef idx="0">
+            <a:scrgbClr r="0" g="0" b="0"/>
+          </a:effectRef>
           <a:fontRef idx="minor"/>
         </p:style>
         <p:txBody>
           <a:bodyPr lIns="63360" tIns="63360" rIns="63360" bIns="63360" anchor="ctr">
             <a:noAutofit/>
           </a:bodyPr>
+          <a:lstStyle/>
           <a:p>
             <a:r>
               <a:rPr lang="en-US" sz="1050" b="1" u="none" strike="noStrike">
@@ -20813,15 +20876,22 @@
           </a:ln>
         </p:spPr>
         <p:style>
-          <a:lnRef idx="0"/>
-          <a:fillRef idx="0"/>
-          <a:effectRef idx="0"/>
+          <a:lnRef idx="0">
+            <a:scrgbClr r="0" g="0" b="0"/>
+          </a:lnRef>
+          <a:fillRef idx="0">
+            <a:scrgbClr r="0" g="0" b="0"/>
+          </a:fillRef>
+          <a:effectRef idx="0">
+            <a:scrgbClr r="0" g="0" b="0"/>
+          </a:effectRef>
           <a:fontRef idx="minor"/>
         </p:style>
         <p:txBody>
           <a:bodyPr lIns="90000" tIns="45000" rIns="90000" bIns="45000" anchor="ctr">
             <a:noAutofit/>
           </a:bodyPr>
+          <a:lstStyle/>
           <a:p>
             <a:pPr algn="ctr" defTabSz="914400">
               <a:lnSpc>
@@ -20874,15 +20944,22 @@
           </a:ln>
         </p:spPr>
         <p:style>
-          <a:lnRef idx="0"/>
-          <a:fillRef idx="0"/>
-          <a:effectRef idx="0"/>
+          <a:lnRef idx="0">
+            <a:scrgbClr r="0" g="0" b="0"/>
+          </a:lnRef>
+          <a:fillRef idx="0">
+            <a:scrgbClr r="0" g="0" b="0"/>
+          </a:fillRef>
+          <a:effectRef idx="0">
+            <a:scrgbClr r="0" g="0" b="0"/>
+          </a:effectRef>
           <a:fontRef idx="minor"/>
         </p:style>
         <p:txBody>
           <a:bodyPr lIns="90000" tIns="45000" rIns="90000" bIns="45000" anchor="ctr">
             <a:noAutofit/>
           </a:bodyPr>
+          <a:lstStyle/>
           <a:p>
             <a:pPr algn="ctr" defTabSz="914400">
               <a:lnSpc>
@@ -20935,15 +21012,22 @@
           </a:ln>
         </p:spPr>
         <p:style>
-          <a:lnRef idx="0"/>
-          <a:fillRef idx="0"/>
-          <a:effectRef idx="0"/>
+          <a:lnRef idx="0">
+            <a:scrgbClr r="0" g="0" b="0"/>
+          </a:lnRef>
+          <a:fillRef idx="0">
+            <a:scrgbClr r="0" g="0" b="0"/>
+          </a:fillRef>
+          <a:effectRef idx="0">
+            <a:scrgbClr r="0" g="0" b="0"/>
+          </a:effectRef>
           <a:fontRef idx="minor"/>
         </p:style>
         <p:txBody>
           <a:bodyPr lIns="90000" tIns="45000" rIns="90000" bIns="45000" anchor="ctr">
             <a:noAutofit/>
           </a:bodyPr>
+          <a:lstStyle/>
           <a:p>
             <a:pPr algn="ctr" defTabSz="914400">
               <a:lnSpc>
@@ -20996,15 +21080,22 @@
           </a:ln>
         </p:spPr>
         <p:style>
-          <a:lnRef idx="0"/>
-          <a:fillRef idx="0"/>
-          <a:effectRef idx="0"/>
+          <a:lnRef idx="0">
+            <a:scrgbClr r="0" g="0" b="0"/>
+          </a:lnRef>
+          <a:fillRef idx="0">
+            <a:scrgbClr r="0" g="0" b="0"/>
+          </a:fillRef>
+          <a:effectRef idx="0">
+            <a:scrgbClr r="0" g="0" b="0"/>
+          </a:effectRef>
           <a:fontRef idx="minor"/>
         </p:style>
         <p:txBody>
           <a:bodyPr lIns="90000" tIns="45000" rIns="90000" bIns="45000" anchor="ctr">
             <a:noAutofit/>
           </a:bodyPr>
+          <a:lstStyle/>
           <a:p>
             <a:pPr algn="ctr" defTabSz="914400">
               <a:lnSpc>
@@ -21057,15 +21148,22 @@
           </a:ln>
         </p:spPr>
         <p:style>
-          <a:lnRef idx="0"/>
-          <a:fillRef idx="0"/>
-          <a:effectRef idx="0"/>
+          <a:lnRef idx="0">
+            <a:scrgbClr r="0" g="0" b="0"/>
+          </a:lnRef>
+          <a:fillRef idx="0">
+            <a:scrgbClr r="0" g="0" b="0"/>
+          </a:fillRef>
+          <a:effectRef idx="0">
+            <a:scrgbClr r="0" g="0" b="0"/>
+          </a:effectRef>
           <a:fontRef idx="minor"/>
         </p:style>
         <p:txBody>
           <a:bodyPr lIns="90000" tIns="45000" rIns="90000" bIns="45000" anchor="ctr">
             <a:noAutofit/>
           </a:bodyPr>
+          <a:lstStyle/>
           <a:p>
             <a:pPr algn="ctr" defTabSz="914400">
               <a:lnSpc>
@@ -21118,15 +21216,22 @@
           </a:ln>
         </p:spPr>
         <p:style>
-          <a:lnRef idx="0"/>
-          <a:fillRef idx="0"/>
-          <a:effectRef idx="0"/>
+          <a:lnRef idx="0">
+            <a:scrgbClr r="0" g="0" b="0"/>
+          </a:lnRef>
+          <a:fillRef idx="0">
+            <a:scrgbClr r="0" g="0" b="0"/>
+          </a:fillRef>
+          <a:effectRef idx="0">
+            <a:scrgbClr r="0" g="0" b="0"/>
+          </a:effectRef>
           <a:fontRef idx="minor"/>
         </p:style>
         <p:txBody>
           <a:bodyPr lIns="90000" tIns="45000" rIns="90000" bIns="45000" anchor="ctr">
             <a:noAutofit/>
           </a:bodyPr>
+          <a:lstStyle/>
           <a:p>
             <a:pPr defTabSz="914400">
               <a:lnSpc>
@@ -21186,15 +21291,22 @@
           </a:ln>
         </p:spPr>
         <p:style>
-          <a:lnRef idx="0"/>
-          <a:fillRef idx="0"/>
-          <a:effectRef idx="0"/>
+          <a:lnRef idx="0">
+            <a:scrgbClr r="0" g="0" b="0"/>
+          </a:lnRef>
+          <a:fillRef idx="0">
+            <a:scrgbClr r="0" g="0" b="0"/>
+          </a:fillRef>
+          <a:effectRef idx="0">
+            <a:scrgbClr r="0" g="0" b="0"/>
+          </a:effectRef>
           <a:fontRef idx="minor"/>
         </p:style>
         <p:txBody>
           <a:bodyPr lIns="152280" tIns="152280" rIns="152280" bIns="152280" anchor="t">
             <a:noAutofit/>
           </a:bodyPr>
+          <a:lstStyle/>
           <a:p>
             <a:r>
               <a:rPr lang="en-US" sz="1200" b="1" u="none" strike="noStrike">
@@ -21352,15 +21464,22 @@
           </a:ln>
         </p:spPr>
         <p:style>
-          <a:lnRef idx="0"/>
-          <a:fillRef idx="0"/>
-          <a:effectRef idx="0"/>
+          <a:lnRef idx="0">
+            <a:scrgbClr r="0" g="0" b="0"/>
+          </a:lnRef>
+          <a:fillRef idx="0">
+            <a:scrgbClr r="0" g="0" b="0"/>
+          </a:fillRef>
+          <a:effectRef idx="0">
+            <a:scrgbClr r="0" g="0" b="0"/>
+          </a:effectRef>
           <a:fontRef idx="minor"/>
         </p:style>
         <p:txBody>
           <a:bodyPr lIns="152280" tIns="152280" rIns="152280" bIns="152280" anchor="t">
             <a:noAutofit/>
           </a:bodyPr>
+          <a:lstStyle/>
           <a:p>
             <a:r>
               <a:rPr lang="en-US" sz="1200" b="1" u="none" strike="noStrike">
@@ -21518,15 +21637,22 @@
           </a:ln>
         </p:spPr>
         <p:style>
-          <a:lnRef idx="0"/>
-          <a:fillRef idx="0"/>
-          <a:effectRef idx="0"/>
+          <a:lnRef idx="0">
+            <a:scrgbClr r="0" g="0" b="0"/>
+          </a:lnRef>
+          <a:fillRef idx="0">
+            <a:scrgbClr r="0" g="0" b="0"/>
+          </a:fillRef>
+          <a:effectRef idx="0">
+            <a:scrgbClr r="0" g="0" b="0"/>
+          </a:effectRef>
           <a:fontRef idx="minor"/>
         </p:style>
         <p:txBody>
           <a:bodyPr lIns="152280" tIns="152280" rIns="152280" bIns="152280" anchor="t">
             <a:noAutofit/>
           </a:bodyPr>
+          <a:lstStyle/>
           <a:p>
             <a:r>
               <a:rPr lang="en-US" sz="1200" b="1" u="none" strike="noStrike">
@@ -21684,15 +21810,22 @@
           </a:ln>
         </p:spPr>
         <p:style>
-          <a:lnRef idx="0"/>
-          <a:fillRef idx="0"/>
-          <a:effectRef idx="0"/>
+          <a:lnRef idx="0">
+            <a:scrgbClr r="0" g="0" b="0"/>
+          </a:lnRef>
+          <a:fillRef idx="0">
+            <a:scrgbClr r="0" g="0" b="0"/>
+          </a:fillRef>
+          <a:effectRef idx="0">
+            <a:scrgbClr r="0" g="0" b="0"/>
+          </a:effectRef>
           <a:fontRef idx="minor"/>
         </p:style>
         <p:txBody>
           <a:bodyPr lIns="90000" tIns="45000" rIns="90000" bIns="45000" anchor="ctr">
             <a:noAutofit/>
           </a:bodyPr>
+          <a:lstStyle/>
           <a:p>
             <a:pPr algn="ctr" defTabSz="914400">
               <a:lnSpc>
@@ -21739,14 +21872,9 @@
       </p:sp>
     </p:spTree>
   </p:cSld>
-  <mc:AlternateContent>
-    <mc:Choice Requires="p14">
-      <p:transition spd="slow" p14:dur="2000"/>
-    </mc:Choice>
-    <mc:Fallback>
-      <p:transition spd="slow"/>
-    </mc:Fallback>
-  </mc:AlternateContent>
+  <p:clrMapOvr>
+    <a:masterClrMapping/>
+  </p:clrMapOvr>
 </p:sld>
 </file>
 

--- a/Sororin_mechanism_flowchart.pptx
+++ b/Sororin_mechanism_flowchart.pptx
@@ -21979,7 +21979,7 @@
         </p:nvSpPr>
         <p:spPr>
           <a:xfrm>
-            <a:off x="1455102" y="5214724"/>
+            <a:off x="4631732" y="5077073"/>
             <a:ext cx="1462680" cy="548280"/>
           </a:xfrm>
           <a:prstGeom prst="rect">
@@ -22083,8 +22083,8 @@
         </p:nvGrpSpPr>
         <p:grpSpPr>
           <a:xfrm>
-            <a:off x="683513" y="3010368"/>
-            <a:ext cx="2080678" cy="539170"/>
+            <a:off x="4624156" y="2384365"/>
+            <a:ext cx="1709436" cy="539170"/>
             <a:chOff x="364666" y="3017700"/>
             <a:chExt cx="2080678" cy="539170"/>
           </a:xfrm>
@@ -22244,7 +22244,7 @@
         </p:nvSpPr>
         <p:spPr>
           <a:xfrm>
-            <a:off x="3535182" y="3491658"/>
+            <a:off x="6711812" y="3354007"/>
             <a:ext cx="1554120" cy="273960"/>
           </a:xfrm>
           <a:prstGeom prst="rect">
@@ -22312,7 +22312,7 @@
         </p:nvSpPr>
         <p:spPr>
           <a:xfrm>
-            <a:off x="4533638" y="3002044"/>
+            <a:off x="7710268" y="2864393"/>
             <a:ext cx="1737000" cy="456840"/>
           </a:xfrm>
           <a:prstGeom prst="rect">
@@ -22380,7 +22380,7 @@
         </p:nvSpPr>
         <p:spPr>
           <a:xfrm flipV="1">
-            <a:off x="4487918" y="2316244"/>
+            <a:off x="7664548" y="2178593"/>
             <a:ext cx="1737360" cy="914400"/>
           </a:xfrm>
           <a:prstGeom prst="line">
@@ -22431,7 +22431,7 @@
         </p:nvSpPr>
         <p:spPr>
           <a:xfrm>
-            <a:off x="4487918" y="3230644"/>
+            <a:off x="7664548" y="3092993"/>
             <a:ext cx="1737360" cy="914400"/>
           </a:xfrm>
           <a:prstGeom prst="line">
@@ -22482,8 +22482,8 @@
         </p:nvSpPr>
         <p:spPr>
           <a:xfrm>
-            <a:off x="6362438" y="1676164"/>
-            <a:ext cx="4663080" cy="1371240"/>
+            <a:off x="9447268" y="1685494"/>
+            <a:ext cx="2322756" cy="1048466"/>
           </a:xfrm>
           <a:prstGeom prst="roundRect">
             <a:avLst>
@@ -22585,8 +22585,8 @@
         </p:nvSpPr>
         <p:spPr>
           <a:xfrm>
-            <a:off x="6362438" y="3459244"/>
-            <a:ext cx="4663080" cy="1371240"/>
+            <a:off x="9447268" y="3623798"/>
+            <a:ext cx="2322756" cy="1145400"/>
           </a:xfrm>
           <a:prstGeom prst="roundRect">
             <a:avLst>
@@ -22708,8 +22708,8 @@
         </p:nvSpPr>
         <p:spPr>
           <a:xfrm>
-            <a:off x="1097280" y="5989320"/>
-            <a:ext cx="10606680" cy="456840"/>
+            <a:off x="5458666" y="5773720"/>
+            <a:ext cx="5614532" cy="456840"/>
           </a:xfrm>
           <a:prstGeom prst="rect">
             <a:avLst/>
@@ -22782,7 +22782,7 @@
         </p:nvGrpSpPr>
         <p:grpSpPr>
           <a:xfrm>
-            <a:off x="2460582" y="1470004"/>
+            <a:off x="5637212" y="1332353"/>
             <a:ext cx="2215750" cy="3835980"/>
             <a:chOff x="2460582" y="1470004"/>
             <a:chExt cx="2215750" cy="3835980"/>
@@ -24311,6 +24311,68 @@
           </p:txBody>
         </p:sp>
       </p:grpSp>
+      <p:pic>
+        <p:nvPicPr>
+          <p:cNvPr id="41" name="Picture 40">
+            <a:extLst>
+              <a:ext uri="{FF2B5EF4-FFF2-40B4-BE49-F238E27FC236}">
+                <a16:creationId xmlns:a16="http://schemas.microsoft.com/office/drawing/2014/main" id="{DB4DA2CB-158D-27A3-FA9E-17E9EE37062D}"/>
+              </a:ext>
+            </a:extLst>
+          </p:cNvPr>
+          <p:cNvPicPr>
+            <a:picLocks noChangeAspect="1"/>
+          </p:cNvPicPr>
+          <p:nvPr/>
+        </p:nvPicPr>
+        <p:blipFill>
+          <a:blip r:embed="rId3">
+            <a:extLst>
+              <a:ext uri="{28A0092B-C50C-407E-A947-70E740481C1C}">
+                <a14:useLocalDpi xmlns:a14="http://schemas.microsoft.com/office/drawing/2010/main" val="0"/>
+              </a:ext>
+            </a:extLst>
+          </a:blip>
+          <a:stretch>
+            <a:fillRect/>
+          </a:stretch>
+        </p:blipFill>
+        <p:spPr>
+          <a:xfrm>
+            <a:off x="284137" y="1478760"/>
+            <a:ext cx="4311445" cy="3866614"/>
+          </a:xfrm>
+          <a:prstGeom prst="roundRect">
+            <a:avLst>
+              <a:gd name="adj" fmla="val 4167"/>
+            </a:avLst>
+          </a:prstGeom>
+          <a:solidFill>
+            <a:srgbClr val="FFFFFF"/>
+          </a:solidFill>
+          <a:ln w="76200" cap="sq">
+            <a:solidFill>
+              <a:srgbClr val="EAEAEA"/>
+            </a:solidFill>
+            <a:miter lim="800000"/>
+          </a:ln>
+          <a:effectLst>
+            <a:reflection blurRad="12700" stA="33000" endPos="28000" dist="5000" dir="5400000" sy="-100000" algn="bl" rotWithShape="0"/>
+          </a:effectLst>
+          <a:scene3d>
+            <a:camera prst="orthographicFront"/>
+            <a:lightRig rig="threePt" dir="t">
+              <a:rot lat="0" lon="0" rev="2700000"/>
+            </a:lightRig>
+          </a:scene3d>
+          <a:sp3d contourW="6350">
+            <a:bevelT h="38100"/>
+            <a:contourClr>
+              <a:srgbClr val="C0C0C0"/>
+            </a:contourClr>
+          </a:sp3d>
+        </p:spPr>
+      </p:pic>
     </p:spTree>
   </p:cSld>
   <p:clrMapOvr>
@@ -24349,7 +24411,7 @@
                             </p:stCondLst>
                             <p:childTnLst>
                               <p:par>
-                                <p:cTn id="5" presetID="10" presetClass="entr" presetSubtype="0" fill="hold" grpId="0" nodeType="clickEffect">
+                                <p:cTn id="5" presetID="10" presetClass="entr" presetSubtype="0" fill="hold" nodeType="clickEffect">
                                   <p:stCondLst>
                                     <p:cond delay="0"/>
                                   </p:stCondLst>
@@ -24362,7 +24424,7 @@
                                           </p:stCondLst>
                                         </p:cTn>
                                         <p:tgtEl>
-                                          <p:spTgt spid="15"/>
+                                          <p:spTgt spid="41"/>
                                         </p:tgtEl>
                                         <p:attrNameLst>
                                           <p:attrName>style.visibility</p:attrName>
@@ -24376,7 +24438,7 @@
                                       <p:cBhvr>
                                         <p:cTn id="7" dur="500"/>
                                         <p:tgtEl>
-                                          <p:spTgt spid="15"/>
+                                          <p:spTgt spid="41"/>
                                         </p:tgtEl>
                                       </p:cBhvr>
                                     </p:animEffect>
@@ -24869,7 +24931,6 @@
       </p:par>
     </p:tnLst>
     <p:bldLst>
-      <p:bldP spid="15" grpId="0"/>
       <p:bldP spid="20" grpId="0"/>
       <p:bldP spid="24" grpId="0"/>
       <p:bldP spid="25" grpId="0"/>
